--- a/fraud_ops_presentation_updated.pptx
+++ b/fraud_ops_presentation_updated.pptx
@@ -17,6 +17,7 @@
     <p:sldId id="265" r:id="rId16"/>
     <p:sldId id="266" r:id="rId17"/>
     <p:sldId id="267" r:id="rId18"/>
+    <p:sldId id="268" r:id="rId19"/>
   </p:sldIdLst>
   <p:sldSz cx="12188952" cy="6858000" type="screen4x3"/>
   <p:notesSz cx="6858000" cy="9144000"/>
@@ -3425,7 +3426,7 @@
         <p:spPr>
           <a:xfrm>
             <a:off x="0" y="0"/>
-            <a:ext cx="12188952" cy="6858000"/>
+            <a:ext cx="12188952" cy="960120"/>
           </a:xfrm>
           <a:prstGeom prst="rect">
             <a:avLst/>
@@ -3467,8 +3468,8 @@
         </p:nvSpPr>
         <p:spPr>
           <a:xfrm>
-            <a:off x="0" y="0"/>
-            <a:ext cx="228600" cy="6858000"/>
+            <a:off x="320040" y="118872"/>
+            <a:ext cx="1097280" cy="292608"/>
           </a:xfrm>
           <a:prstGeom prst="rect">
             <a:avLst/>
@@ -3504,20 +3505,88 @@
       </p:sp>
       <p:sp>
         <p:nvSpPr>
-          <p:cNvPr id="4" name="Rectangle 3"/>
+          <p:cNvPr id="4" name="TextBox 3"/>
+          <p:cNvSpPr txBox="1"/>
+          <p:nvPr/>
+        </p:nvSpPr>
+        <p:spPr>
+          <a:xfrm>
+            <a:off x="320040" y="118872"/>
+            <a:ext cx="1097280" cy="292608"/>
+          </a:xfrm>
+          <a:prstGeom prst="rect">
+            <a:avLst/>
+          </a:prstGeom>
+          <a:noFill/>
+        </p:spPr>
+        <p:txBody>
+          <a:bodyPr wrap="square">
+            <a:spAutoFit/>
+          </a:bodyPr>
+          <a:lstStyle/>
+          <a:p>
+            <a:pPr algn="ctr"/>
+            <a:r>
+              <a:rPr sz="900" b="1" i="0">
+                <a:solidFill>
+                  <a:srgbClr val="1A2440"/>
+                </a:solidFill>
+              </a:rPr>
+              <a:t>Q2</a:t>
+            </a:r>
+          </a:p>
+        </p:txBody>
+      </p:sp>
+      <p:sp>
+        <p:nvSpPr>
+          <p:cNvPr id="5" name="TextBox 4"/>
+          <p:cNvSpPr txBox="1"/>
+          <p:nvPr/>
+        </p:nvSpPr>
+        <p:spPr>
+          <a:xfrm>
+            <a:off x="1554480" y="73152"/>
+            <a:ext cx="10332720" cy="594360"/>
+          </a:xfrm>
+          <a:prstGeom prst="rect">
+            <a:avLst/>
+          </a:prstGeom>
+          <a:noFill/>
+        </p:spPr>
+        <p:txBody>
+          <a:bodyPr wrap="square">
+            <a:spAutoFit/>
+          </a:bodyPr>
+          <a:lstStyle/>
+          <a:p>
+            <a:pPr algn="l"/>
+            <a:r>
+              <a:rPr sz="2400" b="1" i="0">
+                <a:solidFill>
+                  <a:srgbClr val="FFFFFF"/>
+                </a:solidFill>
+              </a:rPr>
+              <a:t>The Detection Engine — 4 Rules, Automatically Applied to Every Provider</a:t>
+            </a:r>
+          </a:p>
+        </p:txBody>
+      </p:sp>
+      <p:sp>
+        <p:nvSpPr>
+          <p:cNvPr id="6" name="Rectangle 5"/>
           <p:cNvSpPr/>
           <p:nvPr/>
         </p:nvSpPr>
         <p:spPr>
           <a:xfrm>
-            <a:off x="0" y="5532120"/>
-            <a:ext cx="12188952" cy="1325880"/>
+            <a:off x="0" y="960120"/>
+            <a:ext cx="12188952" cy="347472"/>
           </a:xfrm>
           <a:prstGeom prst="rect">
             <a:avLst/>
           </a:prstGeom>
           <a:solidFill>
-            <a:srgbClr val="0D1730"/>
+            <a:srgbClr val="F5F5F5"/>
           </a:solidFill>
           <a:ln>
             <a:noFill/>
@@ -3547,103 +3616,34 @@
       </p:sp>
       <p:sp>
         <p:nvSpPr>
-          <p:cNvPr id="5" name="TextBox 4"/>
-          <p:cNvSpPr txBox="1"/>
-          <p:nvPr/>
-        </p:nvSpPr>
-        <p:spPr>
-          <a:xfrm>
-            <a:off x="502920" y="640080"/>
-            <a:ext cx="9144000" cy="475488"/>
-          </a:xfrm>
-          <a:prstGeom prst="rect">
-            <a:avLst/>
-          </a:prstGeom>
-          <a:noFill/>
-        </p:spPr>
-        <p:txBody>
-          <a:bodyPr wrap="square">
-            <a:spAutoFit/>
-          </a:bodyPr>
-          <a:lstStyle/>
-          <a:p>
-            <a:pPr algn="l"/>
-            <a:r>
-              <a:rPr sz="2000" b="0" i="1">
-                <a:solidFill>
-                  <a:srgbClr val="CCCCCC"/>
-                </a:solidFill>
-              </a:rPr>
-              <a:t>Beyond the analysis —</a:t>
-            </a:r>
-          </a:p>
-        </p:txBody>
-      </p:sp>
-      <p:sp>
-        <p:nvSpPr>
-          <p:cNvPr id="6" name="TextBox 5"/>
-          <p:cNvSpPr txBox="1"/>
-          <p:nvPr/>
-        </p:nvSpPr>
-        <p:spPr>
-          <a:xfrm>
-            <a:off x="502920" y="1188720"/>
-            <a:ext cx="10515600" cy="1463040"/>
-          </a:xfrm>
-          <a:prstGeom prst="rect">
-            <a:avLst/>
-          </a:prstGeom>
-          <a:noFill/>
-        </p:spPr>
-        <p:txBody>
-          <a:bodyPr wrap="square">
-            <a:spAutoFit/>
-          </a:bodyPr>
-          <a:lstStyle/>
-          <a:p>
-            <a:pPr algn="l"/>
-            <a:r>
-              <a:rPr sz="4400" b="1" i="0">
-                <a:solidFill>
-                  <a:srgbClr val="FFFFFF"/>
-                </a:solidFill>
-              </a:rPr>
-              <a:t>we built a working system
-around it</a:t>
-            </a:r>
-          </a:p>
-        </p:txBody>
-      </p:sp>
-      <p:sp>
-        <p:nvSpPr>
           <p:cNvPr id="7" name="TextBox 6"/>
           <p:cNvSpPr txBox="1"/>
           <p:nvPr/>
         </p:nvSpPr>
         <p:spPr>
           <a:xfrm>
-            <a:off x="502920" y="2834640"/>
-            <a:ext cx="8686800" cy="777240"/>
-          </a:xfrm>
-          <a:prstGeom prst="rect">
-            <a:avLst/>
-          </a:prstGeom>
-          <a:noFill/>
-        </p:spPr>
-        <p:txBody>
-          <a:bodyPr wrap="square">
-            <a:spAutoFit/>
-          </a:bodyPr>
-          <a:lstStyle/>
-          <a:p>
-            <a:pPr algn="l"/>
-            <a:r>
-              <a:rPr sz="1400" b="0" i="0">
-                <a:solidFill>
-                  <a:srgbClr val="CCCCCC"/>
-                </a:solidFill>
-              </a:rPr>
-              <a:t>The detection logic above is packaged into a full web application that an ops team can actually use day-to-day: upload new claims, run detection with one click, and review every flagged provider with full evidence.</a:t>
+            <a:off x="365760" y="987552"/>
+            <a:ext cx="11430000" cy="301752"/>
+          </a:xfrm>
+          <a:prstGeom prst="rect">
+            <a:avLst/>
+          </a:prstGeom>
+          <a:noFill/>
+        </p:spPr>
+        <p:txBody>
+          <a:bodyPr wrap="square">
+            <a:spAutoFit/>
+          </a:bodyPr>
+          <a:lstStyle/>
+          <a:p>
+            <a:pPr algn="l"/>
+            <a:r>
+              <a:rPr sz="1200" b="0" i="1">
+                <a:solidFill>
+                  <a:srgbClr val="444444"/>
+                </a:solidFill>
+              </a:rPr>
+              <a:t>Each rule adds points to a provider's risk score. Final score 0–100 determines what happens next.</a:t>
             </a:r>
           </a:p>
         </p:txBody>
@@ -3656,8 +3656,273 @@
         </p:nvSpPr>
         <p:spPr>
           <a:xfrm>
-            <a:off x="502920" y="3749039"/>
-            <a:ext cx="2743200" cy="1554480"/>
+            <a:off x="0" y="6510528"/>
+            <a:ext cx="12188952" cy="347472"/>
+          </a:xfrm>
+          <a:prstGeom prst="rect">
+            <a:avLst/>
+          </a:prstGeom>
+          <a:solidFill>
+            <a:srgbClr val="1A2440"/>
+          </a:solidFill>
+          <a:ln>
+            <a:noFill/>
+          </a:ln>
+        </p:spPr>
+        <p:style>
+          <a:lnRef idx="1">
+            <a:schemeClr val="accent1"/>
+          </a:lnRef>
+          <a:fillRef idx="3">
+            <a:schemeClr val="accent1"/>
+          </a:fillRef>
+          <a:effectRef idx="2">
+            <a:schemeClr val="accent1"/>
+          </a:effectRef>
+          <a:fontRef idx="minor">
+            <a:schemeClr val="lt1"/>
+          </a:fontRef>
+        </p:style>
+        <p:txBody>
+          <a:bodyPr rtlCol="0" anchor="ctr"/>
+          <a:lstStyle/>
+          <a:p>
+            <a:pPr algn="ctr"/>
+          </a:p>
+        </p:txBody>
+      </p:sp>
+      <p:sp>
+        <p:nvSpPr>
+          <p:cNvPr id="9" name="TextBox 8"/>
+          <p:cNvSpPr txBox="1"/>
+          <p:nvPr/>
+        </p:nvSpPr>
+        <p:spPr>
+          <a:xfrm>
+            <a:off x="274320" y="6519672"/>
+            <a:ext cx="11612880" cy="329184"/>
+          </a:xfrm>
+          <a:prstGeom prst="rect">
+            <a:avLst/>
+          </a:prstGeom>
+          <a:noFill/>
+        </p:spPr>
+        <p:txBody>
+          <a:bodyPr wrap="square">
+            <a:spAutoFit/>
+          </a:bodyPr>
+          <a:lstStyle/>
+          <a:p>
+            <a:pPr algn="ctr"/>
+            <a:r>
+              <a:rPr sz="900" b="0" i="0">
+                <a:solidFill>
+                  <a:srgbClr val="FFFFFF"/>
+                </a:solidFill>
+              </a:rPr>
+              <a:t>Alan Assurance · Fraud Detection Case · 2024</a:t>
+            </a:r>
+          </a:p>
+        </p:txBody>
+      </p:sp>
+      <p:sp>
+        <p:nvSpPr>
+          <p:cNvPr id="10" name="Rectangle 9"/>
+          <p:cNvSpPr/>
+          <p:nvPr/>
+        </p:nvSpPr>
+        <p:spPr>
+          <a:xfrm>
+            <a:off x="274320" y="1417320"/>
+            <a:ext cx="2788920" cy="3520440"/>
+          </a:xfrm>
+          <a:prstGeom prst="rect">
+            <a:avLst/>
+          </a:prstGeom>
+          <a:solidFill>
+            <a:srgbClr val="1A2440"/>
+          </a:solidFill>
+          <a:ln>
+            <a:noFill/>
+          </a:ln>
+        </p:spPr>
+        <p:style>
+          <a:lnRef idx="1">
+            <a:schemeClr val="accent1"/>
+          </a:lnRef>
+          <a:fillRef idx="3">
+            <a:schemeClr val="accent1"/>
+          </a:fillRef>
+          <a:effectRef idx="2">
+            <a:schemeClr val="accent1"/>
+          </a:effectRef>
+          <a:fontRef idx="minor">
+            <a:schemeClr val="lt1"/>
+          </a:fontRef>
+        </p:style>
+        <p:txBody>
+          <a:bodyPr rtlCol="0" anchor="ctr"/>
+          <a:lstStyle/>
+          <a:p>
+            <a:pPr algn="ctr"/>
+          </a:p>
+        </p:txBody>
+      </p:sp>
+      <p:sp>
+        <p:nvSpPr>
+          <p:cNvPr id="11" name="Rectangle 10"/>
+          <p:cNvSpPr/>
+          <p:nvPr/>
+        </p:nvSpPr>
+        <p:spPr>
+          <a:xfrm>
+            <a:off x="274320" y="1417320"/>
+            <a:ext cx="2788920" cy="438912"/>
+          </a:xfrm>
+          <a:prstGeom prst="rect">
+            <a:avLst/>
+          </a:prstGeom>
+          <a:solidFill>
+            <a:srgbClr val="D62839"/>
+          </a:solidFill>
+          <a:ln>
+            <a:noFill/>
+          </a:ln>
+        </p:spPr>
+        <p:style>
+          <a:lnRef idx="1">
+            <a:schemeClr val="accent1"/>
+          </a:lnRef>
+          <a:fillRef idx="3">
+            <a:schemeClr val="accent1"/>
+          </a:fillRef>
+          <a:effectRef idx="2">
+            <a:schemeClr val="accent1"/>
+          </a:effectRef>
+          <a:fontRef idx="minor">
+            <a:schemeClr val="lt1"/>
+          </a:fontRef>
+        </p:style>
+        <p:txBody>
+          <a:bodyPr rtlCol="0" anchor="ctr"/>
+          <a:lstStyle/>
+          <a:p>
+            <a:pPr algn="ctr"/>
+          </a:p>
+        </p:txBody>
+      </p:sp>
+      <p:sp>
+        <p:nvSpPr>
+          <p:cNvPr id="12" name="TextBox 11"/>
+          <p:cNvSpPr txBox="1"/>
+          <p:nvPr/>
+        </p:nvSpPr>
+        <p:spPr>
+          <a:xfrm>
+            <a:off x="411479" y="1444752"/>
+            <a:ext cx="2514600" cy="347472"/>
+          </a:xfrm>
+          <a:prstGeom prst="rect">
+            <a:avLst/>
+          </a:prstGeom>
+          <a:noFill/>
+        </p:spPr>
+        <p:txBody>
+          <a:bodyPr wrap="square">
+            <a:spAutoFit/>
+          </a:bodyPr>
+          <a:lstStyle/>
+          <a:p>
+            <a:pPr algn="l"/>
+            <a:r>
+              <a:rPr sz="1400" b="1" i="0">
+                <a:solidFill>
+                  <a:srgbClr val="FFFFFF"/>
+                </a:solidFill>
+              </a:rPr>
+              <a:t>Rule 1</a:t>
+            </a:r>
+          </a:p>
+        </p:txBody>
+      </p:sp>
+      <p:sp>
+        <p:nvSpPr>
+          <p:cNvPr id="13" name="TextBox 12"/>
+          <p:cNvSpPr txBox="1"/>
+          <p:nvPr/>
+        </p:nvSpPr>
+        <p:spPr>
+          <a:xfrm>
+            <a:off x="411479" y="1920240"/>
+            <a:ext cx="2514600" cy="365760"/>
+          </a:xfrm>
+          <a:prstGeom prst="rect">
+            <a:avLst/>
+          </a:prstGeom>
+          <a:noFill/>
+        </p:spPr>
+        <p:txBody>
+          <a:bodyPr wrap="square">
+            <a:spAutoFit/>
+          </a:bodyPr>
+          <a:lstStyle/>
+          <a:p>
+            <a:pPr algn="l"/>
+            <a:r>
+              <a:rPr sz="1200" b="1" i="0">
+                <a:solidFill>
+                  <a:srgbClr val="F5A623"/>
+                </a:solidFill>
+              </a:rPr>
+              <a:t>Billing Spike</a:t>
+            </a:r>
+          </a:p>
+        </p:txBody>
+      </p:sp>
+      <p:sp>
+        <p:nvSpPr>
+          <p:cNvPr id="14" name="TextBox 13"/>
+          <p:cNvSpPr txBox="1"/>
+          <p:nvPr/>
+        </p:nvSpPr>
+        <p:spPr>
+          <a:xfrm>
+            <a:off x="411479" y="2340864"/>
+            <a:ext cx="2514600" cy="713232"/>
+          </a:xfrm>
+          <a:prstGeom prst="rect">
+            <a:avLst/>
+          </a:prstGeom>
+          <a:noFill/>
+        </p:spPr>
+        <p:txBody>
+          <a:bodyPr wrap="square">
+            <a:spAutoFit/>
+          </a:bodyPr>
+          <a:lstStyle/>
+          <a:p>
+            <a:pPr algn="l"/>
+            <a:r>
+              <a:rPr sz="900" b="0" i="0">
+                <a:solidFill>
+                  <a:srgbClr val="CCCCCC"/>
+                </a:solidFill>
+              </a:rPr>
+              <a:t>Flag any month where a provider's total billings are more than 5× higher than their own rolling 6-month average for that product category.</a:t>
+            </a:r>
+          </a:p>
+        </p:txBody>
+      </p:sp>
+      <p:sp>
+        <p:nvSpPr>
+          <p:cNvPr id="15" name="Rectangle 14"/>
+          <p:cNvSpPr/>
+          <p:nvPr/>
+        </p:nvSpPr>
+        <p:spPr>
+          <a:xfrm>
+            <a:off x="274320" y="3090672"/>
+            <a:ext cx="2788920" cy="274320"/>
           </a:xfrm>
           <a:prstGeom prst="rect">
             <a:avLst/>
@@ -3693,20 +3958,88 @@
       </p:sp>
       <p:sp>
         <p:nvSpPr>
-          <p:cNvPr id="9" name="Rectangle 8"/>
+          <p:cNvPr id="16" name="TextBox 15"/>
+          <p:cNvSpPr txBox="1"/>
+          <p:nvPr/>
+        </p:nvSpPr>
+        <p:spPr>
+          <a:xfrm>
+            <a:off x="411479" y="3108960"/>
+            <a:ext cx="548640" cy="228600"/>
+          </a:xfrm>
+          <a:prstGeom prst="rect">
+            <a:avLst/>
+          </a:prstGeom>
+          <a:noFill/>
+        </p:spPr>
+        <p:txBody>
+          <a:bodyPr wrap="square">
+            <a:spAutoFit/>
+          </a:bodyPr>
+          <a:lstStyle/>
+          <a:p>
+            <a:pPr algn="l"/>
+            <a:r>
+              <a:rPr sz="800" b="1" i="0">
+                <a:solidFill>
+                  <a:srgbClr val="F5A623"/>
+                </a:solidFill>
+              </a:rPr>
+              <a:t>Logic:</a:t>
+            </a:r>
+          </a:p>
+        </p:txBody>
+      </p:sp>
+      <p:sp>
+        <p:nvSpPr>
+          <p:cNvPr id="17" name="TextBox 16"/>
+          <p:cNvSpPr txBox="1"/>
+          <p:nvPr/>
+        </p:nvSpPr>
+        <p:spPr>
+          <a:xfrm>
+            <a:off x="960120" y="3108960"/>
+            <a:ext cx="1965960" cy="228600"/>
+          </a:xfrm>
+          <a:prstGeom prst="rect">
+            <a:avLst/>
+          </a:prstGeom>
+          <a:noFill/>
+        </p:spPr>
+        <p:txBody>
+          <a:bodyPr wrap="square">
+            <a:spAutoFit/>
+          </a:bodyPr>
+          <a:lstStyle/>
+          <a:p>
+            <a:pPr algn="l"/>
+            <a:r>
+              <a:rPr sz="800" b="0" i="0">
+                <a:solidFill>
+                  <a:srgbClr val="FFFFFF"/>
+                </a:solidFill>
+              </a:rPr>
+              <a:t>current month &gt; 5 × 6-month median</a:t>
+            </a:r>
+          </a:p>
+        </p:txBody>
+      </p:sp>
+      <p:sp>
+        <p:nvSpPr>
+          <p:cNvPr id="18" name="Rectangle 17"/>
           <p:cNvSpPr/>
           <p:nvPr/>
         </p:nvSpPr>
         <p:spPr>
           <a:xfrm>
-            <a:off x="502920" y="3749039"/>
-            <a:ext cx="2743200" cy="91440"/>
+            <a:off x="274320" y="4572000"/>
+            <a:ext cx="2788920" cy="384048"/>
           </a:xfrm>
           <a:prstGeom prst="rect">
             <a:avLst/>
           </a:prstGeom>
           <a:solidFill>
-            <a:srgbClr val="1A78C2"/>
+            <a:srgbClr val="F5A623"/>
           </a:solidFill>
           <a:ln>
             <a:noFill/>
@@ -3736,82 +4069,236 @@
       </p:sp>
       <p:sp>
         <p:nvSpPr>
-          <p:cNvPr id="10" name="TextBox 9"/>
-          <p:cNvSpPr txBox="1"/>
-          <p:nvPr/>
-        </p:nvSpPr>
-        <p:spPr>
-          <a:xfrm>
-            <a:off x="667512" y="3913632"/>
-            <a:ext cx="2423160" cy="347472"/>
-          </a:xfrm>
-          <a:prstGeom prst="rect">
-            <a:avLst/>
-          </a:prstGeom>
-          <a:noFill/>
-        </p:spPr>
-        <p:txBody>
-          <a:bodyPr wrap="square">
-            <a:spAutoFit/>
-          </a:bodyPr>
-          <a:lstStyle/>
-          <a:p>
-            <a:pPr algn="l"/>
-            <a:r>
-              <a:rPr sz="1300" b="1" i="0">
+          <p:cNvPr id="19" name="TextBox 18"/>
+          <p:cNvSpPr txBox="1"/>
+          <p:nvPr/>
+        </p:nvSpPr>
+        <p:spPr>
+          <a:xfrm>
+            <a:off x="347472" y="4590288"/>
+            <a:ext cx="2642615" cy="329184"/>
+          </a:xfrm>
+          <a:prstGeom prst="rect">
+            <a:avLst/>
+          </a:prstGeom>
+          <a:noFill/>
+        </p:spPr>
+        <p:txBody>
+          <a:bodyPr wrap="square">
+            <a:spAutoFit/>
+          </a:bodyPr>
+          <a:lstStyle/>
+          <a:p>
+            <a:pPr algn="ctr"/>
+            <a:r>
+              <a:rPr sz="900" b="1" i="0">
+                <a:solidFill>
+                  <a:srgbClr val="1A2440"/>
+                </a:solidFill>
+              </a:rPr>
+              <a:t>+30 points per spiked month</a:t>
+            </a:r>
+          </a:p>
+        </p:txBody>
+      </p:sp>
+      <p:sp>
+        <p:nvSpPr>
+          <p:cNvPr id="20" name="Rectangle 19"/>
+          <p:cNvSpPr/>
+          <p:nvPr/>
+        </p:nvSpPr>
+        <p:spPr>
+          <a:xfrm>
+            <a:off x="3218688" y="1417320"/>
+            <a:ext cx="2788920" cy="3520440"/>
+          </a:xfrm>
+          <a:prstGeom prst="rect">
+            <a:avLst/>
+          </a:prstGeom>
+          <a:solidFill>
+            <a:srgbClr val="1A2440"/>
+          </a:solidFill>
+          <a:ln>
+            <a:noFill/>
+          </a:ln>
+        </p:spPr>
+        <p:style>
+          <a:lnRef idx="1">
+            <a:schemeClr val="accent1"/>
+          </a:lnRef>
+          <a:fillRef idx="3">
+            <a:schemeClr val="accent1"/>
+          </a:fillRef>
+          <a:effectRef idx="2">
+            <a:schemeClr val="accent1"/>
+          </a:effectRef>
+          <a:fontRef idx="minor">
+            <a:schemeClr val="lt1"/>
+          </a:fontRef>
+        </p:style>
+        <p:txBody>
+          <a:bodyPr rtlCol="0" anchor="ctr"/>
+          <a:lstStyle/>
+          <a:p>
+            <a:pPr algn="ctr"/>
+          </a:p>
+        </p:txBody>
+      </p:sp>
+      <p:sp>
+        <p:nvSpPr>
+          <p:cNvPr id="21" name="Rectangle 20"/>
+          <p:cNvSpPr/>
+          <p:nvPr/>
+        </p:nvSpPr>
+        <p:spPr>
+          <a:xfrm>
+            <a:off x="3218688" y="1417320"/>
+            <a:ext cx="2788920" cy="438912"/>
+          </a:xfrm>
+          <a:prstGeom prst="rect">
+            <a:avLst/>
+          </a:prstGeom>
+          <a:solidFill>
+            <a:srgbClr val="D62839"/>
+          </a:solidFill>
+          <a:ln>
+            <a:noFill/>
+          </a:ln>
+        </p:spPr>
+        <p:style>
+          <a:lnRef idx="1">
+            <a:schemeClr val="accent1"/>
+          </a:lnRef>
+          <a:fillRef idx="3">
+            <a:schemeClr val="accent1"/>
+          </a:fillRef>
+          <a:effectRef idx="2">
+            <a:schemeClr val="accent1"/>
+          </a:effectRef>
+          <a:fontRef idx="minor">
+            <a:schemeClr val="lt1"/>
+          </a:fontRef>
+        </p:style>
+        <p:txBody>
+          <a:bodyPr rtlCol="0" anchor="ctr"/>
+          <a:lstStyle/>
+          <a:p>
+            <a:pPr algn="ctr"/>
+          </a:p>
+        </p:txBody>
+      </p:sp>
+      <p:sp>
+        <p:nvSpPr>
+          <p:cNvPr id="22" name="TextBox 21"/>
+          <p:cNvSpPr txBox="1"/>
+          <p:nvPr/>
+        </p:nvSpPr>
+        <p:spPr>
+          <a:xfrm>
+            <a:off x="3355848" y="1444752"/>
+            <a:ext cx="2514600" cy="347472"/>
+          </a:xfrm>
+          <a:prstGeom prst="rect">
+            <a:avLst/>
+          </a:prstGeom>
+          <a:noFill/>
+        </p:spPr>
+        <p:txBody>
+          <a:bodyPr wrap="square">
+            <a:spAutoFit/>
+          </a:bodyPr>
+          <a:lstStyle/>
+          <a:p>
+            <a:pPr algn="l"/>
+            <a:r>
+              <a:rPr sz="1400" b="1" i="0">
                 <a:solidFill>
                   <a:srgbClr val="FFFFFF"/>
                 </a:solidFill>
               </a:rPr>
-              <a:t>Dashboard</a:t>
-            </a:r>
-          </a:p>
-        </p:txBody>
-      </p:sp>
-      <p:sp>
-        <p:nvSpPr>
-          <p:cNvPr id="11" name="TextBox 10"/>
-          <p:cNvSpPr txBox="1"/>
-          <p:nvPr/>
-        </p:nvSpPr>
-        <p:spPr>
-          <a:xfrm>
-            <a:off x="667512" y="4279392"/>
-            <a:ext cx="2423160" cy="822960"/>
-          </a:xfrm>
-          <a:prstGeom prst="rect">
-            <a:avLst/>
-          </a:prstGeom>
-          <a:noFill/>
-        </p:spPr>
-        <p:txBody>
-          <a:bodyPr wrap="square">
-            <a:spAutoFit/>
-          </a:bodyPr>
-          <a:lstStyle/>
-          <a:p>
-            <a:pPr algn="l"/>
-            <a:r>
-              <a:rPr sz="1000" b="0" i="0">
+              <a:t>Rule 2</a:t>
+            </a:r>
+          </a:p>
+        </p:txBody>
+      </p:sp>
+      <p:sp>
+        <p:nvSpPr>
+          <p:cNvPr id="23" name="TextBox 22"/>
+          <p:cNvSpPr txBox="1"/>
+          <p:nvPr/>
+        </p:nvSpPr>
+        <p:spPr>
+          <a:xfrm>
+            <a:off x="3355848" y="1920240"/>
+            <a:ext cx="2514600" cy="365760"/>
+          </a:xfrm>
+          <a:prstGeom prst="rect">
+            <a:avLst/>
+          </a:prstGeom>
+          <a:noFill/>
+        </p:spPr>
+        <p:txBody>
+          <a:bodyPr wrap="square">
+            <a:spAutoFit/>
+          </a:bodyPr>
+          <a:lstStyle/>
+          <a:p>
+            <a:pPr algn="l"/>
+            <a:r>
+              <a:rPr sz="1200" b="1" i="0">
+                <a:solidFill>
+                  <a:srgbClr val="F5A623"/>
+                </a:solidFill>
+              </a:rPr>
+              <a:t>Systematic Co-Billing</a:t>
+            </a:r>
+          </a:p>
+        </p:txBody>
+      </p:sp>
+      <p:sp>
+        <p:nvSpPr>
+          <p:cNvPr id="24" name="TextBox 23"/>
+          <p:cNvSpPr txBox="1"/>
+          <p:nvPr/>
+        </p:nvSpPr>
+        <p:spPr>
+          <a:xfrm>
+            <a:off x="3355848" y="2340864"/>
+            <a:ext cx="2514600" cy="713232"/>
+          </a:xfrm>
+          <a:prstGeom prst="rect">
+            <a:avLst/>
+          </a:prstGeom>
+          <a:noFill/>
+        </p:spPr>
+        <p:txBody>
+          <a:bodyPr wrap="square">
+            <a:spAutoFit/>
+          </a:bodyPr>
+          <a:lstStyle/>
+          <a:p>
+            <a:pPr algn="l"/>
+            <a:r>
+              <a:rPr sz="900" b="0" i="0">
                 <a:solidFill>
                   <a:srgbClr val="CCCCCC"/>
                 </a:solidFill>
               </a:rPr>
-              <a:t>Live risk scores, flagged provider count, recent review activity</a:t>
-            </a:r>
-          </a:p>
-        </p:txBody>
-      </p:sp>
-      <p:sp>
-        <p:nvSpPr>
-          <p:cNvPr id="12" name="Rectangle 11"/>
+              <a:t>Flag providers who bill both glasses and contacts in the same month for the majority of their active months (≥ 50%). Occasional overlap is normal; systematic overlap is not.</a:t>
+            </a:r>
+          </a:p>
+        </p:txBody>
+      </p:sp>
+      <p:sp>
+        <p:nvSpPr>
+          <p:cNvPr id="25" name="Rectangle 24"/>
           <p:cNvSpPr/>
           <p:nvPr/>
         </p:nvSpPr>
         <p:spPr>
           <a:xfrm>
-            <a:off x="3429000" y="3749039"/>
-            <a:ext cx="2743200" cy="1554480"/>
+            <a:off x="3218688" y="3090672"/>
+            <a:ext cx="2788920" cy="274320"/>
           </a:xfrm>
           <a:prstGeom prst="rect">
             <a:avLst/>
@@ -3847,20 +4334,88 @@
       </p:sp>
       <p:sp>
         <p:nvSpPr>
-          <p:cNvPr id="13" name="Rectangle 12"/>
+          <p:cNvPr id="26" name="TextBox 25"/>
+          <p:cNvSpPr txBox="1"/>
+          <p:nvPr/>
+        </p:nvSpPr>
+        <p:spPr>
+          <a:xfrm>
+            <a:off x="3355848" y="3108960"/>
+            <a:ext cx="548640" cy="228600"/>
+          </a:xfrm>
+          <a:prstGeom prst="rect">
+            <a:avLst/>
+          </a:prstGeom>
+          <a:noFill/>
+        </p:spPr>
+        <p:txBody>
+          <a:bodyPr wrap="square">
+            <a:spAutoFit/>
+          </a:bodyPr>
+          <a:lstStyle/>
+          <a:p>
+            <a:pPr algn="l"/>
+            <a:r>
+              <a:rPr sz="800" b="1" i="0">
+                <a:solidFill>
+                  <a:srgbClr val="F5A623"/>
+                </a:solidFill>
+              </a:rPr>
+              <a:t>Logic:</a:t>
+            </a:r>
+          </a:p>
+        </p:txBody>
+      </p:sp>
+      <p:sp>
+        <p:nvSpPr>
+          <p:cNvPr id="27" name="TextBox 26"/>
+          <p:cNvSpPr txBox="1"/>
+          <p:nvPr/>
+        </p:nvSpPr>
+        <p:spPr>
+          <a:xfrm>
+            <a:off x="3904487" y="3108960"/>
+            <a:ext cx="1965960" cy="228600"/>
+          </a:xfrm>
+          <a:prstGeom prst="rect">
+            <a:avLst/>
+          </a:prstGeom>
+          <a:noFill/>
+        </p:spPr>
+        <p:txBody>
+          <a:bodyPr wrap="square">
+            <a:spAutoFit/>
+          </a:bodyPr>
+          <a:lstStyle/>
+          <a:p>
+            <a:pPr algn="l"/>
+            <a:r>
+              <a:rPr sz="800" b="0" i="0">
+                <a:solidFill>
+                  <a:srgbClr val="FFFFFF"/>
+                </a:solidFill>
+              </a:rPr>
+              <a:t>≥ 50% of months have both categories</a:t>
+            </a:r>
+          </a:p>
+        </p:txBody>
+      </p:sp>
+      <p:sp>
+        <p:nvSpPr>
+          <p:cNvPr id="28" name="Rectangle 27"/>
           <p:cNvSpPr/>
           <p:nvPr/>
         </p:nvSpPr>
         <p:spPr>
           <a:xfrm>
-            <a:off x="3429000" y="3749039"/>
-            <a:ext cx="2743200" cy="91440"/>
+            <a:off x="3218688" y="4572000"/>
+            <a:ext cx="2788920" cy="384048"/>
           </a:xfrm>
           <a:prstGeom prst="rect">
             <a:avLst/>
           </a:prstGeom>
           <a:solidFill>
-            <a:srgbClr val="0D7A8E"/>
+            <a:srgbClr val="F5A623"/>
           </a:solidFill>
           <a:ln>
             <a:noFill/>
@@ -3890,82 +4445,236 @@
       </p:sp>
       <p:sp>
         <p:nvSpPr>
-          <p:cNvPr id="14" name="TextBox 13"/>
-          <p:cNvSpPr txBox="1"/>
-          <p:nvPr/>
-        </p:nvSpPr>
-        <p:spPr>
-          <a:xfrm>
-            <a:off x="3593592" y="3913632"/>
-            <a:ext cx="2423160" cy="347472"/>
-          </a:xfrm>
-          <a:prstGeom prst="rect">
-            <a:avLst/>
-          </a:prstGeom>
-          <a:noFill/>
-        </p:spPr>
-        <p:txBody>
-          <a:bodyPr wrap="square">
-            <a:spAutoFit/>
-          </a:bodyPr>
-          <a:lstStyle/>
-          <a:p>
-            <a:pPr algn="l"/>
-            <a:r>
-              <a:rPr sz="1300" b="1" i="0">
+          <p:cNvPr id="29" name="TextBox 28"/>
+          <p:cNvSpPr txBox="1"/>
+          <p:nvPr/>
+        </p:nvSpPr>
+        <p:spPr>
+          <a:xfrm>
+            <a:off x="3291840" y="4590288"/>
+            <a:ext cx="2642615" cy="329184"/>
+          </a:xfrm>
+          <a:prstGeom prst="rect">
+            <a:avLst/>
+          </a:prstGeom>
+          <a:noFill/>
+        </p:spPr>
+        <p:txBody>
+          <a:bodyPr wrap="square">
+            <a:spAutoFit/>
+          </a:bodyPr>
+          <a:lstStyle/>
+          <a:p>
+            <a:pPr algn="ctr"/>
+            <a:r>
+              <a:rPr sz="900" b="1" i="0">
+                <a:solidFill>
+                  <a:srgbClr val="1A2440"/>
+                </a:solidFill>
+              </a:rPr>
+              <a:t>25–50 pts  (scales with rate)</a:t>
+            </a:r>
+          </a:p>
+        </p:txBody>
+      </p:sp>
+      <p:sp>
+        <p:nvSpPr>
+          <p:cNvPr id="30" name="Rectangle 29"/>
+          <p:cNvSpPr/>
+          <p:nvPr/>
+        </p:nvSpPr>
+        <p:spPr>
+          <a:xfrm>
+            <a:off x="6163056" y="1417320"/>
+            <a:ext cx="2788920" cy="3520440"/>
+          </a:xfrm>
+          <a:prstGeom prst="rect">
+            <a:avLst/>
+          </a:prstGeom>
+          <a:solidFill>
+            <a:srgbClr val="1A2440"/>
+          </a:solidFill>
+          <a:ln>
+            <a:noFill/>
+          </a:ln>
+        </p:spPr>
+        <p:style>
+          <a:lnRef idx="1">
+            <a:schemeClr val="accent1"/>
+          </a:lnRef>
+          <a:fillRef idx="3">
+            <a:schemeClr val="accent1"/>
+          </a:fillRef>
+          <a:effectRef idx="2">
+            <a:schemeClr val="accent1"/>
+          </a:effectRef>
+          <a:fontRef idx="minor">
+            <a:schemeClr val="lt1"/>
+          </a:fontRef>
+        </p:style>
+        <p:txBody>
+          <a:bodyPr rtlCol="0" anchor="ctr"/>
+          <a:lstStyle/>
+          <a:p>
+            <a:pPr algn="ctr"/>
+          </a:p>
+        </p:txBody>
+      </p:sp>
+      <p:sp>
+        <p:nvSpPr>
+          <p:cNvPr id="31" name="Rectangle 30"/>
+          <p:cNvSpPr/>
+          <p:nvPr/>
+        </p:nvSpPr>
+        <p:spPr>
+          <a:xfrm>
+            <a:off x="6163056" y="1417320"/>
+            <a:ext cx="2788920" cy="438912"/>
+          </a:xfrm>
+          <a:prstGeom prst="rect">
+            <a:avLst/>
+          </a:prstGeom>
+          <a:solidFill>
+            <a:srgbClr val="D62839"/>
+          </a:solidFill>
+          <a:ln>
+            <a:noFill/>
+          </a:ln>
+        </p:spPr>
+        <p:style>
+          <a:lnRef idx="1">
+            <a:schemeClr val="accent1"/>
+          </a:lnRef>
+          <a:fillRef idx="3">
+            <a:schemeClr val="accent1"/>
+          </a:fillRef>
+          <a:effectRef idx="2">
+            <a:schemeClr val="accent1"/>
+          </a:effectRef>
+          <a:fontRef idx="minor">
+            <a:schemeClr val="lt1"/>
+          </a:fontRef>
+        </p:style>
+        <p:txBody>
+          <a:bodyPr rtlCol="0" anchor="ctr"/>
+          <a:lstStyle/>
+          <a:p>
+            <a:pPr algn="ctr"/>
+          </a:p>
+        </p:txBody>
+      </p:sp>
+      <p:sp>
+        <p:nvSpPr>
+          <p:cNvPr id="32" name="TextBox 31"/>
+          <p:cNvSpPr txBox="1"/>
+          <p:nvPr/>
+        </p:nvSpPr>
+        <p:spPr>
+          <a:xfrm>
+            <a:off x="6300216" y="1444752"/>
+            <a:ext cx="2514600" cy="347472"/>
+          </a:xfrm>
+          <a:prstGeom prst="rect">
+            <a:avLst/>
+          </a:prstGeom>
+          <a:noFill/>
+        </p:spPr>
+        <p:txBody>
+          <a:bodyPr wrap="square">
+            <a:spAutoFit/>
+          </a:bodyPr>
+          <a:lstStyle/>
+          <a:p>
+            <a:pPr algn="l"/>
+            <a:r>
+              <a:rPr sz="1400" b="1" i="0">
                 <a:solidFill>
                   <a:srgbClr val="FFFFFF"/>
                 </a:solidFill>
               </a:rPr>
-              <a:t>Provider list</a:t>
-            </a:r>
-          </a:p>
-        </p:txBody>
-      </p:sp>
-      <p:sp>
-        <p:nvSpPr>
-          <p:cNvPr id="15" name="TextBox 14"/>
-          <p:cNvSpPr txBox="1"/>
-          <p:nvPr/>
-        </p:nvSpPr>
-        <p:spPr>
-          <a:xfrm>
-            <a:off x="3593592" y="4279392"/>
-            <a:ext cx="2423160" cy="822960"/>
-          </a:xfrm>
-          <a:prstGeom prst="rect">
-            <a:avLst/>
-          </a:prstGeom>
-          <a:noFill/>
-        </p:spPr>
-        <p:txBody>
-          <a:bodyPr wrap="square">
-            <a:spAutoFit/>
-          </a:bodyPr>
-          <a:lstStyle/>
-          <a:p>
-            <a:pPr algn="l"/>
-            <a:r>
-              <a:rPr sz="1000" b="0" i="0">
+              <a:t>Rule 3</a:t>
+            </a:r>
+          </a:p>
+        </p:txBody>
+      </p:sp>
+      <p:sp>
+        <p:nvSpPr>
+          <p:cNvPr id="33" name="TextBox 32"/>
+          <p:cNvSpPr txBox="1"/>
+          <p:nvPr/>
+        </p:nvSpPr>
+        <p:spPr>
+          <a:xfrm>
+            <a:off x="6300216" y="1920240"/>
+            <a:ext cx="2514600" cy="365760"/>
+          </a:xfrm>
+          <a:prstGeom prst="rect">
+            <a:avLst/>
+          </a:prstGeom>
+          <a:noFill/>
+        </p:spPr>
+        <p:txBody>
+          <a:bodyPr wrap="square">
+            <a:spAutoFit/>
+          </a:bodyPr>
+          <a:lstStyle/>
+          <a:p>
+            <a:pPr algn="l"/>
+            <a:r>
+              <a:rPr sz="1200" b="1" i="0">
+                <a:solidFill>
+                  <a:srgbClr val="F5A623"/>
+                </a:solidFill>
+              </a:rPr>
+              <a:t>Repeated Identical Amount</a:t>
+            </a:r>
+          </a:p>
+        </p:txBody>
+      </p:sp>
+      <p:sp>
+        <p:nvSpPr>
+          <p:cNvPr id="34" name="TextBox 33"/>
+          <p:cNvSpPr txBox="1"/>
+          <p:nvPr/>
+        </p:nvSpPr>
+        <p:spPr>
+          <a:xfrm>
+            <a:off x="6300216" y="2340864"/>
+            <a:ext cx="2514600" cy="713232"/>
+          </a:xfrm>
+          <a:prstGeom prst="rect">
+            <a:avLst/>
+          </a:prstGeom>
+          <a:noFill/>
+        </p:spPr>
+        <p:txBody>
+          <a:bodyPr wrap="square">
+            <a:spAutoFit/>
+          </a:bodyPr>
+          <a:lstStyle/>
+          <a:p>
+            <a:pPr algn="l"/>
+            <a:r>
+              <a:rPr sz="900" b="0" i="0">
                 <a:solidFill>
                   <a:srgbClr val="CCCCCC"/>
                 </a:solidFill>
               </a:rPr>
-              <a:t>Run detection · search and filter · see every provider's risk score</a:t>
-            </a:r>
-          </a:p>
-        </p:txBody>
-      </p:sp>
-      <p:sp>
-        <p:nvSpPr>
-          <p:cNvPr id="16" name="Rectangle 15"/>
+              <a:t>Flag any (provider, category) pair where the exact same euro amount appears 3 or more times within any rolling 12-month window. Real billing varies naturally.</a:t>
+            </a:r>
+          </a:p>
+        </p:txBody>
+      </p:sp>
+      <p:sp>
+        <p:nvSpPr>
+          <p:cNvPr id="35" name="Rectangle 34"/>
           <p:cNvSpPr/>
           <p:nvPr/>
         </p:nvSpPr>
         <p:spPr>
           <a:xfrm>
-            <a:off x="6355080" y="3749039"/>
-            <a:ext cx="2743200" cy="1554480"/>
+            <a:off x="6163056" y="3090672"/>
+            <a:ext cx="2788920" cy="274320"/>
           </a:xfrm>
           <a:prstGeom prst="rect">
             <a:avLst/>
@@ -4001,14 +4710,757 @@
       </p:sp>
       <p:sp>
         <p:nvSpPr>
-          <p:cNvPr id="17" name="Rectangle 16"/>
+          <p:cNvPr id="36" name="TextBox 35"/>
+          <p:cNvSpPr txBox="1"/>
+          <p:nvPr/>
+        </p:nvSpPr>
+        <p:spPr>
+          <a:xfrm>
+            <a:off x="6300216" y="3108960"/>
+            <a:ext cx="548640" cy="228600"/>
+          </a:xfrm>
+          <a:prstGeom prst="rect">
+            <a:avLst/>
+          </a:prstGeom>
+          <a:noFill/>
+        </p:spPr>
+        <p:txBody>
+          <a:bodyPr wrap="square">
+            <a:spAutoFit/>
+          </a:bodyPr>
+          <a:lstStyle/>
+          <a:p>
+            <a:pPr algn="l"/>
+            <a:r>
+              <a:rPr sz="800" b="1" i="0">
+                <a:solidFill>
+                  <a:srgbClr val="F5A623"/>
+                </a:solidFill>
+              </a:rPr>
+              <a:t>Logic:</a:t>
+            </a:r>
+          </a:p>
+        </p:txBody>
+      </p:sp>
+      <p:sp>
+        <p:nvSpPr>
+          <p:cNvPr id="37" name="TextBox 36"/>
+          <p:cNvSpPr txBox="1"/>
+          <p:nvPr/>
+        </p:nvSpPr>
+        <p:spPr>
+          <a:xfrm>
+            <a:off x="6848856" y="3108960"/>
+            <a:ext cx="1965960" cy="228600"/>
+          </a:xfrm>
+          <a:prstGeom prst="rect">
+            <a:avLst/>
+          </a:prstGeom>
+          <a:noFill/>
+        </p:spPr>
+        <p:txBody>
+          <a:bodyPr wrap="square">
+            <a:spAutoFit/>
+          </a:bodyPr>
+          <a:lstStyle/>
+          <a:p>
+            <a:pPr algn="l"/>
+            <a:r>
+              <a:rPr sz="800" b="0" i="0">
+                <a:solidFill>
+                  <a:srgbClr val="FFFFFF"/>
+                </a:solidFill>
+              </a:rPr>
+              <a:t>same € amount ≥ 3× in 12-month window</a:t>
+            </a:r>
+          </a:p>
+        </p:txBody>
+      </p:sp>
+      <p:sp>
+        <p:nvSpPr>
+          <p:cNvPr id="38" name="Rectangle 37"/>
           <p:cNvSpPr/>
           <p:nvPr/>
         </p:nvSpPr>
         <p:spPr>
           <a:xfrm>
-            <a:off x="6355080" y="3749039"/>
-            <a:ext cx="2743200" cy="91440"/>
+            <a:off x="6163056" y="4572000"/>
+            <a:ext cx="2788920" cy="384048"/>
+          </a:xfrm>
+          <a:prstGeom prst="rect">
+            <a:avLst/>
+          </a:prstGeom>
+          <a:solidFill>
+            <a:srgbClr val="F5A623"/>
+          </a:solidFill>
+          <a:ln>
+            <a:noFill/>
+          </a:ln>
+        </p:spPr>
+        <p:style>
+          <a:lnRef idx="1">
+            <a:schemeClr val="accent1"/>
+          </a:lnRef>
+          <a:fillRef idx="3">
+            <a:schemeClr val="accent1"/>
+          </a:fillRef>
+          <a:effectRef idx="2">
+            <a:schemeClr val="accent1"/>
+          </a:effectRef>
+          <a:fontRef idx="minor">
+            <a:schemeClr val="lt1"/>
+          </a:fontRef>
+        </p:style>
+        <p:txBody>
+          <a:bodyPr rtlCol="0" anchor="ctr"/>
+          <a:lstStyle/>
+          <a:p>
+            <a:pPr algn="ctr"/>
+          </a:p>
+        </p:txBody>
+      </p:sp>
+      <p:sp>
+        <p:nvSpPr>
+          <p:cNvPr id="39" name="TextBox 38"/>
+          <p:cNvSpPr txBox="1"/>
+          <p:nvPr/>
+        </p:nvSpPr>
+        <p:spPr>
+          <a:xfrm>
+            <a:off x="6236208" y="4590288"/>
+            <a:ext cx="2642615" cy="329184"/>
+          </a:xfrm>
+          <a:prstGeom prst="rect">
+            <a:avLst/>
+          </a:prstGeom>
+          <a:noFill/>
+        </p:spPr>
+        <p:txBody>
+          <a:bodyPr wrap="square">
+            <a:spAutoFit/>
+          </a:bodyPr>
+          <a:lstStyle/>
+          <a:p>
+            <a:pPr algn="ctr"/>
+            <a:r>
+              <a:rPr sz="900" b="1" i="0">
+                <a:solidFill>
+                  <a:srgbClr val="1A2440"/>
+                </a:solidFill>
+              </a:rPr>
+              <a:t>+20 points per pattern</a:t>
+            </a:r>
+          </a:p>
+        </p:txBody>
+      </p:sp>
+      <p:sp>
+        <p:nvSpPr>
+          <p:cNvPr id="40" name="Rectangle 39"/>
+          <p:cNvSpPr/>
+          <p:nvPr/>
+        </p:nvSpPr>
+        <p:spPr>
+          <a:xfrm>
+            <a:off x="9107424" y="1417320"/>
+            <a:ext cx="2788920" cy="3520440"/>
+          </a:xfrm>
+          <a:prstGeom prst="rect">
+            <a:avLst/>
+          </a:prstGeom>
+          <a:solidFill>
+            <a:srgbClr val="1A2440"/>
+          </a:solidFill>
+          <a:ln>
+            <a:noFill/>
+          </a:ln>
+        </p:spPr>
+        <p:style>
+          <a:lnRef idx="1">
+            <a:schemeClr val="accent1"/>
+          </a:lnRef>
+          <a:fillRef idx="3">
+            <a:schemeClr val="accent1"/>
+          </a:fillRef>
+          <a:effectRef idx="2">
+            <a:schemeClr val="accent1"/>
+          </a:effectRef>
+          <a:fontRef idx="minor">
+            <a:schemeClr val="lt1"/>
+          </a:fontRef>
+        </p:style>
+        <p:txBody>
+          <a:bodyPr rtlCol="0" anchor="ctr"/>
+          <a:lstStyle/>
+          <a:p>
+            <a:pPr algn="ctr"/>
+          </a:p>
+        </p:txBody>
+      </p:sp>
+      <p:sp>
+        <p:nvSpPr>
+          <p:cNvPr id="41" name="Rectangle 40"/>
+          <p:cNvSpPr/>
+          <p:nvPr/>
+        </p:nvSpPr>
+        <p:spPr>
+          <a:xfrm>
+            <a:off x="9107424" y="1417320"/>
+            <a:ext cx="2788920" cy="438912"/>
+          </a:xfrm>
+          <a:prstGeom prst="rect">
+            <a:avLst/>
+          </a:prstGeom>
+          <a:solidFill>
+            <a:srgbClr val="D62839"/>
+          </a:solidFill>
+          <a:ln>
+            <a:noFill/>
+          </a:ln>
+        </p:spPr>
+        <p:style>
+          <a:lnRef idx="1">
+            <a:schemeClr val="accent1"/>
+          </a:lnRef>
+          <a:fillRef idx="3">
+            <a:schemeClr val="accent1"/>
+          </a:fillRef>
+          <a:effectRef idx="2">
+            <a:schemeClr val="accent1"/>
+          </a:effectRef>
+          <a:fontRef idx="minor">
+            <a:schemeClr val="lt1"/>
+          </a:fontRef>
+        </p:style>
+        <p:txBody>
+          <a:bodyPr rtlCol="0" anchor="ctr"/>
+          <a:lstStyle/>
+          <a:p>
+            <a:pPr algn="ctr"/>
+          </a:p>
+        </p:txBody>
+      </p:sp>
+      <p:sp>
+        <p:nvSpPr>
+          <p:cNvPr id="42" name="TextBox 41"/>
+          <p:cNvSpPr txBox="1"/>
+          <p:nvPr/>
+        </p:nvSpPr>
+        <p:spPr>
+          <a:xfrm>
+            <a:off x="9244584" y="1444752"/>
+            <a:ext cx="2514600" cy="347472"/>
+          </a:xfrm>
+          <a:prstGeom prst="rect">
+            <a:avLst/>
+          </a:prstGeom>
+          <a:noFill/>
+        </p:spPr>
+        <p:txBody>
+          <a:bodyPr wrap="square">
+            <a:spAutoFit/>
+          </a:bodyPr>
+          <a:lstStyle/>
+          <a:p>
+            <a:pPr algn="l"/>
+            <a:r>
+              <a:rPr sz="1400" b="1" i="0">
+                <a:solidFill>
+                  <a:srgbClr val="FFFFFF"/>
+                </a:solidFill>
+              </a:rPr>
+              <a:t>Rule 4</a:t>
+            </a:r>
+          </a:p>
+        </p:txBody>
+      </p:sp>
+      <p:sp>
+        <p:nvSpPr>
+          <p:cNvPr id="43" name="TextBox 42"/>
+          <p:cNvSpPr txBox="1"/>
+          <p:nvPr/>
+        </p:nvSpPr>
+        <p:spPr>
+          <a:xfrm>
+            <a:off x="9244584" y="1920240"/>
+            <a:ext cx="2514600" cy="365760"/>
+          </a:xfrm>
+          <a:prstGeom prst="rect">
+            <a:avLst/>
+          </a:prstGeom>
+          <a:noFill/>
+        </p:spPr>
+        <p:txBody>
+          <a:bodyPr wrap="square">
+            <a:spAutoFit/>
+          </a:bodyPr>
+          <a:lstStyle/>
+          <a:p>
+            <a:pPr algn="l"/>
+            <a:r>
+              <a:rPr sz="1200" b="1" i="0">
+                <a:solidFill>
+                  <a:srgbClr val="F5A623"/>
+                </a:solidFill>
+              </a:rPr>
+              <a:t>Round Number Billing</a:t>
+            </a:r>
+          </a:p>
+        </p:txBody>
+      </p:sp>
+      <p:sp>
+        <p:nvSpPr>
+          <p:cNvPr id="44" name="TextBox 43"/>
+          <p:cNvSpPr txBox="1"/>
+          <p:nvPr/>
+        </p:nvSpPr>
+        <p:spPr>
+          <a:xfrm>
+            <a:off x="9244584" y="2340864"/>
+            <a:ext cx="2514600" cy="713232"/>
+          </a:xfrm>
+          <a:prstGeom prst="rect">
+            <a:avLst/>
+          </a:prstGeom>
+          <a:noFill/>
+        </p:spPr>
+        <p:txBody>
+          <a:bodyPr wrap="square">
+            <a:spAutoFit/>
+          </a:bodyPr>
+          <a:lstStyle/>
+          <a:p>
+            <a:pPr algn="l"/>
+            <a:r>
+              <a:rPr sz="900" b="0" i="0">
+                <a:solidFill>
+                  <a:srgbClr val="CCCCCC"/>
+                </a:solidFill>
+              </a:rPr>
+              <a:t>Flag providers where ≥ 70% of claims in a category are round numbers (whole euros, multiples of 50). Real optical purchases have irregular amounts like 349.91€.</a:t>
+            </a:r>
+          </a:p>
+        </p:txBody>
+      </p:sp>
+      <p:sp>
+        <p:nvSpPr>
+          <p:cNvPr id="45" name="Rectangle 44"/>
+          <p:cNvSpPr/>
+          <p:nvPr/>
+        </p:nvSpPr>
+        <p:spPr>
+          <a:xfrm>
+            <a:off x="9107424" y="3090672"/>
+            <a:ext cx="2788920" cy="274320"/>
+          </a:xfrm>
+          <a:prstGeom prst="rect">
+            <a:avLst/>
+          </a:prstGeom>
+          <a:solidFill>
+            <a:srgbClr val="26355C"/>
+          </a:solidFill>
+          <a:ln>
+            <a:noFill/>
+          </a:ln>
+        </p:spPr>
+        <p:style>
+          <a:lnRef idx="1">
+            <a:schemeClr val="accent1"/>
+          </a:lnRef>
+          <a:fillRef idx="3">
+            <a:schemeClr val="accent1"/>
+          </a:fillRef>
+          <a:effectRef idx="2">
+            <a:schemeClr val="accent1"/>
+          </a:effectRef>
+          <a:fontRef idx="minor">
+            <a:schemeClr val="lt1"/>
+          </a:fontRef>
+        </p:style>
+        <p:txBody>
+          <a:bodyPr rtlCol="0" anchor="ctr"/>
+          <a:lstStyle/>
+          <a:p>
+            <a:pPr algn="ctr"/>
+          </a:p>
+        </p:txBody>
+      </p:sp>
+      <p:sp>
+        <p:nvSpPr>
+          <p:cNvPr id="46" name="TextBox 45"/>
+          <p:cNvSpPr txBox="1"/>
+          <p:nvPr/>
+        </p:nvSpPr>
+        <p:spPr>
+          <a:xfrm>
+            <a:off x="9244584" y="3108960"/>
+            <a:ext cx="548640" cy="228600"/>
+          </a:xfrm>
+          <a:prstGeom prst="rect">
+            <a:avLst/>
+          </a:prstGeom>
+          <a:noFill/>
+        </p:spPr>
+        <p:txBody>
+          <a:bodyPr wrap="square">
+            <a:spAutoFit/>
+          </a:bodyPr>
+          <a:lstStyle/>
+          <a:p>
+            <a:pPr algn="l"/>
+            <a:r>
+              <a:rPr sz="800" b="1" i="0">
+                <a:solidFill>
+                  <a:srgbClr val="F5A623"/>
+                </a:solidFill>
+              </a:rPr>
+              <a:t>Logic:</a:t>
+            </a:r>
+          </a:p>
+        </p:txBody>
+      </p:sp>
+      <p:sp>
+        <p:nvSpPr>
+          <p:cNvPr id="47" name="TextBox 46"/>
+          <p:cNvSpPr txBox="1"/>
+          <p:nvPr/>
+        </p:nvSpPr>
+        <p:spPr>
+          <a:xfrm>
+            <a:off x="9793224" y="3108960"/>
+            <a:ext cx="1965960" cy="228600"/>
+          </a:xfrm>
+          <a:prstGeom prst="rect">
+            <a:avLst/>
+          </a:prstGeom>
+          <a:noFill/>
+        </p:spPr>
+        <p:txBody>
+          <a:bodyPr wrap="square">
+            <a:spAutoFit/>
+          </a:bodyPr>
+          <a:lstStyle/>
+          <a:p>
+            <a:pPr algn="l"/>
+            <a:r>
+              <a:rPr sz="800" b="0" i="0">
+                <a:solidFill>
+                  <a:srgbClr val="FFFFFF"/>
+                </a:solidFill>
+              </a:rPr>
+              <a:t>≥ 70% of claims are multiples of 50</a:t>
+            </a:r>
+          </a:p>
+        </p:txBody>
+      </p:sp>
+      <p:sp>
+        <p:nvSpPr>
+          <p:cNvPr id="48" name="Rectangle 47"/>
+          <p:cNvSpPr/>
+          <p:nvPr/>
+        </p:nvSpPr>
+        <p:spPr>
+          <a:xfrm>
+            <a:off x="9107424" y="4572000"/>
+            <a:ext cx="2788920" cy="384048"/>
+          </a:xfrm>
+          <a:prstGeom prst="rect">
+            <a:avLst/>
+          </a:prstGeom>
+          <a:solidFill>
+            <a:srgbClr val="F5A623"/>
+          </a:solidFill>
+          <a:ln>
+            <a:noFill/>
+          </a:ln>
+        </p:spPr>
+        <p:style>
+          <a:lnRef idx="1">
+            <a:schemeClr val="accent1"/>
+          </a:lnRef>
+          <a:fillRef idx="3">
+            <a:schemeClr val="accent1"/>
+          </a:fillRef>
+          <a:effectRef idx="2">
+            <a:schemeClr val="accent1"/>
+          </a:effectRef>
+          <a:fontRef idx="minor">
+            <a:schemeClr val="lt1"/>
+          </a:fontRef>
+        </p:style>
+        <p:txBody>
+          <a:bodyPr rtlCol="0" anchor="ctr"/>
+          <a:lstStyle/>
+          <a:p>
+            <a:pPr algn="ctr"/>
+          </a:p>
+        </p:txBody>
+      </p:sp>
+      <p:sp>
+        <p:nvSpPr>
+          <p:cNvPr id="49" name="TextBox 48"/>
+          <p:cNvSpPr txBox="1"/>
+          <p:nvPr/>
+        </p:nvSpPr>
+        <p:spPr>
+          <a:xfrm>
+            <a:off x="9180576" y="4590288"/>
+            <a:ext cx="2642615" cy="329184"/>
+          </a:xfrm>
+          <a:prstGeom prst="rect">
+            <a:avLst/>
+          </a:prstGeom>
+          <a:noFill/>
+        </p:spPr>
+        <p:txBody>
+          <a:bodyPr wrap="square">
+            <a:spAutoFit/>
+          </a:bodyPr>
+          <a:lstStyle/>
+          <a:p>
+            <a:pPr algn="ctr"/>
+            <a:r>
+              <a:rPr sz="900" b="1" i="0">
+                <a:solidFill>
+                  <a:srgbClr val="1A2440"/>
+                </a:solidFill>
+              </a:rPr>
+              <a:t>+25 points per category</a:t>
+            </a:r>
+          </a:p>
+        </p:txBody>
+      </p:sp>
+      <p:sp>
+        <p:nvSpPr>
+          <p:cNvPr id="50" name="Rectangle 49"/>
+          <p:cNvSpPr/>
+          <p:nvPr/>
+        </p:nvSpPr>
+        <p:spPr>
+          <a:xfrm>
+            <a:off x="274320" y="5074920"/>
+            <a:ext cx="11640312" cy="320040"/>
+          </a:xfrm>
+          <a:prstGeom prst="rect">
+            <a:avLst/>
+          </a:prstGeom>
+          <a:solidFill>
+            <a:srgbClr val="1A2440"/>
+          </a:solidFill>
+          <a:ln>
+            <a:noFill/>
+          </a:ln>
+        </p:spPr>
+        <p:style>
+          <a:lnRef idx="1">
+            <a:schemeClr val="accent1"/>
+          </a:lnRef>
+          <a:fillRef idx="3">
+            <a:schemeClr val="accent1"/>
+          </a:fillRef>
+          <a:effectRef idx="2">
+            <a:schemeClr val="accent1"/>
+          </a:effectRef>
+          <a:fontRef idx="minor">
+            <a:schemeClr val="lt1"/>
+          </a:fontRef>
+        </p:style>
+        <p:txBody>
+          <a:bodyPr rtlCol="0" anchor="ctr"/>
+          <a:lstStyle/>
+          <a:p>
+            <a:pPr algn="ctr"/>
+          </a:p>
+        </p:txBody>
+      </p:sp>
+      <p:sp>
+        <p:nvSpPr>
+          <p:cNvPr id="51" name="TextBox 50"/>
+          <p:cNvSpPr txBox="1"/>
+          <p:nvPr/>
+        </p:nvSpPr>
+        <p:spPr>
+          <a:xfrm>
+            <a:off x="365760" y="5093208"/>
+            <a:ext cx="11430000" cy="256032"/>
+          </a:xfrm>
+          <a:prstGeom prst="rect">
+            <a:avLst/>
+          </a:prstGeom>
+          <a:noFill/>
+        </p:spPr>
+        <p:txBody>
+          <a:bodyPr wrap="square">
+            <a:spAutoFit/>
+          </a:bodyPr>
+          <a:lstStyle/>
+          <a:p>
+            <a:pPr algn="ctr"/>
+            <a:r>
+              <a:rPr sz="1100" b="1" i="0">
+                <a:solidFill>
+                  <a:srgbClr val="FFFFFF"/>
+                </a:solidFill>
+              </a:rPr>
+              <a:t>What happens to the score</a:t>
+            </a:r>
+          </a:p>
+        </p:txBody>
+      </p:sp>
+      <p:sp>
+        <p:nvSpPr>
+          <p:cNvPr id="52" name="Rectangle 51"/>
+          <p:cNvSpPr/>
+          <p:nvPr/>
+        </p:nvSpPr>
+        <p:spPr>
+          <a:xfrm>
+            <a:off x="274320" y="5440680"/>
+            <a:ext cx="3520440" cy="1005840"/>
+          </a:xfrm>
+          <a:prstGeom prst="rect">
+            <a:avLst/>
+          </a:prstGeom>
+          <a:solidFill>
+            <a:srgbClr val="2E7D32"/>
+          </a:solidFill>
+          <a:ln>
+            <a:noFill/>
+          </a:ln>
+        </p:spPr>
+        <p:style>
+          <a:lnRef idx="1">
+            <a:schemeClr val="accent1"/>
+          </a:lnRef>
+          <a:fillRef idx="3">
+            <a:schemeClr val="accent1"/>
+          </a:fillRef>
+          <a:effectRef idx="2">
+            <a:schemeClr val="accent1"/>
+          </a:effectRef>
+          <a:fontRef idx="minor">
+            <a:schemeClr val="lt1"/>
+          </a:fontRef>
+        </p:style>
+        <p:txBody>
+          <a:bodyPr rtlCol="0" anchor="ctr"/>
+          <a:lstStyle/>
+          <a:p>
+            <a:pPr algn="ctr"/>
+          </a:p>
+        </p:txBody>
+      </p:sp>
+      <p:sp>
+        <p:nvSpPr>
+          <p:cNvPr id="53" name="TextBox 52"/>
+          <p:cNvSpPr txBox="1"/>
+          <p:nvPr/>
+        </p:nvSpPr>
+        <p:spPr>
+          <a:xfrm>
+            <a:off x="365760" y="5458968"/>
+            <a:ext cx="3337560" cy="365760"/>
+          </a:xfrm>
+          <a:prstGeom prst="rect">
+            <a:avLst/>
+          </a:prstGeom>
+          <a:noFill/>
+        </p:spPr>
+        <p:txBody>
+          <a:bodyPr wrap="square">
+            <a:spAutoFit/>
+          </a:bodyPr>
+          <a:lstStyle/>
+          <a:p>
+            <a:pPr algn="ctr"/>
+            <a:r>
+              <a:rPr sz="1400" b="1" i="0">
+                <a:solidFill>
+                  <a:srgbClr val="FFFFFF"/>
+                </a:solidFill>
+              </a:rPr>
+              <a:t>Cleared</a:t>
+            </a:r>
+          </a:p>
+        </p:txBody>
+      </p:sp>
+      <p:sp>
+        <p:nvSpPr>
+          <p:cNvPr id="54" name="TextBox 53"/>
+          <p:cNvSpPr txBox="1"/>
+          <p:nvPr/>
+        </p:nvSpPr>
+        <p:spPr>
+          <a:xfrm>
+            <a:off x="365760" y="5824728"/>
+            <a:ext cx="3337560" cy="274320"/>
+          </a:xfrm>
+          <a:prstGeom prst="rect">
+            <a:avLst/>
+          </a:prstGeom>
+          <a:noFill/>
+        </p:spPr>
+        <p:txBody>
+          <a:bodyPr wrap="square">
+            <a:spAutoFit/>
+          </a:bodyPr>
+          <a:lstStyle/>
+          <a:p>
+            <a:pPr algn="ctr"/>
+            <a:r>
+              <a:rPr sz="1100" b="0" i="0">
+                <a:solidFill>
+                  <a:srgbClr val="FFFFFF"/>
+                </a:solidFill>
+              </a:rPr>
+              <a:t>Score = 0</a:t>
+            </a:r>
+          </a:p>
+        </p:txBody>
+      </p:sp>
+      <p:sp>
+        <p:nvSpPr>
+          <p:cNvPr id="55" name="TextBox 54"/>
+          <p:cNvSpPr txBox="1"/>
+          <p:nvPr/>
+        </p:nvSpPr>
+        <p:spPr>
+          <a:xfrm>
+            <a:off x="365760" y="6099048"/>
+            <a:ext cx="3337560" cy="292608"/>
+          </a:xfrm>
+          <a:prstGeom prst="rect">
+            <a:avLst/>
+          </a:prstGeom>
+          <a:noFill/>
+        </p:spPr>
+        <p:txBody>
+          <a:bodyPr wrap="square">
+            <a:spAutoFit/>
+          </a:bodyPr>
+          <a:lstStyle/>
+          <a:p>
+            <a:pPr algn="ctr"/>
+            <a:r>
+              <a:rPr sz="900" b="0" i="1">
+                <a:solidFill>
+                  <a:srgbClr val="FFFFFF"/>
+                </a:solidFill>
+              </a:rPr>
+              <a:t>No flags — approved automatically</a:t>
+            </a:r>
+          </a:p>
+        </p:txBody>
+      </p:sp>
+      <p:sp>
+        <p:nvSpPr>
+          <p:cNvPr id="56" name="Rectangle 55"/>
+          <p:cNvSpPr/>
+          <p:nvPr/>
+        </p:nvSpPr>
+        <p:spPr>
+          <a:xfrm>
+            <a:off x="4160520" y="5440680"/>
+            <a:ext cx="3520440" cy="1005840"/>
           </a:xfrm>
           <a:prstGeom prst="rect">
             <a:avLst/>
@@ -4044,88 +5496,122 @@
       </p:sp>
       <p:sp>
         <p:nvSpPr>
-          <p:cNvPr id="18" name="TextBox 17"/>
-          <p:cNvSpPr txBox="1"/>
-          <p:nvPr/>
-        </p:nvSpPr>
-        <p:spPr>
-          <a:xfrm>
-            <a:off x="6519672" y="3913632"/>
-            <a:ext cx="2423160" cy="347472"/>
-          </a:xfrm>
-          <a:prstGeom prst="rect">
-            <a:avLst/>
-          </a:prstGeom>
-          <a:noFill/>
-        </p:spPr>
-        <p:txBody>
-          <a:bodyPr wrap="square">
-            <a:spAutoFit/>
-          </a:bodyPr>
-          <a:lstStyle/>
-          <a:p>
-            <a:pPr algn="l"/>
-            <a:r>
-              <a:rPr sz="1300" b="1" i="0">
+          <p:cNvPr id="57" name="TextBox 56"/>
+          <p:cNvSpPr txBox="1"/>
+          <p:nvPr/>
+        </p:nvSpPr>
+        <p:spPr>
+          <a:xfrm>
+            <a:off x="4251959" y="5458968"/>
+            <a:ext cx="3337560" cy="365760"/>
+          </a:xfrm>
+          <a:prstGeom prst="rect">
+            <a:avLst/>
+          </a:prstGeom>
+          <a:noFill/>
+        </p:spPr>
+        <p:txBody>
+          <a:bodyPr wrap="square">
+            <a:spAutoFit/>
+          </a:bodyPr>
+          <a:lstStyle/>
+          <a:p>
+            <a:pPr algn="ctr"/>
+            <a:r>
+              <a:rPr sz="1400" b="1" i="0">
                 <a:solidFill>
                   <a:srgbClr val="FFFFFF"/>
                 </a:solidFill>
               </a:rPr>
-              <a:t>Flag evidence</a:t>
-            </a:r>
-          </a:p>
-        </p:txBody>
-      </p:sp>
-      <p:sp>
-        <p:nvSpPr>
-          <p:cNvPr id="19" name="TextBox 18"/>
-          <p:cNvSpPr txBox="1"/>
-          <p:nvPr/>
-        </p:nvSpPr>
-        <p:spPr>
-          <a:xfrm>
-            <a:off x="6519672" y="4279392"/>
-            <a:ext cx="2423160" cy="822960"/>
-          </a:xfrm>
-          <a:prstGeom prst="rect">
-            <a:avLst/>
-          </a:prstGeom>
-          <a:noFill/>
-        </p:spPr>
-        <p:txBody>
-          <a:bodyPr wrap="square">
-            <a:spAutoFit/>
-          </a:bodyPr>
-          <a:lstStyle/>
-          <a:p>
-            <a:pPr algn="l"/>
-            <a:r>
-              <a:rPr sz="1000" b="0" i="0">
-                <a:solidFill>
-                  <a:srgbClr val="CCCCCC"/>
-                </a:solidFill>
-              </a:rPr>
-              <a:t>Click any provider to see exactly which claims triggered each flag</a:t>
-            </a:r>
-          </a:p>
-        </p:txBody>
-      </p:sp>
-      <p:sp>
-        <p:nvSpPr>
-          <p:cNvPr id="20" name="Rectangle 19"/>
+              <a:t>Under Review</a:t>
+            </a:r>
+          </a:p>
+        </p:txBody>
+      </p:sp>
+      <p:sp>
+        <p:nvSpPr>
+          <p:cNvPr id="58" name="TextBox 57"/>
+          <p:cNvSpPr txBox="1"/>
+          <p:nvPr/>
+        </p:nvSpPr>
+        <p:spPr>
+          <a:xfrm>
+            <a:off x="4251959" y="5824728"/>
+            <a:ext cx="3337560" cy="274320"/>
+          </a:xfrm>
+          <a:prstGeom prst="rect">
+            <a:avLst/>
+          </a:prstGeom>
+          <a:noFill/>
+        </p:spPr>
+        <p:txBody>
+          <a:bodyPr wrap="square">
+            <a:spAutoFit/>
+          </a:bodyPr>
+          <a:lstStyle/>
+          <a:p>
+            <a:pPr algn="ctr"/>
+            <a:r>
+              <a:rPr sz="1100" b="0" i="0">
+                <a:solidFill>
+                  <a:srgbClr val="FFFFFF"/>
+                </a:solidFill>
+              </a:rPr>
+              <a:t>Score 1–70</a:t>
+            </a:r>
+          </a:p>
+        </p:txBody>
+      </p:sp>
+      <p:sp>
+        <p:nvSpPr>
+          <p:cNvPr id="59" name="TextBox 58"/>
+          <p:cNvSpPr txBox="1"/>
+          <p:nvPr/>
+        </p:nvSpPr>
+        <p:spPr>
+          <a:xfrm>
+            <a:off x="4251959" y="6099048"/>
+            <a:ext cx="3337560" cy="292608"/>
+          </a:xfrm>
+          <a:prstGeom prst="rect">
+            <a:avLst/>
+          </a:prstGeom>
+          <a:noFill/>
+        </p:spPr>
+        <p:txBody>
+          <a:bodyPr wrap="square">
+            <a:spAutoFit/>
+          </a:bodyPr>
+          <a:lstStyle/>
+          <a:p>
+            <a:pPr algn="ctr"/>
+            <a:r>
+              <a:rPr sz="900" b="0" i="1">
+                <a:solidFill>
+                  <a:srgbClr val="FFFFFF"/>
+                </a:solidFill>
+              </a:rPr>
+              <a:t>At least one signal — human reviews it</a:t>
+            </a:r>
+          </a:p>
+        </p:txBody>
+      </p:sp>
+      <p:sp>
+        <p:nvSpPr>
+          <p:cNvPr id="60" name="Rectangle 59"/>
           <p:cNvSpPr/>
           <p:nvPr/>
         </p:nvSpPr>
         <p:spPr>
           <a:xfrm>
-            <a:off x="9281160" y="3749039"/>
-            <a:ext cx="2743200" cy="1554480"/>
+            <a:off x="8046720" y="5440680"/>
+            <a:ext cx="3520440" cy="1005840"/>
           </a:xfrm>
           <a:prstGeom prst="rect">
             <a:avLst/>
           </a:prstGeom>
           <a:solidFill>
-            <a:srgbClr val="26355C"/>
+            <a:srgbClr val="D62839"/>
           </a:solidFill>
           <a:ln>
             <a:noFill/>
@@ -4155,145 +5641,102 @@
       </p:sp>
       <p:sp>
         <p:nvSpPr>
-          <p:cNvPr id="21" name="Rectangle 20"/>
-          <p:cNvSpPr/>
-          <p:nvPr/>
-        </p:nvSpPr>
-        <p:spPr>
-          <a:xfrm>
-            <a:off x="9281160" y="3749039"/>
-            <a:ext cx="2743200" cy="91440"/>
-          </a:xfrm>
-          <a:prstGeom prst="rect">
-            <a:avLst/>
-          </a:prstGeom>
-          <a:solidFill>
-            <a:srgbClr val="2E7D32"/>
-          </a:solidFill>
-          <a:ln>
-            <a:noFill/>
-          </a:ln>
-        </p:spPr>
-        <p:style>
-          <a:lnRef idx="1">
-            <a:schemeClr val="accent1"/>
-          </a:lnRef>
-          <a:fillRef idx="3">
-            <a:schemeClr val="accent1"/>
-          </a:fillRef>
-          <a:effectRef idx="2">
-            <a:schemeClr val="accent1"/>
-          </a:effectRef>
-          <a:fontRef idx="minor">
-            <a:schemeClr val="lt1"/>
-          </a:fontRef>
-        </p:style>
-        <p:txBody>
-          <a:bodyPr rtlCol="0" anchor="ctr"/>
-          <a:lstStyle/>
-          <a:p>
-            <a:pPr algn="ctr"/>
-          </a:p>
-        </p:txBody>
-      </p:sp>
-      <p:sp>
-        <p:nvSpPr>
-          <p:cNvPr id="22" name="TextBox 21"/>
-          <p:cNvSpPr txBox="1"/>
-          <p:nvPr/>
-        </p:nvSpPr>
-        <p:spPr>
-          <a:xfrm>
-            <a:off x="9445752" y="3913632"/>
-            <a:ext cx="2423160" cy="347472"/>
-          </a:xfrm>
-          <a:prstGeom prst="rect">
-            <a:avLst/>
-          </a:prstGeom>
-          <a:noFill/>
-        </p:spPr>
-        <p:txBody>
-          <a:bodyPr wrap="square">
-            <a:spAutoFit/>
-          </a:bodyPr>
-          <a:lstStyle/>
-          <a:p>
-            <a:pPr algn="l"/>
-            <a:r>
-              <a:rPr sz="1300" b="1" i="0">
+          <p:cNvPr id="61" name="TextBox 60"/>
+          <p:cNvSpPr txBox="1"/>
+          <p:nvPr/>
+        </p:nvSpPr>
+        <p:spPr>
+          <a:xfrm>
+            <a:off x="8138160" y="5458968"/>
+            <a:ext cx="3337560" cy="365760"/>
+          </a:xfrm>
+          <a:prstGeom prst="rect">
+            <a:avLst/>
+          </a:prstGeom>
+          <a:noFill/>
+        </p:spPr>
+        <p:txBody>
+          <a:bodyPr wrap="square">
+            <a:spAutoFit/>
+          </a:bodyPr>
+          <a:lstStyle/>
+          <a:p>
+            <a:pPr algn="ctr"/>
+            <a:r>
+              <a:rPr sz="1400" b="1" i="0">
                 <a:solidFill>
                   <a:srgbClr val="FFFFFF"/>
                 </a:solidFill>
               </a:rPr>
-              <a:t>Review panel</a:t>
-            </a:r>
-          </a:p>
-        </p:txBody>
-      </p:sp>
-      <p:sp>
-        <p:nvSpPr>
-          <p:cNvPr id="23" name="TextBox 22"/>
-          <p:cNvSpPr txBox="1"/>
-          <p:nvPr/>
-        </p:nvSpPr>
-        <p:spPr>
-          <a:xfrm>
-            <a:off x="9445752" y="4279392"/>
-            <a:ext cx="2423160" cy="822960"/>
-          </a:xfrm>
-          <a:prstGeom prst="rect">
-            <a:avLst/>
-          </a:prstGeom>
-          <a:noFill/>
-        </p:spPr>
-        <p:txBody>
-          <a:bodyPr wrap="square">
-            <a:spAutoFit/>
-          </a:bodyPr>
-          <a:lstStyle/>
-          <a:p>
-            <a:pPr algn="l"/>
-            <a:r>
-              <a:rPr sz="1000" b="0" i="0">
-                <a:solidFill>
-                  <a:srgbClr val="CCCCCC"/>
-                </a:solidFill>
-              </a:rPr>
-              <a:t>Submit a decision on any provider — approve, escalate, or blacklist</a:t>
-            </a:r>
-          </a:p>
-        </p:txBody>
-      </p:sp>
-      <p:sp>
-        <p:nvSpPr>
-          <p:cNvPr id="24" name="TextBox 23"/>
-          <p:cNvSpPr txBox="1"/>
-          <p:nvPr/>
-        </p:nvSpPr>
-        <p:spPr>
-          <a:xfrm>
-            <a:off x="502920" y="5650992"/>
-            <a:ext cx="11155680" cy="347472"/>
-          </a:xfrm>
-          <a:prstGeom prst="rect">
-            <a:avLst/>
-          </a:prstGeom>
-          <a:noFill/>
-        </p:spPr>
-        <p:txBody>
-          <a:bodyPr wrap="square">
-            <a:spAutoFit/>
-          </a:bodyPr>
-          <a:lstStyle/>
-          <a:p>
-            <a:pPr algn="ctr"/>
-            <a:r>
-              <a:rPr sz="1000" b="0" i="0">
-                <a:solidFill>
-                  <a:srgbClr val="7788AA"/>
-                </a:solidFill>
-              </a:rPr>
-              <a:t>Built with  Next.js + TypeScript  ·  Python FastAPI  ·  PostgreSQL  ·  Full FR/EN localisation</a:t>
+              <a:t>Payments Held</a:t>
+            </a:r>
+          </a:p>
+        </p:txBody>
+      </p:sp>
+      <p:sp>
+        <p:nvSpPr>
+          <p:cNvPr id="62" name="TextBox 61"/>
+          <p:cNvSpPr txBox="1"/>
+          <p:nvPr/>
+        </p:nvSpPr>
+        <p:spPr>
+          <a:xfrm>
+            <a:off x="8138160" y="5824728"/>
+            <a:ext cx="3337560" cy="274320"/>
+          </a:xfrm>
+          <a:prstGeom prst="rect">
+            <a:avLst/>
+          </a:prstGeom>
+          <a:noFill/>
+        </p:spPr>
+        <p:txBody>
+          <a:bodyPr wrap="square">
+            <a:spAutoFit/>
+          </a:bodyPr>
+          <a:lstStyle/>
+          <a:p>
+            <a:pPr algn="ctr"/>
+            <a:r>
+              <a:rPr sz="1100" b="0" i="0">
+                <a:solidFill>
+                  <a:srgbClr val="FFFFFF"/>
+                </a:solidFill>
+              </a:rPr>
+              <a:t>Score &gt; 70</a:t>
+            </a:r>
+          </a:p>
+        </p:txBody>
+      </p:sp>
+      <p:sp>
+        <p:nvSpPr>
+          <p:cNvPr id="63" name="TextBox 62"/>
+          <p:cNvSpPr txBox="1"/>
+          <p:nvPr/>
+        </p:nvSpPr>
+        <p:spPr>
+          <a:xfrm>
+            <a:off x="8138160" y="6099048"/>
+            <a:ext cx="3337560" cy="292608"/>
+          </a:xfrm>
+          <a:prstGeom prst="rect">
+            <a:avLst/>
+          </a:prstGeom>
+          <a:noFill/>
+        </p:spPr>
+        <p:txBody>
+          <a:bodyPr wrap="square">
+            <a:spAutoFit/>
+          </a:bodyPr>
+          <a:lstStyle/>
+          <a:p>
+            <a:pPr algn="ctr"/>
+            <a:r>
+              <a:rPr sz="900" b="0" i="1">
+                <a:solidFill>
+                  <a:srgbClr val="FFFFFF"/>
+                </a:solidFill>
+              </a:rPr>
+              <a:t>Strong evidence — payments suspended</a:t>
             </a:r>
           </a:p>
         </p:txBody>
@@ -4367,51 +5810,8 @@
         </p:nvSpPr>
         <p:spPr>
           <a:xfrm>
-            <a:off x="0" y="5303520"/>
-            <a:ext cx="12188952" cy="1554480"/>
-          </a:xfrm>
-          <a:prstGeom prst="rect">
-            <a:avLst/>
-          </a:prstGeom>
-          <a:solidFill>
-            <a:srgbClr val="D62839"/>
-          </a:solidFill>
-          <a:ln>
-            <a:noFill/>
-          </a:ln>
-        </p:spPr>
-        <p:style>
-          <a:lnRef idx="1">
-            <a:schemeClr val="accent1"/>
-          </a:lnRef>
-          <a:fillRef idx="3">
-            <a:schemeClr val="accent1"/>
-          </a:fillRef>
-          <a:effectRef idx="2">
-            <a:schemeClr val="accent1"/>
-          </a:effectRef>
-          <a:fontRef idx="minor">
-            <a:schemeClr val="lt1"/>
-          </a:fontRef>
-        </p:style>
-        <p:txBody>
-          <a:bodyPr rtlCol="0" anchor="ctr"/>
-          <a:lstStyle/>
-          <a:p>
-            <a:pPr algn="ctr"/>
-          </a:p>
-        </p:txBody>
-      </p:sp>
-      <p:sp>
-        <p:nvSpPr>
-          <p:cNvPr id="4" name="Rectangle 3"/>
-          <p:cNvSpPr/>
-          <p:nvPr/>
-        </p:nvSpPr>
-        <p:spPr>
-          <a:xfrm>
             <a:off x="0" y="0"/>
-            <a:ext cx="164592" cy="6858000"/>
+            <a:ext cx="228600" cy="6858000"/>
           </a:xfrm>
           <a:prstGeom prst="rect">
             <a:avLst/>
@@ -4447,20 +5847,20 @@
       </p:sp>
       <p:sp>
         <p:nvSpPr>
-          <p:cNvPr id="5" name="Rectangle 4"/>
+          <p:cNvPr id="4" name="Rectangle 3"/>
           <p:cNvSpPr/>
           <p:nvPr/>
         </p:nvSpPr>
         <p:spPr>
           <a:xfrm>
-            <a:off x="457200" y="1463040"/>
-            <a:ext cx="2011680" cy="502920"/>
+            <a:off x="0" y="5532120"/>
+            <a:ext cx="12188952" cy="1325880"/>
           </a:xfrm>
           <a:prstGeom prst="rect">
             <a:avLst/>
           </a:prstGeom>
           <a:solidFill>
-            <a:srgbClr val="F5A623"/>
+            <a:srgbClr val="0D1730"/>
           </a:solidFill>
           <a:ln>
             <a:noFill/>
@@ -4490,137 +5890,753 @@
       </p:sp>
       <p:sp>
         <p:nvSpPr>
+          <p:cNvPr id="5" name="TextBox 4"/>
+          <p:cNvSpPr txBox="1"/>
+          <p:nvPr/>
+        </p:nvSpPr>
+        <p:spPr>
+          <a:xfrm>
+            <a:off x="502920" y="640080"/>
+            <a:ext cx="9144000" cy="475488"/>
+          </a:xfrm>
+          <a:prstGeom prst="rect">
+            <a:avLst/>
+          </a:prstGeom>
+          <a:noFill/>
+        </p:spPr>
+        <p:txBody>
+          <a:bodyPr wrap="square">
+            <a:spAutoFit/>
+          </a:bodyPr>
+          <a:lstStyle/>
+          <a:p>
+            <a:pPr algn="l"/>
+            <a:r>
+              <a:rPr sz="2000" b="0" i="1">
+                <a:solidFill>
+                  <a:srgbClr val="CCCCCC"/>
+                </a:solidFill>
+              </a:rPr>
+              <a:t>Beyond the analysis —</a:t>
+            </a:r>
+          </a:p>
+        </p:txBody>
+      </p:sp>
+      <p:sp>
+        <p:nvSpPr>
           <p:cNvPr id="6" name="TextBox 5"/>
           <p:cNvSpPr txBox="1"/>
           <p:nvPr/>
         </p:nvSpPr>
         <p:spPr>
           <a:xfrm>
-            <a:off x="457200" y="1463040"/>
-            <a:ext cx="2011680" cy="502920"/>
-          </a:xfrm>
-          <a:prstGeom prst="rect">
-            <a:avLst/>
-          </a:prstGeom>
-          <a:noFill/>
-        </p:spPr>
-        <p:txBody>
-          <a:bodyPr wrap="square">
-            <a:spAutoFit/>
-          </a:bodyPr>
-          <a:lstStyle/>
-          <a:p>
-            <a:pPr algn="ctr"/>
+            <a:off x="502920" y="1188720"/>
+            <a:ext cx="10515600" cy="1463040"/>
+          </a:xfrm>
+          <a:prstGeom prst="rect">
+            <a:avLst/>
+          </a:prstGeom>
+          <a:noFill/>
+        </p:spPr>
+        <p:txBody>
+          <a:bodyPr wrap="square">
+            <a:spAutoFit/>
+          </a:bodyPr>
+          <a:lstStyle/>
+          <a:p>
+            <a:pPr algn="l"/>
+            <a:r>
+              <a:rPr sz="4400" b="1" i="0">
+                <a:solidFill>
+                  <a:srgbClr val="FFFFFF"/>
+                </a:solidFill>
+              </a:rPr>
+              <a:t>we built a working system
+around it</a:t>
+            </a:r>
+          </a:p>
+        </p:txBody>
+      </p:sp>
+      <p:sp>
+        <p:nvSpPr>
+          <p:cNvPr id="7" name="TextBox 6"/>
+          <p:cNvSpPr txBox="1"/>
+          <p:nvPr/>
+        </p:nvSpPr>
+        <p:spPr>
+          <a:xfrm>
+            <a:off x="502920" y="2834640"/>
+            <a:ext cx="8686800" cy="777240"/>
+          </a:xfrm>
+          <a:prstGeom prst="rect">
+            <a:avLst/>
+          </a:prstGeom>
+          <a:noFill/>
+        </p:spPr>
+        <p:txBody>
+          <a:bodyPr wrap="square">
+            <a:spAutoFit/>
+          </a:bodyPr>
+          <a:lstStyle/>
+          <a:p>
+            <a:pPr algn="l"/>
+            <a:r>
+              <a:rPr sz="1400" b="0" i="0">
+                <a:solidFill>
+                  <a:srgbClr val="CCCCCC"/>
+                </a:solidFill>
+              </a:rPr>
+              <a:t>The detection logic above is packaged into a full web application that an ops team can actually use day-to-day: upload new claims, run detection with one click, and review every flagged provider with full evidence.</a:t>
+            </a:r>
+          </a:p>
+        </p:txBody>
+      </p:sp>
+      <p:sp>
+        <p:nvSpPr>
+          <p:cNvPr id="8" name="Rectangle 7"/>
+          <p:cNvSpPr/>
+          <p:nvPr/>
+        </p:nvSpPr>
+        <p:spPr>
+          <a:xfrm>
+            <a:off x="502920" y="3749039"/>
+            <a:ext cx="2743200" cy="1554480"/>
+          </a:xfrm>
+          <a:prstGeom prst="rect">
+            <a:avLst/>
+          </a:prstGeom>
+          <a:solidFill>
+            <a:srgbClr val="26355C"/>
+          </a:solidFill>
+          <a:ln>
+            <a:noFill/>
+          </a:ln>
+        </p:spPr>
+        <p:style>
+          <a:lnRef idx="1">
+            <a:schemeClr val="accent1"/>
+          </a:lnRef>
+          <a:fillRef idx="3">
+            <a:schemeClr val="accent1"/>
+          </a:fillRef>
+          <a:effectRef idx="2">
+            <a:schemeClr val="accent1"/>
+          </a:effectRef>
+          <a:fontRef idx="minor">
+            <a:schemeClr val="lt1"/>
+          </a:fontRef>
+        </p:style>
+        <p:txBody>
+          <a:bodyPr rtlCol="0" anchor="ctr"/>
+          <a:lstStyle/>
+          <a:p>
+            <a:pPr algn="ctr"/>
+          </a:p>
+        </p:txBody>
+      </p:sp>
+      <p:sp>
+        <p:nvSpPr>
+          <p:cNvPr id="9" name="Rectangle 8"/>
+          <p:cNvSpPr/>
+          <p:nvPr/>
+        </p:nvSpPr>
+        <p:spPr>
+          <a:xfrm>
+            <a:off x="502920" y="3749039"/>
+            <a:ext cx="2743200" cy="91440"/>
+          </a:xfrm>
+          <a:prstGeom prst="rect">
+            <a:avLst/>
+          </a:prstGeom>
+          <a:solidFill>
+            <a:srgbClr val="1A78C2"/>
+          </a:solidFill>
+          <a:ln>
+            <a:noFill/>
+          </a:ln>
+        </p:spPr>
+        <p:style>
+          <a:lnRef idx="1">
+            <a:schemeClr val="accent1"/>
+          </a:lnRef>
+          <a:fillRef idx="3">
+            <a:schemeClr val="accent1"/>
+          </a:fillRef>
+          <a:effectRef idx="2">
+            <a:schemeClr val="accent1"/>
+          </a:effectRef>
+          <a:fontRef idx="minor">
+            <a:schemeClr val="lt1"/>
+          </a:fontRef>
+        </p:style>
+        <p:txBody>
+          <a:bodyPr rtlCol="0" anchor="ctr"/>
+          <a:lstStyle/>
+          <a:p>
+            <a:pPr algn="ctr"/>
+          </a:p>
+        </p:txBody>
+      </p:sp>
+      <p:sp>
+        <p:nvSpPr>
+          <p:cNvPr id="10" name="TextBox 9"/>
+          <p:cNvSpPr txBox="1"/>
+          <p:nvPr/>
+        </p:nvSpPr>
+        <p:spPr>
+          <a:xfrm>
+            <a:off x="667512" y="3913632"/>
+            <a:ext cx="2423160" cy="347472"/>
+          </a:xfrm>
+          <a:prstGeom prst="rect">
+            <a:avLst/>
+          </a:prstGeom>
+          <a:noFill/>
+        </p:spPr>
+        <p:txBody>
+          <a:bodyPr wrap="square">
+            <a:spAutoFit/>
+          </a:bodyPr>
+          <a:lstStyle/>
+          <a:p>
+            <a:pPr algn="l"/>
             <a:r>
               <a:rPr sz="1300" b="1" i="0">
                 <a:solidFill>
-                  <a:srgbClr val="1A2440"/>
-                </a:solidFill>
-              </a:rPr>
-              <a:t>QUESTION 3</a:t>
-            </a:r>
-          </a:p>
-        </p:txBody>
-      </p:sp>
-      <p:sp>
-        <p:nvSpPr>
-          <p:cNvPr id="7" name="TextBox 6"/>
-          <p:cNvSpPr txBox="1"/>
-          <p:nvPr/>
-        </p:nvSpPr>
-        <p:spPr>
-          <a:xfrm>
-            <a:off x="457200" y="2103120"/>
-            <a:ext cx="11430000" cy="457200"/>
-          </a:xfrm>
-          <a:prstGeom prst="rect">
-            <a:avLst/>
-          </a:prstGeom>
-          <a:noFill/>
-        </p:spPr>
-        <p:txBody>
-          <a:bodyPr wrap="square">
-            <a:spAutoFit/>
-          </a:bodyPr>
-          <a:lstStyle/>
-          <a:p>
-            <a:pPr algn="l"/>
-            <a:r>
-              <a:rPr sz="1600" b="0" i="1">
+                  <a:srgbClr val="FFFFFF"/>
+                </a:solidFill>
+              </a:rPr>
+              <a:t>Dashboard</a:t>
+            </a:r>
+          </a:p>
+        </p:txBody>
+      </p:sp>
+      <p:sp>
+        <p:nvSpPr>
+          <p:cNvPr id="11" name="TextBox 10"/>
+          <p:cNvSpPr txBox="1"/>
+          <p:nvPr/>
+        </p:nvSpPr>
+        <p:spPr>
+          <a:xfrm>
+            <a:off x="667512" y="4279392"/>
+            <a:ext cx="2423160" cy="822960"/>
+          </a:xfrm>
+          <a:prstGeom prst="rect">
+            <a:avLst/>
+          </a:prstGeom>
+          <a:noFill/>
+        </p:spPr>
+        <p:txBody>
+          <a:bodyPr wrap="square">
+            <a:spAutoFit/>
+          </a:bodyPr>
+          <a:lstStyle/>
+          <a:p>
+            <a:pPr algn="l"/>
+            <a:r>
+              <a:rPr sz="1000" b="0" i="0">
                 <a:solidFill>
                   <a:srgbClr val="CCCCCC"/>
                 </a:solidFill>
               </a:rPr>
-              <a:t>Recommendations</a:t>
-            </a:r>
-          </a:p>
-        </p:txBody>
-      </p:sp>
-      <p:sp>
-        <p:nvSpPr>
-          <p:cNvPr id="8" name="TextBox 7"/>
-          <p:cNvSpPr txBox="1"/>
-          <p:nvPr/>
-        </p:nvSpPr>
-        <p:spPr>
-          <a:xfrm>
-            <a:off x="457200" y="2697480"/>
-            <a:ext cx="11430000" cy="1371600"/>
-          </a:xfrm>
-          <a:prstGeom prst="rect">
-            <a:avLst/>
-          </a:prstGeom>
-          <a:noFill/>
-        </p:spPr>
-        <p:txBody>
-          <a:bodyPr wrap="square">
-            <a:spAutoFit/>
-          </a:bodyPr>
-          <a:lstStyle/>
-          <a:p>
-            <a:pPr algn="l"/>
-            <a:r>
-              <a:rPr sz="4000" b="1" i="0">
+              <a:t>Live risk scores, flagged provider count, recent review activity</a:t>
+            </a:r>
+          </a:p>
+        </p:txBody>
+      </p:sp>
+      <p:sp>
+        <p:nvSpPr>
+          <p:cNvPr id="12" name="Rectangle 11"/>
+          <p:cNvSpPr/>
+          <p:nvPr/>
+        </p:nvSpPr>
+        <p:spPr>
+          <a:xfrm>
+            <a:off x="3429000" y="3749039"/>
+            <a:ext cx="2743200" cy="1554480"/>
+          </a:xfrm>
+          <a:prstGeom prst="rect">
+            <a:avLst/>
+          </a:prstGeom>
+          <a:solidFill>
+            <a:srgbClr val="26355C"/>
+          </a:solidFill>
+          <a:ln>
+            <a:noFill/>
+          </a:ln>
+        </p:spPr>
+        <p:style>
+          <a:lnRef idx="1">
+            <a:schemeClr val="accent1"/>
+          </a:lnRef>
+          <a:fillRef idx="3">
+            <a:schemeClr val="accent1"/>
+          </a:fillRef>
+          <a:effectRef idx="2">
+            <a:schemeClr val="accent1"/>
+          </a:effectRef>
+          <a:fontRef idx="minor">
+            <a:schemeClr val="lt1"/>
+          </a:fontRef>
+        </p:style>
+        <p:txBody>
+          <a:bodyPr rtlCol="0" anchor="ctr"/>
+          <a:lstStyle/>
+          <a:p>
+            <a:pPr algn="ctr"/>
+          </a:p>
+        </p:txBody>
+      </p:sp>
+      <p:sp>
+        <p:nvSpPr>
+          <p:cNvPr id="13" name="Rectangle 12"/>
+          <p:cNvSpPr/>
+          <p:nvPr/>
+        </p:nvSpPr>
+        <p:spPr>
+          <a:xfrm>
+            <a:off x="3429000" y="3749039"/>
+            <a:ext cx="2743200" cy="91440"/>
+          </a:xfrm>
+          <a:prstGeom prst="rect">
+            <a:avLst/>
+          </a:prstGeom>
+          <a:solidFill>
+            <a:srgbClr val="0D7A8E"/>
+          </a:solidFill>
+          <a:ln>
+            <a:noFill/>
+          </a:ln>
+        </p:spPr>
+        <p:style>
+          <a:lnRef idx="1">
+            <a:schemeClr val="accent1"/>
+          </a:lnRef>
+          <a:fillRef idx="3">
+            <a:schemeClr val="accent1"/>
+          </a:fillRef>
+          <a:effectRef idx="2">
+            <a:schemeClr val="accent1"/>
+          </a:effectRef>
+          <a:fontRef idx="minor">
+            <a:schemeClr val="lt1"/>
+          </a:fontRef>
+        </p:style>
+        <p:txBody>
+          <a:bodyPr rtlCol="0" anchor="ctr"/>
+          <a:lstStyle/>
+          <a:p>
+            <a:pPr algn="ctr"/>
+          </a:p>
+        </p:txBody>
+      </p:sp>
+      <p:sp>
+        <p:nvSpPr>
+          <p:cNvPr id="14" name="TextBox 13"/>
+          <p:cNvSpPr txBox="1"/>
+          <p:nvPr/>
+        </p:nvSpPr>
+        <p:spPr>
+          <a:xfrm>
+            <a:off x="3593592" y="3913632"/>
+            <a:ext cx="2423160" cy="347472"/>
+          </a:xfrm>
+          <a:prstGeom prst="rect">
+            <a:avLst/>
+          </a:prstGeom>
+          <a:noFill/>
+        </p:spPr>
+        <p:txBody>
+          <a:bodyPr wrap="square">
+            <a:spAutoFit/>
+          </a:bodyPr>
+          <a:lstStyle/>
+          <a:p>
+            <a:pPr algn="l"/>
+            <a:r>
+              <a:rPr sz="1300" b="1" i="0">
                 <a:solidFill>
                   <a:srgbClr val="FFFFFF"/>
                 </a:solidFill>
               </a:rPr>
-              <a:t>What should happen
-with these providers?</a:t>
-            </a:r>
-          </a:p>
-        </p:txBody>
-      </p:sp>
-      <p:sp>
-        <p:nvSpPr>
-          <p:cNvPr id="9" name="TextBox 8"/>
-          <p:cNvSpPr txBox="1"/>
-          <p:nvPr/>
-        </p:nvSpPr>
-        <p:spPr>
-          <a:xfrm>
-            <a:off x="457200" y="5440680"/>
-            <a:ext cx="11430000" cy="548640"/>
-          </a:xfrm>
-          <a:prstGeom prst="rect">
-            <a:avLst/>
-          </a:prstGeom>
-          <a:noFill/>
-        </p:spPr>
-        <p:txBody>
-          <a:bodyPr wrap="square">
-            <a:spAutoFit/>
-          </a:bodyPr>
-          <a:lstStyle/>
-          <a:p>
-            <a:pPr algn="l"/>
-            <a:r>
-              <a:rPr sz="1300" b="0" i="1">
+              <a:t>Provider list</a:t>
+            </a:r>
+          </a:p>
+        </p:txBody>
+      </p:sp>
+      <p:sp>
+        <p:nvSpPr>
+          <p:cNvPr id="15" name="TextBox 14"/>
+          <p:cNvSpPr txBox="1"/>
+          <p:nvPr/>
+        </p:nvSpPr>
+        <p:spPr>
+          <a:xfrm>
+            <a:off x="3593592" y="4279392"/>
+            <a:ext cx="2423160" cy="822960"/>
+          </a:xfrm>
+          <a:prstGeom prst="rect">
+            <a:avLst/>
+          </a:prstGeom>
+          <a:noFill/>
+        </p:spPr>
+        <p:txBody>
+          <a:bodyPr wrap="square">
+            <a:spAutoFit/>
+          </a:bodyPr>
+          <a:lstStyle/>
+          <a:p>
+            <a:pPr algn="l"/>
+            <a:r>
+              <a:rPr sz="1000" b="0" i="0">
+                <a:solidFill>
+                  <a:srgbClr val="CCCCCC"/>
+                </a:solidFill>
+              </a:rPr>
+              <a:t>Run detection · search and filter · see every provider's risk score</a:t>
+            </a:r>
+          </a:p>
+        </p:txBody>
+      </p:sp>
+      <p:sp>
+        <p:nvSpPr>
+          <p:cNvPr id="16" name="Rectangle 15"/>
+          <p:cNvSpPr/>
+          <p:nvPr/>
+        </p:nvSpPr>
+        <p:spPr>
+          <a:xfrm>
+            <a:off x="6355080" y="3749039"/>
+            <a:ext cx="2743200" cy="1554480"/>
+          </a:xfrm>
+          <a:prstGeom prst="rect">
+            <a:avLst/>
+          </a:prstGeom>
+          <a:solidFill>
+            <a:srgbClr val="26355C"/>
+          </a:solidFill>
+          <a:ln>
+            <a:noFill/>
+          </a:ln>
+        </p:spPr>
+        <p:style>
+          <a:lnRef idx="1">
+            <a:schemeClr val="accent1"/>
+          </a:lnRef>
+          <a:fillRef idx="3">
+            <a:schemeClr val="accent1"/>
+          </a:fillRef>
+          <a:effectRef idx="2">
+            <a:schemeClr val="accent1"/>
+          </a:effectRef>
+          <a:fontRef idx="minor">
+            <a:schemeClr val="lt1"/>
+          </a:fontRef>
+        </p:style>
+        <p:txBody>
+          <a:bodyPr rtlCol="0" anchor="ctr"/>
+          <a:lstStyle/>
+          <a:p>
+            <a:pPr algn="ctr"/>
+          </a:p>
+        </p:txBody>
+      </p:sp>
+      <p:sp>
+        <p:nvSpPr>
+          <p:cNvPr id="17" name="Rectangle 16"/>
+          <p:cNvSpPr/>
+          <p:nvPr/>
+        </p:nvSpPr>
+        <p:spPr>
+          <a:xfrm>
+            <a:off x="6355080" y="3749039"/>
+            <a:ext cx="2743200" cy="91440"/>
+          </a:xfrm>
+          <a:prstGeom prst="rect">
+            <a:avLst/>
+          </a:prstGeom>
+          <a:solidFill>
+            <a:srgbClr val="E07B39"/>
+          </a:solidFill>
+          <a:ln>
+            <a:noFill/>
+          </a:ln>
+        </p:spPr>
+        <p:style>
+          <a:lnRef idx="1">
+            <a:schemeClr val="accent1"/>
+          </a:lnRef>
+          <a:fillRef idx="3">
+            <a:schemeClr val="accent1"/>
+          </a:fillRef>
+          <a:effectRef idx="2">
+            <a:schemeClr val="accent1"/>
+          </a:effectRef>
+          <a:fontRef idx="minor">
+            <a:schemeClr val="lt1"/>
+          </a:fontRef>
+        </p:style>
+        <p:txBody>
+          <a:bodyPr rtlCol="0" anchor="ctr"/>
+          <a:lstStyle/>
+          <a:p>
+            <a:pPr algn="ctr"/>
+          </a:p>
+        </p:txBody>
+      </p:sp>
+      <p:sp>
+        <p:nvSpPr>
+          <p:cNvPr id="18" name="TextBox 17"/>
+          <p:cNvSpPr txBox="1"/>
+          <p:nvPr/>
+        </p:nvSpPr>
+        <p:spPr>
+          <a:xfrm>
+            <a:off x="6519672" y="3913632"/>
+            <a:ext cx="2423160" cy="347472"/>
+          </a:xfrm>
+          <a:prstGeom prst="rect">
+            <a:avLst/>
+          </a:prstGeom>
+          <a:noFill/>
+        </p:spPr>
+        <p:txBody>
+          <a:bodyPr wrap="square">
+            <a:spAutoFit/>
+          </a:bodyPr>
+          <a:lstStyle/>
+          <a:p>
+            <a:pPr algn="l"/>
+            <a:r>
+              <a:rPr sz="1300" b="1" i="0">
                 <a:solidFill>
                   <a:srgbClr val="FFFFFF"/>
                 </a:solidFill>
               </a:rPr>
-              <a:t>Immediate actions · system limitations · how to improve detection over time</a:t>
+              <a:t>Flag evidence</a:t>
+            </a:r>
+          </a:p>
+        </p:txBody>
+      </p:sp>
+      <p:sp>
+        <p:nvSpPr>
+          <p:cNvPr id="19" name="TextBox 18"/>
+          <p:cNvSpPr txBox="1"/>
+          <p:nvPr/>
+        </p:nvSpPr>
+        <p:spPr>
+          <a:xfrm>
+            <a:off x="6519672" y="4279392"/>
+            <a:ext cx="2423160" cy="822960"/>
+          </a:xfrm>
+          <a:prstGeom prst="rect">
+            <a:avLst/>
+          </a:prstGeom>
+          <a:noFill/>
+        </p:spPr>
+        <p:txBody>
+          <a:bodyPr wrap="square">
+            <a:spAutoFit/>
+          </a:bodyPr>
+          <a:lstStyle/>
+          <a:p>
+            <a:pPr algn="l"/>
+            <a:r>
+              <a:rPr sz="1000" b="0" i="0">
+                <a:solidFill>
+                  <a:srgbClr val="CCCCCC"/>
+                </a:solidFill>
+              </a:rPr>
+              <a:t>Click any provider to see exactly which claims triggered each flag</a:t>
+            </a:r>
+          </a:p>
+        </p:txBody>
+      </p:sp>
+      <p:sp>
+        <p:nvSpPr>
+          <p:cNvPr id="20" name="Rectangle 19"/>
+          <p:cNvSpPr/>
+          <p:nvPr/>
+        </p:nvSpPr>
+        <p:spPr>
+          <a:xfrm>
+            <a:off x="9281160" y="3749039"/>
+            <a:ext cx="2743200" cy="1554480"/>
+          </a:xfrm>
+          <a:prstGeom prst="rect">
+            <a:avLst/>
+          </a:prstGeom>
+          <a:solidFill>
+            <a:srgbClr val="26355C"/>
+          </a:solidFill>
+          <a:ln>
+            <a:noFill/>
+          </a:ln>
+        </p:spPr>
+        <p:style>
+          <a:lnRef idx="1">
+            <a:schemeClr val="accent1"/>
+          </a:lnRef>
+          <a:fillRef idx="3">
+            <a:schemeClr val="accent1"/>
+          </a:fillRef>
+          <a:effectRef idx="2">
+            <a:schemeClr val="accent1"/>
+          </a:effectRef>
+          <a:fontRef idx="minor">
+            <a:schemeClr val="lt1"/>
+          </a:fontRef>
+        </p:style>
+        <p:txBody>
+          <a:bodyPr rtlCol="0" anchor="ctr"/>
+          <a:lstStyle/>
+          <a:p>
+            <a:pPr algn="ctr"/>
+          </a:p>
+        </p:txBody>
+      </p:sp>
+      <p:sp>
+        <p:nvSpPr>
+          <p:cNvPr id="21" name="Rectangle 20"/>
+          <p:cNvSpPr/>
+          <p:nvPr/>
+        </p:nvSpPr>
+        <p:spPr>
+          <a:xfrm>
+            <a:off x="9281160" y="3749039"/>
+            <a:ext cx="2743200" cy="91440"/>
+          </a:xfrm>
+          <a:prstGeom prst="rect">
+            <a:avLst/>
+          </a:prstGeom>
+          <a:solidFill>
+            <a:srgbClr val="2E7D32"/>
+          </a:solidFill>
+          <a:ln>
+            <a:noFill/>
+          </a:ln>
+        </p:spPr>
+        <p:style>
+          <a:lnRef idx="1">
+            <a:schemeClr val="accent1"/>
+          </a:lnRef>
+          <a:fillRef idx="3">
+            <a:schemeClr val="accent1"/>
+          </a:fillRef>
+          <a:effectRef idx="2">
+            <a:schemeClr val="accent1"/>
+          </a:effectRef>
+          <a:fontRef idx="minor">
+            <a:schemeClr val="lt1"/>
+          </a:fontRef>
+        </p:style>
+        <p:txBody>
+          <a:bodyPr rtlCol="0" anchor="ctr"/>
+          <a:lstStyle/>
+          <a:p>
+            <a:pPr algn="ctr"/>
+          </a:p>
+        </p:txBody>
+      </p:sp>
+      <p:sp>
+        <p:nvSpPr>
+          <p:cNvPr id="22" name="TextBox 21"/>
+          <p:cNvSpPr txBox="1"/>
+          <p:nvPr/>
+        </p:nvSpPr>
+        <p:spPr>
+          <a:xfrm>
+            <a:off x="9445752" y="3913632"/>
+            <a:ext cx="2423160" cy="347472"/>
+          </a:xfrm>
+          <a:prstGeom prst="rect">
+            <a:avLst/>
+          </a:prstGeom>
+          <a:noFill/>
+        </p:spPr>
+        <p:txBody>
+          <a:bodyPr wrap="square">
+            <a:spAutoFit/>
+          </a:bodyPr>
+          <a:lstStyle/>
+          <a:p>
+            <a:pPr algn="l"/>
+            <a:r>
+              <a:rPr sz="1300" b="1" i="0">
+                <a:solidFill>
+                  <a:srgbClr val="FFFFFF"/>
+                </a:solidFill>
+              </a:rPr>
+              <a:t>Review panel</a:t>
+            </a:r>
+          </a:p>
+        </p:txBody>
+      </p:sp>
+      <p:sp>
+        <p:nvSpPr>
+          <p:cNvPr id="23" name="TextBox 22"/>
+          <p:cNvSpPr txBox="1"/>
+          <p:nvPr/>
+        </p:nvSpPr>
+        <p:spPr>
+          <a:xfrm>
+            <a:off x="9445752" y="4279392"/>
+            <a:ext cx="2423160" cy="822960"/>
+          </a:xfrm>
+          <a:prstGeom prst="rect">
+            <a:avLst/>
+          </a:prstGeom>
+          <a:noFill/>
+        </p:spPr>
+        <p:txBody>
+          <a:bodyPr wrap="square">
+            <a:spAutoFit/>
+          </a:bodyPr>
+          <a:lstStyle/>
+          <a:p>
+            <a:pPr algn="l"/>
+            <a:r>
+              <a:rPr sz="1000" b="0" i="0">
+                <a:solidFill>
+                  <a:srgbClr val="CCCCCC"/>
+                </a:solidFill>
+              </a:rPr>
+              <a:t>Submit a decision on any provider — approve, escalate, or blacklist</a:t>
+            </a:r>
+          </a:p>
+        </p:txBody>
+      </p:sp>
+      <p:sp>
+        <p:nvSpPr>
+          <p:cNvPr id="24" name="TextBox 23"/>
+          <p:cNvSpPr txBox="1"/>
+          <p:nvPr/>
+        </p:nvSpPr>
+        <p:spPr>
+          <a:xfrm>
+            <a:off x="502920" y="5650992"/>
+            <a:ext cx="11155680" cy="347472"/>
+          </a:xfrm>
+          <a:prstGeom prst="rect">
+            <a:avLst/>
+          </a:prstGeom>
+          <a:noFill/>
+        </p:spPr>
+        <p:txBody>
+          <a:bodyPr wrap="square">
+            <a:spAutoFit/>
+          </a:bodyPr>
+          <a:lstStyle/>
+          <a:p>
+            <a:pPr algn="ctr"/>
+            <a:r>
+              <a:rPr sz="1000" b="0" i="0">
+                <a:solidFill>
+                  <a:srgbClr val="7788AA"/>
+                </a:solidFill>
+              </a:rPr>
+              <a:t>Built with  Next.js + TypeScript  ·  Python FastAPI  ·  PostgreSQL  ·  Full FR/EN localisation</a:t>
             </a:r>
           </a:p>
         </p:txBody>
@@ -4652,7 +6668,7 @@
         <p:spPr>
           <a:xfrm>
             <a:off x="0" y="0"/>
-            <a:ext cx="12188952" cy="960120"/>
+            <a:ext cx="12188952" cy="6858000"/>
           </a:xfrm>
           <a:prstGeom prst="rect">
             <a:avLst/>
@@ -4694,8 +6710,51 @@
         </p:nvSpPr>
         <p:spPr>
           <a:xfrm>
-            <a:off x="320040" y="118872"/>
-            <a:ext cx="1097280" cy="292608"/>
+            <a:off x="0" y="5303520"/>
+            <a:ext cx="12188952" cy="1554480"/>
+          </a:xfrm>
+          <a:prstGeom prst="rect">
+            <a:avLst/>
+          </a:prstGeom>
+          <a:solidFill>
+            <a:srgbClr val="D62839"/>
+          </a:solidFill>
+          <a:ln>
+            <a:noFill/>
+          </a:ln>
+        </p:spPr>
+        <p:style>
+          <a:lnRef idx="1">
+            <a:schemeClr val="accent1"/>
+          </a:lnRef>
+          <a:fillRef idx="3">
+            <a:schemeClr val="accent1"/>
+          </a:fillRef>
+          <a:effectRef idx="2">
+            <a:schemeClr val="accent1"/>
+          </a:effectRef>
+          <a:fontRef idx="minor">
+            <a:schemeClr val="lt1"/>
+          </a:fontRef>
+        </p:style>
+        <p:txBody>
+          <a:bodyPr rtlCol="0" anchor="ctr"/>
+          <a:lstStyle/>
+          <a:p>
+            <a:pPr algn="ctr"/>
+          </a:p>
+        </p:txBody>
+      </p:sp>
+      <p:sp>
+        <p:nvSpPr>
+          <p:cNvPr id="4" name="Rectangle 3"/>
+          <p:cNvSpPr/>
+          <p:nvPr/>
+        </p:nvSpPr>
+        <p:spPr>
+          <a:xfrm>
+            <a:off x="0" y="0"/>
+            <a:ext cx="164592" cy="6858000"/>
           </a:xfrm>
           <a:prstGeom prst="rect">
             <a:avLst/>
@@ -4731,6 +6790,290 @@
       </p:sp>
       <p:sp>
         <p:nvSpPr>
+          <p:cNvPr id="5" name="Rectangle 4"/>
+          <p:cNvSpPr/>
+          <p:nvPr/>
+        </p:nvSpPr>
+        <p:spPr>
+          <a:xfrm>
+            <a:off x="457200" y="1463040"/>
+            <a:ext cx="2011680" cy="502920"/>
+          </a:xfrm>
+          <a:prstGeom prst="rect">
+            <a:avLst/>
+          </a:prstGeom>
+          <a:solidFill>
+            <a:srgbClr val="F5A623"/>
+          </a:solidFill>
+          <a:ln>
+            <a:noFill/>
+          </a:ln>
+        </p:spPr>
+        <p:style>
+          <a:lnRef idx="1">
+            <a:schemeClr val="accent1"/>
+          </a:lnRef>
+          <a:fillRef idx="3">
+            <a:schemeClr val="accent1"/>
+          </a:fillRef>
+          <a:effectRef idx="2">
+            <a:schemeClr val="accent1"/>
+          </a:effectRef>
+          <a:fontRef idx="minor">
+            <a:schemeClr val="lt1"/>
+          </a:fontRef>
+        </p:style>
+        <p:txBody>
+          <a:bodyPr rtlCol="0" anchor="ctr"/>
+          <a:lstStyle/>
+          <a:p>
+            <a:pPr algn="ctr"/>
+          </a:p>
+        </p:txBody>
+      </p:sp>
+      <p:sp>
+        <p:nvSpPr>
+          <p:cNvPr id="6" name="TextBox 5"/>
+          <p:cNvSpPr txBox="1"/>
+          <p:nvPr/>
+        </p:nvSpPr>
+        <p:spPr>
+          <a:xfrm>
+            <a:off x="457200" y="1463040"/>
+            <a:ext cx="2011680" cy="502920"/>
+          </a:xfrm>
+          <a:prstGeom prst="rect">
+            <a:avLst/>
+          </a:prstGeom>
+          <a:noFill/>
+        </p:spPr>
+        <p:txBody>
+          <a:bodyPr wrap="square">
+            <a:spAutoFit/>
+          </a:bodyPr>
+          <a:lstStyle/>
+          <a:p>
+            <a:pPr algn="ctr"/>
+            <a:r>
+              <a:rPr sz="1300" b="1" i="0">
+                <a:solidFill>
+                  <a:srgbClr val="1A2440"/>
+                </a:solidFill>
+              </a:rPr>
+              <a:t>QUESTION 3</a:t>
+            </a:r>
+          </a:p>
+        </p:txBody>
+      </p:sp>
+      <p:sp>
+        <p:nvSpPr>
+          <p:cNvPr id="7" name="TextBox 6"/>
+          <p:cNvSpPr txBox="1"/>
+          <p:nvPr/>
+        </p:nvSpPr>
+        <p:spPr>
+          <a:xfrm>
+            <a:off x="457200" y="2103120"/>
+            <a:ext cx="11430000" cy="457200"/>
+          </a:xfrm>
+          <a:prstGeom prst="rect">
+            <a:avLst/>
+          </a:prstGeom>
+          <a:noFill/>
+        </p:spPr>
+        <p:txBody>
+          <a:bodyPr wrap="square">
+            <a:spAutoFit/>
+          </a:bodyPr>
+          <a:lstStyle/>
+          <a:p>
+            <a:pPr algn="l"/>
+            <a:r>
+              <a:rPr sz="1600" b="0" i="1">
+                <a:solidFill>
+                  <a:srgbClr val="CCCCCC"/>
+                </a:solidFill>
+              </a:rPr>
+              <a:t>Recommendations</a:t>
+            </a:r>
+          </a:p>
+        </p:txBody>
+      </p:sp>
+      <p:sp>
+        <p:nvSpPr>
+          <p:cNvPr id="8" name="TextBox 7"/>
+          <p:cNvSpPr txBox="1"/>
+          <p:nvPr/>
+        </p:nvSpPr>
+        <p:spPr>
+          <a:xfrm>
+            <a:off x="457200" y="2697480"/>
+            <a:ext cx="11430000" cy="1371600"/>
+          </a:xfrm>
+          <a:prstGeom prst="rect">
+            <a:avLst/>
+          </a:prstGeom>
+          <a:noFill/>
+        </p:spPr>
+        <p:txBody>
+          <a:bodyPr wrap="square">
+            <a:spAutoFit/>
+          </a:bodyPr>
+          <a:lstStyle/>
+          <a:p>
+            <a:pPr algn="l"/>
+            <a:r>
+              <a:rPr sz="4000" b="1" i="0">
+                <a:solidFill>
+                  <a:srgbClr val="FFFFFF"/>
+                </a:solidFill>
+              </a:rPr>
+              <a:t>What should happen
+with these providers?</a:t>
+            </a:r>
+          </a:p>
+        </p:txBody>
+      </p:sp>
+      <p:sp>
+        <p:nvSpPr>
+          <p:cNvPr id="9" name="TextBox 8"/>
+          <p:cNvSpPr txBox="1"/>
+          <p:nvPr/>
+        </p:nvSpPr>
+        <p:spPr>
+          <a:xfrm>
+            <a:off x="457200" y="5440680"/>
+            <a:ext cx="11430000" cy="548640"/>
+          </a:xfrm>
+          <a:prstGeom prst="rect">
+            <a:avLst/>
+          </a:prstGeom>
+          <a:noFill/>
+        </p:spPr>
+        <p:txBody>
+          <a:bodyPr wrap="square">
+            <a:spAutoFit/>
+          </a:bodyPr>
+          <a:lstStyle/>
+          <a:p>
+            <a:pPr algn="l"/>
+            <a:r>
+              <a:rPr sz="1300" b="0" i="1">
+                <a:solidFill>
+                  <a:srgbClr val="FFFFFF"/>
+                </a:solidFill>
+              </a:rPr>
+              <a:t>Immediate actions · system limitations · how to improve detection over time</a:t>
+            </a:r>
+          </a:p>
+        </p:txBody>
+      </p:sp>
+    </p:spTree>
+  </p:cSld>
+  <p:clrMapOvr>
+    <a:masterClrMapping/>
+  </p:clrMapOvr>
+</p:sld>
+</file>
+
+<file path=ppt/slides/slide13.xml><?xml version="1.0" encoding="utf-8"?>
+<p:sld xmlns:a="http://schemas.openxmlformats.org/drawingml/2006/main" xmlns:p="http://schemas.openxmlformats.org/presentationml/2006/main" xmlns:r="http://schemas.openxmlformats.org/officeDocument/2006/relationships">
+  <p:cSld>
+    <p:spTree>
+      <p:nvGrpSpPr>
+        <p:cNvPr id="1" name=""/>
+        <p:cNvGrpSpPr/>
+        <p:nvPr/>
+      </p:nvGrpSpPr>
+      <p:grpSpPr/>
+      <p:sp>
+        <p:nvSpPr>
+          <p:cNvPr id="2" name="Rectangle 1"/>
+          <p:cNvSpPr/>
+          <p:nvPr/>
+        </p:nvSpPr>
+        <p:spPr>
+          <a:xfrm>
+            <a:off x="0" y="0"/>
+            <a:ext cx="12188952" cy="960120"/>
+          </a:xfrm>
+          <a:prstGeom prst="rect">
+            <a:avLst/>
+          </a:prstGeom>
+          <a:solidFill>
+            <a:srgbClr val="1A2440"/>
+          </a:solidFill>
+          <a:ln>
+            <a:noFill/>
+          </a:ln>
+        </p:spPr>
+        <p:style>
+          <a:lnRef idx="1">
+            <a:schemeClr val="accent1"/>
+          </a:lnRef>
+          <a:fillRef idx="3">
+            <a:schemeClr val="accent1"/>
+          </a:fillRef>
+          <a:effectRef idx="2">
+            <a:schemeClr val="accent1"/>
+          </a:effectRef>
+          <a:fontRef idx="minor">
+            <a:schemeClr val="lt1"/>
+          </a:fontRef>
+        </p:style>
+        <p:txBody>
+          <a:bodyPr rtlCol="0" anchor="ctr"/>
+          <a:lstStyle/>
+          <a:p>
+            <a:pPr algn="ctr"/>
+          </a:p>
+        </p:txBody>
+      </p:sp>
+      <p:sp>
+        <p:nvSpPr>
+          <p:cNvPr id="3" name="Rectangle 2"/>
+          <p:cNvSpPr/>
+          <p:nvPr/>
+        </p:nvSpPr>
+        <p:spPr>
+          <a:xfrm>
+            <a:off x="320040" y="118872"/>
+            <a:ext cx="1097280" cy="292608"/>
+          </a:xfrm>
+          <a:prstGeom prst="rect">
+            <a:avLst/>
+          </a:prstGeom>
+          <a:solidFill>
+            <a:srgbClr val="F5A623"/>
+          </a:solidFill>
+          <a:ln>
+            <a:noFill/>
+          </a:ln>
+        </p:spPr>
+        <p:style>
+          <a:lnRef idx="1">
+            <a:schemeClr val="accent1"/>
+          </a:lnRef>
+          <a:fillRef idx="3">
+            <a:schemeClr val="accent1"/>
+          </a:fillRef>
+          <a:effectRef idx="2">
+            <a:schemeClr val="accent1"/>
+          </a:effectRef>
+          <a:fontRef idx="minor">
+            <a:schemeClr val="lt1"/>
+          </a:fontRef>
+        </p:style>
+        <p:txBody>
+          <a:bodyPr rtlCol="0" anchor="ctr"/>
+          <a:lstStyle/>
+          <a:p>
+            <a:pPr algn="ctr"/>
+          </a:p>
+        </p:txBody>
+      </p:sp>
+      <p:sp>
+        <p:nvSpPr>
           <p:cNvPr id="4" name="TextBox 3"/>
           <p:cNvSpPr txBox="1"/>
           <p:nvPr/>
@@ -5338,7 +7681,7 @@
                   <a:srgbClr val="444444"/>
                 </a:solidFill>
               </a:rPr>
-              <a:t>Co-billing + spike + repeated</a:t>
+              <a:t>Co-billing + spike + repeated + rounds</a:t>
             </a:r>
           </a:p>
         </p:txBody>
@@ -5372,7 +7715,7 @@
                   <a:srgbClr val="444444"/>
                 </a:solidFill>
               </a:rPr>
-              <a:t>Immediate audit — 3 independent fraud signals</a:t>
+              <a:t>Immediate audit — 4 independent fraud signals</a:t>
             </a:r>
           </a:p>
         </p:txBody>
@@ -5551,7 +7894,7 @@
                   <a:srgbClr val="444444"/>
                 </a:solidFill>
               </a:rPr>
-              <a:t>Co-billing + spike</a:t>
+              <a:t>Co-billing + spike + rounds</a:t>
             </a:r>
           </a:p>
         </p:txBody>
@@ -5764,7 +8107,7 @@
                   <a:srgbClr val="444444"/>
                 </a:solidFill>
               </a:rPr>
-              <a:t>Co-billing + spike</a:t>
+              <a:t>Co-billing + spike + rounds</a:t>
             </a:r>
           </a:p>
         </p:txBody>
@@ -5977,7 +8320,7 @@
                   <a:srgbClr val="444444"/>
                 </a:solidFill>
               </a:rPr>
-              <a:t>Co-billing + spike</a:t>
+              <a:t>Co-billing + spike + rounds</a:t>
             </a:r>
           </a:p>
         </p:txBody>
@@ -6122,7 +8465,7 @@
                   <a:srgbClr val="D62839"/>
                 </a:solidFill>
               </a:rPr>
-              <a:t>88</a:t>
+              <a:t>100</a:t>
             </a:r>
           </a:p>
         </p:txBody>
@@ -6190,7 +8533,7 @@
                   <a:srgbClr val="444444"/>
                 </a:solidFill>
               </a:rPr>
-              <a:t>Co-billing + repeated</a:t>
+              <a:t>Co-billing + repeated + rounds</a:t>
             </a:r>
           </a:p>
         </p:txBody>
@@ -6224,7 +8567,7 @@
                   <a:srgbClr val="444444"/>
                 </a:solidFill>
               </a:rPr>
-              <a:t>Audit — repeated billing pattern</a:t>
+              <a:t>Audit — round numbers + repeated billing</a:t>
             </a:r>
           </a:p>
         </p:txBody>
@@ -6244,7 +8587,7 @@
             <a:avLst/>
           </a:prstGeom>
           <a:solidFill>
-            <a:srgbClr val="FFF3E6"/>
+            <a:srgbClr val="FFEBEB"/>
           </a:solidFill>
           <a:ln>
             <a:noFill/>
@@ -6296,7 +8639,7 @@
           <a:p>
             <a:pPr algn="l"/>
             <a:r>
-              <a:rPr sz="1100" b="0" i="0">
+              <a:rPr sz="1100" b="1" i="0">
                 <a:solidFill>
                   <a:srgbClr val="1A2440"/>
                 </a:solidFill>
@@ -6332,10 +8675,10 @@
             <a:r>
               <a:rPr sz="1200" b="1" i="0">
                 <a:solidFill>
-                  <a:srgbClr val="E07B39"/>
-                </a:solidFill>
-              </a:rPr>
-              <a:t>68</a:t>
+                  <a:srgbClr val="D62839"/>
+                </a:solidFill>
+              </a:rPr>
+              <a:t>93</a:t>
             </a:r>
           </a:p>
         </p:txBody>
@@ -6366,10 +8709,10 @@
             <a:r>
               <a:rPr sz="1000" b="1" i="0">
                 <a:solidFill>
-                  <a:srgbClr val="E07B39"/>
-                </a:solidFill>
-              </a:rPr>
-              <a:t>Under review</a:t>
+                  <a:srgbClr val="D62839"/>
+                </a:solidFill>
+              </a:rPr>
+              <a:t>Payments held</a:t>
             </a:r>
           </a:p>
         </p:txBody>
@@ -6403,7 +8746,7 @@
                   <a:srgbClr val="444444"/>
                 </a:solidFill>
               </a:rPr>
-              <a:t>Co-billing + spike</a:t>
+              <a:t>Co-billing + spike + rounds</a:t>
             </a:r>
           </a:p>
         </p:txBody>
@@ -6437,7 +8780,7 @@
                   <a:srgbClr val="444444"/>
                 </a:solidFill>
               </a:rPr>
-              <a:t>Manual review — borderline, monitor closely</a:t>
+              <a:t>Payments held — multiple signals</a:t>
             </a:r>
           </a:p>
         </p:txBody>
@@ -6457,7 +8800,7 @@
             <a:avLst/>
           </a:prstGeom>
           <a:solidFill>
-            <a:srgbClr val="FFF3E6"/>
+            <a:srgbClr val="FFEBEB"/>
           </a:solidFill>
           <a:ln>
             <a:noFill/>
@@ -6509,7 +8852,7 @@
           <a:p>
             <a:pPr algn="l"/>
             <a:r>
-              <a:rPr sz="1100" b="0" i="0">
+              <a:rPr sz="1100" b="1" i="0">
                 <a:solidFill>
                   <a:srgbClr val="1A2440"/>
                 </a:solidFill>
@@ -6545,10 +8888,10 @@
             <a:r>
               <a:rPr sz="1200" b="1" i="0">
                 <a:solidFill>
-                  <a:srgbClr val="E07B39"/>
-                </a:solidFill>
-              </a:rPr>
-              <a:t>50</a:t>
+                  <a:srgbClr val="D62839"/>
+                </a:solidFill>
+              </a:rPr>
+              <a:t>75</a:t>
             </a:r>
           </a:p>
         </p:txBody>
@@ -6579,10 +8922,10 @@
             <a:r>
               <a:rPr sz="1000" b="1" i="0">
                 <a:solidFill>
-                  <a:srgbClr val="E07B39"/>
-                </a:solidFill>
-              </a:rPr>
-              <a:t>Under review</a:t>
+                  <a:srgbClr val="D62839"/>
+                </a:solidFill>
+              </a:rPr>
+              <a:t>Payments held</a:t>
             </a:r>
           </a:p>
         </p:txBody>
@@ -6616,7 +8959,7 @@
                   <a:srgbClr val="444444"/>
                 </a:solidFill>
               </a:rPr>
-              <a:t>Co-billing only</a:t>
+              <a:t>Co-billing + rounds</a:t>
             </a:r>
           </a:p>
         </p:txBody>
@@ -6650,7 +8993,7 @@
                   <a:srgbClr val="444444"/>
                 </a:solidFill>
               </a:rPr>
-              <a:t>Manual review — systematic but below hold threshold</a:t>
+              <a:t>Payments held — systematic round numbers</a:t>
             </a:r>
           </a:p>
         </p:txBody>
@@ -6804,7 +9147,7 @@
                   <a:srgbClr val="444444"/>
                 </a:solidFill>
               </a:rPr>
-              <a:t>·  Get individual claim-level data → detect co-billing at member level (more precise)</a:t>
+              <a:t>·  Get individual claim-level data → detect co-billing and round numbers at member level (more precise)</a:t>
             </a:r>
           </a:p>
         </p:txBody>
@@ -9390,7 +11733,7 @@
                   <a:srgbClr val="FFFFFF"/>
                 </a:solidFill>
               </a:rPr>
-              <a:t>7 out of 12 providers showed at least one red flag · 3 distinct fraud patterns identified</a:t>
+              <a:t>7 out of 12 providers showed at least one red flag · 4 distinct fraud patterns identified</a:t>
             </a:r>
           </a:p>
         </p:txBody>
@@ -10074,7 +12417,7 @@
                   <a:srgbClr val="444444"/>
                 </a:solidFill>
               </a:rPr>
-              <a:t>Co-billing + billing spike + repeated amounts</a:t>
+              <a:t>Co-billing + spike + repeated + round numbers</a:t>
             </a:r>
           </a:p>
         </p:txBody>
@@ -10253,7 +12596,7 @@
                   <a:srgbClr val="444444"/>
                 </a:solidFill>
               </a:rPr>
-              <a:t>Co-billing + billing spike</a:t>
+              <a:t>Co-billing + billing spike + round numbers</a:t>
             </a:r>
           </a:p>
         </p:txBody>
@@ -10432,7 +12775,7 @@
                   <a:srgbClr val="444444"/>
                 </a:solidFill>
               </a:rPr>
-              <a:t>Co-billing + billing spike</a:t>
+              <a:t>Co-billing + billing spike + round numbers</a:t>
             </a:r>
           </a:p>
         </p:txBody>
@@ -10611,7 +12954,7 @@
                   <a:srgbClr val="444444"/>
                 </a:solidFill>
               </a:rPr>
-              <a:t>Co-billing + billing spike</a:t>
+              <a:t>Co-billing + billing spike + round numbers</a:t>
             </a:r>
           </a:p>
         </p:txBody>
@@ -10722,7 +13065,7 @@
                   <a:srgbClr val="D62839"/>
                 </a:solidFill>
               </a:rPr>
-              <a:t>88</a:t>
+              <a:t>100</a:t>
             </a:r>
           </a:p>
         </p:txBody>
@@ -10790,7 +13133,7 @@
                   <a:srgbClr val="444444"/>
                 </a:solidFill>
               </a:rPr>
-              <a:t>Co-billing + repeated amounts</a:t>
+              <a:t>Co-billing + repeated amounts + round numbers</a:t>
             </a:r>
           </a:p>
         </p:txBody>
@@ -10810,7 +13153,7 @@
             <a:avLst/>
           </a:prstGeom>
           <a:solidFill>
-            <a:srgbClr val="FFF6ED"/>
+            <a:srgbClr val="FFEDED"/>
           </a:solidFill>
           <a:ln>
             <a:noFill/>
@@ -10898,10 +13241,10 @@
             <a:r>
               <a:rPr sz="1200" b="1" i="0">
                 <a:solidFill>
-                  <a:srgbClr val="E07B39"/>
-                </a:solidFill>
-              </a:rPr>
-              <a:t>68</a:t>
+                  <a:srgbClr val="D62839"/>
+                </a:solidFill>
+              </a:rPr>
+              <a:t>93</a:t>
             </a:r>
           </a:p>
         </p:txBody>
@@ -10932,10 +13275,10 @@
             <a:r>
               <a:rPr sz="1000" b="1" i="0">
                 <a:solidFill>
-                  <a:srgbClr val="E07B39"/>
-                </a:solidFill>
-              </a:rPr>
-              <a:t>Under review</a:t>
+                  <a:srgbClr val="D62839"/>
+                </a:solidFill>
+              </a:rPr>
+              <a:t>Payments held</a:t>
             </a:r>
           </a:p>
         </p:txBody>
@@ -10969,7 +13312,7 @@
                   <a:srgbClr val="444444"/>
                 </a:solidFill>
               </a:rPr>
-              <a:t>Co-billing + billing spike</a:t>
+              <a:t>Co-billing + billing spike + round numbers</a:t>
             </a:r>
           </a:p>
         </p:txBody>
@@ -10989,7 +13332,7 @@
             <a:avLst/>
           </a:prstGeom>
           <a:solidFill>
-            <a:srgbClr val="FFF6ED"/>
+            <a:srgbClr val="FFEDED"/>
           </a:solidFill>
           <a:ln>
             <a:noFill/>
@@ -11077,10 +13420,10 @@
             <a:r>
               <a:rPr sz="1200" b="1" i="0">
                 <a:solidFill>
-                  <a:srgbClr val="E07B39"/>
-                </a:solidFill>
-              </a:rPr>
-              <a:t>50</a:t>
+                  <a:srgbClr val="D62839"/>
+                </a:solidFill>
+              </a:rPr>
+              <a:t>75</a:t>
             </a:r>
           </a:p>
         </p:txBody>
@@ -11111,10 +13454,10 @@
             <a:r>
               <a:rPr sz="1000" b="1" i="0">
                 <a:solidFill>
-                  <a:srgbClr val="E07B39"/>
-                </a:solidFill>
-              </a:rPr>
-              <a:t>Under review</a:t>
+                  <a:srgbClr val="D62839"/>
+                </a:solidFill>
+              </a:rPr>
+              <a:t>Payments held</a:t>
             </a:r>
           </a:p>
         </p:txBody>
@@ -11148,7 +13491,7 @@
                   <a:srgbClr val="444444"/>
                 </a:solidFill>
               </a:rPr>
-              <a:t>Co-billing</a:t>
+              <a:t>Co-billing + round numbers</a:t>
             </a:r>
           </a:p>
         </p:txBody>
@@ -12120,7 +14463,7 @@
                   <a:srgbClr val="FFFFFF"/>
                 </a:solidFill>
               </a:rPr>
-              <a:t>5 providers had payments automatically held  ·  2 flagged for manual review  ·  5 cleared</a:t>
+              <a:t>7 providers had payments automatically held  ·  0 flagged for manual review  ·  5 cleared</a:t>
             </a:r>
           </a:p>
         </p:txBody>
@@ -17819,7 +20162,7 @@
         <p:spPr>
           <a:xfrm>
             <a:off x="0" y="0"/>
-            <a:ext cx="12188952" cy="6858000"/>
+            <a:ext cx="12188952" cy="960120"/>
           </a:xfrm>
           <a:prstGeom prst="rect">
             <a:avLst/>
@@ -17861,51 +20204,8 @@
         </p:nvSpPr>
         <p:spPr>
           <a:xfrm>
-            <a:off x="0" y="5303520"/>
-            <a:ext cx="12188952" cy="1554480"/>
-          </a:xfrm>
-          <a:prstGeom prst="rect">
-            <a:avLst/>
-          </a:prstGeom>
-          <a:solidFill>
-            <a:srgbClr val="D62839"/>
-          </a:solidFill>
-          <a:ln>
-            <a:noFill/>
-          </a:ln>
-        </p:spPr>
-        <p:style>
-          <a:lnRef idx="1">
-            <a:schemeClr val="accent1"/>
-          </a:lnRef>
-          <a:fillRef idx="3">
-            <a:schemeClr val="accent1"/>
-          </a:fillRef>
-          <a:effectRef idx="2">
-            <a:schemeClr val="accent1"/>
-          </a:effectRef>
-          <a:fontRef idx="minor">
-            <a:schemeClr val="lt1"/>
-          </a:fontRef>
-        </p:style>
-        <p:txBody>
-          <a:bodyPr rtlCol="0" anchor="ctr"/>
-          <a:lstStyle/>
-          <a:p>
-            <a:pPr algn="ctr"/>
-          </a:p>
-        </p:txBody>
-      </p:sp>
-      <p:sp>
-        <p:nvSpPr>
-          <p:cNvPr id="4" name="Rectangle 3"/>
-          <p:cNvSpPr/>
-          <p:nvPr/>
-        </p:nvSpPr>
-        <p:spPr>
-          <a:xfrm>
-            <a:off x="0" y="0"/>
-            <a:ext cx="164592" cy="6858000"/>
+            <a:off x="320040" y="118872"/>
+            <a:ext cx="1097280" cy="292608"/>
           </a:xfrm>
           <a:prstGeom prst="rect">
             <a:avLst/>
@@ -17941,20 +20241,88 @@
       </p:sp>
       <p:sp>
         <p:nvSpPr>
-          <p:cNvPr id="5" name="Rectangle 4"/>
+          <p:cNvPr id="4" name="TextBox 3"/>
+          <p:cNvSpPr txBox="1"/>
+          <p:nvPr/>
+        </p:nvSpPr>
+        <p:spPr>
+          <a:xfrm>
+            <a:off x="320040" y="118872"/>
+            <a:ext cx="1097280" cy="292608"/>
+          </a:xfrm>
+          <a:prstGeom prst="rect">
+            <a:avLst/>
+          </a:prstGeom>
+          <a:noFill/>
+        </p:spPr>
+        <p:txBody>
+          <a:bodyPr wrap="square">
+            <a:spAutoFit/>
+          </a:bodyPr>
+          <a:lstStyle/>
+          <a:p>
+            <a:pPr algn="ctr"/>
+            <a:r>
+              <a:rPr sz="900" b="1" i="0">
+                <a:solidFill>
+                  <a:srgbClr val="1A2440"/>
+                </a:solidFill>
+              </a:rPr>
+              <a:t>Q1</a:t>
+            </a:r>
+          </a:p>
+        </p:txBody>
+      </p:sp>
+      <p:sp>
+        <p:nvSpPr>
+          <p:cNvPr id="5" name="TextBox 4"/>
+          <p:cNvSpPr txBox="1"/>
+          <p:nvPr/>
+        </p:nvSpPr>
+        <p:spPr>
+          <a:xfrm>
+            <a:off x="1554480" y="73152"/>
+            <a:ext cx="10332720" cy="594360"/>
+          </a:xfrm>
+          <a:prstGeom prst="rect">
+            <a:avLst/>
+          </a:prstGeom>
+          <a:noFill/>
+        </p:spPr>
+        <p:txBody>
+          <a:bodyPr wrap="square">
+            <a:spAutoFit/>
+          </a:bodyPr>
+          <a:lstStyle/>
+          <a:p>
+            <a:pPr algn="l"/>
+            <a:r>
+              <a:rPr sz="2400" b="1" i="0">
+                <a:solidFill>
+                  <a:srgbClr val="FFFFFF"/>
+                </a:solidFill>
+              </a:rPr>
+              <a:t>Pattern 4 — Systematic Round-Number Billing</a:t>
+            </a:r>
+          </a:p>
+        </p:txBody>
+      </p:sp>
+      <p:sp>
+        <p:nvSpPr>
+          <p:cNvPr id="6" name="Rectangle 5"/>
           <p:cNvSpPr/>
           <p:nvPr/>
         </p:nvSpPr>
         <p:spPr>
           <a:xfrm>
-            <a:off x="457200" y="1463040"/>
-            <a:ext cx="2011680" cy="502920"/>
+            <a:off x="0" y="960120"/>
+            <a:ext cx="12188952" cy="347472"/>
           </a:xfrm>
           <a:prstGeom prst="rect">
             <a:avLst/>
           </a:prstGeom>
           <a:solidFill>
-            <a:srgbClr val="F5A623"/>
+            <a:srgbClr val="F5F5F5"/>
           </a:solidFill>
           <a:ln>
             <a:noFill/>
@@ -17984,137 +20352,2616 @@
       </p:sp>
       <p:sp>
         <p:nvSpPr>
-          <p:cNvPr id="6" name="TextBox 5"/>
-          <p:cNvSpPr txBox="1"/>
-          <p:nvPr/>
-        </p:nvSpPr>
-        <p:spPr>
-          <a:xfrm>
-            <a:off x="457200" y="1463040"/>
-            <a:ext cx="2011680" cy="502920"/>
-          </a:xfrm>
-          <a:prstGeom prst="rect">
-            <a:avLst/>
-          </a:prstGeom>
-          <a:noFill/>
-        </p:spPr>
-        <p:txBody>
-          <a:bodyPr wrap="square">
-            <a:spAutoFit/>
-          </a:bodyPr>
-          <a:lstStyle/>
-          <a:p>
-            <a:pPr algn="ctr"/>
+          <p:cNvPr id="7" name="TextBox 6"/>
+          <p:cNvSpPr txBox="1"/>
+          <p:nvPr/>
+        </p:nvSpPr>
+        <p:spPr>
+          <a:xfrm>
+            <a:off x="365760" y="987552"/>
+            <a:ext cx="11430000" cy="301752"/>
+          </a:xfrm>
+          <a:prstGeom prst="rect">
+            <a:avLst/>
+          </a:prstGeom>
+          <a:noFill/>
+        </p:spPr>
+        <p:txBody>
+          <a:bodyPr wrap="square">
+            <a:spAutoFit/>
+          </a:bodyPr>
+          <a:lstStyle/>
+          <a:p>
+            <a:pPr algn="l"/>
+            <a:r>
+              <a:rPr sz="1200" b="0" i="1">
+                <a:solidFill>
+                  <a:srgbClr val="444444"/>
+                </a:solidFill>
+              </a:rPr>
+              <a:t>Providers who consistently bill exact round sums (e.g. 300€, 600€) rather than realistic irregular amounts</a:t>
+            </a:r>
+          </a:p>
+        </p:txBody>
+      </p:sp>
+      <p:sp>
+        <p:nvSpPr>
+          <p:cNvPr id="8" name="Rectangle 7"/>
+          <p:cNvSpPr/>
+          <p:nvPr/>
+        </p:nvSpPr>
+        <p:spPr>
+          <a:xfrm>
+            <a:off x="0" y="6510528"/>
+            <a:ext cx="12188952" cy="347472"/>
+          </a:xfrm>
+          <a:prstGeom prst="rect">
+            <a:avLst/>
+          </a:prstGeom>
+          <a:solidFill>
+            <a:srgbClr val="1A2440"/>
+          </a:solidFill>
+          <a:ln>
+            <a:noFill/>
+          </a:ln>
+        </p:spPr>
+        <p:style>
+          <a:lnRef idx="1">
+            <a:schemeClr val="accent1"/>
+          </a:lnRef>
+          <a:fillRef idx="3">
+            <a:schemeClr val="accent1"/>
+          </a:fillRef>
+          <a:effectRef idx="2">
+            <a:schemeClr val="accent1"/>
+          </a:effectRef>
+          <a:fontRef idx="minor">
+            <a:schemeClr val="lt1"/>
+          </a:fontRef>
+        </p:style>
+        <p:txBody>
+          <a:bodyPr rtlCol="0" anchor="ctr"/>
+          <a:lstStyle/>
+          <a:p>
+            <a:pPr algn="ctr"/>
+          </a:p>
+        </p:txBody>
+      </p:sp>
+      <p:sp>
+        <p:nvSpPr>
+          <p:cNvPr id="9" name="TextBox 8"/>
+          <p:cNvSpPr txBox="1"/>
+          <p:nvPr/>
+        </p:nvSpPr>
+        <p:spPr>
+          <a:xfrm>
+            <a:off x="274320" y="6519672"/>
+            <a:ext cx="11612880" cy="329184"/>
+          </a:xfrm>
+          <a:prstGeom prst="rect">
+            <a:avLst/>
+          </a:prstGeom>
+          <a:noFill/>
+        </p:spPr>
+        <p:txBody>
+          <a:bodyPr wrap="square">
+            <a:spAutoFit/>
+          </a:bodyPr>
+          <a:lstStyle/>
+          <a:p>
+            <a:pPr algn="ctr"/>
+            <a:r>
+              <a:rPr sz="900" b="0" i="0">
+                <a:solidFill>
+                  <a:srgbClr val="FFFFFF"/>
+                </a:solidFill>
+              </a:rPr>
+              <a:t>Alan Assurance · Fraud Detection Case · 2024</a:t>
+            </a:r>
+          </a:p>
+        </p:txBody>
+      </p:sp>
+      <p:sp>
+        <p:nvSpPr>
+          <p:cNvPr id="10" name="Rectangle 9"/>
+          <p:cNvSpPr/>
+          <p:nvPr/>
+        </p:nvSpPr>
+        <p:spPr>
+          <a:xfrm>
+            <a:off x="274320" y="1417320"/>
+            <a:ext cx="11640312" cy="777240"/>
+          </a:xfrm>
+          <a:prstGeom prst="rect">
+            <a:avLst/>
+          </a:prstGeom>
+          <a:solidFill>
+            <a:srgbClr val="E8F4FD"/>
+          </a:solidFill>
+          <a:ln>
+            <a:noFill/>
+          </a:ln>
+        </p:spPr>
+        <p:style>
+          <a:lnRef idx="1">
+            <a:schemeClr val="accent1"/>
+          </a:lnRef>
+          <a:fillRef idx="3">
+            <a:schemeClr val="accent1"/>
+          </a:fillRef>
+          <a:effectRef idx="2">
+            <a:schemeClr val="accent1"/>
+          </a:effectRef>
+          <a:fontRef idx="minor">
+            <a:schemeClr val="lt1"/>
+          </a:fontRef>
+        </p:style>
+        <p:txBody>
+          <a:bodyPr rtlCol="0" anchor="ctr"/>
+          <a:lstStyle/>
+          <a:p>
+            <a:pPr algn="ctr"/>
+          </a:p>
+        </p:txBody>
+      </p:sp>
+      <p:sp>
+        <p:nvSpPr>
+          <p:cNvPr id="11" name="Rectangle 10"/>
+          <p:cNvSpPr/>
+          <p:nvPr/>
+        </p:nvSpPr>
+        <p:spPr>
+          <a:xfrm>
+            <a:off x="274320" y="1417320"/>
+            <a:ext cx="109728" cy="777240"/>
+          </a:xfrm>
+          <a:prstGeom prst="rect">
+            <a:avLst/>
+          </a:prstGeom>
+          <a:solidFill>
+            <a:srgbClr val="1A78C2"/>
+          </a:solidFill>
+          <a:ln>
+            <a:noFill/>
+          </a:ln>
+        </p:spPr>
+        <p:style>
+          <a:lnRef idx="1">
+            <a:schemeClr val="accent1"/>
+          </a:lnRef>
+          <a:fillRef idx="3">
+            <a:schemeClr val="accent1"/>
+          </a:fillRef>
+          <a:effectRef idx="2">
+            <a:schemeClr val="accent1"/>
+          </a:effectRef>
+          <a:fontRef idx="minor">
+            <a:schemeClr val="lt1"/>
+          </a:fontRef>
+        </p:style>
+        <p:txBody>
+          <a:bodyPr rtlCol="0" anchor="ctr"/>
+          <a:lstStyle/>
+          <a:p>
+            <a:pPr algn="ctr"/>
+          </a:p>
+        </p:txBody>
+      </p:sp>
+      <p:sp>
+        <p:nvSpPr>
+          <p:cNvPr id="12" name="TextBox 11"/>
+          <p:cNvSpPr txBox="1"/>
+          <p:nvPr/>
+        </p:nvSpPr>
+        <p:spPr>
+          <a:xfrm>
+            <a:off x="502920" y="1481328"/>
+            <a:ext cx="4572000" cy="292608"/>
+          </a:xfrm>
+          <a:prstGeom prst="rect">
+            <a:avLst/>
+          </a:prstGeom>
+          <a:noFill/>
+        </p:spPr>
+        <p:txBody>
+          <a:bodyPr wrap="square">
+            <a:spAutoFit/>
+          </a:bodyPr>
+          <a:lstStyle/>
+          <a:p>
+            <a:pPr algn="l"/>
+            <a:r>
+              <a:rPr sz="1200" b="1" i="0">
+                <a:solidFill>
+                  <a:srgbClr val="1A2440"/>
+                </a:solidFill>
+              </a:rPr>
+              <a:t>Why is this suspicious?</a:t>
+            </a:r>
+          </a:p>
+        </p:txBody>
+      </p:sp>
+      <p:sp>
+        <p:nvSpPr>
+          <p:cNvPr id="13" name="TextBox 12"/>
+          <p:cNvSpPr txBox="1"/>
+          <p:nvPr/>
+        </p:nvSpPr>
+        <p:spPr>
+          <a:xfrm>
+            <a:off x="502920" y="1764792"/>
+            <a:ext cx="11064240" cy="384048"/>
+          </a:xfrm>
+          <a:prstGeom prst="rect">
+            <a:avLst/>
+          </a:prstGeom>
+          <a:noFill/>
+        </p:spPr>
+        <p:txBody>
+          <a:bodyPr wrap="square">
+            <a:spAutoFit/>
+          </a:bodyPr>
+          <a:lstStyle/>
+          <a:p>
+            <a:pPr algn="l"/>
+            <a:r>
+              <a:rPr sz="1100" b="0" i="0">
+                <a:solidFill>
+                  <a:srgbClr val="444444"/>
+                </a:solidFill>
+              </a:rPr>
+              <a:t>Real optical purchases — glasses frames, lenses, fitting — never add up to a perfectly round number. Amounts like €349.91 or €127.50 reflect actual product pricing. When a provider bills €300.00, €600.00, €200.00 every single month with no variation in cents, it strongly suggests fabricated charges rather than genuine sales.</a:t>
+            </a:r>
+          </a:p>
+        </p:txBody>
+      </p:sp>
+      <p:sp>
+        <p:nvSpPr>
+          <p:cNvPr id="14" name="Rectangle 13"/>
+          <p:cNvSpPr/>
+          <p:nvPr/>
+        </p:nvSpPr>
+        <p:spPr>
+          <a:xfrm>
+            <a:off x="274320" y="2331720"/>
+            <a:ext cx="5577840" cy="3840480"/>
+          </a:xfrm>
+          <a:prstGeom prst="rect">
+            <a:avLst/>
+          </a:prstGeom>
+          <a:solidFill>
+            <a:srgbClr val="FFFFFF"/>
+          </a:solidFill>
+          <a:ln w="9525">
+            <a:solidFill>
+              <a:srgbClr val="CCCCCC"/>
+            </a:solidFill>
+          </a:ln>
+        </p:spPr>
+        <p:style>
+          <a:lnRef idx="1">
+            <a:schemeClr val="accent1"/>
+          </a:lnRef>
+          <a:fillRef idx="3">
+            <a:schemeClr val="accent1"/>
+          </a:fillRef>
+          <a:effectRef idx="2">
+            <a:schemeClr val="accent1"/>
+          </a:effectRef>
+          <a:fontRef idx="minor">
+            <a:schemeClr val="lt1"/>
+          </a:fontRef>
+        </p:style>
+        <p:txBody>
+          <a:bodyPr rtlCol="0" anchor="ctr"/>
+          <a:lstStyle/>
+          <a:p>
+            <a:pPr algn="ctr"/>
+          </a:p>
+        </p:txBody>
+      </p:sp>
+      <p:sp>
+        <p:nvSpPr>
+          <p:cNvPr id="15" name="Rectangle 14"/>
+          <p:cNvSpPr/>
+          <p:nvPr/>
+        </p:nvSpPr>
+        <p:spPr>
+          <a:xfrm>
+            <a:off x="274320" y="2331720"/>
+            <a:ext cx="5577840" cy="73152"/>
+          </a:xfrm>
+          <a:prstGeom prst="rect">
+            <a:avLst/>
+          </a:prstGeom>
+          <a:solidFill>
+            <a:srgbClr val="1A78C2"/>
+          </a:solidFill>
+          <a:ln>
+            <a:noFill/>
+          </a:ln>
+        </p:spPr>
+        <p:style>
+          <a:lnRef idx="1">
+            <a:schemeClr val="accent1"/>
+          </a:lnRef>
+          <a:fillRef idx="3">
+            <a:schemeClr val="accent1"/>
+          </a:fillRef>
+          <a:effectRef idx="2">
+            <a:schemeClr val="accent1"/>
+          </a:effectRef>
+          <a:fontRef idx="minor">
+            <a:schemeClr val="lt1"/>
+          </a:fontRef>
+        </p:style>
+        <p:txBody>
+          <a:bodyPr rtlCol="0" anchor="ctr"/>
+          <a:lstStyle/>
+          <a:p>
+            <a:pPr algn="ctr"/>
+          </a:p>
+        </p:txBody>
+      </p:sp>
+      <p:sp>
+        <p:nvSpPr>
+          <p:cNvPr id="16" name="TextBox 15"/>
+          <p:cNvSpPr txBox="1"/>
+          <p:nvPr/>
+        </p:nvSpPr>
+        <p:spPr>
+          <a:xfrm>
+            <a:off x="457200" y="2468880"/>
+            <a:ext cx="5029200" cy="347472"/>
+          </a:xfrm>
+          <a:prstGeom prst="rect">
+            <a:avLst/>
+          </a:prstGeom>
+          <a:noFill/>
+        </p:spPr>
+        <p:txBody>
+          <a:bodyPr wrap="square">
+            <a:spAutoFit/>
+          </a:bodyPr>
+          <a:lstStyle/>
+          <a:p>
+            <a:pPr algn="l"/>
             <a:r>
               <a:rPr sz="1300" b="1" i="0">
                 <a:solidFill>
                   <a:srgbClr val="1A2440"/>
                 </a:solidFill>
               </a:rPr>
-              <a:t>QUESTION 2</a:t>
-            </a:r>
-          </a:p>
-        </p:txBody>
-      </p:sp>
-      <p:sp>
-        <p:nvSpPr>
-          <p:cNvPr id="7" name="TextBox 6"/>
-          <p:cNvSpPr txBox="1"/>
-          <p:nvPr/>
-        </p:nvSpPr>
-        <p:spPr>
-          <a:xfrm>
-            <a:off x="457200" y="2103120"/>
-            <a:ext cx="11430000" cy="457200"/>
-          </a:xfrm>
-          <a:prstGeom prst="rect">
-            <a:avLst/>
-          </a:prstGeom>
-          <a:noFill/>
-        </p:spPr>
-        <p:txBody>
-          <a:bodyPr wrap="square">
-            <a:spAutoFit/>
-          </a:bodyPr>
-          <a:lstStyle/>
-          <a:p>
-            <a:pPr algn="l"/>
-            <a:r>
-              <a:rPr sz="1600" b="0" i="1">
-                <a:solidFill>
-                  <a:srgbClr val="CCCCCC"/>
-                </a:solidFill>
-              </a:rPr>
-              <a:t>Detection System Design</a:t>
-            </a:r>
-          </a:p>
-        </p:txBody>
-      </p:sp>
-      <p:sp>
-        <p:nvSpPr>
-          <p:cNvPr id="8" name="TextBox 7"/>
-          <p:cNvSpPr txBox="1"/>
-          <p:nvPr/>
-        </p:nvSpPr>
-        <p:spPr>
-          <a:xfrm>
-            <a:off x="457200" y="2697480"/>
-            <a:ext cx="11430000" cy="1371600"/>
-          </a:xfrm>
-          <a:prstGeom prst="rect">
-            <a:avLst/>
-          </a:prstGeom>
-          <a:noFill/>
-        </p:spPr>
-        <p:txBody>
-          <a:bodyPr wrap="square">
-            <a:spAutoFit/>
-          </a:bodyPr>
-          <a:lstStyle/>
-          <a:p>
-            <a:pPr algn="l"/>
-            <a:r>
-              <a:rPr sz="4000" b="1" i="0">
+              <a:t>Runner Glasses — Contacts billing</a:t>
+            </a:r>
+          </a:p>
+        </p:txBody>
+      </p:sp>
+      <p:sp>
+        <p:nvSpPr>
+          <p:cNvPr id="17" name="Rectangle 16"/>
+          <p:cNvSpPr/>
+          <p:nvPr/>
+        </p:nvSpPr>
+        <p:spPr>
+          <a:xfrm>
+            <a:off x="457200" y="2907792"/>
+            <a:ext cx="5212080" cy="566928"/>
+          </a:xfrm>
+          <a:prstGeom prst="rect">
+            <a:avLst/>
+          </a:prstGeom>
+          <a:solidFill>
+            <a:srgbClr val="FFEBEB"/>
+          </a:solidFill>
+          <a:ln>
+            <a:noFill/>
+          </a:ln>
+        </p:spPr>
+        <p:style>
+          <a:lnRef idx="1">
+            <a:schemeClr val="accent1"/>
+          </a:lnRef>
+          <a:fillRef idx="3">
+            <a:schemeClr val="accent1"/>
+          </a:fillRef>
+          <a:effectRef idx="2">
+            <a:schemeClr val="accent1"/>
+          </a:effectRef>
+          <a:fontRef idx="minor">
+            <a:schemeClr val="lt1"/>
+          </a:fontRef>
+        </p:style>
+        <p:txBody>
+          <a:bodyPr rtlCol="0" anchor="ctr"/>
+          <a:lstStyle/>
+          <a:p>
+            <a:pPr algn="ctr"/>
+          </a:p>
+        </p:txBody>
+      </p:sp>
+      <p:sp>
+        <p:nvSpPr>
+          <p:cNvPr id="18" name="TextBox 17"/>
+          <p:cNvSpPr txBox="1"/>
+          <p:nvPr/>
+        </p:nvSpPr>
+        <p:spPr>
+          <a:xfrm>
+            <a:off x="566928" y="2935224"/>
+            <a:ext cx="4983480" cy="384048"/>
+          </a:xfrm>
+          <a:prstGeom prst="rect">
+            <a:avLst/>
+          </a:prstGeom>
+          <a:noFill/>
+        </p:spPr>
+        <p:txBody>
+          <a:bodyPr wrap="square">
+            <a:spAutoFit/>
+          </a:bodyPr>
+          <a:lstStyle/>
+          <a:p>
+            <a:pPr algn="l"/>
+            <a:r>
+              <a:rPr sz="1300" b="1" i="0">
+                <a:solidFill>
+                  <a:srgbClr val="D62839"/>
+                </a:solidFill>
+              </a:rPr>
+              <a:t>100% of Lentilles claims are round multiples of 100€</a:t>
+            </a:r>
+          </a:p>
+        </p:txBody>
+      </p:sp>
+      <p:sp>
+        <p:nvSpPr>
+          <p:cNvPr id="19" name="Rectangle 18"/>
+          <p:cNvSpPr/>
+          <p:nvPr/>
+        </p:nvSpPr>
+        <p:spPr>
+          <a:xfrm>
+            <a:off x="457200" y="3584448"/>
+            <a:ext cx="5212080" cy="320040"/>
+          </a:xfrm>
+          <a:prstGeom prst="rect">
+            <a:avLst/>
+          </a:prstGeom>
+          <a:solidFill>
+            <a:srgbClr val="1A2440"/>
+          </a:solidFill>
+          <a:ln>
+            <a:noFill/>
+          </a:ln>
+        </p:spPr>
+        <p:style>
+          <a:lnRef idx="1">
+            <a:schemeClr val="accent1"/>
+          </a:lnRef>
+          <a:fillRef idx="3">
+            <a:schemeClr val="accent1"/>
+          </a:fillRef>
+          <a:effectRef idx="2">
+            <a:schemeClr val="accent1"/>
+          </a:effectRef>
+          <a:fontRef idx="minor">
+            <a:schemeClr val="lt1"/>
+          </a:fontRef>
+        </p:style>
+        <p:txBody>
+          <a:bodyPr rtlCol="0" anchor="ctr"/>
+          <a:lstStyle/>
+          <a:p>
+            <a:pPr algn="ctr"/>
+          </a:p>
+        </p:txBody>
+      </p:sp>
+      <p:sp>
+        <p:nvSpPr>
+          <p:cNvPr id="20" name="TextBox 19"/>
+          <p:cNvSpPr txBox="1"/>
+          <p:nvPr/>
+        </p:nvSpPr>
+        <p:spPr>
+          <a:xfrm>
+            <a:off x="548640" y="3602736"/>
+            <a:ext cx="1645920" cy="246888"/>
+          </a:xfrm>
+          <a:prstGeom prst="rect">
+            <a:avLst/>
+          </a:prstGeom>
+          <a:noFill/>
+        </p:spPr>
+        <p:txBody>
+          <a:bodyPr wrap="square">
+            <a:spAutoFit/>
+          </a:bodyPr>
+          <a:lstStyle/>
+          <a:p>
+            <a:pPr algn="l"/>
+            <a:r>
+              <a:rPr sz="900" b="1" i="0">
                 <a:solidFill>
                   <a:srgbClr val="FFFFFF"/>
                 </a:solidFill>
               </a:rPr>
-              <a:t>How did we turn these
-patterns into a system?</a:t>
-            </a:r>
-          </a:p>
-        </p:txBody>
-      </p:sp>
-      <p:sp>
-        <p:nvSpPr>
-          <p:cNvPr id="9" name="TextBox 8"/>
-          <p:cNvSpPr txBox="1"/>
-          <p:nvPr/>
-        </p:nvSpPr>
-        <p:spPr>
-          <a:xfrm>
-            <a:off x="457200" y="5440680"/>
-            <a:ext cx="11430000" cy="548640"/>
-          </a:xfrm>
-          <a:prstGeom prst="rect">
-            <a:avLst/>
-          </a:prstGeom>
-          <a:noFill/>
-        </p:spPr>
-        <p:txBody>
-          <a:bodyPr wrap="square">
-            <a:spAutoFit/>
-          </a:bodyPr>
-          <a:lstStyle/>
-          <a:p>
-            <a:pPr algn="l"/>
-            <a:r>
-              <a:rPr sz="1300" b="0" i="1">
+              <a:t>Period</a:t>
+            </a:r>
+          </a:p>
+        </p:txBody>
+      </p:sp>
+      <p:sp>
+        <p:nvSpPr>
+          <p:cNvPr id="21" name="TextBox 20"/>
+          <p:cNvSpPr txBox="1"/>
+          <p:nvPr/>
+        </p:nvSpPr>
+        <p:spPr>
+          <a:xfrm>
+            <a:off x="2651760" y="3602736"/>
+            <a:ext cx="1645920" cy="246888"/>
+          </a:xfrm>
+          <a:prstGeom prst="rect">
+            <a:avLst/>
+          </a:prstGeom>
+          <a:noFill/>
+        </p:spPr>
+        <p:txBody>
+          <a:bodyPr wrap="square">
+            <a:spAutoFit/>
+          </a:bodyPr>
+          <a:lstStyle/>
+          <a:p>
+            <a:pPr algn="l"/>
+            <a:r>
+              <a:rPr sz="900" b="1" i="0">
                 <a:solidFill>
                   <a:srgbClr val="FFFFFF"/>
                 </a:solidFill>
               </a:rPr>
-              <a:t>3 automated detection rules · risk scoring pipeline · instant routing of every provider</a:t>
+              <a:t>Amount</a:t>
+            </a:r>
+          </a:p>
+        </p:txBody>
+      </p:sp>
+      <p:sp>
+        <p:nvSpPr>
+          <p:cNvPr id="22" name="TextBox 21"/>
+          <p:cNvSpPr txBox="1"/>
+          <p:nvPr/>
+        </p:nvSpPr>
+        <p:spPr>
+          <a:xfrm>
+            <a:off x="4389120" y="3602736"/>
+            <a:ext cx="1645920" cy="246888"/>
+          </a:xfrm>
+          <a:prstGeom prst="rect">
+            <a:avLst/>
+          </a:prstGeom>
+          <a:noFill/>
+        </p:spPr>
+        <p:txBody>
+          <a:bodyPr wrap="square">
+            <a:spAutoFit/>
+          </a:bodyPr>
+          <a:lstStyle/>
+          <a:p>
+            <a:pPr algn="l"/>
+            <a:r>
+              <a:rPr sz="900" b="1" i="0">
+                <a:solidFill>
+                  <a:srgbClr val="FFFFFF"/>
+                </a:solidFill>
+              </a:rPr>
+              <a:t>Round?</a:t>
+            </a:r>
+          </a:p>
+        </p:txBody>
+      </p:sp>
+      <p:sp>
+        <p:nvSpPr>
+          <p:cNvPr id="23" name="Rectangle 22"/>
+          <p:cNvSpPr/>
+          <p:nvPr/>
+        </p:nvSpPr>
+        <p:spPr>
+          <a:xfrm>
+            <a:off x="457200" y="3931920"/>
+            <a:ext cx="5212080" cy="292608"/>
+          </a:xfrm>
+          <a:prstGeom prst="rect">
+            <a:avLst/>
+          </a:prstGeom>
+          <a:solidFill>
+            <a:srgbClr val="F5F5F5"/>
+          </a:solidFill>
+          <a:ln>
+            <a:noFill/>
+          </a:ln>
+        </p:spPr>
+        <p:style>
+          <a:lnRef idx="1">
+            <a:schemeClr val="accent1"/>
+          </a:lnRef>
+          <a:fillRef idx="3">
+            <a:schemeClr val="accent1"/>
+          </a:fillRef>
+          <a:effectRef idx="2">
+            <a:schemeClr val="accent1"/>
+          </a:effectRef>
+          <a:fontRef idx="minor">
+            <a:schemeClr val="lt1"/>
+          </a:fontRef>
+        </p:style>
+        <p:txBody>
+          <a:bodyPr rtlCol="0" anchor="ctr"/>
+          <a:lstStyle/>
+          <a:p>
+            <a:pPr algn="ctr"/>
+          </a:p>
+        </p:txBody>
+      </p:sp>
+      <p:sp>
+        <p:nvSpPr>
+          <p:cNvPr id="24" name="TextBox 23"/>
+          <p:cNvSpPr txBox="1"/>
+          <p:nvPr/>
+        </p:nvSpPr>
+        <p:spPr>
+          <a:xfrm>
+            <a:off x="566928" y="3950208"/>
+            <a:ext cx="1920240" cy="219456"/>
+          </a:xfrm>
+          <a:prstGeom prst="rect">
+            <a:avLst/>
+          </a:prstGeom>
+          <a:noFill/>
+        </p:spPr>
+        <p:txBody>
+          <a:bodyPr wrap="square">
+            <a:spAutoFit/>
+          </a:bodyPr>
+          <a:lstStyle/>
+          <a:p>
+            <a:pPr algn="l"/>
+            <a:r>
+              <a:rPr sz="1000" b="0" i="0">
+                <a:solidFill>
+                  <a:srgbClr val="444444"/>
+                </a:solidFill>
+              </a:rPr>
+              <a:t>April 2022</a:t>
+            </a:r>
+          </a:p>
+        </p:txBody>
+      </p:sp>
+      <p:sp>
+        <p:nvSpPr>
+          <p:cNvPr id="25" name="TextBox 24"/>
+          <p:cNvSpPr txBox="1"/>
+          <p:nvPr/>
+        </p:nvSpPr>
+        <p:spPr>
+          <a:xfrm>
+            <a:off x="2670048" y="3950208"/>
+            <a:ext cx="1554480" cy="219456"/>
+          </a:xfrm>
+          <a:prstGeom prst="rect">
+            <a:avLst/>
+          </a:prstGeom>
+          <a:noFill/>
+        </p:spPr>
+        <p:txBody>
+          <a:bodyPr wrap="square">
+            <a:spAutoFit/>
+          </a:bodyPr>
+          <a:lstStyle/>
+          <a:p>
+            <a:pPr algn="l"/>
+            <a:r>
+              <a:rPr sz="1000" b="1" i="0">
+                <a:solidFill>
+                  <a:srgbClr val="D62839"/>
+                </a:solidFill>
+              </a:rPr>
+              <a:t>300,00 €</a:t>
+            </a:r>
+          </a:p>
+        </p:txBody>
+      </p:sp>
+      <p:sp>
+        <p:nvSpPr>
+          <p:cNvPr id="26" name="TextBox 25"/>
+          <p:cNvSpPr txBox="1"/>
+          <p:nvPr/>
+        </p:nvSpPr>
+        <p:spPr>
+          <a:xfrm>
+            <a:off x="4407408" y="3950208"/>
+            <a:ext cx="1097280" cy="219456"/>
+          </a:xfrm>
+          <a:prstGeom prst="rect">
+            <a:avLst/>
+          </a:prstGeom>
+          <a:noFill/>
+        </p:spPr>
+        <p:txBody>
+          <a:bodyPr wrap="square">
+            <a:spAutoFit/>
+          </a:bodyPr>
+          <a:lstStyle/>
+          <a:p>
+            <a:pPr algn="l"/>
+            <a:r>
+              <a:rPr sz="900" b="1" i="0">
+                <a:solidFill>
+                  <a:srgbClr val="D62839"/>
+                </a:solidFill>
+              </a:rPr>
+              <a:t>✓ Round</a:t>
+            </a:r>
+          </a:p>
+        </p:txBody>
+      </p:sp>
+      <p:sp>
+        <p:nvSpPr>
+          <p:cNvPr id="27" name="Rectangle 26"/>
+          <p:cNvSpPr/>
+          <p:nvPr/>
+        </p:nvSpPr>
+        <p:spPr>
+          <a:xfrm>
+            <a:off x="457200" y="4242816"/>
+            <a:ext cx="5212080" cy="292608"/>
+          </a:xfrm>
+          <a:prstGeom prst="rect">
+            <a:avLst/>
+          </a:prstGeom>
+          <a:solidFill>
+            <a:srgbClr val="FFFFFF"/>
+          </a:solidFill>
+          <a:ln>
+            <a:noFill/>
+          </a:ln>
+        </p:spPr>
+        <p:style>
+          <a:lnRef idx="1">
+            <a:schemeClr val="accent1"/>
+          </a:lnRef>
+          <a:fillRef idx="3">
+            <a:schemeClr val="accent1"/>
+          </a:fillRef>
+          <a:effectRef idx="2">
+            <a:schemeClr val="accent1"/>
+          </a:effectRef>
+          <a:fontRef idx="minor">
+            <a:schemeClr val="lt1"/>
+          </a:fontRef>
+        </p:style>
+        <p:txBody>
+          <a:bodyPr rtlCol="0" anchor="ctr"/>
+          <a:lstStyle/>
+          <a:p>
+            <a:pPr algn="ctr"/>
+          </a:p>
+        </p:txBody>
+      </p:sp>
+      <p:sp>
+        <p:nvSpPr>
+          <p:cNvPr id="28" name="TextBox 27"/>
+          <p:cNvSpPr txBox="1"/>
+          <p:nvPr/>
+        </p:nvSpPr>
+        <p:spPr>
+          <a:xfrm>
+            <a:off x="566928" y="4261104"/>
+            <a:ext cx="1920240" cy="219456"/>
+          </a:xfrm>
+          <a:prstGeom prst="rect">
+            <a:avLst/>
+          </a:prstGeom>
+          <a:noFill/>
+        </p:spPr>
+        <p:txBody>
+          <a:bodyPr wrap="square">
+            <a:spAutoFit/>
+          </a:bodyPr>
+          <a:lstStyle/>
+          <a:p>
+            <a:pPr algn="l"/>
+            <a:r>
+              <a:rPr sz="1000" b="0" i="0">
+                <a:solidFill>
+                  <a:srgbClr val="444444"/>
+                </a:solidFill>
+              </a:rPr>
+              <a:t>June 2022</a:t>
+            </a:r>
+          </a:p>
+        </p:txBody>
+      </p:sp>
+      <p:sp>
+        <p:nvSpPr>
+          <p:cNvPr id="29" name="TextBox 28"/>
+          <p:cNvSpPr txBox="1"/>
+          <p:nvPr/>
+        </p:nvSpPr>
+        <p:spPr>
+          <a:xfrm>
+            <a:off x="2670048" y="4261104"/>
+            <a:ext cx="1554480" cy="219456"/>
+          </a:xfrm>
+          <a:prstGeom prst="rect">
+            <a:avLst/>
+          </a:prstGeom>
+          <a:noFill/>
+        </p:spPr>
+        <p:txBody>
+          <a:bodyPr wrap="square">
+            <a:spAutoFit/>
+          </a:bodyPr>
+          <a:lstStyle/>
+          <a:p>
+            <a:pPr algn="l"/>
+            <a:r>
+              <a:rPr sz="1000" b="1" i="0">
+                <a:solidFill>
+                  <a:srgbClr val="D62839"/>
+                </a:solidFill>
+              </a:rPr>
+              <a:t>300,00 €</a:t>
+            </a:r>
+          </a:p>
+        </p:txBody>
+      </p:sp>
+      <p:sp>
+        <p:nvSpPr>
+          <p:cNvPr id="30" name="TextBox 29"/>
+          <p:cNvSpPr txBox="1"/>
+          <p:nvPr/>
+        </p:nvSpPr>
+        <p:spPr>
+          <a:xfrm>
+            <a:off x="4407408" y="4261104"/>
+            <a:ext cx="1097280" cy="219456"/>
+          </a:xfrm>
+          <a:prstGeom prst="rect">
+            <a:avLst/>
+          </a:prstGeom>
+          <a:noFill/>
+        </p:spPr>
+        <p:txBody>
+          <a:bodyPr wrap="square">
+            <a:spAutoFit/>
+          </a:bodyPr>
+          <a:lstStyle/>
+          <a:p>
+            <a:pPr algn="l"/>
+            <a:r>
+              <a:rPr sz="900" b="1" i="0">
+                <a:solidFill>
+                  <a:srgbClr val="D62839"/>
+                </a:solidFill>
+              </a:rPr>
+              <a:t>✓ Round</a:t>
+            </a:r>
+          </a:p>
+        </p:txBody>
+      </p:sp>
+      <p:sp>
+        <p:nvSpPr>
+          <p:cNvPr id="31" name="Rectangle 30"/>
+          <p:cNvSpPr/>
+          <p:nvPr/>
+        </p:nvSpPr>
+        <p:spPr>
+          <a:xfrm>
+            <a:off x="457200" y="4553712"/>
+            <a:ext cx="5212080" cy="292608"/>
+          </a:xfrm>
+          <a:prstGeom prst="rect">
+            <a:avLst/>
+          </a:prstGeom>
+          <a:solidFill>
+            <a:srgbClr val="F5F5F5"/>
+          </a:solidFill>
+          <a:ln>
+            <a:noFill/>
+          </a:ln>
+        </p:spPr>
+        <p:style>
+          <a:lnRef idx="1">
+            <a:schemeClr val="accent1"/>
+          </a:lnRef>
+          <a:fillRef idx="3">
+            <a:schemeClr val="accent1"/>
+          </a:fillRef>
+          <a:effectRef idx="2">
+            <a:schemeClr val="accent1"/>
+          </a:effectRef>
+          <a:fontRef idx="minor">
+            <a:schemeClr val="lt1"/>
+          </a:fontRef>
+        </p:style>
+        <p:txBody>
+          <a:bodyPr rtlCol="0" anchor="ctr"/>
+          <a:lstStyle/>
+          <a:p>
+            <a:pPr algn="ctr"/>
+          </a:p>
+        </p:txBody>
+      </p:sp>
+      <p:sp>
+        <p:nvSpPr>
+          <p:cNvPr id="32" name="TextBox 31"/>
+          <p:cNvSpPr txBox="1"/>
+          <p:nvPr/>
+        </p:nvSpPr>
+        <p:spPr>
+          <a:xfrm>
+            <a:off x="566928" y="4572000"/>
+            <a:ext cx="1920240" cy="219456"/>
+          </a:xfrm>
+          <a:prstGeom prst="rect">
+            <a:avLst/>
+          </a:prstGeom>
+          <a:noFill/>
+        </p:spPr>
+        <p:txBody>
+          <a:bodyPr wrap="square">
+            <a:spAutoFit/>
+          </a:bodyPr>
+          <a:lstStyle/>
+          <a:p>
+            <a:pPr algn="l"/>
+            <a:r>
+              <a:rPr sz="1000" b="0" i="0">
+                <a:solidFill>
+                  <a:srgbClr val="444444"/>
+                </a:solidFill>
+              </a:rPr>
+              <a:t>September 2022</a:t>
+            </a:r>
+          </a:p>
+        </p:txBody>
+      </p:sp>
+      <p:sp>
+        <p:nvSpPr>
+          <p:cNvPr id="33" name="TextBox 32"/>
+          <p:cNvSpPr txBox="1"/>
+          <p:nvPr/>
+        </p:nvSpPr>
+        <p:spPr>
+          <a:xfrm>
+            <a:off x="2670048" y="4572000"/>
+            <a:ext cx="1554480" cy="219456"/>
+          </a:xfrm>
+          <a:prstGeom prst="rect">
+            <a:avLst/>
+          </a:prstGeom>
+          <a:noFill/>
+        </p:spPr>
+        <p:txBody>
+          <a:bodyPr wrap="square">
+            <a:spAutoFit/>
+          </a:bodyPr>
+          <a:lstStyle/>
+          <a:p>
+            <a:pPr algn="l"/>
+            <a:r>
+              <a:rPr sz="1000" b="1" i="0">
+                <a:solidFill>
+                  <a:srgbClr val="D62839"/>
+                </a:solidFill>
+              </a:rPr>
+              <a:t>300,00 €</a:t>
+            </a:r>
+          </a:p>
+        </p:txBody>
+      </p:sp>
+      <p:sp>
+        <p:nvSpPr>
+          <p:cNvPr id="34" name="TextBox 33"/>
+          <p:cNvSpPr txBox="1"/>
+          <p:nvPr/>
+        </p:nvSpPr>
+        <p:spPr>
+          <a:xfrm>
+            <a:off x="4407408" y="4572000"/>
+            <a:ext cx="1097280" cy="219456"/>
+          </a:xfrm>
+          <a:prstGeom prst="rect">
+            <a:avLst/>
+          </a:prstGeom>
+          <a:noFill/>
+        </p:spPr>
+        <p:txBody>
+          <a:bodyPr wrap="square">
+            <a:spAutoFit/>
+          </a:bodyPr>
+          <a:lstStyle/>
+          <a:p>
+            <a:pPr algn="l"/>
+            <a:r>
+              <a:rPr sz="900" b="1" i="0">
+                <a:solidFill>
+                  <a:srgbClr val="D62839"/>
+                </a:solidFill>
+              </a:rPr>
+              <a:t>✓ Round</a:t>
+            </a:r>
+          </a:p>
+        </p:txBody>
+      </p:sp>
+      <p:sp>
+        <p:nvSpPr>
+          <p:cNvPr id="35" name="Rectangle 34"/>
+          <p:cNvSpPr/>
+          <p:nvPr/>
+        </p:nvSpPr>
+        <p:spPr>
+          <a:xfrm>
+            <a:off x="457200" y="4864608"/>
+            <a:ext cx="5212080" cy="292608"/>
+          </a:xfrm>
+          <a:prstGeom prst="rect">
+            <a:avLst/>
+          </a:prstGeom>
+          <a:solidFill>
+            <a:srgbClr val="FFFFFF"/>
+          </a:solidFill>
+          <a:ln>
+            <a:noFill/>
+          </a:ln>
+        </p:spPr>
+        <p:style>
+          <a:lnRef idx="1">
+            <a:schemeClr val="accent1"/>
+          </a:lnRef>
+          <a:fillRef idx="3">
+            <a:schemeClr val="accent1"/>
+          </a:fillRef>
+          <a:effectRef idx="2">
+            <a:schemeClr val="accent1"/>
+          </a:effectRef>
+          <a:fontRef idx="minor">
+            <a:schemeClr val="lt1"/>
+          </a:fontRef>
+        </p:style>
+        <p:txBody>
+          <a:bodyPr rtlCol="0" anchor="ctr"/>
+          <a:lstStyle/>
+          <a:p>
+            <a:pPr algn="ctr"/>
+          </a:p>
+        </p:txBody>
+      </p:sp>
+      <p:sp>
+        <p:nvSpPr>
+          <p:cNvPr id="36" name="TextBox 35"/>
+          <p:cNvSpPr txBox="1"/>
+          <p:nvPr/>
+        </p:nvSpPr>
+        <p:spPr>
+          <a:xfrm>
+            <a:off x="566928" y="4882896"/>
+            <a:ext cx="1920240" cy="219456"/>
+          </a:xfrm>
+          <a:prstGeom prst="rect">
+            <a:avLst/>
+          </a:prstGeom>
+          <a:noFill/>
+        </p:spPr>
+        <p:txBody>
+          <a:bodyPr wrap="square">
+            <a:spAutoFit/>
+          </a:bodyPr>
+          <a:lstStyle/>
+          <a:p>
+            <a:pPr algn="l"/>
+            <a:r>
+              <a:rPr sz="1000" b="0" i="0">
+                <a:solidFill>
+                  <a:srgbClr val="444444"/>
+                </a:solidFill>
+              </a:rPr>
+              <a:t>October 2022</a:t>
+            </a:r>
+          </a:p>
+        </p:txBody>
+      </p:sp>
+      <p:sp>
+        <p:nvSpPr>
+          <p:cNvPr id="37" name="TextBox 36"/>
+          <p:cNvSpPr txBox="1"/>
+          <p:nvPr/>
+        </p:nvSpPr>
+        <p:spPr>
+          <a:xfrm>
+            <a:off x="2670048" y="4882896"/>
+            <a:ext cx="1554480" cy="219456"/>
+          </a:xfrm>
+          <a:prstGeom prst="rect">
+            <a:avLst/>
+          </a:prstGeom>
+          <a:noFill/>
+        </p:spPr>
+        <p:txBody>
+          <a:bodyPr wrap="square">
+            <a:spAutoFit/>
+          </a:bodyPr>
+          <a:lstStyle/>
+          <a:p>
+            <a:pPr algn="l"/>
+            <a:r>
+              <a:rPr sz="1000" b="1" i="0">
+                <a:solidFill>
+                  <a:srgbClr val="D62839"/>
+                </a:solidFill>
+              </a:rPr>
+              <a:t>600,00 €</a:t>
+            </a:r>
+          </a:p>
+        </p:txBody>
+      </p:sp>
+      <p:sp>
+        <p:nvSpPr>
+          <p:cNvPr id="38" name="TextBox 37"/>
+          <p:cNvSpPr txBox="1"/>
+          <p:nvPr/>
+        </p:nvSpPr>
+        <p:spPr>
+          <a:xfrm>
+            <a:off x="4407408" y="4882896"/>
+            <a:ext cx="1097280" cy="219456"/>
+          </a:xfrm>
+          <a:prstGeom prst="rect">
+            <a:avLst/>
+          </a:prstGeom>
+          <a:noFill/>
+        </p:spPr>
+        <p:txBody>
+          <a:bodyPr wrap="square">
+            <a:spAutoFit/>
+          </a:bodyPr>
+          <a:lstStyle/>
+          <a:p>
+            <a:pPr algn="l"/>
+            <a:r>
+              <a:rPr sz="900" b="1" i="0">
+                <a:solidFill>
+                  <a:srgbClr val="D62839"/>
+                </a:solidFill>
+              </a:rPr>
+              <a:t>✓ Round</a:t>
+            </a:r>
+          </a:p>
+        </p:txBody>
+      </p:sp>
+      <p:sp>
+        <p:nvSpPr>
+          <p:cNvPr id="39" name="Rectangle 38"/>
+          <p:cNvSpPr/>
+          <p:nvPr/>
+        </p:nvSpPr>
+        <p:spPr>
+          <a:xfrm>
+            <a:off x="457200" y="5175504"/>
+            <a:ext cx="5212080" cy="292608"/>
+          </a:xfrm>
+          <a:prstGeom prst="rect">
+            <a:avLst/>
+          </a:prstGeom>
+          <a:solidFill>
+            <a:srgbClr val="F5F5F5"/>
+          </a:solidFill>
+          <a:ln>
+            <a:noFill/>
+          </a:ln>
+        </p:spPr>
+        <p:style>
+          <a:lnRef idx="1">
+            <a:schemeClr val="accent1"/>
+          </a:lnRef>
+          <a:fillRef idx="3">
+            <a:schemeClr val="accent1"/>
+          </a:fillRef>
+          <a:effectRef idx="2">
+            <a:schemeClr val="accent1"/>
+          </a:effectRef>
+          <a:fontRef idx="minor">
+            <a:schemeClr val="lt1"/>
+          </a:fontRef>
+        </p:style>
+        <p:txBody>
+          <a:bodyPr rtlCol="0" anchor="ctr"/>
+          <a:lstStyle/>
+          <a:p>
+            <a:pPr algn="ctr"/>
+          </a:p>
+        </p:txBody>
+      </p:sp>
+      <p:sp>
+        <p:nvSpPr>
+          <p:cNvPr id="40" name="TextBox 39"/>
+          <p:cNvSpPr txBox="1"/>
+          <p:nvPr/>
+        </p:nvSpPr>
+        <p:spPr>
+          <a:xfrm>
+            <a:off x="566928" y="5193792"/>
+            <a:ext cx="1920240" cy="219456"/>
+          </a:xfrm>
+          <a:prstGeom prst="rect">
+            <a:avLst/>
+          </a:prstGeom>
+          <a:noFill/>
+        </p:spPr>
+        <p:txBody>
+          <a:bodyPr wrap="square">
+            <a:spAutoFit/>
+          </a:bodyPr>
+          <a:lstStyle/>
+          <a:p>
+            <a:pPr algn="l"/>
+            <a:r>
+              <a:rPr sz="1000" b="0" i="0">
+                <a:solidFill>
+                  <a:srgbClr val="444444"/>
+                </a:solidFill>
+              </a:rPr>
+              <a:t>December 2022</a:t>
+            </a:r>
+          </a:p>
+        </p:txBody>
+      </p:sp>
+      <p:sp>
+        <p:nvSpPr>
+          <p:cNvPr id="41" name="TextBox 40"/>
+          <p:cNvSpPr txBox="1"/>
+          <p:nvPr/>
+        </p:nvSpPr>
+        <p:spPr>
+          <a:xfrm>
+            <a:off x="2670048" y="5193792"/>
+            <a:ext cx="1554480" cy="219456"/>
+          </a:xfrm>
+          <a:prstGeom prst="rect">
+            <a:avLst/>
+          </a:prstGeom>
+          <a:noFill/>
+        </p:spPr>
+        <p:txBody>
+          <a:bodyPr wrap="square">
+            <a:spAutoFit/>
+          </a:bodyPr>
+          <a:lstStyle/>
+          <a:p>
+            <a:pPr algn="l"/>
+            <a:r>
+              <a:rPr sz="1000" b="1" i="0">
+                <a:solidFill>
+                  <a:srgbClr val="D62839"/>
+                </a:solidFill>
+              </a:rPr>
+              <a:t>600,00 €</a:t>
+            </a:r>
+          </a:p>
+        </p:txBody>
+      </p:sp>
+      <p:sp>
+        <p:nvSpPr>
+          <p:cNvPr id="42" name="TextBox 41"/>
+          <p:cNvSpPr txBox="1"/>
+          <p:nvPr/>
+        </p:nvSpPr>
+        <p:spPr>
+          <a:xfrm>
+            <a:off x="4407408" y="5193792"/>
+            <a:ext cx="1097280" cy="219456"/>
+          </a:xfrm>
+          <a:prstGeom prst="rect">
+            <a:avLst/>
+          </a:prstGeom>
+          <a:noFill/>
+        </p:spPr>
+        <p:txBody>
+          <a:bodyPr wrap="square">
+            <a:spAutoFit/>
+          </a:bodyPr>
+          <a:lstStyle/>
+          <a:p>
+            <a:pPr algn="l"/>
+            <a:r>
+              <a:rPr sz="900" b="1" i="0">
+                <a:solidFill>
+                  <a:srgbClr val="D62839"/>
+                </a:solidFill>
+              </a:rPr>
+              <a:t>✓ Round</a:t>
+            </a:r>
+          </a:p>
+        </p:txBody>
+      </p:sp>
+      <p:sp>
+        <p:nvSpPr>
+          <p:cNvPr id="43" name="Rectangle 42"/>
+          <p:cNvSpPr/>
+          <p:nvPr/>
+        </p:nvSpPr>
+        <p:spPr>
+          <a:xfrm>
+            <a:off x="457200" y="5486400"/>
+            <a:ext cx="5212080" cy="292608"/>
+          </a:xfrm>
+          <a:prstGeom prst="rect">
+            <a:avLst/>
+          </a:prstGeom>
+          <a:solidFill>
+            <a:srgbClr val="FFFFFF"/>
+          </a:solidFill>
+          <a:ln>
+            <a:noFill/>
+          </a:ln>
+        </p:spPr>
+        <p:style>
+          <a:lnRef idx="1">
+            <a:schemeClr val="accent1"/>
+          </a:lnRef>
+          <a:fillRef idx="3">
+            <a:schemeClr val="accent1"/>
+          </a:fillRef>
+          <a:effectRef idx="2">
+            <a:schemeClr val="accent1"/>
+          </a:effectRef>
+          <a:fontRef idx="minor">
+            <a:schemeClr val="lt1"/>
+          </a:fontRef>
+        </p:style>
+        <p:txBody>
+          <a:bodyPr rtlCol="0" anchor="ctr"/>
+          <a:lstStyle/>
+          <a:p>
+            <a:pPr algn="ctr"/>
+          </a:p>
+        </p:txBody>
+      </p:sp>
+      <p:sp>
+        <p:nvSpPr>
+          <p:cNvPr id="44" name="TextBox 43"/>
+          <p:cNvSpPr txBox="1"/>
+          <p:nvPr/>
+        </p:nvSpPr>
+        <p:spPr>
+          <a:xfrm>
+            <a:off x="566928" y="5504688"/>
+            <a:ext cx="1920240" cy="219456"/>
+          </a:xfrm>
+          <a:prstGeom prst="rect">
+            <a:avLst/>
+          </a:prstGeom>
+          <a:noFill/>
+        </p:spPr>
+        <p:txBody>
+          <a:bodyPr wrap="square">
+            <a:spAutoFit/>
+          </a:bodyPr>
+          <a:lstStyle/>
+          <a:p>
+            <a:pPr algn="l"/>
+            <a:r>
+              <a:rPr sz="1000" b="0" i="0">
+                <a:solidFill>
+                  <a:srgbClr val="444444"/>
+                </a:solidFill>
+              </a:rPr>
+              <a:t>April 2023</a:t>
+            </a:r>
+          </a:p>
+        </p:txBody>
+      </p:sp>
+      <p:sp>
+        <p:nvSpPr>
+          <p:cNvPr id="45" name="TextBox 44"/>
+          <p:cNvSpPr txBox="1"/>
+          <p:nvPr/>
+        </p:nvSpPr>
+        <p:spPr>
+          <a:xfrm>
+            <a:off x="2670048" y="5504688"/>
+            <a:ext cx="1554480" cy="219456"/>
+          </a:xfrm>
+          <a:prstGeom prst="rect">
+            <a:avLst/>
+          </a:prstGeom>
+          <a:noFill/>
+        </p:spPr>
+        <p:txBody>
+          <a:bodyPr wrap="square">
+            <a:spAutoFit/>
+          </a:bodyPr>
+          <a:lstStyle/>
+          <a:p>
+            <a:pPr algn="l"/>
+            <a:r>
+              <a:rPr sz="1000" b="1" i="0">
+                <a:solidFill>
+                  <a:srgbClr val="D62839"/>
+                </a:solidFill>
+              </a:rPr>
+              <a:t>200,00 €</a:t>
+            </a:r>
+          </a:p>
+        </p:txBody>
+      </p:sp>
+      <p:sp>
+        <p:nvSpPr>
+          <p:cNvPr id="46" name="TextBox 45"/>
+          <p:cNvSpPr txBox="1"/>
+          <p:nvPr/>
+        </p:nvSpPr>
+        <p:spPr>
+          <a:xfrm>
+            <a:off x="4407408" y="5504688"/>
+            <a:ext cx="1097280" cy="219456"/>
+          </a:xfrm>
+          <a:prstGeom prst="rect">
+            <a:avLst/>
+          </a:prstGeom>
+          <a:noFill/>
+        </p:spPr>
+        <p:txBody>
+          <a:bodyPr wrap="square">
+            <a:spAutoFit/>
+          </a:bodyPr>
+          <a:lstStyle/>
+          <a:p>
+            <a:pPr algn="l"/>
+            <a:r>
+              <a:rPr sz="900" b="1" i="0">
+                <a:solidFill>
+                  <a:srgbClr val="D62839"/>
+                </a:solidFill>
+              </a:rPr>
+              <a:t>✓ Round</a:t>
+            </a:r>
+          </a:p>
+        </p:txBody>
+      </p:sp>
+      <p:sp>
+        <p:nvSpPr>
+          <p:cNvPr id="47" name="Rectangle 46"/>
+          <p:cNvSpPr/>
+          <p:nvPr/>
+        </p:nvSpPr>
+        <p:spPr>
+          <a:xfrm>
+            <a:off x="6035040" y="2331720"/>
+            <a:ext cx="5852160" cy="3840480"/>
+          </a:xfrm>
+          <a:prstGeom prst="rect">
+            <a:avLst/>
+          </a:prstGeom>
+          <a:solidFill>
+            <a:srgbClr val="FFFFFF"/>
+          </a:solidFill>
+          <a:ln w="9525">
+            <a:solidFill>
+              <a:srgbClr val="CCCCCC"/>
+            </a:solidFill>
+          </a:ln>
+        </p:spPr>
+        <p:style>
+          <a:lnRef idx="1">
+            <a:schemeClr val="accent1"/>
+          </a:lnRef>
+          <a:fillRef idx="3">
+            <a:schemeClr val="accent1"/>
+          </a:fillRef>
+          <a:effectRef idx="2">
+            <a:schemeClr val="accent1"/>
+          </a:effectRef>
+          <a:fontRef idx="minor">
+            <a:schemeClr val="lt1"/>
+          </a:fontRef>
+        </p:style>
+        <p:txBody>
+          <a:bodyPr rtlCol="0" anchor="ctr"/>
+          <a:lstStyle/>
+          <a:p>
+            <a:pPr algn="ctr"/>
+          </a:p>
+        </p:txBody>
+      </p:sp>
+      <p:sp>
+        <p:nvSpPr>
+          <p:cNvPr id="48" name="Rectangle 47"/>
+          <p:cNvSpPr/>
+          <p:nvPr/>
+        </p:nvSpPr>
+        <p:spPr>
+          <a:xfrm>
+            <a:off x="6035040" y="2331720"/>
+            <a:ext cx="5852160" cy="73152"/>
+          </a:xfrm>
+          <a:prstGeom prst="rect">
+            <a:avLst/>
+          </a:prstGeom>
+          <a:solidFill>
+            <a:srgbClr val="1A2440"/>
+          </a:solidFill>
+          <a:ln>
+            <a:noFill/>
+          </a:ln>
+        </p:spPr>
+        <p:style>
+          <a:lnRef idx="1">
+            <a:schemeClr val="accent1"/>
+          </a:lnRef>
+          <a:fillRef idx="3">
+            <a:schemeClr val="accent1"/>
+          </a:fillRef>
+          <a:effectRef idx="2">
+            <a:schemeClr val="accent1"/>
+          </a:effectRef>
+          <a:fontRef idx="minor">
+            <a:schemeClr val="lt1"/>
+          </a:fontRef>
+        </p:style>
+        <p:txBody>
+          <a:bodyPr rtlCol="0" anchor="ctr"/>
+          <a:lstStyle/>
+          <a:p>
+            <a:pPr algn="ctr"/>
+          </a:p>
+        </p:txBody>
+      </p:sp>
+      <p:sp>
+        <p:nvSpPr>
+          <p:cNvPr id="49" name="TextBox 48"/>
+          <p:cNvSpPr txBox="1"/>
+          <p:nvPr/>
+        </p:nvSpPr>
+        <p:spPr>
+          <a:xfrm>
+            <a:off x="6217920" y="2468880"/>
+            <a:ext cx="5486400" cy="347472"/>
+          </a:xfrm>
+          <a:prstGeom prst="rect">
+            <a:avLst/>
+          </a:prstGeom>
+          <a:noFill/>
+        </p:spPr>
+        <p:txBody>
+          <a:bodyPr wrap="square">
+            <a:spAutoFit/>
+          </a:bodyPr>
+          <a:lstStyle/>
+          <a:p>
+            <a:pPr algn="l"/>
+            <a:r>
+              <a:rPr sz="1200" b="1" i="0">
+                <a:solidFill>
+                  <a:srgbClr val="1A2440"/>
+                </a:solidFill>
+              </a:rPr>
+              <a:t>Compare: Lunettes (glasses) — same provider</a:t>
+            </a:r>
+          </a:p>
+        </p:txBody>
+      </p:sp>
+      <p:sp>
+        <p:nvSpPr>
+          <p:cNvPr id="50" name="TextBox 49"/>
+          <p:cNvSpPr txBox="1"/>
+          <p:nvPr/>
+        </p:nvSpPr>
+        <p:spPr>
+          <a:xfrm>
+            <a:off x="6217920" y="2852928"/>
+            <a:ext cx="5440680" cy="292608"/>
+          </a:xfrm>
+          <a:prstGeom prst="rect">
+            <a:avLst/>
+          </a:prstGeom>
+          <a:noFill/>
+        </p:spPr>
+        <p:txBody>
+          <a:bodyPr wrap="square">
+            <a:spAutoFit/>
+          </a:bodyPr>
+          <a:lstStyle/>
+          <a:p>
+            <a:pPr algn="l"/>
+            <a:r>
+              <a:rPr sz="1000" b="0" i="1">
+                <a:solidFill>
+                  <a:srgbClr val="444444"/>
+                </a:solidFill>
+              </a:rPr>
+              <a:t>Glasses amounts look realistic — irregular cents, normal price variation</a:t>
+            </a:r>
+          </a:p>
+        </p:txBody>
+      </p:sp>
+      <p:sp>
+        <p:nvSpPr>
+          <p:cNvPr id="51" name="Rectangle 50"/>
+          <p:cNvSpPr/>
+          <p:nvPr/>
+        </p:nvSpPr>
+        <p:spPr>
+          <a:xfrm>
+            <a:off x="6217920" y="3246120"/>
+            <a:ext cx="5440680" cy="292608"/>
+          </a:xfrm>
+          <a:prstGeom prst="rect">
+            <a:avLst/>
+          </a:prstGeom>
+          <a:solidFill>
+            <a:srgbClr val="F5F5F5"/>
+          </a:solidFill>
+          <a:ln>
+            <a:noFill/>
+          </a:ln>
+        </p:spPr>
+        <p:style>
+          <a:lnRef idx="1">
+            <a:schemeClr val="accent1"/>
+          </a:lnRef>
+          <a:fillRef idx="3">
+            <a:schemeClr val="accent1"/>
+          </a:fillRef>
+          <a:effectRef idx="2">
+            <a:schemeClr val="accent1"/>
+          </a:effectRef>
+          <a:fontRef idx="minor">
+            <a:schemeClr val="lt1"/>
+          </a:fontRef>
+        </p:style>
+        <p:txBody>
+          <a:bodyPr rtlCol="0" anchor="ctr"/>
+          <a:lstStyle/>
+          <a:p>
+            <a:pPr algn="ctr"/>
+          </a:p>
+        </p:txBody>
+      </p:sp>
+      <p:sp>
+        <p:nvSpPr>
+          <p:cNvPr id="52" name="TextBox 51"/>
+          <p:cNvSpPr txBox="1"/>
+          <p:nvPr/>
+        </p:nvSpPr>
+        <p:spPr>
+          <a:xfrm>
+            <a:off x="6327648" y="3264408"/>
+            <a:ext cx="1920240" cy="219456"/>
+          </a:xfrm>
+          <a:prstGeom prst="rect">
+            <a:avLst/>
+          </a:prstGeom>
+          <a:noFill/>
+        </p:spPr>
+        <p:txBody>
+          <a:bodyPr wrap="square">
+            <a:spAutoFit/>
+          </a:bodyPr>
+          <a:lstStyle/>
+          <a:p>
+            <a:pPr algn="l"/>
+            <a:r>
+              <a:rPr sz="1000" b="0" i="0">
+                <a:solidFill>
+                  <a:srgbClr val="444444"/>
+                </a:solidFill>
+              </a:rPr>
+              <a:t>April 2022</a:t>
+            </a:r>
+          </a:p>
+        </p:txBody>
+      </p:sp>
+      <p:sp>
+        <p:nvSpPr>
+          <p:cNvPr id="53" name="TextBox 52"/>
+          <p:cNvSpPr txBox="1"/>
+          <p:nvPr/>
+        </p:nvSpPr>
+        <p:spPr>
+          <a:xfrm>
+            <a:off x="8339327" y="3264408"/>
+            <a:ext cx="1554480" cy="219456"/>
+          </a:xfrm>
+          <a:prstGeom prst="rect">
+            <a:avLst/>
+          </a:prstGeom>
+          <a:noFill/>
+        </p:spPr>
+        <p:txBody>
+          <a:bodyPr wrap="square">
+            <a:spAutoFit/>
+          </a:bodyPr>
+          <a:lstStyle/>
+          <a:p>
+            <a:pPr algn="l"/>
+            <a:r>
+              <a:rPr sz="1000" b="1" i="0">
+                <a:solidFill>
+                  <a:srgbClr val="2E7D32"/>
+                </a:solidFill>
+              </a:rPr>
+              <a:t>349,91 €</a:t>
+            </a:r>
+          </a:p>
+        </p:txBody>
+      </p:sp>
+      <p:sp>
+        <p:nvSpPr>
+          <p:cNvPr id="54" name="TextBox 53"/>
+          <p:cNvSpPr txBox="1"/>
+          <p:nvPr/>
+        </p:nvSpPr>
+        <p:spPr>
+          <a:xfrm>
+            <a:off x="9985248" y="3264408"/>
+            <a:ext cx="1097280" cy="219456"/>
+          </a:xfrm>
+          <a:prstGeom prst="rect">
+            <a:avLst/>
+          </a:prstGeom>
+          <a:noFill/>
+        </p:spPr>
+        <p:txBody>
+          <a:bodyPr wrap="square">
+            <a:spAutoFit/>
+          </a:bodyPr>
+          <a:lstStyle/>
+          <a:p>
+            <a:pPr algn="l"/>
+            <a:r>
+              <a:rPr sz="900" b="0" i="0">
+                <a:solidFill>
+                  <a:srgbClr val="2E7D32"/>
+                </a:solidFill>
+              </a:rPr>
+              <a:t>Realistic</a:t>
+            </a:r>
+          </a:p>
+        </p:txBody>
+      </p:sp>
+      <p:sp>
+        <p:nvSpPr>
+          <p:cNvPr id="55" name="Rectangle 54"/>
+          <p:cNvSpPr/>
+          <p:nvPr/>
+        </p:nvSpPr>
+        <p:spPr>
+          <a:xfrm>
+            <a:off x="6217920" y="3557015"/>
+            <a:ext cx="5440680" cy="292608"/>
+          </a:xfrm>
+          <a:prstGeom prst="rect">
+            <a:avLst/>
+          </a:prstGeom>
+          <a:solidFill>
+            <a:srgbClr val="FFFFFF"/>
+          </a:solidFill>
+          <a:ln>
+            <a:noFill/>
+          </a:ln>
+        </p:spPr>
+        <p:style>
+          <a:lnRef idx="1">
+            <a:schemeClr val="accent1"/>
+          </a:lnRef>
+          <a:fillRef idx="3">
+            <a:schemeClr val="accent1"/>
+          </a:fillRef>
+          <a:effectRef idx="2">
+            <a:schemeClr val="accent1"/>
+          </a:effectRef>
+          <a:fontRef idx="minor">
+            <a:schemeClr val="lt1"/>
+          </a:fontRef>
+        </p:style>
+        <p:txBody>
+          <a:bodyPr rtlCol="0" anchor="ctr"/>
+          <a:lstStyle/>
+          <a:p>
+            <a:pPr algn="ctr"/>
+          </a:p>
+        </p:txBody>
+      </p:sp>
+      <p:sp>
+        <p:nvSpPr>
+          <p:cNvPr id="56" name="TextBox 55"/>
+          <p:cNvSpPr txBox="1"/>
+          <p:nvPr/>
+        </p:nvSpPr>
+        <p:spPr>
+          <a:xfrm>
+            <a:off x="6327648" y="3575303"/>
+            <a:ext cx="1920240" cy="219456"/>
+          </a:xfrm>
+          <a:prstGeom prst="rect">
+            <a:avLst/>
+          </a:prstGeom>
+          <a:noFill/>
+        </p:spPr>
+        <p:txBody>
+          <a:bodyPr wrap="square">
+            <a:spAutoFit/>
+          </a:bodyPr>
+          <a:lstStyle/>
+          <a:p>
+            <a:pPr algn="l"/>
+            <a:r>
+              <a:rPr sz="1000" b="0" i="0">
+                <a:solidFill>
+                  <a:srgbClr val="444444"/>
+                </a:solidFill>
+              </a:rPr>
+              <a:t>June 2022</a:t>
+            </a:r>
+          </a:p>
+        </p:txBody>
+      </p:sp>
+      <p:sp>
+        <p:nvSpPr>
+          <p:cNvPr id="57" name="TextBox 56"/>
+          <p:cNvSpPr txBox="1"/>
+          <p:nvPr/>
+        </p:nvSpPr>
+        <p:spPr>
+          <a:xfrm>
+            <a:off x="8339327" y="3575303"/>
+            <a:ext cx="1554480" cy="219456"/>
+          </a:xfrm>
+          <a:prstGeom prst="rect">
+            <a:avLst/>
+          </a:prstGeom>
+          <a:noFill/>
+        </p:spPr>
+        <p:txBody>
+          <a:bodyPr wrap="square">
+            <a:spAutoFit/>
+          </a:bodyPr>
+          <a:lstStyle/>
+          <a:p>
+            <a:pPr algn="l"/>
+            <a:r>
+              <a:rPr sz="1000" b="1" i="0">
+                <a:solidFill>
+                  <a:srgbClr val="2E7D32"/>
+                </a:solidFill>
+              </a:rPr>
+              <a:t>449,91 €</a:t>
+            </a:r>
+          </a:p>
+        </p:txBody>
+      </p:sp>
+      <p:sp>
+        <p:nvSpPr>
+          <p:cNvPr id="58" name="TextBox 57"/>
+          <p:cNvSpPr txBox="1"/>
+          <p:nvPr/>
+        </p:nvSpPr>
+        <p:spPr>
+          <a:xfrm>
+            <a:off x="9985248" y="3575303"/>
+            <a:ext cx="1097280" cy="219456"/>
+          </a:xfrm>
+          <a:prstGeom prst="rect">
+            <a:avLst/>
+          </a:prstGeom>
+          <a:noFill/>
+        </p:spPr>
+        <p:txBody>
+          <a:bodyPr wrap="square">
+            <a:spAutoFit/>
+          </a:bodyPr>
+          <a:lstStyle/>
+          <a:p>
+            <a:pPr algn="l"/>
+            <a:r>
+              <a:rPr sz="900" b="0" i="0">
+                <a:solidFill>
+                  <a:srgbClr val="2E7D32"/>
+                </a:solidFill>
+              </a:rPr>
+              <a:t>Realistic</a:t>
+            </a:r>
+          </a:p>
+        </p:txBody>
+      </p:sp>
+      <p:sp>
+        <p:nvSpPr>
+          <p:cNvPr id="59" name="Rectangle 58"/>
+          <p:cNvSpPr/>
+          <p:nvPr/>
+        </p:nvSpPr>
+        <p:spPr>
+          <a:xfrm>
+            <a:off x="6217920" y="3867911"/>
+            <a:ext cx="5440680" cy="292608"/>
+          </a:xfrm>
+          <a:prstGeom prst="rect">
+            <a:avLst/>
+          </a:prstGeom>
+          <a:solidFill>
+            <a:srgbClr val="F5F5F5"/>
+          </a:solidFill>
+          <a:ln>
+            <a:noFill/>
+          </a:ln>
+        </p:spPr>
+        <p:style>
+          <a:lnRef idx="1">
+            <a:schemeClr val="accent1"/>
+          </a:lnRef>
+          <a:fillRef idx="3">
+            <a:schemeClr val="accent1"/>
+          </a:fillRef>
+          <a:effectRef idx="2">
+            <a:schemeClr val="accent1"/>
+          </a:effectRef>
+          <a:fontRef idx="minor">
+            <a:schemeClr val="lt1"/>
+          </a:fontRef>
+        </p:style>
+        <p:txBody>
+          <a:bodyPr rtlCol="0" anchor="ctr"/>
+          <a:lstStyle/>
+          <a:p>
+            <a:pPr algn="ctr"/>
+          </a:p>
+        </p:txBody>
+      </p:sp>
+      <p:sp>
+        <p:nvSpPr>
+          <p:cNvPr id="60" name="TextBox 59"/>
+          <p:cNvSpPr txBox="1"/>
+          <p:nvPr/>
+        </p:nvSpPr>
+        <p:spPr>
+          <a:xfrm>
+            <a:off x="6327648" y="3886200"/>
+            <a:ext cx="1920240" cy="219456"/>
+          </a:xfrm>
+          <a:prstGeom prst="rect">
+            <a:avLst/>
+          </a:prstGeom>
+          <a:noFill/>
+        </p:spPr>
+        <p:txBody>
+          <a:bodyPr wrap="square">
+            <a:spAutoFit/>
+          </a:bodyPr>
+          <a:lstStyle/>
+          <a:p>
+            <a:pPr algn="l"/>
+            <a:r>
+              <a:rPr sz="1000" b="0" i="0">
+                <a:solidFill>
+                  <a:srgbClr val="444444"/>
+                </a:solidFill>
+              </a:rPr>
+              <a:t>September 2022</a:t>
+            </a:r>
+          </a:p>
+        </p:txBody>
+      </p:sp>
+      <p:sp>
+        <p:nvSpPr>
+          <p:cNvPr id="61" name="TextBox 60"/>
+          <p:cNvSpPr txBox="1"/>
+          <p:nvPr/>
+        </p:nvSpPr>
+        <p:spPr>
+          <a:xfrm>
+            <a:off x="8339327" y="3886200"/>
+            <a:ext cx="1554480" cy="219456"/>
+          </a:xfrm>
+          <a:prstGeom prst="rect">
+            <a:avLst/>
+          </a:prstGeom>
+          <a:noFill/>
+        </p:spPr>
+        <p:txBody>
+          <a:bodyPr wrap="square">
+            <a:spAutoFit/>
+          </a:bodyPr>
+          <a:lstStyle/>
+          <a:p>
+            <a:pPr algn="l"/>
+            <a:r>
+              <a:rPr sz="1000" b="1" i="0">
+                <a:solidFill>
+                  <a:srgbClr val="2E7D32"/>
+                </a:solidFill>
+              </a:rPr>
+              <a:t>349,91 €</a:t>
+            </a:r>
+          </a:p>
+        </p:txBody>
+      </p:sp>
+      <p:sp>
+        <p:nvSpPr>
+          <p:cNvPr id="62" name="TextBox 61"/>
+          <p:cNvSpPr txBox="1"/>
+          <p:nvPr/>
+        </p:nvSpPr>
+        <p:spPr>
+          <a:xfrm>
+            <a:off x="9985248" y="3886200"/>
+            <a:ext cx="1097280" cy="219456"/>
+          </a:xfrm>
+          <a:prstGeom prst="rect">
+            <a:avLst/>
+          </a:prstGeom>
+          <a:noFill/>
+        </p:spPr>
+        <p:txBody>
+          <a:bodyPr wrap="square">
+            <a:spAutoFit/>
+          </a:bodyPr>
+          <a:lstStyle/>
+          <a:p>
+            <a:pPr algn="l"/>
+            <a:r>
+              <a:rPr sz="900" b="0" i="0">
+                <a:solidFill>
+                  <a:srgbClr val="2E7D32"/>
+                </a:solidFill>
+              </a:rPr>
+              <a:t>Realistic</a:t>
+            </a:r>
+          </a:p>
+        </p:txBody>
+      </p:sp>
+      <p:sp>
+        <p:nvSpPr>
+          <p:cNvPr id="63" name="Rectangle 62"/>
+          <p:cNvSpPr/>
+          <p:nvPr/>
+        </p:nvSpPr>
+        <p:spPr>
+          <a:xfrm>
+            <a:off x="6217920" y="4178808"/>
+            <a:ext cx="5440680" cy="292608"/>
+          </a:xfrm>
+          <a:prstGeom prst="rect">
+            <a:avLst/>
+          </a:prstGeom>
+          <a:solidFill>
+            <a:srgbClr val="FFFFFF"/>
+          </a:solidFill>
+          <a:ln>
+            <a:noFill/>
+          </a:ln>
+        </p:spPr>
+        <p:style>
+          <a:lnRef idx="1">
+            <a:schemeClr val="accent1"/>
+          </a:lnRef>
+          <a:fillRef idx="3">
+            <a:schemeClr val="accent1"/>
+          </a:fillRef>
+          <a:effectRef idx="2">
+            <a:schemeClr val="accent1"/>
+          </a:effectRef>
+          <a:fontRef idx="minor">
+            <a:schemeClr val="lt1"/>
+          </a:fontRef>
+        </p:style>
+        <p:txBody>
+          <a:bodyPr rtlCol="0" anchor="ctr"/>
+          <a:lstStyle/>
+          <a:p>
+            <a:pPr algn="ctr"/>
+          </a:p>
+        </p:txBody>
+      </p:sp>
+      <p:sp>
+        <p:nvSpPr>
+          <p:cNvPr id="64" name="TextBox 63"/>
+          <p:cNvSpPr txBox="1"/>
+          <p:nvPr/>
+        </p:nvSpPr>
+        <p:spPr>
+          <a:xfrm>
+            <a:off x="6327648" y="4197096"/>
+            <a:ext cx="1920240" cy="219456"/>
+          </a:xfrm>
+          <a:prstGeom prst="rect">
+            <a:avLst/>
+          </a:prstGeom>
+          <a:noFill/>
+        </p:spPr>
+        <p:txBody>
+          <a:bodyPr wrap="square">
+            <a:spAutoFit/>
+          </a:bodyPr>
+          <a:lstStyle/>
+          <a:p>
+            <a:pPr algn="l"/>
+            <a:r>
+              <a:rPr sz="1000" b="0" i="0">
+                <a:solidFill>
+                  <a:srgbClr val="444444"/>
+                </a:solidFill>
+              </a:rPr>
+              <a:t>October 2022</a:t>
+            </a:r>
+          </a:p>
+        </p:txBody>
+      </p:sp>
+      <p:sp>
+        <p:nvSpPr>
+          <p:cNvPr id="65" name="TextBox 64"/>
+          <p:cNvSpPr txBox="1"/>
+          <p:nvPr/>
+        </p:nvSpPr>
+        <p:spPr>
+          <a:xfrm>
+            <a:off x="8339327" y="4197096"/>
+            <a:ext cx="1554480" cy="219456"/>
+          </a:xfrm>
+          <a:prstGeom prst="rect">
+            <a:avLst/>
+          </a:prstGeom>
+          <a:noFill/>
+        </p:spPr>
+        <p:txBody>
+          <a:bodyPr wrap="square">
+            <a:spAutoFit/>
+          </a:bodyPr>
+          <a:lstStyle/>
+          <a:p>
+            <a:pPr algn="l"/>
+            <a:r>
+              <a:rPr sz="1000" b="1" i="0">
+                <a:solidFill>
+                  <a:srgbClr val="2E7D32"/>
+                </a:solidFill>
+              </a:rPr>
+              <a:t>699,82 €</a:t>
+            </a:r>
+          </a:p>
+        </p:txBody>
+      </p:sp>
+      <p:sp>
+        <p:nvSpPr>
+          <p:cNvPr id="66" name="TextBox 65"/>
+          <p:cNvSpPr txBox="1"/>
+          <p:nvPr/>
+        </p:nvSpPr>
+        <p:spPr>
+          <a:xfrm>
+            <a:off x="9985248" y="4197096"/>
+            <a:ext cx="1097280" cy="219456"/>
+          </a:xfrm>
+          <a:prstGeom prst="rect">
+            <a:avLst/>
+          </a:prstGeom>
+          <a:noFill/>
+        </p:spPr>
+        <p:txBody>
+          <a:bodyPr wrap="square">
+            <a:spAutoFit/>
+          </a:bodyPr>
+          <a:lstStyle/>
+          <a:p>
+            <a:pPr algn="l"/>
+            <a:r>
+              <a:rPr sz="900" b="0" i="0">
+                <a:solidFill>
+                  <a:srgbClr val="2E7D32"/>
+                </a:solidFill>
+              </a:rPr>
+              <a:t>Realistic</a:t>
+            </a:r>
+          </a:p>
+        </p:txBody>
+      </p:sp>
+      <p:sp>
+        <p:nvSpPr>
+          <p:cNvPr id="67" name="Rectangle 66"/>
+          <p:cNvSpPr/>
+          <p:nvPr/>
+        </p:nvSpPr>
+        <p:spPr>
+          <a:xfrm>
+            <a:off x="6217920" y="4489704"/>
+            <a:ext cx="5440680" cy="292608"/>
+          </a:xfrm>
+          <a:prstGeom prst="rect">
+            <a:avLst/>
+          </a:prstGeom>
+          <a:solidFill>
+            <a:srgbClr val="F5F5F5"/>
+          </a:solidFill>
+          <a:ln>
+            <a:noFill/>
+          </a:ln>
+        </p:spPr>
+        <p:style>
+          <a:lnRef idx="1">
+            <a:schemeClr val="accent1"/>
+          </a:lnRef>
+          <a:fillRef idx="3">
+            <a:schemeClr val="accent1"/>
+          </a:fillRef>
+          <a:effectRef idx="2">
+            <a:schemeClr val="accent1"/>
+          </a:effectRef>
+          <a:fontRef idx="minor">
+            <a:schemeClr val="lt1"/>
+          </a:fontRef>
+        </p:style>
+        <p:txBody>
+          <a:bodyPr rtlCol="0" anchor="ctr"/>
+          <a:lstStyle/>
+          <a:p>
+            <a:pPr algn="ctr"/>
+          </a:p>
+        </p:txBody>
+      </p:sp>
+      <p:sp>
+        <p:nvSpPr>
+          <p:cNvPr id="68" name="TextBox 67"/>
+          <p:cNvSpPr txBox="1"/>
+          <p:nvPr/>
+        </p:nvSpPr>
+        <p:spPr>
+          <a:xfrm>
+            <a:off x="6327648" y="4507992"/>
+            <a:ext cx="1920240" cy="219456"/>
+          </a:xfrm>
+          <a:prstGeom prst="rect">
+            <a:avLst/>
+          </a:prstGeom>
+          <a:noFill/>
+        </p:spPr>
+        <p:txBody>
+          <a:bodyPr wrap="square">
+            <a:spAutoFit/>
+          </a:bodyPr>
+          <a:lstStyle/>
+          <a:p>
+            <a:pPr algn="l"/>
+            <a:r>
+              <a:rPr sz="1000" b="0" i="0">
+                <a:solidFill>
+                  <a:srgbClr val="444444"/>
+                </a:solidFill>
+              </a:rPr>
+              <a:t>December 2022</a:t>
+            </a:r>
+          </a:p>
+        </p:txBody>
+      </p:sp>
+      <p:sp>
+        <p:nvSpPr>
+          <p:cNvPr id="69" name="TextBox 68"/>
+          <p:cNvSpPr txBox="1"/>
+          <p:nvPr/>
+        </p:nvSpPr>
+        <p:spPr>
+          <a:xfrm>
+            <a:off x="8339327" y="4507992"/>
+            <a:ext cx="1554480" cy="219456"/>
+          </a:xfrm>
+          <a:prstGeom prst="rect">
+            <a:avLst/>
+          </a:prstGeom>
+          <a:noFill/>
+        </p:spPr>
+        <p:txBody>
+          <a:bodyPr wrap="square">
+            <a:spAutoFit/>
+          </a:bodyPr>
+          <a:lstStyle/>
+          <a:p>
+            <a:pPr algn="l"/>
+            <a:r>
+              <a:rPr sz="1000" b="1" i="0">
+                <a:solidFill>
+                  <a:srgbClr val="2E7D32"/>
+                </a:solidFill>
+              </a:rPr>
+              <a:t>349,91 €</a:t>
+            </a:r>
+          </a:p>
+        </p:txBody>
+      </p:sp>
+      <p:sp>
+        <p:nvSpPr>
+          <p:cNvPr id="70" name="TextBox 69"/>
+          <p:cNvSpPr txBox="1"/>
+          <p:nvPr/>
+        </p:nvSpPr>
+        <p:spPr>
+          <a:xfrm>
+            <a:off x="9985248" y="4507992"/>
+            <a:ext cx="1097280" cy="219456"/>
+          </a:xfrm>
+          <a:prstGeom prst="rect">
+            <a:avLst/>
+          </a:prstGeom>
+          <a:noFill/>
+        </p:spPr>
+        <p:txBody>
+          <a:bodyPr wrap="square">
+            <a:spAutoFit/>
+          </a:bodyPr>
+          <a:lstStyle/>
+          <a:p>
+            <a:pPr algn="l"/>
+            <a:r>
+              <a:rPr sz="900" b="0" i="0">
+                <a:solidFill>
+                  <a:srgbClr val="2E7D32"/>
+                </a:solidFill>
+              </a:rPr>
+              <a:t>Realistic</a:t>
+            </a:r>
+          </a:p>
+        </p:txBody>
+      </p:sp>
+      <p:sp>
+        <p:nvSpPr>
+          <p:cNvPr id="71" name="Rectangle 70"/>
+          <p:cNvSpPr/>
+          <p:nvPr/>
+        </p:nvSpPr>
+        <p:spPr>
+          <a:xfrm>
+            <a:off x="6217920" y="4800600"/>
+            <a:ext cx="5440680" cy="292608"/>
+          </a:xfrm>
+          <a:prstGeom prst="rect">
+            <a:avLst/>
+          </a:prstGeom>
+          <a:solidFill>
+            <a:srgbClr val="FFFFFF"/>
+          </a:solidFill>
+          <a:ln>
+            <a:noFill/>
+          </a:ln>
+        </p:spPr>
+        <p:style>
+          <a:lnRef idx="1">
+            <a:schemeClr val="accent1"/>
+          </a:lnRef>
+          <a:fillRef idx="3">
+            <a:schemeClr val="accent1"/>
+          </a:fillRef>
+          <a:effectRef idx="2">
+            <a:schemeClr val="accent1"/>
+          </a:effectRef>
+          <a:fontRef idx="minor">
+            <a:schemeClr val="lt1"/>
+          </a:fontRef>
+        </p:style>
+        <p:txBody>
+          <a:bodyPr rtlCol="0" anchor="ctr"/>
+          <a:lstStyle/>
+          <a:p>
+            <a:pPr algn="ctr"/>
+          </a:p>
+        </p:txBody>
+      </p:sp>
+      <p:sp>
+        <p:nvSpPr>
+          <p:cNvPr id="72" name="TextBox 71"/>
+          <p:cNvSpPr txBox="1"/>
+          <p:nvPr/>
+        </p:nvSpPr>
+        <p:spPr>
+          <a:xfrm>
+            <a:off x="6327648" y="4818888"/>
+            <a:ext cx="1920240" cy="219456"/>
+          </a:xfrm>
+          <a:prstGeom prst="rect">
+            <a:avLst/>
+          </a:prstGeom>
+          <a:noFill/>
+        </p:spPr>
+        <p:txBody>
+          <a:bodyPr wrap="square">
+            <a:spAutoFit/>
+          </a:bodyPr>
+          <a:lstStyle/>
+          <a:p>
+            <a:pPr algn="l"/>
+            <a:r>
+              <a:rPr sz="1000" b="0" i="0">
+                <a:solidFill>
+                  <a:srgbClr val="444444"/>
+                </a:solidFill>
+              </a:rPr>
+              <a:t>April 2023</a:t>
+            </a:r>
+          </a:p>
+        </p:txBody>
+      </p:sp>
+      <p:sp>
+        <p:nvSpPr>
+          <p:cNvPr id="73" name="TextBox 72"/>
+          <p:cNvSpPr txBox="1"/>
+          <p:nvPr/>
+        </p:nvSpPr>
+        <p:spPr>
+          <a:xfrm>
+            <a:off x="8339327" y="4818888"/>
+            <a:ext cx="1554480" cy="219456"/>
+          </a:xfrm>
+          <a:prstGeom prst="rect">
+            <a:avLst/>
+          </a:prstGeom>
+          <a:noFill/>
+        </p:spPr>
+        <p:txBody>
+          <a:bodyPr wrap="square">
+            <a:spAutoFit/>
+          </a:bodyPr>
+          <a:lstStyle/>
+          <a:p>
+            <a:pPr algn="l"/>
+            <a:r>
+              <a:rPr sz="1000" b="1" i="0">
+                <a:solidFill>
+                  <a:srgbClr val="2E7D32"/>
+                </a:solidFill>
+              </a:rPr>
+              <a:t>564,82 €</a:t>
+            </a:r>
+          </a:p>
+        </p:txBody>
+      </p:sp>
+      <p:sp>
+        <p:nvSpPr>
+          <p:cNvPr id="74" name="TextBox 73"/>
+          <p:cNvSpPr txBox="1"/>
+          <p:nvPr/>
+        </p:nvSpPr>
+        <p:spPr>
+          <a:xfrm>
+            <a:off x="9985248" y="4818888"/>
+            <a:ext cx="1097280" cy="219456"/>
+          </a:xfrm>
+          <a:prstGeom prst="rect">
+            <a:avLst/>
+          </a:prstGeom>
+          <a:noFill/>
+        </p:spPr>
+        <p:txBody>
+          <a:bodyPr wrap="square">
+            <a:spAutoFit/>
+          </a:bodyPr>
+          <a:lstStyle/>
+          <a:p>
+            <a:pPr algn="l"/>
+            <a:r>
+              <a:rPr sz="900" b="0" i="0">
+                <a:solidFill>
+                  <a:srgbClr val="2E7D32"/>
+                </a:solidFill>
+              </a:rPr>
+              <a:t>Realistic</a:t>
+            </a:r>
+          </a:p>
+        </p:txBody>
+      </p:sp>
+      <p:sp>
+        <p:nvSpPr>
+          <p:cNvPr id="75" name="Rectangle 74"/>
+          <p:cNvSpPr/>
+          <p:nvPr/>
+        </p:nvSpPr>
+        <p:spPr>
+          <a:xfrm>
+            <a:off x="6217920" y="5166360"/>
+            <a:ext cx="5440680" cy="685800"/>
+          </a:xfrm>
+          <a:prstGeom prst="rect">
+            <a:avLst/>
+          </a:prstGeom>
+          <a:solidFill>
+            <a:srgbClr val="FFEBEB"/>
+          </a:solidFill>
+          <a:ln>
+            <a:noFill/>
+          </a:ln>
+        </p:spPr>
+        <p:style>
+          <a:lnRef idx="1">
+            <a:schemeClr val="accent1"/>
+          </a:lnRef>
+          <a:fillRef idx="3">
+            <a:schemeClr val="accent1"/>
+          </a:fillRef>
+          <a:effectRef idx="2">
+            <a:schemeClr val="accent1"/>
+          </a:effectRef>
+          <a:fontRef idx="minor">
+            <a:schemeClr val="lt1"/>
+          </a:fontRef>
+        </p:style>
+        <p:txBody>
+          <a:bodyPr rtlCol="0" anchor="ctr"/>
+          <a:lstStyle/>
+          <a:p>
+            <a:pPr algn="ctr"/>
+          </a:p>
+        </p:txBody>
+      </p:sp>
+      <p:sp>
+        <p:nvSpPr>
+          <p:cNvPr id="76" name="TextBox 75"/>
+          <p:cNvSpPr txBox="1"/>
+          <p:nvPr/>
+        </p:nvSpPr>
+        <p:spPr>
+          <a:xfrm>
+            <a:off x="6327648" y="5212080"/>
+            <a:ext cx="5212080" cy="594360"/>
+          </a:xfrm>
+          <a:prstGeom prst="rect">
+            <a:avLst/>
+          </a:prstGeom>
+          <a:noFill/>
+        </p:spPr>
+        <p:txBody>
+          <a:bodyPr wrap="square">
+            <a:spAutoFit/>
+          </a:bodyPr>
+          <a:lstStyle/>
+          <a:p>
+            <a:pPr algn="l"/>
+            <a:r>
+              <a:rPr sz="1000" b="1" i="0">
+                <a:solidFill>
+                  <a:srgbClr val="D62839"/>
+                </a:solidFill>
+              </a:rPr>
+              <a:t>Same provider, same months — glasses have real prices, contacts are always round numbers. The contacts charges appear fabricated.</a:t>
+            </a:r>
+          </a:p>
+        </p:txBody>
+      </p:sp>
+      <p:sp>
+        <p:nvSpPr>
+          <p:cNvPr id="77" name="TextBox 76"/>
+          <p:cNvSpPr txBox="1"/>
+          <p:nvPr/>
+        </p:nvSpPr>
+        <p:spPr>
+          <a:xfrm>
+            <a:off x="274320" y="6263640"/>
+            <a:ext cx="11612880" cy="292608"/>
+          </a:xfrm>
+          <a:prstGeom prst="rect">
+            <a:avLst/>
+          </a:prstGeom>
+          <a:noFill/>
+        </p:spPr>
+        <p:txBody>
+          <a:bodyPr wrap="square">
+            <a:spAutoFit/>
+          </a:bodyPr>
+          <a:lstStyle/>
+          <a:p>
+            <a:pPr algn="ctr"/>
+            <a:r>
+              <a:rPr sz="1000" b="0" i="1">
+                <a:solidFill>
+                  <a:srgbClr val="444444"/>
+                </a:solidFill>
+              </a:rPr>
+              <a:t>This pattern also appears in Roudoudou Lentilles, Kylian's Frames, and most other flagged providers.</a:t>
             </a:r>
           </a:p>
         </p:txBody>
@@ -18146,7 +22993,7 @@
         <p:spPr>
           <a:xfrm>
             <a:off x="0" y="0"/>
-            <a:ext cx="12188952" cy="960120"/>
+            <a:ext cx="12188952" cy="6858000"/>
           </a:xfrm>
           <a:prstGeom prst="rect">
             <a:avLst/>
@@ -18188,8 +23035,51 @@
         </p:nvSpPr>
         <p:spPr>
           <a:xfrm>
-            <a:off x="320040" y="118872"/>
-            <a:ext cx="1097280" cy="292608"/>
+            <a:off x="0" y="5303520"/>
+            <a:ext cx="12188952" cy="1554480"/>
+          </a:xfrm>
+          <a:prstGeom prst="rect">
+            <a:avLst/>
+          </a:prstGeom>
+          <a:solidFill>
+            <a:srgbClr val="D62839"/>
+          </a:solidFill>
+          <a:ln>
+            <a:noFill/>
+          </a:ln>
+        </p:spPr>
+        <p:style>
+          <a:lnRef idx="1">
+            <a:schemeClr val="accent1"/>
+          </a:lnRef>
+          <a:fillRef idx="3">
+            <a:schemeClr val="accent1"/>
+          </a:fillRef>
+          <a:effectRef idx="2">
+            <a:schemeClr val="accent1"/>
+          </a:effectRef>
+          <a:fontRef idx="minor">
+            <a:schemeClr val="lt1"/>
+          </a:fontRef>
+        </p:style>
+        <p:txBody>
+          <a:bodyPr rtlCol="0" anchor="ctr"/>
+          <a:lstStyle/>
+          <a:p>
+            <a:pPr algn="ctr"/>
+          </a:p>
+        </p:txBody>
+      </p:sp>
+      <p:sp>
+        <p:nvSpPr>
+          <p:cNvPr id="4" name="Rectangle 3"/>
+          <p:cNvSpPr/>
+          <p:nvPr/>
+        </p:nvSpPr>
+        <p:spPr>
+          <a:xfrm>
+            <a:off x="0" y="0"/>
+            <a:ext cx="164592" cy="6858000"/>
           </a:xfrm>
           <a:prstGeom prst="rect">
             <a:avLst/>
@@ -18225,535 +23115,14 @@
       </p:sp>
       <p:sp>
         <p:nvSpPr>
-          <p:cNvPr id="4" name="TextBox 3"/>
-          <p:cNvSpPr txBox="1"/>
-          <p:nvPr/>
-        </p:nvSpPr>
-        <p:spPr>
-          <a:xfrm>
-            <a:off x="320040" y="118872"/>
-            <a:ext cx="1097280" cy="292608"/>
-          </a:xfrm>
-          <a:prstGeom prst="rect">
-            <a:avLst/>
-          </a:prstGeom>
-          <a:noFill/>
-        </p:spPr>
-        <p:txBody>
-          <a:bodyPr wrap="square">
-            <a:spAutoFit/>
-          </a:bodyPr>
-          <a:lstStyle/>
-          <a:p>
-            <a:pPr algn="ctr"/>
-            <a:r>
-              <a:rPr sz="900" b="1" i="0">
-                <a:solidFill>
-                  <a:srgbClr val="1A2440"/>
-                </a:solidFill>
-              </a:rPr>
-              <a:t>Q2</a:t>
-            </a:r>
-          </a:p>
-        </p:txBody>
-      </p:sp>
-      <p:sp>
-        <p:nvSpPr>
-          <p:cNvPr id="5" name="TextBox 4"/>
-          <p:cNvSpPr txBox="1"/>
-          <p:nvPr/>
-        </p:nvSpPr>
-        <p:spPr>
-          <a:xfrm>
-            <a:off x="1554480" y="73152"/>
-            <a:ext cx="10332720" cy="594360"/>
-          </a:xfrm>
-          <a:prstGeom prst="rect">
-            <a:avLst/>
-          </a:prstGeom>
-          <a:noFill/>
-        </p:spPr>
-        <p:txBody>
-          <a:bodyPr wrap="square">
-            <a:spAutoFit/>
-          </a:bodyPr>
-          <a:lstStyle/>
-          <a:p>
-            <a:pPr algn="l"/>
-            <a:r>
-              <a:rPr sz="2400" b="1" i="0">
-                <a:solidFill>
-                  <a:srgbClr val="FFFFFF"/>
-                </a:solidFill>
-              </a:rPr>
-              <a:t>The Detection Engine — 3 Rules, Automatically Applied to Every Provider</a:t>
-            </a:r>
-          </a:p>
-        </p:txBody>
-      </p:sp>
-      <p:sp>
-        <p:nvSpPr>
-          <p:cNvPr id="6" name="Rectangle 5"/>
+          <p:cNvPr id="5" name="Rectangle 4"/>
           <p:cNvSpPr/>
           <p:nvPr/>
         </p:nvSpPr>
         <p:spPr>
           <a:xfrm>
-            <a:off x="0" y="960120"/>
-            <a:ext cx="12188952" cy="347472"/>
-          </a:xfrm>
-          <a:prstGeom prst="rect">
-            <a:avLst/>
-          </a:prstGeom>
-          <a:solidFill>
-            <a:srgbClr val="F5F5F5"/>
-          </a:solidFill>
-          <a:ln>
-            <a:noFill/>
-          </a:ln>
-        </p:spPr>
-        <p:style>
-          <a:lnRef idx="1">
-            <a:schemeClr val="accent1"/>
-          </a:lnRef>
-          <a:fillRef idx="3">
-            <a:schemeClr val="accent1"/>
-          </a:fillRef>
-          <a:effectRef idx="2">
-            <a:schemeClr val="accent1"/>
-          </a:effectRef>
-          <a:fontRef idx="minor">
-            <a:schemeClr val="lt1"/>
-          </a:fontRef>
-        </p:style>
-        <p:txBody>
-          <a:bodyPr rtlCol="0" anchor="ctr"/>
-          <a:lstStyle/>
-          <a:p>
-            <a:pPr algn="ctr"/>
-          </a:p>
-        </p:txBody>
-      </p:sp>
-      <p:sp>
-        <p:nvSpPr>
-          <p:cNvPr id="7" name="TextBox 6"/>
-          <p:cNvSpPr txBox="1"/>
-          <p:nvPr/>
-        </p:nvSpPr>
-        <p:spPr>
-          <a:xfrm>
-            <a:off x="365760" y="987552"/>
-            <a:ext cx="11430000" cy="301752"/>
-          </a:xfrm>
-          <a:prstGeom prst="rect">
-            <a:avLst/>
-          </a:prstGeom>
-          <a:noFill/>
-        </p:spPr>
-        <p:txBody>
-          <a:bodyPr wrap="square">
-            <a:spAutoFit/>
-          </a:bodyPr>
-          <a:lstStyle/>
-          <a:p>
-            <a:pPr algn="l"/>
-            <a:r>
-              <a:rPr sz="1200" b="0" i="1">
-                <a:solidFill>
-                  <a:srgbClr val="444444"/>
-                </a:solidFill>
-              </a:rPr>
-              <a:t>Each rule adds points to a provider's risk score. Final score 0–100 determines what happens next.</a:t>
-            </a:r>
-          </a:p>
-        </p:txBody>
-      </p:sp>
-      <p:sp>
-        <p:nvSpPr>
-          <p:cNvPr id="8" name="Rectangle 7"/>
-          <p:cNvSpPr/>
-          <p:nvPr/>
-        </p:nvSpPr>
-        <p:spPr>
-          <a:xfrm>
-            <a:off x="0" y="6510528"/>
-            <a:ext cx="12188952" cy="347472"/>
-          </a:xfrm>
-          <a:prstGeom prst="rect">
-            <a:avLst/>
-          </a:prstGeom>
-          <a:solidFill>
-            <a:srgbClr val="1A2440"/>
-          </a:solidFill>
-          <a:ln>
-            <a:noFill/>
-          </a:ln>
-        </p:spPr>
-        <p:style>
-          <a:lnRef idx="1">
-            <a:schemeClr val="accent1"/>
-          </a:lnRef>
-          <a:fillRef idx="3">
-            <a:schemeClr val="accent1"/>
-          </a:fillRef>
-          <a:effectRef idx="2">
-            <a:schemeClr val="accent1"/>
-          </a:effectRef>
-          <a:fontRef idx="minor">
-            <a:schemeClr val="lt1"/>
-          </a:fontRef>
-        </p:style>
-        <p:txBody>
-          <a:bodyPr rtlCol="0" anchor="ctr"/>
-          <a:lstStyle/>
-          <a:p>
-            <a:pPr algn="ctr"/>
-          </a:p>
-        </p:txBody>
-      </p:sp>
-      <p:sp>
-        <p:nvSpPr>
-          <p:cNvPr id="9" name="TextBox 8"/>
-          <p:cNvSpPr txBox="1"/>
-          <p:nvPr/>
-        </p:nvSpPr>
-        <p:spPr>
-          <a:xfrm>
-            <a:off x="274320" y="6519672"/>
-            <a:ext cx="11612880" cy="329184"/>
-          </a:xfrm>
-          <a:prstGeom prst="rect">
-            <a:avLst/>
-          </a:prstGeom>
-          <a:noFill/>
-        </p:spPr>
-        <p:txBody>
-          <a:bodyPr wrap="square">
-            <a:spAutoFit/>
-          </a:bodyPr>
-          <a:lstStyle/>
-          <a:p>
-            <a:pPr algn="ctr"/>
-            <a:r>
-              <a:rPr sz="900" b="0" i="0">
-                <a:solidFill>
-                  <a:srgbClr val="FFFFFF"/>
-                </a:solidFill>
-              </a:rPr>
-              <a:t>Alan Assurance · Fraud Detection Case · 2024</a:t>
-            </a:r>
-          </a:p>
-        </p:txBody>
-      </p:sp>
-      <p:sp>
-        <p:nvSpPr>
-          <p:cNvPr id="10" name="Rectangle 9"/>
-          <p:cNvSpPr/>
-          <p:nvPr/>
-        </p:nvSpPr>
-        <p:spPr>
-          <a:xfrm>
-            <a:off x="274320" y="1417320"/>
-            <a:ext cx="3520440" cy="3520440"/>
-          </a:xfrm>
-          <a:prstGeom prst="rect">
-            <a:avLst/>
-          </a:prstGeom>
-          <a:solidFill>
-            <a:srgbClr val="1A2440"/>
-          </a:solidFill>
-          <a:ln>
-            <a:noFill/>
-          </a:ln>
-        </p:spPr>
-        <p:style>
-          <a:lnRef idx="1">
-            <a:schemeClr val="accent1"/>
-          </a:lnRef>
-          <a:fillRef idx="3">
-            <a:schemeClr val="accent1"/>
-          </a:fillRef>
-          <a:effectRef idx="2">
-            <a:schemeClr val="accent1"/>
-          </a:effectRef>
-          <a:fontRef idx="minor">
-            <a:schemeClr val="lt1"/>
-          </a:fontRef>
-        </p:style>
-        <p:txBody>
-          <a:bodyPr rtlCol="0" anchor="ctr"/>
-          <a:lstStyle/>
-          <a:p>
-            <a:pPr algn="ctr"/>
-          </a:p>
-        </p:txBody>
-      </p:sp>
-      <p:sp>
-        <p:nvSpPr>
-          <p:cNvPr id="11" name="Rectangle 10"/>
-          <p:cNvSpPr/>
-          <p:nvPr/>
-        </p:nvSpPr>
-        <p:spPr>
-          <a:xfrm>
-            <a:off x="274320" y="1417320"/>
-            <a:ext cx="3520440" cy="438912"/>
-          </a:xfrm>
-          <a:prstGeom prst="rect">
-            <a:avLst/>
-          </a:prstGeom>
-          <a:solidFill>
-            <a:srgbClr val="D62839"/>
-          </a:solidFill>
-          <a:ln>
-            <a:noFill/>
-          </a:ln>
-        </p:spPr>
-        <p:style>
-          <a:lnRef idx="1">
-            <a:schemeClr val="accent1"/>
-          </a:lnRef>
-          <a:fillRef idx="3">
-            <a:schemeClr val="accent1"/>
-          </a:fillRef>
-          <a:effectRef idx="2">
-            <a:schemeClr val="accent1"/>
-          </a:effectRef>
-          <a:fontRef idx="minor">
-            <a:schemeClr val="lt1"/>
-          </a:fontRef>
-        </p:style>
-        <p:txBody>
-          <a:bodyPr rtlCol="0" anchor="ctr"/>
-          <a:lstStyle/>
-          <a:p>
-            <a:pPr algn="ctr"/>
-          </a:p>
-        </p:txBody>
-      </p:sp>
-      <p:sp>
-        <p:nvSpPr>
-          <p:cNvPr id="12" name="TextBox 11"/>
-          <p:cNvSpPr txBox="1"/>
-          <p:nvPr/>
-        </p:nvSpPr>
-        <p:spPr>
-          <a:xfrm>
-            <a:off x="438912" y="1444752"/>
-            <a:ext cx="3200400" cy="347472"/>
-          </a:xfrm>
-          <a:prstGeom prst="rect">
-            <a:avLst/>
-          </a:prstGeom>
-          <a:noFill/>
-        </p:spPr>
-        <p:txBody>
-          <a:bodyPr wrap="square">
-            <a:spAutoFit/>
-          </a:bodyPr>
-          <a:lstStyle/>
-          <a:p>
-            <a:pPr algn="l"/>
-            <a:r>
-              <a:rPr sz="1600" b="1" i="0">
-                <a:solidFill>
-                  <a:srgbClr val="FFFFFF"/>
-                </a:solidFill>
-              </a:rPr>
-              <a:t>Rule 1</a:t>
-            </a:r>
-          </a:p>
-        </p:txBody>
-      </p:sp>
-      <p:sp>
-        <p:nvSpPr>
-          <p:cNvPr id="13" name="TextBox 12"/>
-          <p:cNvSpPr txBox="1"/>
-          <p:nvPr/>
-        </p:nvSpPr>
-        <p:spPr>
-          <a:xfrm>
-            <a:off x="438912" y="1947672"/>
-            <a:ext cx="3200400" cy="365760"/>
-          </a:xfrm>
-          <a:prstGeom prst="rect">
-            <a:avLst/>
-          </a:prstGeom>
-          <a:noFill/>
-        </p:spPr>
-        <p:txBody>
-          <a:bodyPr wrap="square">
-            <a:spAutoFit/>
-          </a:bodyPr>
-          <a:lstStyle/>
-          <a:p>
-            <a:pPr algn="l"/>
-            <a:r>
-              <a:rPr sz="1300" b="1" i="0">
-                <a:solidFill>
-                  <a:srgbClr val="F5A623"/>
-                </a:solidFill>
-              </a:rPr>
-              <a:t>Billing Spike</a:t>
-            </a:r>
-          </a:p>
-        </p:txBody>
-      </p:sp>
-      <p:sp>
-        <p:nvSpPr>
-          <p:cNvPr id="14" name="TextBox 13"/>
-          <p:cNvSpPr txBox="1"/>
-          <p:nvPr/>
-        </p:nvSpPr>
-        <p:spPr>
-          <a:xfrm>
-            <a:off x="438912" y="2377440"/>
-            <a:ext cx="3200400" cy="640080"/>
-          </a:xfrm>
-          <a:prstGeom prst="rect">
-            <a:avLst/>
-          </a:prstGeom>
-          <a:noFill/>
-        </p:spPr>
-        <p:txBody>
-          <a:bodyPr wrap="square">
-            <a:spAutoFit/>
-          </a:bodyPr>
-          <a:lstStyle/>
-          <a:p>
-            <a:pPr algn="l"/>
-            <a:r>
-              <a:rPr sz="1000" b="0" i="0">
-                <a:solidFill>
-                  <a:srgbClr val="CCCCCC"/>
-                </a:solidFill>
-              </a:rPr>
-              <a:t>Flag any month where a provider's total billings are more than 5× higher than their own rolling 6-month average for that product category.</a:t>
-            </a:r>
-          </a:p>
-        </p:txBody>
-      </p:sp>
-      <p:sp>
-        <p:nvSpPr>
-          <p:cNvPr id="15" name="Rectangle 14"/>
-          <p:cNvSpPr/>
-          <p:nvPr/>
-        </p:nvSpPr>
-        <p:spPr>
-          <a:xfrm>
-            <a:off x="274320" y="3090672"/>
-            <a:ext cx="3520440" cy="274320"/>
-          </a:xfrm>
-          <a:prstGeom prst="rect">
-            <a:avLst/>
-          </a:prstGeom>
-          <a:solidFill>
-            <a:srgbClr val="26355C"/>
-          </a:solidFill>
-          <a:ln>
-            <a:noFill/>
-          </a:ln>
-        </p:spPr>
-        <p:style>
-          <a:lnRef idx="1">
-            <a:schemeClr val="accent1"/>
-          </a:lnRef>
-          <a:fillRef idx="3">
-            <a:schemeClr val="accent1"/>
-          </a:fillRef>
-          <a:effectRef idx="2">
-            <a:schemeClr val="accent1"/>
-          </a:effectRef>
-          <a:fontRef idx="minor">
-            <a:schemeClr val="lt1"/>
-          </a:fontRef>
-        </p:style>
-        <p:txBody>
-          <a:bodyPr rtlCol="0" anchor="ctr"/>
-          <a:lstStyle/>
-          <a:p>
-            <a:pPr algn="ctr"/>
-          </a:p>
-        </p:txBody>
-      </p:sp>
-      <p:sp>
-        <p:nvSpPr>
-          <p:cNvPr id="16" name="TextBox 15"/>
-          <p:cNvSpPr txBox="1"/>
-          <p:nvPr/>
-        </p:nvSpPr>
-        <p:spPr>
-          <a:xfrm>
-            <a:off x="438912" y="3108960"/>
-            <a:ext cx="548640" cy="228600"/>
-          </a:xfrm>
-          <a:prstGeom prst="rect">
-            <a:avLst/>
-          </a:prstGeom>
-          <a:noFill/>
-        </p:spPr>
-        <p:txBody>
-          <a:bodyPr wrap="square">
-            <a:spAutoFit/>
-          </a:bodyPr>
-          <a:lstStyle/>
-          <a:p>
-            <a:pPr algn="l"/>
-            <a:r>
-              <a:rPr sz="900" b="1" i="0">
-                <a:solidFill>
-                  <a:srgbClr val="F5A623"/>
-                </a:solidFill>
-              </a:rPr>
-              <a:t>Logic:</a:t>
-            </a:r>
-          </a:p>
-        </p:txBody>
-      </p:sp>
-      <p:sp>
-        <p:nvSpPr>
-          <p:cNvPr id="17" name="TextBox 16"/>
-          <p:cNvSpPr txBox="1"/>
-          <p:nvPr/>
-        </p:nvSpPr>
-        <p:spPr>
-          <a:xfrm>
-            <a:off x="987552" y="3108960"/>
-            <a:ext cx="2651760" cy="228600"/>
-          </a:xfrm>
-          <a:prstGeom prst="rect">
-            <a:avLst/>
-          </a:prstGeom>
-          <a:noFill/>
-        </p:spPr>
-        <p:txBody>
-          <a:bodyPr wrap="square">
-            <a:spAutoFit/>
-          </a:bodyPr>
-          <a:lstStyle/>
-          <a:p>
-            <a:pPr algn="l"/>
-            <a:r>
-              <a:rPr sz="900" b="0" i="0">
-                <a:solidFill>
-                  <a:srgbClr val="FFFFFF"/>
-                </a:solidFill>
-              </a:rPr>
-              <a:t>current month &gt; 5 × 6-month median</a:t>
-            </a:r>
-          </a:p>
-        </p:txBody>
-      </p:sp>
-      <p:sp>
-        <p:nvSpPr>
-          <p:cNvPr id="18" name="Rectangle 17"/>
-          <p:cNvSpPr/>
-          <p:nvPr/>
-        </p:nvSpPr>
-        <p:spPr>
-          <a:xfrm>
-            <a:off x="274320" y="4572000"/>
-            <a:ext cx="3520440" cy="384048"/>
+            <a:off x="457200" y="1463040"/>
+            <a:ext cx="2011680" cy="502920"/>
           </a:xfrm>
           <a:prstGeom prst="rect">
             <a:avLst/>
@@ -18789,1298 +23158,137 @@
       </p:sp>
       <p:sp>
         <p:nvSpPr>
-          <p:cNvPr id="19" name="TextBox 18"/>
-          <p:cNvSpPr txBox="1"/>
-          <p:nvPr/>
-        </p:nvSpPr>
-        <p:spPr>
-          <a:xfrm>
-            <a:off x="365760" y="4590288"/>
-            <a:ext cx="3337560" cy="329184"/>
-          </a:xfrm>
-          <a:prstGeom prst="rect">
-            <a:avLst/>
-          </a:prstGeom>
-          <a:noFill/>
-        </p:spPr>
-        <p:txBody>
-          <a:bodyPr wrap="square">
-            <a:spAutoFit/>
-          </a:bodyPr>
-          <a:lstStyle/>
-          <a:p>
-            <a:pPr algn="ctr"/>
-            <a:r>
-              <a:rPr sz="1000" b="1" i="0">
+          <p:cNvPr id="6" name="TextBox 5"/>
+          <p:cNvSpPr txBox="1"/>
+          <p:nvPr/>
+        </p:nvSpPr>
+        <p:spPr>
+          <a:xfrm>
+            <a:off x="457200" y="1463040"/>
+            <a:ext cx="2011680" cy="502920"/>
+          </a:xfrm>
+          <a:prstGeom prst="rect">
+            <a:avLst/>
+          </a:prstGeom>
+          <a:noFill/>
+        </p:spPr>
+        <p:txBody>
+          <a:bodyPr wrap="square">
+            <a:spAutoFit/>
+          </a:bodyPr>
+          <a:lstStyle/>
+          <a:p>
+            <a:pPr algn="ctr"/>
+            <a:r>
+              <a:rPr sz="1300" b="1" i="0">
                 <a:solidFill>
                   <a:srgbClr val="1A2440"/>
                 </a:solidFill>
               </a:rPr>
-              <a:t>+30 points per spiked month</a:t>
-            </a:r>
-          </a:p>
-        </p:txBody>
-      </p:sp>
-      <p:sp>
-        <p:nvSpPr>
-          <p:cNvPr id="20" name="Rectangle 19"/>
-          <p:cNvSpPr/>
-          <p:nvPr/>
-        </p:nvSpPr>
-        <p:spPr>
-          <a:xfrm>
-            <a:off x="4160520" y="1417320"/>
-            <a:ext cx="3520440" cy="3520440"/>
-          </a:xfrm>
-          <a:prstGeom prst="rect">
-            <a:avLst/>
-          </a:prstGeom>
-          <a:solidFill>
-            <a:srgbClr val="1A2440"/>
-          </a:solidFill>
-          <a:ln>
-            <a:noFill/>
-          </a:ln>
-        </p:spPr>
-        <p:style>
-          <a:lnRef idx="1">
-            <a:schemeClr val="accent1"/>
-          </a:lnRef>
-          <a:fillRef idx="3">
-            <a:schemeClr val="accent1"/>
-          </a:fillRef>
-          <a:effectRef idx="2">
-            <a:schemeClr val="accent1"/>
-          </a:effectRef>
-          <a:fontRef idx="minor">
-            <a:schemeClr val="lt1"/>
-          </a:fontRef>
-        </p:style>
-        <p:txBody>
-          <a:bodyPr rtlCol="0" anchor="ctr"/>
-          <a:lstStyle/>
-          <a:p>
-            <a:pPr algn="ctr"/>
-          </a:p>
-        </p:txBody>
-      </p:sp>
-      <p:sp>
-        <p:nvSpPr>
-          <p:cNvPr id="21" name="Rectangle 20"/>
-          <p:cNvSpPr/>
-          <p:nvPr/>
-        </p:nvSpPr>
-        <p:spPr>
-          <a:xfrm>
-            <a:off x="4160520" y="1417320"/>
-            <a:ext cx="3520440" cy="438912"/>
-          </a:xfrm>
-          <a:prstGeom prst="rect">
-            <a:avLst/>
-          </a:prstGeom>
-          <a:solidFill>
-            <a:srgbClr val="D62839"/>
-          </a:solidFill>
-          <a:ln>
-            <a:noFill/>
-          </a:ln>
-        </p:spPr>
-        <p:style>
-          <a:lnRef idx="1">
-            <a:schemeClr val="accent1"/>
-          </a:lnRef>
-          <a:fillRef idx="3">
-            <a:schemeClr val="accent1"/>
-          </a:fillRef>
-          <a:effectRef idx="2">
-            <a:schemeClr val="accent1"/>
-          </a:effectRef>
-          <a:fontRef idx="minor">
-            <a:schemeClr val="lt1"/>
-          </a:fontRef>
-        </p:style>
-        <p:txBody>
-          <a:bodyPr rtlCol="0" anchor="ctr"/>
-          <a:lstStyle/>
-          <a:p>
-            <a:pPr algn="ctr"/>
-          </a:p>
-        </p:txBody>
-      </p:sp>
-      <p:sp>
-        <p:nvSpPr>
-          <p:cNvPr id="22" name="TextBox 21"/>
-          <p:cNvSpPr txBox="1"/>
-          <p:nvPr/>
-        </p:nvSpPr>
-        <p:spPr>
-          <a:xfrm>
-            <a:off x="4325112" y="1444752"/>
-            <a:ext cx="3200400" cy="347472"/>
-          </a:xfrm>
-          <a:prstGeom prst="rect">
-            <a:avLst/>
-          </a:prstGeom>
-          <a:noFill/>
-        </p:spPr>
-        <p:txBody>
-          <a:bodyPr wrap="square">
-            <a:spAutoFit/>
-          </a:bodyPr>
-          <a:lstStyle/>
-          <a:p>
-            <a:pPr algn="l"/>
-            <a:r>
-              <a:rPr sz="1600" b="1" i="0">
+              <a:t>QUESTION 2</a:t>
+            </a:r>
+          </a:p>
+        </p:txBody>
+      </p:sp>
+      <p:sp>
+        <p:nvSpPr>
+          <p:cNvPr id="7" name="TextBox 6"/>
+          <p:cNvSpPr txBox="1"/>
+          <p:nvPr/>
+        </p:nvSpPr>
+        <p:spPr>
+          <a:xfrm>
+            <a:off x="457200" y="2103120"/>
+            <a:ext cx="11430000" cy="457200"/>
+          </a:xfrm>
+          <a:prstGeom prst="rect">
+            <a:avLst/>
+          </a:prstGeom>
+          <a:noFill/>
+        </p:spPr>
+        <p:txBody>
+          <a:bodyPr wrap="square">
+            <a:spAutoFit/>
+          </a:bodyPr>
+          <a:lstStyle/>
+          <a:p>
+            <a:pPr algn="l"/>
+            <a:r>
+              <a:rPr sz="1600" b="0" i="1">
+                <a:solidFill>
+                  <a:srgbClr val="CCCCCC"/>
+                </a:solidFill>
+              </a:rPr>
+              <a:t>Detection System Design</a:t>
+            </a:r>
+          </a:p>
+        </p:txBody>
+      </p:sp>
+      <p:sp>
+        <p:nvSpPr>
+          <p:cNvPr id="8" name="TextBox 7"/>
+          <p:cNvSpPr txBox="1"/>
+          <p:nvPr/>
+        </p:nvSpPr>
+        <p:spPr>
+          <a:xfrm>
+            <a:off x="457200" y="2697480"/>
+            <a:ext cx="11430000" cy="1371600"/>
+          </a:xfrm>
+          <a:prstGeom prst="rect">
+            <a:avLst/>
+          </a:prstGeom>
+          <a:noFill/>
+        </p:spPr>
+        <p:txBody>
+          <a:bodyPr wrap="square">
+            <a:spAutoFit/>
+          </a:bodyPr>
+          <a:lstStyle/>
+          <a:p>
+            <a:pPr algn="l"/>
+            <a:r>
+              <a:rPr sz="4000" b="1" i="0">
                 <a:solidFill>
                   <a:srgbClr val="FFFFFF"/>
                 </a:solidFill>
               </a:rPr>
-              <a:t>Rule 2</a:t>
-            </a:r>
-          </a:p>
-        </p:txBody>
-      </p:sp>
-      <p:sp>
-        <p:nvSpPr>
-          <p:cNvPr id="23" name="TextBox 22"/>
-          <p:cNvSpPr txBox="1"/>
-          <p:nvPr/>
-        </p:nvSpPr>
-        <p:spPr>
-          <a:xfrm>
-            <a:off x="4325112" y="1947672"/>
-            <a:ext cx="3200400" cy="365760"/>
-          </a:xfrm>
-          <a:prstGeom prst="rect">
-            <a:avLst/>
-          </a:prstGeom>
-          <a:noFill/>
-        </p:spPr>
-        <p:txBody>
-          <a:bodyPr wrap="square">
-            <a:spAutoFit/>
-          </a:bodyPr>
-          <a:lstStyle/>
-          <a:p>
-            <a:pPr algn="l"/>
-            <a:r>
-              <a:rPr sz="1300" b="1" i="0">
-                <a:solidFill>
-                  <a:srgbClr val="F5A623"/>
-                </a:solidFill>
-              </a:rPr>
-              <a:t>Systematic Co-Billing</a:t>
-            </a:r>
-          </a:p>
-        </p:txBody>
-      </p:sp>
-      <p:sp>
-        <p:nvSpPr>
-          <p:cNvPr id="24" name="TextBox 23"/>
-          <p:cNvSpPr txBox="1"/>
-          <p:nvPr/>
-        </p:nvSpPr>
-        <p:spPr>
-          <a:xfrm>
-            <a:off x="4325112" y="2377440"/>
-            <a:ext cx="3200400" cy="640080"/>
-          </a:xfrm>
-          <a:prstGeom prst="rect">
-            <a:avLst/>
-          </a:prstGeom>
-          <a:noFill/>
-        </p:spPr>
-        <p:txBody>
-          <a:bodyPr wrap="square">
-            <a:spAutoFit/>
-          </a:bodyPr>
-          <a:lstStyle/>
-          <a:p>
-            <a:pPr algn="l"/>
-            <a:r>
-              <a:rPr sz="1000" b="0" i="0">
-                <a:solidFill>
-                  <a:srgbClr val="CCCCCC"/>
-                </a:solidFill>
-              </a:rPr>
-              <a:t>Flag providers who bill both glasses and contacts in the same month for the majority of their active months (≥ 50%). Occasional overlap is normal; systematic overlap is not.</a:t>
-            </a:r>
-          </a:p>
-        </p:txBody>
-      </p:sp>
-      <p:sp>
-        <p:nvSpPr>
-          <p:cNvPr id="25" name="Rectangle 24"/>
-          <p:cNvSpPr/>
-          <p:nvPr/>
-        </p:nvSpPr>
-        <p:spPr>
-          <a:xfrm>
-            <a:off x="4160520" y="3090672"/>
-            <a:ext cx="3520440" cy="274320"/>
-          </a:xfrm>
-          <a:prstGeom prst="rect">
-            <a:avLst/>
-          </a:prstGeom>
-          <a:solidFill>
-            <a:srgbClr val="26355C"/>
-          </a:solidFill>
-          <a:ln>
-            <a:noFill/>
-          </a:ln>
-        </p:spPr>
-        <p:style>
-          <a:lnRef idx="1">
-            <a:schemeClr val="accent1"/>
-          </a:lnRef>
-          <a:fillRef idx="3">
-            <a:schemeClr val="accent1"/>
-          </a:fillRef>
-          <a:effectRef idx="2">
-            <a:schemeClr val="accent1"/>
-          </a:effectRef>
-          <a:fontRef idx="minor">
-            <a:schemeClr val="lt1"/>
-          </a:fontRef>
-        </p:style>
-        <p:txBody>
-          <a:bodyPr rtlCol="0" anchor="ctr"/>
-          <a:lstStyle/>
-          <a:p>
-            <a:pPr algn="ctr"/>
-          </a:p>
-        </p:txBody>
-      </p:sp>
-      <p:sp>
-        <p:nvSpPr>
-          <p:cNvPr id="26" name="TextBox 25"/>
-          <p:cNvSpPr txBox="1"/>
-          <p:nvPr/>
-        </p:nvSpPr>
-        <p:spPr>
-          <a:xfrm>
-            <a:off x="4325112" y="3108960"/>
-            <a:ext cx="548640" cy="228600"/>
-          </a:xfrm>
-          <a:prstGeom prst="rect">
-            <a:avLst/>
-          </a:prstGeom>
-          <a:noFill/>
-        </p:spPr>
-        <p:txBody>
-          <a:bodyPr wrap="square">
-            <a:spAutoFit/>
-          </a:bodyPr>
-          <a:lstStyle/>
-          <a:p>
-            <a:pPr algn="l"/>
-            <a:r>
-              <a:rPr sz="900" b="1" i="0">
-                <a:solidFill>
-                  <a:srgbClr val="F5A623"/>
-                </a:solidFill>
-              </a:rPr>
-              <a:t>Logic:</a:t>
-            </a:r>
-          </a:p>
-        </p:txBody>
-      </p:sp>
-      <p:sp>
-        <p:nvSpPr>
-          <p:cNvPr id="27" name="TextBox 26"/>
-          <p:cNvSpPr txBox="1"/>
-          <p:nvPr/>
-        </p:nvSpPr>
-        <p:spPr>
-          <a:xfrm>
-            <a:off x="4873752" y="3108960"/>
-            <a:ext cx="2651760" cy="228600"/>
-          </a:xfrm>
-          <a:prstGeom prst="rect">
-            <a:avLst/>
-          </a:prstGeom>
-          <a:noFill/>
-        </p:spPr>
-        <p:txBody>
-          <a:bodyPr wrap="square">
-            <a:spAutoFit/>
-          </a:bodyPr>
-          <a:lstStyle/>
-          <a:p>
-            <a:pPr algn="l"/>
-            <a:r>
-              <a:rPr sz="900" b="0" i="0">
+              <a:t>How did we turn these
+patterns into a system?</a:t>
+            </a:r>
+          </a:p>
+        </p:txBody>
+      </p:sp>
+      <p:sp>
+        <p:nvSpPr>
+          <p:cNvPr id="9" name="TextBox 8"/>
+          <p:cNvSpPr txBox="1"/>
+          <p:nvPr/>
+        </p:nvSpPr>
+        <p:spPr>
+          <a:xfrm>
+            <a:off x="457200" y="5440680"/>
+            <a:ext cx="11430000" cy="548640"/>
+          </a:xfrm>
+          <a:prstGeom prst="rect">
+            <a:avLst/>
+          </a:prstGeom>
+          <a:noFill/>
+        </p:spPr>
+        <p:txBody>
+          <a:bodyPr wrap="square">
+            <a:spAutoFit/>
+          </a:bodyPr>
+          <a:lstStyle/>
+          <a:p>
+            <a:pPr algn="l"/>
+            <a:r>
+              <a:rPr sz="1300" b="0" i="1">
                 <a:solidFill>
                   <a:srgbClr val="FFFFFF"/>
                 </a:solidFill>
               </a:rPr>
-              <a:t>≥ 50% of months have both categories</a:t>
-            </a:r>
-          </a:p>
-        </p:txBody>
-      </p:sp>
-      <p:sp>
-        <p:nvSpPr>
-          <p:cNvPr id="28" name="Rectangle 27"/>
-          <p:cNvSpPr/>
-          <p:nvPr/>
-        </p:nvSpPr>
-        <p:spPr>
-          <a:xfrm>
-            <a:off x="4160520" y="4572000"/>
-            <a:ext cx="3520440" cy="384048"/>
-          </a:xfrm>
-          <a:prstGeom prst="rect">
-            <a:avLst/>
-          </a:prstGeom>
-          <a:solidFill>
-            <a:srgbClr val="F5A623"/>
-          </a:solidFill>
-          <a:ln>
-            <a:noFill/>
-          </a:ln>
-        </p:spPr>
-        <p:style>
-          <a:lnRef idx="1">
-            <a:schemeClr val="accent1"/>
-          </a:lnRef>
-          <a:fillRef idx="3">
-            <a:schemeClr val="accent1"/>
-          </a:fillRef>
-          <a:effectRef idx="2">
-            <a:schemeClr val="accent1"/>
-          </a:effectRef>
-          <a:fontRef idx="minor">
-            <a:schemeClr val="lt1"/>
-          </a:fontRef>
-        </p:style>
-        <p:txBody>
-          <a:bodyPr rtlCol="0" anchor="ctr"/>
-          <a:lstStyle/>
-          <a:p>
-            <a:pPr algn="ctr"/>
-          </a:p>
-        </p:txBody>
-      </p:sp>
-      <p:sp>
-        <p:nvSpPr>
-          <p:cNvPr id="29" name="TextBox 28"/>
-          <p:cNvSpPr txBox="1"/>
-          <p:nvPr/>
-        </p:nvSpPr>
-        <p:spPr>
-          <a:xfrm>
-            <a:off x="4251959" y="4590288"/>
-            <a:ext cx="3337560" cy="329184"/>
-          </a:xfrm>
-          <a:prstGeom prst="rect">
-            <a:avLst/>
-          </a:prstGeom>
-          <a:noFill/>
-        </p:spPr>
-        <p:txBody>
-          <a:bodyPr wrap="square">
-            <a:spAutoFit/>
-          </a:bodyPr>
-          <a:lstStyle/>
-          <a:p>
-            <a:pPr algn="ctr"/>
-            <a:r>
-              <a:rPr sz="1000" b="1" i="0">
-                <a:solidFill>
-                  <a:srgbClr val="1A2440"/>
-                </a:solidFill>
-              </a:rPr>
-              <a:t>25–50 points  (scales with how systematic)</a:t>
-            </a:r>
-          </a:p>
-        </p:txBody>
-      </p:sp>
-      <p:sp>
-        <p:nvSpPr>
-          <p:cNvPr id="30" name="Rectangle 29"/>
-          <p:cNvSpPr/>
-          <p:nvPr/>
-        </p:nvSpPr>
-        <p:spPr>
-          <a:xfrm>
-            <a:off x="8046720" y="1417320"/>
-            <a:ext cx="3520440" cy="3520440"/>
-          </a:xfrm>
-          <a:prstGeom prst="rect">
-            <a:avLst/>
-          </a:prstGeom>
-          <a:solidFill>
-            <a:srgbClr val="1A2440"/>
-          </a:solidFill>
-          <a:ln>
-            <a:noFill/>
-          </a:ln>
-        </p:spPr>
-        <p:style>
-          <a:lnRef idx="1">
-            <a:schemeClr val="accent1"/>
-          </a:lnRef>
-          <a:fillRef idx="3">
-            <a:schemeClr val="accent1"/>
-          </a:fillRef>
-          <a:effectRef idx="2">
-            <a:schemeClr val="accent1"/>
-          </a:effectRef>
-          <a:fontRef idx="minor">
-            <a:schemeClr val="lt1"/>
-          </a:fontRef>
-        </p:style>
-        <p:txBody>
-          <a:bodyPr rtlCol="0" anchor="ctr"/>
-          <a:lstStyle/>
-          <a:p>
-            <a:pPr algn="ctr"/>
-          </a:p>
-        </p:txBody>
-      </p:sp>
-      <p:sp>
-        <p:nvSpPr>
-          <p:cNvPr id="31" name="Rectangle 30"/>
-          <p:cNvSpPr/>
-          <p:nvPr/>
-        </p:nvSpPr>
-        <p:spPr>
-          <a:xfrm>
-            <a:off x="8046720" y="1417320"/>
-            <a:ext cx="3520440" cy="438912"/>
-          </a:xfrm>
-          <a:prstGeom prst="rect">
-            <a:avLst/>
-          </a:prstGeom>
-          <a:solidFill>
-            <a:srgbClr val="D62839"/>
-          </a:solidFill>
-          <a:ln>
-            <a:noFill/>
-          </a:ln>
-        </p:spPr>
-        <p:style>
-          <a:lnRef idx="1">
-            <a:schemeClr val="accent1"/>
-          </a:lnRef>
-          <a:fillRef idx="3">
-            <a:schemeClr val="accent1"/>
-          </a:fillRef>
-          <a:effectRef idx="2">
-            <a:schemeClr val="accent1"/>
-          </a:effectRef>
-          <a:fontRef idx="minor">
-            <a:schemeClr val="lt1"/>
-          </a:fontRef>
-        </p:style>
-        <p:txBody>
-          <a:bodyPr rtlCol="0" anchor="ctr"/>
-          <a:lstStyle/>
-          <a:p>
-            <a:pPr algn="ctr"/>
-          </a:p>
-        </p:txBody>
-      </p:sp>
-      <p:sp>
-        <p:nvSpPr>
-          <p:cNvPr id="32" name="TextBox 31"/>
-          <p:cNvSpPr txBox="1"/>
-          <p:nvPr/>
-        </p:nvSpPr>
-        <p:spPr>
-          <a:xfrm>
-            <a:off x="8211312" y="1444752"/>
-            <a:ext cx="3200400" cy="347472"/>
-          </a:xfrm>
-          <a:prstGeom prst="rect">
-            <a:avLst/>
-          </a:prstGeom>
-          <a:noFill/>
-        </p:spPr>
-        <p:txBody>
-          <a:bodyPr wrap="square">
-            <a:spAutoFit/>
-          </a:bodyPr>
-          <a:lstStyle/>
-          <a:p>
-            <a:pPr algn="l"/>
-            <a:r>
-              <a:rPr sz="1600" b="1" i="0">
-                <a:solidFill>
-                  <a:srgbClr val="FFFFFF"/>
-                </a:solidFill>
-              </a:rPr>
-              <a:t>Rule 3</a:t>
-            </a:r>
-          </a:p>
-        </p:txBody>
-      </p:sp>
-      <p:sp>
-        <p:nvSpPr>
-          <p:cNvPr id="33" name="TextBox 32"/>
-          <p:cNvSpPr txBox="1"/>
-          <p:nvPr/>
-        </p:nvSpPr>
-        <p:spPr>
-          <a:xfrm>
-            <a:off x="8211312" y="1947672"/>
-            <a:ext cx="3200400" cy="365760"/>
-          </a:xfrm>
-          <a:prstGeom prst="rect">
-            <a:avLst/>
-          </a:prstGeom>
-          <a:noFill/>
-        </p:spPr>
-        <p:txBody>
-          <a:bodyPr wrap="square">
-            <a:spAutoFit/>
-          </a:bodyPr>
-          <a:lstStyle/>
-          <a:p>
-            <a:pPr algn="l"/>
-            <a:r>
-              <a:rPr sz="1300" b="1" i="0">
-                <a:solidFill>
-                  <a:srgbClr val="F5A623"/>
-                </a:solidFill>
-              </a:rPr>
-              <a:t>Repeated Identical Amount</a:t>
-            </a:r>
-          </a:p>
-        </p:txBody>
-      </p:sp>
-      <p:sp>
-        <p:nvSpPr>
-          <p:cNvPr id="34" name="TextBox 33"/>
-          <p:cNvSpPr txBox="1"/>
-          <p:nvPr/>
-        </p:nvSpPr>
-        <p:spPr>
-          <a:xfrm>
-            <a:off x="8211312" y="2377440"/>
-            <a:ext cx="3200400" cy="640080"/>
-          </a:xfrm>
-          <a:prstGeom prst="rect">
-            <a:avLst/>
-          </a:prstGeom>
-          <a:noFill/>
-        </p:spPr>
-        <p:txBody>
-          <a:bodyPr wrap="square">
-            <a:spAutoFit/>
-          </a:bodyPr>
-          <a:lstStyle/>
-          <a:p>
-            <a:pPr algn="l"/>
-            <a:r>
-              <a:rPr sz="1000" b="0" i="0">
-                <a:solidFill>
-                  <a:srgbClr val="CCCCCC"/>
-                </a:solidFill>
-              </a:rPr>
-              <a:t>Flag any (provider, category) pair where the exact same euro amount appears 3 or more times within any rolling 12-month window. Real billing varies naturally.</a:t>
-            </a:r>
-          </a:p>
-        </p:txBody>
-      </p:sp>
-      <p:sp>
-        <p:nvSpPr>
-          <p:cNvPr id="35" name="Rectangle 34"/>
-          <p:cNvSpPr/>
-          <p:nvPr/>
-        </p:nvSpPr>
-        <p:spPr>
-          <a:xfrm>
-            <a:off x="8046720" y="3090672"/>
-            <a:ext cx="3520440" cy="274320"/>
-          </a:xfrm>
-          <a:prstGeom prst="rect">
-            <a:avLst/>
-          </a:prstGeom>
-          <a:solidFill>
-            <a:srgbClr val="26355C"/>
-          </a:solidFill>
-          <a:ln>
-            <a:noFill/>
-          </a:ln>
-        </p:spPr>
-        <p:style>
-          <a:lnRef idx="1">
-            <a:schemeClr val="accent1"/>
-          </a:lnRef>
-          <a:fillRef idx="3">
-            <a:schemeClr val="accent1"/>
-          </a:fillRef>
-          <a:effectRef idx="2">
-            <a:schemeClr val="accent1"/>
-          </a:effectRef>
-          <a:fontRef idx="minor">
-            <a:schemeClr val="lt1"/>
-          </a:fontRef>
-        </p:style>
-        <p:txBody>
-          <a:bodyPr rtlCol="0" anchor="ctr"/>
-          <a:lstStyle/>
-          <a:p>
-            <a:pPr algn="ctr"/>
-          </a:p>
-        </p:txBody>
-      </p:sp>
-      <p:sp>
-        <p:nvSpPr>
-          <p:cNvPr id="36" name="TextBox 35"/>
-          <p:cNvSpPr txBox="1"/>
-          <p:nvPr/>
-        </p:nvSpPr>
-        <p:spPr>
-          <a:xfrm>
-            <a:off x="8211312" y="3108960"/>
-            <a:ext cx="548640" cy="228600"/>
-          </a:xfrm>
-          <a:prstGeom prst="rect">
-            <a:avLst/>
-          </a:prstGeom>
-          <a:noFill/>
-        </p:spPr>
-        <p:txBody>
-          <a:bodyPr wrap="square">
-            <a:spAutoFit/>
-          </a:bodyPr>
-          <a:lstStyle/>
-          <a:p>
-            <a:pPr algn="l"/>
-            <a:r>
-              <a:rPr sz="900" b="1" i="0">
-                <a:solidFill>
-                  <a:srgbClr val="F5A623"/>
-                </a:solidFill>
-              </a:rPr>
-              <a:t>Logic:</a:t>
-            </a:r>
-          </a:p>
-        </p:txBody>
-      </p:sp>
-      <p:sp>
-        <p:nvSpPr>
-          <p:cNvPr id="37" name="TextBox 36"/>
-          <p:cNvSpPr txBox="1"/>
-          <p:nvPr/>
-        </p:nvSpPr>
-        <p:spPr>
-          <a:xfrm>
-            <a:off x="8759952" y="3108960"/>
-            <a:ext cx="2651760" cy="228600"/>
-          </a:xfrm>
-          <a:prstGeom prst="rect">
-            <a:avLst/>
-          </a:prstGeom>
-          <a:noFill/>
-        </p:spPr>
-        <p:txBody>
-          <a:bodyPr wrap="square">
-            <a:spAutoFit/>
-          </a:bodyPr>
-          <a:lstStyle/>
-          <a:p>
-            <a:pPr algn="l"/>
-            <a:r>
-              <a:rPr sz="900" b="0" i="0">
-                <a:solidFill>
-                  <a:srgbClr val="FFFFFF"/>
-                </a:solidFill>
-              </a:rPr>
-              <a:t>same € amount ≥ 3× in 12-month window</a:t>
-            </a:r>
-          </a:p>
-        </p:txBody>
-      </p:sp>
-      <p:sp>
-        <p:nvSpPr>
-          <p:cNvPr id="38" name="Rectangle 37"/>
-          <p:cNvSpPr/>
-          <p:nvPr/>
-        </p:nvSpPr>
-        <p:spPr>
-          <a:xfrm>
-            <a:off x="8046720" y="4572000"/>
-            <a:ext cx="3520440" cy="384048"/>
-          </a:xfrm>
-          <a:prstGeom prst="rect">
-            <a:avLst/>
-          </a:prstGeom>
-          <a:solidFill>
-            <a:srgbClr val="F5A623"/>
-          </a:solidFill>
-          <a:ln>
-            <a:noFill/>
-          </a:ln>
-        </p:spPr>
-        <p:style>
-          <a:lnRef idx="1">
-            <a:schemeClr val="accent1"/>
-          </a:lnRef>
-          <a:fillRef idx="3">
-            <a:schemeClr val="accent1"/>
-          </a:fillRef>
-          <a:effectRef idx="2">
-            <a:schemeClr val="accent1"/>
-          </a:effectRef>
-          <a:fontRef idx="minor">
-            <a:schemeClr val="lt1"/>
-          </a:fontRef>
-        </p:style>
-        <p:txBody>
-          <a:bodyPr rtlCol="0" anchor="ctr"/>
-          <a:lstStyle/>
-          <a:p>
-            <a:pPr algn="ctr"/>
-          </a:p>
-        </p:txBody>
-      </p:sp>
-      <p:sp>
-        <p:nvSpPr>
-          <p:cNvPr id="39" name="TextBox 38"/>
-          <p:cNvSpPr txBox="1"/>
-          <p:nvPr/>
-        </p:nvSpPr>
-        <p:spPr>
-          <a:xfrm>
-            <a:off x="8138160" y="4590288"/>
-            <a:ext cx="3337560" cy="329184"/>
-          </a:xfrm>
-          <a:prstGeom prst="rect">
-            <a:avLst/>
-          </a:prstGeom>
-          <a:noFill/>
-        </p:spPr>
-        <p:txBody>
-          <a:bodyPr wrap="square">
-            <a:spAutoFit/>
-          </a:bodyPr>
-          <a:lstStyle/>
-          <a:p>
-            <a:pPr algn="ctr"/>
-            <a:r>
-              <a:rPr sz="1000" b="1" i="0">
-                <a:solidFill>
-                  <a:srgbClr val="1A2440"/>
-                </a:solidFill>
-              </a:rPr>
-              <a:t>+20 points per repeated-amount pattern</a:t>
-            </a:r>
-          </a:p>
-        </p:txBody>
-      </p:sp>
-      <p:sp>
-        <p:nvSpPr>
-          <p:cNvPr id="40" name="Rectangle 39"/>
-          <p:cNvSpPr/>
-          <p:nvPr/>
-        </p:nvSpPr>
-        <p:spPr>
-          <a:xfrm>
-            <a:off x="274320" y="5074920"/>
-            <a:ext cx="11640312" cy="320040"/>
-          </a:xfrm>
-          <a:prstGeom prst="rect">
-            <a:avLst/>
-          </a:prstGeom>
-          <a:solidFill>
-            <a:srgbClr val="1A2440"/>
-          </a:solidFill>
-          <a:ln>
-            <a:noFill/>
-          </a:ln>
-        </p:spPr>
-        <p:style>
-          <a:lnRef idx="1">
-            <a:schemeClr val="accent1"/>
-          </a:lnRef>
-          <a:fillRef idx="3">
-            <a:schemeClr val="accent1"/>
-          </a:fillRef>
-          <a:effectRef idx="2">
-            <a:schemeClr val="accent1"/>
-          </a:effectRef>
-          <a:fontRef idx="minor">
-            <a:schemeClr val="lt1"/>
-          </a:fontRef>
-        </p:style>
-        <p:txBody>
-          <a:bodyPr rtlCol="0" anchor="ctr"/>
-          <a:lstStyle/>
-          <a:p>
-            <a:pPr algn="ctr"/>
-          </a:p>
-        </p:txBody>
-      </p:sp>
-      <p:sp>
-        <p:nvSpPr>
-          <p:cNvPr id="41" name="TextBox 40"/>
-          <p:cNvSpPr txBox="1"/>
-          <p:nvPr/>
-        </p:nvSpPr>
-        <p:spPr>
-          <a:xfrm>
-            <a:off x="365760" y="5093208"/>
-            <a:ext cx="11430000" cy="256032"/>
-          </a:xfrm>
-          <a:prstGeom prst="rect">
-            <a:avLst/>
-          </a:prstGeom>
-          <a:noFill/>
-        </p:spPr>
-        <p:txBody>
-          <a:bodyPr wrap="square">
-            <a:spAutoFit/>
-          </a:bodyPr>
-          <a:lstStyle/>
-          <a:p>
-            <a:pPr algn="ctr"/>
-            <a:r>
-              <a:rPr sz="1100" b="1" i="0">
-                <a:solidFill>
-                  <a:srgbClr val="FFFFFF"/>
-                </a:solidFill>
-              </a:rPr>
-              <a:t>What happens to the score</a:t>
-            </a:r>
-          </a:p>
-        </p:txBody>
-      </p:sp>
-      <p:sp>
-        <p:nvSpPr>
-          <p:cNvPr id="42" name="Rectangle 41"/>
-          <p:cNvSpPr/>
-          <p:nvPr/>
-        </p:nvSpPr>
-        <p:spPr>
-          <a:xfrm>
-            <a:off x="274320" y="5440680"/>
-            <a:ext cx="3520440" cy="1005840"/>
-          </a:xfrm>
-          <a:prstGeom prst="rect">
-            <a:avLst/>
-          </a:prstGeom>
-          <a:solidFill>
-            <a:srgbClr val="2E7D32"/>
-          </a:solidFill>
-          <a:ln>
-            <a:noFill/>
-          </a:ln>
-        </p:spPr>
-        <p:style>
-          <a:lnRef idx="1">
-            <a:schemeClr val="accent1"/>
-          </a:lnRef>
-          <a:fillRef idx="3">
-            <a:schemeClr val="accent1"/>
-          </a:fillRef>
-          <a:effectRef idx="2">
-            <a:schemeClr val="accent1"/>
-          </a:effectRef>
-          <a:fontRef idx="minor">
-            <a:schemeClr val="lt1"/>
-          </a:fontRef>
-        </p:style>
-        <p:txBody>
-          <a:bodyPr rtlCol="0" anchor="ctr"/>
-          <a:lstStyle/>
-          <a:p>
-            <a:pPr algn="ctr"/>
-          </a:p>
-        </p:txBody>
-      </p:sp>
-      <p:sp>
-        <p:nvSpPr>
-          <p:cNvPr id="43" name="TextBox 42"/>
-          <p:cNvSpPr txBox="1"/>
-          <p:nvPr/>
-        </p:nvSpPr>
-        <p:spPr>
-          <a:xfrm>
-            <a:off x="365760" y="5458968"/>
-            <a:ext cx="3337560" cy="365760"/>
-          </a:xfrm>
-          <a:prstGeom prst="rect">
-            <a:avLst/>
-          </a:prstGeom>
-          <a:noFill/>
-        </p:spPr>
-        <p:txBody>
-          <a:bodyPr wrap="square">
-            <a:spAutoFit/>
-          </a:bodyPr>
-          <a:lstStyle/>
-          <a:p>
-            <a:pPr algn="ctr"/>
-            <a:r>
-              <a:rPr sz="1400" b="1" i="0">
-                <a:solidFill>
-                  <a:srgbClr val="FFFFFF"/>
-                </a:solidFill>
-              </a:rPr>
-              <a:t>Cleared</a:t>
-            </a:r>
-          </a:p>
-        </p:txBody>
-      </p:sp>
-      <p:sp>
-        <p:nvSpPr>
-          <p:cNvPr id="44" name="TextBox 43"/>
-          <p:cNvSpPr txBox="1"/>
-          <p:nvPr/>
-        </p:nvSpPr>
-        <p:spPr>
-          <a:xfrm>
-            <a:off x="365760" y="5824728"/>
-            <a:ext cx="3337560" cy="274320"/>
-          </a:xfrm>
-          <a:prstGeom prst="rect">
-            <a:avLst/>
-          </a:prstGeom>
-          <a:noFill/>
-        </p:spPr>
-        <p:txBody>
-          <a:bodyPr wrap="square">
-            <a:spAutoFit/>
-          </a:bodyPr>
-          <a:lstStyle/>
-          <a:p>
-            <a:pPr algn="ctr"/>
-            <a:r>
-              <a:rPr sz="1100" b="0" i="0">
-                <a:solidFill>
-                  <a:srgbClr val="FFFFFF"/>
-                </a:solidFill>
-              </a:rPr>
-              <a:t>Score = 0</a:t>
-            </a:r>
-          </a:p>
-        </p:txBody>
-      </p:sp>
-      <p:sp>
-        <p:nvSpPr>
-          <p:cNvPr id="45" name="TextBox 44"/>
-          <p:cNvSpPr txBox="1"/>
-          <p:nvPr/>
-        </p:nvSpPr>
-        <p:spPr>
-          <a:xfrm>
-            <a:off x="365760" y="6099048"/>
-            <a:ext cx="3337560" cy="292608"/>
-          </a:xfrm>
-          <a:prstGeom prst="rect">
-            <a:avLst/>
-          </a:prstGeom>
-          <a:noFill/>
-        </p:spPr>
-        <p:txBody>
-          <a:bodyPr wrap="square">
-            <a:spAutoFit/>
-          </a:bodyPr>
-          <a:lstStyle/>
-          <a:p>
-            <a:pPr algn="ctr"/>
-            <a:r>
-              <a:rPr sz="900" b="0" i="1">
-                <a:solidFill>
-                  <a:srgbClr val="FFFFFF"/>
-                </a:solidFill>
-              </a:rPr>
-              <a:t>No flags — approved automatically</a:t>
-            </a:r>
-          </a:p>
-        </p:txBody>
-      </p:sp>
-      <p:sp>
-        <p:nvSpPr>
-          <p:cNvPr id="46" name="Rectangle 45"/>
-          <p:cNvSpPr/>
-          <p:nvPr/>
-        </p:nvSpPr>
-        <p:spPr>
-          <a:xfrm>
-            <a:off x="4160520" y="5440680"/>
-            <a:ext cx="3520440" cy="1005840"/>
-          </a:xfrm>
-          <a:prstGeom prst="rect">
-            <a:avLst/>
-          </a:prstGeom>
-          <a:solidFill>
-            <a:srgbClr val="E07B39"/>
-          </a:solidFill>
-          <a:ln>
-            <a:noFill/>
-          </a:ln>
-        </p:spPr>
-        <p:style>
-          <a:lnRef idx="1">
-            <a:schemeClr val="accent1"/>
-          </a:lnRef>
-          <a:fillRef idx="3">
-            <a:schemeClr val="accent1"/>
-          </a:fillRef>
-          <a:effectRef idx="2">
-            <a:schemeClr val="accent1"/>
-          </a:effectRef>
-          <a:fontRef idx="minor">
-            <a:schemeClr val="lt1"/>
-          </a:fontRef>
-        </p:style>
-        <p:txBody>
-          <a:bodyPr rtlCol="0" anchor="ctr"/>
-          <a:lstStyle/>
-          <a:p>
-            <a:pPr algn="ctr"/>
-          </a:p>
-        </p:txBody>
-      </p:sp>
-      <p:sp>
-        <p:nvSpPr>
-          <p:cNvPr id="47" name="TextBox 46"/>
-          <p:cNvSpPr txBox="1"/>
-          <p:nvPr/>
-        </p:nvSpPr>
-        <p:spPr>
-          <a:xfrm>
-            <a:off x="4251959" y="5458968"/>
-            <a:ext cx="3337560" cy="365760"/>
-          </a:xfrm>
-          <a:prstGeom prst="rect">
-            <a:avLst/>
-          </a:prstGeom>
-          <a:noFill/>
-        </p:spPr>
-        <p:txBody>
-          <a:bodyPr wrap="square">
-            <a:spAutoFit/>
-          </a:bodyPr>
-          <a:lstStyle/>
-          <a:p>
-            <a:pPr algn="ctr"/>
-            <a:r>
-              <a:rPr sz="1400" b="1" i="0">
-                <a:solidFill>
-                  <a:srgbClr val="FFFFFF"/>
-                </a:solidFill>
-              </a:rPr>
-              <a:t>Under Review</a:t>
-            </a:r>
-          </a:p>
-        </p:txBody>
-      </p:sp>
-      <p:sp>
-        <p:nvSpPr>
-          <p:cNvPr id="48" name="TextBox 47"/>
-          <p:cNvSpPr txBox="1"/>
-          <p:nvPr/>
-        </p:nvSpPr>
-        <p:spPr>
-          <a:xfrm>
-            <a:off x="4251959" y="5824728"/>
-            <a:ext cx="3337560" cy="274320"/>
-          </a:xfrm>
-          <a:prstGeom prst="rect">
-            <a:avLst/>
-          </a:prstGeom>
-          <a:noFill/>
-        </p:spPr>
-        <p:txBody>
-          <a:bodyPr wrap="square">
-            <a:spAutoFit/>
-          </a:bodyPr>
-          <a:lstStyle/>
-          <a:p>
-            <a:pPr algn="ctr"/>
-            <a:r>
-              <a:rPr sz="1100" b="0" i="0">
-                <a:solidFill>
-                  <a:srgbClr val="FFFFFF"/>
-                </a:solidFill>
-              </a:rPr>
-              <a:t>Score 1–70</a:t>
-            </a:r>
-          </a:p>
-        </p:txBody>
-      </p:sp>
-      <p:sp>
-        <p:nvSpPr>
-          <p:cNvPr id="49" name="TextBox 48"/>
-          <p:cNvSpPr txBox="1"/>
-          <p:nvPr/>
-        </p:nvSpPr>
-        <p:spPr>
-          <a:xfrm>
-            <a:off x="4251959" y="6099048"/>
-            <a:ext cx="3337560" cy="292608"/>
-          </a:xfrm>
-          <a:prstGeom prst="rect">
-            <a:avLst/>
-          </a:prstGeom>
-          <a:noFill/>
-        </p:spPr>
-        <p:txBody>
-          <a:bodyPr wrap="square">
-            <a:spAutoFit/>
-          </a:bodyPr>
-          <a:lstStyle/>
-          <a:p>
-            <a:pPr algn="ctr"/>
-            <a:r>
-              <a:rPr sz="900" b="0" i="1">
-                <a:solidFill>
-                  <a:srgbClr val="FFFFFF"/>
-                </a:solidFill>
-              </a:rPr>
-              <a:t>At least one signal — human reviews it</a:t>
-            </a:r>
-          </a:p>
-        </p:txBody>
-      </p:sp>
-      <p:sp>
-        <p:nvSpPr>
-          <p:cNvPr id="50" name="Rectangle 49"/>
-          <p:cNvSpPr/>
-          <p:nvPr/>
-        </p:nvSpPr>
-        <p:spPr>
-          <a:xfrm>
-            <a:off x="8046720" y="5440680"/>
-            <a:ext cx="3520440" cy="1005840"/>
-          </a:xfrm>
-          <a:prstGeom prst="rect">
-            <a:avLst/>
-          </a:prstGeom>
-          <a:solidFill>
-            <a:srgbClr val="D62839"/>
-          </a:solidFill>
-          <a:ln>
-            <a:noFill/>
-          </a:ln>
-        </p:spPr>
-        <p:style>
-          <a:lnRef idx="1">
-            <a:schemeClr val="accent1"/>
-          </a:lnRef>
-          <a:fillRef idx="3">
-            <a:schemeClr val="accent1"/>
-          </a:fillRef>
-          <a:effectRef idx="2">
-            <a:schemeClr val="accent1"/>
-          </a:effectRef>
-          <a:fontRef idx="minor">
-            <a:schemeClr val="lt1"/>
-          </a:fontRef>
-        </p:style>
-        <p:txBody>
-          <a:bodyPr rtlCol="0" anchor="ctr"/>
-          <a:lstStyle/>
-          <a:p>
-            <a:pPr algn="ctr"/>
-          </a:p>
-        </p:txBody>
-      </p:sp>
-      <p:sp>
-        <p:nvSpPr>
-          <p:cNvPr id="51" name="TextBox 50"/>
-          <p:cNvSpPr txBox="1"/>
-          <p:nvPr/>
-        </p:nvSpPr>
-        <p:spPr>
-          <a:xfrm>
-            <a:off x="8138160" y="5458968"/>
-            <a:ext cx="3337560" cy="365760"/>
-          </a:xfrm>
-          <a:prstGeom prst="rect">
-            <a:avLst/>
-          </a:prstGeom>
-          <a:noFill/>
-        </p:spPr>
-        <p:txBody>
-          <a:bodyPr wrap="square">
-            <a:spAutoFit/>
-          </a:bodyPr>
-          <a:lstStyle/>
-          <a:p>
-            <a:pPr algn="ctr"/>
-            <a:r>
-              <a:rPr sz="1400" b="1" i="0">
-                <a:solidFill>
-                  <a:srgbClr val="FFFFFF"/>
-                </a:solidFill>
-              </a:rPr>
-              <a:t>Payments Held</a:t>
-            </a:r>
-          </a:p>
-        </p:txBody>
-      </p:sp>
-      <p:sp>
-        <p:nvSpPr>
-          <p:cNvPr id="52" name="TextBox 51"/>
-          <p:cNvSpPr txBox="1"/>
-          <p:nvPr/>
-        </p:nvSpPr>
-        <p:spPr>
-          <a:xfrm>
-            <a:off x="8138160" y="5824728"/>
-            <a:ext cx="3337560" cy="274320"/>
-          </a:xfrm>
-          <a:prstGeom prst="rect">
-            <a:avLst/>
-          </a:prstGeom>
-          <a:noFill/>
-        </p:spPr>
-        <p:txBody>
-          <a:bodyPr wrap="square">
-            <a:spAutoFit/>
-          </a:bodyPr>
-          <a:lstStyle/>
-          <a:p>
-            <a:pPr algn="ctr"/>
-            <a:r>
-              <a:rPr sz="1100" b="0" i="0">
-                <a:solidFill>
-                  <a:srgbClr val="FFFFFF"/>
-                </a:solidFill>
-              </a:rPr>
-              <a:t>Score &gt; 70</a:t>
-            </a:r>
-          </a:p>
-        </p:txBody>
-      </p:sp>
-      <p:sp>
-        <p:nvSpPr>
-          <p:cNvPr id="53" name="TextBox 52"/>
-          <p:cNvSpPr txBox="1"/>
-          <p:nvPr/>
-        </p:nvSpPr>
-        <p:spPr>
-          <a:xfrm>
-            <a:off x="8138160" y="6099048"/>
-            <a:ext cx="3337560" cy="292608"/>
-          </a:xfrm>
-          <a:prstGeom prst="rect">
-            <a:avLst/>
-          </a:prstGeom>
-          <a:noFill/>
-        </p:spPr>
-        <p:txBody>
-          <a:bodyPr wrap="square">
-            <a:spAutoFit/>
-          </a:bodyPr>
-          <a:lstStyle/>
-          <a:p>
-            <a:pPr algn="ctr"/>
-            <a:r>
-              <a:rPr sz="900" b="0" i="1">
-                <a:solidFill>
-                  <a:srgbClr val="FFFFFF"/>
-                </a:solidFill>
-              </a:rPr>
-              <a:t>Strong evidence — payments suspended</a:t>
+              <a:t>4 automated detection rules · risk scoring pipeline · instant routing of every provider</a:t>
             </a:r>
           </a:p>
         </p:txBody>

--- a/fraud_ops_presentation_updated.pptx
+++ b/fraud_ops_presentation_updated.pptx
@@ -18,6 +18,8 @@
     <p:sldId id="266" r:id="rId17"/>
     <p:sldId id="267" r:id="rId18"/>
     <p:sldId id="268" r:id="rId19"/>
+    <p:sldId id="269" r:id="rId20"/>
+    <p:sldId id="270" r:id="rId21"/>
   </p:sldIdLst>
   <p:sldSz cx="12188952" cy="6858000" type="screen4x3"/>
   <p:notesSz cx="6858000" cy="9144000"/>
@@ -6641,6 +6643,83 @@
           </a:p>
         </p:txBody>
       </p:sp>
+      <p:sp>
+        <p:nvSpPr>
+          <p:cNvPr id="25" name="Rectangle 24"/>
+          <p:cNvSpPr/>
+          <p:nvPr/>
+        </p:nvSpPr>
+        <p:spPr>
+          <a:xfrm>
+            <a:off x="502920" y="5138928"/>
+            <a:ext cx="11155680" cy="347472"/>
+          </a:xfrm>
+          <a:prstGeom prst="rect">
+            <a:avLst/>
+          </a:prstGeom>
+          <a:solidFill>
+            <a:srgbClr val="0D1730"/>
+          </a:solidFill>
+          <a:ln>
+            <a:noFill/>
+          </a:ln>
+        </p:spPr>
+        <p:style>
+          <a:lnRef idx="1">
+            <a:schemeClr val="accent1"/>
+          </a:lnRef>
+          <a:fillRef idx="3">
+            <a:schemeClr val="accent1"/>
+          </a:fillRef>
+          <a:effectRef idx="2">
+            <a:schemeClr val="accent1"/>
+          </a:effectRef>
+          <a:fontRef idx="minor">
+            <a:schemeClr val="lt1"/>
+          </a:fontRef>
+        </p:style>
+        <p:txBody>
+          <a:bodyPr rtlCol="0" anchor="ctr"/>
+          <a:lstStyle/>
+          <a:p>
+            <a:pPr algn="ctr"/>
+          </a:p>
+        </p:txBody>
+      </p:sp>
+      <p:sp>
+        <p:nvSpPr>
+          <p:cNvPr id="26" name="TextBox 25"/>
+          <p:cNvSpPr txBox="1"/>
+          <p:nvPr/>
+        </p:nvSpPr>
+        <p:spPr>
+          <a:xfrm>
+            <a:off x="594360" y="5166360"/>
+            <a:ext cx="10972800" cy="292608"/>
+          </a:xfrm>
+          <a:prstGeom prst="rect">
+            <a:avLst/>
+          </a:prstGeom>
+          <a:noFill/>
+        </p:spPr>
+        <p:txBody>
+          <a:bodyPr wrap="square">
+            <a:spAutoFit/>
+          </a:bodyPr>
+          <a:lstStyle/>
+          <a:p>
+            <a:pPr algn="ctr"/>
+            <a:r>
+              <a:rPr sz="1100" b="1" i="0">
+                <a:solidFill>
+                  <a:srgbClr val="F5A623"/>
+                </a:solidFill>
+              </a:rPr>
+              <a:t>🌐  Live demo:  alan-production-0d14.up.railway.app</a:t>
+            </a:r>
+          </a:p>
+        </p:txBody>
+      </p:sp>
     </p:spTree>
   </p:cSld>
   <p:clrMapOvr>
@@ -6668,7 +6747,7 @@
         <p:spPr>
           <a:xfrm>
             <a:off x="0" y="0"/>
-            <a:ext cx="12188952" cy="6858000"/>
+            <a:ext cx="12188952" cy="960120"/>
           </a:xfrm>
           <a:prstGeom prst="rect">
             <a:avLst/>
@@ -6710,51 +6789,8 @@
         </p:nvSpPr>
         <p:spPr>
           <a:xfrm>
-            <a:off x="0" y="5303520"/>
-            <a:ext cx="12188952" cy="1554480"/>
-          </a:xfrm>
-          <a:prstGeom prst="rect">
-            <a:avLst/>
-          </a:prstGeom>
-          <a:solidFill>
-            <a:srgbClr val="D62839"/>
-          </a:solidFill>
-          <a:ln>
-            <a:noFill/>
-          </a:ln>
-        </p:spPr>
-        <p:style>
-          <a:lnRef idx="1">
-            <a:schemeClr val="accent1"/>
-          </a:lnRef>
-          <a:fillRef idx="3">
-            <a:schemeClr val="accent1"/>
-          </a:fillRef>
-          <a:effectRef idx="2">
-            <a:schemeClr val="accent1"/>
-          </a:effectRef>
-          <a:fontRef idx="minor">
-            <a:schemeClr val="lt1"/>
-          </a:fontRef>
-        </p:style>
-        <p:txBody>
-          <a:bodyPr rtlCol="0" anchor="ctr"/>
-          <a:lstStyle/>
-          <a:p>
-            <a:pPr algn="ctr"/>
-          </a:p>
-        </p:txBody>
-      </p:sp>
-      <p:sp>
-        <p:nvSpPr>
-          <p:cNvPr id="4" name="Rectangle 3"/>
-          <p:cNvSpPr/>
-          <p:nvPr/>
-        </p:nvSpPr>
-        <p:spPr>
-          <a:xfrm>
-            <a:off x="0" y="0"/>
-            <a:ext cx="164592" cy="6858000"/>
+            <a:off x="320040" y="118872"/>
+            <a:ext cx="1097280" cy="292608"/>
           </a:xfrm>
           <a:prstGeom prst="rect">
             <a:avLst/>
@@ -6790,20 +6826,88 @@
       </p:sp>
       <p:sp>
         <p:nvSpPr>
-          <p:cNvPr id="5" name="Rectangle 4"/>
+          <p:cNvPr id="4" name="TextBox 3"/>
+          <p:cNvSpPr txBox="1"/>
+          <p:nvPr/>
+        </p:nvSpPr>
+        <p:spPr>
+          <a:xfrm>
+            <a:off x="320040" y="118872"/>
+            <a:ext cx="1097280" cy="292608"/>
+          </a:xfrm>
+          <a:prstGeom prst="rect">
+            <a:avLst/>
+          </a:prstGeom>
+          <a:noFill/>
+        </p:spPr>
+        <p:txBody>
+          <a:bodyPr wrap="square">
+            <a:spAutoFit/>
+          </a:bodyPr>
+          <a:lstStyle/>
+          <a:p>
+            <a:pPr algn="ctr"/>
+            <a:r>
+              <a:rPr sz="900" b="1" i="0">
+                <a:solidFill>
+                  <a:srgbClr val="1A2440"/>
+                </a:solidFill>
+              </a:rPr>
+              <a:t>Q2</a:t>
+            </a:r>
+          </a:p>
+        </p:txBody>
+      </p:sp>
+      <p:sp>
+        <p:nvSpPr>
+          <p:cNvPr id="5" name="TextBox 4"/>
+          <p:cNvSpPr txBox="1"/>
+          <p:nvPr/>
+        </p:nvSpPr>
+        <p:spPr>
+          <a:xfrm>
+            <a:off x="1554480" y="73152"/>
+            <a:ext cx="10332720" cy="594360"/>
+          </a:xfrm>
+          <a:prstGeom prst="rect">
+            <a:avLst/>
+          </a:prstGeom>
+          <a:noFill/>
+        </p:spPr>
+        <p:txBody>
+          <a:bodyPr wrap="square">
+            <a:spAutoFit/>
+          </a:bodyPr>
+          <a:lstStyle/>
+          <a:p>
+            <a:pPr algn="l"/>
+            <a:r>
+              <a:rPr sz="2400" b="1" i="0">
+                <a:solidFill>
+                  <a:srgbClr val="FFFFFF"/>
+                </a:solidFill>
+              </a:rPr>
+              <a:t>How the System Is Built</a:t>
+            </a:r>
+          </a:p>
+        </p:txBody>
+      </p:sp>
+      <p:sp>
+        <p:nvSpPr>
+          <p:cNvPr id="6" name="Rectangle 5"/>
           <p:cNvSpPr/>
           <p:nvPr/>
         </p:nvSpPr>
         <p:spPr>
           <a:xfrm>
-            <a:off x="457200" y="1463040"/>
-            <a:ext cx="2011680" cy="502920"/>
+            <a:off x="0" y="960120"/>
+            <a:ext cx="12188952" cy="347472"/>
           </a:xfrm>
           <a:prstGeom prst="rect">
             <a:avLst/>
           </a:prstGeom>
           <a:solidFill>
-            <a:srgbClr val="F5A623"/>
+            <a:srgbClr val="F5F5F5"/>
           </a:solidFill>
           <a:ln>
             <a:noFill/>
@@ -6833,137 +6937,1974 @@
       </p:sp>
       <p:sp>
         <p:nvSpPr>
-          <p:cNvPr id="6" name="TextBox 5"/>
-          <p:cNvSpPr txBox="1"/>
-          <p:nvPr/>
-        </p:nvSpPr>
-        <p:spPr>
-          <a:xfrm>
-            <a:off x="457200" y="1463040"/>
-            <a:ext cx="2011680" cy="502920"/>
-          </a:xfrm>
-          <a:prstGeom prst="rect">
-            <a:avLst/>
-          </a:prstGeom>
-          <a:noFill/>
-        </p:spPr>
-        <p:txBody>
-          <a:bodyPr wrap="square">
-            <a:spAutoFit/>
-          </a:bodyPr>
-          <a:lstStyle/>
-          <a:p>
-            <a:pPr algn="ctr"/>
-            <a:r>
-              <a:rPr sz="1300" b="1" i="0">
+          <p:cNvPr id="7" name="TextBox 6"/>
+          <p:cNvSpPr txBox="1"/>
+          <p:nvPr/>
+        </p:nvSpPr>
+        <p:spPr>
+          <a:xfrm>
+            <a:off x="365760" y="987552"/>
+            <a:ext cx="11430000" cy="301752"/>
+          </a:xfrm>
+          <a:prstGeom prst="rect">
+            <a:avLst/>
+          </a:prstGeom>
+          <a:noFill/>
+        </p:spPr>
+        <p:txBody>
+          <a:bodyPr wrap="square">
+            <a:spAutoFit/>
+          </a:bodyPr>
+          <a:lstStyle/>
+          <a:p>
+            <a:pPr algn="l"/>
+            <a:r>
+              <a:rPr sz="1200" b="0" i="1">
+                <a:solidFill>
+                  <a:srgbClr val="444444"/>
+                </a:solidFill>
+              </a:rPr>
+              <a:t>A simple three-layer web application — data in, detection engine, human review out</a:t>
+            </a:r>
+          </a:p>
+        </p:txBody>
+      </p:sp>
+      <p:sp>
+        <p:nvSpPr>
+          <p:cNvPr id="8" name="Rectangle 7"/>
+          <p:cNvSpPr/>
+          <p:nvPr/>
+        </p:nvSpPr>
+        <p:spPr>
+          <a:xfrm>
+            <a:off x="0" y="6510528"/>
+            <a:ext cx="12188952" cy="347472"/>
+          </a:xfrm>
+          <a:prstGeom prst="rect">
+            <a:avLst/>
+          </a:prstGeom>
+          <a:solidFill>
+            <a:srgbClr val="1A2440"/>
+          </a:solidFill>
+          <a:ln>
+            <a:noFill/>
+          </a:ln>
+        </p:spPr>
+        <p:style>
+          <a:lnRef idx="1">
+            <a:schemeClr val="accent1"/>
+          </a:lnRef>
+          <a:fillRef idx="3">
+            <a:schemeClr val="accent1"/>
+          </a:fillRef>
+          <a:effectRef idx="2">
+            <a:schemeClr val="accent1"/>
+          </a:effectRef>
+          <a:fontRef idx="minor">
+            <a:schemeClr val="lt1"/>
+          </a:fontRef>
+        </p:style>
+        <p:txBody>
+          <a:bodyPr rtlCol="0" anchor="ctr"/>
+          <a:lstStyle/>
+          <a:p>
+            <a:pPr algn="ctr"/>
+          </a:p>
+        </p:txBody>
+      </p:sp>
+      <p:sp>
+        <p:nvSpPr>
+          <p:cNvPr id="9" name="TextBox 8"/>
+          <p:cNvSpPr txBox="1"/>
+          <p:nvPr/>
+        </p:nvSpPr>
+        <p:spPr>
+          <a:xfrm>
+            <a:off x="274320" y="6519672"/>
+            <a:ext cx="11612880" cy="329184"/>
+          </a:xfrm>
+          <a:prstGeom prst="rect">
+            <a:avLst/>
+          </a:prstGeom>
+          <a:noFill/>
+        </p:spPr>
+        <p:txBody>
+          <a:bodyPr wrap="square">
+            <a:spAutoFit/>
+          </a:bodyPr>
+          <a:lstStyle/>
+          <a:p>
+            <a:pPr algn="ctr"/>
+            <a:r>
+              <a:rPr sz="900" b="0" i="0">
+                <a:solidFill>
+                  <a:srgbClr val="FFFFFF"/>
+                </a:solidFill>
+              </a:rPr>
+              <a:t>Alan Assurance · Fraud Detection Case · 2024</a:t>
+            </a:r>
+          </a:p>
+        </p:txBody>
+      </p:sp>
+      <p:sp>
+        <p:nvSpPr>
+          <p:cNvPr id="10" name="Rectangle 9"/>
+          <p:cNvSpPr/>
+          <p:nvPr/>
+        </p:nvSpPr>
+        <p:spPr>
+          <a:xfrm>
+            <a:off x="274320" y="1417320"/>
+            <a:ext cx="3383280" cy="4892040"/>
+          </a:xfrm>
+          <a:prstGeom prst="rect">
+            <a:avLst/>
+          </a:prstGeom>
+          <a:solidFill>
+            <a:srgbClr val="FFFFFF"/>
+          </a:solidFill>
+          <a:ln w="9525">
+            <a:solidFill>
+              <a:srgbClr val="CCCCCC"/>
+            </a:solidFill>
+          </a:ln>
+        </p:spPr>
+        <p:style>
+          <a:lnRef idx="1">
+            <a:schemeClr val="accent1"/>
+          </a:lnRef>
+          <a:fillRef idx="3">
+            <a:schemeClr val="accent1"/>
+          </a:fillRef>
+          <a:effectRef idx="2">
+            <a:schemeClr val="accent1"/>
+          </a:effectRef>
+          <a:fontRef idx="minor">
+            <a:schemeClr val="lt1"/>
+          </a:fontRef>
+        </p:style>
+        <p:txBody>
+          <a:bodyPr rtlCol="0" anchor="ctr"/>
+          <a:lstStyle/>
+          <a:p>
+            <a:pPr algn="ctr"/>
+          </a:p>
+        </p:txBody>
+      </p:sp>
+      <p:sp>
+        <p:nvSpPr>
+          <p:cNvPr id="11" name="Rectangle 10"/>
+          <p:cNvSpPr/>
+          <p:nvPr/>
+        </p:nvSpPr>
+        <p:spPr>
+          <a:xfrm>
+            <a:off x="274320" y="1417320"/>
+            <a:ext cx="3383280" cy="411480"/>
+          </a:xfrm>
+          <a:prstGeom prst="rect">
+            <a:avLst/>
+          </a:prstGeom>
+          <a:solidFill>
+            <a:srgbClr val="1A78C2"/>
+          </a:solidFill>
+          <a:ln>
+            <a:noFill/>
+          </a:ln>
+        </p:spPr>
+        <p:style>
+          <a:lnRef idx="1">
+            <a:schemeClr val="accent1"/>
+          </a:lnRef>
+          <a:fillRef idx="3">
+            <a:schemeClr val="accent1"/>
+          </a:fillRef>
+          <a:effectRef idx="2">
+            <a:schemeClr val="accent1"/>
+          </a:effectRef>
+          <a:fontRef idx="minor">
+            <a:schemeClr val="lt1"/>
+          </a:fontRef>
+        </p:style>
+        <p:txBody>
+          <a:bodyPr rtlCol="0" anchor="ctr"/>
+          <a:lstStyle/>
+          <a:p>
+            <a:pPr algn="ctr"/>
+          </a:p>
+        </p:txBody>
+      </p:sp>
+      <p:sp>
+        <p:nvSpPr>
+          <p:cNvPr id="12" name="TextBox 11"/>
+          <p:cNvSpPr txBox="1"/>
+          <p:nvPr/>
+        </p:nvSpPr>
+        <p:spPr>
+          <a:xfrm>
+            <a:off x="411479" y="1435608"/>
+            <a:ext cx="3108960" cy="201168"/>
+          </a:xfrm>
+          <a:prstGeom prst="rect">
+            <a:avLst/>
+          </a:prstGeom>
+          <a:noFill/>
+        </p:spPr>
+        <p:txBody>
+          <a:bodyPr wrap="square">
+            <a:spAutoFit/>
+          </a:bodyPr>
+          <a:lstStyle/>
+          <a:p>
+            <a:pPr algn="l"/>
+            <a:r>
+              <a:rPr sz="800" b="1" i="0">
+                <a:solidFill>
+                  <a:srgbClr val="FFFFFF"/>
+                </a:solidFill>
+              </a:rPr>
+              <a:t>BROWSER</a:t>
+            </a:r>
+          </a:p>
+        </p:txBody>
+      </p:sp>
+      <p:sp>
+        <p:nvSpPr>
+          <p:cNvPr id="13" name="TextBox 12"/>
+          <p:cNvSpPr txBox="1"/>
+          <p:nvPr/>
+        </p:nvSpPr>
+        <p:spPr>
+          <a:xfrm>
+            <a:off x="411479" y="1645920"/>
+            <a:ext cx="3108960" cy="256032"/>
+          </a:xfrm>
+          <a:prstGeom prst="rect">
+            <a:avLst/>
+          </a:prstGeom>
+          <a:noFill/>
+        </p:spPr>
+        <p:txBody>
+          <a:bodyPr wrap="square">
+            <a:spAutoFit/>
+          </a:bodyPr>
+          <a:lstStyle/>
+          <a:p>
+            <a:pPr algn="l"/>
+            <a:r>
+              <a:rPr sz="1200" b="1" i="0">
+                <a:solidFill>
+                  <a:srgbClr val="FFFFFF"/>
+                </a:solidFill>
+              </a:rPr>
+              <a:t>Next.js Frontend</a:t>
+            </a:r>
+          </a:p>
+        </p:txBody>
+      </p:sp>
+      <p:sp>
+        <p:nvSpPr>
+          <p:cNvPr id="14" name="Rectangle 13"/>
+          <p:cNvSpPr/>
+          <p:nvPr/>
+        </p:nvSpPr>
+        <p:spPr>
+          <a:xfrm>
+            <a:off x="457200" y="1965960"/>
+            <a:ext cx="3017520" cy="438912"/>
+          </a:xfrm>
+          <a:prstGeom prst="rect">
+            <a:avLst/>
+          </a:prstGeom>
+          <a:solidFill>
+            <a:srgbClr val="F5F5F5"/>
+          </a:solidFill>
+          <a:ln>
+            <a:noFill/>
+          </a:ln>
+        </p:spPr>
+        <p:style>
+          <a:lnRef idx="1">
+            <a:schemeClr val="accent1"/>
+          </a:lnRef>
+          <a:fillRef idx="3">
+            <a:schemeClr val="accent1"/>
+          </a:fillRef>
+          <a:effectRef idx="2">
+            <a:schemeClr val="accent1"/>
+          </a:effectRef>
+          <a:fontRef idx="minor">
+            <a:schemeClr val="lt1"/>
+          </a:fontRef>
+        </p:style>
+        <p:txBody>
+          <a:bodyPr rtlCol="0" anchor="ctr"/>
+          <a:lstStyle/>
+          <a:p>
+            <a:pPr algn="ctr"/>
+          </a:p>
+        </p:txBody>
+      </p:sp>
+      <p:sp>
+        <p:nvSpPr>
+          <p:cNvPr id="15" name="TextBox 14"/>
+          <p:cNvSpPr txBox="1"/>
+          <p:nvPr/>
+        </p:nvSpPr>
+        <p:spPr>
+          <a:xfrm>
+            <a:off x="594359" y="2029968"/>
+            <a:ext cx="2743200" cy="292608"/>
+          </a:xfrm>
+          <a:prstGeom prst="rect">
+            <a:avLst/>
+          </a:prstGeom>
+          <a:noFill/>
+        </p:spPr>
+        <p:txBody>
+          <a:bodyPr wrap="square">
+            <a:spAutoFit/>
+          </a:bodyPr>
+          <a:lstStyle/>
+          <a:p>
+            <a:pPr algn="l"/>
+            <a:r>
+              <a:rPr sz="1000" b="0" i="0">
                 <a:solidFill>
                   <a:srgbClr val="1A2440"/>
                 </a:solidFill>
               </a:rPr>
-              <a:t>QUESTION 3</a:t>
-            </a:r>
-          </a:p>
-        </p:txBody>
-      </p:sp>
-      <p:sp>
-        <p:nvSpPr>
-          <p:cNvPr id="7" name="TextBox 6"/>
-          <p:cNvSpPr txBox="1"/>
-          <p:nvPr/>
-        </p:nvSpPr>
-        <p:spPr>
-          <a:xfrm>
-            <a:off x="457200" y="2103120"/>
-            <a:ext cx="11430000" cy="457200"/>
-          </a:xfrm>
-          <a:prstGeom prst="rect">
-            <a:avLst/>
-          </a:prstGeom>
-          <a:noFill/>
-        </p:spPr>
-        <p:txBody>
-          <a:bodyPr wrap="square">
-            <a:spAutoFit/>
-          </a:bodyPr>
-          <a:lstStyle/>
-          <a:p>
-            <a:pPr algn="l"/>
-            <a:r>
-              <a:rPr sz="1600" b="0" i="1">
-                <a:solidFill>
-                  <a:srgbClr val="CCCCCC"/>
-                </a:solidFill>
-              </a:rPr>
-              <a:t>Recommendations</a:t>
-            </a:r>
-          </a:p>
-        </p:txBody>
-      </p:sp>
-      <p:sp>
-        <p:nvSpPr>
-          <p:cNvPr id="8" name="TextBox 7"/>
-          <p:cNvSpPr txBox="1"/>
-          <p:nvPr/>
-        </p:nvSpPr>
-        <p:spPr>
-          <a:xfrm>
-            <a:off x="457200" y="2697480"/>
-            <a:ext cx="11430000" cy="1371600"/>
-          </a:xfrm>
-          <a:prstGeom prst="rect">
-            <a:avLst/>
-          </a:prstGeom>
-          <a:noFill/>
-        </p:spPr>
-        <p:txBody>
-          <a:bodyPr wrap="square">
-            <a:spAutoFit/>
-          </a:bodyPr>
-          <a:lstStyle/>
-          <a:p>
-            <a:pPr algn="l"/>
-            <a:r>
-              <a:rPr sz="4000" b="1" i="0">
+              <a:t>Dashboard overview</a:t>
+            </a:r>
+          </a:p>
+        </p:txBody>
+      </p:sp>
+      <p:sp>
+        <p:nvSpPr>
+          <p:cNvPr id="16" name="Rectangle 15"/>
+          <p:cNvSpPr/>
+          <p:nvPr/>
+        </p:nvSpPr>
+        <p:spPr>
+          <a:xfrm>
+            <a:off x="457200" y="2487168"/>
+            <a:ext cx="3017520" cy="438912"/>
+          </a:xfrm>
+          <a:prstGeom prst="rect">
+            <a:avLst/>
+          </a:prstGeom>
+          <a:solidFill>
+            <a:srgbClr val="F5F5F5"/>
+          </a:solidFill>
+          <a:ln>
+            <a:noFill/>
+          </a:ln>
+        </p:spPr>
+        <p:style>
+          <a:lnRef idx="1">
+            <a:schemeClr val="accent1"/>
+          </a:lnRef>
+          <a:fillRef idx="3">
+            <a:schemeClr val="accent1"/>
+          </a:fillRef>
+          <a:effectRef idx="2">
+            <a:schemeClr val="accent1"/>
+          </a:effectRef>
+          <a:fontRef idx="minor">
+            <a:schemeClr val="lt1"/>
+          </a:fontRef>
+        </p:style>
+        <p:txBody>
+          <a:bodyPr rtlCol="0" anchor="ctr"/>
+          <a:lstStyle/>
+          <a:p>
+            <a:pPr algn="ctr"/>
+          </a:p>
+        </p:txBody>
+      </p:sp>
+      <p:sp>
+        <p:nvSpPr>
+          <p:cNvPr id="17" name="TextBox 16"/>
+          <p:cNvSpPr txBox="1"/>
+          <p:nvPr/>
+        </p:nvSpPr>
+        <p:spPr>
+          <a:xfrm>
+            <a:off x="594359" y="2551176"/>
+            <a:ext cx="2743200" cy="292608"/>
+          </a:xfrm>
+          <a:prstGeom prst="rect">
+            <a:avLst/>
+          </a:prstGeom>
+          <a:noFill/>
+        </p:spPr>
+        <p:txBody>
+          <a:bodyPr wrap="square">
+            <a:spAutoFit/>
+          </a:bodyPr>
+          <a:lstStyle/>
+          <a:p>
+            <a:pPr algn="l"/>
+            <a:r>
+              <a:rPr sz="1000" b="0" i="0">
+                <a:solidFill>
+                  <a:srgbClr val="1A2440"/>
+                </a:solidFill>
+              </a:rPr>
+              <a:t>Provider risk table</a:t>
+            </a:r>
+          </a:p>
+        </p:txBody>
+      </p:sp>
+      <p:sp>
+        <p:nvSpPr>
+          <p:cNvPr id="18" name="Rectangle 17"/>
+          <p:cNvSpPr/>
+          <p:nvPr/>
+        </p:nvSpPr>
+        <p:spPr>
+          <a:xfrm>
+            <a:off x="457200" y="3008376"/>
+            <a:ext cx="3017520" cy="438912"/>
+          </a:xfrm>
+          <a:prstGeom prst="rect">
+            <a:avLst/>
+          </a:prstGeom>
+          <a:solidFill>
+            <a:srgbClr val="F5F5F5"/>
+          </a:solidFill>
+          <a:ln>
+            <a:noFill/>
+          </a:ln>
+        </p:spPr>
+        <p:style>
+          <a:lnRef idx="1">
+            <a:schemeClr val="accent1"/>
+          </a:lnRef>
+          <a:fillRef idx="3">
+            <a:schemeClr val="accent1"/>
+          </a:fillRef>
+          <a:effectRef idx="2">
+            <a:schemeClr val="accent1"/>
+          </a:effectRef>
+          <a:fontRef idx="minor">
+            <a:schemeClr val="lt1"/>
+          </a:fontRef>
+        </p:style>
+        <p:txBody>
+          <a:bodyPr rtlCol="0" anchor="ctr"/>
+          <a:lstStyle/>
+          <a:p>
+            <a:pPr algn="ctr"/>
+          </a:p>
+        </p:txBody>
+      </p:sp>
+      <p:sp>
+        <p:nvSpPr>
+          <p:cNvPr id="19" name="TextBox 18"/>
+          <p:cNvSpPr txBox="1"/>
+          <p:nvPr/>
+        </p:nvSpPr>
+        <p:spPr>
+          <a:xfrm>
+            <a:off x="594359" y="3072384"/>
+            <a:ext cx="2743200" cy="292608"/>
+          </a:xfrm>
+          <a:prstGeom prst="rect">
+            <a:avLst/>
+          </a:prstGeom>
+          <a:noFill/>
+        </p:spPr>
+        <p:txBody>
+          <a:bodyPr wrap="square">
+            <a:spAutoFit/>
+          </a:bodyPr>
+          <a:lstStyle/>
+          <a:p>
+            <a:pPr algn="l"/>
+            <a:r>
+              <a:rPr sz="1000" b="0" i="0">
+                <a:solidFill>
+                  <a:srgbClr val="1A2440"/>
+                </a:solidFill>
+              </a:rPr>
+              <a:t>Flag evidence viewer</a:t>
+            </a:r>
+          </a:p>
+        </p:txBody>
+      </p:sp>
+      <p:sp>
+        <p:nvSpPr>
+          <p:cNvPr id="20" name="Rectangle 19"/>
+          <p:cNvSpPr/>
+          <p:nvPr/>
+        </p:nvSpPr>
+        <p:spPr>
+          <a:xfrm>
+            <a:off x="457200" y="3529584"/>
+            <a:ext cx="3017520" cy="438912"/>
+          </a:xfrm>
+          <a:prstGeom prst="rect">
+            <a:avLst/>
+          </a:prstGeom>
+          <a:solidFill>
+            <a:srgbClr val="F5F5F5"/>
+          </a:solidFill>
+          <a:ln>
+            <a:noFill/>
+          </a:ln>
+        </p:spPr>
+        <p:style>
+          <a:lnRef idx="1">
+            <a:schemeClr val="accent1"/>
+          </a:lnRef>
+          <a:fillRef idx="3">
+            <a:schemeClr val="accent1"/>
+          </a:fillRef>
+          <a:effectRef idx="2">
+            <a:schemeClr val="accent1"/>
+          </a:effectRef>
+          <a:fontRef idx="minor">
+            <a:schemeClr val="lt1"/>
+          </a:fontRef>
+        </p:style>
+        <p:txBody>
+          <a:bodyPr rtlCol="0" anchor="ctr"/>
+          <a:lstStyle/>
+          <a:p>
+            <a:pPr algn="ctr"/>
+          </a:p>
+        </p:txBody>
+      </p:sp>
+      <p:sp>
+        <p:nvSpPr>
+          <p:cNvPr id="21" name="TextBox 20"/>
+          <p:cNvSpPr txBox="1"/>
+          <p:nvPr/>
+        </p:nvSpPr>
+        <p:spPr>
+          <a:xfrm>
+            <a:off x="594359" y="3593592"/>
+            <a:ext cx="2743200" cy="292608"/>
+          </a:xfrm>
+          <a:prstGeom prst="rect">
+            <a:avLst/>
+          </a:prstGeom>
+          <a:noFill/>
+        </p:spPr>
+        <p:txBody>
+          <a:bodyPr wrap="square">
+            <a:spAutoFit/>
+          </a:bodyPr>
+          <a:lstStyle/>
+          <a:p>
+            <a:pPr algn="l"/>
+            <a:r>
+              <a:rPr sz="1000" b="0" i="0">
+                <a:solidFill>
+                  <a:srgbClr val="1A2440"/>
+                </a:solidFill>
+              </a:rPr>
+              <a:t>Review submit panel</a:t>
+            </a:r>
+          </a:p>
+        </p:txBody>
+      </p:sp>
+      <p:sp>
+        <p:nvSpPr>
+          <p:cNvPr id="22" name="Rectangle 21"/>
+          <p:cNvSpPr/>
+          <p:nvPr/>
+        </p:nvSpPr>
+        <p:spPr>
+          <a:xfrm>
+            <a:off x="457200" y="4050791"/>
+            <a:ext cx="3017520" cy="438912"/>
+          </a:xfrm>
+          <a:prstGeom prst="rect">
+            <a:avLst/>
+          </a:prstGeom>
+          <a:solidFill>
+            <a:srgbClr val="F5F5F5"/>
+          </a:solidFill>
+          <a:ln>
+            <a:noFill/>
+          </a:ln>
+        </p:spPr>
+        <p:style>
+          <a:lnRef idx="1">
+            <a:schemeClr val="accent1"/>
+          </a:lnRef>
+          <a:fillRef idx="3">
+            <a:schemeClr val="accent1"/>
+          </a:fillRef>
+          <a:effectRef idx="2">
+            <a:schemeClr val="accent1"/>
+          </a:effectRef>
+          <a:fontRef idx="minor">
+            <a:schemeClr val="lt1"/>
+          </a:fontRef>
+        </p:style>
+        <p:txBody>
+          <a:bodyPr rtlCol="0" anchor="ctr"/>
+          <a:lstStyle/>
+          <a:p>
+            <a:pPr algn="ctr"/>
+          </a:p>
+        </p:txBody>
+      </p:sp>
+      <p:sp>
+        <p:nvSpPr>
+          <p:cNvPr id="23" name="TextBox 22"/>
+          <p:cNvSpPr txBox="1"/>
+          <p:nvPr/>
+        </p:nvSpPr>
+        <p:spPr>
+          <a:xfrm>
+            <a:off x="594359" y="4114800"/>
+            <a:ext cx="2743200" cy="292608"/>
+          </a:xfrm>
+          <a:prstGeom prst="rect">
+            <a:avLst/>
+          </a:prstGeom>
+          <a:noFill/>
+        </p:spPr>
+        <p:txBody>
+          <a:bodyPr wrap="square">
+            <a:spAutoFit/>
+          </a:bodyPr>
+          <a:lstStyle/>
+          <a:p>
+            <a:pPr algn="l"/>
+            <a:r>
+              <a:rPr sz="1000" b="0" i="0">
+                <a:solidFill>
+                  <a:srgbClr val="1A2440"/>
+                </a:solidFill>
+              </a:rPr>
+              <a:t>CSV import</a:t>
+            </a:r>
+          </a:p>
+        </p:txBody>
+      </p:sp>
+      <p:sp>
+        <p:nvSpPr>
+          <p:cNvPr id="24" name="Rectangle 23"/>
+          <p:cNvSpPr/>
+          <p:nvPr/>
+        </p:nvSpPr>
+        <p:spPr>
+          <a:xfrm>
+            <a:off x="3931920" y="1417320"/>
+            <a:ext cx="3383280" cy="4892040"/>
+          </a:xfrm>
+          <a:prstGeom prst="rect">
+            <a:avLst/>
+          </a:prstGeom>
+          <a:solidFill>
+            <a:srgbClr val="FFFFFF"/>
+          </a:solidFill>
+          <a:ln w="9525">
+            <a:solidFill>
+              <a:srgbClr val="CCCCCC"/>
+            </a:solidFill>
+          </a:ln>
+        </p:spPr>
+        <p:style>
+          <a:lnRef idx="1">
+            <a:schemeClr val="accent1"/>
+          </a:lnRef>
+          <a:fillRef idx="3">
+            <a:schemeClr val="accent1"/>
+          </a:fillRef>
+          <a:effectRef idx="2">
+            <a:schemeClr val="accent1"/>
+          </a:effectRef>
+          <a:fontRef idx="minor">
+            <a:schemeClr val="lt1"/>
+          </a:fontRef>
+        </p:style>
+        <p:txBody>
+          <a:bodyPr rtlCol="0" anchor="ctr"/>
+          <a:lstStyle/>
+          <a:p>
+            <a:pPr algn="ctr"/>
+          </a:p>
+        </p:txBody>
+      </p:sp>
+      <p:sp>
+        <p:nvSpPr>
+          <p:cNvPr id="25" name="Rectangle 24"/>
+          <p:cNvSpPr/>
+          <p:nvPr/>
+        </p:nvSpPr>
+        <p:spPr>
+          <a:xfrm>
+            <a:off x="3931920" y="1417320"/>
+            <a:ext cx="3383280" cy="411480"/>
+          </a:xfrm>
+          <a:prstGeom prst="rect">
+            <a:avLst/>
+          </a:prstGeom>
+          <a:solidFill>
+            <a:srgbClr val="0D7A8E"/>
+          </a:solidFill>
+          <a:ln>
+            <a:noFill/>
+          </a:ln>
+        </p:spPr>
+        <p:style>
+          <a:lnRef idx="1">
+            <a:schemeClr val="accent1"/>
+          </a:lnRef>
+          <a:fillRef idx="3">
+            <a:schemeClr val="accent1"/>
+          </a:fillRef>
+          <a:effectRef idx="2">
+            <a:schemeClr val="accent1"/>
+          </a:effectRef>
+          <a:fontRef idx="minor">
+            <a:schemeClr val="lt1"/>
+          </a:fontRef>
+        </p:style>
+        <p:txBody>
+          <a:bodyPr rtlCol="0" anchor="ctr"/>
+          <a:lstStyle/>
+          <a:p>
+            <a:pPr algn="ctr"/>
+          </a:p>
+        </p:txBody>
+      </p:sp>
+      <p:sp>
+        <p:nvSpPr>
+          <p:cNvPr id="26" name="TextBox 25"/>
+          <p:cNvSpPr txBox="1"/>
+          <p:nvPr/>
+        </p:nvSpPr>
+        <p:spPr>
+          <a:xfrm>
+            <a:off x="4069080" y="1435608"/>
+            <a:ext cx="3108960" cy="201168"/>
+          </a:xfrm>
+          <a:prstGeom prst="rect">
+            <a:avLst/>
+          </a:prstGeom>
+          <a:noFill/>
+        </p:spPr>
+        <p:txBody>
+          <a:bodyPr wrap="square">
+            <a:spAutoFit/>
+          </a:bodyPr>
+          <a:lstStyle/>
+          <a:p>
+            <a:pPr algn="l"/>
+            <a:r>
+              <a:rPr sz="800" b="1" i="0">
                 <a:solidFill>
                   <a:srgbClr val="FFFFFF"/>
                 </a:solidFill>
               </a:rPr>
-              <a:t>What should happen
-with these providers?</a:t>
-            </a:r>
-          </a:p>
-        </p:txBody>
-      </p:sp>
-      <p:sp>
-        <p:nvSpPr>
-          <p:cNvPr id="9" name="TextBox 8"/>
-          <p:cNvSpPr txBox="1"/>
-          <p:nvPr/>
-        </p:nvSpPr>
-        <p:spPr>
-          <a:xfrm>
-            <a:off x="457200" y="5440680"/>
-            <a:ext cx="11430000" cy="548640"/>
-          </a:xfrm>
-          <a:prstGeom prst="rect">
-            <a:avLst/>
-          </a:prstGeom>
-          <a:noFill/>
-        </p:spPr>
-        <p:txBody>
-          <a:bodyPr wrap="square">
-            <a:spAutoFit/>
-          </a:bodyPr>
-          <a:lstStyle/>
-          <a:p>
-            <a:pPr algn="l"/>
-            <a:r>
-              <a:rPr sz="1300" b="0" i="1">
+              <a:t>API SERVER</a:t>
+            </a:r>
+          </a:p>
+        </p:txBody>
+      </p:sp>
+      <p:sp>
+        <p:nvSpPr>
+          <p:cNvPr id="27" name="TextBox 26"/>
+          <p:cNvSpPr txBox="1"/>
+          <p:nvPr/>
+        </p:nvSpPr>
+        <p:spPr>
+          <a:xfrm>
+            <a:off x="4069080" y="1645920"/>
+            <a:ext cx="3108960" cy="256032"/>
+          </a:xfrm>
+          <a:prstGeom prst="rect">
+            <a:avLst/>
+          </a:prstGeom>
+          <a:noFill/>
+        </p:spPr>
+        <p:txBody>
+          <a:bodyPr wrap="square">
+            <a:spAutoFit/>
+          </a:bodyPr>
+          <a:lstStyle/>
+          <a:p>
+            <a:pPr algn="l"/>
+            <a:r>
+              <a:rPr sz="1200" b="1" i="0">
                 <a:solidFill>
                   <a:srgbClr val="FFFFFF"/>
                 </a:solidFill>
               </a:rPr>
-              <a:t>Immediate actions · system limitations · how to improve detection over time</a:t>
+              <a:t>Python FastAPI Backend</a:t>
+            </a:r>
+          </a:p>
+        </p:txBody>
+      </p:sp>
+      <p:sp>
+        <p:nvSpPr>
+          <p:cNvPr id="28" name="Rectangle 27"/>
+          <p:cNvSpPr/>
+          <p:nvPr/>
+        </p:nvSpPr>
+        <p:spPr>
+          <a:xfrm>
+            <a:off x="4114800" y="1965960"/>
+            <a:ext cx="3017520" cy="438912"/>
+          </a:xfrm>
+          <a:prstGeom prst="rect">
+            <a:avLst/>
+          </a:prstGeom>
+          <a:solidFill>
+            <a:srgbClr val="F5F5F5"/>
+          </a:solidFill>
+          <a:ln>
+            <a:noFill/>
+          </a:ln>
+        </p:spPr>
+        <p:style>
+          <a:lnRef idx="1">
+            <a:schemeClr val="accent1"/>
+          </a:lnRef>
+          <a:fillRef idx="3">
+            <a:schemeClr val="accent1"/>
+          </a:fillRef>
+          <a:effectRef idx="2">
+            <a:schemeClr val="accent1"/>
+          </a:effectRef>
+          <a:fontRef idx="minor">
+            <a:schemeClr val="lt1"/>
+          </a:fontRef>
+        </p:style>
+        <p:txBody>
+          <a:bodyPr rtlCol="0" anchor="ctr"/>
+          <a:lstStyle/>
+          <a:p>
+            <a:pPr algn="ctr"/>
+          </a:p>
+        </p:txBody>
+      </p:sp>
+      <p:sp>
+        <p:nvSpPr>
+          <p:cNvPr id="29" name="TextBox 28"/>
+          <p:cNvSpPr txBox="1"/>
+          <p:nvPr/>
+        </p:nvSpPr>
+        <p:spPr>
+          <a:xfrm>
+            <a:off x="4251959" y="2029968"/>
+            <a:ext cx="2743200" cy="292608"/>
+          </a:xfrm>
+          <a:prstGeom prst="rect">
+            <a:avLst/>
+          </a:prstGeom>
+          <a:noFill/>
+        </p:spPr>
+        <p:txBody>
+          <a:bodyPr wrap="square">
+            <a:spAutoFit/>
+          </a:bodyPr>
+          <a:lstStyle/>
+          <a:p>
+            <a:pPr algn="l"/>
+            <a:r>
+              <a:rPr sz="1000" b="0" i="0">
+                <a:solidFill>
+                  <a:srgbClr val="1A2440"/>
+                </a:solidFill>
+              </a:rPr>
+              <a:t>Auth (demo token / Clerk)</a:t>
+            </a:r>
+          </a:p>
+        </p:txBody>
+      </p:sp>
+      <p:sp>
+        <p:nvSpPr>
+          <p:cNvPr id="30" name="Rectangle 29"/>
+          <p:cNvSpPr/>
+          <p:nvPr/>
+        </p:nvSpPr>
+        <p:spPr>
+          <a:xfrm>
+            <a:off x="4114800" y="2487168"/>
+            <a:ext cx="3017520" cy="438912"/>
+          </a:xfrm>
+          <a:prstGeom prst="rect">
+            <a:avLst/>
+          </a:prstGeom>
+          <a:solidFill>
+            <a:srgbClr val="F5F5F5"/>
+          </a:solidFill>
+          <a:ln>
+            <a:noFill/>
+          </a:ln>
+        </p:spPr>
+        <p:style>
+          <a:lnRef idx="1">
+            <a:schemeClr val="accent1"/>
+          </a:lnRef>
+          <a:fillRef idx="3">
+            <a:schemeClr val="accent1"/>
+          </a:fillRef>
+          <a:effectRef idx="2">
+            <a:schemeClr val="accent1"/>
+          </a:effectRef>
+          <a:fontRef idx="minor">
+            <a:schemeClr val="lt1"/>
+          </a:fontRef>
+        </p:style>
+        <p:txBody>
+          <a:bodyPr rtlCol="0" anchor="ctr"/>
+          <a:lstStyle/>
+          <a:p>
+            <a:pPr algn="ctr"/>
+          </a:p>
+        </p:txBody>
+      </p:sp>
+      <p:sp>
+        <p:nvSpPr>
+          <p:cNvPr id="31" name="TextBox 30"/>
+          <p:cNvSpPr txBox="1"/>
+          <p:nvPr/>
+        </p:nvSpPr>
+        <p:spPr>
+          <a:xfrm>
+            <a:off x="4251959" y="2551176"/>
+            <a:ext cx="2743200" cy="292608"/>
+          </a:xfrm>
+          <a:prstGeom prst="rect">
+            <a:avLst/>
+          </a:prstGeom>
+          <a:noFill/>
+        </p:spPr>
+        <p:txBody>
+          <a:bodyPr wrap="square">
+            <a:spAutoFit/>
+          </a:bodyPr>
+          <a:lstStyle/>
+          <a:p>
+            <a:pPr algn="l"/>
+            <a:r>
+              <a:rPr sz="1000" b="0" i="0">
+                <a:solidFill>
+                  <a:srgbClr val="1A2440"/>
+                </a:solidFill>
+              </a:rPr>
+              <a:t>Claims import &amp; storage</a:t>
+            </a:r>
+          </a:p>
+        </p:txBody>
+      </p:sp>
+      <p:sp>
+        <p:nvSpPr>
+          <p:cNvPr id="32" name="Rectangle 31"/>
+          <p:cNvSpPr/>
+          <p:nvPr/>
+        </p:nvSpPr>
+        <p:spPr>
+          <a:xfrm>
+            <a:off x="4114800" y="3008376"/>
+            <a:ext cx="3017520" cy="438912"/>
+          </a:xfrm>
+          <a:prstGeom prst="rect">
+            <a:avLst/>
+          </a:prstGeom>
+          <a:solidFill>
+            <a:srgbClr val="F5F5F5"/>
+          </a:solidFill>
+          <a:ln>
+            <a:noFill/>
+          </a:ln>
+        </p:spPr>
+        <p:style>
+          <a:lnRef idx="1">
+            <a:schemeClr val="accent1"/>
+          </a:lnRef>
+          <a:fillRef idx="3">
+            <a:schemeClr val="accent1"/>
+          </a:fillRef>
+          <a:effectRef idx="2">
+            <a:schemeClr val="accent1"/>
+          </a:effectRef>
+          <a:fontRef idx="minor">
+            <a:schemeClr val="lt1"/>
+          </a:fontRef>
+        </p:style>
+        <p:txBody>
+          <a:bodyPr rtlCol="0" anchor="ctr"/>
+          <a:lstStyle/>
+          <a:p>
+            <a:pPr algn="ctr"/>
+          </a:p>
+        </p:txBody>
+      </p:sp>
+      <p:sp>
+        <p:nvSpPr>
+          <p:cNvPr id="33" name="TextBox 32"/>
+          <p:cNvSpPr txBox="1"/>
+          <p:nvPr/>
+        </p:nvSpPr>
+        <p:spPr>
+          <a:xfrm>
+            <a:off x="4251959" y="3072384"/>
+            <a:ext cx="2743200" cy="292608"/>
+          </a:xfrm>
+          <a:prstGeom prst="rect">
+            <a:avLst/>
+          </a:prstGeom>
+          <a:noFill/>
+        </p:spPr>
+        <p:txBody>
+          <a:bodyPr wrap="square">
+            <a:spAutoFit/>
+          </a:bodyPr>
+          <a:lstStyle/>
+          <a:p>
+            <a:pPr algn="l"/>
+            <a:r>
+              <a:rPr sz="1000" b="0" i="0">
+                <a:solidFill>
+                  <a:srgbClr val="1A2440"/>
+                </a:solidFill>
+              </a:rPr>
+              <a:t>Detection engine runner</a:t>
+            </a:r>
+          </a:p>
+        </p:txBody>
+      </p:sp>
+      <p:sp>
+        <p:nvSpPr>
+          <p:cNvPr id="34" name="Rectangle 33"/>
+          <p:cNvSpPr/>
+          <p:nvPr/>
+        </p:nvSpPr>
+        <p:spPr>
+          <a:xfrm>
+            <a:off x="4114800" y="3529584"/>
+            <a:ext cx="3017520" cy="438912"/>
+          </a:xfrm>
+          <a:prstGeom prst="rect">
+            <a:avLst/>
+          </a:prstGeom>
+          <a:solidFill>
+            <a:srgbClr val="F5F5F5"/>
+          </a:solidFill>
+          <a:ln>
+            <a:noFill/>
+          </a:ln>
+        </p:spPr>
+        <p:style>
+          <a:lnRef idx="1">
+            <a:schemeClr val="accent1"/>
+          </a:lnRef>
+          <a:fillRef idx="3">
+            <a:schemeClr val="accent1"/>
+          </a:fillRef>
+          <a:effectRef idx="2">
+            <a:schemeClr val="accent1"/>
+          </a:effectRef>
+          <a:fontRef idx="minor">
+            <a:schemeClr val="lt1"/>
+          </a:fontRef>
+        </p:style>
+        <p:txBody>
+          <a:bodyPr rtlCol="0" anchor="ctr"/>
+          <a:lstStyle/>
+          <a:p>
+            <a:pPr algn="ctr"/>
+          </a:p>
+        </p:txBody>
+      </p:sp>
+      <p:sp>
+        <p:nvSpPr>
+          <p:cNvPr id="35" name="TextBox 34"/>
+          <p:cNvSpPr txBox="1"/>
+          <p:nvPr/>
+        </p:nvSpPr>
+        <p:spPr>
+          <a:xfrm>
+            <a:off x="4251959" y="3593592"/>
+            <a:ext cx="2743200" cy="292608"/>
+          </a:xfrm>
+          <a:prstGeom prst="rect">
+            <a:avLst/>
+          </a:prstGeom>
+          <a:noFill/>
+        </p:spPr>
+        <p:txBody>
+          <a:bodyPr wrap="square">
+            <a:spAutoFit/>
+          </a:bodyPr>
+          <a:lstStyle/>
+          <a:p>
+            <a:pPr algn="l"/>
+            <a:r>
+              <a:rPr sz="1000" b="0" i="0">
+                <a:solidFill>
+                  <a:srgbClr val="1A2440"/>
+                </a:solidFill>
+              </a:rPr>
+              <a:t>Provider scoring</a:t>
+            </a:r>
+          </a:p>
+        </p:txBody>
+      </p:sp>
+      <p:sp>
+        <p:nvSpPr>
+          <p:cNvPr id="36" name="Rectangle 35"/>
+          <p:cNvSpPr/>
+          <p:nvPr/>
+        </p:nvSpPr>
+        <p:spPr>
+          <a:xfrm>
+            <a:off x="4114800" y="4050791"/>
+            <a:ext cx="3017520" cy="438912"/>
+          </a:xfrm>
+          <a:prstGeom prst="rect">
+            <a:avLst/>
+          </a:prstGeom>
+          <a:solidFill>
+            <a:srgbClr val="F5F5F5"/>
+          </a:solidFill>
+          <a:ln>
+            <a:noFill/>
+          </a:ln>
+        </p:spPr>
+        <p:style>
+          <a:lnRef idx="1">
+            <a:schemeClr val="accent1"/>
+          </a:lnRef>
+          <a:fillRef idx="3">
+            <a:schemeClr val="accent1"/>
+          </a:fillRef>
+          <a:effectRef idx="2">
+            <a:schemeClr val="accent1"/>
+          </a:effectRef>
+          <a:fontRef idx="minor">
+            <a:schemeClr val="lt1"/>
+          </a:fontRef>
+        </p:style>
+        <p:txBody>
+          <a:bodyPr rtlCol="0" anchor="ctr"/>
+          <a:lstStyle/>
+          <a:p>
+            <a:pPr algn="ctr"/>
+          </a:p>
+        </p:txBody>
+      </p:sp>
+      <p:sp>
+        <p:nvSpPr>
+          <p:cNvPr id="37" name="TextBox 36"/>
+          <p:cNvSpPr txBox="1"/>
+          <p:nvPr/>
+        </p:nvSpPr>
+        <p:spPr>
+          <a:xfrm>
+            <a:off x="4251959" y="4114800"/>
+            <a:ext cx="2743200" cy="292608"/>
+          </a:xfrm>
+          <a:prstGeom prst="rect">
+            <a:avLst/>
+          </a:prstGeom>
+          <a:noFill/>
+        </p:spPr>
+        <p:txBody>
+          <a:bodyPr wrap="square">
+            <a:spAutoFit/>
+          </a:bodyPr>
+          <a:lstStyle/>
+          <a:p>
+            <a:pPr algn="l"/>
+            <a:r>
+              <a:rPr sz="1000" b="0" i="0">
+                <a:solidFill>
+                  <a:srgbClr val="1A2440"/>
+                </a:solidFill>
+              </a:rPr>
+              <a:t>Review actions</a:t>
+            </a:r>
+          </a:p>
+        </p:txBody>
+      </p:sp>
+      <p:sp>
+        <p:nvSpPr>
+          <p:cNvPr id="38" name="Rectangle 37"/>
+          <p:cNvSpPr/>
+          <p:nvPr/>
+        </p:nvSpPr>
+        <p:spPr>
+          <a:xfrm>
+            <a:off x="7589520" y="1417320"/>
+            <a:ext cx="3383280" cy="4892040"/>
+          </a:xfrm>
+          <a:prstGeom prst="rect">
+            <a:avLst/>
+          </a:prstGeom>
+          <a:solidFill>
+            <a:srgbClr val="FFFFFF"/>
+          </a:solidFill>
+          <a:ln w="9525">
+            <a:solidFill>
+              <a:srgbClr val="CCCCCC"/>
+            </a:solidFill>
+          </a:ln>
+        </p:spPr>
+        <p:style>
+          <a:lnRef idx="1">
+            <a:schemeClr val="accent1"/>
+          </a:lnRef>
+          <a:fillRef idx="3">
+            <a:schemeClr val="accent1"/>
+          </a:fillRef>
+          <a:effectRef idx="2">
+            <a:schemeClr val="accent1"/>
+          </a:effectRef>
+          <a:fontRef idx="minor">
+            <a:schemeClr val="lt1"/>
+          </a:fontRef>
+        </p:style>
+        <p:txBody>
+          <a:bodyPr rtlCol="0" anchor="ctr"/>
+          <a:lstStyle/>
+          <a:p>
+            <a:pPr algn="ctr"/>
+          </a:p>
+        </p:txBody>
+      </p:sp>
+      <p:sp>
+        <p:nvSpPr>
+          <p:cNvPr id="39" name="Rectangle 38"/>
+          <p:cNvSpPr/>
+          <p:nvPr/>
+        </p:nvSpPr>
+        <p:spPr>
+          <a:xfrm>
+            <a:off x="7589520" y="1417320"/>
+            <a:ext cx="3383280" cy="411480"/>
+          </a:xfrm>
+          <a:prstGeom prst="rect">
+            <a:avLst/>
+          </a:prstGeom>
+          <a:solidFill>
+            <a:srgbClr val="1A2440"/>
+          </a:solidFill>
+          <a:ln>
+            <a:noFill/>
+          </a:ln>
+        </p:spPr>
+        <p:style>
+          <a:lnRef idx="1">
+            <a:schemeClr val="accent1"/>
+          </a:lnRef>
+          <a:fillRef idx="3">
+            <a:schemeClr val="accent1"/>
+          </a:fillRef>
+          <a:effectRef idx="2">
+            <a:schemeClr val="accent1"/>
+          </a:effectRef>
+          <a:fontRef idx="minor">
+            <a:schemeClr val="lt1"/>
+          </a:fontRef>
+        </p:style>
+        <p:txBody>
+          <a:bodyPr rtlCol="0" anchor="ctr"/>
+          <a:lstStyle/>
+          <a:p>
+            <a:pPr algn="ctr"/>
+          </a:p>
+        </p:txBody>
+      </p:sp>
+      <p:sp>
+        <p:nvSpPr>
+          <p:cNvPr id="40" name="TextBox 39"/>
+          <p:cNvSpPr txBox="1"/>
+          <p:nvPr/>
+        </p:nvSpPr>
+        <p:spPr>
+          <a:xfrm>
+            <a:off x="7726680" y="1435608"/>
+            <a:ext cx="3108960" cy="201168"/>
+          </a:xfrm>
+          <a:prstGeom prst="rect">
+            <a:avLst/>
+          </a:prstGeom>
+          <a:noFill/>
+        </p:spPr>
+        <p:txBody>
+          <a:bodyPr wrap="square">
+            <a:spAutoFit/>
+          </a:bodyPr>
+          <a:lstStyle/>
+          <a:p>
+            <a:pPr algn="l"/>
+            <a:r>
+              <a:rPr sz="800" b="1" i="0">
+                <a:solidFill>
+                  <a:srgbClr val="FFFFFF"/>
+                </a:solidFill>
+              </a:rPr>
+              <a:t>DATABASE</a:t>
+            </a:r>
+          </a:p>
+        </p:txBody>
+      </p:sp>
+      <p:sp>
+        <p:nvSpPr>
+          <p:cNvPr id="41" name="TextBox 40"/>
+          <p:cNvSpPr txBox="1"/>
+          <p:nvPr/>
+        </p:nvSpPr>
+        <p:spPr>
+          <a:xfrm>
+            <a:off x="7726680" y="1645920"/>
+            <a:ext cx="3108960" cy="256032"/>
+          </a:xfrm>
+          <a:prstGeom prst="rect">
+            <a:avLst/>
+          </a:prstGeom>
+          <a:noFill/>
+        </p:spPr>
+        <p:txBody>
+          <a:bodyPr wrap="square">
+            <a:spAutoFit/>
+          </a:bodyPr>
+          <a:lstStyle/>
+          <a:p>
+            <a:pPr algn="l"/>
+            <a:r>
+              <a:rPr sz="1200" b="1" i="0">
+                <a:solidFill>
+                  <a:srgbClr val="FFFFFF"/>
+                </a:solidFill>
+              </a:rPr>
+              <a:t>PostgreSQL</a:t>
+            </a:r>
+          </a:p>
+        </p:txBody>
+      </p:sp>
+      <p:sp>
+        <p:nvSpPr>
+          <p:cNvPr id="42" name="Rectangle 41"/>
+          <p:cNvSpPr/>
+          <p:nvPr/>
+        </p:nvSpPr>
+        <p:spPr>
+          <a:xfrm>
+            <a:off x="7772400" y="1965960"/>
+            <a:ext cx="3017520" cy="438912"/>
+          </a:xfrm>
+          <a:prstGeom prst="rect">
+            <a:avLst/>
+          </a:prstGeom>
+          <a:solidFill>
+            <a:srgbClr val="F5F5F5"/>
+          </a:solidFill>
+          <a:ln>
+            <a:noFill/>
+          </a:ln>
+        </p:spPr>
+        <p:style>
+          <a:lnRef idx="1">
+            <a:schemeClr val="accent1"/>
+          </a:lnRef>
+          <a:fillRef idx="3">
+            <a:schemeClr val="accent1"/>
+          </a:fillRef>
+          <a:effectRef idx="2">
+            <a:schemeClr val="accent1"/>
+          </a:effectRef>
+          <a:fontRef idx="minor">
+            <a:schemeClr val="lt1"/>
+          </a:fontRef>
+        </p:style>
+        <p:txBody>
+          <a:bodyPr rtlCol="0" anchor="ctr"/>
+          <a:lstStyle/>
+          <a:p>
+            <a:pPr algn="ctr"/>
+          </a:p>
+        </p:txBody>
+      </p:sp>
+      <p:sp>
+        <p:nvSpPr>
+          <p:cNvPr id="43" name="TextBox 42"/>
+          <p:cNvSpPr txBox="1"/>
+          <p:nvPr/>
+        </p:nvSpPr>
+        <p:spPr>
+          <a:xfrm>
+            <a:off x="7909560" y="2029968"/>
+            <a:ext cx="2743200" cy="292608"/>
+          </a:xfrm>
+          <a:prstGeom prst="rect">
+            <a:avLst/>
+          </a:prstGeom>
+          <a:noFill/>
+        </p:spPr>
+        <p:txBody>
+          <a:bodyPr wrap="square">
+            <a:spAutoFit/>
+          </a:bodyPr>
+          <a:lstStyle/>
+          <a:p>
+            <a:pPr algn="l"/>
+            <a:r>
+              <a:rPr sz="1000" b="0" i="0">
+                <a:solidFill>
+                  <a:srgbClr val="1A2440"/>
+                </a:solidFill>
+              </a:rPr>
+              <a:t>claims table</a:t>
+            </a:r>
+          </a:p>
+        </p:txBody>
+      </p:sp>
+      <p:sp>
+        <p:nvSpPr>
+          <p:cNvPr id="44" name="Rectangle 43"/>
+          <p:cNvSpPr/>
+          <p:nvPr/>
+        </p:nvSpPr>
+        <p:spPr>
+          <a:xfrm>
+            <a:off x="7772400" y="2487168"/>
+            <a:ext cx="3017520" cy="438912"/>
+          </a:xfrm>
+          <a:prstGeom prst="rect">
+            <a:avLst/>
+          </a:prstGeom>
+          <a:solidFill>
+            <a:srgbClr val="F5F5F5"/>
+          </a:solidFill>
+          <a:ln>
+            <a:noFill/>
+          </a:ln>
+        </p:spPr>
+        <p:style>
+          <a:lnRef idx="1">
+            <a:schemeClr val="accent1"/>
+          </a:lnRef>
+          <a:fillRef idx="3">
+            <a:schemeClr val="accent1"/>
+          </a:fillRef>
+          <a:effectRef idx="2">
+            <a:schemeClr val="accent1"/>
+          </a:effectRef>
+          <a:fontRef idx="minor">
+            <a:schemeClr val="lt1"/>
+          </a:fontRef>
+        </p:style>
+        <p:txBody>
+          <a:bodyPr rtlCol="0" anchor="ctr"/>
+          <a:lstStyle/>
+          <a:p>
+            <a:pPr algn="ctr"/>
+          </a:p>
+        </p:txBody>
+      </p:sp>
+      <p:sp>
+        <p:nvSpPr>
+          <p:cNvPr id="45" name="TextBox 44"/>
+          <p:cNvSpPr txBox="1"/>
+          <p:nvPr/>
+        </p:nvSpPr>
+        <p:spPr>
+          <a:xfrm>
+            <a:off x="7909560" y="2551176"/>
+            <a:ext cx="2743200" cy="292608"/>
+          </a:xfrm>
+          <a:prstGeom prst="rect">
+            <a:avLst/>
+          </a:prstGeom>
+          <a:noFill/>
+        </p:spPr>
+        <p:txBody>
+          <a:bodyPr wrap="square">
+            <a:spAutoFit/>
+          </a:bodyPr>
+          <a:lstStyle/>
+          <a:p>
+            <a:pPr algn="l"/>
+            <a:r>
+              <a:rPr sz="1000" b="0" i="0">
+                <a:solidFill>
+                  <a:srgbClr val="1A2440"/>
+                </a:solidFill>
+              </a:rPr>
+              <a:t>providers table</a:t>
+            </a:r>
+          </a:p>
+        </p:txBody>
+      </p:sp>
+      <p:sp>
+        <p:nvSpPr>
+          <p:cNvPr id="46" name="Rectangle 45"/>
+          <p:cNvSpPr/>
+          <p:nvPr/>
+        </p:nvSpPr>
+        <p:spPr>
+          <a:xfrm>
+            <a:off x="7772400" y="3008376"/>
+            <a:ext cx="3017520" cy="438912"/>
+          </a:xfrm>
+          <a:prstGeom prst="rect">
+            <a:avLst/>
+          </a:prstGeom>
+          <a:solidFill>
+            <a:srgbClr val="F5F5F5"/>
+          </a:solidFill>
+          <a:ln>
+            <a:noFill/>
+          </a:ln>
+        </p:spPr>
+        <p:style>
+          <a:lnRef idx="1">
+            <a:schemeClr val="accent1"/>
+          </a:lnRef>
+          <a:fillRef idx="3">
+            <a:schemeClr val="accent1"/>
+          </a:fillRef>
+          <a:effectRef idx="2">
+            <a:schemeClr val="accent1"/>
+          </a:effectRef>
+          <a:fontRef idx="minor">
+            <a:schemeClr val="lt1"/>
+          </a:fontRef>
+        </p:style>
+        <p:txBody>
+          <a:bodyPr rtlCol="0" anchor="ctr"/>
+          <a:lstStyle/>
+          <a:p>
+            <a:pPr algn="ctr"/>
+          </a:p>
+        </p:txBody>
+      </p:sp>
+      <p:sp>
+        <p:nvSpPr>
+          <p:cNvPr id="47" name="TextBox 46"/>
+          <p:cNvSpPr txBox="1"/>
+          <p:nvPr/>
+        </p:nvSpPr>
+        <p:spPr>
+          <a:xfrm>
+            <a:off x="7909560" y="3072384"/>
+            <a:ext cx="2743200" cy="292608"/>
+          </a:xfrm>
+          <a:prstGeom prst="rect">
+            <a:avLst/>
+          </a:prstGeom>
+          <a:noFill/>
+        </p:spPr>
+        <p:txBody>
+          <a:bodyPr wrap="square">
+            <a:spAutoFit/>
+          </a:bodyPr>
+          <a:lstStyle/>
+          <a:p>
+            <a:pPr algn="l"/>
+            <a:r>
+              <a:rPr sz="1000" b="0" i="0">
+                <a:solidFill>
+                  <a:srgbClr val="1A2440"/>
+                </a:solidFill>
+              </a:rPr>
+              <a:t>fraud_flags table</a:t>
+            </a:r>
+          </a:p>
+        </p:txBody>
+      </p:sp>
+      <p:sp>
+        <p:nvSpPr>
+          <p:cNvPr id="48" name="Rectangle 47"/>
+          <p:cNvSpPr/>
+          <p:nvPr/>
+        </p:nvSpPr>
+        <p:spPr>
+          <a:xfrm>
+            <a:off x="7772400" y="3529584"/>
+            <a:ext cx="3017520" cy="438912"/>
+          </a:xfrm>
+          <a:prstGeom prst="rect">
+            <a:avLst/>
+          </a:prstGeom>
+          <a:solidFill>
+            <a:srgbClr val="F5F5F5"/>
+          </a:solidFill>
+          <a:ln>
+            <a:noFill/>
+          </a:ln>
+        </p:spPr>
+        <p:style>
+          <a:lnRef idx="1">
+            <a:schemeClr val="accent1"/>
+          </a:lnRef>
+          <a:fillRef idx="3">
+            <a:schemeClr val="accent1"/>
+          </a:fillRef>
+          <a:effectRef idx="2">
+            <a:schemeClr val="accent1"/>
+          </a:effectRef>
+          <a:fontRef idx="minor">
+            <a:schemeClr val="lt1"/>
+          </a:fontRef>
+        </p:style>
+        <p:txBody>
+          <a:bodyPr rtlCol="0" anchor="ctr"/>
+          <a:lstStyle/>
+          <a:p>
+            <a:pPr algn="ctr"/>
+          </a:p>
+        </p:txBody>
+      </p:sp>
+      <p:sp>
+        <p:nvSpPr>
+          <p:cNvPr id="49" name="TextBox 48"/>
+          <p:cNvSpPr txBox="1"/>
+          <p:nvPr/>
+        </p:nvSpPr>
+        <p:spPr>
+          <a:xfrm>
+            <a:off x="7909560" y="3593592"/>
+            <a:ext cx="2743200" cy="292608"/>
+          </a:xfrm>
+          <a:prstGeom prst="rect">
+            <a:avLst/>
+          </a:prstGeom>
+          <a:noFill/>
+        </p:spPr>
+        <p:txBody>
+          <a:bodyPr wrap="square">
+            <a:spAutoFit/>
+          </a:bodyPr>
+          <a:lstStyle/>
+          <a:p>
+            <a:pPr algn="l"/>
+            <a:r>
+              <a:rPr sz="1000" b="0" i="0">
+                <a:solidFill>
+                  <a:srgbClr val="1A2440"/>
+                </a:solidFill>
+              </a:rPr>
+              <a:t>review_actions table</a:t>
+            </a:r>
+          </a:p>
+        </p:txBody>
+      </p:sp>
+      <p:sp>
+        <p:nvSpPr>
+          <p:cNvPr id="50" name="Rectangle 49"/>
+          <p:cNvSpPr/>
+          <p:nvPr/>
+        </p:nvSpPr>
+        <p:spPr>
+          <a:xfrm>
+            <a:off x="3703320" y="3401568"/>
+            <a:ext cx="91440" cy="73152"/>
+          </a:xfrm>
+          <a:prstGeom prst="rect">
+            <a:avLst/>
+          </a:prstGeom>
+          <a:solidFill>
+            <a:srgbClr val="CCCCCC"/>
+          </a:solidFill>
+          <a:ln>
+            <a:noFill/>
+          </a:ln>
+        </p:spPr>
+        <p:style>
+          <a:lnRef idx="1">
+            <a:schemeClr val="accent1"/>
+          </a:lnRef>
+          <a:fillRef idx="3">
+            <a:schemeClr val="accent1"/>
+          </a:fillRef>
+          <a:effectRef idx="2">
+            <a:schemeClr val="accent1"/>
+          </a:effectRef>
+          <a:fontRef idx="minor">
+            <a:schemeClr val="lt1"/>
+          </a:fontRef>
+        </p:style>
+        <p:txBody>
+          <a:bodyPr rtlCol="0" anchor="ctr"/>
+          <a:lstStyle/>
+          <a:p>
+            <a:pPr algn="ctr"/>
+          </a:p>
+        </p:txBody>
+      </p:sp>
+      <p:sp>
+        <p:nvSpPr>
+          <p:cNvPr id="51" name="Rectangle 50"/>
+          <p:cNvSpPr/>
+          <p:nvPr/>
+        </p:nvSpPr>
+        <p:spPr>
+          <a:xfrm>
+            <a:off x="3767328" y="3319272"/>
+            <a:ext cx="164592" cy="256032"/>
+          </a:xfrm>
+          <a:prstGeom prst="rect">
+            <a:avLst/>
+          </a:prstGeom>
+          <a:solidFill>
+            <a:srgbClr val="CCCCCC"/>
+          </a:solidFill>
+          <a:ln>
+            <a:noFill/>
+          </a:ln>
+        </p:spPr>
+        <p:style>
+          <a:lnRef idx="1">
+            <a:schemeClr val="accent1"/>
+          </a:lnRef>
+          <a:fillRef idx="3">
+            <a:schemeClr val="accent1"/>
+          </a:fillRef>
+          <a:effectRef idx="2">
+            <a:schemeClr val="accent1"/>
+          </a:effectRef>
+          <a:fontRef idx="minor">
+            <a:schemeClr val="lt1"/>
+          </a:fontRef>
+        </p:style>
+        <p:txBody>
+          <a:bodyPr rtlCol="0" anchor="ctr"/>
+          <a:lstStyle/>
+          <a:p>
+            <a:pPr algn="ctr"/>
+          </a:p>
+        </p:txBody>
+      </p:sp>
+      <p:sp>
+        <p:nvSpPr>
+          <p:cNvPr id="52" name="TextBox 51"/>
+          <p:cNvSpPr txBox="1"/>
+          <p:nvPr/>
+        </p:nvSpPr>
+        <p:spPr>
+          <a:xfrm>
+            <a:off x="3703320" y="3493008"/>
+            <a:ext cx="228600" cy="228600"/>
+          </a:xfrm>
+          <a:prstGeom prst="rect">
+            <a:avLst/>
+          </a:prstGeom>
+          <a:noFill/>
+        </p:spPr>
+        <p:txBody>
+          <a:bodyPr wrap="square">
+            <a:spAutoFit/>
+          </a:bodyPr>
+          <a:lstStyle/>
+          <a:p>
+            <a:pPr algn="ctr"/>
+            <a:r>
+              <a:rPr sz="800" b="0" i="1">
+                <a:solidFill>
+                  <a:srgbClr val="444444"/>
+                </a:solidFill>
+              </a:rPr>
+              <a:t>HTTP / JSON</a:t>
+            </a:r>
+          </a:p>
+        </p:txBody>
+      </p:sp>
+      <p:sp>
+        <p:nvSpPr>
+          <p:cNvPr id="53" name="Rectangle 52"/>
+          <p:cNvSpPr/>
+          <p:nvPr/>
+        </p:nvSpPr>
+        <p:spPr>
+          <a:xfrm>
+            <a:off x="7360920" y="3401568"/>
+            <a:ext cx="91440" cy="73152"/>
+          </a:xfrm>
+          <a:prstGeom prst="rect">
+            <a:avLst/>
+          </a:prstGeom>
+          <a:solidFill>
+            <a:srgbClr val="CCCCCC"/>
+          </a:solidFill>
+          <a:ln>
+            <a:noFill/>
+          </a:ln>
+        </p:spPr>
+        <p:style>
+          <a:lnRef idx="1">
+            <a:schemeClr val="accent1"/>
+          </a:lnRef>
+          <a:fillRef idx="3">
+            <a:schemeClr val="accent1"/>
+          </a:fillRef>
+          <a:effectRef idx="2">
+            <a:schemeClr val="accent1"/>
+          </a:effectRef>
+          <a:fontRef idx="minor">
+            <a:schemeClr val="lt1"/>
+          </a:fontRef>
+        </p:style>
+        <p:txBody>
+          <a:bodyPr rtlCol="0" anchor="ctr"/>
+          <a:lstStyle/>
+          <a:p>
+            <a:pPr algn="ctr"/>
+          </a:p>
+        </p:txBody>
+      </p:sp>
+      <p:sp>
+        <p:nvSpPr>
+          <p:cNvPr id="54" name="Rectangle 53"/>
+          <p:cNvSpPr/>
+          <p:nvPr/>
+        </p:nvSpPr>
+        <p:spPr>
+          <a:xfrm>
+            <a:off x="7424928" y="3319272"/>
+            <a:ext cx="164592" cy="256032"/>
+          </a:xfrm>
+          <a:prstGeom prst="rect">
+            <a:avLst/>
+          </a:prstGeom>
+          <a:solidFill>
+            <a:srgbClr val="CCCCCC"/>
+          </a:solidFill>
+          <a:ln>
+            <a:noFill/>
+          </a:ln>
+        </p:spPr>
+        <p:style>
+          <a:lnRef idx="1">
+            <a:schemeClr val="accent1"/>
+          </a:lnRef>
+          <a:fillRef idx="3">
+            <a:schemeClr val="accent1"/>
+          </a:fillRef>
+          <a:effectRef idx="2">
+            <a:schemeClr val="accent1"/>
+          </a:effectRef>
+          <a:fontRef idx="minor">
+            <a:schemeClr val="lt1"/>
+          </a:fontRef>
+        </p:style>
+        <p:txBody>
+          <a:bodyPr rtlCol="0" anchor="ctr"/>
+          <a:lstStyle/>
+          <a:p>
+            <a:pPr algn="ctr"/>
+          </a:p>
+        </p:txBody>
+      </p:sp>
+      <p:sp>
+        <p:nvSpPr>
+          <p:cNvPr id="55" name="TextBox 54"/>
+          <p:cNvSpPr txBox="1"/>
+          <p:nvPr/>
+        </p:nvSpPr>
+        <p:spPr>
+          <a:xfrm>
+            <a:off x="7360920" y="3493008"/>
+            <a:ext cx="228600" cy="228600"/>
+          </a:xfrm>
+          <a:prstGeom prst="rect">
+            <a:avLst/>
+          </a:prstGeom>
+          <a:noFill/>
+        </p:spPr>
+        <p:txBody>
+          <a:bodyPr wrap="square">
+            <a:spAutoFit/>
+          </a:bodyPr>
+          <a:lstStyle/>
+          <a:p>
+            <a:pPr algn="ctr"/>
+            <a:r>
+              <a:rPr sz="800" b="0" i="1">
+                <a:solidFill>
+                  <a:srgbClr val="444444"/>
+                </a:solidFill>
+              </a:rPr>
+              <a:t>SQL / asyncpg</a:t>
+            </a:r>
+          </a:p>
+        </p:txBody>
+      </p:sp>
+      <p:sp>
+        <p:nvSpPr>
+          <p:cNvPr id="56" name="Rectangle 55"/>
+          <p:cNvSpPr/>
+          <p:nvPr/>
+        </p:nvSpPr>
+        <p:spPr>
+          <a:xfrm>
+            <a:off x="274320" y="6400800"/>
+            <a:ext cx="11640312" cy="347472"/>
+          </a:xfrm>
+          <a:prstGeom prst="rect">
+            <a:avLst/>
+          </a:prstGeom>
+          <a:solidFill>
+            <a:srgbClr val="1A2440"/>
+          </a:solidFill>
+          <a:ln>
+            <a:noFill/>
+          </a:ln>
+        </p:spPr>
+        <p:style>
+          <a:lnRef idx="1">
+            <a:schemeClr val="accent1"/>
+          </a:lnRef>
+          <a:fillRef idx="3">
+            <a:schemeClr val="accent1"/>
+          </a:fillRef>
+          <a:effectRef idx="2">
+            <a:schemeClr val="accent1"/>
+          </a:effectRef>
+          <a:fontRef idx="minor">
+            <a:schemeClr val="lt1"/>
+          </a:fontRef>
+        </p:style>
+        <p:txBody>
+          <a:bodyPr rtlCol="0" anchor="ctr"/>
+          <a:lstStyle/>
+          <a:p>
+            <a:pPr algn="ctr"/>
+          </a:p>
+        </p:txBody>
+      </p:sp>
+      <p:sp>
+        <p:nvSpPr>
+          <p:cNvPr id="57" name="TextBox 56"/>
+          <p:cNvSpPr txBox="1"/>
+          <p:nvPr/>
+        </p:nvSpPr>
+        <p:spPr>
+          <a:xfrm>
+            <a:off x="365760" y="6419088"/>
+            <a:ext cx="11430000" cy="274320"/>
+          </a:xfrm>
+          <a:prstGeom prst="rect">
+            <a:avLst/>
+          </a:prstGeom>
+          <a:noFill/>
+        </p:spPr>
+        <p:txBody>
+          <a:bodyPr wrap="square">
+            <a:spAutoFit/>
+          </a:bodyPr>
+          <a:lstStyle/>
+          <a:p>
+            <a:pPr algn="ctr"/>
+            <a:r>
+              <a:rPr sz="900" b="0" i="0">
+                <a:solidFill>
+                  <a:srgbClr val="FFFFFF"/>
+                </a:solidFill>
+              </a:rPr>
+              <a:t>Deployed on Railway · Postgres managed · Frontend &amp; backend as separate services · Auth required on all API endpoints</a:t>
             </a:r>
           </a:p>
         </p:txBody>
@@ -6977,6 +8918,3828 @@
 </file>
 
 <file path=ppt/slides/slide13.xml><?xml version="1.0" encoding="utf-8"?>
+<p:sld xmlns:a="http://schemas.openxmlformats.org/drawingml/2006/main" xmlns:p="http://schemas.openxmlformats.org/presentationml/2006/main" xmlns:r="http://schemas.openxmlformats.org/officeDocument/2006/relationships">
+  <p:cSld>
+    <p:spTree>
+      <p:nvGrpSpPr>
+        <p:cNvPr id="1" name=""/>
+        <p:cNvGrpSpPr/>
+        <p:nvPr/>
+      </p:nvGrpSpPr>
+      <p:grpSpPr/>
+      <p:sp>
+        <p:nvSpPr>
+          <p:cNvPr id="2" name="Rectangle 1"/>
+          <p:cNvSpPr/>
+          <p:nvPr/>
+        </p:nvSpPr>
+        <p:spPr>
+          <a:xfrm>
+            <a:off x="0" y="0"/>
+            <a:ext cx="12188952" cy="960120"/>
+          </a:xfrm>
+          <a:prstGeom prst="rect">
+            <a:avLst/>
+          </a:prstGeom>
+          <a:solidFill>
+            <a:srgbClr val="1A2440"/>
+          </a:solidFill>
+          <a:ln>
+            <a:noFill/>
+          </a:ln>
+        </p:spPr>
+        <p:style>
+          <a:lnRef idx="1">
+            <a:schemeClr val="accent1"/>
+          </a:lnRef>
+          <a:fillRef idx="3">
+            <a:schemeClr val="accent1"/>
+          </a:fillRef>
+          <a:effectRef idx="2">
+            <a:schemeClr val="accent1"/>
+          </a:effectRef>
+          <a:fontRef idx="minor">
+            <a:schemeClr val="lt1"/>
+          </a:fontRef>
+        </p:style>
+        <p:txBody>
+          <a:bodyPr rtlCol="0" anchor="ctr"/>
+          <a:lstStyle/>
+          <a:p>
+            <a:pPr algn="ctr"/>
+          </a:p>
+        </p:txBody>
+      </p:sp>
+      <p:sp>
+        <p:nvSpPr>
+          <p:cNvPr id="3" name="Rectangle 2"/>
+          <p:cNvSpPr/>
+          <p:nvPr/>
+        </p:nvSpPr>
+        <p:spPr>
+          <a:xfrm>
+            <a:off x="320040" y="118872"/>
+            <a:ext cx="1097280" cy="292608"/>
+          </a:xfrm>
+          <a:prstGeom prst="rect">
+            <a:avLst/>
+          </a:prstGeom>
+          <a:solidFill>
+            <a:srgbClr val="F5A623"/>
+          </a:solidFill>
+          <a:ln>
+            <a:noFill/>
+          </a:ln>
+        </p:spPr>
+        <p:style>
+          <a:lnRef idx="1">
+            <a:schemeClr val="accent1"/>
+          </a:lnRef>
+          <a:fillRef idx="3">
+            <a:schemeClr val="accent1"/>
+          </a:fillRef>
+          <a:effectRef idx="2">
+            <a:schemeClr val="accent1"/>
+          </a:effectRef>
+          <a:fontRef idx="minor">
+            <a:schemeClr val="lt1"/>
+          </a:fontRef>
+        </p:style>
+        <p:txBody>
+          <a:bodyPr rtlCol="0" anchor="ctr"/>
+          <a:lstStyle/>
+          <a:p>
+            <a:pPr algn="ctr"/>
+          </a:p>
+        </p:txBody>
+      </p:sp>
+      <p:sp>
+        <p:nvSpPr>
+          <p:cNvPr id="4" name="TextBox 3"/>
+          <p:cNvSpPr txBox="1"/>
+          <p:nvPr/>
+        </p:nvSpPr>
+        <p:spPr>
+          <a:xfrm>
+            <a:off x="320040" y="118872"/>
+            <a:ext cx="1097280" cy="292608"/>
+          </a:xfrm>
+          <a:prstGeom prst="rect">
+            <a:avLst/>
+          </a:prstGeom>
+          <a:noFill/>
+        </p:spPr>
+        <p:txBody>
+          <a:bodyPr wrap="square">
+            <a:spAutoFit/>
+          </a:bodyPr>
+          <a:lstStyle/>
+          <a:p>
+            <a:pPr algn="ctr"/>
+            <a:r>
+              <a:rPr sz="900" b="1" i="0">
+                <a:solidFill>
+                  <a:srgbClr val="1A2440"/>
+                </a:solidFill>
+              </a:rPr>
+              <a:t>Q2</a:t>
+            </a:r>
+          </a:p>
+        </p:txBody>
+      </p:sp>
+      <p:sp>
+        <p:nvSpPr>
+          <p:cNvPr id="5" name="TextBox 4"/>
+          <p:cNvSpPr txBox="1"/>
+          <p:nvPr/>
+        </p:nvSpPr>
+        <p:spPr>
+          <a:xfrm>
+            <a:off x="1554480" y="73152"/>
+            <a:ext cx="10332720" cy="594360"/>
+          </a:xfrm>
+          <a:prstGeom prst="rect">
+            <a:avLst/>
+          </a:prstGeom>
+          <a:noFill/>
+        </p:spPr>
+        <p:txBody>
+          <a:bodyPr wrap="square">
+            <a:spAutoFit/>
+          </a:bodyPr>
+          <a:lstStyle/>
+          <a:p>
+            <a:pPr algn="l"/>
+            <a:r>
+              <a:rPr sz="2400" b="1" i="0">
+                <a:solidFill>
+                  <a:srgbClr val="FFFFFF"/>
+                </a:solidFill>
+              </a:rPr>
+              <a:t>The App — Dashboard &amp; Provider Views</a:t>
+            </a:r>
+          </a:p>
+        </p:txBody>
+      </p:sp>
+      <p:sp>
+        <p:nvSpPr>
+          <p:cNvPr id="6" name="Rectangle 5"/>
+          <p:cNvSpPr/>
+          <p:nvPr/>
+        </p:nvSpPr>
+        <p:spPr>
+          <a:xfrm>
+            <a:off x="0" y="960120"/>
+            <a:ext cx="12188952" cy="347472"/>
+          </a:xfrm>
+          <a:prstGeom prst="rect">
+            <a:avLst/>
+          </a:prstGeom>
+          <a:solidFill>
+            <a:srgbClr val="F5F5F5"/>
+          </a:solidFill>
+          <a:ln>
+            <a:noFill/>
+          </a:ln>
+        </p:spPr>
+        <p:style>
+          <a:lnRef idx="1">
+            <a:schemeClr val="accent1"/>
+          </a:lnRef>
+          <a:fillRef idx="3">
+            <a:schemeClr val="accent1"/>
+          </a:fillRef>
+          <a:effectRef idx="2">
+            <a:schemeClr val="accent1"/>
+          </a:effectRef>
+          <a:fontRef idx="minor">
+            <a:schemeClr val="lt1"/>
+          </a:fontRef>
+        </p:style>
+        <p:txBody>
+          <a:bodyPr rtlCol="0" anchor="ctr"/>
+          <a:lstStyle/>
+          <a:p>
+            <a:pPr algn="ctr"/>
+          </a:p>
+        </p:txBody>
+      </p:sp>
+      <p:sp>
+        <p:nvSpPr>
+          <p:cNvPr id="7" name="TextBox 6"/>
+          <p:cNvSpPr txBox="1"/>
+          <p:nvPr/>
+        </p:nvSpPr>
+        <p:spPr>
+          <a:xfrm>
+            <a:off x="365760" y="987552"/>
+            <a:ext cx="11430000" cy="301752"/>
+          </a:xfrm>
+          <a:prstGeom prst="rect">
+            <a:avLst/>
+          </a:prstGeom>
+          <a:noFill/>
+        </p:spPr>
+        <p:txBody>
+          <a:bodyPr wrap="square">
+            <a:spAutoFit/>
+          </a:bodyPr>
+          <a:lstStyle/>
+          <a:p>
+            <a:pPr algn="l"/>
+            <a:r>
+              <a:rPr sz="1200" b="0" i="1">
+                <a:solidFill>
+                  <a:srgbClr val="444444"/>
+                </a:solidFill>
+              </a:rPr>
+              <a:t>alan-production-0d14.up.railway.app  ·  Login: demo mode (alanadmin)</a:t>
+            </a:r>
+          </a:p>
+        </p:txBody>
+      </p:sp>
+      <p:sp>
+        <p:nvSpPr>
+          <p:cNvPr id="8" name="Rectangle 7"/>
+          <p:cNvSpPr/>
+          <p:nvPr/>
+        </p:nvSpPr>
+        <p:spPr>
+          <a:xfrm>
+            <a:off x="0" y="6510528"/>
+            <a:ext cx="12188952" cy="347472"/>
+          </a:xfrm>
+          <a:prstGeom prst="rect">
+            <a:avLst/>
+          </a:prstGeom>
+          <a:solidFill>
+            <a:srgbClr val="1A2440"/>
+          </a:solidFill>
+          <a:ln>
+            <a:noFill/>
+          </a:ln>
+        </p:spPr>
+        <p:style>
+          <a:lnRef idx="1">
+            <a:schemeClr val="accent1"/>
+          </a:lnRef>
+          <a:fillRef idx="3">
+            <a:schemeClr val="accent1"/>
+          </a:fillRef>
+          <a:effectRef idx="2">
+            <a:schemeClr val="accent1"/>
+          </a:effectRef>
+          <a:fontRef idx="minor">
+            <a:schemeClr val="lt1"/>
+          </a:fontRef>
+        </p:style>
+        <p:txBody>
+          <a:bodyPr rtlCol="0" anchor="ctr"/>
+          <a:lstStyle/>
+          <a:p>
+            <a:pPr algn="ctr"/>
+          </a:p>
+        </p:txBody>
+      </p:sp>
+      <p:sp>
+        <p:nvSpPr>
+          <p:cNvPr id="9" name="TextBox 8"/>
+          <p:cNvSpPr txBox="1"/>
+          <p:nvPr/>
+        </p:nvSpPr>
+        <p:spPr>
+          <a:xfrm>
+            <a:off x="274320" y="6519672"/>
+            <a:ext cx="11612880" cy="329184"/>
+          </a:xfrm>
+          <a:prstGeom prst="rect">
+            <a:avLst/>
+          </a:prstGeom>
+          <a:noFill/>
+        </p:spPr>
+        <p:txBody>
+          <a:bodyPr wrap="square">
+            <a:spAutoFit/>
+          </a:bodyPr>
+          <a:lstStyle/>
+          <a:p>
+            <a:pPr algn="ctr"/>
+            <a:r>
+              <a:rPr sz="900" b="0" i="0">
+                <a:solidFill>
+                  <a:srgbClr val="FFFFFF"/>
+                </a:solidFill>
+              </a:rPr>
+              <a:t>Alan Assurance · Fraud Detection Case · 2024</a:t>
+            </a:r>
+          </a:p>
+        </p:txBody>
+      </p:sp>
+      <p:sp>
+        <p:nvSpPr>
+          <p:cNvPr id="10" name="Rectangle 9"/>
+          <p:cNvSpPr/>
+          <p:nvPr/>
+        </p:nvSpPr>
+        <p:spPr>
+          <a:xfrm>
+            <a:off x="274320" y="1417320"/>
+            <a:ext cx="5669280" cy="4892040"/>
+          </a:xfrm>
+          <a:prstGeom prst="rect">
+            <a:avLst/>
+          </a:prstGeom>
+          <a:solidFill>
+            <a:srgbClr val="F5F5F5"/>
+          </a:solidFill>
+          <a:ln w="9525">
+            <a:solidFill>
+              <a:srgbClr val="CCCCCC"/>
+            </a:solidFill>
+          </a:ln>
+        </p:spPr>
+        <p:style>
+          <a:lnRef idx="1">
+            <a:schemeClr val="accent1"/>
+          </a:lnRef>
+          <a:fillRef idx="3">
+            <a:schemeClr val="accent1"/>
+          </a:fillRef>
+          <a:effectRef idx="2">
+            <a:schemeClr val="accent1"/>
+          </a:effectRef>
+          <a:fontRef idx="minor">
+            <a:schemeClr val="lt1"/>
+          </a:fontRef>
+        </p:style>
+        <p:txBody>
+          <a:bodyPr rtlCol="0" anchor="ctr"/>
+          <a:lstStyle/>
+          <a:p>
+            <a:pPr algn="ctr"/>
+          </a:p>
+        </p:txBody>
+      </p:sp>
+      <p:sp>
+        <p:nvSpPr>
+          <p:cNvPr id="11" name="Rectangle 10"/>
+          <p:cNvSpPr/>
+          <p:nvPr/>
+        </p:nvSpPr>
+        <p:spPr>
+          <a:xfrm>
+            <a:off x="274320" y="1417320"/>
+            <a:ext cx="5669280" cy="347472"/>
+          </a:xfrm>
+          <a:prstGeom prst="rect">
+            <a:avLst/>
+          </a:prstGeom>
+          <a:solidFill>
+            <a:srgbClr val="1A2440"/>
+          </a:solidFill>
+          <a:ln>
+            <a:noFill/>
+          </a:ln>
+        </p:spPr>
+        <p:style>
+          <a:lnRef idx="1">
+            <a:schemeClr val="accent1"/>
+          </a:lnRef>
+          <a:fillRef idx="3">
+            <a:schemeClr val="accent1"/>
+          </a:fillRef>
+          <a:effectRef idx="2">
+            <a:schemeClr val="accent1"/>
+          </a:effectRef>
+          <a:fontRef idx="minor">
+            <a:schemeClr val="lt1"/>
+          </a:fontRef>
+        </p:style>
+        <p:txBody>
+          <a:bodyPr rtlCol="0" anchor="ctr"/>
+          <a:lstStyle/>
+          <a:p>
+            <a:pPr algn="ctr"/>
+          </a:p>
+        </p:txBody>
+      </p:sp>
+      <p:sp>
+        <p:nvSpPr>
+          <p:cNvPr id="12" name="TextBox 11"/>
+          <p:cNvSpPr txBox="1"/>
+          <p:nvPr/>
+        </p:nvSpPr>
+        <p:spPr>
+          <a:xfrm>
+            <a:off x="411480" y="1444752"/>
+            <a:ext cx="5029200" cy="256032"/>
+          </a:xfrm>
+          <a:prstGeom prst="rect">
+            <a:avLst/>
+          </a:prstGeom>
+          <a:noFill/>
+        </p:spPr>
+        <p:txBody>
+          <a:bodyPr wrap="square">
+            <a:spAutoFit/>
+          </a:bodyPr>
+          <a:lstStyle/>
+          <a:p>
+            <a:pPr algn="l"/>
+            <a:r>
+              <a:rPr sz="900" b="1" i="0">
+                <a:solidFill>
+                  <a:srgbClr val="FFFFFF"/>
+                </a:solidFill>
+              </a:rPr>
+              <a:t>Dashboard  —  Fraud detection overview</a:t>
+            </a:r>
+          </a:p>
+        </p:txBody>
+      </p:sp>
+      <p:sp>
+        <p:nvSpPr>
+          <p:cNvPr id="13" name="Rectangle 12"/>
+          <p:cNvSpPr/>
+          <p:nvPr/>
+        </p:nvSpPr>
+        <p:spPr>
+          <a:xfrm>
+            <a:off x="347472" y="1847088"/>
+            <a:ext cx="1316736" cy="713232"/>
+          </a:xfrm>
+          <a:prstGeom prst="rect">
+            <a:avLst/>
+          </a:prstGeom>
+          <a:solidFill>
+            <a:srgbClr val="FFFFFF"/>
+          </a:solidFill>
+          <a:ln w="9525">
+            <a:solidFill>
+              <a:srgbClr val="CCCCCC"/>
+            </a:solidFill>
+          </a:ln>
+        </p:spPr>
+        <p:style>
+          <a:lnRef idx="1">
+            <a:schemeClr val="accent1"/>
+          </a:lnRef>
+          <a:fillRef idx="3">
+            <a:schemeClr val="accent1"/>
+          </a:fillRef>
+          <a:effectRef idx="2">
+            <a:schemeClr val="accent1"/>
+          </a:effectRef>
+          <a:fontRef idx="minor">
+            <a:schemeClr val="lt1"/>
+          </a:fontRef>
+        </p:style>
+        <p:txBody>
+          <a:bodyPr rtlCol="0" anchor="ctr"/>
+          <a:lstStyle/>
+          <a:p>
+            <a:pPr algn="ctr"/>
+          </a:p>
+        </p:txBody>
+      </p:sp>
+      <p:sp>
+        <p:nvSpPr>
+          <p:cNvPr id="14" name="Rectangle 13"/>
+          <p:cNvSpPr/>
+          <p:nvPr/>
+        </p:nvSpPr>
+        <p:spPr>
+          <a:xfrm>
+            <a:off x="347472" y="1847088"/>
+            <a:ext cx="1316736" cy="91440"/>
+          </a:xfrm>
+          <a:prstGeom prst="rect">
+            <a:avLst/>
+          </a:prstGeom>
+          <a:solidFill>
+            <a:srgbClr val="1A2440"/>
+          </a:solidFill>
+          <a:ln>
+            <a:noFill/>
+          </a:ln>
+        </p:spPr>
+        <p:style>
+          <a:lnRef idx="1">
+            <a:schemeClr val="accent1"/>
+          </a:lnRef>
+          <a:fillRef idx="3">
+            <a:schemeClr val="accent1"/>
+          </a:fillRef>
+          <a:effectRef idx="2">
+            <a:schemeClr val="accent1"/>
+          </a:effectRef>
+          <a:fontRef idx="minor">
+            <a:schemeClr val="lt1"/>
+          </a:fontRef>
+        </p:style>
+        <p:txBody>
+          <a:bodyPr rtlCol="0" anchor="ctr"/>
+          <a:lstStyle/>
+          <a:p>
+            <a:pPr algn="ctr"/>
+          </a:p>
+        </p:txBody>
+      </p:sp>
+      <p:sp>
+        <p:nvSpPr>
+          <p:cNvPr id="15" name="TextBox 14"/>
+          <p:cNvSpPr txBox="1"/>
+          <p:nvPr/>
+        </p:nvSpPr>
+        <p:spPr>
+          <a:xfrm>
+            <a:off x="420624" y="1993392"/>
+            <a:ext cx="1170432" cy="320040"/>
+          </a:xfrm>
+          <a:prstGeom prst="rect">
+            <a:avLst/>
+          </a:prstGeom>
+          <a:noFill/>
+        </p:spPr>
+        <p:txBody>
+          <a:bodyPr wrap="square">
+            <a:spAutoFit/>
+          </a:bodyPr>
+          <a:lstStyle/>
+          <a:p>
+            <a:pPr algn="l"/>
+            <a:r>
+              <a:rPr sz="1600" b="1" i="0">
+                <a:solidFill>
+                  <a:srgbClr val="1A2440"/>
+                </a:solidFill>
+              </a:rPr>
+              <a:t>12</a:t>
+            </a:r>
+          </a:p>
+        </p:txBody>
+      </p:sp>
+      <p:sp>
+        <p:nvSpPr>
+          <p:cNvPr id="16" name="TextBox 15"/>
+          <p:cNvSpPr txBox="1"/>
+          <p:nvPr/>
+        </p:nvSpPr>
+        <p:spPr>
+          <a:xfrm>
+            <a:off x="420624" y="2313432"/>
+            <a:ext cx="1170432" cy="201168"/>
+          </a:xfrm>
+          <a:prstGeom prst="rect">
+            <a:avLst/>
+          </a:prstGeom>
+          <a:noFill/>
+        </p:spPr>
+        <p:txBody>
+          <a:bodyPr wrap="square">
+            <a:spAutoFit/>
+          </a:bodyPr>
+          <a:lstStyle/>
+          <a:p>
+            <a:pPr algn="l"/>
+            <a:r>
+              <a:rPr sz="600" b="0" i="0">
+                <a:solidFill>
+                  <a:srgbClr val="444444"/>
+                </a:solidFill>
+              </a:rPr>
+              <a:t>TOTAL PROVIDERS</a:t>
+            </a:r>
+          </a:p>
+        </p:txBody>
+      </p:sp>
+      <p:sp>
+        <p:nvSpPr>
+          <p:cNvPr id="17" name="Rectangle 16"/>
+          <p:cNvSpPr/>
+          <p:nvPr/>
+        </p:nvSpPr>
+        <p:spPr>
+          <a:xfrm>
+            <a:off x="1737360" y="1847088"/>
+            <a:ext cx="1316736" cy="713232"/>
+          </a:xfrm>
+          <a:prstGeom prst="rect">
+            <a:avLst/>
+          </a:prstGeom>
+          <a:solidFill>
+            <a:srgbClr val="FFFFFF"/>
+          </a:solidFill>
+          <a:ln w="9525">
+            <a:solidFill>
+              <a:srgbClr val="CCCCCC"/>
+            </a:solidFill>
+          </a:ln>
+        </p:spPr>
+        <p:style>
+          <a:lnRef idx="1">
+            <a:schemeClr val="accent1"/>
+          </a:lnRef>
+          <a:fillRef idx="3">
+            <a:schemeClr val="accent1"/>
+          </a:fillRef>
+          <a:effectRef idx="2">
+            <a:schemeClr val="accent1"/>
+          </a:effectRef>
+          <a:fontRef idx="minor">
+            <a:schemeClr val="lt1"/>
+          </a:fontRef>
+        </p:style>
+        <p:txBody>
+          <a:bodyPr rtlCol="0" anchor="ctr"/>
+          <a:lstStyle/>
+          <a:p>
+            <a:pPr algn="ctr"/>
+          </a:p>
+        </p:txBody>
+      </p:sp>
+      <p:sp>
+        <p:nvSpPr>
+          <p:cNvPr id="18" name="Rectangle 17"/>
+          <p:cNvSpPr/>
+          <p:nvPr/>
+        </p:nvSpPr>
+        <p:spPr>
+          <a:xfrm>
+            <a:off x="1737360" y="1847088"/>
+            <a:ext cx="1316736" cy="91440"/>
+          </a:xfrm>
+          <a:prstGeom prst="rect">
+            <a:avLst/>
+          </a:prstGeom>
+          <a:solidFill>
+            <a:srgbClr val="E07B39"/>
+          </a:solidFill>
+          <a:ln>
+            <a:noFill/>
+          </a:ln>
+        </p:spPr>
+        <p:style>
+          <a:lnRef idx="1">
+            <a:schemeClr val="accent1"/>
+          </a:lnRef>
+          <a:fillRef idx="3">
+            <a:schemeClr val="accent1"/>
+          </a:fillRef>
+          <a:effectRef idx="2">
+            <a:schemeClr val="accent1"/>
+          </a:effectRef>
+          <a:fontRef idx="minor">
+            <a:schemeClr val="lt1"/>
+          </a:fontRef>
+        </p:style>
+        <p:txBody>
+          <a:bodyPr rtlCol="0" anchor="ctr"/>
+          <a:lstStyle/>
+          <a:p>
+            <a:pPr algn="ctr"/>
+          </a:p>
+        </p:txBody>
+      </p:sp>
+      <p:sp>
+        <p:nvSpPr>
+          <p:cNvPr id="19" name="TextBox 18"/>
+          <p:cNvSpPr txBox="1"/>
+          <p:nvPr/>
+        </p:nvSpPr>
+        <p:spPr>
+          <a:xfrm>
+            <a:off x="1810512" y="1993392"/>
+            <a:ext cx="1170432" cy="320040"/>
+          </a:xfrm>
+          <a:prstGeom prst="rect">
+            <a:avLst/>
+          </a:prstGeom>
+          <a:noFill/>
+        </p:spPr>
+        <p:txBody>
+          <a:bodyPr wrap="square">
+            <a:spAutoFit/>
+          </a:bodyPr>
+          <a:lstStyle/>
+          <a:p>
+            <a:pPr algn="l"/>
+            <a:r>
+              <a:rPr sz="1600" b="1" i="0">
+                <a:solidFill>
+                  <a:srgbClr val="E07B39"/>
+                </a:solidFill>
+              </a:rPr>
+              <a:t>3</a:t>
+            </a:r>
+          </a:p>
+        </p:txBody>
+      </p:sp>
+      <p:sp>
+        <p:nvSpPr>
+          <p:cNvPr id="20" name="TextBox 19"/>
+          <p:cNvSpPr txBox="1"/>
+          <p:nvPr/>
+        </p:nvSpPr>
+        <p:spPr>
+          <a:xfrm>
+            <a:off x="1810512" y="2313432"/>
+            <a:ext cx="1170432" cy="201168"/>
+          </a:xfrm>
+          <a:prstGeom prst="rect">
+            <a:avLst/>
+          </a:prstGeom>
+          <a:noFill/>
+        </p:spPr>
+        <p:txBody>
+          <a:bodyPr wrap="square">
+            <a:spAutoFit/>
+          </a:bodyPr>
+          <a:lstStyle/>
+          <a:p>
+            <a:pPr algn="l"/>
+            <a:r>
+              <a:rPr sz="600" b="0" i="0">
+                <a:solidFill>
+                  <a:srgbClr val="444444"/>
+                </a:solidFill>
+              </a:rPr>
+              <a:t>FLAGGED</a:t>
+            </a:r>
+          </a:p>
+        </p:txBody>
+      </p:sp>
+      <p:sp>
+        <p:nvSpPr>
+          <p:cNvPr id="21" name="Rectangle 20"/>
+          <p:cNvSpPr/>
+          <p:nvPr/>
+        </p:nvSpPr>
+        <p:spPr>
+          <a:xfrm>
+            <a:off x="3127248" y="1847088"/>
+            <a:ext cx="1316736" cy="713232"/>
+          </a:xfrm>
+          <a:prstGeom prst="rect">
+            <a:avLst/>
+          </a:prstGeom>
+          <a:solidFill>
+            <a:srgbClr val="FFFFFF"/>
+          </a:solidFill>
+          <a:ln w="9525">
+            <a:solidFill>
+              <a:srgbClr val="CCCCCC"/>
+            </a:solidFill>
+          </a:ln>
+        </p:spPr>
+        <p:style>
+          <a:lnRef idx="1">
+            <a:schemeClr val="accent1"/>
+          </a:lnRef>
+          <a:fillRef idx="3">
+            <a:schemeClr val="accent1"/>
+          </a:fillRef>
+          <a:effectRef idx="2">
+            <a:schemeClr val="accent1"/>
+          </a:effectRef>
+          <a:fontRef idx="minor">
+            <a:schemeClr val="lt1"/>
+          </a:fontRef>
+        </p:style>
+        <p:txBody>
+          <a:bodyPr rtlCol="0" anchor="ctr"/>
+          <a:lstStyle/>
+          <a:p>
+            <a:pPr algn="ctr"/>
+          </a:p>
+        </p:txBody>
+      </p:sp>
+      <p:sp>
+        <p:nvSpPr>
+          <p:cNvPr id="22" name="Rectangle 21"/>
+          <p:cNvSpPr/>
+          <p:nvPr/>
+        </p:nvSpPr>
+        <p:spPr>
+          <a:xfrm>
+            <a:off x="3127248" y="1847088"/>
+            <a:ext cx="1316736" cy="91440"/>
+          </a:xfrm>
+          <a:prstGeom prst="rect">
+            <a:avLst/>
+          </a:prstGeom>
+          <a:solidFill>
+            <a:srgbClr val="D62839"/>
+          </a:solidFill>
+          <a:ln>
+            <a:noFill/>
+          </a:ln>
+        </p:spPr>
+        <p:style>
+          <a:lnRef idx="1">
+            <a:schemeClr val="accent1"/>
+          </a:lnRef>
+          <a:fillRef idx="3">
+            <a:schemeClr val="accent1"/>
+          </a:fillRef>
+          <a:effectRef idx="2">
+            <a:schemeClr val="accent1"/>
+          </a:effectRef>
+          <a:fontRef idx="minor">
+            <a:schemeClr val="lt1"/>
+          </a:fontRef>
+        </p:style>
+        <p:txBody>
+          <a:bodyPr rtlCol="0" anchor="ctr"/>
+          <a:lstStyle/>
+          <a:p>
+            <a:pPr algn="ctr"/>
+          </a:p>
+        </p:txBody>
+      </p:sp>
+      <p:sp>
+        <p:nvSpPr>
+          <p:cNvPr id="23" name="TextBox 22"/>
+          <p:cNvSpPr txBox="1"/>
+          <p:nvPr/>
+        </p:nvSpPr>
+        <p:spPr>
+          <a:xfrm>
+            <a:off x="3200400" y="1993392"/>
+            <a:ext cx="1170432" cy="320040"/>
+          </a:xfrm>
+          <a:prstGeom prst="rect">
+            <a:avLst/>
+          </a:prstGeom>
+          <a:noFill/>
+        </p:spPr>
+        <p:txBody>
+          <a:bodyPr wrap="square">
+            <a:spAutoFit/>
+          </a:bodyPr>
+          <a:lstStyle/>
+          <a:p>
+            <a:pPr algn="l"/>
+            <a:r>
+              <a:rPr sz="1600" b="1" i="0">
+                <a:solidFill>
+                  <a:srgbClr val="D62839"/>
+                </a:solidFill>
+              </a:rPr>
+              <a:t>5</a:t>
+            </a:r>
+          </a:p>
+        </p:txBody>
+      </p:sp>
+      <p:sp>
+        <p:nvSpPr>
+          <p:cNvPr id="24" name="TextBox 23"/>
+          <p:cNvSpPr txBox="1"/>
+          <p:nvPr/>
+        </p:nvSpPr>
+        <p:spPr>
+          <a:xfrm>
+            <a:off x="3200400" y="2313432"/>
+            <a:ext cx="1170432" cy="201168"/>
+          </a:xfrm>
+          <a:prstGeom prst="rect">
+            <a:avLst/>
+          </a:prstGeom>
+          <a:noFill/>
+        </p:spPr>
+        <p:txBody>
+          <a:bodyPr wrap="square">
+            <a:spAutoFit/>
+          </a:bodyPr>
+          <a:lstStyle/>
+          <a:p>
+            <a:pPr algn="l"/>
+            <a:r>
+              <a:rPr sz="600" b="0" i="0">
+                <a:solidFill>
+                  <a:srgbClr val="444444"/>
+                </a:solidFill>
+              </a:rPr>
+              <a:t>HELD</a:t>
+            </a:r>
+          </a:p>
+        </p:txBody>
+      </p:sp>
+      <p:sp>
+        <p:nvSpPr>
+          <p:cNvPr id="25" name="Rectangle 24"/>
+          <p:cNvSpPr/>
+          <p:nvPr/>
+        </p:nvSpPr>
+        <p:spPr>
+          <a:xfrm>
+            <a:off x="4517136" y="1847088"/>
+            <a:ext cx="1316736" cy="713232"/>
+          </a:xfrm>
+          <a:prstGeom prst="rect">
+            <a:avLst/>
+          </a:prstGeom>
+          <a:solidFill>
+            <a:srgbClr val="FFFFFF"/>
+          </a:solidFill>
+          <a:ln w="9525">
+            <a:solidFill>
+              <a:srgbClr val="CCCCCC"/>
+            </a:solidFill>
+          </a:ln>
+        </p:spPr>
+        <p:style>
+          <a:lnRef idx="1">
+            <a:schemeClr val="accent1"/>
+          </a:lnRef>
+          <a:fillRef idx="3">
+            <a:schemeClr val="accent1"/>
+          </a:fillRef>
+          <a:effectRef idx="2">
+            <a:schemeClr val="accent1"/>
+          </a:effectRef>
+          <a:fontRef idx="minor">
+            <a:schemeClr val="lt1"/>
+          </a:fontRef>
+        </p:style>
+        <p:txBody>
+          <a:bodyPr rtlCol="0" anchor="ctr"/>
+          <a:lstStyle/>
+          <a:p>
+            <a:pPr algn="ctr"/>
+          </a:p>
+        </p:txBody>
+      </p:sp>
+      <p:sp>
+        <p:nvSpPr>
+          <p:cNvPr id="26" name="Rectangle 25"/>
+          <p:cNvSpPr/>
+          <p:nvPr/>
+        </p:nvSpPr>
+        <p:spPr>
+          <a:xfrm>
+            <a:off x="4517136" y="1847088"/>
+            <a:ext cx="1316736" cy="91440"/>
+          </a:xfrm>
+          <a:prstGeom prst="rect">
+            <a:avLst/>
+          </a:prstGeom>
+          <a:solidFill>
+            <a:srgbClr val="2E7D32"/>
+          </a:solidFill>
+          <a:ln>
+            <a:noFill/>
+          </a:ln>
+        </p:spPr>
+        <p:style>
+          <a:lnRef idx="1">
+            <a:schemeClr val="accent1"/>
+          </a:lnRef>
+          <a:fillRef idx="3">
+            <a:schemeClr val="accent1"/>
+          </a:fillRef>
+          <a:effectRef idx="2">
+            <a:schemeClr val="accent1"/>
+          </a:effectRef>
+          <a:fontRef idx="minor">
+            <a:schemeClr val="lt1"/>
+          </a:fontRef>
+        </p:style>
+        <p:txBody>
+          <a:bodyPr rtlCol="0" anchor="ctr"/>
+          <a:lstStyle/>
+          <a:p>
+            <a:pPr algn="ctr"/>
+          </a:p>
+        </p:txBody>
+      </p:sp>
+      <p:sp>
+        <p:nvSpPr>
+          <p:cNvPr id="27" name="TextBox 26"/>
+          <p:cNvSpPr txBox="1"/>
+          <p:nvPr/>
+        </p:nvSpPr>
+        <p:spPr>
+          <a:xfrm>
+            <a:off x="4590288" y="1993392"/>
+            <a:ext cx="1170432" cy="320040"/>
+          </a:xfrm>
+          <a:prstGeom prst="rect">
+            <a:avLst/>
+          </a:prstGeom>
+          <a:noFill/>
+        </p:spPr>
+        <p:txBody>
+          <a:bodyPr wrap="square">
+            <a:spAutoFit/>
+          </a:bodyPr>
+          <a:lstStyle/>
+          <a:p>
+            <a:pPr algn="l"/>
+            <a:r>
+              <a:rPr sz="1600" b="1" i="0">
+                <a:solidFill>
+                  <a:srgbClr val="2E7D32"/>
+                </a:solidFill>
+              </a:rPr>
+              <a:t>245k€</a:t>
+            </a:r>
+          </a:p>
+        </p:txBody>
+      </p:sp>
+      <p:sp>
+        <p:nvSpPr>
+          <p:cNvPr id="28" name="TextBox 27"/>
+          <p:cNvSpPr txBox="1"/>
+          <p:nvPr/>
+        </p:nvSpPr>
+        <p:spPr>
+          <a:xfrm>
+            <a:off x="4590288" y="2313432"/>
+            <a:ext cx="1170432" cy="201168"/>
+          </a:xfrm>
+          <a:prstGeom prst="rect">
+            <a:avLst/>
+          </a:prstGeom>
+          <a:noFill/>
+        </p:spPr>
+        <p:txBody>
+          <a:bodyPr wrap="square">
+            <a:spAutoFit/>
+          </a:bodyPr>
+          <a:lstStyle/>
+          <a:p>
+            <a:pPr algn="l"/>
+            <a:r>
+              <a:rPr sz="600" b="0" i="0">
+                <a:solidFill>
+                  <a:srgbClr val="444444"/>
+                </a:solidFill>
+              </a:rPr>
+              <a:t>REIMBURSED</a:t>
+            </a:r>
+          </a:p>
+        </p:txBody>
+      </p:sp>
+      <p:sp>
+        <p:nvSpPr>
+          <p:cNvPr id="29" name="Rectangle 28"/>
+          <p:cNvSpPr/>
+          <p:nvPr/>
+        </p:nvSpPr>
+        <p:spPr>
+          <a:xfrm>
+            <a:off x="347472" y="2670048"/>
+            <a:ext cx="5522976" cy="1691640"/>
+          </a:xfrm>
+          <a:prstGeom prst="rect">
+            <a:avLst/>
+          </a:prstGeom>
+          <a:solidFill>
+            <a:srgbClr val="FFFFFF"/>
+          </a:solidFill>
+          <a:ln w="9525">
+            <a:solidFill>
+              <a:srgbClr val="CCCCCC"/>
+            </a:solidFill>
+          </a:ln>
+        </p:spPr>
+        <p:style>
+          <a:lnRef idx="1">
+            <a:schemeClr val="accent1"/>
+          </a:lnRef>
+          <a:fillRef idx="3">
+            <a:schemeClr val="accent1"/>
+          </a:fillRef>
+          <a:effectRef idx="2">
+            <a:schemeClr val="accent1"/>
+          </a:effectRef>
+          <a:fontRef idx="minor">
+            <a:schemeClr val="lt1"/>
+          </a:fontRef>
+        </p:style>
+        <p:txBody>
+          <a:bodyPr rtlCol="0" anchor="ctr"/>
+          <a:lstStyle/>
+          <a:p>
+            <a:pPr algn="ctr"/>
+          </a:p>
+        </p:txBody>
+      </p:sp>
+      <p:sp>
+        <p:nvSpPr>
+          <p:cNvPr id="30" name="TextBox 29"/>
+          <p:cNvSpPr txBox="1"/>
+          <p:nvPr/>
+        </p:nvSpPr>
+        <p:spPr>
+          <a:xfrm>
+            <a:off x="457200" y="2706624"/>
+            <a:ext cx="3657600" cy="256032"/>
+          </a:xfrm>
+          <a:prstGeom prst="rect">
+            <a:avLst/>
+          </a:prstGeom>
+          <a:noFill/>
+        </p:spPr>
+        <p:txBody>
+          <a:bodyPr wrap="square">
+            <a:spAutoFit/>
+          </a:bodyPr>
+          <a:lstStyle/>
+          <a:p>
+            <a:pPr algn="l"/>
+            <a:r>
+              <a:rPr sz="900" b="1" i="0">
+                <a:solidFill>
+                  <a:srgbClr val="1A2440"/>
+                </a:solidFill>
+              </a:rPr>
+              <a:t>Top 10 providers by risk score</a:t>
+            </a:r>
+          </a:p>
+        </p:txBody>
+      </p:sp>
+      <p:sp>
+        <p:nvSpPr>
+          <p:cNvPr id="31" name="Rectangle 30"/>
+          <p:cNvSpPr/>
+          <p:nvPr/>
+        </p:nvSpPr>
+        <p:spPr>
+          <a:xfrm>
+            <a:off x="438912" y="3355847"/>
+            <a:ext cx="402336" cy="1005840"/>
+          </a:xfrm>
+          <a:prstGeom prst="rect">
+            <a:avLst/>
+          </a:prstGeom>
+          <a:solidFill>
+            <a:srgbClr val="D62839"/>
+          </a:solidFill>
+          <a:ln>
+            <a:noFill/>
+          </a:ln>
+        </p:spPr>
+        <p:style>
+          <a:lnRef idx="1">
+            <a:schemeClr val="accent1"/>
+          </a:lnRef>
+          <a:fillRef idx="3">
+            <a:schemeClr val="accent1"/>
+          </a:fillRef>
+          <a:effectRef idx="2">
+            <a:schemeClr val="accent1"/>
+          </a:effectRef>
+          <a:fontRef idx="minor">
+            <a:schemeClr val="lt1"/>
+          </a:fontRef>
+        </p:style>
+        <p:txBody>
+          <a:bodyPr rtlCol="0" anchor="ctr"/>
+          <a:lstStyle/>
+          <a:p>
+            <a:pPr algn="ctr"/>
+          </a:p>
+        </p:txBody>
+      </p:sp>
+      <p:sp>
+        <p:nvSpPr>
+          <p:cNvPr id="32" name="Rectangle 31"/>
+          <p:cNvSpPr/>
+          <p:nvPr/>
+        </p:nvSpPr>
+        <p:spPr>
+          <a:xfrm>
+            <a:off x="969264" y="3396081"/>
+            <a:ext cx="402336" cy="965606"/>
+          </a:xfrm>
+          <a:prstGeom prst="rect">
+            <a:avLst/>
+          </a:prstGeom>
+          <a:solidFill>
+            <a:srgbClr val="D62839"/>
+          </a:solidFill>
+          <a:ln>
+            <a:noFill/>
+          </a:ln>
+        </p:spPr>
+        <p:style>
+          <a:lnRef idx="1">
+            <a:schemeClr val="accent1"/>
+          </a:lnRef>
+          <a:fillRef idx="3">
+            <a:schemeClr val="accent1"/>
+          </a:fillRef>
+          <a:effectRef idx="2">
+            <a:schemeClr val="accent1"/>
+          </a:effectRef>
+          <a:fontRef idx="minor">
+            <a:schemeClr val="lt1"/>
+          </a:fontRef>
+        </p:style>
+        <p:txBody>
+          <a:bodyPr rtlCol="0" anchor="ctr"/>
+          <a:lstStyle/>
+          <a:p>
+            <a:pPr algn="ctr"/>
+          </a:p>
+        </p:txBody>
+      </p:sp>
+      <p:sp>
+        <p:nvSpPr>
+          <p:cNvPr id="33" name="Rectangle 32"/>
+          <p:cNvSpPr/>
+          <p:nvPr/>
+        </p:nvSpPr>
+        <p:spPr>
+          <a:xfrm>
+            <a:off x="1499616" y="3516782"/>
+            <a:ext cx="402336" cy="844905"/>
+          </a:xfrm>
+          <a:prstGeom prst="rect">
+            <a:avLst/>
+          </a:prstGeom>
+          <a:solidFill>
+            <a:srgbClr val="D62839"/>
+          </a:solidFill>
+          <a:ln>
+            <a:noFill/>
+          </a:ln>
+        </p:spPr>
+        <p:style>
+          <a:lnRef idx="1">
+            <a:schemeClr val="accent1"/>
+          </a:lnRef>
+          <a:fillRef idx="3">
+            <a:schemeClr val="accent1"/>
+          </a:fillRef>
+          <a:effectRef idx="2">
+            <a:schemeClr val="accent1"/>
+          </a:effectRef>
+          <a:fontRef idx="minor">
+            <a:schemeClr val="lt1"/>
+          </a:fontRef>
+        </p:style>
+        <p:txBody>
+          <a:bodyPr rtlCol="0" anchor="ctr"/>
+          <a:lstStyle/>
+          <a:p>
+            <a:pPr algn="ctr"/>
+          </a:p>
+        </p:txBody>
+      </p:sp>
+      <p:sp>
+        <p:nvSpPr>
+          <p:cNvPr id="34" name="Rectangle 33"/>
+          <p:cNvSpPr/>
+          <p:nvPr/>
+        </p:nvSpPr>
+        <p:spPr>
+          <a:xfrm>
+            <a:off x="2029967" y="3577132"/>
+            <a:ext cx="402336" cy="784555"/>
+          </a:xfrm>
+          <a:prstGeom prst="rect">
+            <a:avLst/>
+          </a:prstGeom>
+          <a:solidFill>
+            <a:srgbClr val="D62839"/>
+          </a:solidFill>
+          <a:ln>
+            <a:noFill/>
+          </a:ln>
+        </p:spPr>
+        <p:style>
+          <a:lnRef idx="1">
+            <a:schemeClr val="accent1"/>
+          </a:lnRef>
+          <a:fillRef idx="3">
+            <a:schemeClr val="accent1"/>
+          </a:fillRef>
+          <a:effectRef idx="2">
+            <a:schemeClr val="accent1"/>
+          </a:effectRef>
+          <a:fontRef idx="minor">
+            <a:schemeClr val="lt1"/>
+          </a:fontRef>
+        </p:style>
+        <p:txBody>
+          <a:bodyPr rtlCol="0" anchor="ctr"/>
+          <a:lstStyle/>
+          <a:p>
+            <a:pPr algn="ctr"/>
+          </a:p>
+        </p:txBody>
+      </p:sp>
+      <p:sp>
+        <p:nvSpPr>
+          <p:cNvPr id="35" name="Rectangle 34"/>
+          <p:cNvSpPr/>
+          <p:nvPr/>
+        </p:nvSpPr>
+        <p:spPr>
+          <a:xfrm>
+            <a:off x="2560320" y="3617366"/>
+            <a:ext cx="402336" cy="744321"/>
+          </a:xfrm>
+          <a:prstGeom prst="rect">
+            <a:avLst/>
+          </a:prstGeom>
+          <a:solidFill>
+            <a:srgbClr val="D62839"/>
+          </a:solidFill>
+          <a:ln>
+            <a:noFill/>
+          </a:ln>
+        </p:spPr>
+        <p:style>
+          <a:lnRef idx="1">
+            <a:schemeClr val="accent1"/>
+          </a:lnRef>
+          <a:fillRef idx="3">
+            <a:schemeClr val="accent1"/>
+          </a:fillRef>
+          <a:effectRef idx="2">
+            <a:schemeClr val="accent1"/>
+          </a:effectRef>
+          <a:fontRef idx="minor">
+            <a:schemeClr val="lt1"/>
+          </a:fontRef>
+        </p:style>
+        <p:txBody>
+          <a:bodyPr rtlCol="0" anchor="ctr"/>
+          <a:lstStyle/>
+          <a:p>
+            <a:pPr algn="ctr"/>
+          </a:p>
+        </p:txBody>
+      </p:sp>
+      <p:sp>
+        <p:nvSpPr>
+          <p:cNvPr id="36" name="Rectangle 35"/>
+          <p:cNvSpPr/>
+          <p:nvPr/>
+        </p:nvSpPr>
+        <p:spPr>
+          <a:xfrm>
+            <a:off x="3090672" y="3818534"/>
+            <a:ext cx="402336" cy="543153"/>
+          </a:xfrm>
+          <a:prstGeom prst="rect">
+            <a:avLst/>
+          </a:prstGeom>
+          <a:solidFill>
+            <a:srgbClr val="E07B39"/>
+          </a:solidFill>
+          <a:ln>
+            <a:noFill/>
+          </a:ln>
+        </p:spPr>
+        <p:style>
+          <a:lnRef idx="1">
+            <a:schemeClr val="accent1"/>
+          </a:lnRef>
+          <a:fillRef idx="3">
+            <a:schemeClr val="accent1"/>
+          </a:fillRef>
+          <a:effectRef idx="2">
+            <a:schemeClr val="accent1"/>
+          </a:effectRef>
+          <a:fontRef idx="minor">
+            <a:schemeClr val="lt1"/>
+          </a:fontRef>
+        </p:style>
+        <p:txBody>
+          <a:bodyPr rtlCol="0" anchor="ctr"/>
+          <a:lstStyle/>
+          <a:p>
+            <a:pPr algn="ctr"/>
+          </a:p>
+        </p:txBody>
+      </p:sp>
+      <p:sp>
+        <p:nvSpPr>
+          <p:cNvPr id="37" name="Rectangle 36"/>
+          <p:cNvSpPr/>
+          <p:nvPr/>
+        </p:nvSpPr>
+        <p:spPr>
+          <a:xfrm>
+            <a:off x="3621023" y="3959351"/>
+            <a:ext cx="402336" cy="402336"/>
+          </a:xfrm>
+          <a:prstGeom prst="rect">
+            <a:avLst/>
+          </a:prstGeom>
+          <a:solidFill>
+            <a:srgbClr val="E07B39"/>
+          </a:solidFill>
+          <a:ln>
+            <a:noFill/>
+          </a:ln>
+        </p:spPr>
+        <p:style>
+          <a:lnRef idx="1">
+            <a:schemeClr val="accent1"/>
+          </a:lnRef>
+          <a:fillRef idx="3">
+            <a:schemeClr val="accent1"/>
+          </a:fillRef>
+          <a:effectRef idx="2">
+            <a:schemeClr val="accent1"/>
+          </a:effectRef>
+          <a:fontRef idx="minor">
+            <a:schemeClr val="lt1"/>
+          </a:fontRef>
+        </p:style>
+        <p:txBody>
+          <a:bodyPr rtlCol="0" anchor="ctr"/>
+          <a:lstStyle/>
+          <a:p>
+            <a:pPr algn="ctr"/>
+          </a:p>
+        </p:txBody>
+      </p:sp>
+      <p:sp>
+        <p:nvSpPr>
+          <p:cNvPr id="38" name="Rectangle 37"/>
+          <p:cNvSpPr/>
+          <p:nvPr/>
+        </p:nvSpPr>
+        <p:spPr>
+          <a:xfrm>
+            <a:off x="4151375" y="4210812"/>
+            <a:ext cx="402336" cy="150876"/>
+          </a:xfrm>
+          <a:prstGeom prst="rect">
+            <a:avLst/>
+          </a:prstGeom>
+          <a:solidFill>
+            <a:srgbClr val="E07B39"/>
+          </a:solidFill>
+          <a:ln>
+            <a:noFill/>
+          </a:ln>
+        </p:spPr>
+        <p:style>
+          <a:lnRef idx="1">
+            <a:schemeClr val="accent1"/>
+          </a:lnRef>
+          <a:fillRef idx="3">
+            <a:schemeClr val="accent1"/>
+          </a:fillRef>
+          <a:effectRef idx="2">
+            <a:schemeClr val="accent1"/>
+          </a:effectRef>
+          <a:fontRef idx="minor">
+            <a:schemeClr val="lt1"/>
+          </a:fontRef>
+        </p:style>
+        <p:txBody>
+          <a:bodyPr rtlCol="0" anchor="ctr"/>
+          <a:lstStyle/>
+          <a:p>
+            <a:pPr algn="ctr"/>
+          </a:p>
+        </p:txBody>
+      </p:sp>
+      <p:sp>
+        <p:nvSpPr>
+          <p:cNvPr id="39" name="Rectangle 38"/>
+          <p:cNvSpPr/>
+          <p:nvPr/>
+        </p:nvSpPr>
+        <p:spPr>
+          <a:xfrm>
+            <a:off x="4681727" y="4361688"/>
+            <a:ext cx="402336" cy="36576"/>
+          </a:xfrm>
+          <a:prstGeom prst="rect">
+            <a:avLst/>
+          </a:prstGeom>
+          <a:solidFill>
+            <a:srgbClr val="2E7D32"/>
+          </a:solidFill>
+          <a:ln>
+            <a:noFill/>
+          </a:ln>
+        </p:spPr>
+        <p:style>
+          <a:lnRef idx="1">
+            <a:schemeClr val="accent1"/>
+          </a:lnRef>
+          <a:fillRef idx="3">
+            <a:schemeClr val="accent1"/>
+          </a:fillRef>
+          <a:effectRef idx="2">
+            <a:schemeClr val="accent1"/>
+          </a:effectRef>
+          <a:fontRef idx="minor">
+            <a:schemeClr val="lt1"/>
+          </a:fontRef>
+        </p:style>
+        <p:txBody>
+          <a:bodyPr rtlCol="0" anchor="ctr"/>
+          <a:lstStyle/>
+          <a:p>
+            <a:pPr algn="ctr"/>
+          </a:p>
+        </p:txBody>
+      </p:sp>
+      <p:sp>
+        <p:nvSpPr>
+          <p:cNvPr id="40" name="Rectangle 39"/>
+          <p:cNvSpPr/>
+          <p:nvPr/>
+        </p:nvSpPr>
+        <p:spPr>
+          <a:xfrm>
+            <a:off x="5212079" y="4361688"/>
+            <a:ext cx="402336" cy="36576"/>
+          </a:xfrm>
+          <a:prstGeom prst="rect">
+            <a:avLst/>
+          </a:prstGeom>
+          <a:solidFill>
+            <a:srgbClr val="2E7D32"/>
+          </a:solidFill>
+          <a:ln>
+            <a:noFill/>
+          </a:ln>
+        </p:spPr>
+        <p:style>
+          <a:lnRef idx="1">
+            <a:schemeClr val="accent1"/>
+          </a:lnRef>
+          <a:fillRef idx="3">
+            <a:schemeClr val="accent1"/>
+          </a:fillRef>
+          <a:effectRef idx="2">
+            <a:schemeClr val="accent1"/>
+          </a:effectRef>
+          <a:fontRef idx="minor">
+            <a:schemeClr val="lt1"/>
+          </a:fontRef>
+        </p:style>
+        <p:txBody>
+          <a:bodyPr rtlCol="0" anchor="ctr"/>
+          <a:lstStyle/>
+          <a:p>
+            <a:pPr algn="ctr"/>
+          </a:p>
+        </p:txBody>
+      </p:sp>
+      <p:sp>
+        <p:nvSpPr>
+          <p:cNvPr id="41" name="Rectangle 40"/>
+          <p:cNvSpPr/>
+          <p:nvPr/>
+        </p:nvSpPr>
+        <p:spPr>
+          <a:xfrm>
+            <a:off x="347472" y="4434840"/>
+            <a:ext cx="5522976" cy="384048"/>
+          </a:xfrm>
+          <a:prstGeom prst="rect">
+            <a:avLst/>
+          </a:prstGeom>
+          <a:solidFill>
+            <a:srgbClr val="F5F5F5"/>
+          </a:solidFill>
+          <a:ln>
+            <a:noFill/>
+          </a:ln>
+        </p:spPr>
+        <p:style>
+          <a:lnRef idx="1">
+            <a:schemeClr val="accent1"/>
+          </a:lnRef>
+          <a:fillRef idx="3">
+            <a:schemeClr val="accent1"/>
+          </a:fillRef>
+          <a:effectRef idx="2">
+            <a:schemeClr val="accent1"/>
+          </a:effectRef>
+          <a:fontRef idx="minor">
+            <a:schemeClr val="lt1"/>
+          </a:fontRef>
+        </p:style>
+        <p:txBody>
+          <a:bodyPr rtlCol="0" anchor="ctr"/>
+          <a:lstStyle/>
+          <a:p>
+            <a:pPr algn="ctr"/>
+          </a:p>
+        </p:txBody>
+      </p:sp>
+      <p:sp>
+        <p:nvSpPr>
+          <p:cNvPr id="42" name="TextBox 41"/>
+          <p:cNvSpPr txBox="1"/>
+          <p:nvPr/>
+        </p:nvSpPr>
+        <p:spPr>
+          <a:xfrm>
+            <a:off x="457200" y="4480560"/>
+            <a:ext cx="5212080" cy="256032"/>
+          </a:xfrm>
+          <a:prstGeom prst="rect">
+            <a:avLst/>
+          </a:prstGeom>
+          <a:noFill/>
+        </p:spPr>
+        <p:txBody>
+          <a:bodyPr wrap="square">
+            <a:spAutoFit/>
+          </a:bodyPr>
+          <a:lstStyle/>
+          <a:p>
+            <a:pPr algn="l"/>
+            <a:r>
+              <a:rPr sz="800" b="0" i="1">
+                <a:solidFill>
+                  <a:srgbClr val="444444"/>
+                </a:solidFill>
+              </a:rPr>
+              <a:t>Recent activity:  No review decisions yet</a:t>
+            </a:r>
+          </a:p>
+        </p:txBody>
+      </p:sp>
+      <p:sp>
+        <p:nvSpPr>
+          <p:cNvPr id="43" name="Rectangle 42"/>
+          <p:cNvSpPr/>
+          <p:nvPr/>
+        </p:nvSpPr>
+        <p:spPr>
+          <a:xfrm>
+            <a:off x="347472" y="4864608"/>
+            <a:ext cx="5522976" cy="411480"/>
+          </a:xfrm>
+          <a:prstGeom prst="rect">
+            <a:avLst/>
+          </a:prstGeom>
+          <a:solidFill>
+            <a:srgbClr val="FFEBEB"/>
+          </a:solidFill>
+          <a:ln>
+            <a:noFill/>
+          </a:ln>
+        </p:spPr>
+        <p:style>
+          <a:lnRef idx="1">
+            <a:schemeClr val="accent1"/>
+          </a:lnRef>
+          <a:fillRef idx="3">
+            <a:schemeClr val="accent1"/>
+          </a:fillRef>
+          <a:effectRef idx="2">
+            <a:schemeClr val="accent1"/>
+          </a:effectRef>
+          <a:fontRef idx="minor">
+            <a:schemeClr val="lt1"/>
+          </a:fontRef>
+        </p:style>
+        <p:txBody>
+          <a:bodyPr rtlCol="0" anchor="ctr"/>
+          <a:lstStyle/>
+          <a:p>
+            <a:pPr algn="ctr"/>
+          </a:p>
+        </p:txBody>
+      </p:sp>
+      <p:sp>
+        <p:nvSpPr>
+          <p:cNvPr id="44" name="TextBox 43"/>
+          <p:cNvSpPr txBox="1"/>
+          <p:nvPr/>
+        </p:nvSpPr>
+        <p:spPr>
+          <a:xfrm>
+            <a:off x="457200" y="4910328"/>
+            <a:ext cx="5212080" cy="274320"/>
+          </a:xfrm>
+          <a:prstGeom prst="rect">
+            <a:avLst/>
+          </a:prstGeom>
+          <a:noFill/>
+        </p:spPr>
+        <p:txBody>
+          <a:bodyPr wrap="square">
+            <a:spAutoFit/>
+          </a:bodyPr>
+          <a:lstStyle/>
+          <a:p>
+            <a:pPr algn="l"/>
+            <a:r>
+              <a:rPr sz="900" b="1" i="0">
+                <a:solidFill>
+                  <a:srgbClr val="D62839"/>
+                </a:solidFill>
+              </a:rPr>
+              <a:t>⚠  5 providers are currently held pending review</a:t>
+            </a:r>
+          </a:p>
+        </p:txBody>
+      </p:sp>
+      <p:sp>
+        <p:nvSpPr>
+          <p:cNvPr id="45" name="Rectangle 44"/>
+          <p:cNvSpPr/>
+          <p:nvPr/>
+        </p:nvSpPr>
+        <p:spPr>
+          <a:xfrm>
+            <a:off x="6172200" y="1417320"/>
+            <a:ext cx="5715000" cy="4892040"/>
+          </a:xfrm>
+          <a:prstGeom prst="rect">
+            <a:avLst/>
+          </a:prstGeom>
+          <a:solidFill>
+            <a:srgbClr val="F5F5F5"/>
+          </a:solidFill>
+          <a:ln w="9525">
+            <a:solidFill>
+              <a:srgbClr val="CCCCCC"/>
+            </a:solidFill>
+          </a:ln>
+        </p:spPr>
+        <p:style>
+          <a:lnRef idx="1">
+            <a:schemeClr val="accent1"/>
+          </a:lnRef>
+          <a:fillRef idx="3">
+            <a:schemeClr val="accent1"/>
+          </a:fillRef>
+          <a:effectRef idx="2">
+            <a:schemeClr val="accent1"/>
+          </a:effectRef>
+          <a:fontRef idx="minor">
+            <a:schemeClr val="lt1"/>
+          </a:fontRef>
+        </p:style>
+        <p:txBody>
+          <a:bodyPr rtlCol="0" anchor="ctr"/>
+          <a:lstStyle/>
+          <a:p>
+            <a:pPr algn="ctr"/>
+          </a:p>
+        </p:txBody>
+      </p:sp>
+      <p:sp>
+        <p:nvSpPr>
+          <p:cNvPr id="46" name="Rectangle 45"/>
+          <p:cNvSpPr/>
+          <p:nvPr/>
+        </p:nvSpPr>
+        <p:spPr>
+          <a:xfrm>
+            <a:off x="6172200" y="1417320"/>
+            <a:ext cx="5715000" cy="347472"/>
+          </a:xfrm>
+          <a:prstGeom prst="rect">
+            <a:avLst/>
+          </a:prstGeom>
+          <a:solidFill>
+            <a:srgbClr val="1A2440"/>
+          </a:solidFill>
+          <a:ln>
+            <a:noFill/>
+          </a:ln>
+        </p:spPr>
+        <p:style>
+          <a:lnRef idx="1">
+            <a:schemeClr val="accent1"/>
+          </a:lnRef>
+          <a:fillRef idx="3">
+            <a:schemeClr val="accent1"/>
+          </a:fillRef>
+          <a:effectRef idx="2">
+            <a:schemeClr val="accent1"/>
+          </a:effectRef>
+          <a:fontRef idx="minor">
+            <a:schemeClr val="lt1"/>
+          </a:fontRef>
+        </p:style>
+        <p:txBody>
+          <a:bodyPr rtlCol="0" anchor="ctr"/>
+          <a:lstStyle/>
+          <a:p>
+            <a:pPr algn="ctr"/>
+          </a:p>
+        </p:txBody>
+      </p:sp>
+      <p:sp>
+        <p:nvSpPr>
+          <p:cNvPr id="47" name="TextBox 46"/>
+          <p:cNvSpPr txBox="1"/>
+          <p:nvPr/>
+        </p:nvSpPr>
+        <p:spPr>
+          <a:xfrm>
+            <a:off x="6309360" y="1444752"/>
+            <a:ext cx="5212080" cy="256032"/>
+          </a:xfrm>
+          <a:prstGeom prst="rect">
+            <a:avLst/>
+          </a:prstGeom>
+          <a:noFill/>
+        </p:spPr>
+        <p:txBody>
+          <a:bodyPr wrap="square">
+            <a:spAutoFit/>
+          </a:bodyPr>
+          <a:lstStyle/>
+          <a:p>
+            <a:pPr algn="l"/>
+            <a:r>
+              <a:rPr sz="900" b="1" i="0">
+                <a:solidFill>
+                  <a:srgbClr val="FFFFFF"/>
+                </a:solidFill>
+              </a:rPr>
+              <a:t>Providers  —  12 registered providers</a:t>
+            </a:r>
+          </a:p>
+        </p:txBody>
+      </p:sp>
+      <p:sp>
+        <p:nvSpPr>
+          <p:cNvPr id="48" name="Rectangle 47"/>
+          <p:cNvSpPr/>
+          <p:nvPr/>
+        </p:nvSpPr>
+        <p:spPr>
+          <a:xfrm>
+            <a:off x="8961120" y="1444752"/>
+            <a:ext cx="1645920" cy="256032"/>
+          </a:xfrm>
+          <a:prstGeom prst="rect">
+            <a:avLst/>
+          </a:prstGeom>
+          <a:solidFill>
+            <a:srgbClr val="1A2440"/>
+          </a:solidFill>
+          <a:ln>
+            <a:noFill/>
+          </a:ln>
+        </p:spPr>
+        <p:style>
+          <a:lnRef idx="1">
+            <a:schemeClr val="accent1"/>
+          </a:lnRef>
+          <a:fillRef idx="3">
+            <a:schemeClr val="accent1"/>
+          </a:fillRef>
+          <a:effectRef idx="2">
+            <a:schemeClr val="accent1"/>
+          </a:effectRef>
+          <a:fontRef idx="minor">
+            <a:schemeClr val="lt1"/>
+          </a:fontRef>
+        </p:style>
+        <p:txBody>
+          <a:bodyPr rtlCol="0" anchor="ctr"/>
+          <a:lstStyle/>
+          <a:p>
+            <a:pPr algn="ctr"/>
+          </a:p>
+        </p:txBody>
+      </p:sp>
+      <p:sp>
+        <p:nvSpPr>
+          <p:cNvPr id="49" name="TextBox 48"/>
+          <p:cNvSpPr txBox="1"/>
+          <p:nvPr/>
+        </p:nvSpPr>
+        <p:spPr>
+          <a:xfrm>
+            <a:off x="8979408" y="1463040"/>
+            <a:ext cx="1609344" cy="219456"/>
+          </a:xfrm>
+          <a:prstGeom prst="rect">
+            <a:avLst/>
+          </a:prstGeom>
+          <a:noFill/>
+        </p:spPr>
+        <p:txBody>
+          <a:bodyPr wrap="square">
+            <a:spAutoFit/>
+          </a:bodyPr>
+          <a:lstStyle/>
+          <a:p>
+            <a:pPr algn="ctr"/>
+            <a:r>
+              <a:rPr sz="700" b="1" i="0">
+                <a:solidFill>
+                  <a:srgbClr val="FFFFFF"/>
+                </a:solidFill>
+              </a:rPr>
+              <a:t>▶  Run detection</a:t>
+            </a:r>
+          </a:p>
+        </p:txBody>
+      </p:sp>
+      <p:sp>
+        <p:nvSpPr>
+          <p:cNvPr id="50" name="Rectangle 49"/>
+          <p:cNvSpPr/>
+          <p:nvPr/>
+        </p:nvSpPr>
+        <p:spPr>
+          <a:xfrm>
+            <a:off x="6245352" y="1847088"/>
+            <a:ext cx="5568696" cy="274320"/>
+          </a:xfrm>
+          <a:prstGeom prst="rect">
+            <a:avLst/>
+          </a:prstGeom>
+          <a:solidFill>
+            <a:srgbClr val="1A2440"/>
+          </a:solidFill>
+          <a:ln>
+            <a:noFill/>
+          </a:ln>
+        </p:spPr>
+        <p:style>
+          <a:lnRef idx="1">
+            <a:schemeClr val="accent1"/>
+          </a:lnRef>
+          <a:fillRef idx="3">
+            <a:schemeClr val="accent1"/>
+          </a:fillRef>
+          <a:effectRef idx="2">
+            <a:schemeClr val="accent1"/>
+          </a:effectRef>
+          <a:fontRef idx="minor">
+            <a:schemeClr val="lt1"/>
+          </a:fontRef>
+        </p:style>
+        <p:txBody>
+          <a:bodyPr rtlCol="0" anchor="ctr"/>
+          <a:lstStyle/>
+          <a:p>
+            <a:pPr algn="ctr"/>
+          </a:p>
+        </p:txBody>
+      </p:sp>
+      <p:sp>
+        <p:nvSpPr>
+          <p:cNvPr id="51" name="TextBox 50"/>
+          <p:cNvSpPr txBox="1"/>
+          <p:nvPr/>
+        </p:nvSpPr>
+        <p:spPr>
+          <a:xfrm>
+            <a:off x="6309360" y="1874519"/>
+            <a:ext cx="1097280" cy="201168"/>
+          </a:xfrm>
+          <a:prstGeom prst="rect">
+            <a:avLst/>
+          </a:prstGeom>
+          <a:noFill/>
+        </p:spPr>
+        <p:txBody>
+          <a:bodyPr wrap="square">
+            <a:spAutoFit/>
+          </a:bodyPr>
+          <a:lstStyle/>
+          <a:p>
+            <a:pPr algn="l"/>
+            <a:r>
+              <a:rPr sz="700" b="1" i="0">
+                <a:solidFill>
+                  <a:srgbClr val="FFFFFF"/>
+                </a:solidFill>
+              </a:rPr>
+              <a:t>PROVIDER</a:t>
+            </a:r>
+          </a:p>
+        </p:txBody>
+      </p:sp>
+      <p:sp>
+        <p:nvSpPr>
+          <p:cNvPr id="52" name="TextBox 51"/>
+          <p:cNvSpPr txBox="1"/>
+          <p:nvPr/>
+        </p:nvSpPr>
+        <p:spPr>
+          <a:xfrm>
+            <a:off x="8686800" y="1874519"/>
+            <a:ext cx="1097280" cy="201168"/>
+          </a:xfrm>
+          <a:prstGeom prst="rect">
+            <a:avLst/>
+          </a:prstGeom>
+          <a:noFill/>
+        </p:spPr>
+        <p:txBody>
+          <a:bodyPr wrap="square">
+            <a:spAutoFit/>
+          </a:bodyPr>
+          <a:lstStyle/>
+          <a:p>
+            <a:pPr algn="l"/>
+            <a:r>
+              <a:rPr sz="700" b="1" i="0">
+                <a:solidFill>
+                  <a:srgbClr val="FFFFFF"/>
+                </a:solidFill>
+              </a:rPr>
+              <a:t>SCORE</a:t>
+            </a:r>
+          </a:p>
+        </p:txBody>
+      </p:sp>
+      <p:sp>
+        <p:nvSpPr>
+          <p:cNvPr id="53" name="TextBox 52"/>
+          <p:cNvSpPr txBox="1"/>
+          <p:nvPr/>
+        </p:nvSpPr>
+        <p:spPr>
+          <a:xfrm>
+            <a:off x="9601200" y="1874519"/>
+            <a:ext cx="1097280" cy="201168"/>
+          </a:xfrm>
+          <a:prstGeom prst="rect">
+            <a:avLst/>
+          </a:prstGeom>
+          <a:noFill/>
+        </p:spPr>
+        <p:txBody>
+          <a:bodyPr wrap="square">
+            <a:spAutoFit/>
+          </a:bodyPr>
+          <a:lstStyle/>
+          <a:p>
+            <a:pPr algn="l"/>
+            <a:r>
+              <a:rPr sz="700" b="1" i="0">
+                <a:solidFill>
+                  <a:srgbClr val="FFFFFF"/>
+                </a:solidFill>
+              </a:rPr>
+              <a:t>STATUS</a:t>
+            </a:r>
+          </a:p>
+        </p:txBody>
+      </p:sp>
+      <p:sp>
+        <p:nvSpPr>
+          <p:cNvPr id="54" name="Rectangle 53"/>
+          <p:cNvSpPr/>
+          <p:nvPr/>
+        </p:nvSpPr>
+        <p:spPr>
+          <a:xfrm>
+            <a:off x="6245352" y="2148840"/>
+            <a:ext cx="5568696" cy="292608"/>
+          </a:xfrm>
+          <a:prstGeom prst="rect">
+            <a:avLst/>
+          </a:prstGeom>
+          <a:solidFill>
+            <a:srgbClr val="FFEDED"/>
+          </a:solidFill>
+          <a:ln>
+            <a:noFill/>
+          </a:ln>
+        </p:spPr>
+        <p:style>
+          <a:lnRef idx="1">
+            <a:schemeClr val="accent1"/>
+          </a:lnRef>
+          <a:fillRef idx="3">
+            <a:schemeClr val="accent1"/>
+          </a:fillRef>
+          <a:effectRef idx="2">
+            <a:schemeClr val="accent1"/>
+          </a:effectRef>
+          <a:fontRef idx="minor">
+            <a:schemeClr val="lt1"/>
+          </a:fontRef>
+        </p:style>
+        <p:txBody>
+          <a:bodyPr rtlCol="0" anchor="ctr"/>
+          <a:lstStyle/>
+          <a:p>
+            <a:pPr algn="ctr"/>
+          </a:p>
+        </p:txBody>
+      </p:sp>
+      <p:sp>
+        <p:nvSpPr>
+          <p:cNvPr id="55" name="TextBox 54"/>
+          <p:cNvSpPr txBox="1"/>
+          <p:nvPr/>
+        </p:nvSpPr>
+        <p:spPr>
+          <a:xfrm>
+            <a:off x="6309360" y="2176272"/>
+            <a:ext cx="2286000" cy="219456"/>
+          </a:xfrm>
+          <a:prstGeom prst="rect">
+            <a:avLst/>
+          </a:prstGeom>
+          <a:noFill/>
+        </p:spPr>
+        <p:txBody>
+          <a:bodyPr wrap="square">
+            <a:spAutoFit/>
+          </a:bodyPr>
+          <a:lstStyle/>
+          <a:p>
+            <a:pPr algn="l"/>
+            <a:r>
+              <a:rPr sz="800" b="0" i="0">
+                <a:solidFill>
+                  <a:srgbClr val="444444"/>
+                </a:solidFill>
+              </a:rPr>
+              <a:t>Queen optics</a:t>
+            </a:r>
+          </a:p>
+        </p:txBody>
+      </p:sp>
+      <p:sp>
+        <p:nvSpPr>
+          <p:cNvPr id="56" name="TextBox 55"/>
+          <p:cNvSpPr txBox="1"/>
+          <p:nvPr/>
+        </p:nvSpPr>
+        <p:spPr>
+          <a:xfrm>
+            <a:off x="8686800" y="2176272"/>
+            <a:ext cx="822960" cy="219456"/>
+          </a:xfrm>
+          <a:prstGeom prst="rect">
+            <a:avLst/>
+          </a:prstGeom>
+          <a:noFill/>
+        </p:spPr>
+        <p:txBody>
+          <a:bodyPr wrap="square">
+            <a:spAutoFit/>
+          </a:bodyPr>
+          <a:lstStyle/>
+          <a:p>
+            <a:pPr algn="l"/>
+            <a:r>
+              <a:rPr sz="900" b="1" i="0">
+                <a:solidFill>
+                  <a:srgbClr val="D62839"/>
+                </a:solidFill>
+              </a:rPr>
+              <a:t>99/100</a:t>
+            </a:r>
+          </a:p>
+        </p:txBody>
+      </p:sp>
+      <p:sp>
+        <p:nvSpPr>
+          <p:cNvPr id="57" name="TextBox 56"/>
+          <p:cNvSpPr txBox="1"/>
+          <p:nvPr/>
+        </p:nvSpPr>
+        <p:spPr>
+          <a:xfrm>
+            <a:off x="9601200" y="2176272"/>
+            <a:ext cx="1920240" cy="219456"/>
+          </a:xfrm>
+          <a:prstGeom prst="rect">
+            <a:avLst/>
+          </a:prstGeom>
+          <a:noFill/>
+        </p:spPr>
+        <p:txBody>
+          <a:bodyPr wrap="square">
+            <a:spAutoFit/>
+          </a:bodyPr>
+          <a:lstStyle/>
+          <a:p>
+            <a:pPr algn="l"/>
+            <a:r>
+              <a:rPr sz="700" b="1" i="0">
+                <a:solidFill>
+                  <a:srgbClr val="D62839"/>
+                </a:solidFill>
+              </a:rPr>
+              <a:t>Auto-held</a:t>
+            </a:r>
+          </a:p>
+        </p:txBody>
+      </p:sp>
+      <p:sp>
+        <p:nvSpPr>
+          <p:cNvPr id="58" name="Rectangle 57"/>
+          <p:cNvSpPr/>
+          <p:nvPr/>
+        </p:nvSpPr>
+        <p:spPr>
+          <a:xfrm>
+            <a:off x="6245352" y="2459736"/>
+            <a:ext cx="5568696" cy="292608"/>
+          </a:xfrm>
+          <a:prstGeom prst="rect">
+            <a:avLst/>
+          </a:prstGeom>
+          <a:solidFill>
+            <a:srgbClr val="FFEDED"/>
+          </a:solidFill>
+          <a:ln>
+            <a:noFill/>
+          </a:ln>
+        </p:spPr>
+        <p:style>
+          <a:lnRef idx="1">
+            <a:schemeClr val="accent1"/>
+          </a:lnRef>
+          <a:fillRef idx="3">
+            <a:schemeClr val="accent1"/>
+          </a:fillRef>
+          <a:effectRef idx="2">
+            <a:schemeClr val="accent1"/>
+          </a:effectRef>
+          <a:fontRef idx="minor">
+            <a:schemeClr val="lt1"/>
+          </a:fontRef>
+        </p:style>
+        <p:txBody>
+          <a:bodyPr rtlCol="0" anchor="ctr"/>
+          <a:lstStyle/>
+          <a:p>
+            <a:pPr algn="ctr"/>
+          </a:p>
+        </p:txBody>
+      </p:sp>
+      <p:sp>
+        <p:nvSpPr>
+          <p:cNvPr id="59" name="TextBox 58"/>
+          <p:cNvSpPr txBox="1"/>
+          <p:nvPr/>
+        </p:nvSpPr>
+        <p:spPr>
+          <a:xfrm>
+            <a:off x="6309360" y="2487168"/>
+            <a:ext cx="2286000" cy="219456"/>
+          </a:xfrm>
+          <a:prstGeom prst="rect">
+            <a:avLst/>
+          </a:prstGeom>
+          <a:noFill/>
+        </p:spPr>
+        <p:txBody>
+          <a:bodyPr wrap="square">
+            <a:spAutoFit/>
+          </a:bodyPr>
+          <a:lstStyle/>
+          <a:p>
+            <a:pPr algn="l"/>
+            <a:r>
+              <a:rPr sz="800" b="0" i="0">
+                <a:solidFill>
+                  <a:srgbClr val="444444"/>
+                </a:solidFill>
+              </a:rPr>
+              <a:t>Mike lunettes</a:t>
+            </a:r>
+          </a:p>
+        </p:txBody>
+      </p:sp>
+      <p:sp>
+        <p:nvSpPr>
+          <p:cNvPr id="60" name="TextBox 59"/>
+          <p:cNvSpPr txBox="1"/>
+          <p:nvPr/>
+        </p:nvSpPr>
+        <p:spPr>
+          <a:xfrm>
+            <a:off x="8686800" y="2487168"/>
+            <a:ext cx="822960" cy="219456"/>
+          </a:xfrm>
+          <a:prstGeom prst="rect">
+            <a:avLst/>
+          </a:prstGeom>
+          <a:noFill/>
+        </p:spPr>
+        <p:txBody>
+          <a:bodyPr wrap="square">
+            <a:spAutoFit/>
+          </a:bodyPr>
+          <a:lstStyle/>
+          <a:p>
+            <a:pPr algn="l"/>
+            <a:r>
+              <a:rPr sz="900" b="1" i="0">
+                <a:solidFill>
+                  <a:srgbClr val="D62839"/>
+                </a:solidFill>
+              </a:rPr>
+              <a:t>96/100</a:t>
+            </a:r>
+          </a:p>
+        </p:txBody>
+      </p:sp>
+      <p:sp>
+        <p:nvSpPr>
+          <p:cNvPr id="61" name="TextBox 60"/>
+          <p:cNvSpPr txBox="1"/>
+          <p:nvPr/>
+        </p:nvSpPr>
+        <p:spPr>
+          <a:xfrm>
+            <a:off x="9601200" y="2487168"/>
+            <a:ext cx="1920240" cy="219456"/>
+          </a:xfrm>
+          <a:prstGeom prst="rect">
+            <a:avLst/>
+          </a:prstGeom>
+          <a:noFill/>
+        </p:spPr>
+        <p:txBody>
+          <a:bodyPr wrap="square">
+            <a:spAutoFit/>
+          </a:bodyPr>
+          <a:lstStyle/>
+          <a:p>
+            <a:pPr algn="l"/>
+            <a:r>
+              <a:rPr sz="700" b="1" i="0">
+                <a:solidFill>
+                  <a:srgbClr val="D62839"/>
+                </a:solidFill>
+              </a:rPr>
+              <a:t>Auto-held</a:t>
+            </a:r>
+          </a:p>
+        </p:txBody>
+      </p:sp>
+      <p:sp>
+        <p:nvSpPr>
+          <p:cNvPr id="62" name="Rectangle 61"/>
+          <p:cNvSpPr/>
+          <p:nvPr/>
+        </p:nvSpPr>
+        <p:spPr>
+          <a:xfrm>
+            <a:off x="6245352" y="2770632"/>
+            <a:ext cx="5568696" cy="292608"/>
+          </a:xfrm>
+          <a:prstGeom prst="rect">
+            <a:avLst/>
+          </a:prstGeom>
+          <a:solidFill>
+            <a:srgbClr val="FFEDED"/>
+          </a:solidFill>
+          <a:ln>
+            <a:noFill/>
+          </a:ln>
+        </p:spPr>
+        <p:style>
+          <a:lnRef idx="1">
+            <a:schemeClr val="accent1"/>
+          </a:lnRef>
+          <a:fillRef idx="3">
+            <a:schemeClr val="accent1"/>
+          </a:fillRef>
+          <a:effectRef idx="2">
+            <a:schemeClr val="accent1"/>
+          </a:effectRef>
+          <a:fontRef idx="minor">
+            <a:schemeClr val="lt1"/>
+          </a:fontRef>
+        </p:style>
+        <p:txBody>
+          <a:bodyPr rtlCol="0" anchor="ctr"/>
+          <a:lstStyle/>
+          <a:p>
+            <a:pPr algn="ctr"/>
+          </a:p>
+        </p:txBody>
+      </p:sp>
+      <p:sp>
+        <p:nvSpPr>
+          <p:cNvPr id="63" name="TextBox 62"/>
+          <p:cNvSpPr txBox="1"/>
+          <p:nvPr/>
+        </p:nvSpPr>
+        <p:spPr>
+          <a:xfrm>
+            <a:off x="6309360" y="2798064"/>
+            <a:ext cx="2286000" cy="219456"/>
+          </a:xfrm>
+          <a:prstGeom prst="rect">
+            <a:avLst/>
+          </a:prstGeom>
+          <a:noFill/>
+        </p:spPr>
+        <p:txBody>
+          <a:bodyPr wrap="square">
+            <a:spAutoFit/>
+          </a:bodyPr>
+          <a:lstStyle/>
+          <a:p>
+            <a:pPr algn="l"/>
+            <a:r>
+              <a:rPr sz="800" b="0" i="0">
+                <a:solidFill>
+                  <a:srgbClr val="444444"/>
+                </a:solidFill>
+              </a:rPr>
+              <a:t>Les lunettes à Soso</a:t>
+            </a:r>
+          </a:p>
+        </p:txBody>
+      </p:sp>
+      <p:sp>
+        <p:nvSpPr>
+          <p:cNvPr id="64" name="TextBox 63"/>
+          <p:cNvSpPr txBox="1"/>
+          <p:nvPr/>
+        </p:nvSpPr>
+        <p:spPr>
+          <a:xfrm>
+            <a:off x="8686800" y="2798064"/>
+            <a:ext cx="822960" cy="219456"/>
+          </a:xfrm>
+          <a:prstGeom prst="rect">
+            <a:avLst/>
+          </a:prstGeom>
+          <a:noFill/>
+        </p:spPr>
+        <p:txBody>
+          <a:bodyPr wrap="square">
+            <a:spAutoFit/>
+          </a:bodyPr>
+          <a:lstStyle/>
+          <a:p>
+            <a:pPr algn="l"/>
+            <a:r>
+              <a:rPr sz="900" b="1" i="0">
+                <a:solidFill>
+                  <a:srgbClr val="D62839"/>
+                </a:solidFill>
+              </a:rPr>
+              <a:t>84/100</a:t>
+            </a:r>
+          </a:p>
+        </p:txBody>
+      </p:sp>
+      <p:sp>
+        <p:nvSpPr>
+          <p:cNvPr id="65" name="TextBox 64"/>
+          <p:cNvSpPr txBox="1"/>
+          <p:nvPr/>
+        </p:nvSpPr>
+        <p:spPr>
+          <a:xfrm>
+            <a:off x="9601200" y="2798064"/>
+            <a:ext cx="1920240" cy="219456"/>
+          </a:xfrm>
+          <a:prstGeom prst="rect">
+            <a:avLst/>
+          </a:prstGeom>
+          <a:noFill/>
+        </p:spPr>
+        <p:txBody>
+          <a:bodyPr wrap="square">
+            <a:spAutoFit/>
+          </a:bodyPr>
+          <a:lstStyle/>
+          <a:p>
+            <a:pPr algn="l"/>
+            <a:r>
+              <a:rPr sz="700" b="1" i="0">
+                <a:solidFill>
+                  <a:srgbClr val="D62839"/>
+                </a:solidFill>
+              </a:rPr>
+              <a:t>Auto-held</a:t>
+            </a:r>
+          </a:p>
+        </p:txBody>
+      </p:sp>
+      <p:sp>
+        <p:nvSpPr>
+          <p:cNvPr id="66" name="Rectangle 65"/>
+          <p:cNvSpPr/>
+          <p:nvPr/>
+        </p:nvSpPr>
+        <p:spPr>
+          <a:xfrm>
+            <a:off x="6245352" y="3081528"/>
+            <a:ext cx="5568696" cy="292608"/>
+          </a:xfrm>
+          <a:prstGeom prst="rect">
+            <a:avLst/>
+          </a:prstGeom>
+          <a:solidFill>
+            <a:srgbClr val="FFEDED"/>
+          </a:solidFill>
+          <a:ln>
+            <a:noFill/>
+          </a:ln>
+        </p:spPr>
+        <p:style>
+          <a:lnRef idx="1">
+            <a:schemeClr val="accent1"/>
+          </a:lnRef>
+          <a:fillRef idx="3">
+            <a:schemeClr val="accent1"/>
+          </a:fillRef>
+          <a:effectRef idx="2">
+            <a:schemeClr val="accent1"/>
+          </a:effectRef>
+          <a:fontRef idx="minor">
+            <a:schemeClr val="lt1"/>
+          </a:fontRef>
+        </p:style>
+        <p:txBody>
+          <a:bodyPr rtlCol="0" anchor="ctr"/>
+          <a:lstStyle/>
+          <a:p>
+            <a:pPr algn="ctr"/>
+          </a:p>
+        </p:txBody>
+      </p:sp>
+      <p:sp>
+        <p:nvSpPr>
+          <p:cNvPr id="67" name="TextBox 66"/>
+          <p:cNvSpPr txBox="1"/>
+          <p:nvPr/>
+        </p:nvSpPr>
+        <p:spPr>
+          <a:xfrm>
+            <a:off x="6309360" y="3108960"/>
+            <a:ext cx="2286000" cy="219456"/>
+          </a:xfrm>
+          <a:prstGeom prst="rect">
+            <a:avLst/>
+          </a:prstGeom>
+          <a:noFill/>
+        </p:spPr>
+        <p:txBody>
+          <a:bodyPr wrap="square">
+            <a:spAutoFit/>
+          </a:bodyPr>
+          <a:lstStyle/>
+          <a:p>
+            <a:pPr algn="l"/>
+            <a:r>
+              <a:rPr sz="800" b="0" i="0">
+                <a:solidFill>
+                  <a:srgbClr val="444444"/>
+                </a:solidFill>
+              </a:rPr>
+              <a:t>Penthievre alambics</a:t>
+            </a:r>
+          </a:p>
+        </p:txBody>
+      </p:sp>
+      <p:sp>
+        <p:nvSpPr>
+          <p:cNvPr id="68" name="TextBox 67"/>
+          <p:cNvSpPr txBox="1"/>
+          <p:nvPr/>
+        </p:nvSpPr>
+        <p:spPr>
+          <a:xfrm>
+            <a:off x="8686800" y="3108960"/>
+            <a:ext cx="822960" cy="219456"/>
+          </a:xfrm>
+          <a:prstGeom prst="rect">
+            <a:avLst/>
+          </a:prstGeom>
+          <a:noFill/>
+        </p:spPr>
+        <p:txBody>
+          <a:bodyPr wrap="square">
+            <a:spAutoFit/>
+          </a:bodyPr>
+          <a:lstStyle/>
+          <a:p>
+            <a:pPr algn="l"/>
+            <a:r>
+              <a:rPr sz="900" b="1" i="0">
+                <a:solidFill>
+                  <a:srgbClr val="D62839"/>
+                </a:solidFill>
+              </a:rPr>
+              <a:t>78/100</a:t>
+            </a:r>
+          </a:p>
+        </p:txBody>
+      </p:sp>
+      <p:sp>
+        <p:nvSpPr>
+          <p:cNvPr id="69" name="TextBox 68"/>
+          <p:cNvSpPr txBox="1"/>
+          <p:nvPr/>
+        </p:nvSpPr>
+        <p:spPr>
+          <a:xfrm>
+            <a:off x="9601200" y="3108960"/>
+            <a:ext cx="1920240" cy="219456"/>
+          </a:xfrm>
+          <a:prstGeom prst="rect">
+            <a:avLst/>
+          </a:prstGeom>
+          <a:noFill/>
+        </p:spPr>
+        <p:txBody>
+          <a:bodyPr wrap="square">
+            <a:spAutoFit/>
+          </a:bodyPr>
+          <a:lstStyle/>
+          <a:p>
+            <a:pPr algn="l"/>
+            <a:r>
+              <a:rPr sz="700" b="1" i="0">
+                <a:solidFill>
+                  <a:srgbClr val="D62839"/>
+                </a:solidFill>
+              </a:rPr>
+              <a:t>Auto-held</a:t>
+            </a:r>
+          </a:p>
+        </p:txBody>
+      </p:sp>
+      <p:sp>
+        <p:nvSpPr>
+          <p:cNvPr id="70" name="Rectangle 69"/>
+          <p:cNvSpPr/>
+          <p:nvPr/>
+        </p:nvSpPr>
+        <p:spPr>
+          <a:xfrm>
+            <a:off x="6245352" y="3392424"/>
+            <a:ext cx="5568696" cy="292608"/>
+          </a:xfrm>
+          <a:prstGeom prst="rect">
+            <a:avLst/>
+          </a:prstGeom>
+          <a:solidFill>
+            <a:srgbClr val="FFEDED"/>
+          </a:solidFill>
+          <a:ln>
+            <a:noFill/>
+          </a:ln>
+        </p:spPr>
+        <p:style>
+          <a:lnRef idx="1">
+            <a:schemeClr val="accent1"/>
+          </a:lnRef>
+          <a:fillRef idx="3">
+            <a:schemeClr val="accent1"/>
+          </a:fillRef>
+          <a:effectRef idx="2">
+            <a:schemeClr val="accent1"/>
+          </a:effectRef>
+          <a:fontRef idx="minor">
+            <a:schemeClr val="lt1"/>
+          </a:fontRef>
+        </p:style>
+        <p:txBody>
+          <a:bodyPr rtlCol="0" anchor="ctr"/>
+          <a:lstStyle/>
+          <a:p>
+            <a:pPr algn="ctr"/>
+          </a:p>
+        </p:txBody>
+      </p:sp>
+      <p:sp>
+        <p:nvSpPr>
+          <p:cNvPr id="71" name="TextBox 70"/>
+          <p:cNvSpPr txBox="1"/>
+          <p:nvPr/>
+        </p:nvSpPr>
+        <p:spPr>
+          <a:xfrm>
+            <a:off x="6309360" y="3419856"/>
+            <a:ext cx="2286000" cy="219456"/>
+          </a:xfrm>
+          <a:prstGeom prst="rect">
+            <a:avLst/>
+          </a:prstGeom>
+          <a:noFill/>
+        </p:spPr>
+        <p:txBody>
+          <a:bodyPr wrap="square">
+            <a:spAutoFit/>
+          </a:bodyPr>
+          <a:lstStyle/>
+          <a:p>
+            <a:pPr algn="l"/>
+            <a:r>
+              <a:rPr sz="800" b="0" i="0">
+                <a:solidFill>
+                  <a:srgbClr val="444444"/>
+                </a:solidFill>
+              </a:rPr>
+              <a:t>Runner glasses</a:t>
+            </a:r>
+          </a:p>
+        </p:txBody>
+      </p:sp>
+      <p:sp>
+        <p:nvSpPr>
+          <p:cNvPr id="72" name="TextBox 71"/>
+          <p:cNvSpPr txBox="1"/>
+          <p:nvPr/>
+        </p:nvSpPr>
+        <p:spPr>
+          <a:xfrm>
+            <a:off x="8686800" y="3419856"/>
+            <a:ext cx="822960" cy="219456"/>
+          </a:xfrm>
+          <a:prstGeom prst="rect">
+            <a:avLst/>
+          </a:prstGeom>
+          <a:noFill/>
+        </p:spPr>
+        <p:txBody>
+          <a:bodyPr wrap="square">
+            <a:spAutoFit/>
+          </a:bodyPr>
+          <a:lstStyle/>
+          <a:p>
+            <a:pPr algn="l"/>
+            <a:r>
+              <a:rPr sz="900" b="1" i="0">
+                <a:solidFill>
+                  <a:srgbClr val="D62839"/>
+                </a:solidFill>
+              </a:rPr>
+              <a:t>74/100</a:t>
+            </a:r>
+          </a:p>
+        </p:txBody>
+      </p:sp>
+      <p:sp>
+        <p:nvSpPr>
+          <p:cNvPr id="73" name="TextBox 72"/>
+          <p:cNvSpPr txBox="1"/>
+          <p:nvPr/>
+        </p:nvSpPr>
+        <p:spPr>
+          <a:xfrm>
+            <a:off x="9601200" y="3419856"/>
+            <a:ext cx="1920240" cy="219456"/>
+          </a:xfrm>
+          <a:prstGeom prst="rect">
+            <a:avLst/>
+          </a:prstGeom>
+          <a:noFill/>
+        </p:spPr>
+        <p:txBody>
+          <a:bodyPr wrap="square">
+            <a:spAutoFit/>
+          </a:bodyPr>
+          <a:lstStyle/>
+          <a:p>
+            <a:pPr algn="l"/>
+            <a:r>
+              <a:rPr sz="700" b="1" i="0">
+                <a:solidFill>
+                  <a:srgbClr val="D62839"/>
+                </a:solidFill>
+              </a:rPr>
+              <a:t>Auto-held</a:t>
+            </a:r>
+          </a:p>
+        </p:txBody>
+      </p:sp>
+      <p:sp>
+        <p:nvSpPr>
+          <p:cNvPr id="74" name="Rectangle 73"/>
+          <p:cNvSpPr/>
+          <p:nvPr/>
+        </p:nvSpPr>
+        <p:spPr>
+          <a:xfrm>
+            <a:off x="6245352" y="3703320"/>
+            <a:ext cx="5568696" cy="292608"/>
+          </a:xfrm>
+          <a:prstGeom prst="rect">
+            <a:avLst/>
+          </a:prstGeom>
+          <a:solidFill>
+            <a:srgbClr val="FFF6ED"/>
+          </a:solidFill>
+          <a:ln>
+            <a:noFill/>
+          </a:ln>
+        </p:spPr>
+        <p:style>
+          <a:lnRef idx="1">
+            <a:schemeClr val="accent1"/>
+          </a:lnRef>
+          <a:fillRef idx="3">
+            <a:schemeClr val="accent1"/>
+          </a:fillRef>
+          <a:effectRef idx="2">
+            <a:schemeClr val="accent1"/>
+          </a:effectRef>
+          <a:fontRef idx="minor">
+            <a:schemeClr val="lt1"/>
+          </a:fontRef>
+        </p:style>
+        <p:txBody>
+          <a:bodyPr rtlCol="0" anchor="ctr"/>
+          <a:lstStyle/>
+          <a:p>
+            <a:pPr algn="ctr"/>
+          </a:p>
+        </p:txBody>
+      </p:sp>
+      <p:sp>
+        <p:nvSpPr>
+          <p:cNvPr id="75" name="TextBox 74"/>
+          <p:cNvSpPr txBox="1"/>
+          <p:nvPr/>
+        </p:nvSpPr>
+        <p:spPr>
+          <a:xfrm>
+            <a:off x="6309360" y="3730752"/>
+            <a:ext cx="2286000" cy="219456"/>
+          </a:xfrm>
+          <a:prstGeom prst="rect">
+            <a:avLst/>
+          </a:prstGeom>
+          <a:noFill/>
+        </p:spPr>
+        <p:txBody>
+          <a:bodyPr wrap="square">
+            <a:spAutoFit/>
+          </a:bodyPr>
+          <a:lstStyle/>
+          <a:p>
+            <a:pPr algn="l"/>
+            <a:r>
+              <a:rPr sz="800" b="0" i="0">
+                <a:solidFill>
+                  <a:srgbClr val="444444"/>
+                </a:solidFill>
+              </a:rPr>
+              <a:t>Kylian's frames</a:t>
+            </a:r>
+          </a:p>
+        </p:txBody>
+      </p:sp>
+      <p:sp>
+        <p:nvSpPr>
+          <p:cNvPr id="76" name="TextBox 75"/>
+          <p:cNvSpPr txBox="1"/>
+          <p:nvPr/>
+        </p:nvSpPr>
+        <p:spPr>
+          <a:xfrm>
+            <a:off x="8686800" y="3730752"/>
+            <a:ext cx="822960" cy="219456"/>
+          </a:xfrm>
+          <a:prstGeom prst="rect">
+            <a:avLst/>
+          </a:prstGeom>
+          <a:noFill/>
+        </p:spPr>
+        <p:txBody>
+          <a:bodyPr wrap="square">
+            <a:spAutoFit/>
+          </a:bodyPr>
+          <a:lstStyle/>
+          <a:p>
+            <a:pPr algn="l"/>
+            <a:r>
+              <a:rPr sz="900" b="1" i="0">
+                <a:solidFill>
+                  <a:srgbClr val="E07B39"/>
+                </a:solidFill>
+              </a:rPr>
+              <a:t>54/100</a:t>
+            </a:r>
+          </a:p>
+        </p:txBody>
+      </p:sp>
+      <p:sp>
+        <p:nvSpPr>
+          <p:cNvPr id="77" name="TextBox 76"/>
+          <p:cNvSpPr txBox="1"/>
+          <p:nvPr/>
+        </p:nvSpPr>
+        <p:spPr>
+          <a:xfrm>
+            <a:off x="9601200" y="3730752"/>
+            <a:ext cx="1920240" cy="219456"/>
+          </a:xfrm>
+          <a:prstGeom prst="rect">
+            <a:avLst/>
+          </a:prstGeom>
+          <a:noFill/>
+        </p:spPr>
+        <p:txBody>
+          <a:bodyPr wrap="square">
+            <a:spAutoFit/>
+          </a:bodyPr>
+          <a:lstStyle/>
+          <a:p>
+            <a:pPr algn="l"/>
+            <a:r>
+              <a:rPr sz="700" b="1" i="0">
+                <a:solidFill>
+                  <a:srgbClr val="E07B39"/>
+                </a:solidFill>
+              </a:rPr>
+              <a:t>Needs review</a:t>
+            </a:r>
+          </a:p>
+        </p:txBody>
+      </p:sp>
+      <p:sp>
+        <p:nvSpPr>
+          <p:cNvPr id="78" name="Rectangle 77"/>
+          <p:cNvSpPr/>
+          <p:nvPr/>
+        </p:nvSpPr>
+        <p:spPr>
+          <a:xfrm>
+            <a:off x="6245352" y="4014216"/>
+            <a:ext cx="5568696" cy="292608"/>
+          </a:xfrm>
+          <a:prstGeom prst="rect">
+            <a:avLst/>
+          </a:prstGeom>
+          <a:solidFill>
+            <a:srgbClr val="FFF6ED"/>
+          </a:solidFill>
+          <a:ln>
+            <a:noFill/>
+          </a:ln>
+        </p:spPr>
+        <p:style>
+          <a:lnRef idx="1">
+            <a:schemeClr val="accent1"/>
+          </a:lnRef>
+          <a:fillRef idx="3">
+            <a:schemeClr val="accent1"/>
+          </a:fillRef>
+          <a:effectRef idx="2">
+            <a:schemeClr val="accent1"/>
+          </a:effectRef>
+          <a:fontRef idx="minor">
+            <a:schemeClr val="lt1"/>
+          </a:fontRef>
+        </p:style>
+        <p:txBody>
+          <a:bodyPr rtlCol="0" anchor="ctr"/>
+          <a:lstStyle/>
+          <a:p>
+            <a:pPr algn="ctr"/>
+          </a:p>
+        </p:txBody>
+      </p:sp>
+      <p:sp>
+        <p:nvSpPr>
+          <p:cNvPr id="79" name="TextBox 78"/>
+          <p:cNvSpPr txBox="1"/>
+          <p:nvPr/>
+        </p:nvSpPr>
+        <p:spPr>
+          <a:xfrm>
+            <a:off x="6309360" y="4041648"/>
+            <a:ext cx="2286000" cy="219456"/>
+          </a:xfrm>
+          <a:prstGeom prst="rect">
+            <a:avLst/>
+          </a:prstGeom>
+          <a:noFill/>
+        </p:spPr>
+        <p:txBody>
+          <a:bodyPr wrap="square">
+            <a:spAutoFit/>
+          </a:bodyPr>
+          <a:lstStyle/>
+          <a:p>
+            <a:pPr algn="l"/>
+            <a:r>
+              <a:rPr sz="800" b="0" i="0">
+                <a:solidFill>
+                  <a:srgbClr val="444444"/>
+                </a:solidFill>
+              </a:rPr>
+              <a:t>Roudoudou lentilles</a:t>
+            </a:r>
+          </a:p>
+        </p:txBody>
+      </p:sp>
+      <p:sp>
+        <p:nvSpPr>
+          <p:cNvPr id="80" name="TextBox 79"/>
+          <p:cNvSpPr txBox="1"/>
+          <p:nvPr/>
+        </p:nvSpPr>
+        <p:spPr>
+          <a:xfrm>
+            <a:off x="8686800" y="4041648"/>
+            <a:ext cx="822960" cy="219456"/>
+          </a:xfrm>
+          <a:prstGeom prst="rect">
+            <a:avLst/>
+          </a:prstGeom>
+          <a:noFill/>
+        </p:spPr>
+        <p:txBody>
+          <a:bodyPr wrap="square">
+            <a:spAutoFit/>
+          </a:bodyPr>
+          <a:lstStyle/>
+          <a:p>
+            <a:pPr algn="l"/>
+            <a:r>
+              <a:rPr sz="900" b="1" i="0">
+                <a:solidFill>
+                  <a:srgbClr val="E07B39"/>
+                </a:solidFill>
+              </a:rPr>
+              <a:t>40/100</a:t>
+            </a:r>
+          </a:p>
+        </p:txBody>
+      </p:sp>
+      <p:sp>
+        <p:nvSpPr>
+          <p:cNvPr id="81" name="TextBox 80"/>
+          <p:cNvSpPr txBox="1"/>
+          <p:nvPr/>
+        </p:nvSpPr>
+        <p:spPr>
+          <a:xfrm>
+            <a:off x="9601200" y="4041648"/>
+            <a:ext cx="1920240" cy="219456"/>
+          </a:xfrm>
+          <a:prstGeom prst="rect">
+            <a:avLst/>
+          </a:prstGeom>
+          <a:noFill/>
+        </p:spPr>
+        <p:txBody>
+          <a:bodyPr wrap="square">
+            <a:spAutoFit/>
+          </a:bodyPr>
+          <a:lstStyle/>
+          <a:p>
+            <a:pPr algn="l"/>
+            <a:r>
+              <a:rPr sz="700" b="1" i="0">
+                <a:solidFill>
+                  <a:srgbClr val="E07B39"/>
+                </a:solidFill>
+              </a:rPr>
+              <a:t>Needs review</a:t>
+            </a:r>
+          </a:p>
+        </p:txBody>
+      </p:sp>
+      <p:sp>
+        <p:nvSpPr>
+          <p:cNvPr id="82" name="Rectangle 81"/>
+          <p:cNvSpPr/>
+          <p:nvPr/>
+        </p:nvSpPr>
+        <p:spPr>
+          <a:xfrm>
+            <a:off x="6245352" y="4325112"/>
+            <a:ext cx="5568696" cy="292608"/>
+          </a:xfrm>
+          <a:prstGeom prst="rect">
+            <a:avLst/>
+          </a:prstGeom>
+          <a:solidFill>
+            <a:srgbClr val="FFF6ED"/>
+          </a:solidFill>
+          <a:ln>
+            <a:noFill/>
+          </a:ln>
+        </p:spPr>
+        <p:style>
+          <a:lnRef idx="1">
+            <a:schemeClr val="accent1"/>
+          </a:lnRef>
+          <a:fillRef idx="3">
+            <a:schemeClr val="accent1"/>
+          </a:fillRef>
+          <a:effectRef idx="2">
+            <a:schemeClr val="accent1"/>
+          </a:effectRef>
+          <a:fontRef idx="minor">
+            <a:schemeClr val="lt1"/>
+          </a:fontRef>
+        </p:style>
+        <p:txBody>
+          <a:bodyPr rtlCol="0" anchor="ctr"/>
+          <a:lstStyle/>
+          <a:p>
+            <a:pPr algn="ctr"/>
+          </a:p>
+        </p:txBody>
+      </p:sp>
+      <p:sp>
+        <p:nvSpPr>
+          <p:cNvPr id="83" name="TextBox 82"/>
+          <p:cNvSpPr txBox="1"/>
+          <p:nvPr/>
+        </p:nvSpPr>
+        <p:spPr>
+          <a:xfrm>
+            <a:off x="6309360" y="4352544"/>
+            <a:ext cx="2286000" cy="219456"/>
+          </a:xfrm>
+          <a:prstGeom prst="rect">
+            <a:avLst/>
+          </a:prstGeom>
+          <a:noFill/>
+        </p:spPr>
+        <p:txBody>
+          <a:bodyPr wrap="square">
+            <a:spAutoFit/>
+          </a:bodyPr>
+          <a:lstStyle/>
+          <a:p>
+            <a:pPr algn="l"/>
+            <a:r>
+              <a:rPr sz="800" b="0" i="0">
+                <a:solidFill>
+                  <a:srgbClr val="444444"/>
+                </a:solidFill>
+              </a:rPr>
+              <a:t>Voodoo</a:t>
+            </a:r>
+          </a:p>
+        </p:txBody>
+      </p:sp>
+      <p:sp>
+        <p:nvSpPr>
+          <p:cNvPr id="84" name="TextBox 83"/>
+          <p:cNvSpPr txBox="1"/>
+          <p:nvPr/>
+        </p:nvSpPr>
+        <p:spPr>
+          <a:xfrm>
+            <a:off x="8686800" y="4352544"/>
+            <a:ext cx="822960" cy="219456"/>
+          </a:xfrm>
+          <a:prstGeom prst="rect">
+            <a:avLst/>
+          </a:prstGeom>
+          <a:noFill/>
+        </p:spPr>
+        <p:txBody>
+          <a:bodyPr wrap="square">
+            <a:spAutoFit/>
+          </a:bodyPr>
+          <a:lstStyle/>
+          <a:p>
+            <a:pPr algn="l"/>
+            <a:r>
+              <a:rPr sz="900" b="1" i="0">
+                <a:solidFill>
+                  <a:srgbClr val="E07B39"/>
+                </a:solidFill>
+              </a:rPr>
+              <a:t>15/100</a:t>
+            </a:r>
+          </a:p>
+        </p:txBody>
+      </p:sp>
+      <p:sp>
+        <p:nvSpPr>
+          <p:cNvPr id="85" name="TextBox 84"/>
+          <p:cNvSpPr txBox="1"/>
+          <p:nvPr/>
+        </p:nvSpPr>
+        <p:spPr>
+          <a:xfrm>
+            <a:off x="9601200" y="4352544"/>
+            <a:ext cx="1920240" cy="219456"/>
+          </a:xfrm>
+          <a:prstGeom prst="rect">
+            <a:avLst/>
+          </a:prstGeom>
+          <a:noFill/>
+        </p:spPr>
+        <p:txBody>
+          <a:bodyPr wrap="square">
+            <a:spAutoFit/>
+          </a:bodyPr>
+          <a:lstStyle/>
+          <a:p>
+            <a:pPr algn="l"/>
+            <a:r>
+              <a:rPr sz="700" b="1" i="0">
+                <a:solidFill>
+                  <a:srgbClr val="E07B39"/>
+                </a:solidFill>
+              </a:rPr>
+              <a:t>Needs review</a:t>
+            </a:r>
+          </a:p>
+        </p:txBody>
+      </p:sp>
+      <p:sp>
+        <p:nvSpPr>
+          <p:cNvPr id="86" name="Rectangle 85"/>
+          <p:cNvSpPr/>
+          <p:nvPr/>
+        </p:nvSpPr>
+        <p:spPr>
+          <a:xfrm>
+            <a:off x="6245352" y="4636008"/>
+            <a:ext cx="5568696" cy="292608"/>
+          </a:xfrm>
+          <a:prstGeom prst="rect">
+            <a:avLst/>
+          </a:prstGeom>
+          <a:solidFill>
+            <a:srgbClr val="F0F9F2"/>
+          </a:solidFill>
+          <a:ln>
+            <a:noFill/>
+          </a:ln>
+        </p:spPr>
+        <p:style>
+          <a:lnRef idx="1">
+            <a:schemeClr val="accent1"/>
+          </a:lnRef>
+          <a:fillRef idx="3">
+            <a:schemeClr val="accent1"/>
+          </a:fillRef>
+          <a:effectRef idx="2">
+            <a:schemeClr val="accent1"/>
+          </a:effectRef>
+          <a:fontRef idx="minor">
+            <a:schemeClr val="lt1"/>
+          </a:fontRef>
+        </p:style>
+        <p:txBody>
+          <a:bodyPr rtlCol="0" anchor="ctr"/>
+          <a:lstStyle/>
+          <a:p>
+            <a:pPr algn="ctr"/>
+          </a:p>
+        </p:txBody>
+      </p:sp>
+      <p:sp>
+        <p:nvSpPr>
+          <p:cNvPr id="87" name="TextBox 86"/>
+          <p:cNvSpPr txBox="1"/>
+          <p:nvPr/>
+        </p:nvSpPr>
+        <p:spPr>
+          <a:xfrm>
+            <a:off x="6309360" y="4663440"/>
+            <a:ext cx="2286000" cy="219456"/>
+          </a:xfrm>
+          <a:prstGeom prst="rect">
+            <a:avLst/>
+          </a:prstGeom>
+          <a:noFill/>
+        </p:spPr>
+        <p:txBody>
+          <a:bodyPr wrap="square">
+            <a:spAutoFit/>
+          </a:bodyPr>
+          <a:lstStyle/>
+          <a:p>
+            <a:pPr algn="l"/>
+            <a:r>
+              <a:rPr sz="800" b="0" i="0">
+                <a:solidFill>
+                  <a:srgbClr val="444444"/>
+                </a:solidFill>
+              </a:rPr>
+              <a:t>La classe à Dallas</a:t>
+            </a:r>
+          </a:p>
+        </p:txBody>
+      </p:sp>
+      <p:sp>
+        <p:nvSpPr>
+          <p:cNvPr id="88" name="TextBox 87"/>
+          <p:cNvSpPr txBox="1"/>
+          <p:nvPr/>
+        </p:nvSpPr>
+        <p:spPr>
+          <a:xfrm>
+            <a:off x="8686800" y="4663440"/>
+            <a:ext cx="822960" cy="219456"/>
+          </a:xfrm>
+          <a:prstGeom prst="rect">
+            <a:avLst/>
+          </a:prstGeom>
+          <a:noFill/>
+        </p:spPr>
+        <p:txBody>
+          <a:bodyPr wrap="square">
+            <a:spAutoFit/>
+          </a:bodyPr>
+          <a:lstStyle/>
+          <a:p>
+            <a:pPr algn="l"/>
+            <a:r>
+              <a:rPr sz="900" b="1" i="0">
+                <a:solidFill>
+                  <a:srgbClr val="2E7D32"/>
+                </a:solidFill>
+              </a:rPr>
+              <a:t>0/100</a:t>
+            </a:r>
+          </a:p>
+        </p:txBody>
+      </p:sp>
+      <p:sp>
+        <p:nvSpPr>
+          <p:cNvPr id="89" name="TextBox 88"/>
+          <p:cNvSpPr txBox="1"/>
+          <p:nvPr/>
+        </p:nvSpPr>
+        <p:spPr>
+          <a:xfrm>
+            <a:off x="9601200" y="4663440"/>
+            <a:ext cx="1920240" cy="219456"/>
+          </a:xfrm>
+          <a:prstGeom prst="rect">
+            <a:avLst/>
+          </a:prstGeom>
+          <a:noFill/>
+        </p:spPr>
+        <p:txBody>
+          <a:bodyPr wrap="square">
+            <a:spAutoFit/>
+          </a:bodyPr>
+          <a:lstStyle/>
+          <a:p>
+            <a:pPr algn="l"/>
+            <a:r>
+              <a:rPr sz="700" b="1" i="0">
+                <a:solidFill>
+                  <a:srgbClr val="2E7D32"/>
+                </a:solidFill>
+              </a:rPr>
+              <a:t>Auto-approved</a:t>
+            </a:r>
+          </a:p>
+        </p:txBody>
+      </p:sp>
+      <p:sp>
+        <p:nvSpPr>
+          <p:cNvPr id="90" name="Rectangle 89"/>
+          <p:cNvSpPr/>
+          <p:nvPr/>
+        </p:nvSpPr>
+        <p:spPr>
+          <a:xfrm>
+            <a:off x="6245352" y="4956048"/>
+            <a:ext cx="5568696" cy="320040"/>
+          </a:xfrm>
+          <a:prstGeom prst="rect">
+            <a:avLst/>
+          </a:prstGeom>
+          <a:solidFill>
+            <a:srgbClr val="1A2440"/>
+          </a:solidFill>
+          <a:ln>
+            <a:noFill/>
+          </a:ln>
+        </p:spPr>
+        <p:style>
+          <a:lnRef idx="1">
+            <a:schemeClr val="accent1"/>
+          </a:lnRef>
+          <a:fillRef idx="3">
+            <a:schemeClr val="accent1"/>
+          </a:fillRef>
+          <a:effectRef idx="2">
+            <a:schemeClr val="accent1"/>
+          </a:effectRef>
+          <a:fontRef idx="minor">
+            <a:schemeClr val="lt1"/>
+          </a:fontRef>
+        </p:style>
+        <p:txBody>
+          <a:bodyPr rtlCol="0" anchor="ctr"/>
+          <a:lstStyle/>
+          <a:p>
+            <a:pPr algn="ctr"/>
+          </a:p>
+        </p:txBody>
+      </p:sp>
+      <p:sp>
+        <p:nvSpPr>
+          <p:cNvPr id="91" name="TextBox 90"/>
+          <p:cNvSpPr txBox="1"/>
+          <p:nvPr/>
+        </p:nvSpPr>
+        <p:spPr>
+          <a:xfrm>
+            <a:off x="6309360" y="4992624"/>
+            <a:ext cx="5394960" cy="237744"/>
+          </a:xfrm>
+          <a:prstGeom prst="rect">
+            <a:avLst/>
+          </a:prstGeom>
+          <a:noFill/>
+        </p:spPr>
+        <p:txBody>
+          <a:bodyPr wrap="square">
+            <a:spAutoFit/>
+          </a:bodyPr>
+          <a:lstStyle/>
+          <a:p>
+            <a:pPr algn="ctr"/>
+            <a:r>
+              <a:rPr sz="800" b="0" i="0">
+                <a:solidFill>
+                  <a:srgbClr val="FFFFFF"/>
+                </a:solidFill>
+              </a:rPr>
+              <a:t>Click any provider → full flag evidence + review panel</a:t>
+            </a:r>
+          </a:p>
+        </p:txBody>
+      </p:sp>
+      <p:sp>
+        <p:nvSpPr>
+          <p:cNvPr id="92" name="TextBox 91"/>
+          <p:cNvSpPr txBox="1"/>
+          <p:nvPr/>
+        </p:nvSpPr>
+        <p:spPr>
+          <a:xfrm>
+            <a:off x="274320" y="6355080"/>
+            <a:ext cx="11612880" cy="274320"/>
+          </a:xfrm>
+          <a:prstGeom prst="rect">
+            <a:avLst/>
+          </a:prstGeom>
+          <a:noFill/>
+        </p:spPr>
+        <p:txBody>
+          <a:bodyPr wrap="square">
+            <a:spAutoFit/>
+          </a:bodyPr>
+          <a:lstStyle/>
+          <a:p>
+            <a:pPr algn="ctr"/>
+            <a:r>
+              <a:rPr sz="900" b="0" i="1">
+                <a:solidFill>
+                  <a:srgbClr val="444444"/>
+                </a:solidFill>
+              </a:rPr>
+              <a:t>← Dashboard overview          Providers list with live risk scores →</a:t>
+            </a:r>
+          </a:p>
+        </p:txBody>
+      </p:sp>
+    </p:spTree>
+  </p:cSld>
+  <p:clrMapOvr>
+    <a:masterClrMapping/>
+  </p:clrMapOvr>
+</p:sld>
+</file>
+
+<file path=ppt/slides/slide14.xml><?xml version="1.0" encoding="utf-8"?>
+<p:sld xmlns:a="http://schemas.openxmlformats.org/drawingml/2006/main" xmlns:p="http://schemas.openxmlformats.org/presentationml/2006/main" xmlns:r="http://schemas.openxmlformats.org/officeDocument/2006/relationships">
+  <p:cSld>
+    <p:spTree>
+      <p:nvGrpSpPr>
+        <p:cNvPr id="1" name=""/>
+        <p:cNvGrpSpPr/>
+        <p:nvPr/>
+      </p:nvGrpSpPr>
+      <p:grpSpPr/>
+      <p:sp>
+        <p:nvSpPr>
+          <p:cNvPr id="2" name="Rectangle 1"/>
+          <p:cNvSpPr/>
+          <p:nvPr/>
+        </p:nvSpPr>
+        <p:spPr>
+          <a:xfrm>
+            <a:off x="0" y="0"/>
+            <a:ext cx="12188952" cy="6858000"/>
+          </a:xfrm>
+          <a:prstGeom prst="rect">
+            <a:avLst/>
+          </a:prstGeom>
+          <a:solidFill>
+            <a:srgbClr val="1A2440"/>
+          </a:solidFill>
+          <a:ln>
+            <a:noFill/>
+          </a:ln>
+        </p:spPr>
+        <p:style>
+          <a:lnRef idx="1">
+            <a:schemeClr val="accent1"/>
+          </a:lnRef>
+          <a:fillRef idx="3">
+            <a:schemeClr val="accent1"/>
+          </a:fillRef>
+          <a:effectRef idx="2">
+            <a:schemeClr val="accent1"/>
+          </a:effectRef>
+          <a:fontRef idx="minor">
+            <a:schemeClr val="lt1"/>
+          </a:fontRef>
+        </p:style>
+        <p:txBody>
+          <a:bodyPr rtlCol="0" anchor="ctr"/>
+          <a:lstStyle/>
+          <a:p>
+            <a:pPr algn="ctr"/>
+          </a:p>
+        </p:txBody>
+      </p:sp>
+      <p:sp>
+        <p:nvSpPr>
+          <p:cNvPr id="3" name="Rectangle 2"/>
+          <p:cNvSpPr/>
+          <p:nvPr/>
+        </p:nvSpPr>
+        <p:spPr>
+          <a:xfrm>
+            <a:off x="0" y="5303520"/>
+            <a:ext cx="12188952" cy="1554480"/>
+          </a:xfrm>
+          <a:prstGeom prst="rect">
+            <a:avLst/>
+          </a:prstGeom>
+          <a:solidFill>
+            <a:srgbClr val="D62839"/>
+          </a:solidFill>
+          <a:ln>
+            <a:noFill/>
+          </a:ln>
+        </p:spPr>
+        <p:style>
+          <a:lnRef idx="1">
+            <a:schemeClr val="accent1"/>
+          </a:lnRef>
+          <a:fillRef idx="3">
+            <a:schemeClr val="accent1"/>
+          </a:fillRef>
+          <a:effectRef idx="2">
+            <a:schemeClr val="accent1"/>
+          </a:effectRef>
+          <a:fontRef idx="minor">
+            <a:schemeClr val="lt1"/>
+          </a:fontRef>
+        </p:style>
+        <p:txBody>
+          <a:bodyPr rtlCol="0" anchor="ctr"/>
+          <a:lstStyle/>
+          <a:p>
+            <a:pPr algn="ctr"/>
+          </a:p>
+        </p:txBody>
+      </p:sp>
+      <p:sp>
+        <p:nvSpPr>
+          <p:cNvPr id="4" name="Rectangle 3"/>
+          <p:cNvSpPr/>
+          <p:nvPr/>
+        </p:nvSpPr>
+        <p:spPr>
+          <a:xfrm>
+            <a:off x="0" y="0"/>
+            <a:ext cx="164592" cy="6858000"/>
+          </a:xfrm>
+          <a:prstGeom prst="rect">
+            <a:avLst/>
+          </a:prstGeom>
+          <a:solidFill>
+            <a:srgbClr val="F5A623"/>
+          </a:solidFill>
+          <a:ln>
+            <a:noFill/>
+          </a:ln>
+        </p:spPr>
+        <p:style>
+          <a:lnRef idx="1">
+            <a:schemeClr val="accent1"/>
+          </a:lnRef>
+          <a:fillRef idx="3">
+            <a:schemeClr val="accent1"/>
+          </a:fillRef>
+          <a:effectRef idx="2">
+            <a:schemeClr val="accent1"/>
+          </a:effectRef>
+          <a:fontRef idx="minor">
+            <a:schemeClr val="lt1"/>
+          </a:fontRef>
+        </p:style>
+        <p:txBody>
+          <a:bodyPr rtlCol="0" anchor="ctr"/>
+          <a:lstStyle/>
+          <a:p>
+            <a:pPr algn="ctr"/>
+          </a:p>
+        </p:txBody>
+      </p:sp>
+      <p:sp>
+        <p:nvSpPr>
+          <p:cNvPr id="5" name="Rectangle 4"/>
+          <p:cNvSpPr/>
+          <p:nvPr/>
+        </p:nvSpPr>
+        <p:spPr>
+          <a:xfrm>
+            <a:off x="457200" y="1463040"/>
+            <a:ext cx="2011680" cy="502920"/>
+          </a:xfrm>
+          <a:prstGeom prst="rect">
+            <a:avLst/>
+          </a:prstGeom>
+          <a:solidFill>
+            <a:srgbClr val="F5A623"/>
+          </a:solidFill>
+          <a:ln>
+            <a:noFill/>
+          </a:ln>
+        </p:spPr>
+        <p:style>
+          <a:lnRef idx="1">
+            <a:schemeClr val="accent1"/>
+          </a:lnRef>
+          <a:fillRef idx="3">
+            <a:schemeClr val="accent1"/>
+          </a:fillRef>
+          <a:effectRef idx="2">
+            <a:schemeClr val="accent1"/>
+          </a:effectRef>
+          <a:fontRef idx="minor">
+            <a:schemeClr val="lt1"/>
+          </a:fontRef>
+        </p:style>
+        <p:txBody>
+          <a:bodyPr rtlCol="0" anchor="ctr"/>
+          <a:lstStyle/>
+          <a:p>
+            <a:pPr algn="ctr"/>
+          </a:p>
+        </p:txBody>
+      </p:sp>
+      <p:sp>
+        <p:nvSpPr>
+          <p:cNvPr id="6" name="TextBox 5"/>
+          <p:cNvSpPr txBox="1"/>
+          <p:nvPr/>
+        </p:nvSpPr>
+        <p:spPr>
+          <a:xfrm>
+            <a:off x="457200" y="1463040"/>
+            <a:ext cx="2011680" cy="502920"/>
+          </a:xfrm>
+          <a:prstGeom prst="rect">
+            <a:avLst/>
+          </a:prstGeom>
+          <a:noFill/>
+        </p:spPr>
+        <p:txBody>
+          <a:bodyPr wrap="square">
+            <a:spAutoFit/>
+          </a:bodyPr>
+          <a:lstStyle/>
+          <a:p>
+            <a:pPr algn="ctr"/>
+            <a:r>
+              <a:rPr sz="1300" b="1" i="0">
+                <a:solidFill>
+                  <a:srgbClr val="1A2440"/>
+                </a:solidFill>
+              </a:rPr>
+              <a:t>QUESTION 3</a:t>
+            </a:r>
+          </a:p>
+        </p:txBody>
+      </p:sp>
+      <p:sp>
+        <p:nvSpPr>
+          <p:cNvPr id="7" name="TextBox 6"/>
+          <p:cNvSpPr txBox="1"/>
+          <p:nvPr/>
+        </p:nvSpPr>
+        <p:spPr>
+          <a:xfrm>
+            <a:off x="457200" y="2103120"/>
+            <a:ext cx="11430000" cy="457200"/>
+          </a:xfrm>
+          <a:prstGeom prst="rect">
+            <a:avLst/>
+          </a:prstGeom>
+          <a:noFill/>
+        </p:spPr>
+        <p:txBody>
+          <a:bodyPr wrap="square">
+            <a:spAutoFit/>
+          </a:bodyPr>
+          <a:lstStyle/>
+          <a:p>
+            <a:pPr algn="l"/>
+            <a:r>
+              <a:rPr sz="1600" b="0" i="1">
+                <a:solidFill>
+                  <a:srgbClr val="CCCCCC"/>
+                </a:solidFill>
+              </a:rPr>
+              <a:t>Recommendations</a:t>
+            </a:r>
+          </a:p>
+        </p:txBody>
+      </p:sp>
+      <p:sp>
+        <p:nvSpPr>
+          <p:cNvPr id="8" name="TextBox 7"/>
+          <p:cNvSpPr txBox="1"/>
+          <p:nvPr/>
+        </p:nvSpPr>
+        <p:spPr>
+          <a:xfrm>
+            <a:off x="457200" y="2697480"/>
+            <a:ext cx="11430000" cy="1371600"/>
+          </a:xfrm>
+          <a:prstGeom prst="rect">
+            <a:avLst/>
+          </a:prstGeom>
+          <a:noFill/>
+        </p:spPr>
+        <p:txBody>
+          <a:bodyPr wrap="square">
+            <a:spAutoFit/>
+          </a:bodyPr>
+          <a:lstStyle/>
+          <a:p>
+            <a:pPr algn="l"/>
+            <a:r>
+              <a:rPr sz="4000" b="1" i="0">
+                <a:solidFill>
+                  <a:srgbClr val="FFFFFF"/>
+                </a:solidFill>
+              </a:rPr>
+              <a:t>What should happen
+with these providers?</a:t>
+            </a:r>
+          </a:p>
+        </p:txBody>
+      </p:sp>
+      <p:sp>
+        <p:nvSpPr>
+          <p:cNvPr id="9" name="TextBox 8"/>
+          <p:cNvSpPr txBox="1"/>
+          <p:nvPr/>
+        </p:nvSpPr>
+        <p:spPr>
+          <a:xfrm>
+            <a:off x="457200" y="5440680"/>
+            <a:ext cx="11430000" cy="548640"/>
+          </a:xfrm>
+          <a:prstGeom prst="rect">
+            <a:avLst/>
+          </a:prstGeom>
+          <a:noFill/>
+        </p:spPr>
+        <p:txBody>
+          <a:bodyPr wrap="square">
+            <a:spAutoFit/>
+          </a:bodyPr>
+          <a:lstStyle/>
+          <a:p>
+            <a:pPr algn="l"/>
+            <a:r>
+              <a:rPr sz="1300" b="0" i="1">
+                <a:solidFill>
+                  <a:srgbClr val="FFFFFF"/>
+                </a:solidFill>
+              </a:rPr>
+              <a:t>Immediate actions · system limitations · how to improve detection over time</a:t>
+            </a:r>
+          </a:p>
+        </p:txBody>
+      </p:sp>
+    </p:spTree>
+  </p:cSld>
+  <p:clrMapOvr>
+    <a:masterClrMapping/>
+  </p:clrMapOvr>
+</p:sld>
+</file>
+
+<file path=ppt/slides/slide15.xml><?xml version="1.0" encoding="utf-8"?>
 <p:sld xmlns:a="http://schemas.openxmlformats.org/drawingml/2006/main" xmlns:p="http://schemas.openxmlformats.org/presentationml/2006/main" xmlns:r="http://schemas.openxmlformats.org/officeDocument/2006/relationships">
   <p:cSld>
     <p:spTree>

--- a/fraud_ops_presentation_updated.pptx
+++ b/fraud_ops_presentation_updated.pptx
@@ -4098,7 +4098,7 @@
                   <a:srgbClr val="1A2440"/>
                 </a:solidFill>
               </a:rPr>
-              <a:t>+30 points per spiked month</a:t>
+              <a:t>+20 points per spiked month</a:t>
             </a:r>
           </a:p>
         </p:txBody>
@@ -4474,7 +4474,7 @@
                   <a:srgbClr val="1A2440"/>
                 </a:solidFill>
               </a:rPr>
-              <a:t>25–50 pts  (scales with rate)</a:t>
+              <a:t>12–25 pts  (scales with rate)</a:t>
             </a:r>
           </a:p>
         </p:txBody>
@@ -4850,7 +4850,7 @@
                   <a:srgbClr val="1A2440"/>
                 </a:solidFill>
               </a:rPr>
-              <a:t>+20 points per pattern</a:t>
+              <a:t>+15 points per pattern</a:t>
             </a:r>
           </a:p>
         </p:txBody>
@@ -5038,7 +5038,7 @@
                   <a:srgbClr val="CCCCCC"/>
                 </a:solidFill>
               </a:rPr>
-              <a:t>Flag providers where ≥ 70% of claims in a category are round numbers (whole euros, multiples of 50). Real optical purchases have irregular amounts like 349.91€.</a:t>
+              <a:t>Flag providers where ≥ 70% of claims in a category are whole euro amounts (no cents). Real optical purchases have irregular amounts like 349.91€.</a:t>
             </a:r>
           </a:p>
         </p:txBody>
@@ -5149,7 +5149,7 @@
                   <a:srgbClr val="FFFFFF"/>
                 </a:solidFill>
               </a:rPr>
-              <a:t>≥ 70% of claims are multiples of 50</a:t>
+              <a:t>≥ 70% of claims are whole euros</a:t>
             </a:r>
           </a:p>
         </p:txBody>
@@ -5226,7 +5226,7 @@
                   <a:srgbClr val="1A2440"/>
                 </a:solidFill>
               </a:rPr>
-              <a:t>+25 points per category</a:t>
+              <a:t>+15 points per category</a:t>
             </a:r>
           </a:p>
         </p:txBody>
@@ -13342,7 +13342,7 @@
                   <a:srgbClr val="1A2440"/>
                 </a:solidFill>
               </a:rPr>
-              <a:t>Les lunettes à Soso</a:t>
+              <a:t>Queen optics</a:t>
             </a:r>
           </a:p>
         </p:txBody>
@@ -13376,7 +13376,7 @@
                   <a:srgbClr val="D62839"/>
                 </a:solidFill>
               </a:rPr>
-              <a:t>100</a:t>
+              <a:t>99</a:t>
             </a:r>
           </a:p>
         </p:txBody>
@@ -13444,7 +13444,7 @@
                   <a:srgbClr val="444444"/>
                 </a:solidFill>
               </a:rPr>
-              <a:t>Co-billing + spike + repeated + rounds</a:t>
+              <a:t>Co-billing + spike + rounds</a:t>
             </a:r>
           </a:p>
         </p:txBody>
@@ -13478,7 +13478,7 @@
                   <a:srgbClr val="444444"/>
                 </a:solidFill>
               </a:rPr>
-              <a:t>Immediate audit — 4 independent fraud signals</a:t>
+              <a:t>Full audit + suspend payments</a:t>
             </a:r>
           </a:p>
         </p:txBody>
@@ -13555,7 +13555,7 @@
                   <a:srgbClr val="1A2440"/>
                 </a:solidFill>
               </a:rPr>
-              <a:t>Penthievre alambics</a:t>
+              <a:t>Mike lunettes</a:t>
             </a:r>
           </a:p>
         </p:txBody>
@@ -13589,7 +13589,7 @@
                   <a:srgbClr val="D62839"/>
                 </a:solidFill>
               </a:rPr>
-              <a:t>100</a:t>
+              <a:t>96</a:t>
             </a:r>
           </a:p>
         </p:txBody>
@@ -13768,7 +13768,7 @@
                   <a:srgbClr val="1A2440"/>
                 </a:solidFill>
               </a:rPr>
-              <a:t>Queen optics</a:t>
+              <a:t>Les lunettes à Soso</a:t>
             </a:r>
           </a:p>
         </p:txBody>
@@ -13802,7 +13802,7 @@
                   <a:srgbClr val="D62839"/>
                 </a:solidFill>
               </a:rPr>
-              <a:t>100</a:t>
+              <a:t>84</a:t>
             </a:r>
           </a:p>
         </p:txBody>
@@ -13870,7 +13870,7 @@
                   <a:srgbClr val="444444"/>
                 </a:solidFill>
               </a:rPr>
-              <a:t>Co-billing + spike + rounds</a:t>
+              <a:t>Co-billing + spike + repeated + rounds</a:t>
             </a:r>
           </a:p>
         </p:txBody>
@@ -13904,7 +13904,7 @@
                   <a:srgbClr val="444444"/>
                 </a:solidFill>
               </a:rPr>
-              <a:t>Full audit + suspend payments</a:t>
+              <a:t>Immediate audit — 4 independent fraud signals</a:t>
             </a:r>
           </a:p>
         </p:txBody>
@@ -13981,7 +13981,7 @@
                   <a:srgbClr val="1A2440"/>
                 </a:solidFill>
               </a:rPr>
-              <a:t>Mike lunettes</a:t>
+              <a:t>Penthievre alambics</a:t>
             </a:r>
           </a:p>
         </p:txBody>
@@ -14015,7 +14015,7 @@
                   <a:srgbClr val="D62839"/>
                 </a:solidFill>
               </a:rPr>
-              <a:t>100</a:t>
+              <a:t>78</a:t>
             </a:r>
           </a:p>
         </p:txBody>
@@ -14228,7 +14228,7 @@
                   <a:srgbClr val="D62839"/>
                 </a:solidFill>
               </a:rPr>
-              <a:t>100</a:t>
+              <a:t>74</a:t>
             </a:r>
           </a:p>
         </p:txBody>
@@ -14350,7 +14350,7 @@
             <a:avLst/>
           </a:prstGeom>
           <a:solidFill>
-            <a:srgbClr val="FFEBEB"/>
+            <a:srgbClr val="FFF3E6"/>
           </a:solidFill>
           <a:ln>
             <a:noFill/>
@@ -14402,7 +14402,7 @@
           <a:p>
             <a:pPr algn="l"/>
             <a:r>
-              <a:rPr sz="1100" b="1" i="0">
+              <a:rPr sz="1100" b="0" i="0">
                 <a:solidFill>
                   <a:srgbClr val="1A2440"/>
                 </a:solidFill>
@@ -14438,10 +14438,10 @@
             <a:r>
               <a:rPr sz="1200" b="1" i="0">
                 <a:solidFill>
-                  <a:srgbClr val="D62839"/>
-                </a:solidFill>
-              </a:rPr>
-              <a:t>93</a:t>
+                  <a:srgbClr val="E07B39"/>
+                </a:solidFill>
+              </a:rPr>
+              <a:t>54</a:t>
             </a:r>
           </a:p>
         </p:txBody>
@@ -14472,10 +14472,10 @@
             <a:r>
               <a:rPr sz="1000" b="1" i="0">
                 <a:solidFill>
-                  <a:srgbClr val="D62839"/>
-                </a:solidFill>
-              </a:rPr>
-              <a:t>Payments held</a:t>
+                  <a:srgbClr val="E07B39"/>
+                </a:solidFill>
+              </a:rPr>
+              <a:t>Under review</a:t>
             </a:r>
           </a:p>
         </p:txBody>
@@ -14543,7 +14543,7 @@
                   <a:srgbClr val="444444"/>
                 </a:solidFill>
               </a:rPr>
-              <a:t>Payments held — multiple signals</a:t>
+              <a:t>Manual review — multiple signals, below hold threshold</a:t>
             </a:r>
           </a:p>
         </p:txBody>
@@ -14563,7 +14563,7 @@
             <a:avLst/>
           </a:prstGeom>
           <a:solidFill>
-            <a:srgbClr val="FFEBEB"/>
+            <a:srgbClr val="FFF3E6"/>
           </a:solidFill>
           <a:ln>
             <a:noFill/>
@@ -14615,7 +14615,7 @@
           <a:p>
             <a:pPr algn="l"/>
             <a:r>
-              <a:rPr sz="1100" b="1" i="0">
+              <a:rPr sz="1100" b="0" i="0">
                 <a:solidFill>
                   <a:srgbClr val="1A2440"/>
                 </a:solidFill>
@@ -14651,10 +14651,10 @@
             <a:r>
               <a:rPr sz="1200" b="1" i="0">
                 <a:solidFill>
-                  <a:srgbClr val="D62839"/>
-                </a:solidFill>
-              </a:rPr>
-              <a:t>75</a:t>
+                  <a:srgbClr val="E07B39"/>
+                </a:solidFill>
+              </a:rPr>
+              <a:t>40</a:t>
             </a:r>
           </a:p>
         </p:txBody>
@@ -14685,10 +14685,10 @@
             <a:r>
               <a:rPr sz="1000" b="1" i="0">
                 <a:solidFill>
-                  <a:srgbClr val="D62839"/>
-                </a:solidFill>
-              </a:rPr>
-              <a:t>Payments held</a:t>
+                  <a:srgbClr val="E07B39"/>
+                </a:solidFill>
+              </a:rPr>
+              <a:t>Under review</a:t>
             </a:r>
           </a:p>
         </p:txBody>
@@ -14756,7 +14756,7 @@
                   <a:srgbClr val="444444"/>
                 </a:solidFill>
               </a:rPr>
-              <a:t>Payments held — systematic round numbers</a:t>
+              <a:t>Manual review — systematic round numbers</a:t>
             </a:r>
           </a:p>
         </p:txBody>
@@ -14769,7 +14769,220 @@
         </p:nvSpPr>
         <p:spPr>
           <a:xfrm>
-            <a:off x="274320" y="4617720"/>
+            <a:off x="274320" y="4544568"/>
+            <a:ext cx="11640312" cy="384048"/>
+          </a:xfrm>
+          <a:prstGeom prst="rect">
+            <a:avLst/>
+          </a:prstGeom>
+          <a:solidFill>
+            <a:srgbClr val="FFF3E6"/>
+          </a:solidFill>
+          <a:ln>
+            <a:noFill/>
+          </a:ln>
+        </p:spPr>
+        <p:style>
+          <a:lnRef idx="1">
+            <a:schemeClr val="accent1"/>
+          </a:lnRef>
+          <a:fillRef idx="3">
+            <a:schemeClr val="accent1"/>
+          </a:fillRef>
+          <a:effectRef idx="2">
+            <a:schemeClr val="accent1"/>
+          </a:effectRef>
+          <a:fontRef idx="minor">
+            <a:schemeClr val="lt1"/>
+          </a:fontRef>
+        </p:style>
+        <p:txBody>
+          <a:bodyPr rtlCol="0" anchor="ctr"/>
+          <a:lstStyle/>
+          <a:p>
+            <a:pPr algn="ctr"/>
+          </a:p>
+        </p:txBody>
+      </p:sp>
+      <p:sp>
+        <p:nvSpPr>
+          <p:cNvPr id="59" name="TextBox 58"/>
+          <p:cNvSpPr txBox="1"/>
+          <p:nvPr/>
+        </p:nvSpPr>
+        <p:spPr>
+          <a:xfrm>
+            <a:off x="365760" y="4599431"/>
+            <a:ext cx="2834640" cy="274320"/>
+          </a:xfrm>
+          <a:prstGeom prst="rect">
+            <a:avLst/>
+          </a:prstGeom>
+          <a:noFill/>
+        </p:spPr>
+        <p:txBody>
+          <a:bodyPr wrap="square">
+            <a:spAutoFit/>
+          </a:bodyPr>
+          <a:lstStyle/>
+          <a:p>
+            <a:pPr algn="l"/>
+            <a:r>
+              <a:rPr sz="1100" b="0" i="0">
+                <a:solidFill>
+                  <a:srgbClr val="1A2440"/>
+                </a:solidFill>
+              </a:rPr>
+              <a:t>Voodoo</a:t>
+            </a:r>
+          </a:p>
+        </p:txBody>
+      </p:sp>
+      <p:sp>
+        <p:nvSpPr>
+          <p:cNvPr id="60" name="TextBox 59"/>
+          <p:cNvSpPr txBox="1"/>
+          <p:nvPr/>
+        </p:nvSpPr>
+        <p:spPr>
+          <a:xfrm>
+            <a:off x="3291840" y="4599431"/>
+            <a:ext cx="1371600" cy="274320"/>
+          </a:xfrm>
+          <a:prstGeom prst="rect">
+            <a:avLst/>
+          </a:prstGeom>
+          <a:noFill/>
+        </p:spPr>
+        <p:txBody>
+          <a:bodyPr wrap="square">
+            <a:spAutoFit/>
+          </a:bodyPr>
+          <a:lstStyle/>
+          <a:p>
+            <a:pPr algn="l"/>
+            <a:r>
+              <a:rPr sz="1200" b="1" i="0">
+                <a:solidFill>
+                  <a:srgbClr val="E07B39"/>
+                </a:solidFill>
+              </a:rPr>
+              <a:t>15</a:t>
+            </a:r>
+          </a:p>
+        </p:txBody>
+      </p:sp>
+      <p:sp>
+        <p:nvSpPr>
+          <p:cNvPr id="61" name="TextBox 60"/>
+          <p:cNvSpPr txBox="1"/>
+          <p:nvPr/>
+        </p:nvSpPr>
+        <p:spPr>
+          <a:xfrm>
+            <a:off x="4754879" y="4599431"/>
+            <a:ext cx="1600200" cy="274320"/>
+          </a:xfrm>
+          <a:prstGeom prst="rect">
+            <a:avLst/>
+          </a:prstGeom>
+          <a:noFill/>
+        </p:spPr>
+        <p:txBody>
+          <a:bodyPr wrap="square">
+            <a:spAutoFit/>
+          </a:bodyPr>
+          <a:lstStyle/>
+          <a:p>
+            <a:pPr algn="l"/>
+            <a:r>
+              <a:rPr sz="1000" b="1" i="0">
+                <a:solidFill>
+                  <a:srgbClr val="E07B39"/>
+                </a:solidFill>
+              </a:rPr>
+              <a:t>Under review</a:t>
+            </a:r>
+          </a:p>
+        </p:txBody>
+      </p:sp>
+      <p:sp>
+        <p:nvSpPr>
+          <p:cNvPr id="62" name="TextBox 61"/>
+          <p:cNvSpPr txBox="1"/>
+          <p:nvPr/>
+        </p:nvSpPr>
+        <p:spPr>
+          <a:xfrm>
+            <a:off x="6446520" y="4599431"/>
+            <a:ext cx="1874519" cy="274320"/>
+          </a:xfrm>
+          <a:prstGeom prst="rect">
+            <a:avLst/>
+          </a:prstGeom>
+          <a:noFill/>
+        </p:spPr>
+        <p:txBody>
+          <a:bodyPr wrap="square">
+            <a:spAutoFit/>
+          </a:bodyPr>
+          <a:lstStyle/>
+          <a:p>
+            <a:pPr algn="l"/>
+            <a:r>
+              <a:rPr sz="1000" b="0" i="0">
+                <a:solidFill>
+                  <a:srgbClr val="444444"/>
+                </a:solidFill>
+              </a:rPr>
+              <a:t>Round number billing</a:t>
+            </a:r>
+          </a:p>
+        </p:txBody>
+      </p:sp>
+      <p:sp>
+        <p:nvSpPr>
+          <p:cNvPr id="63" name="TextBox 62"/>
+          <p:cNvSpPr txBox="1"/>
+          <p:nvPr/>
+        </p:nvSpPr>
+        <p:spPr>
+          <a:xfrm>
+            <a:off x="8412480" y="4599431"/>
+            <a:ext cx="3474720" cy="274320"/>
+          </a:xfrm>
+          <a:prstGeom prst="rect">
+            <a:avLst/>
+          </a:prstGeom>
+          <a:noFill/>
+        </p:spPr>
+        <p:txBody>
+          <a:bodyPr wrap="square">
+            <a:spAutoFit/>
+          </a:bodyPr>
+          <a:lstStyle/>
+          <a:p>
+            <a:pPr algn="l"/>
+            <a:r>
+              <a:rPr sz="1000" b="0" i="0">
+                <a:solidFill>
+                  <a:srgbClr val="444444"/>
+                </a:solidFill>
+              </a:rPr>
+              <a:t>Monitor — low score but pattern present</a:t>
+            </a:r>
+          </a:p>
+        </p:txBody>
+      </p:sp>
+      <p:sp>
+        <p:nvSpPr>
+          <p:cNvPr id="64" name="Rectangle 63"/>
+          <p:cNvSpPr/>
+          <p:nvPr/>
+        </p:nvSpPr>
+        <p:spPr>
+          <a:xfrm>
+            <a:off x="274320" y="5010912"/>
             <a:ext cx="11640312" cy="1536192"/>
           </a:xfrm>
           <a:prstGeom prst="rect">
@@ -14806,13 +15019,13 @@
       </p:sp>
       <p:sp>
         <p:nvSpPr>
-          <p:cNvPr id="59" name="Rectangle 58"/>
+          <p:cNvPr id="65" name="Rectangle 64"/>
           <p:cNvSpPr/>
           <p:nvPr/>
         </p:nvSpPr>
         <p:spPr>
           <a:xfrm>
-            <a:off x="274320" y="4617720"/>
+            <a:off x="274320" y="5010912"/>
             <a:ext cx="109728" cy="1536192"/>
           </a:xfrm>
           <a:prstGeom prst="rect">
@@ -14849,13 +15062,13 @@
       </p:sp>
       <p:sp>
         <p:nvSpPr>
-          <p:cNvPr id="60" name="TextBox 59"/>
-          <p:cNvSpPr txBox="1"/>
-          <p:nvPr/>
-        </p:nvSpPr>
-        <p:spPr>
-          <a:xfrm>
-            <a:off x="502920" y="4690872"/>
+          <p:cNvPr id="66" name="TextBox 65"/>
+          <p:cNvSpPr txBox="1"/>
+          <p:nvPr/>
+        </p:nvSpPr>
+        <p:spPr>
+          <a:xfrm>
+            <a:off x="502920" y="5084064"/>
             <a:ext cx="5029200" cy="320040"/>
           </a:xfrm>
           <a:prstGeom prst="rect">
@@ -14883,13 +15096,13 @@
       </p:sp>
       <p:sp>
         <p:nvSpPr>
-          <p:cNvPr id="61" name="TextBox 60"/>
-          <p:cNvSpPr txBox="1"/>
-          <p:nvPr/>
-        </p:nvSpPr>
-        <p:spPr>
-          <a:xfrm>
-            <a:off x="502920" y="5056631"/>
+          <p:cNvPr id="67" name="TextBox 66"/>
+          <p:cNvSpPr txBox="1"/>
+          <p:nvPr/>
+        </p:nvSpPr>
+        <p:spPr>
+          <a:xfrm>
+            <a:off x="502920" y="5449823"/>
             <a:ext cx="11155680" cy="256032"/>
           </a:xfrm>
           <a:prstGeom prst="rect">
@@ -14917,13 +15130,13 @@
       </p:sp>
       <p:sp>
         <p:nvSpPr>
-          <p:cNvPr id="62" name="TextBox 61"/>
-          <p:cNvSpPr txBox="1"/>
-          <p:nvPr/>
-        </p:nvSpPr>
-        <p:spPr>
-          <a:xfrm>
-            <a:off x="502920" y="5330951"/>
+          <p:cNvPr id="68" name="TextBox 67"/>
+          <p:cNvSpPr txBox="1"/>
+          <p:nvPr/>
+        </p:nvSpPr>
+        <p:spPr>
+          <a:xfrm>
+            <a:off x="502920" y="5724143"/>
             <a:ext cx="11155680" cy="256032"/>
           </a:xfrm>
           <a:prstGeom prst="rect">
@@ -14951,13 +15164,13 @@
       </p:sp>
       <p:sp>
         <p:nvSpPr>
-          <p:cNvPr id="63" name="TextBox 62"/>
-          <p:cNvSpPr txBox="1"/>
-          <p:nvPr/>
-        </p:nvSpPr>
-        <p:spPr>
-          <a:xfrm>
-            <a:off x="502920" y="5605271"/>
+          <p:cNvPr id="69" name="TextBox 68"/>
+          <p:cNvSpPr txBox="1"/>
+          <p:nvPr/>
+        </p:nvSpPr>
+        <p:spPr>
+          <a:xfrm>
+            <a:off x="502920" y="5998463"/>
             <a:ext cx="11155680" cy="256032"/>
           </a:xfrm>
           <a:prstGeom prst="rect">
@@ -14985,13 +15198,13 @@
       </p:sp>
       <p:sp>
         <p:nvSpPr>
-          <p:cNvPr id="64" name="TextBox 63"/>
-          <p:cNvSpPr txBox="1"/>
-          <p:nvPr/>
-        </p:nvSpPr>
-        <p:spPr>
-          <a:xfrm>
-            <a:off x="502920" y="5879592"/>
+          <p:cNvPr id="70" name="TextBox 69"/>
+          <p:cNvSpPr txBox="1"/>
+          <p:nvPr/>
+        </p:nvSpPr>
+        <p:spPr>
+          <a:xfrm>
+            <a:off x="502920" y="6272783"/>
             <a:ext cx="11155680" cy="256032"/>
           </a:xfrm>
           <a:prstGeom prst="rect">
@@ -17496,7 +17709,7 @@
                   <a:srgbClr val="FFFFFF"/>
                 </a:solidFill>
               </a:rPr>
-              <a:t>7 out of 12 providers showed at least one red flag · 4 distinct fraud patterns identified</a:t>
+              <a:t>8 out of 12 providers showed at least one red flag · 4 distinct fraud patterns identified</a:t>
             </a:r>
           </a:p>
         </p:txBody>
@@ -18078,7 +18291,7 @@
                   <a:srgbClr val="444444"/>
                 </a:solidFill>
               </a:rPr>
-              <a:t>Les lunettes à Soso</a:t>
+              <a:t>Queen optics</a:t>
             </a:r>
           </a:p>
         </p:txBody>
@@ -18112,7 +18325,7 @@
                   <a:srgbClr val="D62839"/>
                 </a:solidFill>
               </a:rPr>
-              <a:t>100</a:t>
+              <a:t>99</a:t>
             </a:r>
           </a:p>
         </p:txBody>
@@ -18180,7 +18393,7 @@
                   <a:srgbClr val="444444"/>
                 </a:solidFill>
               </a:rPr>
-              <a:t>Co-billing + spike + repeated + round numbers</a:t>
+              <a:t>Co-billing + billing spike + round numbers</a:t>
             </a:r>
           </a:p>
         </p:txBody>
@@ -18257,7 +18470,7 @@
                   <a:srgbClr val="444444"/>
                 </a:solidFill>
               </a:rPr>
-              <a:t>Penthievre alambics</a:t>
+              <a:t>Mike lunettes</a:t>
             </a:r>
           </a:p>
         </p:txBody>
@@ -18291,7 +18504,7 @@
                   <a:srgbClr val="D62839"/>
                 </a:solidFill>
               </a:rPr>
-              <a:t>100</a:t>
+              <a:t>96</a:t>
             </a:r>
           </a:p>
         </p:txBody>
@@ -18436,7 +18649,7 @@
                   <a:srgbClr val="444444"/>
                 </a:solidFill>
               </a:rPr>
-              <a:t>Queen optics</a:t>
+              <a:t>Les lunettes à Soso</a:t>
             </a:r>
           </a:p>
         </p:txBody>
@@ -18470,7 +18683,7 @@
                   <a:srgbClr val="D62839"/>
                 </a:solidFill>
               </a:rPr>
-              <a:t>100</a:t>
+              <a:t>84</a:t>
             </a:r>
           </a:p>
         </p:txBody>
@@ -18538,7 +18751,7 @@
                   <a:srgbClr val="444444"/>
                 </a:solidFill>
               </a:rPr>
-              <a:t>Co-billing + billing spike + round numbers</a:t>
+              <a:t>Co-billing + spike + repeated + round numbers</a:t>
             </a:r>
           </a:p>
         </p:txBody>
@@ -18615,7 +18828,7 @@
                   <a:srgbClr val="444444"/>
                 </a:solidFill>
               </a:rPr>
-              <a:t>Mike lunettes</a:t>
+              <a:t>Penthievre alambics</a:t>
             </a:r>
           </a:p>
         </p:txBody>
@@ -18649,7 +18862,7 @@
                   <a:srgbClr val="D62839"/>
                 </a:solidFill>
               </a:rPr>
-              <a:t>100</a:t>
+              <a:t>78</a:t>
             </a:r>
           </a:p>
         </p:txBody>
@@ -18828,7 +19041,7 @@
                   <a:srgbClr val="D62839"/>
                 </a:solidFill>
               </a:rPr>
-              <a:t>100</a:t>
+              <a:t>74</a:t>
             </a:r>
           </a:p>
         </p:txBody>
@@ -18916,7 +19129,7 @@
             <a:avLst/>
           </a:prstGeom>
           <a:solidFill>
-            <a:srgbClr val="FFEDED"/>
+            <a:srgbClr val="FFF6ED"/>
           </a:solidFill>
           <a:ln>
             <a:noFill/>
@@ -19004,10 +19217,10 @@
             <a:r>
               <a:rPr sz="1200" b="1" i="0">
                 <a:solidFill>
-                  <a:srgbClr val="D62839"/>
-                </a:solidFill>
-              </a:rPr>
-              <a:t>93</a:t>
+                  <a:srgbClr val="E07B39"/>
+                </a:solidFill>
+              </a:rPr>
+              <a:t>54</a:t>
             </a:r>
           </a:p>
         </p:txBody>
@@ -19038,10 +19251,10 @@
             <a:r>
               <a:rPr sz="1000" b="1" i="0">
                 <a:solidFill>
-                  <a:srgbClr val="D62839"/>
-                </a:solidFill>
-              </a:rPr>
-              <a:t>Payments held</a:t>
+                  <a:srgbClr val="E07B39"/>
+                </a:solidFill>
+              </a:rPr>
+              <a:t>Under review</a:t>
             </a:r>
           </a:p>
         </p:txBody>
@@ -19095,7 +19308,7 @@
             <a:avLst/>
           </a:prstGeom>
           <a:solidFill>
-            <a:srgbClr val="FFEDED"/>
+            <a:srgbClr val="FFF6ED"/>
           </a:solidFill>
           <a:ln>
             <a:noFill/>
@@ -19183,10 +19396,10 @@
             <a:r>
               <a:rPr sz="1200" b="1" i="0">
                 <a:solidFill>
-                  <a:srgbClr val="D62839"/>
-                </a:solidFill>
-              </a:rPr>
-              <a:t>75</a:t>
+                  <a:srgbClr val="E07B39"/>
+                </a:solidFill>
+              </a:rPr>
+              <a:t>40</a:t>
             </a:r>
           </a:p>
         </p:txBody>
@@ -19217,10 +19430,10 @@
             <a:r>
               <a:rPr sz="1000" b="1" i="0">
                 <a:solidFill>
-                  <a:srgbClr val="D62839"/>
-                </a:solidFill>
-              </a:rPr>
-              <a:t>Payments held</a:t>
+                  <a:srgbClr val="E07B39"/>
+                </a:solidFill>
+              </a:rPr>
+              <a:t>Under review</a:t>
             </a:r>
           </a:p>
         </p:txBody>
@@ -19268,6 +19481,185 @@
         <p:spPr>
           <a:xfrm>
             <a:off x="274320" y="4306824"/>
+            <a:ext cx="11640312" cy="356616"/>
+          </a:xfrm>
+          <a:prstGeom prst="rect">
+            <a:avLst/>
+          </a:prstGeom>
+          <a:solidFill>
+            <a:srgbClr val="FFF6ED"/>
+          </a:solidFill>
+          <a:ln>
+            <a:noFill/>
+          </a:ln>
+        </p:spPr>
+        <p:style>
+          <a:lnRef idx="1">
+            <a:schemeClr val="accent1"/>
+          </a:lnRef>
+          <a:fillRef idx="3">
+            <a:schemeClr val="accent1"/>
+          </a:fillRef>
+          <a:effectRef idx="2">
+            <a:schemeClr val="accent1"/>
+          </a:effectRef>
+          <a:fontRef idx="minor">
+            <a:schemeClr val="lt1"/>
+          </a:fontRef>
+        </p:style>
+        <p:txBody>
+          <a:bodyPr rtlCol="0" anchor="ctr"/>
+          <a:lstStyle/>
+          <a:p>
+            <a:pPr algn="ctr"/>
+          </a:p>
+        </p:txBody>
+      </p:sp>
+      <p:sp>
+        <p:nvSpPr>
+          <p:cNvPr id="51" name="TextBox 50"/>
+          <p:cNvSpPr txBox="1"/>
+          <p:nvPr/>
+        </p:nvSpPr>
+        <p:spPr>
+          <a:xfrm>
+            <a:off x="365760" y="4352544"/>
+            <a:ext cx="3291840" cy="256032"/>
+          </a:xfrm>
+          <a:prstGeom prst="rect">
+            <a:avLst/>
+          </a:prstGeom>
+          <a:noFill/>
+        </p:spPr>
+        <p:txBody>
+          <a:bodyPr wrap="square">
+            <a:spAutoFit/>
+          </a:bodyPr>
+          <a:lstStyle/>
+          <a:p>
+            <a:pPr algn="l"/>
+            <a:r>
+              <a:rPr sz="1100" b="0" i="0">
+                <a:solidFill>
+                  <a:srgbClr val="444444"/>
+                </a:solidFill>
+              </a:rPr>
+              <a:t>Voodoo</a:t>
+            </a:r>
+          </a:p>
+        </p:txBody>
+      </p:sp>
+      <p:sp>
+        <p:nvSpPr>
+          <p:cNvPr id="52" name="TextBox 51"/>
+          <p:cNvSpPr txBox="1"/>
+          <p:nvPr/>
+        </p:nvSpPr>
+        <p:spPr>
+          <a:xfrm>
+            <a:off x="3794759" y="4352544"/>
+            <a:ext cx="1280160" cy="256032"/>
+          </a:xfrm>
+          <a:prstGeom prst="rect">
+            <a:avLst/>
+          </a:prstGeom>
+          <a:noFill/>
+        </p:spPr>
+        <p:txBody>
+          <a:bodyPr wrap="square">
+            <a:spAutoFit/>
+          </a:bodyPr>
+          <a:lstStyle/>
+          <a:p>
+            <a:pPr algn="l"/>
+            <a:r>
+              <a:rPr sz="1200" b="1" i="0">
+                <a:solidFill>
+                  <a:srgbClr val="E07B39"/>
+                </a:solidFill>
+              </a:rPr>
+              <a:t>15</a:t>
+            </a:r>
+          </a:p>
+        </p:txBody>
+      </p:sp>
+      <p:sp>
+        <p:nvSpPr>
+          <p:cNvPr id="53" name="TextBox 52"/>
+          <p:cNvSpPr txBox="1"/>
+          <p:nvPr/>
+        </p:nvSpPr>
+        <p:spPr>
+          <a:xfrm>
+            <a:off x="5257800" y="4352544"/>
+            <a:ext cx="1600200" cy="256032"/>
+          </a:xfrm>
+          <a:prstGeom prst="rect">
+            <a:avLst/>
+          </a:prstGeom>
+          <a:noFill/>
+        </p:spPr>
+        <p:txBody>
+          <a:bodyPr wrap="square">
+            <a:spAutoFit/>
+          </a:bodyPr>
+          <a:lstStyle/>
+          <a:p>
+            <a:pPr algn="l"/>
+            <a:r>
+              <a:rPr sz="1000" b="1" i="0">
+                <a:solidFill>
+                  <a:srgbClr val="E07B39"/>
+                </a:solidFill>
+              </a:rPr>
+              <a:t>Under review</a:t>
+            </a:r>
+          </a:p>
+        </p:txBody>
+      </p:sp>
+      <p:sp>
+        <p:nvSpPr>
+          <p:cNvPr id="54" name="TextBox 53"/>
+          <p:cNvSpPr txBox="1"/>
+          <p:nvPr/>
+        </p:nvSpPr>
+        <p:spPr>
+          <a:xfrm>
+            <a:off x="6995159" y="4352544"/>
+            <a:ext cx="4937760" cy="256032"/>
+          </a:xfrm>
+          <a:prstGeom prst="rect">
+            <a:avLst/>
+          </a:prstGeom>
+          <a:noFill/>
+        </p:spPr>
+        <p:txBody>
+          <a:bodyPr wrap="square">
+            <a:spAutoFit/>
+          </a:bodyPr>
+          <a:lstStyle/>
+          <a:p>
+            <a:pPr algn="l"/>
+            <a:r>
+              <a:rPr sz="1000" b="0" i="0">
+                <a:solidFill>
+                  <a:srgbClr val="444444"/>
+                </a:solidFill>
+              </a:rPr>
+              <a:t>Round number billing detected</a:t>
+            </a:r>
+          </a:p>
+        </p:txBody>
+      </p:sp>
+      <p:sp>
+        <p:nvSpPr>
+          <p:cNvPr id="55" name="Rectangle 54"/>
+          <p:cNvSpPr/>
+          <p:nvPr/>
+        </p:nvSpPr>
+        <p:spPr>
+          <a:xfrm>
+            <a:off x="274320" y="4663440"/>
             <a:ext cx="11640312" cy="356616"/>
           </a:xfrm>
           <a:prstGeom prst="rect">
@@ -19304,13 +19696,13 @@
       </p:sp>
       <p:sp>
         <p:nvSpPr>
-          <p:cNvPr id="51" name="TextBox 50"/>
-          <p:cNvSpPr txBox="1"/>
-          <p:nvPr/>
-        </p:nvSpPr>
-        <p:spPr>
-          <a:xfrm>
-            <a:off x="365760" y="4352544"/>
+          <p:cNvPr id="56" name="TextBox 55"/>
+          <p:cNvSpPr txBox="1"/>
+          <p:nvPr/>
+        </p:nvSpPr>
+        <p:spPr>
+          <a:xfrm>
+            <a:off x="365760" y="4709159"/>
             <a:ext cx="3291840" cy="256032"/>
           </a:xfrm>
           <a:prstGeom prst="rect">
@@ -19331,20 +19723,20 @@
                   <a:srgbClr val="444444"/>
                 </a:solidFill>
               </a:rPr>
-              <a:t>Voodoo optics</a:t>
-            </a:r>
-          </a:p>
-        </p:txBody>
-      </p:sp>
-      <p:sp>
-        <p:nvSpPr>
-          <p:cNvPr id="52" name="TextBox 51"/>
-          <p:cNvSpPr txBox="1"/>
-          <p:nvPr/>
-        </p:nvSpPr>
-        <p:spPr>
-          <a:xfrm>
-            <a:off x="3794759" y="4352544"/>
+              <a:t>La classe à Dallas</a:t>
+            </a:r>
+          </a:p>
+        </p:txBody>
+      </p:sp>
+      <p:sp>
+        <p:nvSpPr>
+          <p:cNvPr id="57" name="TextBox 56"/>
+          <p:cNvSpPr txBox="1"/>
+          <p:nvPr/>
+        </p:nvSpPr>
+        <p:spPr>
+          <a:xfrm>
+            <a:off x="3794759" y="4709159"/>
             <a:ext cx="1280160" cy="256032"/>
           </a:xfrm>
           <a:prstGeom prst="rect">
@@ -19372,13 +19764,13 @@
       </p:sp>
       <p:sp>
         <p:nvSpPr>
-          <p:cNvPr id="53" name="TextBox 52"/>
-          <p:cNvSpPr txBox="1"/>
-          <p:nvPr/>
-        </p:nvSpPr>
-        <p:spPr>
-          <a:xfrm>
-            <a:off x="5257800" y="4352544"/>
+          <p:cNvPr id="58" name="TextBox 57"/>
+          <p:cNvSpPr txBox="1"/>
+          <p:nvPr/>
+        </p:nvSpPr>
+        <p:spPr>
+          <a:xfrm>
+            <a:off x="5257800" y="4709159"/>
             <a:ext cx="1600200" cy="256032"/>
           </a:xfrm>
           <a:prstGeom prst="rect">
@@ -19406,13 +19798,13 @@
       </p:sp>
       <p:sp>
         <p:nvSpPr>
-          <p:cNvPr id="54" name="TextBox 53"/>
-          <p:cNvSpPr txBox="1"/>
-          <p:nvPr/>
-        </p:nvSpPr>
-        <p:spPr>
-          <a:xfrm>
-            <a:off x="6995159" y="4352544"/>
+          <p:cNvPr id="59" name="TextBox 58"/>
+          <p:cNvSpPr txBox="1"/>
+          <p:nvPr/>
+        </p:nvSpPr>
+        <p:spPr>
+          <a:xfrm>
+            <a:off x="6995159" y="4709159"/>
             <a:ext cx="4937760" cy="256032"/>
           </a:xfrm>
           <a:prstGeom prst="rect">
@@ -19440,13 +19832,13 @@
       </p:sp>
       <p:sp>
         <p:nvSpPr>
-          <p:cNvPr id="55" name="Rectangle 54"/>
+          <p:cNvPr id="60" name="Rectangle 59"/>
           <p:cNvSpPr/>
           <p:nvPr/>
         </p:nvSpPr>
         <p:spPr>
           <a:xfrm>
-            <a:off x="274320" y="4663440"/>
+            <a:off x="274320" y="5020055"/>
             <a:ext cx="11640312" cy="356616"/>
           </a:xfrm>
           <a:prstGeom prst="rect">
@@ -19483,13 +19875,13 @@
       </p:sp>
       <p:sp>
         <p:nvSpPr>
-          <p:cNvPr id="56" name="TextBox 55"/>
-          <p:cNvSpPr txBox="1"/>
-          <p:nvPr/>
-        </p:nvSpPr>
-        <p:spPr>
-          <a:xfrm>
-            <a:off x="365760" y="4709159"/>
+          <p:cNvPr id="61" name="TextBox 60"/>
+          <p:cNvSpPr txBox="1"/>
+          <p:nvPr/>
+        </p:nvSpPr>
+        <p:spPr>
+          <a:xfrm>
+            <a:off x="365760" y="5065775"/>
             <a:ext cx="3291840" cy="256032"/>
           </a:xfrm>
           <a:prstGeom prst="rect">
@@ -19510,20 +19902,20 @@
                   <a:srgbClr val="444444"/>
                 </a:solidFill>
               </a:rPr>
-              <a:t>abc optics</a:t>
-            </a:r>
-          </a:p>
-        </p:txBody>
-      </p:sp>
-      <p:sp>
-        <p:nvSpPr>
-          <p:cNvPr id="57" name="TextBox 56"/>
-          <p:cNvSpPr txBox="1"/>
-          <p:nvPr/>
-        </p:nvSpPr>
-        <p:spPr>
-          <a:xfrm>
-            <a:off x="3794759" y="4709159"/>
+              <a:t>Cool optics</a:t>
+            </a:r>
+          </a:p>
+        </p:txBody>
+      </p:sp>
+      <p:sp>
+        <p:nvSpPr>
+          <p:cNvPr id="62" name="TextBox 61"/>
+          <p:cNvSpPr txBox="1"/>
+          <p:nvPr/>
+        </p:nvSpPr>
+        <p:spPr>
+          <a:xfrm>
+            <a:off x="3794759" y="5065775"/>
             <a:ext cx="1280160" cy="256032"/>
           </a:xfrm>
           <a:prstGeom prst="rect">
@@ -19551,13 +19943,13 @@
       </p:sp>
       <p:sp>
         <p:nvSpPr>
-          <p:cNvPr id="58" name="TextBox 57"/>
-          <p:cNvSpPr txBox="1"/>
-          <p:nvPr/>
-        </p:nvSpPr>
-        <p:spPr>
-          <a:xfrm>
-            <a:off x="5257800" y="4709159"/>
+          <p:cNvPr id="63" name="TextBox 62"/>
+          <p:cNvSpPr txBox="1"/>
+          <p:nvPr/>
+        </p:nvSpPr>
+        <p:spPr>
+          <a:xfrm>
+            <a:off x="5257800" y="5065775"/>
             <a:ext cx="1600200" cy="256032"/>
           </a:xfrm>
           <a:prstGeom prst="rect">
@@ -19585,13 +19977,13 @@
       </p:sp>
       <p:sp>
         <p:nvSpPr>
-          <p:cNvPr id="59" name="TextBox 58"/>
-          <p:cNvSpPr txBox="1"/>
-          <p:nvPr/>
-        </p:nvSpPr>
-        <p:spPr>
-          <a:xfrm>
-            <a:off x="6995159" y="4709159"/>
+          <p:cNvPr id="64" name="TextBox 63"/>
+          <p:cNvSpPr txBox="1"/>
+          <p:nvPr/>
+        </p:nvSpPr>
+        <p:spPr>
+          <a:xfrm>
+            <a:off x="6995159" y="5065775"/>
             <a:ext cx="4937760" cy="256032"/>
           </a:xfrm>
           <a:prstGeom prst="rect">
@@ -19619,13 +20011,13 @@
       </p:sp>
       <p:sp>
         <p:nvSpPr>
-          <p:cNvPr id="60" name="Rectangle 59"/>
+          <p:cNvPr id="65" name="Rectangle 64"/>
           <p:cNvSpPr/>
           <p:nvPr/>
         </p:nvSpPr>
         <p:spPr>
           <a:xfrm>
-            <a:off x="274320" y="5020055"/>
+            <a:off x="274320" y="5376671"/>
             <a:ext cx="11640312" cy="356616"/>
           </a:xfrm>
           <a:prstGeom prst="rect">
@@ -19662,13 +20054,13 @@
       </p:sp>
       <p:sp>
         <p:nvSpPr>
-          <p:cNvPr id="61" name="TextBox 60"/>
-          <p:cNvSpPr txBox="1"/>
-          <p:nvPr/>
-        </p:nvSpPr>
-        <p:spPr>
-          <a:xfrm>
-            <a:off x="365760" y="5065775"/>
+          <p:cNvPr id="66" name="TextBox 65"/>
+          <p:cNvSpPr txBox="1"/>
+          <p:nvPr/>
+        </p:nvSpPr>
+        <p:spPr>
+          <a:xfrm>
+            <a:off x="365760" y="5422391"/>
             <a:ext cx="3291840" cy="256032"/>
           </a:xfrm>
           <a:prstGeom prst="rect">
@@ -19689,20 +20081,20 @@
                   <a:srgbClr val="444444"/>
                 </a:solidFill>
               </a:rPr>
-              <a:t>Cool optics</a:t>
-            </a:r>
-          </a:p>
-        </p:txBody>
-      </p:sp>
-      <p:sp>
-        <p:nvSpPr>
-          <p:cNvPr id="62" name="TextBox 61"/>
-          <p:cNvSpPr txBox="1"/>
-          <p:nvPr/>
-        </p:nvSpPr>
-        <p:spPr>
-          <a:xfrm>
-            <a:off x="3794759" y="5065775"/>
+              <a:t>abc optic</a:t>
+            </a:r>
+          </a:p>
+        </p:txBody>
+      </p:sp>
+      <p:sp>
+        <p:nvSpPr>
+          <p:cNvPr id="67" name="TextBox 66"/>
+          <p:cNvSpPr txBox="1"/>
+          <p:nvPr/>
+        </p:nvSpPr>
+        <p:spPr>
+          <a:xfrm>
+            <a:off x="3794759" y="5422391"/>
             <a:ext cx="1280160" cy="256032"/>
           </a:xfrm>
           <a:prstGeom prst="rect">
@@ -19730,13 +20122,13 @@
       </p:sp>
       <p:sp>
         <p:nvSpPr>
-          <p:cNvPr id="63" name="TextBox 62"/>
-          <p:cNvSpPr txBox="1"/>
-          <p:nvPr/>
-        </p:nvSpPr>
-        <p:spPr>
-          <a:xfrm>
-            <a:off x="5257800" y="5065775"/>
+          <p:cNvPr id="68" name="TextBox 67"/>
+          <p:cNvSpPr txBox="1"/>
+          <p:nvPr/>
+        </p:nvSpPr>
+        <p:spPr>
+          <a:xfrm>
+            <a:off x="5257800" y="5422391"/>
             <a:ext cx="1600200" cy="256032"/>
           </a:xfrm>
           <a:prstGeom prst="rect">
@@ -19764,13 +20156,13 @@
       </p:sp>
       <p:sp>
         <p:nvSpPr>
-          <p:cNvPr id="64" name="TextBox 63"/>
-          <p:cNvSpPr txBox="1"/>
-          <p:nvPr/>
-        </p:nvSpPr>
-        <p:spPr>
-          <a:xfrm>
-            <a:off x="6995159" y="5065775"/>
+          <p:cNvPr id="69" name="TextBox 68"/>
+          <p:cNvSpPr txBox="1"/>
+          <p:nvPr/>
+        </p:nvSpPr>
+        <p:spPr>
+          <a:xfrm>
+            <a:off x="6995159" y="5422391"/>
             <a:ext cx="4937760" cy="256032"/>
           </a:xfrm>
           <a:prstGeom prst="rect">
@@ -19798,13 +20190,13 @@
       </p:sp>
       <p:sp>
         <p:nvSpPr>
-          <p:cNvPr id="65" name="Rectangle 64"/>
+          <p:cNvPr id="70" name="Rectangle 69"/>
           <p:cNvSpPr/>
           <p:nvPr/>
         </p:nvSpPr>
         <p:spPr>
           <a:xfrm>
-            <a:off x="274320" y="5376671"/>
+            <a:off x="274320" y="5733287"/>
             <a:ext cx="11640312" cy="356616"/>
           </a:xfrm>
           <a:prstGeom prst="rect">
@@ -19841,185 +20233,6 @@
       </p:sp>
       <p:sp>
         <p:nvSpPr>
-          <p:cNvPr id="66" name="TextBox 65"/>
-          <p:cNvSpPr txBox="1"/>
-          <p:nvPr/>
-        </p:nvSpPr>
-        <p:spPr>
-          <a:xfrm>
-            <a:off x="365760" y="5422391"/>
-            <a:ext cx="3291840" cy="256032"/>
-          </a:xfrm>
-          <a:prstGeom prst="rect">
-            <a:avLst/>
-          </a:prstGeom>
-          <a:noFill/>
-        </p:spPr>
-        <p:txBody>
-          <a:bodyPr wrap="square">
-            <a:spAutoFit/>
-          </a:bodyPr>
-          <a:lstStyle/>
-          <a:p>
-            <a:pPr algn="l"/>
-            <a:r>
-              <a:rPr sz="1100" b="0" i="0">
-                <a:solidFill>
-                  <a:srgbClr val="444444"/>
-                </a:solidFill>
-              </a:rPr>
-              <a:t>Dallas optics</a:t>
-            </a:r>
-          </a:p>
-        </p:txBody>
-      </p:sp>
-      <p:sp>
-        <p:nvSpPr>
-          <p:cNvPr id="67" name="TextBox 66"/>
-          <p:cNvSpPr txBox="1"/>
-          <p:nvPr/>
-        </p:nvSpPr>
-        <p:spPr>
-          <a:xfrm>
-            <a:off x="3794759" y="5422391"/>
-            <a:ext cx="1280160" cy="256032"/>
-          </a:xfrm>
-          <a:prstGeom prst="rect">
-            <a:avLst/>
-          </a:prstGeom>
-          <a:noFill/>
-        </p:spPr>
-        <p:txBody>
-          <a:bodyPr wrap="square">
-            <a:spAutoFit/>
-          </a:bodyPr>
-          <a:lstStyle/>
-          <a:p>
-            <a:pPr algn="l"/>
-            <a:r>
-              <a:rPr sz="1200" b="1" i="0">
-                <a:solidFill>
-                  <a:srgbClr val="2E7D32"/>
-                </a:solidFill>
-              </a:rPr>
-              <a:t>0</a:t>
-            </a:r>
-          </a:p>
-        </p:txBody>
-      </p:sp>
-      <p:sp>
-        <p:nvSpPr>
-          <p:cNvPr id="68" name="TextBox 67"/>
-          <p:cNvSpPr txBox="1"/>
-          <p:nvPr/>
-        </p:nvSpPr>
-        <p:spPr>
-          <a:xfrm>
-            <a:off x="5257800" y="5422391"/>
-            <a:ext cx="1600200" cy="256032"/>
-          </a:xfrm>
-          <a:prstGeom prst="rect">
-            <a:avLst/>
-          </a:prstGeom>
-          <a:noFill/>
-        </p:spPr>
-        <p:txBody>
-          <a:bodyPr wrap="square">
-            <a:spAutoFit/>
-          </a:bodyPr>
-          <a:lstStyle/>
-          <a:p>
-            <a:pPr algn="l"/>
-            <a:r>
-              <a:rPr sz="1000" b="1" i="0">
-                <a:solidFill>
-                  <a:srgbClr val="2E7D32"/>
-                </a:solidFill>
-              </a:rPr>
-              <a:t>Cleared</a:t>
-            </a:r>
-          </a:p>
-        </p:txBody>
-      </p:sp>
-      <p:sp>
-        <p:nvSpPr>
-          <p:cNvPr id="69" name="TextBox 68"/>
-          <p:cNvSpPr txBox="1"/>
-          <p:nvPr/>
-        </p:nvSpPr>
-        <p:spPr>
-          <a:xfrm>
-            <a:off x="6995159" y="5422391"/>
-            <a:ext cx="4937760" cy="256032"/>
-          </a:xfrm>
-          <a:prstGeom prst="rect">
-            <a:avLst/>
-          </a:prstGeom>
-          <a:noFill/>
-        </p:spPr>
-        <p:txBody>
-          <a:bodyPr wrap="square">
-            <a:spAutoFit/>
-          </a:bodyPr>
-          <a:lstStyle/>
-          <a:p>
-            <a:pPr algn="l"/>
-            <a:r>
-              <a:rPr sz="1000" b="0" i="0">
-                <a:solidFill>
-                  <a:srgbClr val="444444"/>
-                </a:solidFill>
-              </a:rPr>
-              <a:t>No suspicious patterns found</a:t>
-            </a:r>
-          </a:p>
-        </p:txBody>
-      </p:sp>
-      <p:sp>
-        <p:nvSpPr>
-          <p:cNvPr id="70" name="Rectangle 69"/>
-          <p:cNvSpPr/>
-          <p:nvPr/>
-        </p:nvSpPr>
-        <p:spPr>
-          <a:xfrm>
-            <a:off x="274320" y="5733287"/>
-            <a:ext cx="11640312" cy="356616"/>
-          </a:xfrm>
-          <a:prstGeom prst="rect">
-            <a:avLst/>
-          </a:prstGeom>
-          <a:solidFill>
-            <a:srgbClr val="F0F9F2"/>
-          </a:solidFill>
-          <a:ln>
-            <a:noFill/>
-          </a:ln>
-        </p:spPr>
-        <p:style>
-          <a:lnRef idx="1">
-            <a:schemeClr val="accent1"/>
-          </a:lnRef>
-          <a:fillRef idx="3">
-            <a:schemeClr val="accent1"/>
-          </a:fillRef>
-          <a:effectRef idx="2">
-            <a:schemeClr val="accent1"/>
-          </a:effectRef>
-          <a:fontRef idx="minor">
-            <a:schemeClr val="lt1"/>
-          </a:fontRef>
-        </p:style>
-        <p:txBody>
-          <a:bodyPr rtlCol="0" anchor="ctr"/>
-          <a:lstStyle/>
-          <a:p>
-            <a:pPr algn="ctr"/>
-          </a:p>
-        </p:txBody>
-      </p:sp>
-      <p:sp>
-        <p:nvSpPr>
           <p:cNvPr id="71" name="TextBox 70"/>
           <p:cNvSpPr txBox="1"/>
           <p:nvPr/>
@@ -20226,7 +20439,7 @@
                   <a:srgbClr val="FFFFFF"/>
                 </a:solidFill>
               </a:rPr>
-              <a:t>7 providers had payments automatically held  ·  0 flagged for manual review  ·  5 cleared</a:t>
+              <a:t>5 providers had payments automatically held  ·  3 flagged for manual review  ·  4 cleared</a:t>
             </a:r>
           </a:p>
         </p:txBody>
@@ -20905,7 +21118,7 @@
                   <a:srgbClr val="FFFFFF"/>
                 </a:solidFill>
               </a:rPr>
-              <a:t>68/100</a:t>
+              <a:t>54/100</a:t>
             </a:r>
           </a:p>
         </p:txBody>
@@ -21161,7 +21374,7 @@
                   <a:srgbClr val="E07B39"/>
                 </a:solidFill>
               </a:rPr>
-              <a:t>Risk score: 68/100</a:t>
+              <a:t>Risk score: 54/100</a:t>
             </a:r>
           </a:p>
         </p:txBody>
@@ -21360,7 +21573,7 @@
                   <a:srgbClr val="FFFFFF"/>
                 </a:solidFill>
               </a:rPr>
-              <a:t>50/100</a:t>
+              <a:t>40/100</a:t>
             </a:r>
           </a:p>
         </p:txBody>
@@ -21616,7 +21829,7 @@
                   <a:srgbClr val="E07B39"/>
                 </a:solidFill>
               </a:rPr>
-              <a:t>Risk score: 50/100</a:t>
+              <a:t>Risk score: 40/100</a:t>
             </a:r>
           </a:p>
         </p:txBody>
@@ -22295,7 +22508,7 @@
                   <a:srgbClr val="FFFFFF"/>
                 </a:solidFill>
               </a:rPr>
-              <a:t>100/100</a:t>
+              <a:t>96/100</a:t>
             </a:r>
           </a:p>
         </p:txBody>
@@ -22827,7 +23040,7 @@
                   <a:srgbClr val="FFFFFF"/>
                 </a:solidFill>
               </a:rPr>
-              <a:t>100/100</a:t>
+              <a:t>78/100</a:t>
             </a:r>
           </a:p>
         </p:txBody>
@@ -23359,7 +23572,7 @@
                   <a:srgbClr val="FFFFFF"/>
                 </a:solidFill>
               </a:rPr>
-              <a:t>100/100</a:t>
+              <a:t>99/100</a:t>
             </a:r>
           </a:p>
         </p:txBody>
@@ -24405,7 +24618,7 @@
                   <a:srgbClr val="FFFFFF"/>
                 </a:solidFill>
               </a:rPr>
-              <a:t>88/100</a:t>
+              <a:t>74/100</a:t>
             </a:r>
           </a:p>
         </p:txBody>
@@ -25130,7 +25343,7 @@
                   <a:srgbClr val="D62839"/>
                 </a:solidFill>
               </a:rPr>
-              <a:t>Also had co-billing in 55% of months → total score 88</a:t>
+              <a:t>Also had co-billing in 55% of months → total score 74</a:t>
             </a:r>
           </a:p>
         </p:txBody>
@@ -25329,7 +25542,7 @@
                   <a:srgbClr val="FFFFFF"/>
                 </a:solidFill>
               </a:rPr>
-              <a:t>100/100</a:t>
+              <a:t>84/100</a:t>
             </a:r>
           </a:p>
         </p:txBody>

--- a/fraud_ops_presentation_updated.pptx
+++ b/fraud_ops_presentation_updated.pptx
@@ -3294,7 +3294,7 @@
                   <a:srgbClr val="FFFFFF"/>
                 </a:solidFill>
               </a:rPr>
-              <a:t>Ops Runner — Technical Case</a:t>
+              <a:t>Ops Runner - Technical Case</a:t>
             </a:r>
           </a:p>
         </p:txBody>
@@ -3362,7 +3362,7 @@
                   <a:srgbClr val="CCCCCC"/>
                 </a:solidFill>
               </a:rPr>
-              <a:t>Alan reimburses optical care claims submitted by opticians. This case asks: can we detect which providers are billing fraudulently — and build a system to catch it automatically?</a:t>
+              <a:t>Alan reimburses optical care claims submitted by opticians. This case asks: can I detect which providers are billing fraudulently - and build a system to catch it automatically?</a:t>
             </a:r>
           </a:p>
         </p:txBody>
@@ -3396,7 +3396,7 @@
                   <a:srgbClr val="FFFFFF"/>
                 </a:solidFill>
               </a:rPr>
-              <a:t>March 2024</a:t>
+              <a:t/>
             </a:r>
           </a:p>
         </p:txBody>
@@ -3568,7 +3568,7 @@
                   <a:srgbClr val="FFFFFF"/>
                 </a:solidFill>
               </a:rPr>
-              <a:t>The Detection Engine — 4 Rules, Automatically Applied to Every Provider</a:t>
+              <a:t>The Detection Engine - 4 Rules, Automatically Applied to Every Provider</a:t>
             </a:r>
           </a:p>
         </p:txBody>
@@ -3722,7 +3722,7 @@
                   <a:srgbClr val="FFFFFF"/>
                 </a:solidFill>
               </a:rPr>
-              <a:t>Alan Assurance · Fraud Detection Case · 2024</a:t>
+              <a:t>Alan Assurance · Fraud Detection Case</a:t>
             </a:r>
           </a:p>
         </p:txBody>
@@ -5448,7 +5448,7 @@
                   <a:srgbClr val="FFFFFF"/>
                 </a:solidFill>
               </a:rPr>
-              <a:t>No flags — approved automatically</a:t>
+              <a:t>No flags - approved automatically</a:t>
             </a:r>
           </a:p>
         </p:txBody>
@@ -5593,7 +5593,7 @@
                   <a:srgbClr val="FFFFFF"/>
                 </a:solidFill>
               </a:rPr>
-              <a:t>At least one signal — human reviews it</a:t>
+              <a:t>At least one signal - human reviews it</a:t>
             </a:r>
           </a:p>
         </p:txBody>
@@ -5738,7 +5738,7 @@
                   <a:srgbClr val="FFFFFF"/>
                 </a:solidFill>
               </a:rPr>
-              <a:t>Strong evidence — payments suspended</a:t>
+              <a:t>Strong evidence - payments suspended</a:t>
             </a:r>
           </a:p>
         </p:txBody>
@@ -5770,7 +5770,7 @@
         <p:spPr>
           <a:xfrm>
             <a:off x="0" y="0"/>
-            <a:ext cx="12188952" cy="6858000"/>
+            <a:ext cx="12188952" cy="960120"/>
           </a:xfrm>
           <a:prstGeom prst="rect">
             <a:avLst/>
@@ -5812,8 +5812,8 @@
         </p:nvSpPr>
         <p:spPr>
           <a:xfrm>
-            <a:off x="0" y="0"/>
-            <a:ext cx="228600" cy="6858000"/>
+            <a:off x="320040" y="118872"/>
+            <a:ext cx="1097280" cy="292608"/>
           </a:xfrm>
           <a:prstGeom prst="rect">
             <a:avLst/>
@@ -5849,20 +5849,88 @@
       </p:sp>
       <p:sp>
         <p:nvSpPr>
-          <p:cNvPr id="4" name="Rectangle 3"/>
+          <p:cNvPr id="4" name="TextBox 3"/>
+          <p:cNvSpPr txBox="1"/>
+          <p:nvPr/>
+        </p:nvSpPr>
+        <p:spPr>
+          <a:xfrm>
+            <a:off x="320040" y="118872"/>
+            <a:ext cx="1097280" cy="292608"/>
+          </a:xfrm>
+          <a:prstGeom prst="rect">
+            <a:avLst/>
+          </a:prstGeom>
+          <a:noFill/>
+        </p:spPr>
+        <p:txBody>
+          <a:bodyPr wrap="square">
+            <a:spAutoFit/>
+          </a:bodyPr>
+          <a:lstStyle/>
+          <a:p>
+            <a:pPr algn="ctr"/>
+            <a:r>
+              <a:rPr sz="900" b="1" i="0">
+                <a:solidFill>
+                  <a:srgbClr val="1A2440"/>
+                </a:solidFill>
+              </a:rPr>
+              <a:t>Q2</a:t>
+            </a:r>
+          </a:p>
+        </p:txBody>
+      </p:sp>
+      <p:sp>
+        <p:nvSpPr>
+          <p:cNvPr id="5" name="TextBox 4"/>
+          <p:cNvSpPr txBox="1"/>
+          <p:nvPr/>
+        </p:nvSpPr>
+        <p:spPr>
+          <a:xfrm>
+            <a:off x="1554480" y="73152"/>
+            <a:ext cx="10332720" cy="594360"/>
+          </a:xfrm>
+          <a:prstGeom prst="rect">
+            <a:avLst/>
+          </a:prstGeom>
+          <a:noFill/>
+        </p:spPr>
+        <p:txBody>
+          <a:bodyPr wrap="square">
+            <a:spAutoFit/>
+          </a:bodyPr>
+          <a:lstStyle/>
+          <a:p>
+            <a:pPr algn="l"/>
+            <a:r>
+              <a:rPr sz="2400" b="1" i="0">
+                <a:solidFill>
+                  <a:srgbClr val="FFFFFF"/>
+                </a:solidFill>
+              </a:rPr>
+              <a:t>Immediate Action Required - Payments Held</a:t>
+            </a:r>
+          </a:p>
+        </p:txBody>
+      </p:sp>
+      <p:sp>
+        <p:nvSpPr>
+          <p:cNvPr id="6" name="Rectangle 5"/>
           <p:cNvSpPr/>
           <p:nvPr/>
         </p:nvSpPr>
         <p:spPr>
           <a:xfrm>
-            <a:off x="0" y="5532120"/>
-            <a:ext cx="12188952" cy="1325880"/>
+            <a:off x="0" y="960120"/>
+            <a:ext cx="12188952" cy="347472"/>
           </a:xfrm>
           <a:prstGeom prst="rect">
             <a:avLst/>
           </a:prstGeom>
           <a:solidFill>
-            <a:srgbClr val="0D1730"/>
+            <a:srgbClr val="F5F5F5"/>
           </a:solidFill>
           <a:ln>
             <a:noFill/>
@@ -5892,103 +5960,34 @@
       </p:sp>
       <p:sp>
         <p:nvSpPr>
-          <p:cNvPr id="5" name="TextBox 4"/>
-          <p:cNvSpPr txBox="1"/>
-          <p:nvPr/>
-        </p:nvSpPr>
-        <p:spPr>
-          <a:xfrm>
-            <a:off x="502920" y="640080"/>
-            <a:ext cx="9144000" cy="475488"/>
-          </a:xfrm>
-          <a:prstGeom prst="rect">
-            <a:avLst/>
-          </a:prstGeom>
-          <a:noFill/>
-        </p:spPr>
-        <p:txBody>
-          <a:bodyPr wrap="square">
-            <a:spAutoFit/>
-          </a:bodyPr>
-          <a:lstStyle/>
-          <a:p>
-            <a:pPr algn="l"/>
-            <a:r>
-              <a:rPr sz="2000" b="0" i="1">
-                <a:solidFill>
-                  <a:srgbClr val="CCCCCC"/>
-                </a:solidFill>
-              </a:rPr>
-              <a:t>Beyond the analysis —</a:t>
-            </a:r>
-          </a:p>
-        </p:txBody>
-      </p:sp>
-      <p:sp>
-        <p:nvSpPr>
-          <p:cNvPr id="6" name="TextBox 5"/>
-          <p:cNvSpPr txBox="1"/>
-          <p:nvPr/>
-        </p:nvSpPr>
-        <p:spPr>
-          <a:xfrm>
-            <a:off x="502920" y="1188720"/>
-            <a:ext cx="10515600" cy="1463040"/>
-          </a:xfrm>
-          <a:prstGeom prst="rect">
-            <a:avLst/>
-          </a:prstGeom>
-          <a:noFill/>
-        </p:spPr>
-        <p:txBody>
-          <a:bodyPr wrap="square">
-            <a:spAutoFit/>
-          </a:bodyPr>
-          <a:lstStyle/>
-          <a:p>
-            <a:pPr algn="l"/>
-            <a:r>
-              <a:rPr sz="4400" b="1" i="0">
-                <a:solidFill>
-                  <a:srgbClr val="FFFFFF"/>
-                </a:solidFill>
-              </a:rPr>
-              <a:t>we built a working system
-around it</a:t>
-            </a:r>
-          </a:p>
-        </p:txBody>
-      </p:sp>
-      <p:sp>
-        <p:nvSpPr>
           <p:cNvPr id="7" name="TextBox 6"/>
           <p:cNvSpPr txBox="1"/>
           <p:nvPr/>
         </p:nvSpPr>
         <p:spPr>
           <a:xfrm>
-            <a:off x="502920" y="2834640"/>
-            <a:ext cx="8686800" cy="777240"/>
-          </a:xfrm>
-          <a:prstGeom prst="rect">
-            <a:avLst/>
-          </a:prstGeom>
-          <a:noFill/>
-        </p:spPr>
-        <p:txBody>
-          <a:bodyPr wrap="square">
-            <a:spAutoFit/>
-          </a:bodyPr>
-          <a:lstStyle/>
-          <a:p>
-            <a:pPr algn="l"/>
-            <a:r>
-              <a:rPr sz="1400" b="0" i="0">
-                <a:solidFill>
-                  <a:srgbClr val="CCCCCC"/>
-                </a:solidFill>
-              </a:rPr>
-              <a:t>The detection logic above is packaged into a full web application that an ops team can actually use day-to-day: upload new claims, run detection with one click, and review every flagged provider with full evidence.</a:t>
+            <a:off x="365760" y="987552"/>
+            <a:ext cx="11430000" cy="301752"/>
+          </a:xfrm>
+          <a:prstGeom prst="rect">
+            <a:avLst/>
+          </a:prstGeom>
+          <a:noFill/>
+        </p:spPr>
+        <p:txBody>
+          <a:bodyPr wrap="square">
+            <a:spAutoFit/>
+          </a:bodyPr>
+          <a:lstStyle/>
+          <a:p>
+            <a:pPr algn="l"/>
+            <a:r>
+              <a:rPr sz="1200" b="0" i="1">
+                <a:solidFill>
+                  <a:srgbClr val="444444"/>
+                </a:solidFill>
+              </a:rPr>
+              <a:t>5 providers automatically held - strong evidence across multiple independent fraud signals</a:t>
             </a:r>
           </a:p>
         </p:txBody>
@@ -6001,14 +6000,14 @@
         </p:nvSpPr>
         <p:spPr>
           <a:xfrm>
-            <a:off x="502920" y="3749039"/>
-            <a:ext cx="2743200" cy="1554480"/>
+            <a:off x="0" y="6510528"/>
+            <a:ext cx="12188952" cy="347472"/>
           </a:xfrm>
           <a:prstGeom prst="rect">
             <a:avLst/>
           </a:prstGeom>
           <a:solidFill>
-            <a:srgbClr val="26355C"/>
+            <a:srgbClr val="1A2440"/>
           </a:solidFill>
           <a:ln>
             <a:noFill/>
@@ -6038,20 +6037,54 @@
       </p:sp>
       <p:sp>
         <p:nvSpPr>
-          <p:cNvPr id="9" name="Rectangle 8"/>
+          <p:cNvPr id="9" name="TextBox 8"/>
+          <p:cNvSpPr txBox="1"/>
+          <p:nvPr/>
+        </p:nvSpPr>
+        <p:spPr>
+          <a:xfrm>
+            <a:off x="274320" y="6519672"/>
+            <a:ext cx="11612880" cy="329184"/>
+          </a:xfrm>
+          <a:prstGeom prst="rect">
+            <a:avLst/>
+          </a:prstGeom>
+          <a:noFill/>
+        </p:spPr>
+        <p:txBody>
+          <a:bodyPr wrap="square">
+            <a:spAutoFit/>
+          </a:bodyPr>
+          <a:lstStyle/>
+          <a:p>
+            <a:pPr algn="ctr"/>
+            <a:r>
+              <a:rPr sz="900" b="0" i="0">
+                <a:solidFill>
+                  <a:srgbClr val="FFFFFF"/>
+                </a:solidFill>
+              </a:rPr>
+              <a:t>Alan Assurance · Fraud Detection Case</a:t>
+            </a:r>
+          </a:p>
+        </p:txBody>
+      </p:sp>
+      <p:sp>
+        <p:nvSpPr>
+          <p:cNvPr id="10" name="Rectangle 9"/>
           <p:cNvSpPr/>
           <p:nvPr/>
         </p:nvSpPr>
         <p:spPr>
           <a:xfrm>
-            <a:off x="502920" y="3749039"/>
-            <a:ext cx="2743200" cy="91440"/>
+            <a:off x="274320" y="1417320"/>
+            <a:ext cx="11640312" cy="320040"/>
           </a:xfrm>
           <a:prstGeom prst="rect">
             <a:avLst/>
           </a:prstGeom>
           <a:solidFill>
-            <a:srgbClr val="1A78C2"/>
+            <a:srgbClr val="1A2440"/>
           </a:solidFill>
           <a:ln>
             <a:noFill/>
@@ -6081,88 +6114,122 @@
       </p:sp>
       <p:sp>
         <p:nvSpPr>
-          <p:cNvPr id="10" name="TextBox 9"/>
-          <p:cNvSpPr txBox="1"/>
-          <p:nvPr/>
-        </p:nvSpPr>
-        <p:spPr>
-          <a:xfrm>
-            <a:off x="667512" y="3913632"/>
-            <a:ext cx="2423160" cy="347472"/>
-          </a:xfrm>
-          <a:prstGeom prst="rect">
-            <a:avLst/>
-          </a:prstGeom>
-          <a:noFill/>
-        </p:spPr>
-        <p:txBody>
-          <a:bodyPr wrap="square">
-            <a:spAutoFit/>
-          </a:bodyPr>
-          <a:lstStyle/>
-          <a:p>
-            <a:pPr algn="l"/>
-            <a:r>
-              <a:rPr sz="1300" b="1" i="0">
+          <p:cNvPr id="11" name="TextBox 10"/>
+          <p:cNvSpPr txBox="1"/>
+          <p:nvPr/>
+        </p:nvSpPr>
+        <p:spPr>
+          <a:xfrm>
+            <a:off x="384048" y="1435608"/>
+            <a:ext cx="3108960" cy="256032"/>
+          </a:xfrm>
+          <a:prstGeom prst="rect">
+            <a:avLst/>
+          </a:prstGeom>
+          <a:noFill/>
+        </p:spPr>
+        <p:txBody>
+          <a:bodyPr wrap="square">
+            <a:spAutoFit/>
+          </a:bodyPr>
+          <a:lstStyle/>
+          <a:p>
+            <a:pPr algn="l"/>
+            <a:r>
+              <a:rPr sz="1000" b="1" i="0">
                 <a:solidFill>
                   <a:srgbClr val="FFFFFF"/>
                 </a:solidFill>
               </a:rPr>
-              <a:t>Dashboard</a:t>
-            </a:r>
-          </a:p>
-        </p:txBody>
-      </p:sp>
-      <p:sp>
-        <p:nvSpPr>
-          <p:cNvPr id="11" name="TextBox 10"/>
-          <p:cNvSpPr txBox="1"/>
-          <p:nvPr/>
-        </p:nvSpPr>
-        <p:spPr>
-          <a:xfrm>
-            <a:off x="667512" y="4279392"/>
-            <a:ext cx="2423160" cy="822960"/>
-          </a:xfrm>
-          <a:prstGeom prst="rect">
-            <a:avLst/>
-          </a:prstGeom>
-          <a:noFill/>
-        </p:spPr>
-        <p:txBody>
-          <a:bodyPr wrap="square">
-            <a:spAutoFit/>
-          </a:bodyPr>
-          <a:lstStyle/>
-          <a:p>
-            <a:pPr algn="l"/>
-            <a:r>
-              <a:rPr sz="1000" b="0" i="0">
-                <a:solidFill>
-                  <a:srgbClr val="CCCCCC"/>
-                </a:solidFill>
-              </a:rPr>
-              <a:t>Live risk scores, flagged provider count, recent review activity</a:t>
-            </a:r>
-          </a:p>
-        </p:txBody>
-      </p:sp>
-      <p:sp>
-        <p:nvSpPr>
-          <p:cNvPr id="12" name="Rectangle 11"/>
+              <a:t>Provider  /  Score</a:t>
+            </a:r>
+          </a:p>
+        </p:txBody>
+      </p:sp>
+      <p:sp>
+        <p:nvSpPr>
+          <p:cNvPr id="12" name="TextBox 11"/>
+          <p:cNvSpPr txBox="1"/>
+          <p:nvPr/>
+        </p:nvSpPr>
+        <p:spPr>
+          <a:xfrm>
+            <a:off x="3630168" y="1435608"/>
+            <a:ext cx="3108960" cy="256032"/>
+          </a:xfrm>
+          <a:prstGeom prst="rect">
+            <a:avLst/>
+          </a:prstGeom>
+          <a:noFill/>
+        </p:spPr>
+        <p:txBody>
+          <a:bodyPr wrap="square">
+            <a:spAutoFit/>
+          </a:bodyPr>
+          <a:lstStyle/>
+          <a:p>
+            <a:pPr algn="l"/>
+            <a:r>
+              <a:rPr sz="1000" b="1" i="0">
+                <a:solidFill>
+                  <a:srgbClr val="FFFFFF"/>
+                </a:solidFill>
+              </a:rPr>
+              <a:t>Signals detected</a:t>
+            </a:r>
+          </a:p>
+        </p:txBody>
+      </p:sp>
+      <p:sp>
+        <p:nvSpPr>
+          <p:cNvPr id="13" name="TextBox 12"/>
+          <p:cNvSpPr txBox="1"/>
+          <p:nvPr/>
+        </p:nvSpPr>
+        <p:spPr>
+          <a:xfrm>
+            <a:off x="7013448" y="1435608"/>
+            <a:ext cx="3108960" cy="256032"/>
+          </a:xfrm>
+          <a:prstGeom prst="rect">
+            <a:avLst/>
+          </a:prstGeom>
+          <a:noFill/>
+        </p:spPr>
+        <p:txBody>
+          <a:bodyPr wrap="square">
+            <a:spAutoFit/>
+          </a:bodyPr>
+          <a:lstStyle/>
+          <a:p>
+            <a:pPr algn="l"/>
+            <a:r>
+              <a:rPr sz="1000" b="1" i="0">
+                <a:solidFill>
+                  <a:srgbClr val="FFFFFF"/>
+                </a:solidFill>
+              </a:rPr>
+              <a:t>Recommended action</a:t>
+            </a:r>
+          </a:p>
+        </p:txBody>
+      </p:sp>
+      <p:sp>
+        <p:nvSpPr>
+          <p:cNvPr id="14" name="Rectangle 13"/>
           <p:cNvSpPr/>
           <p:nvPr/>
         </p:nvSpPr>
         <p:spPr>
           <a:xfrm>
-            <a:off x="3429000" y="3749039"/>
-            <a:ext cx="2743200" cy="1554480"/>
+            <a:off x="274320" y="1783080"/>
+            <a:ext cx="11640312" cy="896112"/>
           </a:xfrm>
           <a:prstGeom prst="rect">
             <a:avLst/>
           </a:prstGeom>
           <a:solidFill>
-            <a:srgbClr val="26355C"/>
+            <a:srgbClr val="FFEBEB"/>
           </a:solidFill>
           <a:ln>
             <a:noFill/>
@@ -6192,20 +6259,20 @@
       </p:sp>
       <p:sp>
         <p:nvSpPr>
-          <p:cNvPr id="13" name="Rectangle 12"/>
+          <p:cNvPr id="15" name="Rectangle 14"/>
           <p:cNvSpPr/>
           <p:nvPr/>
         </p:nvSpPr>
         <p:spPr>
           <a:xfrm>
-            <a:off x="3429000" y="3749039"/>
-            <a:ext cx="2743200" cy="91440"/>
+            <a:off x="274320" y="1783080"/>
+            <a:ext cx="91440" cy="896112"/>
           </a:xfrm>
           <a:prstGeom prst="rect">
             <a:avLst/>
           </a:prstGeom>
           <a:solidFill>
-            <a:srgbClr val="0D7A8E"/>
+            <a:srgbClr val="D62839"/>
           </a:solidFill>
           <a:ln>
             <a:noFill/>
@@ -6235,14 +6302,14 @@
       </p:sp>
       <p:sp>
         <p:nvSpPr>
-          <p:cNvPr id="14" name="TextBox 13"/>
-          <p:cNvSpPr txBox="1"/>
-          <p:nvPr/>
-        </p:nvSpPr>
-        <p:spPr>
-          <a:xfrm>
-            <a:off x="3593592" y="3913632"/>
-            <a:ext cx="2423160" cy="347472"/>
+          <p:cNvPr id="16" name="TextBox 15"/>
+          <p:cNvSpPr txBox="1"/>
+          <p:nvPr/>
+        </p:nvSpPr>
+        <p:spPr>
+          <a:xfrm>
+            <a:off x="457200" y="1837943"/>
+            <a:ext cx="2926080" cy="292608"/>
           </a:xfrm>
           <a:prstGeom prst="rect">
             <a:avLst/>
@@ -6259,64 +6326,30 @@
             <a:r>
               <a:rPr sz="1300" b="1" i="0">
                 <a:solidFill>
-                  <a:srgbClr val="FFFFFF"/>
-                </a:solidFill>
-              </a:rPr>
-              <a:t>Provider list</a:t>
-            </a:r>
-          </a:p>
-        </p:txBody>
-      </p:sp>
-      <p:sp>
-        <p:nvSpPr>
-          <p:cNvPr id="15" name="TextBox 14"/>
-          <p:cNvSpPr txBox="1"/>
-          <p:nvPr/>
-        </p:nvSpPr>
-        <p:spPr>
-          <a:xfrm>
-            <a:off x="3593592" y="4279392"/>
-            <a:ext cx="2423160" cy="822960"/>
-          </a:xfrm>
-          <a:prstGeom prst="rect">
-            <a:avLst/>
-          </a:prstGeom>
-          <a:noFill/>
-        </p:spPr>
-        <p:txBody>
-          <a:bodyPr wrap="square">
-            <a:spAutoFit/>
-          </a:bodyPr>
-          <a:lstStyle/>
-          <a:p>
-            <a:pPr algn="l"/>
-            <a:r>
-              <a:rPr sz="1000" b="0" i="0">
-                <a:solidFill>
-                  <a:srgbClr val="CCCCCC"/>
-                </a:solidFill>
-              </a:rPr>
-              <a:t>Run detection · search and filter · see every provider's risk score</a:t>
-            </a:r>
-          </a:p>
-        </p:txBody>
-      </p:sp>
-      <p:sp>
-        <p:nvSpPr>
-          <p:cNvPr id="16" name="Rectangle 15"/>
+                  <a:srgbClr val="1A2440"/>
+                </a:solidFill>
+              </a:rPr>
+              <a:t>Queen optics</a:t>
+            </a:r>
+          </a:p>
+        </p:txBody>
+      </p:sp>
+      <p:sp>
+        <p:nvSpPr>
+          <p:cNvPr id="17" name="Rectangle 16"/>
           <p:cNvSpPr/>
           <p:nvPr/>
         </p:nvSpPr>
         <p:spPr>
           <a:xfrm>
-            <a:off x="6355080" y="3749039"/>
-            <a:ext cx="2743200" cy="1554480"/>
+            <a:off x="457200" y="2258568"/>
+            <a:ext cx="1188720" cy="329184"/>
           </a:xfrm>
           <a:prstGeom prst="rect">
             <a:avLst/>
           </a:prstGeom>
           <a:solidFill>
-            <a:srgbClr val="26355C"/>
+            <a:srgbClr val="D62839"/>
           </a:solidFill>
           <a:ln>
             <a:noFill/>
@@ -6346,20 +6379,156 @@
       </p:sp>
       <p:sp>
         <p:nvSpPr>
-          <p:cNvPr id="17" name="Rectangle 16"/>
+          <p:cNvPr id="18" name="TextBox 17"/>
+          <p:cNvSpPr txBox="1"/>
+          <p:nvPr/>
+        </p:nvSpPr>
+        <p:spPr>
+          <a:xfrm>
+            <a:off x="457200" y="2258568"/>
+            <a:ext cx="1188720" cy="329184"/>
+          </a:xfrm>
+          <a:prstGeom prst="rect">
+            <a:avLst/>
+          </a:prstGeom>
+          <a:noFill/>
+        </p:spPr>
+        <p:txBody>
+          <a:bodyPr wrap="square">
+            <a:spAutoFit/>
+          </a:bodyPr>
+          <a:lstStyle/>
+          <a:p>
+            <a:pPr algn="ctr"/>
+            <a:r>
+              <a:rPr sz="1700" b="1" i="0">
+                <a:solidFill>
+                  <a:srgbClr val="FFFFFF"/>
+                </a:solidFill>
+              </a:rPr>
+              <a:t>99/100</a:t>
+            </a:r>
+          </a:p>
+        </p:txBody>
+      </p:sp>
+      <p:sp>
+        <p:nvSpPr>
+          <p:cNvPr id="19" name="TextBox 18"/>
+          <p:cNvSpPr txBox="1"/>
+          <p:nvPr/>
+        </p:nvSpPr>
+        <p:spPr>
+          <a:xfrm>
+            <a:off x="3630168" y="1837943"/>
+            <a:ext cx="3154680" cy="256032"/>
+          </a:xfrm>
+          <a:prstGeom prst="rect">
+            <a:avLst/>
+          </a:prstGeom>
+          <a:noFill/>
+        </p:spPr>
+        <p:txBody>
+          <a:bodyPr wrap="square">
+            <a:spAutoFit/>
+          </a:bodyPr>
+          <a:lstStyle/>
+          <a:p>
+            <a:pPr algn="l"/>
+            <a:r>
+              <a:rPr sz="1000" b="1" i="0">
+                <a:solidFill>
+                  <a:srgbClr val="D62839"/>
+                </a:solidFill>
+              </a:rPr>
+              <a:t>Co-billing · billing spike · round numbers</a:t>
+            </a:r>
+          </a:p>
+        </p:txBody>
+      </p:sp>
+      <p:sp>
+        <p:nvSpPr>
+          <p:cNvPr id="20" name="TextBox 19"/>
+          <p:cNvSpPr txBox="1"/>
+          <p:nvPr/>
+        </p:nvSpPr>
+        <p:spPr>
+          <a:xfrm>
+            <a:off x="3630168" y="2130552"/>
+            <a:ext cx="3154680" cy="457200"/>
+          </a:xfrm>
+          <a:prstGeom prst="rect">
+            <a:avLst/>
+          </a:prstGeom>
+          <a:noFill/>
+        </p:spPr>
+        <p:txBody>
+          <a:bodyPr wrap="square">
+            <a:spAutoFit/>
+          </a:bodyPr>
+          <a:lstStyle/>
+          <a:p>
+            <a:pPr algn="l"/>
+            <a:r>
+              <a:rPr sz="900" b="0" i="0">
+                <a:solidFill>
+                  <a:srgbClr val="444444"/>
+                </a:solidFill>
+              </a:rPr>
+              <a:t>96% of months had both glasses + contacts. 3 spike months. All contacts claims are whole euros.</a:t>
+            </a:r>
+          </a:p>
+        </p:txBody>
+      </p:sp>
+      <p:sp>
+        <p:nvSpPr>
+          <p:cNvPr id="21" name="TextBox 20"/>
+          <p:cNvSpPr txBox="1"/>
+          <p:nvPr/>
+        </p:nvSpPr>
+        <p:spPr>
+          <a:xfrm>
+            <a:off x="7013448" y="1984248"/>
+            <a:ext cx="4754880" cy="457200"/>
+          </a:xfrm>
+          <a:prstGeom prst="rect">
+            <a:avLst/>
+          </a:prstGeom>
+          <a:noFill/>
+        </p:spPr>
+        <p:txBody>
+          <a:bodyPr wrap="square">
+            <a:spAutoFit/>
+          </a:bodyPr>
+          <a:lstStyle/>
+          <a:p>
+            <a:pPr algn="l"/>
+            <a:r>
+              <a:rPr sz="1000" b="1" i="0">
+                <a:solidFill>
+                  <a:srgbClr val="1A2440"/>
+                </a:solidFill>
+              </a:rPr>
+              <a:t>Full audit + suspend all pending payments</a:t>
+            </a:r>
+          </a:p>
+        </p:txBody>
+      </p:sp>
+      <p:sp>
+        <p:nvSpPr>
+          <p:cNvPr id="22" name="Rectangle 21"/>
           <p:cNvSpPr/>
           <p:nvPr/>
         </p:nvSpPr>
         <p:spPr>
           <a:xfrm>
-            <a:off x="6355080" y="3749039"/>
-            <a:ext cx="2743200" cy="91440"/>
+            <a:off x="274320" y="2715768"/>
+            <a:ext cx="11640312" cy="896112"/>
           </a:xfrm>
           <a:prstGeom prst="rect">
             <a:avLst/>
           </a:prstGeom>
           <a:solidFill>
-            <a:srgbClr val="E07B39"/>
+            <a:srgbClr val="FFEBEB"/>
           </a:solidFill>
           <a:ln>
             <a:noFill/>
@@ -6389,88 +6558,20 @@
       </p:sp>
       <p:sp>
         <p:nvSpPr>
-          <p:cNvPr id="18" name="TextBox 17"/>
-          <p:cNvSpPr txBox="1"/>
-          <p:nvPr/>
-        </p:nvSpPr>
-        <p:spPr>
-          <a:xfrm>
-            <a:off x="6519672" y="3913632"/>
-            <a:ext cx="2423160" cy="347472"/>
-          </a:xfrm>
-          <a:prstGeom prst="rect">
-            <a:avLst/>
-          </a:prstGeom>
-          <a:noFill/>
-        </p:spPr>
-        <p:txBody>
-          <a:bodyPr wrap="square">
-            <a:spAutoFit/>
-          </a:bodyPr>
-          <a:lstStyle/>
-          <a:p>
-            <a:pPr algn="l"/>
-            <a:r>
-              <a:rPr sz="1300" b="1" i="0">
-                <a:solidFill>
-                  <a:srgbClr val="FFFFFF"/>
-                </a:solidFill>
-              </a:rPr>
-              <a:t>Flag evidence</a:t>
-            </a:r>
-          </a:p>
-        </p:txBody>
-      </p:sp>
-      <p:sp>
-        <p:nvSpPr>
-          <p:cNvPr id="19" name="TextBox 18"/>
-          <p:cNvSpPr txBox="1"/>
-          <p:nvPr/>
-        </p:nvSpPr>
-        <p:spPr>
-          <a:xfrm>
-            <a:off x="6519672" y="4279392"/>
-            <a:ext cx="2423160" cy="822960"/>
-          </a:xfrm>
-          <a:prstGeom prst="rect">
-            <a:avLst/>
-          </a:prstGeom>
-          <a:noFill/>
-        </p:spPr>
-        <p:txBody>
-          <a:bodyPr wrap="square">
-            <a:spAutoFit/>
-          </a:bodyPr>
-          <a:lstStyle/>
-          <a:p>
-            <a:pPr algn="l"/>
-            <a:r>
-              <a:rPr sz="1000" b="0" i="0">
-                <a:solidFill>
-                  <a:srgbClr val="CCCCCC"/>
-                </a:solidFill>
-              </a:rPr>
-              <a:t>Click any provider to see exactly which claims triggered each flag</a:t>
-            </a:r>
-          </a:p>
-        </p:txBody>
-      </p:sp>
-      <p:sp>
-        <p:nvSpPr>
-          <p:cNvPr id="20" name="Rectangle 19"/>
+          <p:cNvPr id="23" name="Rectangle 22"/>
           <p:cNvSpPr/>
           <p:nvPr/>
         </p:nvSpPr>
         <p:spPr>
           <a:xfrm>
-            <a:off x="9281160" y="3749039"/>
-            <a:ext cx="2743200" cy="1554480"/>
+            <a:off x="274320" y="2715768"/>
+            <a:ext cx="91440" cy="896112"/>
           </a:xfrm>
           <a:prstGeom prst="rect">
             <a:avLst/>
           </a:prstGeom>
           <a:solidFill>
-            <a:srgbClr val="26355C"/>
+            <a:srgbClr val="D62839"/>
           </a:solidFill>
           <a:ln>
             <a:noFill/>
@@ -6500,20 +6601,54 @@
       </p:sp>
       <p:sp>
         <p:nvSpPr>
-          <p:cNvPr id="21" name="Rectangle 20"/>
+          <p:cNvPr id="24" name="TextBox 23"/>
+          <p:cNvSpPr txBox="1"/>
+          <p:nvPr/>
+        </p:nvSpPr>
+        <p:spPr>
+          <a:xfrm>
+            <a:off x="457200" y="2770632"/>
+            <a:ext cx="2926080" cy="292608"/>
+          </a:xfrm>
+          <a:prstGeom prst="rect">
+            <a:avLst/>
+          </a:prstGeom>
+          <a:noFill/>
+        </p:spPr>
+        <p:txBody>
+          <a:bodyPr wrap="square">
+            <a:spAutoFit/>
+          </a:bodyPr>
+          <a:lstStyle/>
+          <a:p>
+            <a:pPr algn="l"/>
+            <a:r>
+              <a:rPr sz="1300" b="1" i="0">
+                <a:solidFill>
+                  <a:srgbClr val="1A2440"/>
+                </a:solidFill>
+              </a:rPr>
+              <a:t>Mike lunettes</a:t>
+            </a:r>
+          </a:p>
+        </p:txBody>
+      </p:sp>
+      <p:sp>
+        <p:nvSpPr>
+          <p:cNvPr id="25" name="Rectangle 24"/>
           <p:cNvSpPr/>
           <p:nvPr/>
         </p:nvSpPr>
         <p:spPr>
           <a:xfrm>
-            <a:off x="9281160" y="3749039"/>
-            <a:ext cx="2743200" cy="91440"/>
+            <a:off x="457200" y="3191256"/>
+            <a:ext cx="1188720" cy="329184"/>
           </a:xfrm>
           <a:prstGeom prst="rect">
             <a:avLst/>
           </a:prstGeom>
           <a:solidFill>
-            <a:srgbClr val="2E7D32"/>
+            <a:srgbClr val="D62839"/>
           </a:solidFill>
           <a:ln>
             <a:noFill/>
@@ -6543,122 +6678,156 @@
       </p:sp>
       <p:sp>
         <p:nvSpPr>
-          <p:cNvPr id="22" name="TextBox 21"/>
-          <p:cNvSpPr txBox="1"/>
-          <p:nvPr/>
-        </p:nvSpPr>
-        <p:spPr>
-          <a:xfrm>
-            <a:off x="9445752" y="3913632"/>
-            <a:ext cx="2423160" cy="347472"/>
-          </a:xfrm>
-          <a:prstGeom prst="rect">
-            <a:avLst/>
-          </a:prstGeom>
-          <a:noFill/>
-        </p:spPr>
-        <p:txBody>
-          <a:bodyPr wrap="square">
-            <a:spAutoFit/>
-          </a:bodyPr>
-          <a:lstStyle/>
-          <a:p>
-            <a:pPr algn="l"/>
-            <a:r>
-              <a:rPr sz="1300" b="1" i="0">
+          <p:cNvPr id="26" name="TextBox 25"/>
+          <p:cNvSpPr txBox="1"/>
+          <p:nvPr/>
+        </p:nvSpPr>
+        <p:spPr>
+          <a:xfrm>
+            <a:off x="457200" y="3191256"/>
+            <a:ext cx="1188720" cy="329184"/>
+          </a:xfrm>
+          <a:prstGeom prst="rect">
+            <a:avLst/>
+          </a:prstGeom>
+          <a:noFill/>
+        </p:spPr>
+        <p:txBody>
+          <a:bodyPr wrap="square">
+            <a:spAutoFit/>
+          </a:bodyPr>
+          <a:lstStyle/>
+          <a:p>
+            <a:pPr algn="ctr"/>
+            <a:r>
+              <a:rPr sz="1700" b="1" i="0">
                 <a:solidFill>
                   <a:srgbClr val="FFFFFF"/>
                 </a:solidFill>
               </a:rPr>
-              <a:t>Review panel</a:t>
-            </a:r>
-          </a:p>
-        </p:txBody>
-      </p:sp>
-      <p:sp>
-        <p:nvSpPr>
-          <p:cNvPr id="23" name="TextBox 22"/>
-          <p:cNvSpPr txBox="1"/>
-          <p:nvPr/>
-        </p:nvSpPr>
-        <p:spPr>
-          <a:xfrm>
-            <a:off x="9445752" y="4279392"/>
-            <a:ext cx="2423160" cy="822960"/>
-          </a:xfrm>
-          <a:prstGeom prst="rect">
-            <a:avLst/>
-          </a:prstGeom>
-          <a:noFill/>
-        </p:spPr>
-        <p:txBody>
-          <a:bodyPr wrap="square">
-            <a:spAutoFit/>
-          </a:bodyPr>
-          <a:lstStyle/>
-          <a:p>
-            <a:pPr algn="l"/>
-            <a:r>
-              <a:rPr sz="1000" b="0" i="0">
-                <a:solidFill>
-                  <a:srgbClr val="CCCCCC"/>
-                </a:solidFill>
-              </a:rPr>
-              <a:t>Submit a decision on any provider — approve, escalate, or blacklist</a:t>
-            </a:r>
-          </a:p>
-        </p:txBody>
-      </p:sp>
-      <p:sp>
-        <p:nvSpPr>
-          <p:cNvPr id="24" name="TextBox 23"/>
-          <p:cNvSpPr txBox="1"/>
-          <p:nvPr/>
-        </p:nvSpPr>
-        <p:spPr>
-          <a:xfrm>
-            <a:off x="502920" y="5650992"/>
-            <a:ext cx="11155680" cy="347472"/>
-          </a:xfrm>
-          <a:prstGeom prst="rect">
-            <a:avLst/>
-          </a:prstGeom>
-          <a:noFill/>
-        </p:spPr>
-        <p:txBody>
-          <a:bodyPr wrap="square">
-            <a:spAutoFit/>
-          </a:bodyPr>
-          <a:lstStyle/>
-          <a:p>
-            <a:pPr algn="ctr"/>
-            <a:r>
-              <a:rPr sz="1000" b="0" i="0">
-                <a:solidFill>
-                  <a:srgbClr val="7788AA"/>
-                </a:solidFill>
-              </a:rPr>
-              <a:t>Built with  Next.js + TypeScript  ·  Python FastAPI  ·  PostgreSQL  ·  Full FR/EN localisation</a:t>
-            </a:r>
-          </a:p>
-        </p:txBody>
-      </p:sp>
-      <p:sp>
-        <p:nvSpPr>
-          <p:cNvPr id="25" name="Rectangle 24"/>
+              <a:t>96/100</a:t>
+            </a:r>
+          </a:p>
+        </p:txBody>
+      </p:sp>
+      <p:sp>
+        <p:nvSpPr>
+          <p:cNvPr id="27" name="TextBox 26"/>
+          <p:cNvSpPr txBox="1"/>
+          <p:nvPr/>
+        </p:nvSpPr>
+        <p:spPr>
+          <a:xfrm>
+            <a:off x="3630168" y="2770632"/>
+            <a:ext cx="3154680" cy="256032"/>
+          </a:xfrm>
+          <a:prstGeom prst="rect">
+            <a:avLst/>
+          </a:prstGeom>
+          <a:noFill/>
+        </p:spPr>
+        <p:txBody>
+          <a:bodyPr wrap="square">
+            <a:spAutoFit/>
+          </a:bodyPr>
+          <a:lstStyle/>
+          <a:p>
+            <a:pPr algn="l"/>
+            <a:r>
+              <a:rPr sz="1000" b="1" i="0">
+                <a:solidFill>
+                  <a:srgbClr val="D62839"/>
+                </a:solidFill>
+              </a:rPr>
+              <a:t>Co-billing · billing spike · round numbers</a:t>
+            </a:r>
+          </a:p>
+        </p:txBody>
+      </p:sp>
+      <p:sp>
+        <p:nvSpPr>
+          <p:cNvPr id="28" name="TextBox 27"/>
+          <p:cNvSpPr txBox="1"/>
+          <p:nvPr/>
+        </p:nvSpPr>
+        <p:spPr>
+          <a:xfrm>
+            <a:off x="3630168" y="3063239"/>
+            <a:ext cx="3154680" cy="457200"/>
+          </a:xfrm>
+          <a:prstGeom prst="rect">
+            <a:avLst/>
+          </a:prstGeom>
+          <a:noFill/>
+        </p:spPr>
+        <p:txBody>
+          <a:bodyPr wrap="square">
+            <a:spAutoFit/>
+          </a:bodyPr>
+          <a:lstStyle/>
+          <a:p>
+            <a:pPr algn="l"/>
+            <a:r>
+              <a:rPr sz="900" b="0" i="0">
+                <a:solidFill>
+                  <a:srgbClr val="444444"/>
+                </a:solidFill>
+              </a:rPr>
+              <a:t>85% co-billing rate. 3 spike months above 5× their 6-month average.</a:t>
+            </a:r>
+          </a:p>
+        </p:txBody>
+      </p:sp>
+      <p:sp>
+        <p:nvSpPr>
+          <p:cNvPr id="29" name="TextBox 28"/>
+          <p:cNvSpPr txBox="1"/>
+          <p:nvPr/>
+        </p:nvSpPr>
+        <p:spPr>
+          <a:xfrm>
+            <a:off x="7013448" y="2916936"/>
+            <a:ext cx="4754880" cy="457200"/>
+          </a:xfrm>
+          <a:prstGeom prst="rect">
+            <a:avLst/>
+          </a:prstGeom>
+          <a:noFill/>
+        </p:spPr>
+        <p:txBody>
+          <a:bodyPr wrap="square">
+            <a:spAutoFit/>
+          </a:bodyPr>
+          <a:lstStyle/>
+          <a:p>
+            <a:pPr algn="l"/>
+            <a:r>
+              <a:rPr sz="1000" b="1" i="0">
+                <a:solidFill>
+                  <a:srgbClr val="1A2440"/>
+                </a:solidFill>
+              </a:rPr>
+              <a:t>Full audit + suspend all pending payments</a:t>
+            </a:r>
+          </a:p>
+        </p:txBody>
+      </p:sp>
+      <p:sp>
+        <p:nvSpPr>
+          <p:cNvPr id="30" name="Rectangle 29"/>
           <p:cNvSpPr/>
           <p:nvPr/>
         </p:nvSpPr>
         <p:spPr>
           <a:xfrm>
-            <a:off x="502920" y="5138928"/>
-            <a:ext cx="11155680" cy="347472"/>
+            <a:off x="274320" y="3648456"/>
+            <a:ext cx="11640312" cy="896112"/>
           </a:xfrm>
           <a:prstGeom prst="rect">
             <a:avLst/>
           </a:prstGeom>
           <a:solidFill>
-            <a:srgbClr val="0D1730"/>
+            <a:srgbClr val="FFEBEB"/>
           </a:solidFill>
           <a:ln>
             <a:noFill/>
@@ -6688,34 +6857,854 @@
       </p:sp>
       <p:sp>
         <p:nvSpPr>
-          <p:cNvPr id="26" name="TextBox 25"/>
-          <p:cNvSpPr txBox="1"/>
-          <p:nvPr/>
-        </p:nvSpPr>
-        <p:spPr>
-          <a:xfrm>
-            <a:off x="594360" y="5166360"/>
-            <a:ext cx="10972800" cy="292608"/>
-          </a:xfrm>
-          <a:prstGeom prst="rect">
-            <a:avLst/>
-          </a:prstGeom>
-          <a:noFill/>
-        </p:spPr>
-        <p:txBody>
-          <a:bodyPr wrap="square">
-            <a:spAutoFit/>
-          </a:bodyPr>
-          <a:lstStyle/>
-          <a:p>
-            <a:pPr algn="ctr"/>
-            <a:r>
-              <a:rPr sz="1100" b="1" i="0">
-                <a:solidFill>
-                  <a:srgbClr val="F5A623"/>
-                </a:solidFill>
-              </a:rPr>
-              <a:t>🌐  Live demo:  alan-production-0d14.up.railway.app</a:t>
+          <p:cNvPr id="31" name="Rectangle 30"/>
+          <p:cNvSpPr/>
+          <p:nvPr/>
+        </p:nvSpPr>
+        <p:spPr>
+          <a:xfrm>
+            <a:off x="274320" y="3648456"/>
+            <a:ext cx="91440" cy="896112"/>
+          </a:xfrm>
+          <a:prstGeom prst="rect">
+            <a:avLst/>
+          </a:prstGeom>
+          <a:solidFill>
+            <a:srgbClr val="D62839"/>
+          </a:solidFill>
+          <a:ln>
+            <a:noFill/>
+          </a:ln>
+        </p:spPr>
+        <p:style>
+          <a:lnRef idx="1">
+            <a:schemeClr val="accent1"/>
+          </a:lnRef>
+          <a:fillRef idx="3">
+            <a:schemeClr val="accent1"/>
+          </a:fillRef>
+          <a:effectRef idx="2">
+            <a:schemeClr val="accent1"/>
+          </a:effectRef>
+          <a:fontRef idx="minor">
+            <a:schemeClr val="lt1"/>
+          </a:fontRef>
+        </p:style>
+        <p:txBody>
+          <a:bodyPr rtlCol="0" anchor="ctr"/>
+          <a:lstStyle/>
+          <a:p>
+            <a:pPr algn="ctr"/>
+          </a:p>
+        </p:txBody>
+      </p:sp>
+      <p:sp>
+        <p:nvSpPr>
+          <p:cNvPr id="32" name="TextBox 31"/>
+          <p:cNvSpPr txBox="1"/>
+          <p:nvPr/>
+        </p:nvSpPr>
+        <p:spPr>
+          <a:xfrm>
+            <a:off x="457200" y="3703320"/>
+            <a:ext cx="2926080" cy="292608"/>
+          </a:xfrm>
+          <a:prstGeom prst="rect">
+            <a:avLst/>
+          </a:prstGeom>
+          <a:noFill/>
+        </p:spPr>
+        <p:txBody>
+          <a:bodyPr wrap="square">
+            <a:spAutoFit/>
+          </a:bodyPr>
+          <a:lstStyle/>
+          <a:p>
+            <a:pPr algn="l"/>
+            <a:r>
+              <a:rPr sz="1300" b="1" i="0">
+                <a:solidFill>
+                  <a:srgbClr val="1A2440"/>
+                </a:solidFill>
+              </a:rPr>
+              <a:t>Les lunettes à Soso</a:t>
+            </a:r>
+          </a:p>
+        </p:txBody>
+      </p:sp>
+      <p:sp>
+        <p:nvSpPr>
+          <p:cNvPr id="33" name="Rectangle 32"/>
+          <p:cNvSpPr/>
+          <p:nvPr/>
+        </p:nvSpPr>
+        <p:spPr>
+          <a:xfrm>
+            <a:off x="457200" y="4123944"/>
+            <a:ext cx="1188720" cy="329184"/>
+          </a:xfrm>
+          <a:prstGeom prst="rect">
+            <a:avLst/>
+          </a:prstGeom>
+          <a:solidFill>
+            <a:srgbClr val="D62839"/>
+          </a:solidFill>
+          <a:ln>
+            <a:noFill/>
+          </a:ln>
+        </p:spPr>
+        <p:style>
+          <a:lnRef idx="1">
+            <a:schemeClr val="accent1"/>
+          </a:lnRef>
+          <a:fillRef idx="3">
+            <a:schemeClr val="accent1"/>
+          </a:fillRef>
+          <a:effectRef idx="2">
+            <a:schemeClr val="accent1"/>
+          </a:effectRef>
+          <a:fontRef idx="minor">
+            <a:schemeClr val="lt1"/>
+          </a:fontRef>
+        </p:style>
+        <p:txBody>
+          <a:bodyPr rtlCol="0" anchor="ctr"/>
+          <a:lstStyle/>
+          <a:p>
+            <a:pPr algn="ctr"/>
+          </a:p>
+        </p:txBody>
+      </p:sp>
+      <p:sp>
+        <p:nvSpPr>
+          <p:cNvPr id="34" name="TextBox 33"/>
+          <p:cNvSpPr txBox="1"/>
+          <p:nvPr/>
+        </p:nvSpPr>
+        <p:spPr>
+          <a:xfrm>
+            <a:off x="457200" y="4123944"/>
+            <a:ext cx="1188720" cy="329184"/>
+          </a:xfrm>
+          <a:prstGeom prst="rect">
+            <a:avLst/>
+          </a:prstGeom>
+          <a:noFill/>
+        </p:spPr>
+        <p:txBody>
+          <a:bodyPr wrap="square">
+            <a:spAutoFit/>
+          </a:bodyPr>
+          <a:lstStyle/>
+          <a:p>
+            <a:pPr algn="ctr"/>
+            <a:r>
+              <a:rPr sz="1700" b="1" i="0">
+                <a:solidFill>
+                  <a:srgbClr val="FFFFFF"/>
+                </a:solidFill>
+              </a:rPr>
+              <a:t>84/100</a:t>
+            </a:r>
+          </a:p>
+        </p:txBody>
+      </p:sp>
+      <p:sp>
+        <p:nvSpPr>
+          <p:cNvPr id="35" name="TextBox 34"/>
+          <p:cNvSpPr txBox="1"/>
+          <p:nvPr/>
+        </p:nvSpPr>
+        <p:spPr>
+          <a:xfrm>
+            <a:off x="3630168" y="3703320"/>
+            <a:ext cx="3154680" cy="256032"/>
+          </a:xfrm>
+          <a:prstGeom prst="rect">
+            <a:avLst/>
+          </a:prstGeom>
+          <a:noFill/>
+        </p:spPr>
+        <p:txBody>
+          <a:bodyPr wrap="square">
+            <a:spAutoFit/>
+          </a:bodyPr>
+          <a:lstStyle/>
+          <a:p>
+            <a:pPr algn="l"/>
+            <a:r>
+              <a:rPr sz="1000" b="1" i="0">
+                <a:solidFill>
+                  <a:srgbClr val="D62839"/>
+                </a:solidFill>
+              </a:rPr>
+              <a:t>Co-billing · spike · repeated amounts · round numbers</a:t>
+            </a:r>
+          </a:p>
+        </p:txBody>
+      </p:sp>
+      <p:sp>
+        <p:nvSpPr>
+          <p:cNvPr id="36" name="TextBox 35"/>
+          <p:cNvSpPr txBox="1"/>
+          <p:nvPr/>
+        </p:nvSpPr>
+        <p:spPr>
+          <a:xfrm>
+            <a:off x="3630168" y="3995928"/>
+            <a:ext cx="3154680" cy="457200"/>
+          </a:xfrm>
+          <a:prstGeom prst="rect">
+            <a:avLst/>
+          </a:prstGeom>
+          <a:noFill/>
+        </p:spPr>
+        <p:txBody>
+          <a:bodyPr wrap="square">
+            <a:spAutoFit/>
+          </a:bodyPr>
+          <a:lstStyle/>
+          <a:p>
+            <a:pPr algn="l"/>
+            <a:r>
+              <a:rPr sz="900" b="0" i="0">
+                <a:solidFill>
+                  <a:srgbClr val="444444"/>
+                </a:solidFill>
+              </a:rPr>
+              <a:t>Only provider to trigger all 4 rules. 4 completely independent fraud signals.</a:t>
+            </a:r>
+          </a:p>
+        </p:txBody>
+      </p:sp>
+      <p:sp>
+        <p:nvSpPr>
+          <p:cNvPr id="37" name="TextBox 36"/>
+          <p:cNvSpPr txBox="1"/>
+          <p:nvPr/>
+        </p:nvSpPr>
+        <p:spPr>
+          <a:xfrm>
+            <a:off x="7013448" y="3849624"/>
+            <a:ext cx="4754880" cy="457200"/>
+          </a:xfrm>
+          <a:prstGeom prst="rect">
+            <a:avLst/>
+          </a:prstGeom>
+          <a:noFill/>
+        </p:spPr>
+        <p:txBody>
+          <a:bodyPr wrap="square">
+            <a:spAutoFit/>
+          </a:bodyPr>
+          <a:lstStyle/>
+          <a:p>
+            <a:pPr algn="l"/>
+            <a:r>
+              <a:rPr sz="1000" b="1" i="0">
+                <a:solidFill>
+                  <a:srgbClr val="1A2440"/>
+                </a:solidFill>
+              </a:rPr>
+              <a:t>Priority audit - highest confidence fraud case</a:t>
+            </a:r>
+          </a:p>
+        </p:txBody>
+      </p:sp>
+      <p:sp>
+        <p:nvSpPr>
+          <p:cNvPr id="38" name="Rectangle 37"/>
+          <p:cNvSpPr/>
+          <p:nvPr/>
+        </p:nvSpPr>
+        <p:spPr>
+          <a:xfrm>
+            <a:off x="274320" y="4581144"/>
+            <a:ext cx="11640312" cy="896112"/>
+          </a:xfrm>
+          <a:prstGeom prst="rect">
+            <a:avLst/>
+          </a:prstGeom>
+          <a:solidFill>
+            <a:srgbClr val="FFEBEB"/>
+          </a:solidFill>
+          <a:ln>
+            <a:noFill/>
+          </a:ln>
+        </p:spPr>
+        <p:style>
+          <a:lnRef idx="1">
+            <a:schemeClr val="accent1"/>
+          </a:lnRef>
+          <a:fillRef idx="3">
+            <a:schemeClr val="accent1"/>
+          </a:fillRef>
+          <a:effectRef idx="2">
+            <a:schemeClr val="accent1"/>
+          </a:effectRef>
+          <a:fontRef idx="minor">
+            <a:schemeClr val="lt1"/>
+          </a:fontRef>
+        </p:style>
+        <p:txBody>
+          <a:bodyPr rtlCol="0" anchor="ctr"/>
+          <a:lstStyle/>
+          <a:p>
+            <a:pPr algn="ctr"/>
+          </a:p>
+        </p:txBody>
+      </p:sp>
+      <p:sp>
+        <p:nvSpPr>
+          <p:cNvPr id="39" name="Rectangle 38"/>
+          <p:cNvSpPr/>
+          <p:nvPr/>
+        </p:nvSpPr>
+        <p:spPr>
+          <a:xfrm>
+            <a:off x="274320" y="4581144"/>
+            <a:ext cx="91440" cy="896112"/>
+          </a:xfrm>
+          <a:prstGeom prst="rect">
+            <a:avLst/>
+          </a:prstGeom>
+          <a:solidFill>
+            <a:srgbClr val="D62839"/>
+          </a:solidFill>
+          <a:ln>
+            <a:noFill/>
+          </a:ln>
+        </p:spPr>
+        <p:style>
+          <a:lnRef idx="1">
+            <a:schemeClr val="accent1"/>
+          </a:lnRef>
+          <a:fillRef idx="3">
+            <a:schemeClr val="accent1"/>
+          </a:fillRef>
+          <a:effectRef idx="2">
+            <a:schemeClr val="accent1"/>
+          </a:effectRef>
+          <a:fontRef idx="minor">
+            <a:schemeClr val="lt1"/>
+          </a:fontRef>
+        </p:style>
+        <p:txBody>
+          <a:bodyPr rtlCol="0" anchor="ctr"/>
+          <a:lstStyle/>
+          <a:p>
+            <a:pPr algn="ctr"/>
+          </a:p>
+        </p:txBody>
+      </p:sp>
+      <p:sp>
+        <p:nvSpPr>
+          <p:cNvPr id="40" name="TextBox 39"/>
+          <p:cNvSpPr txBox="1"/>
+          <p:nvPr/>
+        </p:nvSpPr>
+        <p:spPr>
+          <a:xfrm>
+            <a:off x="457200" y="4636007"/>
+            <a:ext cx="2926080" cy="292608"/>
+          </a:xfrm>
+          <a:prstGeom prst="rect">
+            <a:avLst/>
+          </a:prstGeom>
+          <a:noFill/>
+        </p:spPr>
+        <p:txBody>
+          <a:bodyPr wrap="square">
+            <a:spAutoFit/>
+          </a:bodyPr>
+          <a:lstStyle/>
+          <a:p>
+            <a:pPr algn="l"/>
+            <a:r>
+              <a:rPr sz="1300" b="1" i="0">
+                <a:solidFill>
+                  <a:srgbClr val="1A2440"/>
+                </a:solidFill>
+              </a:rPr>
+              <a:t>Penthievre alambics</a:t>
+            </a:r>
+          </a:p>
+        </p:txBody>
+      </p:sp>
+      <p:sp>
+        <p:nvSpPr>
+          <p:cNvPr id="41" name="Rectangle 40"/>
+          <p:cNvSpPr/>
+          <p:nvPr/>
+        </p:nvSpPr>
+        <p:spPr>
+          <a:xfrm>
+            <a:off x="457200" y="5056631"/>
+            <a:ext cx="1188720" cy="329184"/>
+          </a:xfrm>
+          <a:prstGeom prst="rect">
+            <a:avLst/>
+          </a:prstGeom>
+          <a:solidFill>
+            <a:srgbClr val="D62839"/>
+          </a:solidFill>
+          <a:ln>
+            <a:noFill/>
+          </a:ln>
+        </p:spPr>
+        <p:style>
+          <a:lnRef idx="1">
+            <a:schemeClr val="accent1"/>
+          </a:lnRef>
+          <a:fillRef idx="3">
+            <a:schemeClr val="accent1"/>
+          </a:fillRef>
+          <a:effectRef idx="2">
+            <a:schemeClr val="accent1"/>
+          </a:effectRef>
+          <a:fontRef idx="minor">
+            <a:schemeClr val="lt1"/>
+          </a:fontRef>
+        </p:style>
+        <p:txBody>
+          <a:bodyPr rtlCol="0" anchor="ctr"/>
+          <a:lstStyle/>
+          <a:p>
+            <a:pPr algn="ctr"/>
+          </a:p>
+        </p:txBody>
+      </p:sp>
+      <p:sp>
+        <p:nvSpPr>
+          <p:cNvPr id="42" name="TextBox 41"/>
+          <p:cNvSpPr txBox="1"/>
+          <p:nvPr/>
+        </p:nvSpPr>
+        <p:spPr>
+          <a:xfrm>
+            <a:off x="457200" y="5056631"/>
+            <a:ext cx="1188720" cy="329184"/>
+          </a:xfrm>
+          <a:prstGeom prst="rect">
+            <a:avLst/>
+          </a:prstGeom>
+          <a:noFill/>
+        </p:spPr>
+        <p:txBody>
+          <a:bodyPr wrap="square">
+            <a:spAutoFit/>
+          </a:bodyPr>
+          <a:lstStyle/>
+          <a:p>
+            <a:pPr algn="ctr"/>
+            <a:r>
+              <a:rPr sz="1700" b="1" i="0">
+                <a:solidFill>
+                  <a:srgbClr val="FFFFFF"/>
+                </a:solidFill>
+              </a:rPr>
+              <a:t>78/100</a:t>
+            </a:r>
+          </a:p>
+        </p:txBody>
+      </p:sp>
+      <p:sp>
+        <p:nvSpPr>
+          <p:cNvPr id="43" name="TextBox 42"/>
+          <p:cNvSpPr txBox="1"/>
+          <p:nvPr/>
+        </p:nvSpPr>
+        <p:spPr>
+          <a:xfrm>
+            <a:off x="3630168" y="4636007"/>
+            <a:ext cx="3154680" cy="256032"/>
+          </a:xfrm>
+          <a:prstGeom prst="rect">
+            <a:avLst/>
+          </a:prstGeom>
+          <a:noFill/>
+        </p:spPr>
+        <p:txBody>
+          <a:bodyPr wrap="square">
+            <a:spAutoFit/>
+          </a:bodyPr>
+          <a:lstStyle/>
+          <a:p>
+            <a:pPr algn="l"/>
+            <a:r>
+              <a:rPr sz="1000" b="1" i="0">
+                <a:solidFill>
+                  <a:srgbClr val="D62839"/>
+                </a:solidFill>
+              </a:rPr>
+              <a:t>Co-billing · billing spike · round numbers</a:t>
+            </a:r>
+          </a:p>
+        </p:txBody>
+      </p:sp>
+      <p:sp>
+        <p:nvSpPr>
+          <p:cNvPr id="44" name="TextBox 43"/>
+          <p:cNvSpPr txBox="1"/>
+          <p:nvPr/>
+        </p:nvSpPr>
+        <p:spPr>
+          <a:xfrm>
+            <a:off x="3630168" y="4928616"/>
+            <a:ext cx="3154680" cy="457200"/>
+          </a:xfrm>
+          <a:prstGeom prst="rect">
+            <a:avLst/>
+          </a:prstGeom>
+          <a:noFill/>
+        </p:spPr>
+        <p:txBody>
+          <a:bodyPr wrap="square">
+            <a:spAutoFit/>
+          </a:bodyPr>
+          <a:lstStyle/>
+          <a:p>
+            <a:pPr algn="l"/>
+            <a:r>
+              <a:rPr sz="900" b="0" i="0">
+                <a:solidFill>
+                  <a:srgbClr val="444444"/>
+                </a:solidFill>
+              </a:rPr>
+              <a:t>94% co-billing rate - highest in dataset. 2 spike months.</a:t>
+            </a:r>
+          </a:p>
+        </p:txBody>
+      </p:sp>
+      <p:sp>
+        <p:nvSpPr>
+          <p:cNvPr id="45" name="TextBox 44"/>
+          <p:cNvSpPr txBox="1"/>
+          <p:nvPr/>
+        </p:nvSpPr>
+        <p:spPr>
+          <a:xfrm>
+            <a:off x="7013448" y="4782312"/>
+            <a:ext cx="4754880" cy="457200"/>
+          </a:xfrm>
+          <a:prstGeom prst="rect">
+            <a:avLst/>
+          </a:prstGeom>
+          <a:noFill/>
+        </p:spPr>
+        <p:txBody>
+          <a:bodyPr wrap="square">
+            <a:spAutoFit/>
+          </a:bodyPr>
+          <a:lstStyle/>
+          <a:p>
+            <a:pPr algn="l"/>
+            <a:r>
+              <a:rPr sz="1000" b="1" i="0">
+                <a:solidFill>
+                  <a:srgbClr val="1A2440"/>
+                </a:solidFill>
+              </a:rPr>
+              <a:t>Full audit + suspend all pending payments</a:t>
+            </a:r>
+          </a:p>
+        </p:txBody>
+      </p:sp>
+      <p:sp>
+        <p:nvSpPr>
+          <p:cNvPr id="46" name="Rectangle 45"/>
+          <p:cNvSpPr/>
+          <p:nvPr/>
+        </p:nvSpPr>
+        <p:spPr>
+          <a:xfrm>
+            <a:off x="274320" y="5513832"/>
+            <a:ext cx="11640312" cy="896112"/>
+          </a:xfrm>
+          <a:prstGeom prst="rect">
+            <a:avLst/>
+          </a:prstGeom>
+          <a:solidFill>
+            <a:srgbClr val="FFEBEB"/>
+          </a:solidFill>
+          <a:ln>
+            <a:noFill/>
+          </a:ln>
+        </p:spPr>
+        <p:style>
+          <a:lnRef idx="1">
+            <a:schemeClr val="accent1"/>
+          </a:lnRef>
+          <a:fillRef idx="3">
+            <a:schemeClr val="accent1"/>
+          </a:fillRef>
+          <a:effectRef idx="2">
+            <a:schemeClr val="accent1"/>
+          </a:effectRef>
+          <a:fontRef idx="minor">
+            <a:schemeClr val="lt1"/>
+          </a:fontRef>
+        </p:style>
+        <p:txBody>
+          <a:bodyPr rtlCol="0" anchor="ctr"/>
+          <a:lstStyle/>
+          <a:p>
+            <a:pPr algn="ctr"/>
+          </a:p>
+        </p:txBody>
+      </p:sp>
+      <p:sp>
+        <p:nvSpPr>
+          <p:cNvPr id="47" name="Rectangle 46"/>
+          <p:cNvSpPr/>
+          <p:nvPr/>
+        </p:nvSpPr>
+        <p:spPr>
+          <a:xfrm>
+            <a:off x="274320" y="5513832"/>
+            <a:ext cx="91440" cy="896112"/>
+          </a:xfrm>
+          <a:prstGeom prst="rect">
+            <a:avLst/>
+          </a:prstGeom>
+          <a:solidFill>
+            <a:srgbClr val="D62839"/>
+          </a:solidFill>
+          <a:ln>
+            <a:noFill/>
+          </a:ln>
+        </p:spPr>
+        <p:style>
+          <a:lnRef idx="1">
+            <a:schemeClr val="accent1"/>
+          </a:lnRef>
+          <a:fillRef idx="3">
+            <a:schemeClr val="accent1"/>
+          </a:fillRef>
+          <a:effectRef idx="2">
+            <a:schemeClr val="accent1"/>
+          </a:effectRef>
+          <a:fontRef idx="minor">
+            <a:schemeClr val="lt1"/>
+          </a:fontRef>
+        </p:style>
+        <p:txBody>
+          <a:bodyPr rtlCol="0" anchor="ctr"/>
+          <a:lstStyle/>
+          <a:p>
+            <a:pPr algn="ctr"/>
+          </a:p>
+        </p:txBody>
+      </p:sp>
+      <p:sp>
+        <p:nvSpPr>
+          <p:cNvPr id="48" name="TextBox 47"/>
+          <p:cNvSpPr txBox="1"/>
+          <p:nvPr/>
+        </p:nvSpPr>
+        <p:spPr>
+          <a:xfrm>
+            <a:off x="457200" y="5568696"/>
+            <a:ext cx="2926080" cy="292608"/>
+          </a:xfrm>
+          <a:prstGeom prst="rect">
+            <a:avLst/>
+          </a:prstGeom>
+          <a:noFill/>
+        </p:spPr>
+        <p:txBody>
+          <a:bodyPr wrap="square">
+            <a:spAutoFit/>
+          </a:bodyPr>
+          <a:lstStyle/>
+          <a:p>
+            <a:pPr algn="l"/>
+            <a:r>
+              <a:rPr sz="1300" b="1" i="0">
+                <a:solidFill>
+                  <a:srgbClr val="1A2440"/>
+                </a:solidFill>
+              </a:rPr>
+              <a:t>Runner glasses</a:t>
+            </a:r>
+          </a:p>
+        </p:txBody>
+      </p:sp>
+      <p:sp>
+        <p:nvSpPr>
+          <p:cNvPr id="49" name="Rectangle 48"/>
+          <p:cNvSpPr/>
+          <p:nvPr/>
+        </p:nvSpPr>
+        <p:spPr>
+          <a:xfrm>
+            <a:off x="457200" y="5989320"/>
+            <a:ext cx="1188720" cy="329184"/>
+          </a:xfrm>
+          <a:prstGeom prst="rect">
+            <a:avLst/>
+          </a:prstGeom>
+          <a:solidFill>
+            <a:srgbClr val="D62839"/>
+          </a:solidFill>
+          <a:ln>
+            <a:noFill/>
+          </a:ln>
+        </p:spPr>
+        <p:style>
+          <a:lnRef idx="1">
+            <a:schemeClr val="accent1"/>
+          </a:lnRef>
+          <a:fillRef idx="3">
+            <a:schemeClr val="accent1"/>
+          </a:fillRef>
+          <a:effectRef idx="2">
+            <a:schemeClr val="accent1"/>
+          </a:effectRef>
+          <a:fontRef idx="minor">
+            <a:schemeClr val="lt1"/>
+          </a:fontRef>
+        </p:style>
+        <p:txBody>
+          <a:bodyPr rtlCol="0" anchor="ctr"/>
+          <a:lstStyle/>
+          <a:p>
+            <a:pPr algn="ctr"/>
+          </a:p>
+        </p:txBody>
+      </p:sp>
+      <p:sp>
+        <p:nvSpPr>
+          <p:cNvPr id="50" name="TextBox 49"/>
+          <p:cNvSpPr txBox="1"/>
+          <p:nvPr/>
+        </p:nvSpPr>
+        <p:spPr>
+          <a:xfrm>
+            <a:off x="457200" y="5989320"/>
+            <a:ext cx="1188720" cy="329184"/>
+          </a:xfrm>
+          <a:prstGeom prst="rect">
+            <a:avLst/>
+          </a:prstGeom>
+          <a:noFill/>
+        </p:spPr>
+        <p:txBody>
+          <a:bodyPr wrap="square">
+            <a:spAutoFit/>
+          </a:bodyPr>
+          <a:lstStyle/>
+          <a:p>
+            <a:pPr algn="ctr"/>
+            <a:r>
+              <a:rPr sz="1700" b="1" i="0">
+                <a:solidFill>
+                  <a:srgbClr val="FFFFFF"/>
+                </a:solidFill>
+              </a:rPr>
+              <a:t>74/100</a:t>
+            </a:r>
+          </a:p>
+        </p:txBody>
+      </p:sp>
+      <p:sp>
+        <p:nvSpPr>
+          <p:cNvPr id="51" name="TextBox 50"/>
+          <p:cNvSpPr txBox="1"/>
+          <p:nvPr/>
+        </p:nvSpPr>
+        <p:spPr>
+          <a:xfrm>
+            <a:off x="3630168" y="5568696"/>
+            <a:ext cx="3154680" cy="256032"/>
+          </a:xfrm>
+          <a:prstGeom prst="rect">
+            <a:avLst/>
+          </a:prstGeom>
+          <a:noFill/>
+        </p:spPr>
+        <p:txBody>
+          <a:bodyPr wrap="square">
+            <a:spAutoFit/>
+          </a:bodyPr>
+          <a:lstStyle/>
+          <a:p>
+            <a:pPr algn="l"/>
+            <a:r>
+              <a:rPr sz="1000" b="1" i="0">
+                <a:solidFill>
+                  <a:srgbClr val="D62839"/>
+                </a:solidFill>
+              </a:rPr>
+              <a:t>Co-billing · repeated amounts · round numbers</a:t>
+            </a:r>
+          </a:p>
+        </p:txBody>
+      </p:sp>
+      <p:sp>
+        <p:nvSpPr>
+          <p:cNvPr id="52" name="TextBox 51"/>
+          <p:cNvSpPr txBox="1"/>
+          <p:nvPr/>
+        </p:nvSpPr>
+        <p:spPr>
+          <a:xfrm>
+            <a:off x="3630168" y="5861304"/>
+            <a:ext cx="3154680" cy="457200"/>
+          </a:xfrm>
+          <a:prstGeom prst="rect">
+            <a:avLst/>
+          </a:prstGeom>
+          <a:noFill/>
+        </p:spPr>
+        <p:txBody>
+          <a:bodyPr wrap="square">
+            <a:spAutoFit/>
+          </a:bodyPr>
+          <a:lstStyle/>
+          <a:p>
+            <a:pPr algn="l"/>
+            <a:r>
+              <a:rPr sz="900" b="0" i="0">
+                <a:solidFill>
+                  <a:srgbClr val="444444"/>
+                </a:solidFill>
+              </a:rPr>
+              <a:t>55% co-billing. 3 repeated-amount patterns. All contacts: exact round euros.</a:t>
+            </a:r>
+          </a:p>
+        </p:txBody>
+      </p:sp>
+      <p:sp>
+        <p:nvSpPr>
+          <p:cNvPr id="53" name="TextBox 52"/>
+          <p:cNvSpPr txBox="1"/>
+          <p:nvPr/>
+        </p:nvSpPr>
+        <p:spPr>
+          <a:xfrm>
+            <a:off x="7013448" y="5715000"/>
+            <a:ext cx="4754880" cy="457200"/>
+          </a:xfrm>
+          <a:prstGeom prst="rect">
+            <a:avLst/>
+          </a:prstGeom>
+          <a:noFill/>
+        </p:spPr>
+        <p:txBody>
+          <a:bodyPr wrap="square">
+            <a:spAutoFit/>
+          </a:bodyPr>
+          <a:lstStyle/>
+          <a:p>
+            <a:pPr algn="l"/>
+            <a:r>
+              <a:rPr sz="1000" b="1" i="0">
+                <a:solidFill>
+                  <a:srgbClr val="1A2440"/>
+                </a:solidFill>
+              </a:rPr>
+              <a:t>Audit focus on fabricated contacts charges</a:t>
             </a:r>
           </a:p>
         </p:txBody>
@@ -6747,7 +7736,7 @@
         <p:spPr>
           <a:xfrm>
             <a:off x="0" y="0"/>
-            <a:ext cx="12188952" cy="6858000"/>
+            <a:ext cx="12188952" cy="960120"/>
           </a:xfrm>
           <a:prstGeom prst="rect">
             <a:avLst/>
@@ -6789,51 +7778,8 @@
         </p:nvSpPr>
         <p:spPr>
           <a:xfrm>
-            <a:off x="0" y="5303520"/>
-            <a:ext cx="12188952" cy="1554480"/>
-          </a:xfrm>
-          <a:prstGeom prst="rect">
-            <a:avLst/>
-          </a:prstGeom>
-          <a:solidFill>
-            <a:srgbClr val="D62839"/>
-          </a:solidFill>
-          <a:ln>
-            <a:noFill/>
-          </a:ln>
-        </p:spPr>
-        <p:style>
-          <a:lnRef idx="1">
-            <a:schemeClr val="accent1"/>
-          </a:lnRef>
-          <a:fillRef idx="3">
-            <a:schemeClr val="accent1"/>
-          </a:fillRef>
-          <a:effectRef idx="2">
-            <a:schemeClr val="accent1"/>
-          </a:effectRef>
-          <a:fontRef idx="minor">
-            <a:schemeClr val="lt1"/>
-          </a:fontRef>
-        </p:style>
-        <p:txBody>
-          <a:bodyPr rtlCol="0" anchor="ctr"/>
-          <a:lstStyle/>
-          <a:p>
-            <a:pPr algn="ctr"/>
-          </a:p>
-        </p:txBody>
-      </p:sp>
-      <p:sp>
-        <p:nvSpPr>
-          <p:cNvPr id="4" name="Rectangle 3"/>
-          <p:cNvSpPr/>
-          <p:nvPr/>
-        </p:nvSpPr>
-        <p:spPr>
-          <a:xfrm>
-            <a:off x="0" y="0"/>
-            <a:ext cx="164592" cy="6858000"/>
+            <a:off x="320040" y="118872"/>
+            <a:ext cx="1097280" cy="292608"/>
           </a:xfrm>
           <a:prstGeom prst="rect">
             <a:avLst/>
@@ -6869,20 +7815,88 @@
       </p:sp>
       <p:sp>
         <p:nvSpPr>
-          <p:cNvPr id="5" name="Rectangle 4"/>
+          <p:cNvPr id="4" name="TextBox 3"/>
+          <p:cNvSpPr txBox="1"/>
+          <p:nvPr/>
+        </p:nvSpPr>
+        <p:spPr>
+          <a:xfrm>
+            <a:off x="320040" y="118872"/>
+            <a:ext cx="1097280" cy="292608"/>
+          </a:xfrm>
+          <a:prstGeom prst="rect">
+            <a:avLst/>
+          </a:prstGeom>
+          <a:noFill/>
+        </p:spPr>
+        <p:txBody>
+          <a:bodyPr wrap="square">
+            <a:spAutoFit/>
+          </a:bodyPr>
+          <a:lstStyle/>
+          <a:p>
+            <a:pPr algn="ctr"/>
+            <a:r>
+              <a:rPr sz="900" b="1" i="0">
+                <a:solidFill>
+                  <a:srgbClr val="1A2440"/>
+                </a:solidFill>
+              </a:rPr>
+              <a:t>Q2</a:t>
+            </a:r>
+          </a:p>
+        </p:txBody>
+      </p:sp>
+      <p:sp>
+        <p:nvSpPr>
+          <p:cNvPr id="5" name="TextBox 4"/>
+          <p:cNvSpPr txBox="1"/>
+          <p:nvPr/>
+        </p:nvSpPr>
+        <p:spPr>
+          <a:xfrm>
+            <a:off x="1554480" y="73152"/>
+            <a:ext cx="10332720" cy="594360"/>
+          </a:xfrm>
+          <a:prstGeom prst="rect">
+            <a:avLst/>
+          </a:prstGeom>
+          <a:noFill/>
+        </p:spPr>
+        <p:txBody>
+          <a:bodyPr wrap="square">
+            <a:spAutoFit/>
+          </a:bodyPr>
+          <a:lstStyle/>
+          <a:p>
+            <a:pPr algn="l"/>
+            <a:r>
+              <a:rPr sz="2400" b="1" i="0">
+                <a:solidFill>
+                  <a:srgbClr val="FFFFFF"/>
+                </a:solidFill>
+              </a:rPr>
+              <a:t>Under Review &amp; Cleared Providers</a:t>
+            </a:r>
+          </a:p>
+        </p:txBody>
+      </p:sp>
+      <p:sp>
+        <p:nvSpPr>
+          <p:cNvPr id="6" name="Rectangle 5"/>
           <p:cNvSpPr/>
           <p:nvPr/>
         </p:nvSpPr>
         <p:spPr>
           <a:xfrm>
-            <a:off x="457200" y="1463040"/>
-            <a:ext cx="2011680" cy="502920"/>
+            <a:off x="0" y="960120"/>
+            <a:ext cx="12188952" cy="347472"/>
           </a:xfrm>
           <a:prstGeom prst="rect">
             <a:avLst/>
           </a:prstGeom>
           <a:solidFill>
-            <a:srgbClr val="F5A623"/>
+            <a:srgbClr val="F5F5F5"/>
           </a:solidFill>
           <a:ln>
             <a:noFill/>
@@ -6912,137 +7926,1820 @@
       </p:sp>
       <p:sp>
         <p:nvSpPr>
-          <p:cNvPr id="6" name="TextBox 5"/>
-          <p:cNvSpPr txBox="1"/>
-          <p:nvPr/>
-        </p:nvSpPr>
-        <p:spPr>
-          <a:xfrm>
-            <a:off x="457200" y="1463040"/>
-            <a:ext cx="2011680" cy="502920"/>
-          </a:xfrm>
-          <a:prstGeom prst="rect">
-            <a:avLst/>
-          </a:prstGeom>
-          <a:noFill/>
-        </p:spPr>
-        <p:txBody>
-          <a:bodyPr wrap="square">
-            <a:spAutoFit/>
-          </a:bodyPr>
-          <a:lstStyle/>
-          <a:p>
-            <a:pPr algn="ctr"/>
+          <p:cNvPr id="7" name="TextBox 6"/>
+          <p:cNvSpPr txBox="1"/>
+          <p:nvPr/>
+        </p:nvSpPr>
+        <p:spPr>
+          <a:xfrm>
+            <a:off x="365760" y="987552"/>
+            <a:ext cx="11430000" cy="301752"/>
+          </a:xfrm>
+          <a:prstGeom prst="rect">
+            <a:avLst/>
+          </a:prstGeom>
+          <a:noFill/>
+        </p:spPr>
+        <p:txBody>
+          <a:bodyPr wrap="square">
+            <a:spAutoFit/>
+          </a:bodyPr>
+          <a:lstStyle/>
+          <a:p>
+            <a:pPr algn="l"/>
+            <a:r>
+              <a:rPr sz="1200" b="0" i="1">
+                <a:solidFill>
+                  <a:srgbClr val="444444"/>
+                </a:solidFill>
+              </a:rPr>
+              <a:t>3 providers flagged for manual review · 4 providers fully cleared with no suspicious patterns</a:t>
+            </a:r>
+          </a:p>
+        </p:txBody>
+      </p:sp>
+      <p:sp>
+        <p:nvSpPr>
+          <p:cNvPr id="8" name="Rectangle 7"/>
+          <p:cNvSpPr/>
+          <p:nvPr/>
+        </p:nvSpPr>
+        <p:spPr>
+          <a:xfrm>
+            <a:off x="0" y="6510528"/>
+            <a:ext cx="12188952" cy="347472"/>
+          </a:xfrm>
+          <a:prstGeom prst="rect">
+            <a:avLst/>
+          </a:prstGeom>
+          <a:solidFill>
+            <a:srgbClr val="1A2440"/>
+          </a:solidFill>
+          <a:ln>
+            <a:noFill/>
+          </a:ln>
+        </p:spPr>
+        <p:style>
+          <a:lnRef idx="1">
+            <a:schemeClr val="accent1"/>
+          </a:lnRef>
+          <a:fillRef idx="3">
+            <a:schemeClr val="accent1"/>
+          </a:fillRef>
+          <a:effectRef idx="2">
+            <a:schemeClr val="accent1"/>
+          </a:effectRef>
+          <a:fontRef idx="minor">
+            <a:schemeClr val="lt1"/>
+          </a:fontRef>
+        </p:style>
+        <p:txBody>
+          <a:bodyPr rtlCol="0" anchor="ctr"/>
+          <a:lstStyle/>
+          <a:p>
+            <a:pPr algn="ctr"/>
+          </a:p>
+        </p:txBody>
+      </p:sp>
+      <p:sp>
+        <p:nvSpPr>
+          <p:cNvPr id="9" name="TextBox 8"/>
+          <p:cNvSpPr txBox="1"/>
+          <p:nvPr/>
+        </p:nvSpPr>
+        <p:spPr>
+          <a:xfrm>
+            <a:off x="274320" y="6519672"/>
+            <a:ext cx="11612880" cy="329184"/>
+          </a:xfrm>
+          <a:prstGeom prst="rect">
+            <a:avLst/>
+          </a:prstGeom>
+          <a:noFill/>
+        </p:spPr>
+        <p:txBody>
+          <a:bodyPr wrap="square">
+            <a:spAutoFit/>
+          </a:bodyPr>
+          <a:lstStyle/>
+          <a:p>
+            <a:pPr algn="ctr"/>
+            <a:r>
+              <a:rPr sz="900" b="0" i="0">
+                <a:solidFill>
+                  <a:srgbClr val="FFFFFF"/>
+                </a:solidFill>
+              </a:rPr>
+              <a:t>Alan Assurance · Fraud Detection Case</a:t>
+            </a:r>
+          </a:p>
+        </p:txBody>
+      </p:sp>
+      <p:sp>
+        <p:nvSpPr>
+          <p:cNvPr id="10" name="Rectangle 9"/>
+          <p:cNvSpPr/>
+          <p:nvPr/>
+        </p:nvSpPr>
+        <p:spPr>
+          <a:xfrm>
+            <a:off x="274320" y="1417320"/>
+            <a:ext cx="11640312" cy="320040"/>
+          </a:xfrm>
+          <a:prstGeom prst="rect">
+            <a:avLst/>
+          </a:prstGeom>
+          <a:solidFill>
+            <a:srgbClr val="E07B39"/>
+          </a:solidFill>
+          <a:ln>
+            <a:noFill/>
+          </a:ln>
+        </p:spPr>
+        <p:style>
+          <a:lnRef idx="1">
+            <a:schemeClr val="accent1"/>
+          </a:lnRef>
+          <a:fillRef idx="3">
+            <a:schemeClr val="accent1"/>
+          </a:fillRef>
+          <a:effectRef idx="2">
+            <a:schemeClr val="accent1"/>
+          </a:effectRef>
+          <a:fontRef idx="minor">
+            <a:schemeClr val="lt1"/>
+          </a:fontRef>
+        </p:style>
+        <p:txBody>
+          <a:bodyPr rtlCol="0" anchor="ctr"/>
+          <a:lstStyle/>
+          <a:p>
+            <a:pPr algn="ctr"/>
+          </a:p>
+        </p:txBody>
+      </p:sp>
+      <p:sp>
+        <p:nvSpPr>
+          <p:cNvPr id="11" name="TextBox 10"/>
+          <p:cNvSpPr txBox="1"/>
+          <p:nvPr/>
+        </p:nvSpPr>
+        <p:spPr>
+          <a:xfrm>
+            <a:off x="411480" y="1444752"/>
+            <a:ext cx="11247120" cy="256032"/>
+          </a:xfrm>
+          <a:prstGeom prst="rect">
+            <a:avLst/>
+          </a:prstGeom>
+          <a:noFill/>
+        </p:spPr>
+        <p:txBody>
+          <a:bodyPr wrap="square">
+            <a:spAutoFit/>
+          </a:bodyPr>
+          <a:lstStyle/>
+          <a:p>
+            <a:pPr algn="l"/>
+            <a:r>
+              <a:rPr sz="1100" b="1" i="0">
+                <a:solidFill>
+                  <a:srgbClr val="FFFFFF"/>
+                </a:solidFill>
+              </a:rPr>
+              <a:t>Flagged for manual review  -  score below auto-hold threshold but patterns present</a:t>
+            </a:r>
+          </a:p>
+        </p:txBody>
+      </p:sp>
+      <p:sp>
+        <p:nvSpPr>
+          <p:cNvPr id="12" name="Rectangle 11"/>
+          <p:cNvSpPr/>
+          <p:nvPr/>
+        </p:nvSpPr>
+        <p:spPr>
+          <a:xfrm>
+            <a:off x="274320" y="1783080"/>
+            <a:ext cx="11640312" cy="749808"/>
+          </a:xfrm>
+          <a:prstGeom prst="rect">
+            <a:avLst/>
+          </a:prstGeom>
+          <a:solidFill>
+            <a:srgbClr val="FFF3E6"/>
+          </a:solidFill>
+          <a:ln>
+            <a:noFill/>
+          </a:ln>
+        </p:spPr>
+        <p:style>
+          <a:lnRef idx="1">
+            <a:schemeClr val="accent1"/>
+          </a:lnRef>
+          <a:fillRef idx="3">
+            <a:schemeClr val="accent1"/>
+          </a:fillRef>
+          <a:effectRef idx="2">
+            <a:schemeClr val="accent1"/>
+          </a:effectRef>
+          <a:fontRef idx="minor">
+            <a:schemeClr val="lt1"/>
+          </a:fontRef>
+        </p:style>
+        <p:txBody>
+          <a:bodyPr rtlCol="0" anchor="ctr"/>
+          <a:lstStyle/>
+          <a:p>
+            <a:pPr algn="ctr"/>
+          </a:p>
+        </p:txBody>
+      </p:sp>
+      <p:sp>
+        <p:nvSpPr>
+          <p:cNvPr id="13" name="Rectangle 12"/>
+          <p:cNvSpPr/>
+          <p:nvPr/>
+        </p:nvSpPr>
+        <p:spPr>
+          <a:xfrm>
+            <a:off x="274320" y="1783080"/>
+            <a:ext cx="91440" cy="749808"/>
+          </a:xfrm>
+          <a:prstGeom prst="rect">
+            <a:avLst/>
+          </a:prstGeom>
+          <a:solidFill>
+            <a:srgbClr val="E07B39"/>
+          </a:solidFill>
+          <a:ln>
+            <a:noFill/>
+          </a:ln>
+        </p:spPr>
+        <p:style>
+          <a:lnRef idx="1">
+            <a:schemeClr val="accent1"/>
+          </a:lnRef>
+          <a:fillRef idx="3">
+            <a:schemeClr val="accent1"/>
+          </a:fillRef>
+          <a:effectRef idx="2">
+            <a:schemeClr val="accent1"/>
+          </a:effectRef>
+          <a:fontRef idx="minor">
+            <a:schemeClr val="lt1"/>
+          </a:fontRef>
+        </p:style>
+        <p:txBody>
+          <a:bodyPr rtlCol="0" anchor="ctr"/>
+          <a:lstStyle/>
+          <a:p>
+            <a:pPr algn="ctr"/>
+          </a:p>
+        </p:txBody>
+      </p:sp>
+      <p:sp>
+        <p:nvSpPr>
+          <p:cNvPr id="14" name="Rectangle 13"/>
+          <p:cNvSpPr/>
+          <p:nvPr/>
+        </p:nvSpPr>
+        <p:spPr>
+          <a:xfrm>
+            <a:off x="457200" y="1984248"/>
+            <a:ext cx="1188720" cy="329184"/>
+          </a:xfrm>
+          <a:prstGeom prst="rect">
+            <a:avLst/>
+          </a:prstGeom>
+          <a:solidFill>
+            <a:srgbClr val="E07B39"/>
+          </a:solidFill>
+          <a:ln>
+            <a:noFill/>
+          </a:ln>
+        </p:spPr>
+        <p:style>
+          <a:lnRef idx="1">
+            <a:schemeClr val="accent1"/>
+          </a:lnRef>
+          <a:fillRef idx="3">
+            <a:schemeClr val="accent1"/>
+          </a:fillRef>
+          <a:effectRef idx="2">
+            <a:schemeClr val="accent1"/>
+          </a:effectRef>
+          <a:fontRef idx="minor">
+            <a:schemeClr val="lt1"/>
+          </a:fontRef>
+        </p:style>
+        <p:txBody>
+          <a:bodyPr rtlCol="0" anchor="ctr"/>
+          <a:lstStyle/>
+          <a:p>
+            <a:pPr algn="ctr"/>
+          </a:p>
+        </p:txBody>
+      </p:sp>
+      <p:sp>
+        <p:nvSpPr>
+          <p:cNvPr id="15" name="TextBox 14"/>
+          <p:cNvSpPr txBox="1"/>
+          <p:nvPr/>
+        </p:nvSpPr>
+        <p:spPr>
+          <a:xfrm>
+            <a:off x="457200" y="1984248"/>
+            <a:ext cx="1188720" cy="329184"/>
+          </a:xfrm>
+          <a:prstGeom prst="rect">
+            <a:avLst/>
+          </a:prstGeom>
+          <a:noFill/>
+        </p:spPr>
+        <p:txBody>
+          <a:bodyPr wrap="square">
+            <a:spAutoFit/>
+          </a:bodyPr>
+          <a:lstStyle/>
+          <a:p>
+            <a:pPr algn="ctr"/>
+            <a:r>
+              <a:rPr sz="1700" b="1" i="0">
+                <a:solidFill>
+                  <a:srgbClr val="FFFFFF"/>
+                </a:solidFill>
+              </a:rPr>
+              <a:t>54/100</a:t>
+            </a:r>
+          </a:p>
+        </p:txBody>
+      </p:sp>
+      <p:sp>
+        <p:nvSpPr>
+          <p:cNvPr id="16" name="TextBox 15"/>
+          <p:cNvSpPr txBox="1"/>
+          <p:nvPr/>
+        </p:nvSpPr>
+        <p:spPr>
+          <a:xfrm>
+            <a:off x="1828800" y="1837943"/>
+            <a:ext cx="3200400" cy="292608"/>
+          </a:xfrm>
+          <a:prstGeom prst="rect">
+            <a:avLst/>
+          </a:prstGeom>
+          <a:noFill/>
+        </p:spPr>
+        <p:txBody>
+          <a:bodyPr wrap="square">
+            <a:spAutoFit/>
+          </a:bodyPr>
+          <a:lstStyle/>
+          <a:p>
+            <a:pPr algn="l"/>
             <a:r>
               <a:rPr sz="1300" b="1" i="0">
                 <a:solidFill>
                   <a:srgbClr val="1A2440"/>
                 </a:solidFill>
               </a:rPr>
-              <a:t>QUESTION 3</a:t>
-            </a:r>
-          </a:p>
-        </p:txBody>
-      </p:sp>
-      <p:sp>
-        <p:nvSpPr>
-          <p:cNvPr id="7" name="TextBox 6"/>
-          <p:cNvSpPr txBox="1"/>
-          <p:nvPr/>
-        </p:nvSpPr>
-        <p:spPr>
-          <a:xfrm>
-            <a:off x="457200" y="2103120"/>
-            <a:ext cx="11430000" cy="457200"/>
-          </a:xfrm>
-          <a:prstGeom prst="rect">
-            <a:avLst/>
-          </a:prstGeom>
-          <a:noFill/>
-        </p:spPr>
-        <p:txBody>
-          <a:bodyPr wrap="square">
-            <a:spAutoFit/>
-          </a:bodyPr>
-          <a:lstStyle/>
-          <a:p>
-            <a:pPr algn="l"/>
-            <a:r>
-              <a:rPr sz="1600" b="0" i="1">
-                <a:solidFill>
-                  <a:srgbClr val="CCCCCC"/>
-                </a:solidFill>
-              </a:rPr>
-              <a:t>Recommendations</a:t>
-            </a:r>
-          </a:p>
-        </p:txBody>
-      </p:sp>
-      <p:sp>
-        <p:nvSpPr>
-          <p:cNvPr id="8" name="TextBox 7"/>
-          <p:cNvSpPr txBox="1"/>
-          <p:nvPr/>
-        </p:nvSpPr>
-        <p:spPr>
-          <a:xfrm>
-            <a:off x="457200" y="2697480"/>
-            <a:ext cx="11430000" cy="1371600"/>
-          </a:xfrm>
-          <a:prstGeom prst="rect">
-            <a:avLst/>
-          </a:prstGeom>
-          <a:noFill/>
-        </p:spPr>
-        <p:txBody>
-          <a:bodyPr wrap="square">
-            <a:spAutoFit/>
-          </a:bodyPr>
-          <a:lstStyle/>
-          <a:p>
-            <a:pPr algn="l"/>
-            <a:r>
-              <a:rPr sz="4000" b="1" i="0">
+              <a:t>Kylian's frames</a:t>
+            </a:r>
+          </a:p>
+        </p:txBody>
+      </p:sp>
+      <p:sp>
+        <p:nvSpPr>
+          <p:cNvPr id="17" name="TextBox 16"/>
+          <p:cNvSpPr txBox="1"/>
+          <p:nvPr/>
+        </p:nvSpPr>
+        <p:spPr>
+          <a:xfrm>
+            <a:off x="1828800" y="2167128"/>
+            <a:ext cx="3200400" cy="292608"/>
+          </a:xfrm>
+          <a:prstGeom prst="rect">
+            <a:avLst/>
+          </a:prstGeom>
+          <a:noFill/>
+        </p:spPr>
+        <p:txBody>
+          <a:bodyPr wrap="square">
+            <a:spAutoFit/>
+          </a:bodyPr>
+          <a:lstStyle/>
+          <a:p>
+            <a:pPr algn="l"/>
+            <a:r>
+              <a:rPr sz="900" b="1" i="0">
+                <a:solidFill>
+                  <a:srgbClr val="E07B39"/>
+                </a:solidFill>
+              </a:rPr>
+              <a:t>Co-billing (76%) · billing spike · round numbers</a:t>
+            </a:r>
+          </a:p>
+        </p:txBody>
+      </p:sp>
+      <p:sp>
+        <p:nvSpPr>
+          <p:cNvPr id="18" name="TextBox 17"/>
+          <p:cNvSpPr txBox="1"/>
+          <p:nvPr/>
+        </p:nvSpPr>
+        <p:spPr>
+          <a:xfrm>
+            <a:off x="5212080" y="1947672"/>
+            <a:ext cx="6492240" cy="502920"/>
+          </a:xfrm>
+          <a:prstGeom prst="rect">
+            <a:avLst/>
+          </a:prstGeom>
+          <a:noFill/>
+        </p:spPr>
+        <p:txBody>
+          <a:bodyPr wrap="square">
+            <a:spAutoFit/>
+          </a:bodyPr>
+          <a:lstStyle/>
+          <a:p>
+            <a:pPr algn="l"/>
+            <a:r>
+              <a:rPr sz="1000" b="0" i="0">
+                <a:solidFill>
+                  <a:srgbClr val="444444"/>
+                </a:solidFill>
+              </a:rPr>
+              <a:t>Below the 70-point hold threshold but has 3 signals. Recommend manual review before next payment cycle.</a:t>
+            </a:r>
+          </a:p>
+        </p:txBody>
+      </p:sp>
+      <p:sp>
+        <p:nvSpPr>
+          <p:cNvPr id="19" name="Rectangle 18"/>
+          <p:cNvSpPr/>
+          <p:nvPr/>
+        </p:nvSpPr>
+        <p:spPr>
+          <a:xfrm>
+            <a:off x="274320" y="2587752"/>
+            <a:ext cx="11640312" cy="749808"/>
+          </a:xfrm>
+          <a:prstGeom prst="rect">
+            <a:avLst/>
+          </a:prstGeom>
+          <a:solidFill>
+            <a:srgbClr val="FFF3E6"/>
+          </a:solidFill>
+          <a:ln>
+            <a:noFill/>
+          </a:ln>
+        </p:spPr>
+        <p:style>
+          <a:lnRef idx="1">
+            <a:schemeClr val="accent1"/>
+          </a:lnRef>
+          <a:fillRef idx="3">
+            <a:schemeClr val="accent1"/>
+          </a:fillRef>
+          <a:effectRef idx="2">
+            <a:schemeClr val="accent1"/>
+          </a:effectRef>
+          <a:fontRef idx="minor">
+            <a:schemeClr val="lt1"/>
+          </a:fontRef>
+        </p:style>
+        <p:txBody>
+          <a:bodyPr rtlCol="0" anchor="ctr"/>
+          <a:lstStyle/>
+          <a:p>
+            <a:pPr algn="ctr"/>
+          </a:p>
+        </p:txBody>
+      </p:sp>
+      <p:sp>
+        <p:nvSpPr>
+          <p:cNvPr id="20" name="Rectangle 19"/>
+          <p:cNvSpPr/>
+          <p:nvPr/>
+        </p:nvSpPr>
+        <p:spPr>
+          <a:xfrm>
+            <a:off x="274320" y="2587752"/>
+            <a:ext cx="91440" cy="749808"/>
+          </a:xfrm>
+          <a:prstGeom prst="rect">
+            <a:avLst/>
+          </a:prstGeom>
+          <a:solidFill>
+            <a:srgbClr val="E07B39"/>
+          </a:solidFill>
+          <a:ln>
+            <a:noFill/>
+          </a:ln>
+        </p:spPr>
+        <p:style>
+          <a:lnRef idx="1">
+            <a:schemeClr val="accent1"/>
+          </a:lnRef>
+          <a:fillRef idx="3">
+            <a:schemeClr val="accent1"/>
+          </a:fillRef>
+          <a:effectRef idx="2">
+            <a:schemeClr val="accent1"/>
+          </a:effectRef>
+          <a:fontRef idx="minor">
+            <a:schemeClr val="lt1"/>
+          </a:fontRef>
+        </p:style>
+        <p:txBody>
+          <a:bodyPr rtlCol="0" anchor="ctr"/>
+          <a:lstStyle/>
+          <a:p>
+            <a:pPr algn="ctr"/>
+          </a:p>
+        </p:txBody>
+      </p:sp>
+      <p:sp>
+        <p:nvSpPr>
+          <p:cNvPr id="21" name="Rectangle 20"/>
+          <p:cNvSpPr/>
+          <p:nvPr/>
+        </p:nvSpPr>
+        <p:spPr>
+          <a:xfrm>
+            <a:off x="457200" y="2788920"/>
+            <a:ext cx="1188720" cy="329184"/>
+          </a:xfrm>
+          <a:prstGeom prst="rect">
+            <a:avLst/>
+          </a:prstGeom>
+          <a:solidFill>
+            <a:srgbClr val="E07B39"/>
+          </a:solidFill>
+          <a:ln>
+            <a:noFill/>
+          </a:ln>
+        </p:spPr>
+        <p:style>
+          <a:lnRef idx="1">
+            <a:schemeClr val="accent1"/>
+          </a:lnRef>
+          <a:fillRef idx="3">
+            <a:schemeClr val="accent1"/>
+          </a:fillRef>
+          <a:effectRef idx="2">
+            <a:schemeClr val="accent1"/>
+          </a:effectRef>
+          <a:fontRef idx="minor">
+            <a:schemeClr val="lt1"/>
+          </a:fontRef>
+        </p:style>
+        <p:txBody>
+          <a:bodyPr rtlCol="0" anchor="ctr"/>
+          <a:lstStyle/>
+          <a:p>
+            <a:pPr algn="ctr"/>
+          </a:p>
+        </p:txBody>
+      </p:sp>
+      <p:sp>
+        <p:nvSpPr>
+          <p:cNvPr id="22" name="TextBox 21"/>
+          <p:cNvSpPr txBox="1"/>
+          <p:nvPr/>
+        </p:nvSpPr>
+        <p:spPr>
+          <a:xfrm>
+            <a:off x="457200" y="2788920"/>
+            <a:ext cx="1188720" cy="329184"/>
+          </a:xfrm>
+          <a:prstGeom prst="rect">
+            <a:avLst/>
+          </a:prstGeom>
+          <a:noFill/>
+        </p:spPr>
+        <p:txBody>
+          <a:bodyPr wrap="square">
+            <a:spAutoFit/>
+          </a:bodyPr>
+          <a:lstStyle/>
+          <a:p>
+            <a:pPr algn="ctr"/>
+            <a:r>
+              <a:rPr sz="1700" b="1" i="0">
                 <a:solidFill>
                   <a:srgbClr val="FFFFFF"/>
                 </a:solidFill>
               </a:rPr>
-              <a:t>What should happen
-with these providers?</a:t>
-            </a:r>
-          </a:p>
-        </p:txBody>
-      </p:sp>
-      <p:sp>
-        <p:nvSpPr>
-          <p:cNvPr id="9" name="TextBox 8"/>
-          <p:cNvSpPr txBox="1"/>
-          <p:nvPr/>
-        </p:nvSpPr>
-        <p:spPr>
-          <a:xfrm>
-            <a:off x="457200" y="5440680"/>
-            <a:ext cx="11430000" cy="548640"/>
-          </a:xfrm>
-          <a:prstGeom prst="rect">
-            <a:avLst/>
-          </a:prstGeom>
-          <a:noFill/>
-        </p:spPr>
-        <p:txBody>
-          <a:bodyPr wrap="square">
-            <a:spAutoFit/>
-          </a:bodyPr>
-          <a:lstStyle/>
-          <a:p>
-            <a:pPr algn="l"/>
-            <a:r>
-              <a:rPr sz="1300" b="0" i="1">
+              <a:t>40/100</a:t>
+            </a:r>
+          </a:p>
+        </p:txBody>
+      </p:sp>
+      <p:sp>
+        <p:nvSpPr>
+          <p:cNvPr id="23" name="TextBox 22"/>
+          <p:cNvSpPr txBox="1"/>
+          <p:nvPr/>
+        </p:nvSpPr>
+        <p:spPr>
+          <a:xfrm>
+            <a:off x="1828800" y="2642616"/>
+            <a:ext cx="3200400" cy="292608"/>
+          </a:xfrm>
+          <a:prstGeom prst="rect">
+            <a:avLst/>
+          </a:prstGeom>
+          <a:noFill/>
+        </p:spPr>
+        <p:txBody>
+          <a:bodyPr wrap="square">
+            <a:spAutoFit/>
+          </a:bodyPr>
+          <a:lstStyle/>
+          <a:p>
+            <a:pPr algn="l"/>
+            <a:r>
+              <a:rPr sz="1300" b="1" i="0">
+                <a:solidFill>
+                  <a:srgbClr val="1A2440"/>
+                </a:solidFill>
+              </a:rPr>
+              <a:t>Roudoudou lentilles</a:t>
+            </a:r>
+          </a:p>
+        </p:txBody>
+      </p:sp>
+      <p:sp>
+        <p:nvSpPr>
+          <p:cNvPr id="24" name="TextBox 23"/>
+          <p:cNvSpPr txBox="1"/>
+          <p:nvPr/>
+        </p:nvSpPr>
+        <p:spPr>
+          <a:xfrm>
+            <a:off x="1828800" y="2971800"/>
+            <a:ext cx="3200400" cy="292608"/>
+          </a:xfrm>
+          <a:prstGeom prst="rect">
+            <a:avLst/>
+          </a:prstGeom>
+          <a:noFill/>
+        </p:spPr>
+        <p:txBody>
+          <a:bodyPr wrap="square">
+            <a:spAutoFit/>
+          </a:bodyPr>
+          <a:lstStyle/>
+          <a:p>
+            <a:pPr algn="l"/>
+            <a:r>
+              <a:rPr sz="900" b="1" i="0">
+                <a:solidFill>
+                  <a:srgbClr val="E07B39"/>
+                </a:solidFill>
+              </a:rPr>
+              <a:t>Systematic co-billing (100% of months) · round numbers</a:t>
+            </a:r>
+          </a:p>
+        </p:txBody>
+      </p:sp>
+      <p:sp>
+        <p:nvSpPr>
+          <p:cNvPr id="25" name="TextBox 24"/>
+          <p:cNvSpPr txBox="1"/>
+          <p:nvPr/>
+        </p:nvSpPr>
+        <p:spPr>
+          <a:xfrm>
+            <a:off x="5212080" y="2752344"/>
+            <a:ext cx="6492240" cy="502920"/>
+          </a:xfrm>
+          <a:prstGeom prst="rect">
+            <a:avLst/>
+          </a:prstGeom>
+          <a:noFill/>
+        </p:spPr>
+        <p:txBody>
+          <a:bodyPr wrap="square">
+            <a:spAutoFit/>
+          </a:bodyPr>
+          <a:lstStyle/>
+          <a:p>
+            <a:pPr algn="l"/>
+            <a:r>
+              <a:rPr sz="1000" b="0" i="0">
+                <a:solidFill>
+                  <a:srgbClr val="444444"/>
+                </a:solidFill>
+              </a:rPr>
+              <a:t>Every single active month had both categories billed. Low total due to no spike. Review co-billing pattern.</a:t>
+            </a:r>
+          </a:p>
+        </p:txBody>
+      </p:sp>
+      <p:sp>
+        <p:nvSpPr>
+          <p:cNvPr id="26" name="Rectangle 25"/>
+          <p:cNvSpPr/>
+          <p:nvPr/>
+        </p:nvSpPr>
+        <p:spPr>
+          <a:xfrm>
+            <a:off x="274320" y="3392424"/>
+            <a:ext cx="11640312" cy="749808"/>
+          </a:xfrm>
+          <a:prstGeom prst="rect">
+            <a:avLst/>
+          </a:prstGeom>
+          <a:solidFill>
+            <a:srgbClr val="FFF3E6"/>
+          </a:solidFill>
+          <a:ln>
+            <a:noFill/>
+          </a:ln>
+        </p:spPr>
+        <p:style>
+          <a:lnRef idx="1">
+            <a:schemeClr val="accent1"/>
+          </a:lnRef>
+          <a:fillRef idx="3">
+            <a:schemeClr val="accent1"/>
+          </a:fillRef>
+          <a:effectRef idx="2">
+            <a:schemeClr val="accent1"/>
+          </a:effectRef>
+          <a:fontRef idx="minor">
+            <a:schemeClr val="lt1"/>
+          </a:fontRef>
+        </p:style>
+        <p:txBody>
+          <a:bodyPr rtlCol="0" anchor="ctr"/>
+          <a:lstStyle/>
+          <a:p>
+            <a:pPr algn="ctr"/>
+          </a:p>
+        </p:txBody>
+      </p:sp>
+      <p:sp>
+        <p:nvSpPr>
+          <p:cNvPr id="27" name="Rectangle 26"/>
+          <p:cNvSpPr/>
+          <p:nvPr/>
+        </p:nvSpPr>
+        <p:spPr>
+          <a:xfrm>
+            <a:off x="274320" y="3392424"/>
+            <a:ext cx="91440" cy="749808"/>
+          </a:xfrm>
+          <a:prstGeom prst="rect">
+            <a:avLst/>
+          </a:prstGeom>
+          <a:solidFill>
+            <a:srgbClr val="E07B39"/>
+          </a:solidFill>
+          <a:ln>
+            <a:noFill/>
+          </a:ln>
+        </p:spPr>
+        <p:style>
+          <a:lnRef idx="1">
+            <a:schemeClr val="accent1"/>
+          </a:lnRef>
+          <a:fillRef idx="3">
+            <a:schemeClr val="accent1"/>
+          </a:fillRef>
+          <a:effectRef idx="2">
+            <a:schemeClr val="accent1"/>
+          </a:effectRef>
+          <a:fontRef idx="minor">
+            <a:schemeClr val="lt1"/>
+          </a:fontRef>
+        </p:style>
+        <p:txBody>
+          <a:bodyPr rtlCol="0" anchor="ctr"/>
+          <a:lstStyle/>
+          <a:p>
+            <a:pPr algn="ctr"/>
+          </a:p>
+        </p:txBody>
+      </p:sp>
+      <p:sp>
+        <p:nvSpPr>
+          <p:cNvPr id="28" name="Rectangle 27"/>
+          <p:cNvSpPr/>
+          <p:nvPr/>
+        </p:nvSpPr>
+        <p:spPr>
+          <a:xfrm>
+            <a:off x="457200" y="3593592"/>
+            <a:ext cx="1188720" cy="329184"/>
+          </a:xfrm>
+          <a:prstGeom prst="rect">
+            <a:avLst/>
+          </a:prstGeom>
+          <a:solidFill>
+            <a:srgbClr val="E07B39"/>
+          </a:solidFill>
+          <a:ln>
+            <a:noFill/>
+          </a:ln>
+        </p:spPr>
+        <p:style>
+          <a:lnRef idx="1">
+            <a:schemeClr val="accent1"/>
+          </a:lnRef>
+          <a:fillRef idx="3">
+            <a:schemeClr val="accent1"/>
+          </a:fillRef>
+          <a:effectRef idx="2">
+            <a:schemeClr val="accent1"/>
+          </a:effectRef>
+          <a:fontRef idx="minor">
+            <a:schemeClr val="lt1"/>
+          </a:fontRef>
+        </p:style>
+        <p:txBody>
+          <a:bodyPr rtlCol="0" anchor="ctr"/>
+          <a:lstStyle/>
+          <a:p>
+            <a:pPr algn="ctr"/>
+          </a:p>
+        </p:txBody>
+      </p:sp>
+      <p:sp>
+        <p:nvSpPr>
+          <p:cNvPr id="29" name="TextBox 28"/>
+          <p:cNvSpPr txBox="1"/>
+          <p:nvPr/>
+        </p:nvSpPr>
+        <p:spPr>
+          <a:xfrm>
+            <a:off x="457200" y="3593592"/>
+            <a:ext cx="1188720" cy="329184"/>
+          </a:xfrm>
+          <a:prstGeom prst="rect">
+            <a:avLst/>
+          </a:prstGeom>
+          <a:noFill/>
+        </p:spPr>
+        <p:txBody>
+          <a:bodyPr wrap="square">
+            <a:spAutoFit/>
+          </a:bodyPr>
+          <a:lstStyle/>
+          <a:p>
+            <a:pPr algn="ctr"/>
+            <a:r>
+              <a:rPr sz="1700" b="1" i="0">
                 <a:solidFill>
                   <a:srgbClr val="FFFFFF"/>
                 </a:solidFill>
               </a:rPr>
-              <a:t>Immediate actions · system limitations · how to improve detection over time</a:t>
+              <a:t>15/100</a:t>
+            </a:r>
+          </a:p>
+        </p:txBody>
+      </p:sp>
+      <p:sp>
+        <p:nvSpPr>
+          <p:cNvPr id="30" name="TextBox 29"/>
+          <p:cNvSpPr txBox="1"/>
+          <p:nvPr/>
+        </p:nvSpPr>
+        <p:spPr>
+          <a:xfrm>
+            <a:off x="1828800" y="3447288"/>
+            <a:ext cx="3200400" cy="292608"/>
+          </a:xfrm>
+          <a:prstGeom prst="rect">
+            <a:avLst/>
+          </a:prstGeom>
+          <a:noFill/>
+        </p:spPr>
+        <p:txBody>
+          <a:bodyPr wrap="square">
+            <a:spAutoFit/>
+          </a:bodyPr>
+          <a:lstStyle/>
+          <a:p>
+            <a:pPr algn="l"/>
+            <a:r>
+              <a:rPr sz="1300" b="1" i="0">
+                <a:solidFill>
+                  <a:srgbClr val="1A2440"/>
+                </a:solidFill>
+              </a:rPr>
+              <a:t>Voodoo</a:t>
+            </a:r>
+          </a:p>
+        </p:txBody>
+      </p:sp>
+      <p:sp>
+        <p:nvSpPr>
+          <p:cNvPr id="31" name="TextBox 30"/>
+          <p:cNvSpPr txBox="1"/>
+          <p:nvPr/>
+        </p:nvSpPr>
+        <p:spPr>
+          <a:xfrm>
+            <a:off x="1828800" y="3776472"/>
+            <a:ext cx="3200400" cy="292608"/>
+          </a:xfrm>
+          <a:prstGeom prst="rect">
+            <a:avLst/>
+          </a:prstGeom>
+          <a:noFill/>
+        </p:spPr>
+        <p:txBody>
+          <a:bodyPr wrap="square">
+            <a:spAutoFit/>
+          </a:bodyPr>
+          <a:lstStyle/>
+          <a:p>
+            <a:pPr algn="l"/>
+            <a:r>
+              <a:rPr sz="900" b="1" i="0">
+                <a:solidFill>
+                  <a:srgbClr val="E07B39"/>
+                </a:solidFill>
+              </a:rPr>
+              <a:t>Round number billing detected</a:t>
+            </a:r>
+          </a:p>
+        </p:txBody>
+      </p:sp>
+      <p:sp>
+        <p:nvSpPr>
+          <p:cNvPr id="32" name="TextBox 31"/>
+          <p:cNvSpPr txBox="1"/>
+          <p:nvPr/>
+        </p:nvSpPr>
+        <p:spPr>
+          <a:xfrm>
+            <a:off x="5212080" y="3557016"/>
+            <a:ext cx="6492240" cy="502920"/>
+          </a:xfrm>
+          <a:prstGeom prst="rect">
+            <a:avLst/>
+          </a:prstGeom>
+          <a:noFill/>
+        </p:spPr>
+        <p:txBody>
+          <a:bodyPr wrap="square">
+            <a:spAutoFit/>
+          </a:bodyPr>
+          <a:lstStyle/>
+          <a:p>
+            <a:pPr algn="l"/>
+            <a:r>
+              <a:rPr sz="1000" b="0" i="0">
+                <a:solidFill>
+                  <a:srgbClr val="444444"/>
+                </a:solidFill>
+              </a:rPr>
+              <a:t>Low score but whole-euro billing pattern present. Monitor - flag for review if pattern continues next cycle.</a:t>
+            </a:r>
+          </a:p>
+        </p:txBody>
+      </p:sp>
+      <p:sp>
+        <p:nvSpPr>
+          <p:cNvPr id="33" name="Rectangle 32"/>
+          <p:cNvSpPr/>
+          <p:nvPr/>
+        </p:nvSpPr>
+        <p:spPr>
+          <a:xfrm>
+            <a:off x="274320" y="4206240"/>
+            <a:ext cx="11640312" cy="320040"/>
+          </a:xfrm>
+          <a:prstGeom prst="rect">
+            <a:avLst/>
+          </a:prstGeom>
+          <a:solidFill>
+            <a:srgbClr val="2E7D32"/>
+          </a:solidFill>
+          <a:ln>
+            <a:noFill/>
+          </a:ln>
+        </p:spPr>
+        <p:style>
+          <a:lnRef idx="1">
+            <a:schemeClr val="accent1"/>
+          </a:lnRef>
+          <a:fillRef idx="3">
+            <a:schemeClr val="accent1"/>
+          </a:fillRef>
+          <a:effectRef idx="2">
+            <a:schemeClr val="accent1"/>
+          </a:effectRef>
+          <a:fontRef idx="minor">
+            <a:schemeClr val="lt1"/>
+          </a:fontRef>
+        </p:style>
+        <p:txBody>
+          <a:bodyPr rtlCol="0" anchor="ctr"/>
+          <a:lstStyle/>
+          <a:p>
+            <a:pPr algn="ctr"/>
+          </a:p>
+        </p:txBody>
+      </p:sp>
+      <p:sp>
+        <p:nvSpPr>
+          <p:cNvPr id="34" name="TextBox 33"/>
+          <p:cNvSpPr txBox="1"/>
+          <p:nvPr/>
+        </p:nvSpPr>
+        <p:spPr>
+          <a:xfrm>
+            <a:off x="411480" y="4233672"/>
+            <a:ext cx="11247120" cy="256032"/>
+          </a:xfrm>
+          <a:prstGeom prst="rect">
+            <a:avLst/>
+          </a:prstGeom>
+          <a:noFill/>
+        </p:spPr>
+        <p:txBody>
+          <a:bodyPr wrap="square">
+            <a:spAutoFit/>
+          </a:bodyPr>
+          <a:lstStyle/>
+          <a:p>
+            <a:pPr algn="l"/>
+            <a:r>
+              <a:rPr sz="1100" b="1" i="0">
+                <a:solidFill>
+                  <a:srgbClr val="FFFFFF"/>
+                </a:solidFill>
+              </a:rPr>
+              <a:t>Cleared - no suspicious patterns detected</a:t>
+            </a:r>
+          </a:p>
+        </p:txBody>
+      </p:sp>
+      <p:sp>
+        <p:nvSpPr>
+          <p:cNvPr id="35" name="Rectangle 34"/>
+          <p:cNvSpPr/>
+          <p:nvPr/>
+        </p:nvSpPr>
+        <p:spPr>
+          <a:xfrm>
+            <a:off x="274320" y="4572000"/>
+            <a:ext cx="2816352" cy="777240"/>
+          </a:xfrm>
+          <a:prstGeom prst="rect">
+            <a:avLst/>
+          </a:prstGeom>
+          <a:solidFill>
+            <a:srgbClr val="F0F9F2"/>
+          </a:solidFill>
+          <a:ln w="9525">
+            <a:solidFill>
+              <a:srgbClr val="CCCCCC"/>
+            </a:solidFill>
+          </a:ln>
+        </p:spPr>
+        <p:style>
+          <a:lnRef idx="1">
+            <a:schemeClr val="accent1"/>
+          </a:lnRef>
+          <a:fillRef idx="3">
+            <a:schemeClr val="accent1"/>
+          </a:fillRef>
+          <a:effectRef idx="2">
+            <a:schemeClr val="accent1"/>
+          </a:effectRef>
+          <a:fontRef idx="minor">
+            <a:schemeClr val="lt1"/>
+          </a:fontRef>
+        </p:style>
+        <p:txBody>
+          <a:bodyPr rtlCol="0" anchor="ctr"/>
+          <a:lstStyle/>
+          <a:p>
+            <a:pPr algn="ctr"/>
+          </a:p>
+        </p:txBody>
+      </p:sp>
+      <p:sp>
+        <p:nvSpPr>
+          <p:cNvPr id="36" name="Rectangle 35"/>
+          <p:cNvSpPr/>
+          <p:nvPr/>
+        </p:nvSpPr>
+        <p:spPr>
+          <a:xfrm>
+            <a:off x="384048" y="4645152"/>
+            <a:ext cx="1005840" cy="292608"/>
+          </a:xfrm>
+          <a:prstGeom prst="rect">
+            <a:avLst/>
+          </a:prstGeom>
+          <a:solidFill>
+            <a:srgbClr val="2E7D32"/>
+          </a:solidFill>
+          <a:ln>
+            <a:noFill/>
+          </a:ln>
+        </p:spPr>
+        <p:style>
+          <a:lnRef idx="1">
+            <a:schemeClr val="accent1"/>
+          </a:lnRef>
+          <a:fillRef idx="3">
+            <a:schemeClr val="accent1"/>
+          </a:fillRef>
+          <a:effectRef idx="2">
+            <a:schemeClr val="accent1"/>
+          </a:effectRef>
+          <a:fontRef idx="minor">
+            <a:schemeClr val="lt1"/>
+          </a:fontRef>
+        </p:style>
+        <p:txBody>
+          <a:bodyPr rtlCol="0" anchor="ctr"/>
+          <a:lstStyle/>
+          <a:p>
+            <a:pPr algn="ctr"/>
+          </a:p>
+        </p:txBody>
+      </p:sp>
+      <p:sp>
+        <p:nvSpPr>
+          <p:cNvPr id="37" name="TextBox 36"/>
+          <p:cNvSpPr txBox="1"/>
+          <p:nvPr/>
+        </p:nvSpPr>
+        <p:spPr>
+          <a:xfrm>
+            <a:off x="384048" y="4645152"/>
+            <a:ext cx="1005840" cy="292608"/>
+          </a:xfrm>
+          <a:prstGeom prst="rect">
+            <a:avLst/>
+          </a:prstGeom>
+          <a:noFill/>
+        </p:spPr>
+        <p:txBody>
+          <a:bodyPr wrap="square">
+            <a:spAutoFit/>
+          </a:bodyPr>
+          <a:lstStyle/>
+          <a:p>
+            <a:pPr algn="ctr"/>
+            <a:r>
+              <a:rPr sz="1700" b="1" i="0">
+                <a:solidFill>
+                  <a:srgbClr val="FFFFFF"/>
+                </a:solidFill>
+              </a:rPr>
+              <a:t>0/100</a:t>
+            </a:r>
+          </a:p>
+        </p:txBody>
+      </p:sp>
+      <p:sp>
+        <p:nvSpPr>
+          <p:cNvPr id="38" name="TextBox 37"/>
+          <p:cNvSpPr txBox="1"/>
+          <p:nvPr/>
+        </p:nvSpPr>
+        <p:spPr>
+          <a:xfrm>
+            <a:off x="1463040" y="4681728"/>
+            <a:ext cx="1554480" cy="256032"/>
+          </a:xfrm>
+          <a:prstGeom prst="rect">
+            <a:avLst/>
+          </a:prstGeom>
+          <a:noFill/>
+        </p:spPr>
+        <p:txBody>
+          <a:bodyPr wrap="square">
+            <a:spAutoFit/>
+          </a:bodyPr>
+          <a:lstStyle/>
+          <a:p>
+            <a:pPr algn="l"/>
+            <a:r>
+              <a:rPr sz="1000" b="1" i="0">
+                <a:solidFill>
+                  <a:srgbClr val="2E7D32"/>
+                </a:solidFill>
+              </a:rPr>
+              <a:t>La classe à Dallas</a:t>
+            </a:r>
+          </a:p>
+        </p:txBody>
+      </p:sp>
+      <p:sp>
+        <p:nvSpPr>
+          <p:cNvPr id="39" name="TextBox 38"/>
+          <p:cNvSpPr txBox="1"/>
+          <p:nvPr/>
+        </p:nvSpPr>
+        <p:spPr>
+          <a:xfrm>
+            <a:off x="384048" y="5029200"/>
+            <a:ext cx="2560320" cy="256032"/>
+          </a:xfrm>
+          <a:prstGeom prst="rect">
+            <a:avLst/>
+          </a:prstGeom>
+          <a:noFill/>
+        </p:spPr>
+        <p:txBody>
+          <a:bodyPr wrap="square">
+            <a:spAutoFit/>
+          </a:bodyPr>
+          <a:lstStyle/>
+          <a:p>
+            <a:pPr algn="l"/>
+            <a:r>
+              <a:rPr sz="900" b="0" i="1">
+                <a:solidFill>
+                  <a:srgbClr val="444444"/>
+                </a:solidFill>
+              </a:rPr>
+              <a:t>No flags raised</a:t>
+            </a:r>
+          </a:p>
+        </p:txBody>
+      </p:sp>
+      <p:sp>
+        <p:nvSpPr>
+          <p:cNvPr id="40" name="Rectangle 39"/>
+          <p:cNvSpPr/>
+          <p:nvPr/>
+        </p:nvSpPr>
+        <p:spPr>
+          <a:xfrm>
+            <a:off x="3182112" y="4572000"/>
+            <a:ext cx="2816352" cy="777240"/>
+          </a:xfrm>
+          <a:prstGeom prst="rect">
+            <a:avLst/>
+          </a:prstGeom>
+          <a:solidFill>
+            <a:srgbClr val="F0F9F2"/>
+          </a:solidFill>
+          <a:ln w="9525">
+            <a:solidFill>
+              <a:srgbClr val="CCCCCC"/>
+            </a:solidFill>
+          </a:ln>
+        </p:spPr>
+        <p:style>
+          <a:lnRef idx="1">
+            <a:schemeClr val="accent1"/>
+          </a:lnRef>
+          <a:fillRef idx="3">
+            <a:schemeClr val="accent1"/>
+          </a:fillRef>
+          <a:effectRef idx="2">
+            <a:schemeClr val="accent1"/>
+          </a:effectRef>
+          <a:fontRef idx="minor">
+            <a:schemeClr val="lt1"/>
+          </a:fontRef>
+        </p:style>
+        <p:txBody>
+          <a:bodyPr rtlCol="0" anchor="ctr"/>
+          <a:lstStyle/>
+          <a:p>
+            <a:pPr algn="ctr"/>
+          </a:p>
+        </p:txBody>
+      </p:sp>
+      <p:sp>
+        <p:nvSpPr>
+          <p:cNvPr id="41" name="Rectangle 40"/>
+          <p:cNvSpPr/>
+          <p:nvPr/>
+        </p:nvSpPr>
+        <p:spPr>
+          <a:xfrm>
+            <a:off x="3291840" y="4645152"/>
+            <a:ext cx="1005840" cy="292608"/>
+          </a:xfrm>
+          <a:prstGeom prst="rect">
+            <a:avLst/>
+          </a:prstGeom>
+          <a:solidFill>
+            <a:srgbClr val="2E7D32"/>
+          </a:solidFill>
+          <a:ln>
+            <a:noFill/>
+          </a:ln>
+        </p:spPr>
+        <p:style>
+          <a:lnRef idx="1">
+            <a:schemeClr val="accent1"/>
+          </a:lnRef>
+          <a:fillRef idx="3">
+            <a:schemeClr val="accent1"/>
+          </a:fillRef>
+          <a:effectRef idx="2">
+            <a:schemeClr val="accent1"/>
+          </a:effectRef>
+          <a:fontRef idx="minor">
+            <a:schemeClr val="lt1"/>
+          </a:fontRef>
+        </p:style>
+        <p:txBody>
+          <a:bodyPr rtlCol="0" anchor="ctr"/>
+          <a:lstStyle/>
+          <a:p>
+            <a:pPr algn="ctr"/>
+          </a:p>
+        </p:txBody>
+      </p:sp>
+      <p:sp>
+        <p:nvSpPr>
+          <p:cNvPr id="42" name="TextBox 41"/>
+          <p:cNvSpPr txBox="1"/>
+          <p:nvPr/>
+        </p:nvSpPr>
+        <p:spPr>
+          <a:xfrm>
+            <a:off x="3291840" y="4645152"/>
+            <a:ext cx="1005840" cy="292608"/>
+          </a:xfrm>
+          <a:prstGeom prst="rect">
+            <a:avLst/>
+          </a:prstGeom>
+          <a:noFill/>
+        </p:spPr>
+        <p:txBody>
+          <a:bodyPr wrap="square">
+            <a:spAutoFit/>
+          </a:bodyPr>
+          <a:lstStyle/>
+          <a:p>
+            <a:pPr algn="ctr"/>
+            <a:r>
+              <a:rPr sz="1700" b="1" i="0">
+                <a:solidFill>
+                  <a:srgbClr val="FFFFFF"/>
+                </a:solidFill>
+              </a:rPr>
+              <a:t>0/100</a:t>
+            </a:r>
+          </a:p>
+        </p:txBody>
+      </p:sp>
+      <p:sp>
+        <p:nvSpPr>
+          <p:cNvPr id="43" name="TextBox 42"/>
+          <p:cNvSpPr txBox="1"/>
+          <p:nvPr/>
+        </p:nvSpPr>
+        <p:spPr>
+          <a:xfrm>
+            <a:off x="4370832" y="4681728"/>
+            <a:ext cx="1554480" cy="256032"/>
+          </a:xfrm>
+          <a:prstGeom prst="rect">
+            <a:avLst/>
+          </a:prstGeom>
+          <a:noFill/>
+        </p:spPr>
+        <p:txBody>
+          <a:bodyPr wrap="square">
+            <a:spAutoFit/>
+          </a:bodyPr>
+          <a:lstStyle/>
+          <a:p>
+            <a:pPr algn="l"/>
+            <a:r>
+              <a:rPr sz="1000" b="1" i="0">
+                <a:solidFill>
+                  <a:srgbClr val="2E7D32"/>
+                </a:solidFill>
+              </a:rPr>
+              <a:t>Cool optics</a:t>
+            </a:r>
+          </a:p>
+        </p:txBody>
+      </p:sp>
+      <p:sp>
+        <p:nvSpPr>
+          <p:cNvPr id="44" name="TextBox 43"/>
+          <p:cNvSpPr txBox="1"/>
+          <p:nvPr/>
+        </p:nvSpPr>
+        <p:spPr>
+          <a:xfrm>
+            <a:off x="3291840" y="5029200"/>
+            <a:ext cx="2560320" cy="256032"/>
+          </a:xfrm>
+          <a:prstGeom prst="rect">
+            <a:avLst/>
+          </a:prstGeom>
+          <a:noFill/>
+        </p:spPr>
+        <p:txBody>
+          <a:bodyPr wrap="square">
+            <a:spAutoFit/>
+          </a:bodyPr>
+          <a:lstStyle/>
+          <a:p>
+            <a:pPr algn="l"/>
+            <a:r>
+              <a:rPr sz="900" b="0" i="1">
+                <a:solidFill>
+                  <a:srgbClr val="444444"/>
+                </a:solidFill>
+              </a:rPr>
+              <a:t>No flags raised</a:t>
+            </a:r>
+          </a:p>
+        </p:txBody>
+      </p:sp>
+      <p:sp>
+        <p:nvSpPr>
+          <p:cNvPr id="45" name="Rectangle 44"/>
+          <p:cNvSpPr/>
+          <p:nvPr/>
+        </p:nvSpPr>
+        <p:spPr>
+          <a:xfrm>
+            <a:off x="6089904" y="4572000"/>
+            <a:ext cx="2816352" cy="777240"/>
+          </a:xfrm>
+          <a:prstGeom prst="rect">
+            <a:avLst/>
+          </a:prstGeom>
+          <a:solidFill>
+            <a:srgbClr val="F0F9F2"/>
+          </a:solidFill>
+          <a:ln w="9525">
+            <a:solidFill>
+              <a:srgbClr val="CCCCCC"/>
+            </a:solidFill>
+          </a:ln>
+        </p:spPr>
+        <p:style>
+          <a:lnRef idx="1">
+            <a:schemeClr val="accent1"/>
+          </a:lnRef>
+          <a:fillRef idx="3">
+            <a:schemeClr val="accent1"/>
+          </a:fillRef>
+          <a:effectRef idx="2">
+            <a:schemeClr val="accent1"/>
+          </a:effectRef>
+          <a:fontRef idx="minor">
+            <a:schemeClr val="lt1"/>
+          </a:fontRef>
+        </p:style>
+        <p:txBody>
+          <a:bodyPr rtlCol="0" anchor="ctr"/>
+          <a:lstStyle/>
+          <a:p>
+            <a:pPr algn="ctr"/>
+          </a:p>
+        </p:txBody>
+      </p:sp>
+      <p:sp>
+        <p:nvSpPr>
+          <p:cNvPr id="46" name="Rectangle 45"/>
+          <p:cNvSpPr/>
+          <p:nvPr/>
+        </p:nvSpPr>
+        <p:spPr>
+          <a:xfrm>
+            <a:off x="6199632" y="4645152"/>
+            <a:ext cx="1005840" cy="292608"/>
+          </a:xfrm>
+          <a:prstGeom prst="rect">
+            <a:avLst/>
+          </a:prstGeom>
+          <a:solidFill>
+            <a:srgbClr val="2E7D32"/>
+          </a:solidFill>
+          <a:ln>
+            <a:noFill/>
+          </a:ln>
+        </p:spPr>
+        <p:style>
+          <a:lnRef idx="1">
+            <a:schemeClr val="accent1"/>
+          </a:lnRef>
+          <a:fillRef idx="3">
+            <a:schemeClr val="accent1"/>
+          </a:fillRef>
+          <a:effectRef idx="2">
+            <a:schemeClr val="accent1"/>
+          </a:effectRef>
+          <a:fontRef idx="minor">
+            <a:schemeClr val="lt1"/>
+          </a:fontRef>
+        </p:style>
+        <p:txBody>
+          <a:bodyPr rtlCol="0" anchor="ctr"/>
+          <a:lstStyle/>
+          <a:p>
+            <a:pPr algn="ctr"/>
+          </a:p>
+        </p:txBody>
+      </p:sp>
+      <p:sp>
+        <p:nvSpPr>
+          <p:cNvPr id="47" name="TextBox 46"/>
+          <p:cNvSpPr txBox="1"/>
+          <p:nvPr/>
+        </p:nvSpPr>
+        <p:spPr>
+          <a:xfrm>
+            <a:off x="6199632" y="4645152"/>
+            <a:ext cx="1005840" cy="292608"/>
+          </a:xfrm>
+          <a:prstGeom prst="rect">
+            <a:avLst/>
+          </a:prstGeom>
+          <a:noFill/>
+        </p:spPr>
+        <p:txBody>
+          <a:bodyPr wrap="square">
+            <a:spAutoFit/>
+          </a:bodyPr>
+          <a:lstStyle/>
+          <a:p>
+            <a:pPr algn="ctr"/>
+            <a:r>
+              <a:rPr sz="1700" b="1" i="0">
+                <a:solidFill>
+                  <a:srgbClr val="FFFFFF"/>
+                </a:solidFill>
+              </a:rPr>
+              <a:t>0/100</a:t>
+            </a:r>
+          </a:p>
+        </p:txBody>
+      </p:sp>
+      <p:sp>
+        <p:nvSpPr>
+          <p:cNvPr id="48" name="TextBox 47"/>
+          <p:cNvSpPr txBox="1"/>
+          <p:nvPr/>
+        </p:nvSpPr>
+        <p:spPr>
+          <a:xfrm>
+            <a:off x="7278624" y="4681728"/>
+            <a:ext cx="1554480" cy="256032"/>
+          </a:xfrm>
+          <a:prstGeom prst="rect">
+            <a:avLst/>
+          </a:prstGeom>
+          <a:noFill/>
+        </p:spPr>
+        <p:txBody>
+          <a:bodyPr wrap="square">
+            <a:spAutoFit/>
+          </a:bodyPr>
+          <a:lstStyle/>
+          <a:p>
+            <a:pPr algn="l"/>
+            <a:r>
+              <a:rPr sz="1000" b="1" i="0">
+                <a:solidFill>
+                  <a:srgbClr val="2E7D32"/>
+                </a:solidFill>
+              </a:rPr>
+              <a:t>abc optic</a:t>
+            </a:r>
+          </a:p>
+        </p:txBody>
+      </p:sp>
+      <p:sp>
+        <p:nvSpPr>
+          <p:cNvPr id="49" name="TextBox 48"/>
+          <p:cNvSpPr txBox="1"/>
+          <p:nvPr/>
+        </p:nvSpPr>
+        <p:spPr>
+          <a:xfrm>
+            <a:off x="6199632" y="5029200"/>
+            <a:ext cx="2560320" cy="256032"/>
+          </a:xfrm>
+          <a:prstGeom prst="rect">
+            <a:avLst/>
+          </a:prstGeom>
+          <a:noFill/>
+        </p:spPr>
+        <p:txBody>
+          <a:bodyPr wrap="square">
+            <a:spAutoFit/>
+          </a:bodyPr>
+          <a:lstStyle/>
+          <a:p>
+            <a:pPr algn="l"/>
+            <a:r>
+              <a:rPr sz="900" b="0" i="1">
+                <a:solidFill>
+                  <a:srgbClr val="444444"/>
+                </a:solidFill>
+              </a:rPr>
+              <a:t>No flags raised</a:t>
+            </a:r>
+          </a:p>
+        </p:txBody>
+      </p:sp>
+      <p:sp>
+        <p:nvSpPr>
+          <p:cNvPr id="50" name="Rectangle 49"/>
+          <p:cNvSpPr/>
+          <p:nvPr/>
+        </p:nvSpPr>
+        <p:spPr>
+          <a:xfrm>
+            <a:off x="8997696" y="4572000"/>
+            <a:ext cx="2816352" cy="777240"/>
+          </a:xfrm>
+          <a:prstGeom prst="rect">
+            <a:avLst/>
+          </a:prstGeom>
+          <a:solidFill>
+            <a:srgbClr val="F0F9F2"/>
+          </a:solidFill>
+          <a:ln w="9525">
+            <a:solidFill>
+              <a:srgbClr val="CCCCCC"/>
+            </a:solidFill>
+          </a:ln>
+        </p:spPr>
+        <p:style>
+          <a:lnRef idx="1">
+            <a:schemeClr val="accent1"/>
+          </a:lnRef>
+          <a:fillRef idx="3">
+            <a:schemeClr val="accent1"/>
+          </a:fillRef>
+          <a:effectRef idx="2">
+            <a:schemeClr val="accent1"/>
+          </a:effectRef>
+          <a:fontRef idx="minor">
+            <a:schemeClr val="lt1"/>
+          </a:fontRef>
+        </p:style>
+        <p:txBody>
+          <a:bodyPr rtlCol="0" anchor="ctr"/>
+          <a:lstStyle/>
+          <a:p>
+            <a:pPr algn="ctr"/>
+          </a:p>
+        </p:txBody>
+      </p:sp>
+      <p:sp>
+        <p:nvSpPr>
+          <p:cNvPr id="51" name="Rectangle 50"/>
+          <p:cNvSpPr/>
+          <p:nvPr/>
+        </p:nvSpPr>
+        <p:spPr>
+          <a:xfrm>
+            <a:off x="9107424" y="4645152"/>
+            <a:ext cx="1005840" cy="292608"/>
+          </a:xfrm>
+          <a:prstGeom prst="rect">
+            <a:avLst/>
+          </a:prstGeom>
+          <a:solidFill>
+            <a:srgbClr val="2E7D32"/>
+          </a:solidFill>
+          <a:ln>
+            <a:noFill/>
+          </a:ln>
+        </p:spPr>
+        <p:style>
+          <a:lnRef idx="1">
+            <a:schemeClr val="accent1"/>
+          </a:lnRef>
+          <a:fillRef idx="3">
+            <a:schemeClr val="accent1"/>
+          </a:fillRef>
+          <a:effectRef idx="2">
+            <a:schemeClr val="accent1"/>
+          </a:effectRef>
+          <a:fontRef idx="minor">
+            <a:schemeClr val="lt1"/>
+          </a:fontRef>
+        </p:style>
+        <p:txBody>
+          <a:bodyPr rtlCol="0" anchor="ctr"/>
+          <a:lstStyle/>
+          <a:p>
+            <a:pPr algn="ctr"/>
+          </a:p>
+        </p:txBody>
+      </p:sp>
+      <p:sp>
+        <p:nvSpPr>
+          <p:cNvPr id="52" name="TextBox 51"/>
+          <p:cNvSpPr txBox="1"/>
+          <p:nvPr/>
+        </p:nvSpPr>
+        <p:spPr>
+          <a:xfrm>
+            <a:off x="9107424" y="4645152"/>
+            <a:ext cx="1005840" cy="292608"/>
+          </a:xfrm>
+          <a:prstGeom prst="rect">
+            <a:avLst/>
+          </a:prstGeom>
+          <a:noFill/>
+        </p:spPr>
+        <p:txBody>
+          <a:bodyPr wrap="square">
+            <a:spAutoFit/>
+          </a:bodyPr>
+          <a:lstStyle/>
+          <a:p>
+            <a:pPr algn="ctr"/>
+            <a:r>
+              <a:rPr sz="1700" b="1" i="0">
+                <a:solidFill>
+                  <a:srgbClr val="FFFFFF"/>
+                </a:solidFill>
+              </a:rPr>
+              <a:t>0/100</a:t>
+            </a:r>
+          </a:p>
+        </p:txBody>
+      </p:sp>
+      <p:sp>
+        <p:nvSpPr>
+          <p:cNvPr id="53" name="TextBox 52"/>
+          <p:cNvSpPr txBox="1"/>
+          <p:nvPr/>
+        </p:nvSpPr>
+        <p:spPr>
+          <a:xfrm>
+            <a:off x="10186416" y="4681728"/>
+            <a:ext cx="1554480" cy="256032"/>
+          </a:xfrm>
+          <a:prstGeom prst="rect">
+            <a:avLst/>
+          </a:prstGeom>
+          <a:noFill/>
+        </p:spPr>
+        <p:txBody>
+          <a:bodyPr wrap="square">
+            <a:spAutoFit/>
+          </a:bodyPr>
+          <a:lstStyle/>
+          <a:p>
+            <a:pPr algn="l"/>
+            <a:r>
+              <a:rPr sz="1000" b="1" i="0">
+                <a:solidFill>
+                  <a:srgbClr val="2E7D32"/>
+                </a:solidFill>
+              </a:rPr>
+              <a:t>22 optics</a:t>
+            </a:r>
+          </a:p>
+        </p:txBody>
+      </p:sp>
+      <p:sp>
+        <p:nvSpPr>
+          <p:cNvPr id="54" name="TextBox 53"/>
+          <p:cNvSpPr txBox="1"/>
+          <p:nvPr/>
+        </p:nvSpPr>
+        <p:spPr>
+          <a:xfrm>
+            <a:off x="9107424" y="5029200"/>
+            <a:ext cx="2560320" cy="256032"/>
+          </a:xfrm>
+          <a:prstGeom prst="rect">
+            <a:avLst/>
+          </a:prstGeom>
+          <a:noFill/>
+        </p:spPr>
+        <p:txBody>
+          <a:bodyPr wrap="square">
+            <a:spAutoFit/>
+          </a:bodyPr>
+          <a:lstStyle/>
+          <a:p>
+            <a:pPr algn="l"/>
+            <a:r>
+              <a:rPr sz="900" b="0" i="1">
+                <a:solidFill>
+                  <a:srgbClr val="444444"/>
+                </a:solidFill>
+              </a:rPr>
+              <a:t>No flags raised</a:t>
             </a:r>
           </a:p>
         </p:txBody>
@@ -7074,7 +9771,7 @@
         <p:spPr>
           <a:xfrm>
             <a:off x="0" y="0"/>
-            <a:ext cx="12188952" cy="960120"/>
+            <a:ext cx="12188952" cy="6858000"/>
           </a:xfrm>
           <a:prstGeom prst="rect">
             <a:avLst/>
@@ -7116,8 +9813,8 @@
         </p:nvSpPr>
         <p:spPr>
           <a:xfrm>
-            <a:off x="320040" y="118872"/>
-            <a:ext cx="1097280" cy="292608"/>
+            <a:off x="0" y="0"/>
+            <a:ext cx="228600" cy="6858000"/>
           </a:xfrm>
           <a:prstGeom prst="rect">
             <a:avLst/>
@@ -7153,88 +9850,20 @@
       </p:sp>
       <p:sp>
         <p:nvSpPr>
-          <p:cNvPr id="4" name="TextBox 3"/>
-          <p:cNvSpPr txBox="1"/>
-          <p:nvPr/>
-        </p:nvSpPr>
-        <p:spPr>
-          <a:xfrm>
-            <a:off x="320040" y="118872"/>
-            <a:ext cx="1097280" cy="292608"/>
-          </a:xfrm>
-          <a:prstGeom prst="rect">
-            <a:avLst/>
-          </a:prstGeom>
-          <a:noFill/>
-        </p:spPr>
-        <p:txBody>
-          <a:bodyPr wrap="square">
-            <a:spAutoFit/>
-          </a:bodyPr>
-          <a:lstStyle/>
-          <a:p>
-            <a:pPr algn="ctr"/>
-            <a:r>
-              <a:rPr sz="900" b="1" i="0">
-                <a:solidFill>
-                  <a:srgbClr val="1A2440"/>
-                </a:solidFill>
-              </a:rPr>
-              <a:t>Q3</a:t>
-            </a:r>
-          </a:p>
-        </p:txBody>
-      </p:sp>
-      <p:sp>
-        <p:nvSpPr>
-          <p:cNvPr id="5" name="TextBox 4"/>
-          <p:cNvSpPr txBox="1"/>
-          <p:nvPr/>
-        </p:nvSpPr>
-        <p:spPr>
-          <a:xfrm>
-            <a:off x="1554480" y="73152"/>
-            <a:ext cx="10332720" cy="594360"/>
-          </a:xfrm>
-          <a:prstGeom prst="rect">
-            <a:avLst/>
-          </a:prstGeom>
-          <a:noFill/>
-        </p:spPr>
-        <p:txBody>
-          <a:bodyPr wrap="square">
-            <a:spAutoFit/>
-          </a:bodyPr>
-          <a:lstStyle/>
-          <a:p>
-            <a:pPr algn="l"/>
-            <a:r>
-              <a:rPr sz="2400" b="1" i="0">
-                <a:solidFill>
-                  <a:srgbClr val="FFFFFF"/>
-                </a:solidFill>
-              </a:rPr>
-              <a:t>Immediate Action Required — Payments Held</a:t>
-            </a:r>
-          </a:p>
-        </p:txBody>
-      </p:sp>
-      <p:sp>
-        <p:nvSpPr>
-          <p:cNvPr id="6" name="Rectangle 5"/>
+          <p:cNvPr id="4" name="Rectangle 3"/>
           <p:cNvSpPr/>
           <p:nvPr/>
         </p:nvSpPr>
         <p:spPr>
           <a:xfrm>
-            <a:off x="0" y="960120"/>
-            <a:ext cx="12188952" cy="347472"/>
+            <a:off x="0" y="5532120"/>
+            <a:ext cx="12188952" cy="1325880"/>
           </a:xfrm>
           <a:prstGeom prst="rect">
             <a:avLst/>
           </a:prstGeom>
           <a:solidFill>
-            <a:srgbClr val="F5F5F5"/>
+            <a:srgbClr val="0D1730"/>
           </a:solidFill>
           <a:ln>
             <a:noFill/>
@@ -7264,34 +9893,103 @@
       </p:sp>
       <p:sp>
         <p:nvSpPr>
+          <p:cNvPr id="5" name="TextBox 4"/>
+          <p:cNvSpPr txBox="1"/>
+          <p:nvPr/>
+        </p:nvSpPr>
+        <p:spPr>
+          <a:xfrm>
+            <a:off x="502920" y="640080"/>
+            <a:ext cx="9144000" cy="475488"/>
+          </a:xfrm>
+          <a:prstGeom prst="rect">
+            <a:avLst/>
+          </a:prstGeom>
+          <a:noFill/>
+        </p:spPr>
+        <p:txBody>
+          <a:bodyPr wrap="square">
+            <a:spAutoFit/>
+          </a:bodyPr>
+          <a:lstStyle/>
+          <a:p>
+            <a:pPr algn="l"/>
+            <a:r>
+              <a:rPr sz="2000" b="0" i="1">
+                <a:solidFill>
+                  <a:srgbClr val="CCCCCC"/>
+                </a:solidFill>
+              </a:rPr>
+              <a:t>Beyond the analysis -</a:t>
+            </a:r>
+          </a:p>
+        </p:txBody>
+      </p:sp>
+      <p:sp>
+        <p:nvSpPr>
+          <p:cNvPr id="6" name="TextBox 5"/>
+          <p:cNvSpPr txBox="1"/>
+          <p:nvPr/>
+        </p:nvSpPr>
+        <p:spPr>
+          <a:xfrm>
+            <a:off x="502920" y="1188720"/>
+            <a:ext cx="10515600" cy="1463040"/>
+          </a:xfrm>
+          <a:prstGeom prst="rect">
+            <a:avLst/>
+          </a:prstGeom>
+          <a:noFill/>
+        </p:spPr>
+        <p:txBody>
+          <a:bodyPr wrap="square">
+            <a:spAutoFit/>
+          </a:bodyPr>
+          <a:lstStyle/>
+          <a:p>
+            <a:pPr algn="l"/>
+            <a:r>
+              <a:rPr sz="4400" b="1" i="0">
+                <a:solidFill>
+                  <a:srgbClr val="FFFFFF"/>
+                </a:solidFill>
+              </a:rPr>
+              <a:t>I built a working system
+around it</a:t>
+            </a:r>
+          </a:p>
+        </p:txBody>
+      </p:sp>
+      <p:sp>
+        <p:nvSpPr>
           <p:cNvPr id="7" name="TextBox 6"/>
           <p:cNvSpPr txBox="1"/>
           <p:nvPr/>
         </p:nvSpPr>
         <p:spPr>
           <a:xfrm>
-            <a:off x="365760" y="987552"/>
-            <a:ext cx="11430000" cy="301752"/>
-          </a:xfrm>
-          <a:prstGeom prst="rect">
-            <a:avLst/>
-          </a:prstGeom>
-          <a:noFill/>
-        </p:spPr>
-        <p:txBody>
-          <a:bodyPr wrap="square">
-            <a:spAutoFit/>
-          </a:bodyPr>
-          <a:lstStyle/>
-          <a:p>
-            <a:pPr algn="l"/>
-            <a:r>
-              <a:rPr sz="1200" b="0" i="1">
-                <a:solidFill>
-                  <a:srgbClr val="444444"/>
-                </a:solidFill>
-              </a:rPr>
-              <a:t>5 providers automatically held — strong evidence across multiple independent fraud signals</a:t>
+            <a:off x="502920" y="2834640"/>
+            <a:ext cx="8686800" cy="777240"/>
+          </a:xfrm>
+          <a:prstGeom prst="rect">
+            <a:avLst/>
+          </a:prstGeom>
+          <a:noFill/>
+        </p:spPr>
+        <p:txBody>
+          <a:bodyPr wrap="square">
+            <a:spAutoFit/>
+          </a:bodyPr>
+          <a:lstStyle/>
+          <a:p>
+            <a:pPr algn="l"/>
+            <a:r>
+              <a:rPr sz="1400" b="0" i="0">
+                <a:solidFill>
+                  <a:srgbClr val="CCCCCC"/>
+                </a:solidFill>
+              </a:rPr>
+              <a:t>The detection logic above is packaged into a full web application that an ops team can actually use day-to-day: upload new claims, run detection with one click, and review every flagged provider with full evidence.</a:t>
             </a:r>
           </a:p>
         </p:txBody>
@@ -7304,14 +10002,14 @@
         </p:nvSpPr>
         <p:spPr>
           <a:xfrm>
-            <a:off x="0" y="6510528"/>
-            <a:ext cx="12188952" cy="347472"/>
+            <a:off x="502920" y="3749039"/>
+            <a:ext cx="2743200" cy="1554480"/>
           </a:xfrm>
           <a:prstGeom prst="rect">
             <a:avLst/>
           </a:prstGeom>
           <a:solidFill>
-            <a:srgbClr val="1A2440"/>
+            <a:srgbClr val="26355C"/>
           </a:solidFill>
           <a:ln>
             <a:noFill/>
@@ -7341,54 +10039,20 @@
       </p:sp>
       <p:sp>
         <p:nvSpPr>
-          <p:cNvPr id="9" name="TextBox 8"/>
-          <p:cNvSpPr txBox="1"/>
-          <p:nvPr/>
-        </p:nvSpPr>
-        <p:spPr>
-          <a:xfrm>
-            <a:off x="274320" y="6519672"/>
-            <a:ext cx="11612880" cy="329184"/>
-          </a:xfrm>
-          <a:prstGeom prst="rect">
-            <a:avLst/>
-          </a:prstGeom>
-          <a:noFill/>
-        </p:spPr>
-        <p:txBody>
-          <a:bodyPr wrap="square">
-            <a:spAutoFit/>
-          </a:bodyPr>
-          <a:lstStyle/>
-          <a:p>
-            <a:pPr algn="ctr"/>
-            <a:r>
-              <a:rPr sz="900" b="0" i="0">
-                <a:solidFill>
-                  <a:srgbClr val="FFFFFF"/>
-                </a:solidFill>
-              </a:rPr>
-              <a:t>Alan Assurance · Fraud Detection Case · 2024</a:t>
-            </a:r>
-          </a:p>
-        </p:txBody>
-      </p:sp>
-      <p:sp>
-        <p:nvSpPr>
-          <p:cNvPr id="10" name="Rectangle 9"/>
+          <p:cNvPr id="9" name="Rectangle 8"/>
           <p:cNvSpPr/>
           <p:nvPr/>
         </p:nvSpPr>
         <p:spPr>
           <a:xfrm>
-            <a:off x="274320" y="1417320"/>
-            <a:ext cx="11640312" cy="320040"/>
+            <a:off x="502920" y="3749039"/>
+            <a:ext cx="2743200" cy="91440"/>
           </a:xfrm>
           <a:prstGeom prst="rect">
             <a:avLst/>
           </a:prstGeom>
           <a:solidFill>
-            <a:srgbClr val="1A2440"/>
+            <a:srgbClr val="1A78C2"/>
           </a:solidFill>
           <a:ln>
             <a:noFill/>
@@ -7418,122 +10082,88 @@
       </p:sp>
       <p:sp>
         <p:nvSpPr>
+          <p:cNvPr id="10" name="TextBox 9"/>
+          <p:cNvSpPr txBox="1"/>
+          <p:nvPr/>
+        </p:nvSpPr>
+        <p:spPr>
+          <a:xfrm>
+            <a:off x="667512" y="3913632"/>
+            <a:ext cx="2423160" cy="347472"/>
+          </a:xfrm>
+          <a:prstGeom prst="rect">
+            <a:avLst/>
+          </a:prstGeom>
+          <a:noFill/>
+        </p:spPr>
+        <p:txBody>
+          <a:bodyPr wrap="square">
+            <a:spAutoFit/>
+          </a:bodyPr>
+          <a:lstStyle/>
+          <a:p>
+            <a:pPr algn="l"/>
+            <a:r>
+              <a:rPr sz="1300" b="1" i="0">
+                <a:solidFill>
+                  <a:srgbClr val="FFFFFF"/>
+                </a:solidFill>
+              </a:rPr>
+              <a:t>Dashboard</a:t>
+            </a:r>
+          </a:p>
+        </p:txBody>
+      </p:sp>
+      <p:sp>
+        <p:nvSpPr>
           <p:cNvPr id="11" name="TextBox 10"/>
           <p:cNvSpPr txBox="1"/>
           <p:nvPr/>
         </p:nvSpPr>
         <p:spPr>
           <a:xfrm>
-            <a:off x="384048" y="1435608"/>
-            <a:ext cx="3108960" cy="256032"/>
-          </a:xfrm>
-          <a:prstGeom prst="rect">
-            <a:avLst/>
-          </a:prstGeom>
-          <a:noFill/>
-        </p:spPr>
-        <p:txBody>
-          <a:bodyPr wrap="square">
-            <a:spAutoFit/>
-          </a:bodyPr>
-          <a:lstStyle/>
-          <a:p>
-            <a:pPr algn="l"/>
-            <a:r>
-              <a:rPr sz="1000" b="1" i="0">
-                <a:solidFill>
-                  <a:srgbClr val="FFFFFF"/>
-                </a:solidFill>
-              </a:rPr>
-              <a:t>Provider  /  Score</a:t>
-            </a:r>
-          </a:p>
-        </p:txBody>
-      </p:sp>
-      <p:sp>
-        <p:nvSpPr>
-          <p:cNvPr id="12" name="TextBox 11"/>
-          <p:cNvSpPr txBox="1"/>
-          <p:nvPr/>
-        </p:nvSpPr>
-        <p:spPr>
-          <a:xfrm>
-            <a:off x="3630168" y="1435608"/>
-            <a:ext cx="3108960" cy="256032"/>
-          </a:xfrm>
-          <a:prstGeom prst="rect">
-            <a:avLst/>
-          </a:prstGeom>
-          <a:noFill/>
-        </p:spPr>
-        <p:txBody>
-          <a:bodyPr wrap="square">
-            <a:spAutoFit/>
-          </a:bodyPr>
-          <a:lstStyle/>
-          <a:p>
-            <a:pPr algn="l"/>
-            <a:r>
-              <a:rPr sz="1000" b="1" i="0">
-                <a:solidFill>
-                  <a:srgbClr val="FFFFFF"/>
-                </a:solidFill>
-              </a:rPr>
-              <a:t>Signals detected</a:t>
-            </a:r>
-          </a:p>
-        </p:txBody>
-      </p:sp>
-      <p:sp>
-        <p:nvSpPr>
-          <p:cNvPr id="13" name="TextBox 12"/>
-          <p:cNvSpPr txBox="1"/>
-          <p:nvPr/>
-        </p:nvSpPr>
-        <p:spPr>
-          <a:xfrm>
-            <a:off x="7013448" y="1435608"/>
-            <a:ext cx="3108960" cy="256032"/>
-          </a:xfrm>
-          <a:prstGeom prst="rect">
-            <a:avLst/>
-          </a:prstGeom>
-          <a:noFill/>
-        </p:spPr>
-        <p:txBody>
-          <a:bodyPr wrap="square">
-            <a:spAutoFit/>
-          </a:bodyPr>
-          <a:lstStyle/>
-          <a:p>
-            <a:pPr algn="l"/>
-            <a:r>
-              <a:rPr sz="1000" b="1" i="0">
-                <a:solidFill>
-                  <a:srgbClr val="FFFFFF"/>
-                </a:solidFill>
-              </a:rPr>
-              <a:t>Recommended action</a:t>
-            </a:r>
-          </a:p>
-        </p:txBody>
-      </p:sp>
-      <p:sp>
-        <p:nvSpPr>
-          <p:cNvPr id="14" name="Rectangle 13"/>
+            <a:off x="667512" y="4279392"/>
+            <a:ext cx="2423160" cy="822960"/>
+          </a:xfrm>
+          <a:prstGeom prst="rect">
+            <a:avLst/>
+          </a:prstGeom>
+          <a:noFill/>
+        </p:spPr>
+        <p:txBody>
+          <a:bodyPr wrap="square">
+            <a:spAutoFit/>
+          </a:bodyPr>
+          <a:lstStyle/>
+          <a:p>
+            <a:pPr algn="l"/>
+            <a:r>
+              <a:rPr sz="1000" b="0" i="0">
+                <a:solidFill>
+                  <a:srgbClr val="CCCCCC"/>
+                </a:solidFill>
+              </a:rPr>
+              <a:t>Live risk scores, flagged provider count, recent review activity</a:t>
+            </a:r>
+          </a:p>
+        </p:txBody>
+      </p:sp>
+      <p:sp>
+        <p:nvSpPr>
+          <p:cNvPr id="12" name="Rectangle 11"/>
           <p:cNvSpPr/>
           <p:nvPr/>
         </p:nvSpPr>
         <p:spPr>
           <a:xfrm>
-            <a:off x="274320" y="1783080"/>
-            <a:ext cx="11640312" cy="896112"/>
+            <a:off x="3429000" y="3749039"/>
+            <a:ext cx="2743200" cy="1554480"/>
           </a:xfrm>
           <a:prstGeom prst="rect">
             <a:avLst/>
           </a:prstGeom>
           <a:solidFill>
-            <a:srgbClr val="FFEBEB"/>
+            <a:srgbClr val="26355C"/>
           </a:solidFill>
           <a:ln>
             <a:noFill/>
@@ -7563,20 +10193,20 @@
       </p:sp>
       <p:sp>
         <p:nvSpPr>
-          <p:cNvPr id="15" name="Rectangle 14"/>
+          <p:cNvPr id="13" name="Rectangle 12"/>
           <p:cNvSpPr/>
           <p:nvPr/>
         </p:nvSpPr>
         <p:spPr>
           <a:xfrm>
-            <a:off x="274320" y="1783080"/>
-            <a:ext cx="91440" cy="896112"/>
+            <a:off x="3429000" y="3749039"/>
+            <a:ext cx="2743200" cy="91440"/>
           </a:xfrm>
           <a:prstGeom prst="rect">
             <a:avLst/>
           </a:prstGeom>
           <a:solidFill>
-            <a:srgbClr val="D62839"/>
+            <a:srgbClr val="0D7A8E"/>
           </a:solidFill>
           <a:ln>
             <a:noFill/>
@@ -7606,14 +10236,14 @@
       </p:sp>
       <p:sp>
         <p:nvSpPr>
-          <p:cNvPr id="16" name="TextBox 15"/>
-          <p:cNvSpPr txBox="1"/>
-          <p:nvPr/>
-        </p:nvSpPr>
-        <p:spPr>
-          <a:xfrm>
-            <a:off x="457200" y="1837943"/>
-            <a:ext cx="2926080" cy="292608"/>
+          <p:cNvPr id="14" name="TextBox 13"/>
+          <p:cNvSpPr txBox="1"/>
+          <p:nvPr/>
+        </p:nvSpPr>
+        <p:spPr>
+          <a:xfrm>
+            <a:off x="3593592" y="3913632"/>
+            <a:ext cx="2423160" cy="347472"/>
           </a:xfrm>
           <a:prstGeom prst="rect">
             <a:avLst/>
@@ -7630,30 +10260,64 @@
             <a:r>
               <a:rPr sz="1300" b="1" i="0">
                 <a:solidFill>
-                  <a:srgbClr val="1A2440"/>
-                </a:solidFill>
-              </a:rPr>
-              <a:t>Queen optics</a:t>
-            </a:r>
-          </a:p>
-        </p:txBody>
-      </p:sp>
-      <p:sp>
-        <p:nvSpPr>
-          <p:cNvPr id="17" name="Rectangle 16"/>
+                  <a:srgbClr val="FFFFFF"/>
+                </a:solidFill>
+              </a:rPr>
+              <a:t>Provider list</a:t>
+            </a:r>
+          </a:p>
+        </p:txBody>
+      </p:sp>
+      <p:sp>
+        <p:nvSpPr>
+          <p:cNvPr id="15" name="TextBox 14"/>
+          <p:cNvSpPr txBox="1"/>
+          <p:nvPr/>
+        </p:nvSpPr>
+        <p:spPr>
+          <a:xfrm>
+            <a:off x="3593592" y="4279392"/>
+            <a:ext cx="2423160" cy="822960"/>
+          </a:xfrm>
+          <a:prstGeom prst="rect">
+            <a:avLst/>
+          </a:prstGeom>
+          <a:noFill/>
+        </p:spPr>
+        <p:txBody>
+          <a:bodyPr wrap="square">
+            <a:spAutoFit/>
+          </a:bodyPr>
+          <a:lstStyle/>
+          <a:p>
+            <a:pPr algn="l"/>
+            <a:r>
+              <a:rPr sz="1000" b="0" i="0">
+                <a:solidFill>
+                  <a:srgbClr val="CCCCCC"/>
+                </a:solidFill>
+              </a:rPr>
+              <a:t>Run detection · search and filter · see every provider's risk score</a:t>
+            </a:r>
+          </a:p>
+        </p:txBody>
+      </p:sp>
+      <p:sp>
+        <p:nvSpPr>
+          <p:cNvPr id="16" name="Rectangle 15"/>
           <p:cNvSpPr/>
           <p:nvPr/>
         </p:nvSpPr>
         <p:spPr>
           <a:xfrm>
-            <a:off x="457200" y="2258568"/>
-            <a:ext cx="1188720" cy="329184"/>
+            <a:off x="6355080" y="3749039"/>
+            <a:ext cx="2743200" cy="1554480"/>
           </a:xfrm>
           <a:prstGeom prst="rect">
             <a:avLst/>
           </a:prstGeom>
           <a:solidFill>
-            <a:srgbClr val="D62839"/>
+            <a:srgbClr val="26355C"/>
           </a:solidFill>
           <a:ln>
             <a:noFill/>
@@ -7683,156 +10347,20 @@
       </p:sp>
       <p:sp>
         <p:nvSpPr>
-          <p:cNvPr id="18" name="TextBox 17"/>
-          <p:cNvSpPr txBox="1"/>
-          <p:nvPr/>
-        </p:nvSpPr>
-        <p:spPr>
-          <a:xfrm>
-            <a:off x="457200" y="2258568"/>
-            <a:ext cx="1188720" cy="329184"/>
-          </a:xfrm>
-          <a:prstGeom prst="rect">
-            <a:avLst/>
-          </a:prstGeom>
-          <a:noFill/>
-        </p:spPr>
-        <p:txBody>
-          <a:bodyPr wrap="square">
-            <a:spAutoFit/>
-          </a:bodyPr>
-          <a:lstStyle/>
-          <a:p>
-            <a:pPr algn="ctr"/>
-            <a:r>
-              <a:rPr sz="1700" b="1" i="0">
-                <a:solidFill>
-                  <a:srgbClr val="FFFFFF"/>
-                </a:solidFill>
-              </a:rPr>
-              <a:t>99/100</a:t>
-            </a:r>
-          </a:p>
-        </p:txBody>
-      </p:sp>
-      <p:sp>
-        <p:nvSpPr>
-          <p:cNvPr id="19" name="TextBox 18"/>
-          <p:cNvSpPr txBox="1"/>
-          <p:nvPr/>
-        </p:nvSpPr>
-        <p:spPr>
-          <a:xfrm>
-            <a:off x="3630168" y="1837943"/>
-            <a:ext cx="3154680" cy="256032"/>
-          </a:xfrm>
-          <a:prstGeom prst="rect">
-            <a:avLst/>
-          </a:prstGeom>
-          <a:noFill/>
-        </p:spPr>
-        <p:txBody>
-          <a:bodyPr wrap="square">
-            <a:spAutoFit/>
-          </a:bodyPr>
-          <a:lstStyle/>
-          <a:p>
-            <a:pPr algn="l"/>
-            <a:r>
-              <a:rPr sz="1000" b="1" i="0">
-                <a:solidFill>
-                  <a:srgbClr val="D62839"/>
-                </a:solidFill>
-              </a:rPr>
-              <a:t>Co-billing · billing spike · round numbers</a:t>
-            </a:r>
-          </a:p>
-        </p:txBody>
-      </p:sp>
-      <p:sp>
-        <p:nvSpPr>
-          <p:cNvPr id="20" name="TextBox 19"/>
-          <p:cNvSpPr txBox="1"/>
-          <p:nvPr/>
-        </p:nvSpPr>
-        <p:spPr>
-          <a:xfrm>
-            <a:off x="3630168" y="2130552"/>
-            <a:ext cx="3154680" cy="457200"/>
-          </a:xfrm>
-          <a:prstGeom prst="rect">
-            <a:avLst/>
-          </a:prstGeom>
-          <a:noFill/>
-        </p:spPr>
-        <p:txBody>
-          <a:bodyPr wrap="square">
-            <a:spAutoFit/>
-          </a:bodyPr>
-          <a:lstStyle/>
-          <a:p>
-            <a:pPr algn="l"/>
-            <a:r>
-              <a:rPr sz="900" b="0" i="0">
-                <a:solidFill>
-                  <a:srgbClr val="444444"/>
-                </a:solidFill>
-              </a:rPr>
-              <a:t>96% of months had both glasses + contacts. 3 spike months. All contacts claims are whole euros.</a:t>
-            </a:r>
-          </a:p>
-        </p:txBody>
-      </p:sp>
-      <p:sp>
-        <p:nvSpPr>
-          <p:cNvPr id="21" name="TextBox 20"/>
-          <p:cNvSpPr txBox="1"/>
-          <p:nvPr/>
-        </p:nvSpPr>
-        <p:spPr>
-          <a:xfrm>
-            <a:off x="7013448" y="1984248"/>
-            <a:ext cx="4754880" cy="457200"/>
-          </a:xfrm>
-          <a:prstGeom prst="rect">
-            <a:avLst/>
-          </a:prstGeom>
-          <a:noFill/>
-        </p:spPr>
-        <p:txBody>
-          <a:bodyPr wrap="square">
-            <a:spAutoFit/>
-          </a:bodyPr>
-          <a:lstStyle/>
-          <a:p>
-            <a:pPr algn="l"/>
-            <a:r>
-              <a:rPr sz="1000" b="1" i="0">
-                <a:solidFill>
-                  <a:srgbClr val="1A2440"/>
-                </a:solidFill>
-              </a:rPr>
-              <a:t>Full audit + suspend all pending payments</a:t>
-            </a:r>
-          </a:p>
-        </p:txBody>
-      </p:sp>
-      <p:sp>
-        <p:nvSpPr>
-          <p:cNvPr id="22" name="Rectangle 21"/>
+          <p:cNvPr id="17" name="Rectangle 16"/>
           <p:cNvSpPr/>
           <p:nvPr/>
         </p:nvSpPr>
         <p:spPr>
           <a:xfrm>
-            <a:off x="274320" y="2715768"/>
-            <a:ext cx="11640312" cy="896112"/>
+            <a:off x="6355080" y="3749039"/>
+            <a:ext cx="2743200" cy="91440"/>
           </a:xfrm>
           <a:prstGeom prst="rect">
             <a:avLst/>
           </a:prstGeom>
           <a:solidFill>
-            <a:srgbClr val="FFEBEB"/>
+            <a:srgbClr val="E07B39"/>
           </a:solidFill>
           <a:ln>
             <a:noFill/>
@@ -7862,20 +10390,88 @@
       </p:sp>
       <p:sp>
         <p:nvSpPr>
-          <p:cNvPr id="23" name="Rectangle 22"/>
+          <p:cNvPr id="18" name="TextBox 17"/>
+          <p:cNvSpPr txBox="1"/>
+          <p:nvPr/>
+        </p:nvSpPr>
+        <p:spPr>
+          <a:xfrm>
+            <a:off x="6519672" y="3913632"/>
+            <a:ext cx="2423160" cy="347472"/>
+          </a:xfrm>
+          <a:prstGeom prst="rect">
+            <a:avLst/>
+          </a:prstGeom>
+          <a:noFill/>
+        </p:spPr>
+        <p:txBody>
+          <a:bodyPr wrap="square">
+            <a:spAutoFit/>
+          </a:bodyPr>
+          <a:lstStyle/>
+          <a:p>
+            <a:pPr algn="l"/>
+            <a:r>
+              <a:rPr sz="1300" b="1" i="0">
+                <a:solidFill>
+                  <a:srgbClr val="FFFFFF"/>
+                </a:solidFill>
+              </a:rPr>
+              <a:t>Flag evidence</a:t>
+            </a:r>
+          </a:p>
+        </p:txBody>
+      </p:sp>
+      <p:sp>
+        <p:nvSpPr>
+          <p:cNvPr id="19" name="TextBox 18"/>
+          <p:cNvSpPr txBox="1"/>
+          <p:nvPr/>
+        </p:nvSpPr>
+        <p:spPr>
+          <a:xfrm>
+            <a:off x="6519672" y="4279392"/>
+            <a:ext cx="2423160" cy="822960"/>
+          </a:xfrm>
+          <a:prstGeom prst="rect">
+            <a:avLst/>
+          </a:prstGeom>
+          <a:noFill/>
+        </p:spPr>
+        <p:txBody>
+          <a:bodyPr wrap="square">
+            <a:spAutoFit/>
+          </a:bodyPr>
+          <a:lstStyle/>
+          <a:p>
+            <a:pPr algn="l"/>
+            <a:r>
+              <a:rPr sz="1000" b="0" i="0">
+                <a:solidFill>
+                  <a:srgbClr val="CCCCCC"/>
+                </a:solidFill>
+              </a:rPr>
+              <a:t>Click any provider to see exactly which claims triggered each flag</a:t>
+            </a:r>
+          </a:p>
+        </p:txBody>
+      </p:sp>
+      <p:sp>
+        <p:nvSpPr>
+          <p:cNvPr id="20" name="Rectangle 19"/>
           <p:cNvSpPr/>
           <p:nvPr/>
         </p:nvSpPr>
         <p:spPr>
           <a:xfrm>
-            <a:off x="274320" y="2715768"/>
-            <a:ext cx="91440" cy="896112"/>
+            <a:off x="9281160" y="3749039"/>
+            <a:ext cx="2743200" cy="1554480"/>
           </a:xfrm>
           <a:prstGeom prst="rect">
             <a:avLst/>
           </a:prstGeom>
           <a:solidFill>
-            <a:srgbClr val="D62839"/>
+            <a:srgbClr val="26355C"/>
           </a:solidFill>
           <a:ln>
             <a:noFill/>
@@ -7905,54 +10501,20 @@
       </p:sp>
       <p:sp>
         <p:nvSpPr>
-          <p:cNvPr id="24" name="TextBox 23"/>
-          <p:cNvSpPr txBox="1"/>
-          <p:nvPr/>
-        </p:nvSpPr>
-        <p:spPr>
-          <a:xfrm>
-            <a:off x="457200" y="2770632"/>
-            <a:ext cx="2926080" cy="292608"/>
-          </a:xfrm>
-          <a:prstGeom prst="rect">
-            <a:avLst/>
-          </a:prstGeom>
-          <a:noFill/>
-        </p:spPr>
-        <p:txBody>
-          <a:bodyPr wrap="square">
-            <a:spAutoFit/>
-          </a:bodyPr>
-          <a:lstStyle/>
-          <a:p>
-            <a:pPr algn="l"/>
-            <a:r>
-              <a:rPr sz="1300" b="1" i="0">
-                <a:solidFill>
-                  <a:srgbClr val="1A2440"/>
-                </a:solidFill>
-              </a:rPr>
-              <a:t>Mike lunettes</a:t>
-            </a:r>
-          </a:p>
-        </p:txBody>
-      </p:sp>
-      <p:sp>
-        <p:nvSpPr>
-          <p:cNvPr id="25" name="Rectangle 24"/>
+          <p:cNvPr id="21" name="Rectangle 20"/>
           <p:cNvSpPr/>
           <p:nvPr/>
         </p:nvSpPr>
         <p:spPr>
           <a:xfrm>
-            <a:off x="457200" y="3191256"/>
-            <a:ext cx="1188720" cy="329184"/>
+            <a:off x="9281160" y="3749039"/>
+            <a:ext cx="2743200" cy="91440"/>
           </a:xfrm>
           <a:prstGeom prst="rect">
             <a:avLst/>
           </a:prstGeom>
           <a:solidFill>
-            <a:srgbClr val="D62839"/>
+            <a:srgbClr val="2E7D32"/>
           </a:solidFill>
           <a:ln>
             <a:noFill/>
@@ -7982,156 +10544,122 @@
       </p:sp>
       <p:sp>
         <p:nvSpPr>
-          <p:cNvPr id="26" name="TextBox 25"/>
-          <p:cNvSpPr txBox="1"/>
-          <p:nvPr/>
-        </p:nvSpPr>
-        <p:spPr>
-          <a:xfrm>
-            <a:off x="457200" y="3191256"/>
-            <a:ext cx="1188720" cy="329184"/>
-          </a:xfrm>
-          <a:prstGeom prst="rect">
-            <a:avLst/>
-          </a:prstGeom>
-          <a:noFill/>
-        </p:spPr>
-        <p:txBody>
-          <a:bodyPr wrap="square">
-            <a:spAutoFit/>
-          </a:bodyPr>
-          <a:lstStyle/>
-          <a:p>
-            <a:pPr algn="ctr"/>
-            <a:r>
-              <a:rPr sz="1700" b="1" i="0">
+          <p:cNvPr id="22" name="TextBox 21"/>
+          <p:cNvSpPr txBox="1"/>
+          <p:nvPr/>
+        </p:nvSpPr>
+        <p:spPr>
+          <a:xfrm>
+            <a:off x="9445752" y="3913632"/>
+            <a:ext cx="2423160" cy="347472"/>
+          </a:xfrm>
+          <a:prstGeom prst="rect">
+            <a:avLst/>
+          </a:prstGeom>
+          <a:noFill/>
+        </p:spPr>
+        <p:txBody>
+          <a:bodyPr wrap="square">
+            <a:spAutoFit/>
+          </a:bodyPr>
+          <a:lstStyle/>
+          <a:p>
+            <a:pPr algn="l"/>
+            <a:r>
+              <a:rPr sz="1300" b="1" i="0">
                 <a:solidFill>
                   <a:srgbClr val="FFFFFF"/>
                 </a:solidFill>
               </a:rPr>
-              <a:t>96/100</a:t>
-            </a:r>
-          </a:p>
-        </p:txBody>
-      </p:sp>
-      <p:sp>
-        <p:nvSpPr>
-          <p:cNvPr id="27" name="TextBox 26"/>
-          <p:cNvSpPr txBox="1"/>
-          <p:nvPr/>
-        </p:nvSpPr>
-        <p:spPr>
-          <a:xfrm>
-            <a:off x="3630168" y="2770632"/>
-            <a:ext cx="3154680" cy="256032"/>
-          </a:xfrm>
-          <a:prstGeom prst="rect">
-            <a:avLst/>
-          </a:prstGeom>
-          <a:noFill/>
-        </p:spPr>
-        <p:txBody>
-          <a:bodyPr wrap="square">
-            <a:spAutoFit/>
-          </a:bodyPr>
-          <a:lstStyle/>
-          <a:p>
-            <a:pPr algn="l"/>
-            <a:r>
-              <a:rPr sz="1000" b="1" i="0">
-                <a:solidFill>
-                  <a:srgbClr val="D62839"/>
-                </a:solidFill>
-              </a:rPr>
-              <a:t>Co-billing · billing spike · round numbers</a:t>
-            </a:r>
-          </a:p>
-        </p:txBody>
-      </p:sp>
-      <p:sp>
-        <p:nvSpPr>
-          <p:cNvPr id="28" name="TextBox 27"/>
-          <p:cNvSpPr txBox="1"/>
-          <p:nvPr/>
-        </p:nvSpPr>
-        <p:spPr>
-          <a:xfrm>
-            <a:off x="3630168" y="3063239"/>
-            <a:ext cx="3154680" cy="457200"/>
-          </a:xfrm>
-          <a:prstGeom prst="rect">
-            <a:avLst/>
-          </a:prstGeom>
-          <a:noFill/>
-        </p:spPr>
-        <p:txBody>
-          <a:bodyPr wrap="square">
-            <a:spAutoFit/>
-          </a:bodyPr>
-          <a:lstStyle/>
-          <a:p>
-            <a:pPr algn="l"/>
-            <a:r>
-              <a:rPr sz="900" b="0" i="0">
-                <a:solidFill>
-                  <a:srgbClr val="444444"/>
-                </a:solidFill>
-              </a:rPr>
-              <a:t>85% co-billing rate. 3 spike months above 5× their 6-month average.</a:t>
-            </a:r>
-          </a:p>
-        </p:txBody>
-      </p:sp>
-      <p:sp>
-        <p:nvSpPr>
-          <p:cNvPr id="29" name="TextBox 28"/>
-          <p:cNvSpPr txBox="1"/>
-          <p:nvPr/>
-        </p:nvSpPr>
-        <p:spPr>
-          <a:xfrm>
-            <a:off x="7013448" y="2916936"/>
-            <a:ext cx="4754880" cy="457200"/>
-          </a:xfrm>
-          <a:prstGeom prst="rect">
-            <a:avLst/>
-          </a:prstGeom>
-          <a:noFill/>
-        </p:spPr>
-        <p:txBody>
-          <a:bodyPr wrap="square">
-            <a:spAutoFit/>
-          </a:bodyPr>
-          <a:lstStyle/>
-          <a:p>
-            <a:pPr algn="l"/>
-            <a:r>
-              <a:rPr sz="1000" b="1" i="0">
-                <a:solidFill>
-                  <a:srgbClr val="1A2440"/>
-                </a:solidFill>
-              </a:rPr>
-              <a:t>Full audit + suspend all pending payments</a:t>
-            </a:r>
-          </a:p>
-        </p:txBody>
-      </p:sp>
-      <p:sp>
-        <p:nvSpPr>
-          <p:cNvPr id="30" name="Rectangle 29"/>
+              <a:t>Review panel</a:t>
+            </a:r>
+          </a:p>
+        </p:txBody>
+      </p:sp>
+      <p:sp>
+        <p:nvSpPr>
+          <p:cNvPr id="23" name="TextBox 22"/>
+          <p:cNvSpPr txBox="1"/>
+          <p:nvPr/>
+        </p:nvSpPr>
+        <p:spPr>
+          <a:xfrm>
+            <a:off x="9445752" y="4279392"/>
+            <a:ext cx="2423160" cy="822960"/>
+          </a:xfrm>
+          <a:prstGeom prst="rect">
+            <a:avLst/>
+          </a:prstGeom>
+          <a:noFill/>
+        </p:spPr>
+        <p:txBody>
+          <a:bodyPr wrap="square">
+            <a:spAutoFit/>
+          </a:bodyPr>
+          <a:lstStyle/>
+          <a:p>
+            <a:pPr algn="l"/>
+            <a:r>
+              <a:rPr sz="1000" b="0" i="0">
+                <a:solidFill>
+                  <a:srgbClr val="CCCCCC"/>
+                </a:solidFill>
+              </a:rPr>
+              <a:t>Submit a decision on any provider - approve, escalate, or blacklist</a:t>
+            </a:r>
+          </a:p>
+        </p:txBody>
+      </p:sp>
+      <p:sp>
+        <p:nvSpPr>
+          <p:cNvPr id="24" name="TextBox 23"/>
+          <p:cNvSpPr txBox="1"/>
+          <p:nvPr/>
+        </p:nvSpPr>
+        <p:spPr>
+          <a:xfrm>
+            <a:off x="502920" y="5650992"/>
+            <a:ext cx="11155680" cy="347472"/>
+          </a:xfrm>
+          <a:prstGeom prst="rect">
+            <a:avLst/>
+          </a:prstGeom>
+          <a:noFill/>
+        </p:spPr>
+        <p:txBody>
+          <a:bodyPr wrap="square">
+            <a:spAutoFit/>
+          </a:bodyPr>
+          <a:lstStyle/>
+          <a:p>
+            <a:pPr algn="ctr"/>
+            <a:r>
+              <a:rPr sz="1000" b="0" i="0">
+                <a:solidFill>
+                  <a:srgbClr val="7788AA"/>
+                </a:solidFill>
+              </a:rPr>
+              <a:t>Built with  Next.js + TypeScript  ·  Python FastAPI  ·  PostgreSQL  ·  Full FR/EN localisation</a:t>
+            </a:r>
+          </a:p>
+        </p:txBody>
+      </p:sp>
+      <p:sp>
+        <p:nvSpPr>
+          <p:cNvPr id="25" name="Rectangle 24"/>
           <p:cNvSpPr/>
           <p:nvPr/>
         </p:nvSpPr>
         <p:spPr>
           <a:xfrm>
-            <a:off x="274320" y="3648456"/>
-            <a:ext cx="11640312" cy="896112"/>
+            <a:off x="502920" y="5138928"/>
+            <a:ext cx="11155680" cy="347472"/>
           </a:xfrm>
           <a:prstGeom prst="rect">
             <a:avLst/>
           </a:prstGeom>
           <a:solidFill>
-            <a:srgbClr val="FFEBEB"/>
+            <a:srgbClr val="0D1730"/>
           </a:solidFill>
           <a:ln>
             <a:noFill/>
@@ -8161,854 +10689,35 @@
       </p:sp>
       <p:sp>
         <p:nvSpPr>
-          <p:cNvPr id="31" name="Rectangle 30"/>
-          <p:cNvSpPr/>
-          <p:nvPr/>
-        </p:nvSpPr>
-        <p:spPr>
-          <a:xfrm>
-            <a:off x="274320" y="3648456"/>
-            <a:ext cx="91440" cy="896112"/>
-          </a:xfrm>
-          <a:prstGeom prst="rect">
-            <a:avLst/>
-          </a:prstGeom>
-          <a:solidFill>
-            <a:srgbClr val="D62839"/>
-          </a:solidFill>
-          <a:ln>
-            <a:noFill/>
-          </a:ln>
-        </p:spPr>
-        <p:style>
-          <a:lnRef idx="1">
-            <a:schemeClr val="accent1"/>
-          </a:lnRef>
-          <a:fillRef idx="3">
-            <a:schemeClr val="accent1"/>
-          </a:fillRef>
-          <a:effectRef idx="2">
-            <a:schemeClr val="accent1"/>
-          </a:effectRef>
-          <a:fontRef idx="minor">
-            <a:schemeClr val="lt1"/>
-          </a:fontRef>
-        </p:style>
-        <p:txBody>
-          <a:bodyPr rtlCol="0" anchor="ctr"/>
-          <a:lstStyle/>
-          <a:p>
-            <a:pPr algn="ctr"/>
-          </a:p>
-        </p:txBody>
-      </p:sp>
-      <p:sp>
-        <p:nvSpPr>
-          <p:cNvPr id="32" name="TextBox 31"/>
-          <p:cNvSpPr txBox="1"/>
-          <p:nvPr/>
-        </p:nvSpPr>
-        <p:spPr>
-          <a:xfrm>
-            <a:off x="457200" y="3703320"/>
-            <a:ext cx="2926080" cy="292608"/>
-          </a:xfrm>
-          <a:prstGeom prst="rect">
-            <a:avLst/>
-          </a:prstGeom>
-          <a:noFill/>
-        </p:spPr>
-        <p:txBody>
-          <a:bodyPr wrap="square">
-            <a:spAutoFit/>
-          </a:bodyPr>
-          <a:lstStyle/>
-          <a:p>
-            <a:pPr algn="l"/>
-            <a:r>
-              <a:rPr sz="1300" b="1" i="0">
-                <a:solidFill>
-                  <a:srgbClr val="1A2440"/>
-                </a:solidFill>
-              </a:rPr>
-              <a:t>Les lunettes à Soso</a:t>
-            </a:r>
-          </a:p>
-        </p:txBody>
-      </p:sp>
-      <p:sp>
-        <p:nvSpPr>
-          <p:cNvPr id="33" name="Rectangle 32"/>
-          <p:cNvSpPr/>
-          <p:nvPr/>
-        </p:nvSpPr>
-        <p:spPr>
-          <a:xfrm>
-            <a:off x="457200" y="4123944"/>
-            <a:ext cx="1188720" cy="329184"/>
-          </a:xfrm>
-          <a:prstGeom prst="rect">
-            <a:avLst/>
-          </a:prstGeom>
-          <a:solidFill>
-            <a:srgbClr val="D62839"/>
-          </a:solidFill>
-          <a:ln>
-            <a:noFill/>
-          </a:ln>
-        </p:spPr>
-        <p:style>
-          <a:lnRef idx="1">
-            <a:schemeClr val="accent1"/>
-          </a:lnRef>
-          <a:fillRef idx="3">
-            <a:schemeClr val="accent1"/>
-          </a:fillRef>
-          <a:effectRef idx="2">
-            <a:schemeClr val="accent1"/>
-          </a:effectRef>
-          <a:fontRef idx="minor">
-            <a:schemeClr val="lt1"/>
-          </a:fontRef>
-        </p:style>
-        <p:txBody>
-          <a:bodyPr rtlCol="0" anchor="ctr"/>
-          <a:lstStyle/>
-          <a:p>
-            <a:pPr algn="ctr"/>
-          </a:p>
-        </p:txBody>
-      </p:sp>
-      <p:sp>
-        <p:nvSpPr>
-          <p:cNvPr id="34" name="TextBox 33"/>
-          <p:cNvSpPr txBox="1"/>
-          <p:nvPr/>
-        </p:nvSpPr>
-        <p:spPr>
-          <a:xfrm>
-            <a:off x="457200" y="4123944"/>
-            <a:ext cx="1188720" cy="329184"/>
-          </a:xfrm>
-          <a:prstGeom prst="rect">
-            <a:avLst/>
-          </a:prstGeom>
-          <a:noFill/>
-        </p:spPr>
-        <p:txBody>
-          <a:bodyPr wrap="square">
-            <a:spAutoFit/>
-          </a:bodyPr>
-          <a:lstStyle/>
-          <a:p>
-            <a:pPr algn="ctr"/>
-            <a:r>
-              <a:rPr sz="1700" b="1" i="0">
-                <a:solidFill>
-                  <a:srgbClr val="FFFFFF"/>
-                </a:solidFill>
-              </a:rPr>
-              <a:t>84/100</a:t>
-            </a:r>
-          </a:p>
-        </p:txBody>
-      </p:sp>
-      <p:sp>
-        <p:nvSpPr>
-          <p:cNvPr id="35" name="TextBox 34"/>
-          <p:cNvSpPr txBox="1"/>
-          <p:nvPr/>
-        </p:nvSpPr>
-        <p:spPr>
-          <a:xfrm>
-            <a:off x="3630168" y="3703320"/>
-            <a:ext cx="3154680" cy="256032"/>
-          </a:xfrm>
-          <a:prstGeom prst="rect">
-            <a:avLst/>
-          </a:prstGeom>
-          <a:noFill/>
-        </p:spPr>
-        <p:txBody>
-          <a:bodyPr wrap="square">
-            <a:spAutoFit/>
-          </a:bodyPr>
-          <a:lstStyle/>
-          <a:p>
-            <a:pPr algn="l"/>
-            <a:r>
-              <a:rPr sz="1000" b="1" i="0">
-                <a:solidFill>
-                  <a:srgbClr val="D62839"/>
-                </a:solidFill>
-              </a:rPr>
-              <a:t>Co-billing · spike · repeated amounts · round numbers</a:t>
-            </a:r>
-          </a:p>
-        </p:txBody>
-      </p:sp>
-      <p:sp>
-        <p:nvSpPr>
-          <p:cNvPr id="36" name="TextBox 35"/>
-          <p:cNvSpPr txBox="1"/>
-          <p:nvPr/>
-        </p:nvSpPr>
-        <p:spPr>
-          <a:xfrm>
-            <a:off x="3630168" y="3995928"/>
-            <a:ext cx="3154680" cy="457200"/>
-          </a:xfrm>
-          <a:prstGeom prst="rect">
-            <a:avLst/>
-          </a:prstGeom>
-          <a:noFill/>
-        </p:spPr>
-        <p:txBody>
-          <a:bodyPr wrap="square">
-            <a:spAutoFit/>
-          </a:bodyPr>
-          <a:lstStyle/>
-          <a:p>
-            <a:pPr algn="l"/>
-            <a:r>
-              <a:rPr sz="900" b="0" i="0">
-                <a:solidFill>
-                  <a:srgbClr val="444444"/>
-                </a:solidFill>
-              </a:rPr>
-              <a:t>Only provider to trigger all 4 rules. 4 completely independent fraud signals.</a:t>
-            </a:r>
-          </a:p>
-        </p:txBody>
-      </p:sp>
-      <p:sp>
-        <p:nvSpPr>
-          <p:cNvPr id="37" name="TextBox 36"/>
-          <p:cNvSpPr txBox="1"/>
-          <p:nvPr/>
-        </p:nvSpPr>
-        <p:spPr>
-          <a:xfrm>
-            <a:off x="7013448" y="3849624"/>
-            <a:ext cx="4754880" cy="457200"/>
-          </a:xfrm>
-          <a:prstGeom prst="rect">
-            <a:avLst/>
-          </a:prstGeom>
-          <a:noFill/>
-        </p:spPr>
-        <p:txBody>
-          <a:bodyPr wrap="square">
-            <a:spAutoFit/>
-          </a:bodyPr>
-          <a:lstStyle/>
-          <a:p>
-            <a:pPr algn="l"/>
-            <a:r>
-              <a:rPr sz="1000" b="1" i="0">
-                <a:solidFill>
-                  <a:srgbClr val="1A2440"/>
-                </a:solidFill>
-              </a:rPr>
-              <a:t>Priority audit — highest confidence fraud case</a:t>
-            </a:r>
-          </a:p>
-        </p:txBody>
-      </p:sp>
-      <p:sp>
-        <p:nvSpPr>
-          <p:cNvPr id="38" name="Rectangle 37"/>
-          <p:cNvSpPr/>
-          <p:nvPr/>
-        </p:nvSpPr>
-        <p:spPr>
-          <a:xfrm>
-            <a:off x="274320" y="4581144"/>
-            <a:ext cx="11640312" cy="896112"/>
-          </a:xfrm>
-          <a:prstGeom prst="rect">
-            <a:avLst/>
-          </a:prstGeom>
-          <a:solidFill>
-            <a:srgbClr val="FFEBEB"/>
-          </a:solidFill>
-          <a:ln>
-            <a:noFill/>
-          </a:ln>
-        </p:spPr>
-        <p:style>
-          <a:lnRef idx="1">
-            <a:schemeClr val="accent1"/>
-          </a:lnRef>
-          <a:fillRef idx="3">
-            <a:schemeClr val="accent1"/>
-          </a:fillRef>
-          <a:effectRef idx="2">
-            <a:schemeClr val="accent1"/>
-          </a:effectRef>
-          <a:fontRef idx="minor">
-            <a:schemeClr val="lt1"/>
-          </a:fontRef>
-        </p:style>
-        <p:txBody>
-          <a:bodyPr rtlCol="0" anchor="ctr"/>
-          <a:lstStyle/>
-          <a:p>
-            <a:pPr algn="ctr"/>
-          </a:p>
-        </p:txBody>
-      </p:sp>
-      <p:sp>
-        <p:nvSpPr>
-          <p:cNvPr id="39" name="Rectangle 38"/>
-          <p:cNvSpPr/>
-          <p:nvPr/>
-        </p:nvSpPr>
-        <p:spPr>
-          <a:xfrm>
-            <a:off x="274320" y="4581144"/>
-            <a:ext cx="91440" cy="896112"/>
-          </a:xfrm>
-          <a:prstGeom prst="rect">
-            <a:avLst/>
-          </a:prstGeom>
-          <a:solidFill>
-            <a:srgbClr val="D62839"/>
-          </a:solidFill>
-          <a:ln>
-            <a:noFill/>
-          </a:ln>
-        </p:spPr>
-        <p:style>
-          <a:lnRef idx="1">
-            <a:schemeClr val="accent1"/>
-          </a:lnRef>
-          <a:fillRef idx="3">
-            <a:schemeClr val="accent1"/>
-          </a:fillRef>
-          <a:effectRef idx="2">
-            <a:schemeClr val="accent1"/>
-          </a:effectRef>
-          <a:fontRef idx="minor">
-            <a:schemeClr val="lt1"/>
-          </a:fontRef>
-        </p:style>
-        <p:txBody>
-          <a:bodyPr rtlCol="0" anchor="ctr"/>
-          <a:lstStyle/>
-          <a:p>
-            <a:pPr algn="ctr"/>
-          </a:p>
-        </p:txBody>
-      </p:sp>
-      <p:sp>
-        <p:nvSpPr>
-          <p:cNvPr id="40" name="TextBox 39"/>
-          <p:cNvSpPr txBox="1"/>
-          <p:nvPr/>
-        </p:nvSpPr>
-        <p:spPr>
-          <a:xfrm>
-            <a:off x="457200" y="4636007"/>
-            <a:ext cx="2926080" cy="292608"/>
-          </a:xfrm>
-          <a:prstGeom prst="rect">
-            <a:avLst/>
-          </a:prstGeom>
-          <a:noFill/>
-        </p:spPr>
-        <p:txBody>
-          <a:bodyPr wrap="square">
-            <a:spAutoFit/>
-          </a:bodyPr>
-          <a:lstStyle/>
-          <a:p>
-            <a:pPr algn="l"/>
-            <a:r>
-              <a:rPr sz="1300" b="1" i="0">
-                <a:solidFill>
-                  <a:srgbClr val="1A2440"/>
-                </a:solidFill>
-              </a:rPr>
-              <a:t>Penthievre alambics</a:t>
-            </a:r>
-          </a:p>
-        </p:txBody>
-      </p:sp>
-      <p:sp>
-        <p:nvSpPr>
-          <p:cNvPr id="41" name="Rectangle 40"/>
-          <p:cNvSpPr/>
-          <p:nvPr/>
-        </p:nvSpPr>
-        <p:spPr>
-          <a:xfrm>
-            <a:off x="457200" y="5056631"/>
-            <a:ext cx="1188720" cy="329184"/>
-          </a:xfrm>
-          <a:prstGeom prst="rect">
-            <a:avLst/>
-          </a:prstGeom>
-          <a:solidFill>
-            <a:srgbClr val="D62839"/>
-          </a:solidFill>
-          <a:ln>
-            <a:noFill/>
-          </a:ln>
-        </p:spPr>
-        <p:style>
-          <a:lnRef idx="1">
-            <a:schemeClr val="accent1"/>
-          </a:lnRef>
-          <a:fillRef idx="3">
-            <a:schemeClr val="accent1"/>
-          </a:fillRef>
-          <a:effectRef idx="2">
-            <a:schemeClr val="accent1"/>
-          </a:effectRef>
-          <a:fontRef idx="minor">
-            <a:schemeClr val="lt1"/>
-          </a:fontRef>
-        </p:style>
-        <p:txBody>
-          <a:bodyPr rtlCol="0" anchor="ctr"/>
-          <a:lstStyle/>
-          <a:p>
-            <a:pPr algn="ctr"/>
-          </a:p>
-        </p:txBody>
-      </p:sp>
-      <p:sp>
-        <p:nvSpPr>
-          <p:cNvPr id="42" name="TextBox 41"/>
-          <p:cNvSpPr txBox="1"/>
-          <p:nvPr/>
-        </p:nvSpPr>
-        <p:spPr>
-          <a:xfrm>
-            <a:off x="457200" y="5056631"/>
-            <a:ext cx="1188720" cy="329184"/>
-          </a:xfrm>
-          <a:prstGeom prst="rect">
-            <a:avLst/>
-          </a:prstGeom>
-          <a:noFill/>
-        </p:spPr>
-        <p:txBody>
-          <a:bodyPr wrap="square">
-            <a:spAutoFit/>
-          </a:bodyPr>
-          <a:lstStyle/>
-          <a:p>
-            <a:pPr algn="ctr"/>
-            <a:r>
-              <a:rPr sz="1700" b="1" i="0">
-                <a:solidFill>
-                  <a:srgbClr val="FFFFFF"/>
-                </a:solidFill>
-              </a:rPr>
-              <a:t>78/100</a:t>
-            </a:r>
-          </a:p>
-        </p:txBody>
-      </p:sp>
-      <p:sp>
-        <p:nvSpPr>
-          <p:cNvPr id="43" name="TextBox 42"/>
-          <p:cNvSpPr txBox="1"/>
-          <p:nvPr/>
-        </p:nvSpPr>
-        <p:spPr>
-          <a:xfrm>
-            <a:off x="3630168" y="4636007"/>
-            <a:ext cx="3154680" cy="256032"/>
-          </a:xfrm>
-          <a:prstGeom prst="rect">
-            <a:avLst/>
-          </a:prstGeom>
-          <a:noFill/>
-        </p:spPr>
-        <p:txBody>
-          <a:bodyPr wrap="square">
-            <a:spAutoFit/>
-          </a:bodyPr>
-          <a:lstStyle/>
-          <a:p>
-            <a:pPr algn="l"/>
-            <a:r>
-              <a:rPr sz="1000" b="1" i="0">
-                <a:solidFill>
-                  <a:srgbClr val="D62839"/>
-                </a:solidFill>
-              </a:rPr>
-              <a:t>Co-billing · billing spike · round numbers</a:t>
-            </a:r>
-          </a:p>
-        </p:txBody>
-      </p:sp>
-      <p:sp>
-        <p:nvSpPr>
-          <p:cNvPr id="44" name="TextBox 43"/>
-          <p:cNvSpPr txBox="1"/>
-          <p:nvPr/>
-        </p:nvSpPr>
-        <p:spPr>
-          <a:xfrm>
-            <a:off x="3630168" y="4928616"/>
-            <a:ext cx="3154680" cy="457200"/>
-          </a:xfrm>
-          <a:prstGeom prst="rect">
-            <a:avLst/>
-          </a:prstGeom>
-          <a:noFill/>
-        </p:spPr>
-        <p:txBody>
-          <a:bodyPr wrap="square">
-            <a:spAutoFit/>
-          </a:bodyPr>
-          <a:lstStyle/>
-          <a:p>
-            <a:pPr algn="l"/>
-            <a:r>
-              <a:rPr sz="900" b="0" i="0">
-                <a:solidFill>
-                  <a:srgbClr val="444444"/>
-                </a:solidFill>
-              </a:rPr>
-              <a:t>94% co-billing rate — highest in dataset. 2 spike months.</a:t>
-            </a:r>
-          </a:p>
-        </p:txBody>
-      </p:sp>
-      <p:sp>
-        <p:nvSpPr>
-          <p:cNvPr id="45" name="TextBox 44"/>
-          <p:cNvSpPr txBox="1"/>
-          <p:nvPr/>
-        </p:nvSpPr>
-        <p:spPr>
-          <a:xfrm>
-            <a:off x="7013448" y="4782312"/>
-            <a:ext cx="4754880" cy="457200"/>
-          </a:xfrm>
-          <a:prstGeom prst="rect">
-            <a:avLst/>
-          </a:prstGeom>
-          <a:noFill/>
-        </p:spPr>
-        <p:txBody>
-          <a:bodyPr wrap="square">
-            <a:spAutoFit/>
-          </a:bodyPr>
-          <a:lstStyle/>
-          <a:p>
-            <a:pPr algn="l"/>
-            <a:r>
-              <a:rPr sz="1000" b="1" i="0">
-                <a:solidFill>
-                  <a:srgbClr val="1A2440"/>
-                </a:solidFill>
-              </a:rPr>
-              <a:t>Full audit + suspend all pending payments</a:t>
-            </a:r>
-          </a:p>
-        </p:txBody>
-      </p:sp>
-      <p:sp>
-        <p:nvSpPr>
-          <p:cNvPr id="46" name="Rectangle 45"/>
-          <p:cNvSpPr/>
-          <p:nvPr/>
-        </p:nvSpPr>
-        <p:spPr>
-          <a:xfrm>
-            <a:off x="274320" y="5513832"/>
-            <a:ext cx="11640312" cy="896112"/>
-          </a:xfrm>
-          <a:prstGeom prst="rect">
-            <a:avLst/>
-          </a:prstGeom>
-          <a:solidFill>
-            <a:srgbClr val="FFEBEB"/>
-          </a:solidFill>
-          <a:ln>
-            <a:noFill/>
-          </a:ln>
-        </p:spPr>
-        <p:style>
-          <a:lnRef idx="1">
-            <a:schemeClr val="accent1"/>
-          </a:lnRef>
-          <a:fillRef idx="3">
-            <a:schemeClr val="accent1"/>
-          </a:fillRef>
-          <a:effectRef idx="2">
-            <a:schemeClr val="accent1"/>
-          </a:effectRef>
-          <a:fontRef idx="minor">
-            <a:schemeClr val="lt1"/>
-          </a:fontRef>
-        </p:style>
-        <p:txBody>
-          <a:bodyPr rtlCol="0" anchor="ctr"/>
-          <a:lstStyle/>
-          <a:p>
-            <a:pPr algn="ctr"/>
-          </a:p>
-        </p:txBody>
-      </p:sp>
-      <p:sp>
-        <p:nvSpPr>
-          <p:cNvPr id="47" name="Rectangle 46"/>
-          <p:cNvSpPr/>
-          <p:nvPr/>
-        </p:nvSpPr>
-        <p:spPr>
-          <a:xfrm>
-            <a:off x="274320" y="5513832"/>
-            <a:ext cx="91440" cy="896112"/>
-          </a:xfrm>
-          <a:prstGeom prst="rect">
-            <a:avLst/>
-          </a:prstGeom>
-          <a:solidFill>
-            <a:srgbClr val="D62839"/>
-          </a:solidFill>
-          <a:ln>
-            <a:noFill/>
-          </a:ln>
-        </p:spPr>
-        <p:style>
-          <a:lnRef idx="1">
-            <a:schemeClr val="accent1"/>
-          </a:lnRef>
-          <a:fillRef idx="3">
-            <a:schemeClr val="accent1"/>
-          </a:fillRef>
-          <a:effectRef idx="2">
-            <a:schemeClr val="accent1"/>
-          </a:effectRef>
-          <a:fontRef idx="minor">
-            <a:schemeClr val="lt1"/>
-          </a:fontRef>
-        </p:style>
-        <p:txBody>
-          <a:bodyPr rtlCol="0" anchor="ctr"/>
-          <a:lstStyle/>
-          <a:p>
-            <a:pPr algn="ctr"/>
-          </a:p>
-        </p:txBody>
-      </p:sp>
-      <p:sp>
-        <p:nvSpPr>
-          <p:cNvPr id="48" name="TextBox 47"/>
-          <p:cNvSpPr txBox="1"/>
-          <p:nvPr/>
-        </p:nvSpPr>
-        <p:spPr>
-          <a:xfrm>
-            <a:off x="457200" y="5568696"/>
-            <a:ext cx="2926080" cy="292608"/>
-          </a:xfrm>
-          <a:prstGeom prst="rect">
-            <a:avLst/>
-          </a:prstGeom>
-          <a:noFill/>
-        </p:spPr>
-        <p:txBody>
-          <a:bodyPr wrap="square">
-            <a:spAutoFit/>
-          </a:bodyPr>
-          <a:lstStyle/>
-          <a:p>
-            <a:pPr algn="l"/>
-            <a:r>
-              <a:rPr sz="1300" b="1" i="0">
-                <a:solidFill>
-                  <a:srgbClr val="1A2440"/>
-                </a:solidFill>
-              </a:rPr>
-              <a:t>Runner glasses</a:t>
-            </a:r>
-          </a:p>
-        </p:txBody>
-      </p:sp>
-      <p:sp>
-        <p:nvSpPr>
-          <p:cNvPr id="49" name="Rectangle 48"/>
-          <p:cNvSpPr/>
-          <p:nvPr/>
-        </p:nvSpPr>
-        <p:spPr>
-          <a:xfrm>
-            <a:off x="457200" y="5989320"/>
-            <a:ext cx="1188720" cy="329184"/>
-          </a:xfrm>
-          <a:prstGeom prst="rect">
-            <a:avLst/>
-          </a:prstGeom>
-          <a:solidFill>
-            <a:srgbClr val="D62839"/>
-          </a:solidFill>
-          <a:ln>
-            <a:noFill/>
-          </a:ln>
-        </p:spPr>
-        <p:style>
-          <a:lnRef idx="1">
-            <a:schemeClr val="accent1"/>
-          </a:lnRef>
-          <a:fillRef idx="3">
-            <a:schemeClr val="accent1"/>
-          </a:fillRef>
-          <a:effectRef idx="2">
-            <a:schemeClr val="accent1"/>
-          </a:effectRef>
-          <a:fontRef idx="minor">
-            <a:schemeClr val="lt1"/>
-          </a:fontRef>
-        </p:style>
-        <p:txBody>
-          <a:bodyPr rtlCol="0" anchor="ctr"/>
-          <a:lstStyle/>
-          <a:p>
-            <a:pPr algn="ctr"/>
-          </a:p>
-        </p:txBody>
-      </p:sp>
-      <p:sp>
-        <p:nvSpPr>
-          <p:cNvPr id="50" name="TextBox 49"/>
-          <p:cNvSpPr txBox="1"/>
-          <p:nvPr/>
-        </p:nvSpPr>
-        <p:spPr>
-          <a:xfrm>
-            <a:off x="457200" y="5989320"/>
-            <a:ext cx="1188720" cy="329184"/>
-          </a:xfrm>
-          <a:prstGeom prst="rect">
-            <a:avLst/>
-          </a:prstGeom>
-          <a:noFill/>
-        </p:spPr>
-        <p:txBody>
-          <a:bodyPr wrap="square">
-            <a:spAutoFit/>
-          </a:bodyPr>
-          <a:lstStyle/>
-          <a:p>
-            <a:pPr algn="ctr"/>
-            <a:r>
-              <a:rPr sz="1700" b="1" i="0">
-                <a:solidFill>
-                  <a:srgbClr val="FFFFFF"/>
-                </a:solidFill>
-              </a:rPr>
-              <a:t>74/100</a:t>
-            </a:r>
-          </a:p>
-        </p:txBody>
-      </p:sp>
-      <p:sp>
-        <p:nvSpPr>
-          <p:cNvPr id="51" name="TextBox 50"/>
-          <p:cNvSpPr txBox="1"/>
-          <p:nvPr/>
-        </p:nvSpPr>
-        <p:spPr>
-          <a:xfrm>
-            <a:off x="3630168" y="5568696"/>
-            <a:ext cx="3154680" cy="256032"/>
-          </a:xfrm>
-          <a:prstGeom prst="rect">
-            <a:avLst/>
-          </a:prstGeom>
-          <a:noFill/>
-        </p:spPr>
-        <p:txBody>
-          <a:bodyPr wrap="square">
-            <a:spAutoFit/>
-          </a:bodyPr>
-          <a:lstStyle/>
-          <a:p>
-            <a:pPr algn="l"/>
-            <a:r>
-              <a:rPr sz="1000" b="1" i="0">
-                <a:solidFill>
-                  <a:srgbClr val="D62839"/>
-                </a:solidFill>
-              </a:rPr>
-              <a:t>Co-billing · repeated amounts · round numbers</a:t>
-            </a:r>
-          </a:p>
-        </p:txBody>
-      </p:sp>
-      <p:sp>
-        <p:nvSpPr>
-          <p:cNvPr id="52" name="TextBox 51"/>
-          <p:cNvSpPr txBox="1"/>
-          <p:nvPr/>
-        </p:nvSpPr>
-        <p:spPr>
-          <a:xfrm>
-            <a:off x="3630168" y="5861304"/>
-            <a:ext cx="3154680" cy="457200"/>
-          </a:xfrm>
-          <a:prstGeom prst="rect">
-            <a:avLst/>
-          </a:prstGeom>
-          <a:noFill/>
-        </p:spPr>
-        <p:txBody>
-          <a:bodyPr wrap="square">
-            <a:spAutoFit/>
-          </a:bodyPr>
-          <a:lstStyle/>
-          <a:p>
-            <a:pPr algn="l"/>
-            <a:r>
-              <a:rPr sz="900" b="0" i="0">
-                <a:solidFill>
-                  <a:srgbClr val="444444"/>
-                </a:solidFill>
-              </a:rPr>
-              <a:t>55% co-billing. 3 repeated-amount patterns. All contacts: exact round euros.</a:t>
-            </a:r>
-          </a:p>
-        </p:txBody>
-      </p:sp>
-      <p:sp>
-        <p:nvSpPr>
-          <p:cNvPr id="53" name="TextBox 52"/>
-          <p:cNvSpPr txBox="1"/>
-          <p:nvPr/>
-        </p:nvSpPr>
-        <p:spPr>
-          <a:xfrm>
-            <a:off x="7013448" y="5715000"/>
-            <a:ext cx="4754880" cy="457200"/>
-          </a:xfrm>
-          <a:prstGeom prst="rect">
-            <a:avLst/>
-          </a:prstGeom>
-          <a:noFill/>
-        </p:spPr>
-        <p:txBody>
-          <a:bodyPr wrap="square">
-            <a:spAutoFit/>
-          </a:bodyPr>
-          <a:lstStyle/>
-          <a:p>
-            <a:pPr algn="l"/>
-            <a:r>
-              <a:rPr sz="1000" b="1" i="0">
-                <a:solidFill>
-                  <a:srgbClr val="1A2440"/>
-                </a:solidFill>
-              </a:rPr>
-              <a:t>Audit focus on fabricated contacts charges</a:t>
+          <p:cNvPr id="26" name="TextBox 25"/>
+          <p:cNvSpPr txBox="1"/>
+          <p:nvPr/>
+        </p:nvSpPr>
+        <p:spPr>
+          <a:xfrm>
+            <a:off x="594360" y="5166360"/>
+            <a:ext cx="10972800" cy="292608"/>
+          </a:xfrm>
+          <a:prstGeom prst="rect">
+            <a:avLst/>
+          </a:prstGeom>
+          <a:noFill/>
+        </p:spPr>
+        <p:txBody>
+          <a:bodyPr wrap="none">
+            <a:spAutoFit/>
+          </a:bodyPr>
+          <a:lstStyle/>
+          <a:p>
+            <a:pPr algn="ctr"/>
+            <a:r>
+              <a:rPr sz="1100" b="1">
+                <a:solidFill>
+                  <a:srgbClr val="F5A623"/>
+                </a:solidFill>
+                <a:hlinkClick r:id="rId2"/>
+              </a:rPr>
+              <a:t>🌐  Live demo:  alan-production-0d14.up.railway.app</a:t>
             </a:r>
           </a:p>
         </p:txBody>
@@ -9040,7 +10749,7 @@
         <p:spPr>
           <a:xfrm>
             <a:off x="0" y="0"/>
-            <a:ext cx="12188952" cy="960120"/>
+            <a:ext cx="12188952" cy="6858000"/>
           </a:xfrm>
           <a:prstGeom prst="rect">
             <a:avLst/>
@@ -9082,8 +10791,51 @@
         </p:nvSpPr>
         <p:spPr>
           <a:xfrm>
-            <a:off x="320040" y="118872"/>
-            <a:ext cx="1097280" cy="292608"/>
+            <a:off x="0" y="5303520"/>
+            <a:ext cx="12188952" cy="1554480"/>
+          </a:xfrm>
+          <a:prstGeom prst="rect">
+            <a:avLst/>
+          </a:prstGeom>
+          <a:solidFill>
+            <a:srgbClr val="D62839"/>
+          </a:solidFill>
+          <a:ln>
+            <a:noFill/>
+          </a:ln>
+        </p:spPr>
+        <p:style>
+          <a:lnRef idx="1">
+            <a:schemeClr val="accent1"/>
+          </a:lnRef>
+          <a:fillRef idx="3">
+            <a:schemeClr val="accent1"/>
+          </a:fillRef>
+          <a:effectRef idx="2">
+            <a:schemeClr val="accent1"/>
+          </a:effectRef>
+          <a:fontRef idx="minor">
+            <a:schemeClr val="lt1"/>
+          </a:fontRef>
+        </p:style>
+        <p:txBody>
+          <a:bodyPr rtlCol="0" anchor="ctr"/>
+          <a:lstStyle/>
+          <a:p>
+            <a:pPr algn="ctr"/>
+          </a:p>
+        </p:txBody>
+      </p:sp>
+      <p:sp>
+        <p:nvSpPr>
+          <p:cNvPr id="4" name="Rectangle 3"/>
+          <p:cNvSpPr/>
+          <p:nvPr/>
+        </p:nvSpPr>
+        <p:spPr>
+          <a:xfrm>
+            <a:off x="0" y="0"/>
+            <a:ext cx="164592" cy="6858000"/>
           </a:xfrm>
           <a:prstGeom prst="rect">
             <a:avLst/>
@@ -9119,88 +10871,20 @@
       </p:sp>
       <p:sp>
         <p:nvSpPr>
-          <p:cNvPr id="4" name="TextBox 3"/>
-          <p:cNvSpPr txBox="1"/>
-          <p:nvPr/>
-        </p:nvSpPr>
-        <p:spPr>
-          <a:xfrm>
-            <a:off x="320040" y="118872"/>
-            <a:ext cx="1097280" cy="292608"/>
-          </a:xfrm>
-          <a:prstGeom prst="rect">
-            <a:avLst/>
-          </a:prstGeom>
-          <a:noFill/>
-        </p:spPr>
-        <p:txBody>
-          <a:bodyPr wrap="square">
-            <a:spAutoFit/>
-          </a:bodyPr>
-          <a:lstStyle/>
-          <a:p>
-            <a:pPr algn="ctr"/>
-            <a:r>
-              <a:rPr sz="900" b="1" i="0">
-                <a:solidFill>
-                  <a:srgbClr val="1A2440"/>
-                </a:solidFill>
-              </a:rPr>
-              <a:t>Q3</a:t>
-            </a:r>
-          </a:p>
-        </p:txBody>
-      </p:sp>
-      <p:sp>
-        <p:nvSpPr>
-          <p:cNvPr id="5" name="TextBox 4"/>
-          <p:cNvSpPr txBox="1"/>
-          <p:nvPr/>
-        </p:nvSpPr>
-        <p:spPr>
-          <a:xfrm>
-            <a:off x="1554480" y="73152"/>
-            <a:ext cx="10332720" cy="594360"/>
-          </a:xfrm>
-          <a:prstGeom prst="rect">
-            <a:avLst/>
-          </a:prstGeom>
-          <a:noFill/>
-        </p:spPr>
-        <p:txBody>
-          <a:bodyPr wrap="square">
-            <a:spAutoFit/>
-          </a:bodyPr>
-          <a:lstStyle/>
-          <a:p>
-            <a:pPr algn="l"/>
-            <a:r>
-              <a:rPr sz="2400" b="1" i="0">
-                <a:solidFill>
-                  <a:srgbClr val="FFFFFF"/>
-                </a:solidFill>
-              </a:rPr>
-              <a:t>Under Review &amp; Cleared Providers</a:t>
-            </a:r>
-          </a:p>
-        </p:txBody>
-      </p:sp>
-      <p:sp>
-        <p:nvSpPr>
-          <p:cNvPr id="6" name="Rectangle 5"/>
+          <p:cNvPr id="5" name="Rectangle 4"/>
           <p:cNvSpPr/>
           <p:nvPr/>
         </p:nvSpPr>
         <p:spPr>
           <a:xfrm>
-            <a:off x="0" y="960120"/>
-            <a:ext cx="12188952" cy="347472"/>
+            <a:off x="457200" y="1463040"/>
+            <a:ext cx="2011680" cy="502920"/>
           </a:xfrm>
           <a:prstGeom prst="rect">
             <a:avLst/>
           </a:prstGeom>
           <a:solidFill>
-            <a:srgbClr val="F5F5F5"/>
+            <a:srgbClr val="F5A623"/>
           </a:solidFill>
           <a:ln>
             <a:noFill/>
@@ -9230,78 +10914,104 @@
       </p:sp>
       <p:sp>
         <p:nvSpPr>
+          <p:cNvPr id="6" name="TextBox 5"/>
+          <p:cNvSpPr txBox="1"/>
+          <p:nvPr/>
+        </p:nvSpPr>
+        <p:spPr>
+          <a:xfrm>
+            <a:off x="457200" y="1463040"/>
+            <a:ext cx="2011680" cy="502920"/>
+          </a:xfrm>
+          <a:prstGeom prst="rect">
+            <a:avLst/>
+          </a:prstGeom>
+          <a:noFill/>
+        </p:spPr>
+        <p:txBody>
+          <a:bodyPr wrap="square">
+            <a:spAutoFit/>
+          </a:bodyPr>
+          <a:lstStyle/>
+          <a:p>
+            <a:pPr algn="ctr"/>
+            <a:r>
+              <a:rPr sz="1300" b="1" i="0">
+                <a:solidFill>
+                  <a:srgbClr val="1A2440"/>
+                </a:solidFill>
+              </a:rPr>
+              <a:t>QUESTION 3</a:t>
+            </a:r>
+          </a:p>
+        </p:txBody>
+      </p:sp>
+      <p:sp>
+        <p:nvSpPr>
           <p:cNvPr id="7" name="TextBox 6"/>
           <p:cNvSpPr txBox="1"/>
           <p:nvPr/>
         </p:nvSpPr>
         <p:spPr>
           <a:xfrm>
-            <a:off x="365760" y="987552"/>
-            <a:ext cx="11430000" cy="301752"/>
-          </a:xfrm>
-          <a:prstGeom prst="rect">
-            <a:avLst/>
-          </a:prstGeom>
-          <a:noFill/>
-        </p:spPr>
-        <p:txBody>
-          <a:bodyPr wrap="square">
-            <a:spAutoFit/>
-          </a:bodyPr>
-          <a:lstStyle/>
-          <a:p>
-            <a:pPr algn="l"/>
-            <a:r>
-              <a:rPr sz="1200" b="0" i="1">
-                <a:solidFill>
-                  <a:srgbClr val="444444"/>
-                </a:solidFill>
-              </a:rPr>
-              <a:t>3 providers flagged for manual review · 4 providers fully cleared with no suspicious patterns</a:t>
-            </a:r>
-          </a:p>
-        </p:txBody>
-      </p:sp>
-      <p:sp>
-        <p:nvSpPr>
-          <p:cNvPr id="8" name="Rectangle 7"/>
-          <p:cNvSpPr/>
-          <p:nvPr/>
-        </p:nvSpPr>
-        <p:spPr>
-          <a:xfrm>
-            <a:off x="0" y="6510528"/>
-            <a:ext cx="12188952" cy="347472"/>
-          </a:xfrm>
-          <a:prstGeom prst="rect">
-            <a:avLst/>
-          </a:prstGeom>
-          <a:solidFill>
-            <a:srgbClr val="1A2440"/>
-          </a:solidFill>
-          <a:ln>
-            <a:noFill/>
-          </a:ln>
-        </p:spPr>
-        <p:style>
-          <a:lnRef idx="1">
-            <a:schemeClr val="accent1"/>
-          </a:lnRef>
-          <a:fillRef idx="3">
-            <a:schemeClr val="accent1"/>
-          </a:fillRef>
-          <a:effectRef idx="2">
-            <a:schemeClr val="accent1"/>
-          </a:effectRef>
-          <a:fontRef idx="minor">
-            <a:schemeClr val="lt1"/>
-          </a:fontRef>
-        </p:style>
-        <p:txBody>
-          <a:bodyPr rtlCol="0" anchor="ctr"/>
-          <a:lstStyle/>
-          <a:p>
-            <a:pPr algn="ctr"/>
+            <a:off x="457200" y="2103120"/>
+            <a:ext cx="11430000" cy="457200"/>
+          </a:xfrm>
+          <a:prstGeom prst="rect">
+            <a:avLst/>
+          </a:prstGeom>
+          <a:noFill/>
+        </p:spPr>
+        <p:txBody>
+          <a:bodyPr wrap="square">
+            <a:spAutoFit/>
+          </a:bodyPr>
+          <a:lstStyle/>
+          <a:p>
+            <a:pPr algn="l"/>
+            <a:r>
+              <a:rPr sz="1600" b="0" i="1">
+                <a:solidFill>
+                  <a:srgbClr val="CCCCCC"/>
+                </a:solidFill>
+              </a:rPr>
+              <a:t>Based on your analysis, what proactive actions would you take or initiate to prevent similar fraud in the future?</a:t>
+            </a:r>
+          </a:p>
+        </p:txBody>
+      </p:sp>
+      <p:sp>
+        <p:nvSpPr>
+          <p:cNvPr id="8" name="TextBox 7"/>
+          <p:cNvSpPr txBox="1"/>
+          <p:nvPr/>
+        </p:nvSpPr>
+        <p:spPr>
+          <a:xfrm>
+            <a:off x="457200" y="2697480"/>
+            <a:ext cx="11430000" cy="1371600"/>
+          </a:xfrm>
+          <a:prstGeom prst="rect">
+            <a:avLst/>
+          </a:prstGeom>
+          <a:noFill/>
+        </p:spPr>
+        <p:txBody>
+          <a:bodyPr wrap="square">
+            <a:spAutoFit/>
+          </a:bodyPr>
+          <a:lstStyle/>
+          <a:p>
+            <a:pPr algn="l"/>
+            <a:r>
+              <a:rPr sz="4000" b="1" i="0">
+                <a:solidFill>
+                  <a:srgbClr val="FFFFFF"/>
+                </a:solidFill>
+              </a:rPr>
+              <a:t>Better data, ongoing
+monitoring, smarter rules</a:t>
+            </a:r>
           </a:p>
         </p:txBody>
       </p:sp>
@@ -9313,1737 +11023,28 @@
         </p:nvSpPr>
         <p:spPr>
           <a:xfrm>
-            <a:off x="274320" y="6519672"/>
-            <a:ext cx="11612880" cy="329184"/>
-          </a:xfrm>
-          <a:prstGeom prst="rect">
-            <a:avLst/>
-          </a:prstGeom>
-          <a:noFill/>
-        </p:spPr>
-        <p:txBody>
-          <a:bodyPr wrap="square">
-            <a:spAutoFit/>
-          </a:bodyPr>
-          <a:lstStyle/>
-          <a:p>
-            <a:pPr algn="ctr"/>
-            <a:r>
-              <a:rPr sz="900" b="0" i="0">
+            <a:off x="457200" y="5440680"/>
+            <a:ext cx="11430000" cy="548640"/>
+          </a:xfrm>
+          <a:prstGeom prst="rect">
+            <a:avLst/>
+          </a:prstGeom>
+          <a:noFill/>
+        </p:spPr>
+        <p:txBody>
+          <a:bodyPr wrap="square">
+            <a:spAutoFit/>
+          </a:bodyPr>
+          <a:lstStyle/>
+          <a:p>
+            <a:pPr algn="l"/>
+            <a:r>
+              <a:rPr sz="1300" b="0" i="1">
                 <a:solidFill>
                   <a:srgbClr val="FFFFFF"/>
                 </a:solidFill>
               </a:rPr>
-              <a:t>Alan Assurance · Fraud Detection Case · 2024</a:t>
-            </a:r>
-          </a:p>
-        </p:txBody>
-      </p:sp>
-      <p:sp>
-        <p:nvSpPr>
-          <p:cNvPr id="10" name="Rectangle 9"/>
-          <p:cNvSpPr/>
-          <p:nvPr/>
-        </p:nvSpPr>
-        <p:spPr>
-          <a:xfrm>
-            <a:off x="274320" y="1417320"/>
-            <a:ext cx="11640312" cy="320040"/>
-          </a:xfrm>
-          <a:prstGeom prst="rect">
-            <a:avLst/>
-          </a:prstGeom>
-          <a:solidFill>
-            <a:srgbClr val="E07B39"/>
-          </a:solidFill>
-          <a:ln>
-            <a:noFill/>
-          </a:ln>
-        </p:spPr>
-        <p:style>
-          <a:lnRef idx="1">
-            <a:schemeClr val="accent1"/>
-          </a:lnRef>
-          <a:fillRef idx="3">
-            <a:schemeClr val="accent1"/>
-          </a:fillRef>
-          <a:effectRef idx="2">
-            <a:schemeClr val="accent1"/>
-          </a:effectRef>
-          <a:fontRef idx="minor">
-            <a:schemeClr val="lt1"/>
-          </a:fontRef>
-        </p:style>
-        <p:txBody>
-          <a:bodyPr rtlCol="0" anchor="ctr"/>
-          <a:lstStyle/>
-          <a:p>
-            <a:pPr algn="ctr"/>
-          </a:p>
-        </p:txBody>
-      </p:sp>
-      <p:sp>
-        <p:nvSpPr>
-          <p:cNvPr id="11" name="TextBox 10"/>
-          <p:cNvSpPr txBox="1"/>
-          <p:nvPr/>
-        </p:nvSpPr>
-        <p:spPr>
-          <a:xfrm>
-            <a:off x="411480" y="1444752"/>
-            <a:ext cx="11247120" cy="256032"/>
-          </a:xfrm>
-          <a:prstGeom prst="rect">
-            <a:avLst/>
-          </a:prstGeom>
-          <a:noFill/>
-        </p:spPr>
-        <p:txBody>
-          <a:bodyPr wrap="square">
-            <a:spAutoFit/>
-          </a:bodyPr>
-          <a:lstStyle/>
-          <a:p>
-            <a:pPr algn="l"/>
-            <a:r>
-              <a:rPr sz="1100" b="1" i="0">
-                <a:solidFill>
-                  <a:srgbClr val="FFFFFF"/>
-                </a:solidFill>
-              </a:rPr>
-              <a:t>Flagged for manual review  —  score below auto-hold threshold but patterns present</a:t>
-            </a:r>
-          </a:p>
-        </p:txBody>
-      </p:sp>
-      <p:sp>
-        <p:nvSpPr>
-          <p:cNvPr id="12" name="Rectangle 11"/>
-          <p:cNvSpPr/>
-          <p:nvPr/>
-        </p:nvSpPr>
-        <p:spPr>
-          <a:xfrm>
-            <a:off x="274320" y="1783080"/>
-            <a:ext cx="11640312" cy="749808"/>
-          </a:xfrm>
-          <a:prstGeom prst="rect">
-            <a:avLst/>
-          </a:prstGeom>
-          <a:solidFill>
-            <a:srgbClr val="FFF3E6"/>
-          </a:solidFill>
-          <a:ln>
-            <a:noFill/>
-          </a:ln>
-        </p:spPr>
-        <p:style>
-          <a:lnRef idx="1">
-            <a:schemeClr val="accent1"/>
-          </a:lnRef>
-          <a:fillRef idx="3">
-            <a:schemeClr val="accent1"/>
-          </a:fillRef>
-          <a:effectRef idx="2">
-            <a:schemeClr val="accent1"/>
-          </a:effectRef>
-          <a:fontRef idx="minor">
-            <a:schemeClr val="lt1"/>
-          </a:fontRef>
-        </p:style>
-        <p:txBody>
-          <a:bodyPr rtlCol="0" anchor="ctr"/>
-          <a:lstStyle/>
-          <a:p>
-            <a:pPr algn="ctr"/>
-          </a:p>
-        </p:txBody>
-      </p:sp>
-      <p:sp>
-        <p:nvSpPr>
-          <p:cNvPr id="13" name="Rectangle 12"/>
-          <p:cNvSpPr/>
-          <p:nvPr/>
-        </p:nvSpPr>
-        <p:spPr>
-          <a:xfrm>
-            <a:off x="274320" y="1783080"/>
-            <a:ext cx="91440" cy="749808"/>
-          </a:xfrm>
-          <a:prstGeom prst="rect">
-            <a:avLst/>
-          </a:prstGeom>
-          <a:solidFill>
-            <a:srgbClr val="E07B39"/>
-          </a:solidFill>
-          <a:ln>
-            <a:noFill/>
-          </a:ln>
-        </p:spPr>
-        <p:style>
-          <a:lnRef idx="1">
-            <a:schemeClr val="accent1"/>
-          </a:lnRef>
-          <a:fillRef idx="3">
-            <a:schemeClr val="accent1"/>
-          </a:fillRef>
-          <a:effectRef idx="2">
-            <a:schemeClr val="accent1"/>
-          </a:effectRef>
-          <a:fontRef idx="minor">
-            <a:schemeClr val="lt1"/>
-          </a:fontRef>
-        </p:style>
-        <p:txBody>
-          <a:bodyPr rtlCol="0" anchor="ctr"/>
-          <a:lstStyle/>
-          <a:p>
-            <a:pPr algn="ctr"/>
-          </a:p>
-        </p:txBody>
-      </p:sp>
-      <p:sp>
-        <p:nvSpPr>
-          <p:cNvPr id="14" name="Rectangle 13"/>
-          <p:cNvSpPr/>
-          <p:nvPr/>
-        </p:nvSpPr>
-        <p:spPr>
-          <a:xfrm>
-            <a:off x="457200" y="1984248"/>
-            <a:ext cx="1188720" cy="329184"/>
-          </a:xfrm>
-          <a:prstGeom prst="rect">
-            <a:avLst/>
-          </a:prstGeom>
-          <a:solidFill>
-            <a:srgbClr val="E07B39"/>
-          </a:solidFill>
-          <a:ln>
-            <a:noFill/>
-          </a:ln>
-        </p:spPr>
-        <p:style>
-          <a:lnRef idx="1">
-            <a:schemeClr val="accent1"/>
-          </a:lnRef>
-          <a:fillRef idx="3">
-            <a:schemeClr val="accent1"/>
-          </a:fillRef>
-          <a:effectRef idx="2">
-            <a:schemeClr val="accent1"/>
-          </a:effectRef>
-          <a:fontRef idx="minor">
-            <a:schemeClr val="lt1"/>
-          </a:fontRef>
-        </p:style>
-        <p:txBody>
-          <a:bodyPr rtlCol="0" anchor="ctr"/>
-          <a:lstStyle/>
-          <a:p>
-            <a:pPr algn="ctr"/>
-          </a:p>
-        </p:txBody>
-      </p:sp>
-      <p:sp>
-        <p:nvSpPr>
-          <p:cNvPr id="15" name="TextBox 14"/>
-          <p:cNvSpPr txBox="1"/>
-          <p:nvPr/>
-        </p:nvSpPr>
-        <p:spPr>
-          <a:xfrm>
-            <a:off x="457200" y="1984248"/>
-            <a:ext cx="1188720" cy="329184"/>
-          </a:xfrm>
-          <a:prstGeom prst="rect">
-            <a:avLst/>
-          </a:prstGeom>
-          <a:noFill/>
-        </p:spPr>
-        <p:txBody>
-          <a:bodyPr wrap="square">
-            <a:spAutoFit/>
-          </a:bodyPr>
-          <a:lstStyle/>
-          <a:p>
-            <a:pPr algn="ctr"/>
-            <a:r>
-              <a:rPr sz="1700" b="1" i="0">
-                <a:solidFill>
-                  <a:srgbClr val="FFFFFF"/>
-                </a:solidFill>
-              </a:rPr>
-              <a:t>54/100</a:t>
-            </a:r>
-          </a:p>
-        </p:txBody>
-      </p:sp>
-      <p:sp>
-        <p:nvSpPr>
-          <p:cNvPr id="16" name="TextBox 15"/>
-          <p:cNvSpPr txBox="1"/>
-          <p:nvPr/>
-        </p:nvSpPr>
-        <p:spPr>
-          <a:xfrm>
-            <a:off x="1828800" y="1837943"/>
-            <a:ext cx="3200400" cy="292608"/>
-          </a:xfrm>
-          <a:prstGeom prst="rect">
-            <a:avLst/>
-          </a:prstGeom>
-          <a:noFill/>
-        </p:spPr>
-        <p:txBody>
-          <a:bodyPr wrap="square">
-            <a:spAutoFit/>
-          </a:bodyPr>
-          <a:lstStyle/>
-          <a:p>
-            <a:pPr algn="l"/>
-            <a:r>
-              <a:rPr sz="1300" b="1" i="0">
-                <a:solidFill>
-                  <a:srgbClr val="1A2440"/>
-                </a:solidFill>
-              </a:rPr>
-              <a:t>Kylian's frames</a:t>
-            </a:r>
-          </a:p>
-        </p:txBody>
-      </p:sp>
-      <p:sp>
-        <p:nvSpPr>
-          <p:cNvPr id="17" name="TextBox 16"/>
-          <p:cNvSpPr txBox="1"/>
-          <p:nvPr/>
-        </p:nvSpPr>
-        <p:spPr>
-          <a:xfrm>
-            <a:off x="1828800" y="2167128"/>
-            <a:ext cx="3200400" cy="292608"/>
-          </a:xfrm>
-          <a:prstGeom prst="rect">
-            <a:avLst/>
-          </a:prstGeom>
-          <a:noFill/>
-        </p:spPr>
-        <p:txBody>
-          <a:bodyPr wrap="square">
-            <a:spAutoFit/>
-          </a:bodyPr>
-          <a:lstStyle/>
-          <a:p>
-            <a:pPr algn="l"/>
-            <a:r>
-              <a:rPr sz="900" b="1" i="0">
-                <a:solidFill>
-                  <a:srgbClr val="E07B39"/>
-                </a:solidFill>
-              </a:rPr>
-              <a:t>Co-billing (76%) · billing spike · round numbers</a:t>
-            </a:r>
-          </a:p>
-        </p:txBody>
-      </p:sp>
-      <p:sp>
-        <p:nvSpPr>
-          <p:cNvPr id="18" name="TextBox 17"/>
-          <p:cNvSpPr txBox="1"/>
-          <p:nvPr/>
-        </p:nvSpPr>
-        <p:spPr>
-          <a:xfrm>
-            <a:off x="5212080" y="1947672"/>
-            <a:ext cx="6492240" cy="502920"/>
-          </a:xfrm>
-          <a:prstGeom prst="rect">
-            <a:avLst/>
-          </a:prstGeom>
-          <a:noFill/>
-        </p:spPr>
-        <p:txBody>
-          <a:bodyPr wrap="square">
-            <a:spAutoFit/>
-          </a:bodyPr>
-          <a:lstStyle/>
-          <a:p>
-            <a:pPr algn="l"/>
-            <a:r>
-              <a:rPr sz="1000" b="0" i="0">
-                <a:solidFill>
-                  <a:srgbClr val="444444"/>
-                </a:solidFill>
-              </a:rPr>
-              <a:t>Below the 70-point hold threshold but has 3 signals. Recommend manual review before next payment cycle.</a:t>
-            </a:r>
-          </a:p>
-        </p:txBody>
-      </p:sp>
-      <p:sp>
-        <p:nvSpPr>
-          <p:cNvPr id="19" name="Rectangle 18"/>
-          <p:cNvSpPr/>
-          <p:nvPr/>
-        </p:nvSpPr>
-        <p:spPr>
-          <a:xfrm>
-            <a:off x="274320" y="2587752"/>
-            <a:ext cx="11640312" cy="749808"/>
-          </a:xfrm>
-          <a:prstGeom prst="rect">
-            <a:avLst/>
-          </a:prstGeom>
-          <a:solidFill>
-            <a:srgbClr val="FFF3E6"/>
-          </a:solidFill>
-          <a:ln>
-            <a:noFill/>
-          </a:ln>
-        </p:spPr>
-        <p:style>
-          <a:lnRef idx="1">
-            <a:schemeClr val="accent1"/>
-          </a:lnRef>
-          <a:fillRef idx="3">
-            <a:schemeClr val="accent1"/>
-          </a:fillRef>
-          <a:effectRef idx="2">
-            <a:schemeClr val="accent1"/>
-          </a:effectRef>
-          <a:fontRef idx="minor">
-            <a:schemeClr val="lt1"/>
-          </a:fontRef>
-        </p:style>
-        <p:txBody>
-          <a:bodyPr rtlCol="0" anchor="ctr"/>
-          <a:lstStyle/>
-          <a:p>
-            <a:pPr algn="ctr"/>
-          </a:p>
-        </p:txBody>
-      </p:sp>
-      <p:sp>
-        <p:nvSpPr>
-          <p:cNvPr id="20" name="Rectangle 19"/>
-          <p:cNvSpPr/>
-          <p:nvPr/>
-        </p:nvSpPr>
-        <p:spPr>
-          <a:xfrm>
-            <a:off x="274320" y="2587752"/>
-            <a:ext cx="91440" cy="749808"/>
-          </a:xfrm>
-          <a:prstGeom prst="rect">
-            <a:avLst/>
-          </a:prstGeom>
-          <a:solidFill>
-            <a:srgbClr val="E07B39"/>
-          </a:solidFill>
-          <a:ln>
-            <a:noFill/>
-          </a:ln>
-        </p:spPr>
-        <p:style>
-          <a:lnRef idx="1">
-            <a:schemeClr val="accent1"/>
-          </a:lnRef>
-          <a:fillRef idx="3">
-            <a:schemeClr val="accent1"/>
-          </a:fillRef>
-          <a:effectRef idx="2">
-            <a:schemeClr val="accent1"/>
-          </a:effectRef>
-          <a:fontRef idx="minor">
-            <a:schemeClr val="lt1"/>
-          </a:fontRef>
-        </p:style>
-        <p:txBody>
-          <a:bodyPr rtlCol="0" anchor="ctr"/>
-          <a:lstStyle/>
-          <a:p>
-            <a:pPr algn="ctr"/>
-          </a:p>
-        </p:txBody>
-      </p:sp>
-      <p:sp>
-        <p:nvSpPr>
-          <p:cNvPr id="21" name="Rectangle 20"/>
-          <p:cNvSpPr/>
-          <p:nvPr/>
-        </p:nvSpPr>
-        <p:spPr>
-          <a:xfrm>
-            <a:off x="457200" y="2788920"/>
-            <a:ext cx="1188720" cy="329184"/>
-          </a:xfrm>
-          <a:prstGeom prst="rect">
-            <a:avLst/>
-          </a:prstGeom>
-          <a:solidFill>
-            <a:srgbClr val="E07B39"/>
-          </a:solidFill>
-          <a:ln>
-            <a:noFill/>
-          </a:ln>
-        </p:spPr>
-        <p:style>
-          <a:lnRef idx="1">
-            <a:schemeClr val="accent1"/>
-          </a:lnRef>
-          <a:fillRef idx="3">
-            <a:schemeClr val="accent1"/>
-          </a:fillRef>
-          <a:effectRef idx="2">
-            <a:schemeClr val="accent1"/>
-          </a:effectRef>
-          <a:fontRef idx="minor">
-            <a:schemeClr val="lt1"/>
-          </a:fontRef>
-        </p:style>
-        <p:txBody>
-          <a:bodyPr rtlCol="0" anchor="ctr"/>
-          <a:lstStyle/>
-          <a:p>
-            <a:pPr algn="ctr"/>
-          </a:p>
-        </p:txBody>
-      </p:sp>
-      <p:sp>
-        <p:nvSpPr>
-          <p:cNvPr id="22" name="TextBox 21"/>
-          <p:cNvSpPr txBox="1"/>
-          <p:nvPr/>
-        </p:nvSpPr>
-        <p:spPr>
-          <a:xfrm>
-            <a:off x="457200" y="2788920"/>
-            <a:ext cx="1188720" cy="329184"/>
-          </a:xfrm>
-          <a:prstGeom prst="rect">
-            <a:avLst/>
-          </a:prstGeom>
-          <a:noFill/>
-        </p:spPr>
-        <p:txBody>
-          <a:bodyPr wrap="square">
-            <a:spAutoFit/>
-          </a:bodyPr>
-          <a:lstStyle/>
-          <a:p>
-            <a:pPr algn="ctr"/>
-            <a:r>
-              <a:rPr sz="1700" b="1" i="0">
-                <a:solidFill>
-                  <a:srgbClr val="FFFFFF"/>
-                </a:solidFill>
-              </a:rPr>
-              <a:t>40/100</a:t>
-            </a:r>
-          </a:p>
-        </p:txBody>
-      </p:sp>
-      <p:sp>
-        <p:nvSpPr>
-          <p:cNvPr id="23" name="TextBox 22"/>
-          <p:cNvSpPr txBox="1"/>
-          <p:nvPr/>
-        </p:nvSpPr>
-        <p:spPr>
-          <a:xfrm>
-            <a:off x="1828800" y="2642616"/>
-            <a:ext cx="3200400" cy="292608"/>
-          </a:xfrm>
-          <a:prstGeom prst="rect">
-            <a:avLst/>
-          </a:prstGeom>
-          <a:noFill/>
-        </p:spPr>
-        <p:txBody>
-          <a:bodyPr wrap="square">
-            <a:spAutoFit/>
-          </a:bodyPr>
-          <a:lstStyle/>
-          <a:p>
-            <a:pPr algn="l"/>
-            <a:r>
-              <a:rPr sz="1300" b="1" i="0">
-                <a:solidFill>
-                  <a:srgbClr val="1A2440"/>
-                </a:solidFill>
-              </a:rPr>
-              <a:t>Roudoudou lentilles</a:t>
-            </a:r>
-          </a:p>
-        </p:txBody>
-      </p:sp>
-      <p:sp>
-        <p:nvSpPr>
-          <p:cNvPr id="24" name="TextBox 23"/>
-          <p:cNvSpPr txBox="1"/>
-          <p:nvPr/>
-        </p:nvSpPr>
-        <p:spPr>
-          <a:xfrm>
-            <a:off x="1828800" y="2971800"/>
-            <a:ext cx="3200400" cy="292608"/>
-          </a:xfrm>
-          <a:prstGeom prst="rect">
-            <a:avLst/>
-          </a:prstGeom>
-          <a:noFill/>
-        </p:spPr>
-        <p:txBody>
-          <a:bodyPr wrap="square">
-            <a:spAutoFit/>
-          </a:bodyPr>
-          <a:lstStyle/>
-          <a:p>
-            <a:pPr algn="l"/>
-            <a:r>
-              <a:rPr sz="900" b="1" i="0">
-                <a:solidFill>
-                  <a:srgbClr val="E07B39"/>
-                </a:solidFill>
-              </a:rPr>
-              <a:t>Systematic co-billing (100% of months) · round numbers</a:t>
-            </a:r>
-          </a:p>
-        </p:txBody>
-      </p:sp>
-      <p:sp>
-        <p:nvSpPr>
-          <p:cNvPr id="25" name="TextBox 24"/>
-          <p:cNvSpPr txBox="1"/>
-          <p:nvPr/>
-        </p:nvSpPr>
-        <p:spPr>
-          <a:xfrm>
-            <a:off x="5212080" y="2752344"/>
-            <a:ext cx="6492240" cy="502920"/>
-          </a:xfrm>
-          <a:prstGeom prst="rect">
-            <a:avLst/>
-          </a:prstGeom>
-          <a:noFill/>
-        </p:spPr>
-        <p:txBody>
-          <a:bodyPr wrap="square">
-            <a:spAutoFit/>
-          </a:bodyPr>
-          <a:lstStyle/>
-          <a:p>
-            <a:pPr algn="l"/>
-            <a:r>
-              <a:rPr sz="1000" b="0" i="0">
-                <a:solidFill>
-                  <a:srgbClr val="444444"/>
-                </a:solidFill>
-              </a:rPr>
-              <a:t>Every single active month had both categories billed. Low total due to no spike. Review co-billing pattern.</a:t>
-            </a:r>
-          </a:p>
-        </p:txBody>
-      </p:sp>
-      <p:sp>
-        <p:nvSpPr>
-          <p:cNvPr id="26" name="Rectangle 25"/>
-          <p:cNvSpPr/>
-          <p:nvPr/>
-        </p:nvSpPr>
-        <p:spPr>
-          <a:xfrm>
-            <a:off x="274320" y="3392424"/>
-            <a:ext cx="11640312" cy="749808"/>
-          </a:xfrm>
-          <a:prstGeom prst="rect">
-            <a:avLst/>
-          </a:prstGeom>
-          <a:solidFill>
-            <a:srgbClr val="FFF3E6"/>
-          </a:solidFill>
-          <a:ln>
-            <a:noFill/>
-          </a:ln>
-        </p:spPr>
-        <p:style>
-          <a:lnRef idx="1">
-            <a:schemeClr val="accent1"/>
-          </a:lnRef>
-          <a:fillRef idx="3">
-            <a:schemeClr val="accent1"/>
-          </a:fillRef>
-          <a:effectRef idx="2">
-            <a:schemeClr val="accent1"/>
-          </a:effectRef>
-          <a:fontRef idx="minor">
-            <a:schemeClr val="lt1"/>
-          </a:fontRef>
-        </p:style>
-        <p:txBody>
-          <a:bodyPr rtlCol="0" anchor="ctr"/>
-          <a:lstStyle/>
-          <a:p>
-            <a:pPr algn="ctr"/>
-          </a:p>
-        </p:txBody>
-      </p:sp>
-      <p:sp>
-        <p:nvSpPr>
-          <p:cNvPr id="27" name="Rectangle 26"/>
-          <p:cNvSpPr/>
-          <p:nvPr/>
-        </p:nvSpPr>
-        <p:spPr>
-          <a:xfrm>
-            <a:off x="274320" y="3392424"/>
-            <a:ext cx="91440" cy="749808"/>
-          </a:xfrm>
-          <a:prstGeom prst="rect">
-            <a:avLst/>
-          </a:prstGeom>
-          <a:solidFill>
-            <a:srgbClr val="E07B39"/>
-          </a:solidFill>
-          <a:ln>
-            <a:noFill/>
-          </a:ln>
-        </p:spPr>
-        <p:style>
-          <a:lnRef idx="1">
-            <a:schemeClr val="accent1"/>
-          </a:lnRef>
-          <a:fillRef idx="3">
-            <a:schemeClr val="accent1"/>
-          </a:fillRef>
-          <a:effectRef idx="2">
-            <a:schemeClr val="accent1"/>
-          </a:effectRef>
-          <a:fontRef idx="minor">
-            <a:schemeClr val="lt1"/>
-          </a:fontRef>
-        </p:style>
-        <p:txBody>
-          <a:bodyPr rtlCol="0" anchor="ctr"/>
-          <a:lstStyle/>
-          <a:p>
-            <a:pPr algn="ctr"/>
-          </a:p>
-        </p:txBody>
-      </p:sp>
-      <p:sp>
-        <p:nvSpPr>
-          <p:cNvPr id="28" name="Rectangle 27"/>
-          <p:cNvSpPr/>
-          <p:nvPr/>
-        </p:nvSpPr>
-        <p:spPr>
-          <a:xfrm>
-            <a:off x="457200" y="3593592"/>
-            <a:ext cx="1188720" cy="329184"/>
-          </a:xfrm>
-          <a:prstGeom prst="rect">
-            <a:avLst/>
-          </a:prstGeom>
-          <a:solidFill>
-            <a:srgbClr val="E07B39"/>
-          </a:solidFill>
-          <a:ln>
-            <a:noFill/>
-          </a:ln>
-        </p:spPr>
-        <p:style>
-          <a:lnRef idx="1">
-            <a:schemeClr val="accent1"/>
-          </a:lnRef>
-          <a:fillRef idx="3">
-            <a:schemeClr val="accent1"/>
-          </a:fillRef>
-          <a:effectRef idx="2">
-            <a:schemeClr val="accent1"/>
-          </a:effectRef>
-          <a:fontRef idx="minor">
-            <a:schemeClr val="lt1"/>
-          </a:fontRef>
-        </p:style>
-        <p:txBody>
-          <a:bodyPr rtlCol="0" anchor="ctr"/>
-          <a:lstStyle/>
-          <a:p>
-            <a:pPr algn="ctr"/>
-          </a:p>
-        </p:txBody>
-      </p:sp>
-      <p:sp>
-        <p:nvSpPr>
-          <p:cNvPr id="29" name="TextBox 28"/>
-          <p:cNvSpPr txBox="1"/>
-          <p:nvPr/>
-        </p:nvSpPr>
-        <p:spPr>
-          <a:xfrm>
-            <a:off x="457200" y="3593592"/>
-            <a:ext cx="1188720" cy="329184"/>
-          </a:xfrm>
-          <a:prstGeom prst="rect">
-            <a:avLst/>
-          </a:prstGeom>
-          <a:noFill/>
-        </p:spPr>
-        <p:txBody>
-          <a:bodyPr wrap="square">
-            <a:spAutoFit/>
-          </a:bodyPr>
-          <a:lstStyle/>
-          <a:p>
-            <a:pPr algn="ctr"/>
-            <a:r>
-              <a:rPr sz="1700" b="1" i="0">
-                <a:solidFill>
-                  <a:srgbClr val="FFFFFF"/>
-                </a:solidFill>
-              </a:rPr>
-              <a:t>15/100</a:t>
-            </a:r>
-          </a:p>
-        </p:txBody>
-      </p:sp>
-      <p:sp>
-        <p:nvSpPr>
-          <p:cNvPr id="30" name="TextBox 29"/>
-          <p:cNvSpPr txBox="1"/>
-          <p:nvPr/>
-        </p:nvSpPr>
-        <p:spPr>
-          <a:xfrm>
-            <a:off x="1828800" y="3447288"/>
-            <a:ext cx="3200400" cy="292608"/>
-          </a:xfrm>
-          <a:prstGeom prst="rect">
-            <a:avLst/>
-          </a:prstGeom>
-          <a:noFill/>
-        </p:spPr>
-        <p:txBody>
-          <a:bodyPr wrap="square">
-            <a:spAutoFit/>
-          </a:bodyPr>
-          <a:lstStyle/>
-          <a:p>
-            <a:pPr algn="l"/>
-            <a:r>
-              <a:rPr sz="1300" b="1" i="0">
-                <a:solidFill>
-                  <a:srgbClr val="1A2440"/>
-                </a:solidFill>
-              </a:rPr>
-              <a:t>Voodoo</a:t>
-            </a:r>
-          </a:p>
-        </p:txBody>
-      </p:sp>
-      <p:sp>
-        <p:nvSpPr>
-          <p:cNvPr id="31" name="TextBox 30"/>
-          <p:cNvSpPr txBox="1"/>
-          <p:nvPr/>
-        </p:nvSpPr>
-        <p:spPr>
-          <a:xfrm>
-            <a:off x="1828800" y="3776472"/>
-            <a:ext cx="3200400" cy="292608"/>
-          </a:xfrm>
-          <a:prstGeom prst="rect">
-            <a:avLst/>
-          </a:prstGeom>
-          <a:noFill/>
-        </p:spPr>
-        <p:txBody>
-          <a:bodyPr wrap="square">
-            <a:spAutoFit/>
-          </a:bodyPr>
-          <a:lstStyle/>
-          <a:p>
-            <a:pPr algn="l"/>
-            <a:r>
-              <a:rPr sz="900" b="1" i="0">
-                <a:solidFill>
-                  <a:srgbClr val="E07B39"/>
-                </a:solidFill>
-              </a:rPr>
-              <a:t>Round number billing detected</a:t>
-            </a:r>
-          </a:p>
-        </p:txBody>
-      </p:sp>
-      <p:sp>
-        <p:nvSpPr>
-          <p:cNvPr id="32" name="TextBox 31"/>
-          <p:cNvSpPr txBox="1"/>
-          <p:nvPr/>
-        </p:nvSpPr>
-        <p:spPr>
-          <a:xfrm>
-            <a:off x="5212080" y="3557016"/>
-            <a:ext cx="6492240" cy="502920"/>
-          </a:xfrm>
-          <a:prstGeom prst="rect">
-            <a:avLst/>
-          </a:prstGeom>
-          <a:noFill/>
-        </p:spPr>
-        <p:txBody>
-          <a:bodyPr wrap="square">
-            <a:spAutoFit/>
-          </a:bodyPr>
-          <a:lstStyle/>
-          <a:p>
-            <a:pPr algn="l"/>
-            <a:r>
-              <a:rPr sz="1000" b="0" i="0">
-                <a:solidFill>
-                  <a:srgbClr val="444444"/>
-                </a:solidFill>
-              </a:rPr>
-              <a:t>Low score but whole-euro billing pattern present. Monitor — flag for review if pattern continues next cycle.</a:t>
-            </a:r>
-          </a:p>
-        </p:txBody>
-      </p:sp>
-      <p:sp>
-        <p:nvSpPr>
-          <p:cNvPr id="33" name="Rectangle 32"/>
-          <p:cNvSpPr/>
-          <p:nvPr/>
-        </p:nvSpPr>
-        <p:spPr>
-          <a:xfrm>
-            <a:off x="274320" y="4206240"/>
-            <a:ext cx="11640312" cy="320040"/>
-          </a:xfrm>
-          <a:prstGeom prst="rect">
-            <a:avLst/>
-          </a:prstGeom>
-          <a:solidFill>
-            <a:srgbClr val="2E7D32"/>
-          </a:solidFill>
-          <a:ln>
-            <a:noFill/>
-          </a:ln>
-        </p:spPr>
-        <p:style>
-          <a:lnRef idx="1">
-            <a:schemeClr val="accent1"/>
-          </a:lnRef>
-          <a:fillRef idx="3">
-            <a:schemeClr val="accent1"/>
-          </a:fillRef>
-          <a:effectRef idx="2">
-            <a:schemeClr val="accent1"/>
-          </a:effectRef>
-          <a:fontRef idx="minor">
-            <a:schemeClr val="lt1"/>
-          </a:fontRef>
-        </p:style>
-        <p:txBody>
-          <a:bodyPr rtlCol="0" anchor="ctr"/>
-          <a:lstStyle/>
-          <a:p>
-            <a:pPr algn="ctr"/>
-          </a:p>
-        </p:txBody>
-      </p:sp>
-      <p:sp>
-        <p:nvSpPr>
-          <p:cNvPr id="34" name="TextBox 33"/>
-          <p:cNvSpPr txBox="1"/>
-          <p:nvPr/>
-        </p:nvSpPr>
-        <p:spPr>
-          <a:xfrm>
-            <a:off x="411480" y="4233672"/>
-            <a:ext cx="11247120" cy="256032"/>
-          </a:xfrm>
-          <a:prstGeom prst="rect">
-            <a:avLst/>
-          </a:prstGeom>
-          <a:noFill/>
-        </p:spPr>
-        <p:txBody>
-          <a:bodyPr wrap="square">
-            <a:spAutoFit/>
-          </a:bodyPr>
-          <a:lstStyle/>
-          <a:p>
-            <a:pPr algn="l"/>
-            <a:r>
-              <a:rPr sz="1100" b="1" i="0">
-                <a:solidFill>
-                  <a:srgbClr val="FFFFFF"/>
-                </a:solidFill>
-              </a:rPr>
-              <a:t>Cleared — no suspicious patterns detected</a:t>
-            </a:r>
-          </a:p>
-        </p:txBody>
-      </p:sp>
-      <p:sp>
-        <p:nvSpPr>
-          <p:cNvPr id="35" name="Rectangle 34"/>
-          <p:cNvSpPr/>
-          <p:nvPr/>
-        </p:nvSpPr>
-        <p:spPr>
-          <a:xfrm>
-            <a:off x="274320" y="4572000"/>
-            <a:ext cx="2816352" cy="777240"/>
-          </a:xfrm>
-          <a:prstGeom prst="rect">
-            <a:avLst/>
-          </a:prstGeom>
-          <a:solidFill>
-            <a:srgbClr val="F0F9F2"/>
-          </a:solidFill>
-          <a:ln w="9525">
-            <a:solidFill>
-              <a:srgbClr val="CCCCCC"/>
-            </a:solidFill>
-          </a:ln>
-        </p:spPr>
-        <p:style>
-          <a:lnRef idx="1">
-            <a:schemeClr val="accent1"/>
-          </a:lnRef>
-          <a:fillRef idx="3">
-            <a:schemeClr val="accent1"/>
-          </a:fillRef>
-          <a:effectRef idx="2">
-            <a:schemeClr val="accent1"/>
-          </a:effectRef>
-          <a:fontRef idx="minor">
-            <a:schemeClr val="lt1"/>
-          </a:fontRef>
-        </p:style>
-        <p:txBody>
-          <a:bodyPr rtlCol="0" anchor="ctr"/>
-          <a:lstStyle/>
-          <a:p>
-            <a:pPr algn="ctr"/>
-          </a:p>
-        </p:txBody>
-      </p:sp>
-      <p:sp>
-        <p:nvSpPr>
-          <p:cNvPr id="36" name="Rectangle 35"/>
-          <p:cNvSpPr/>
-          <p:nvPr/>
-        </p:nvSpPr>
-        <p:spPr>
-          <a:xfrm>
-            <a:off x="384048" y="4645152"/>
-            <a:ext cx="1005840" cy="292608"/>
-          </a:xfrm>
-          <a:prstGeom prst="rect">
-            <a:avLst/>
-          </a:prstGeom>
-          <a:solidFill>
-            <a:srgbClr val="2E7D32"/>
-          </a:solidFill>
-          <a:ln>
-            <a:noFill/>
-          </a:ln>
-        </p:spPr>
-        <p:style>
-          <a:lnRef idx="1">
-            <a:schemeClr val="accent1"/>
-          </a:lnRef>
-          <a:fillRef idx="3">
-            <a:schemeClr val="accent1"/>
-          </a:fillRef>
-          <a:effectRef idx="2">
-            <a:schemeClr val="accent1"/>
-          </a:effectRef>
-          <a:fontRef idx="minor">
-            <a:schemeClr val="lt1"/>
-          </a:fontRef>
-        </p:style>
-        <p:txBody>
-          <a:bodyPr rtlCol="0" anchor="ctr"/>
-          <a:lstStyle/>
-          <a:p>
-            <a:pPr algn="ctr"/>
-          </a:p>
-        </p:txBody>
-      </p:sp>
-      <p:sp>
-        <p:nvSpPr>
-          <p:cNvPr id="37" name="TextBox 36"/>
-          <p:cNvSpPr txBox="1"/>
-          <p:nvPr/>
-        </p:nvSpPr>
-        <p:spPr>
-          <a:xfrm>
-            <a:off x="384048" y="4645152"/>
-            <a:ext cx="1005840" cy="292608"/>
-          </a:xfrm>
-          <a:prstGeom prst="rect">
-            <a:avLst/>
-          </a:prstGeom>
-          <a:noFill/>
-        </p:spPr>
-        <p:txBody>
-          <a:bodyPr wrap="square">
-            <a:spAutoFit/>
-          </a:bodyPr>
-          <a:lstStyle/>
-          <a:p>
-            <a:pPr algn="ctr"/>
-            <a:r>
-              <a:rPr sz="1700" b="1" i="0">
-                <a:solidFill>
-                  <a:srgbClr val="FFFFFF"/>
-                </a:solidFill>
-              </a:rPr>
-              <a:t>0/100</a:t>
-            </a:r>
-          </a:p>
-        </p:txBody>
-      </p:sp>
-      <p:sp>
-        <p:nvSpPr>
-          <p:cNvPr id="38" name="TextBox 37"/>
-          <p:cNvSpPr txBox="1"/>
-          <p:nvPr/>
-        </p:nvSpPr>
-        <p:spPr>
-          <a:xfrm>
-            <a:off x="1463040" y="4681728"/>
-            <a:ext cx="1554480" cy="256032"/>
-          </a:xfrm>
-          <a:prstGeom prst="rect">
-            <a:avLst/>
-          </a:prstGeom>
-          <a:noFill/>
-        </p:spPr>
-        <p:txBody>
-          <a:bodyPr wrap="square">
-            <a:spAutoFit/>
-          </a:bodyPr>
-          <a:lstStyle/>
-          <a:p>
-            <a:pPr algn="l"/>
-            <a:r>
-              <a:rPr sz="1000" b="1" i="0">
-                <a:solidFill>
-                  <a:srgbClr val="2E7D32"/>
-                </a:solidFill>
-              </a:rPr>
-              <a:t>La classe à Dallas</a:t>
-            </a:r>
-          </a:p>
-        </p:txBody>
-      </p:sp>
-      <p:sp>
-        <p:nvSpPr>
-          <p:cNvPr id="39" name="TextBox 38"/>
-          <p:cNvSpPr txBox="1"/>
-          <p:nvPr/>
-        </p:nvSpPr>
-        <p:spPr>
-          <a:xfrm>
-            <a:off x="384048" y="5029200"/>
-            <a:ext cx="2560320" cy="256032"/>
-          </a:xfrm>
-          <a:prstGeom prst="rect">
-            <a:avLst/>
-          </a:prstGeom>
-          <a:noFill/>
-        </p:spPr>
-        <p:txBody>
-          <a:bodyPr wrap="square">
-            <a:spAutoFit/>
-          </a:bodyPr>
-          <a:lstStyle/>
-          <a:p>
-            <a:pPr algn="l"/>
-            <a:r>
-              <a:rPr sz="900" b="0" i="1">
-                <a:solidFill>
-                  <a:srgbClr val="444444"/>
-                </a:solidFill>
-              </a:rPr>
-              <a:t>No flags raised</a:t>
-            </a:r>
-          </a:p>
-        </p:txBody>
-      </p:sp>
-      <p:sp>
-        <p:nvSpPr>
-          <p:cNvPr id="40" name="Rectangle 39"/>
-          <p:cNvSpPr/>
-          <p:nvPr/>
-        </p:nvSpPr>
-        <p:spPr>
-          <a:xfrm>
-            <a:off x="3182112" y="4572000"/>
-            <a:ext cx="2816352" cy="777240"/>
-          </a:xfrm>
-          <a:prstGeom prst="rect">
-            <a:avLst/>
-          </a:prstGeom>
-          <a:solidFill>
-            <a:srgbClr val="F0F9F2"/>
-          </a:solidFill>
-          <a:ln w="9525">
-            <a:solidFill>
-              <a:srgbClr val="CCCCCC"/>
-            </a:solidFill>
-          </a:ln>
-        </p:spPr>
-        <p:style>
-          <a:lnRef idx="1">
-            <a:schemeClr val="accent1"/>
-          </a:lnRef>
-          <a:fillRef idx="3">
-            <a:schemeClr val="accent1"/>
-          </a:fillRef>
-          <a:effectRef idx="2">
-            <a:schemeClr val="accent1"/>
-          </a:effectRef>
-          <a:fontRef idx="minor">
-            <a:schemeClr val="lt1"/>
-          </a:fontRef>
-        </p:style>
-        <p:txBody>
-          <a:bodyPr rtlCol="0" anchor="ctr"/>
-          <a:lstStyle/>
-          <a:p>
-            <a:pPr algn="ctr"/>
-          </a:p>
-        </p:txBody>
-      </p:sp>
-      <p:sp>
-        <p:nvSpPr>
-          <p:cNvPr id="41" name="Rectangle 40"/>
-          <p:cNvSpPr/>
-          <p:nvPr/>
-        </p:nvSpPr>
-        <p:spPr>
-          <a:xfrm>
-            <a:off x="3291840" y="4645152"/>
-            <a:ext cx="1005840" cy="292608"/>
-          </a:xfrm>
-          <a:prstGeom prst="rect">
-            <a:avLst/>
-          </a:prstGeom>
-          <a:solidFill>
-            <a:srgbClr val="2E7D32"/>
-          </a:solidFill>
-          <a:ln>
-            <a:noFill/>
-          </a:ln>
-        </p:spPr>
-        <p:style>
-          <a:lnRef idx="1">
-            <a:schemeClr val="accent1"/>
-          </a:lnRef>
-          <a:fillRef idx="3">
-            <a:schemeClr val="accent1"/>
-          </a:fillRef>
-          <a:effectRef idx="2">
-            <a:schemeClr val="accent1"/>
-          </a:effectRef>
-          <a:fontRef idx="minor">
-            <a:schemeClr val="lt1"/>
-          </a:fontRef>
-        </p:style>
-        <p:txBody>
-          <a:bodyPr rtlCol="0" anchor="ctr"/>
-          <a:lstStyle/>
-          <a:p>
-            <a:pPr algn="ctr"/>
-          </a:p>
-        </p:txBody>
-      </p:sp>
-      <p:sp>
-        <p:nvSpPr>
-          <p:cNvPr id="42" name="TextBox 41"/>
-          <p:cNvSpPr txBox="1"/>
-          <p:nvPr/>
-        </p:nvSpPr>
-        <p:spPr>
-          <a:xfrm>
-            <a:off x="3291840" y="4645152"/>
-            <a:ext cx="1005840" cy="292608"/>
-          </a:xfrm>
-          <a:prstGeom prst="rect">
-            <a:avLst/>
-          </a:prstGeom>
-          <a:noFill/>
-        </p:spPr>
-        <p:txBody>
-          <a:bodyPr wrap="square">
-            <a:spAutoFit/>
-          </a:bodyPr>
-          <a:lstStyle/>
-          <a:p>
-            <a:pPr algn="ctr"/>
-            <a:r>
-              <a:rPr sz="1700" b="1" i="0">
-                <a:solidFill>
-                  <a:srgbClr val="FFFFFF"/>
-                </a:solidFill>
-              </a:rPr>
-              <a:t>0/100</a:t>
-            </a:r>
-          </a:p>
-        </p:txBody>
-      </p:sp>
-      <p:sp>
-        <p:nvSpPr>
-          <p:cNvPr id="43" name="TextBox 42"/>
-          <p:cNvSpPr txBox="1"/>
-          <p:nvPr/>
-        </p:nvSpPr>
-        <p:spPr>
-          <a:xfrm>
-            <a:off x="4370832" y="4681728"/>
-            <a:ext cx="1554480" cy="256032"/>
-          </a:xfrm>
-          <a:prstGeom prst="rect">
-            <a:avLst/>
-          </a:prstGeom>
-          <a:noFill/>
-        </p:spPr>
-        <p:txBody>
-          <a:bodyPr wrap="square">
-            <a:spAutoFit/>
-          </a:bodyPr>
-          <a:lstStyle/>
-          <a:p>
-            <a:pPr algn="l"/>
-            <a:r>
-              <a:rPr sz="1000" b="1" i="0">
-                <a:solidFill>
-                  <a:srgbClr val="2E7D32"/>
-                </a:solidFill>
-              </a:rPr>
-              <a:t>Cool optics</a:t>
-            </a:r>
-          </a:p>
-        </p:txBody>
-      </p:sp>
-      <p:sp>
-        <p:nvSpPr>
-          <p:cNvPr id="44" name="TextBox 43"/>
-          <p:cNvSpPr txBox="1"/>
-          <p:nvPr/>
-        </p:nvSpPr>
-        <p:spPr>
-          <a:xfrm>
-            <a:off x="3291840" y="5029200"/>
-            <a:ext cx="2560320" cy="256032"/>
-          </a:xfrm>
-          <a:prstGeom prst="rect">
-            <a:avLst/>
-          </a:prstGeom>
-          <a:noFill/>
-        </p:spPr>
-        <p:txBody>
-          <a:bodyPr wrap="square">
-            <a:spAutoFit/>
-          </a:bodyPr>
-          <a:lstStyle/>
-          <a:p>
-            <a:pPr algn="l"/>
-            <a:r>
-              <a:rPr sz="900" b="0" i="1">
-                <a:solidFill>
-                  <a:srgbClr val="444444"/>
-                </a:solidFill>
-              </a:rPr>
-              <a:t>No flags raised</a:t>
-            </a:r>
-          </a:p>
-        </p:txBody>
-      </p:sp>
-      <p:sp>
-        <p:nvSpPr>
-          <p:cNvPr id="45" name="Rectangle 44"/>
-          <p:cNvSpPr/>
-          <p:nvPr/>
-        </p:nvSpPr>
-        <p:spPr>
-          <a:xfrm>
-            <a:off x="6089904" y="4572000"/>
-            <a:ext cx="2816352" cy="777240"/>
-          </a:xfrm>
-          <a:prstGeom prst="rect">
-            <a:avLst/>
-          </a:prstGeom>
-          <a:solidFill>
-            <a:srgbClr val="F0F9F2"/>
-          </a:solidFill>
-          <a:ln w="9525">
-            <a:solidFill>
-              <a:srgbClr val="CCCCCC"/>
-            </a:solidFill>
-          </a:ln>
-        </p:spPr>
-        <p:style>
-          <a:lnRef idx="1">
-            <a:schemeClr val="accent1"/>
-          </a:lnRef>
-          <a:fillRef idx="3">
-            <a:schemeClr val="accent1"/>
-          </a:fillRef>
-          <a:effectRef idx="2">
-            <a:schemeClr val="accent1"/>
-          </a:effectRef>
-          <a:fontRef idx="minor">
-            <a:schemeClr val="lt1"/>
-          </a:fontRef>
-        </p:style>
-        <p:txBody>
-          <a:bodyPr rtlCol="0" anchor="ctr"/>
-          <a:lstStyle/>
-          <a:p>
-            <a:pPr algn="ctr"/>
-          </a:p>
-        </p:txBody>
-      </p:sp>
-      <p:sp>
-        <p:nvSpPr>
-          <p:cNvPr id="46" name="Rectangle 45"/>
-          <p:cNvSpPr/>
-          <p:nvPr/>
-        </p:nvSpPr>
-        <p:spPr>
-          <a:xfrm>
-            <a:off x="6199632" y="4645152"/>
-            <a:ext cx="1005840" cy="292608"/>
-          </a:xfrm>
-          <a:prstGeom prst="rect">
-            <a:avLst/>
-          </a:prstGeom>
-          <a:solidFill>
-            <a:srgbClr val="2E7D32"/>
-          </a:solidFill>
-          <a:ln>
-            <a:noFill/>
-          </a:ln>
-        </p:spPr>
-        <p:style>
-          <a:lnRef idx="1">
-            <a:schemeClr val="accent1"/>
-          </a:lnRef>
-          <a:fillRef idx="3">
-            <a:schemeClr val="accent1"/>
-          </a:fillRef>
-          <a:effectRef idx="2">
-            <a:schemeClr val="accent1"/>
-          </a:effectRef>
-          <a:fontRef idx="minor">
-            <a:schemeClr val="lt1"/>
-          </a:fontRef>
-        </p:style>
-        <p:txBody>
-          <a:bodyPr rtlCol="0" anchor="ctr"/>
-          <a:lstStyle/>
-          <a:p>
-            <a:pPr algn="ctr"/>
-          </a:p>
-        </p:txBody>
-      </p:sp>
-      <p:sp>
-        <p:nvSpPr>
-          <p:cNvPr id="47" name="TextBox 46"/>
-          <p:cNvSpPr txBox="1"/>
-          <p:nvPr/>
-        </p:nvSpPr>
-        <p:spPr>
-          <a:xfrm>
-            <a:off x="6199632" y="4645152"/>
-            <a:ext cx="1005840" cy="292608"/>
-          </a:xfrm>
-          <a:prstGeom prst="rect">
-            <a:avLst/>
-          </a:prstGeom>
-          <a:noFill/>
-        </p:spPr>
-        <p:txBody>
-          <a:bodyPr wrap="square">
-            <a:spAutoFit/>
-          </a:bodyPr>
-          <a:lstStyle/>
-          <a:p>
-            <a:pPr algn="ctr"/>
-            <a:r>
-              <a:rPr sz="1700" b="1" i="0">
-                <a:solidFill>
-                  <a:srgbClr val="FFFFFF"/>
-                </a:solidFill>
-              </a:rPr>
-              <a:t>0/100</a:t>
-            </a:r>
-          </a:p>
-        </p:txBody>
-      </p:sp>
-      <p:sp>
-        <p:nvSpPr>
-          <p:cNvPr id="48" name="TextBox 47"/>
-          <p:cNvSpPr txBox="1"/>
-          <p:nvPr/>
-        </p:nvSpPr>
-        <p:spPr>
-          <a:xfrm>
-            <a:off x="7278624" y="4681728"/>
-            <a:ext cx="1554480" cy="256032"/>
-          </a:xfrm>
-          <a:prstGeom prst="rect">
-            <a:avLst/>
-          </a:prstGeom>
-          <a:noFill/>
-        </p:spPr>
-        <p:txBody>
-          <a:bodyPr wrap="square">
-            <a:spAutoFit/>
-          </a:bodyPr>
-          <a:lstStyle/>
-          <a:p>
-            <a:pPr algn="l"/>
-            <a:r>
-              <a:rPr sz="1000" b="1" i="0">
-                <a:solidFill>
-                  <a:srgbClr val="2E7D32"/>
-                </a:solidFill>
-              </a:rPr>
-              <a:t>abc optic</a:t>
-            </a:r>
-          </a:p>
-        </p:txBody>
-      </p:sp>
-      <p:sp>
-        <p:nvSpPr>
-          <p:cNvPr id="49" name="TextBox 48"/>
-          <p:cNvSpPr txBox="1"/>
-          <p:nvPr/>
-        </p:nvSpPr>
-        <p:spPr>
-          <a:xfrm>
-            <a:off x="6199632" y="5029200"/>
-            <a:ext cx="2560320" cy="256032"/>
-          </a:xfrm>
-          <a:prstGeom prst="rect">
-            <a:avLst/>
-          </a:prstGeom>
-          <a:noFill/>
-        </p:spPr>
-        <p:txBody>
-          <a:bodyPr wrap="square">
-            <a:spAutoFit/>
-          </a:bodyPr>
-          <a:lstStyle/>
-          <a:p>
-            <a:pPr algn="l"/>
-            <a:r>
-              <a:rPr sz="900" b="0" i="1">
-                <a:solidFill>
-                  <a:srgbClr val="444444"/>
-                </a:solidFill>
-              </a:rPr>
-              <a:t>No flags raised</a:t>
-            </a:r>
-          </a:p>
-        </p:txBody>
-      </p:sp>
-      <p:sp>
-        <p:nvSpPr>
-          <p:cNvPr id="50" name="Rectangle 49"/>
-          <p:cNvSpPr/>
-          <p:nvPr/>
-        </p:nvSpPr>
-        <p:spPr>
-          <a:xfrm>
-            <a:off x="8997696" y="4572000"/>
-            <a:ext cx="2816352" cy="777240"/>
-          </a:xfrm>
-          <a:prstGeom prst="rect">
-            <a:avLst/>
-          </a:prstGeom>
-          <a:solidFill>
-            <a:srgbClr val="F0F9F2"/>
-          </a:solidFill>
-          <a:ln w="9525">
-            <a:solidFill>
-              <a:srgbClr val="CCCCCC"/>
-            </a:solidFill>
-          </a:ln>
-        </p:spPr>
-        <p:style>
-          <a:lnRef idx="1">
-            <a:schemeClr val="accent1"/>
-          </a:lnRef>
-          <a:fillRef idx="3">
-            <a:schemeClr val="accent1"/>
-          </a:fillRef>
-          <a:effectRef idx="2">
-            <a:schemeClr val="accent1"/>
-          </a:effectRef>
-          <a:fontRef idx="minor">
-            <a:schemeClr val="lt1"/>
-          </a:fontRef>
-        </p:style>
-        <p:txBody>
-          <a:bodyPr rtlCol="0" anchor="ctr"/>
-          <a:lstStyle/>
-          <a:p>
-            <a:pPr algn="ctr"/>
-          </a:p>
-        </p:txBody>
-      </p:sp>
-      <p:sp>
-        <p:nvSpPr>
-          <p:cNvPr id="51" name="Rectangle 50"/>
-          <p:cNvSpPr/>
-          <p:nvPr/>
-        </p:nvSpPr>
-        <p:spPr>
-          <a:xfrm>
-            <a:off x="9107424" y="4645152"/>
-            <a:ext cx="1005840" cy="292608"/>
-          </a:xfrm>
-          <a:prstGeom prst="rect">
-            <a:avLst/>
-          </a:prstGeom>
-          <a:solidFill>
-            <a:srgbClr val="2E7D32"/>
-          </a:solidFill>
-          <a:ln>
-            <a:noFill/>
-          </a:ln>
-        </p:spPr>
-        <p:style>
-          <a:lnRef idx="1">
-            <a:schemeClr val="accent1"/>
-          </a:lnRef>
-          <a:fillRef idx="3">
-            <a:schemeClr val="accent1"/>
-          </a:fillRef>
-          <a:effectRef idx="2">
-            <a:schemeClr val="accent1"/>
-          </a:effectRef>
-          <a:fontRef idx="minor">
-            <a:schemeClr val="lt1"/>
-          </a:fontRef>
-        </p:style>
-        <p:txBody>
-          <a:bodyPr rtlCol="0" anchor="ctr"/>
-          <a:lstStyle/>
-          <a:p>
-            <a:pPr algn="ctr"/>
-          </a:p>
-        </p:txBody>
-      </p:sp>
-      <p:sp>
-        <p:nvSpPr>
-          <p:cNvPr id="52" name="TextBox 51"/>
-          <p:cNvSpPr txBox="1"/>
-          <p:nvPr/>
-        </p:nvSpPr>
-        <p:spPr>
-          <a:xfrm>
-            <a:off x="9107424" y="4645152"/>
-            <a:ext cx="1005840" cy="292608"/>
-          </a:xfrm>
-          <a:prstGeom prst="rect">
-            <a:avLst/>
-          </a:prstGeom>
-          <a:noFill/>
-        </p:spPr>
-        <p:txBody>
-          <a:bodyPr wrap="square">
-            <a:spAutoFit/>
-          </a:bodyPr>
-          <a:lstStyle/>
-          <a:p>
-            <a:pPr algn="ctr"/>
-            <a:r>
-              <a:rPr sz="1700" b="1" i="0">
-                <a:solidFill>
-                  <a:srgbClr val="FFFFFF"/>
-                </a:solidFill>
-              </a:rPr>
-              <a:t>0/100</a:t>
-            </a:r>
-          </a:p>
-        </p:txBody>
-      </p:sp>
-      <p:sp>
-        <p:nvSpPr>
-          <p:cNvPr id="53" name="TextBox 52"/>
-          <p:cNvSpPr txBox="1"/>
-          <p:nvPr/>
-        </p:nvSpPr>
-        <p:spPr>
-          <a:xfrm>
-            <a:off x="10186416" y="4681728"/>
-            <a:ext cx="1554480" cy="256032"/>
-          </a:xfrm>
-          <a:prstGeom prst="rect">
-            <a:avLst/>
-          </a:prstGeom>
-          <a:noFill/>
-        </p:spPr>
-        <p:txBody>
-          <a:bodyPr wrap="square">
-            <a:spAutoFit/>
-          </a:bodyPr>
-          <a:lstStyle/>
-          <a:p>
-            <a:pPr algn="l"/>
-            <a:r>
-              <a:rPr sz="1000" b="1" i="0">
-                <a:solidFill>
-                  <a:srgbClr val="2E7D32"/>
-                </a:solidFill>
-              </a:rPr>
-              <a:t>22 optics</a:t>
-            </a:r>
-          </a:p>
-        </p:txBody>
-      </p:sp>
-      <p:sp>
-        <p:nvSpPr>
-          <p:cNvPr id="54" name="TextBox 53"/>
-          <p:cNvSpPr txBox="1"/>
-          <p:nvPr/>
-        </p:nvSpPr>
-        <p:spPr>
-          <a:xfrm>
-            <a:off x="9107424" y="5029200"/>
-            <a:ext cx="2560320" cy="256032"/>
-          </a:xfrm>
-          <a:prstGeom prst="rect">
-            <a:avLst/>
-          </a:prstGeom>
-          <a:noFill/>
-        </p:spPr>
-        <p:txBody>
-          <a:bodyPr wrap="square">
-            <a:spAutoFit/>
-          </a:bodyPr>
-          <a:lstStyle/>
-          <a:p>
-            <a:pPr algn="l"/>
-            <a:r>
-              <a:rPr sz="900" b="0" i="1">
-                <a:solidFill>
-                  <a:srgbClr val="444444"/>
-                </a:solidFill>
-              </a:rPr>
-              <a:t>No flags raised</a:t>
+              <a:t>Immediate improvements · network-level detection · seasonal calibration · ML scoring</a:t>
             </a:r>
           </a:p>
         </p:txBody>
@@ -11292,7 +11293,7 @@
                   <a:srgbClr val="444444"/>
                 </a:solidFill>
               </a:rPr>
-              <a:t>Current system catches clear patterns — here's how to make it more precise and harder to game</a:t>
+              <a:t>Current system catches clear patterns - here's how to make it more precise and harder to game</a:t>
             </a:r>
           </a:p>
         </p:txBody>
@@ -11369,7 +11370,7 @@
                   <a:srgbClr val="FFFFFF"/>
                 </a:solidFill>
               </a:rPr>
-              <a:t>Alan Assurance · Fraud Detection Case · 2024</a:t>
+              <a:t>Alan Assurance · Fraud Detection Case</a:t>
             </a:r>
           </a:p>
         </p:txBody>
@@ -11559,7 +11560,7 @@
                   <a:srgbClr val="444444"/>
                 </a:solidFill>
               </a:rPr>
-              <a:t>Currently we detect co-billing at the provider level — we can't confirm it's the same patient being billed for both glasses and contacts. With member IDs per claim, we could detect the exact fraud scenario: one patient billed for both products in the same month.</a:t>
+              <a:t>Currently co-billing is detected at the provider level - it's not possible to confirm it's the same patient being billed for both glasses and contacts. With member IDs per claim, I could detect the exact fraud scenario: one patient billed for both products in the same month.</a:t>
             </a:r>
           </a:p>
         </p:txBody>
@@ -12360,7 +12361,7 @@
                   <a:srgbClr val="444444"/>
                 </a:solidFill>
               </a:rPr>
-              <a:t>The current 4-rule system uses fixed scores (+20, +25, +15, +15) that were chosen manually. A supervised ML model trained on confirmed fraud outcomes would learn which combinations of signals are most predictive — and weight them accordingly.</a:t>
+              <a:t>The current 4-rule system uses fixed scores (+20, +25, +15, +15) that were chosen manually. A supervised ML model trained on confirmed fraud outcomes would learn which combinations of signals are most predictive - and weight them accordingly.</a:t>
             </a:r>
           </a:p>
         </p:txBody>
@@ -12532,7 +12533,7 @@
                   <a:srgbClr val="FFFFFF"/>
                 </a:solidFill>
               </a:rPr>
-              <a:t>The Dataset — What We're Working With</a:t>
+              <a:t>The Dataset - What We're Working With</a:t>
             </a:r>
           </a:p>
         </p:txBody>
@@ -12609,7 +12610,7 @@
                   <a:srgbClr val="FFFFFF"/>
                 </a:solidFill>
               </a:rPr>
-              <a:t>Alan Assurance · Fraud Detection Case · 2024</a:t>
+              <a:t>Alan Assurance · Fraud Detection Case</a:t>
             </a:r>
           </a:p>
         </p:txBody>
@@ -14261,7 +14262,7 @@
                   <a:srgbClr val="1A2440"/>
                 </a:solidFill>
               </a:rPr>
-              <a:t>The question we're trying to answer</a:t>
+              <a:t>The questions to answer</a:t>
             </a:r>
           </a:p>
         </p:txBody>
@@ -14338,7 +14339,7 @@
                   <a:srgbClr val="1A2440"/>
                 </a:solidFill>
               </a:rPr>
-              <a:t>Who might be committing fraud?</a:t>
+              <a:t>Q1: Are there fraud patterns in the data?</a:t>
             </a:r>
           </a:p>
         </p:txBody>
@@ -14372,7 +14373,7 @@
                   <a:srgbClr val="444444"/>
                 </a:solidFill>
               </a:rPr>
-              <a:t>Some opticians may be billing for services that were never provided — or inflating bills to extract more money from Alan.</a:t>
+              <a:t>Some opticians may be billing for services never provided - or inflating bills. I looked for systematic patterns that distinguish fraud from normal variation.</a:t>
             </a:r>
           </a:p>
         </p:txBody>
@@ -14449,7 +14450,7 @@
                   <a:srgbClr val="1A2440"/>
                 </a:solidFill>
               </a:rPr>
-              <a:t>What does fraud look like in this data?</a:t>
+              <a:t>Q2: How do you identify and recover from fraud?</a:t>
             </a:r>
           </a:p>
         </p:txBody>
@@ -14483,7 +14484,7 @@
                   <a:srgbClr val="444444"/>
                 </a:solidFill>
               </a:rPr>
-              <a:t>Unusual billing patterns: sudden spikes, identical repeated amounts, or always claiming both glasses and contacts together.</a:t>
+              <a:t>Once patterns are found: build automated detection rules, score each provider, and route suspicious ones for investigation and payment suspension.</a:t>
             </a:r>
           </a:p>
         </p:txBody>
@@ -14560,7 +14561,7 @@
                   <a:srgbClr val="1A2440"/>
                 </a:solidFill>
               </a:rPr>
-              <a:t>What can we do about it?</a:t>
+              <a:t>Q3: What proactive actions prevent future fraud?</a:t>
             </a:r>
           </a:p>
         </p:txBody>
@@ -14594,7 +14595,7 @@
                   <a:srgbClr val="444444"/>
                 </a:solidFill>
               </a:rPr>
-              <a:t>Automatically score each provider and surface the suspicious ones for a human reviewer to investigate.</a:t>
+              <a:t>Better data, network analysis, seasonal calibration, and ML scoring to stay ahead of evolving fraud tactics.</a:t>
             </a:r>
           </a:p>
         </p:txBody>
@@ -14852,7 +14853,7 @@
                   <a:srgbClr val="CCCCCC"/>
                 </a:solidFill>
               </a:rPr>
-              <a:t>Data Exploration</a:t>
+              <a:t>Are there any patterns in the data that could indicate fraudulent activity? Have you identified one or several suspicious health professionals?</a:t>
             </a:r>
           </a:p>
         </p:txBody>
@@ -14886,8 +14887,8 @@
                   <a:srgbClr val="FFFFFF"/>
                 </a:solidFill>
               </a:rPr>
-              <a:t>What suspicious
-patterns did we find?</a:t>
+              <a:t>Yes - 4 fraud patterns
+across 8 providers</a:t>
             </a:r>
           </a:p>
         </p:txBody>
@@ -14921,7 +14922,7 @@
                   <a:srgbClr val="FFFFFF"/>
                 </a:solidFill>
               </a:rPr>
-              <a:t>8 out of 12 providers showed at least one red flag · 4 distinct fraud patterns identified</a:t>
+              <a:t>8 out of 12 providers showed at least one red flag · 5 had payments automatically held</a:t>
             </a:r>
           </a:p>
         </p:txBody>
@@ -15093,7 +15094,7 @@
                   <a:srgbClr val="FFFFFF"/>
                 </a:solidFill>
               </a:rPr>
-              <a:t>Results — Which Providers Look Suspicious?</a:t>
+              <a:t>Results - Which Providers Look Suspicious?</a:t>
             </a:r>
           </a:p>
         </p:txBody>
@@ -15247,7 +15248,7 @@
                   <a:srgbClr val="FFFFFF"/>
                 </a:solidFill>
               </a:rPr>
-              <a:t>Alan Assurance · Fraud Detection Case · 2024</a:t>
+              <a:t>Alan Assurance · Fraud Detection Case</a:t>
             </a:r>
           </a:p>
         </p:txBody>
@@ -17823,7 +17824,7 @@
                   <a:srgbClr val="FFFFFF"/>
                 </a:solidFill>
               </a:rPr>
-              <a:t>Pattern 1 — Glasses and Contacts Always Billed Together</a:t>
+              <a:t>Pattern 1 - Glasses and Contacts Always Billed Together</a:t>
             </a:r>
           </a:p>
         </p:txBody>
@@ -17977,7 +17978,7 @@
                   <a:srgbClr val="FFFFFF"/>
                 </a:solidFill>
               </a:rPr>
-              <a:t>Alan Assurance · Fraud Detection Case · 2024</a:t>
+              <a:t>Alan Assurance · Fraud Detection Case</a:t>
             </a:r>
           </a:p>
         </p:txBody>
@@ -18131,7 +18132,7 @@
                   <a:srgbClr val="444444"/>
                 </a:solidFill>
               </a:rPr>
-              <a:t>In reality, a single patient can't wear both glasses and contact lenses at the same time. An optician billing for both products every single month is likely adding fictitious contact-lens charges to genuine glasses sales — the patient pays less out-of-pocket while Alan absorbs the extra cost.</a:t>
+              <a:t>In reality, a single patient can't wear both glasses and contact lenses at the same time. An optician billing for both products every single month is likely adding fictitious contact-lens charges to genuine glasses sales - the patient pays less out-of-pocket while Alan absorbs the extra cost.</a:t>
             </a:r>
           </a:p>
         </p:txBody>
@@ -18930,7 +18931,7 @@
                   <a:srgbClr val="444444"/>
                 </a:solidFill>
               </a:rPr>
-              <a:t>Every single active month had both categories — 100% of the time</a:t>
+              <a:t>Every single active month had both categories - 100% of the time</a:t>
             </a:r>
           </a:p>
         </p:txBody>
@@ -19213,7 +19214,7 @@
                   <a:srgbClr val="FFFFFF"/>
                 </a:solidFill>
               </a:rPr>
-              <a:t>Pattern 2 — Sudden Unexplained Billing Spikes</a:t>
+              <a:t>Pattern 2 - Sudden Unexplained Billing Spikes</a:t>
             </a:r>
           </a:p>
         </p:txBody>
@@ -19367,7 +19368,7 @@
                   <a:srgbClr val="FFFFFF"/>
                 </a:solidFill>
               </a:rPr>
-              <a:t>Alan Assurance · Fraud Detection Case · 2024</a:t>
+              <a:t>Alan Assurance · Fraud Detection Case</a:t>
             </a:r>
           </a:p>
         </p:txBody>
@@ -19521,7 +19522,7 @@
                   <a:srgbClr val="444444"/>
                 </a:solidFill>
               </a:rPr>
-              <a:t>A sudden spike well above a provider's own normal billing level can indicate a burst of fictitious or inflated claims — especially when it coincides with the co-billing pattern above.</a:t>
+              <a:t>A sudden spike well above a provider's own normal billing level can indicate a burst of fictitious or inflated claims - especially when it coincides with the co-billing pattern above.</a:t>
             </a:r>
           </a:p>
         </p:txBody>
@@ -19535,7 +19536,7 @@
         <p:spPr>
           <a:xfrm>
             <a:off x="274320" y="2240280"/>
-            <a:ext cx="3749039" cy="3931920"/>
+            <a:ext cx="3749039" cy="3291840"/>
           </a:xfrm>
           <a:prstGeom prst="rect">
             <a:avLst/>
@@ -20032,7 +20033,7 @@
         </p:nvSpPr>
         <p:spPr>
           <a:xfrm>
-            <a:off x="411479" y="4828032"/>
+            <a:off x="411479" y="4773168"/>
             <a:ext cx="3474720" cy="292608"/>
           </a:xfrm>
           <a:prstGeom prst="rect">
@@ -20067,7 +20068,7 @@
         <p:spPr>
           <a:xfrm>
             <a:off x="4224528" y="2240280"/>
-            <a:ext cx="3749039" cy="3931920"/>
+            <a:ext cx="3749039" cy="3291840"/>
           </a:xfrm>
           <a:prstGeom prst="rect">
             <a:avLst/>
@@ -20551,7 +20552,7 @@
                   <a:srgbClr val="444444"/>
                 </a:solidFill>
               </a:rPr>
-              <a:t>94% co-billing rate — highest in dataset</a:t>
+              <a:t>94% co-billing rate - highest in dataset</a:t>
             </a:r>
           </a:p>
         </p:txBody>
@@ -20564,7 +20565,7 @@
         </p:nvSpPr>
         <p:spPr>
           <a:xfrm>
-            <a:off x="4361688" y="4828032"/>
+            <a:off x="4361688" y="4773168"/>
             <a:ext cx="3474720" cy="292608"/>
           </a:xfrm>
           <a:prstGeom prst="rect">
@@ -20599,7 +20600,7 @@
         <p:spPr>
           <a:xfrm>
             <a:off x="8174736" y="2240280"/>
-            <a:ext cx="3749039" cy="3931920"/>
+            <a:ext cx="3749039" cy="3291840"/>
           </a:xfrm>
           <a:prstGeom prst="rect">
             <a:avLst/>
@@ -21083,7 +21084,7 @@
                   <a:srgbClr val="444444"/>
                 </a:solidFill>
               </a:rPr>
-              <a:t>96% co-billing rate — near-universal</a:t>
+              <a:t>96% co-billing rate - near-universal</a:t>
             </a:r>
           </a:p>
         </p:txBody>
@@ -21096,7 +21097,7 @@
         </p:nvSpPr>
         <p:spPr>
           <a:xfrm>
-            <a:off x="8311896" y="4828032"/>
+            <a:off x="8311896" y="4773168"/>
             <a:ext cx="3474720" cy="292608"/>
           </a:xfrm>
           <a:prstGeom prst="rect">
@@ -21130,7 +21131,7 @@
         </p:nvSpPr>
         <p:spPr>
           <a:xfrm>
-            <a:off x="274320" y="6080760"/>
+            <a:off x="274320" y="5760720"/>
             <a:ext cx="11612880" cy="347472"/>
           </a:xfrm>
           <a:prstGeom prst="rect">
@@ -21323,7 +21324,7 @@
                   <a:srgbClr val="FFFFFF"/>
                 </a:solidFill>
               </a:rPr>
-              <a:t>Pattern 3 — Identical Amounts Billed Repeatedly</a:t>
+              <a:t>Pattern 3 - Identical Amounts Billed Repeatedly</a:t>
             </a:r>
           </a:p>
         </p:txBody>
@@ -21477,7 +21478,7 @@
                   <a:srgbClr val="FFFFFF"/>
                 </a:solidFill>
               </a:rPr>
-              <a:t>Alan Assurance · Fraud Detection Case · 2024</a:t>
+              <a:t>Alan Assurance · Fraud Detection Case</a:t>
             </a:r>
           </a:p>
         </p:txBody>
@@ -21491,7 +21492,7 @@
         <p:spPr>
           <a:xfrm>
             <a:off x="274320" y="1417320"/>
-            <a:ext cx="11640312" cy="685800"/>
+            <a:ext cx="11640312" cy="822960"/>
           </a:xfrm>
           <a:prstGeom prst="rect">
             <a:avLst/>
@@ -21534,7 +21535,7 @@
         <p:spPr>
           <a:xfrm>
             <a:off x="274320" y="1417320"/>
-            <a:ext cx="109728" cy="685800"/>
+            <a:ext cx="109728" cy="822960"/>
           </a:xfrm>
           <a:prstGeom prst="rect">
             <a:avLst/>
@@ -21611,7 +21612,7 @@
         <p:spPr>
           <a:xfrm>
             <a:off x="502920" y="1764792"/>
-            <a:ext cx="11064240" cy="292608"/>
+            <a:ext cx="11064240" cy="438912"/>
           </a:xfrm>
           <a:prstGeom prst="rect">
             <a:avLst/>
@@ -21644,8 +21645,8 @@
         </p:nvSpPr>
         <p:spPr>
           <a:xfrm>
-            <a:off x="274320" y="2212848"/>
-            <a:ext cx="5440680" cy="4005072"/>
+            <a:off x="274320" y="2377440"/>
+            <a:ext cx="5440680" cy="3794760"/>
           </a:xfrm>
           <a:prstGeom prst="rect">
             <a:avLst/>
@@ -21689,7 +21690,7 @@
         </p:nvSpPr>
         <p:spPr>
           <a:xfrm>
-            <a:off x="274320" y="2212848"/>
+            <a:off x="274320" y="2377440"/>
             <a:ext cx="5440680" cy="73152"/>
           </a:xfrm>
           <a:prstGeom prst="rect">
@@ -21732,7 +21733,7 @@
         </p:nvSpPr>
         <p:spPr>
           <a:xfrm>
-            <a:off x="457200" y="2359152"/>
+            <a:off x="457200" y="2523744"/>
             <a:ext cx="3291840" cy="347472"/>
           </a:xfrm>
           <a:prstGeom prst="rect">
@@ -21766,7 +21767,7 @@
         </p:nvSpPr>
         <p:spPr>
           <a:xfrm>
-            <a:off x="4160520" y="2313432"/>
+            <a:off x="4160520" y="2478024"/>
             <a:ext cx="1170432" cy="402336"/>
           </a:xfrm>
           <a:prstGeom prst="rect">
@@ -21809,7 +21810,7 @@
         </p:nvSpPr>
         <p:spPr>
           <a:xfrm>
-            <a:off x="4160520" y="2313432"/>
+            <a:off x="4160520" y="2478024"/>
             <a:ext cx="1170432" cy="402336"/>
           </a:xfrm>
           <a:prstGeom prst="rect">
@@ -21843,7 +21844,7 @@
         </p:nvSpPr>
         <p:spPr>
           <a:xfrm>
-            <a:off x="457200" y="2779776"/>
+            <a:off x="457200" y="2944368"/>
             <a:ext cx="1691640" cy="347472"/>
           </a:xfrm>
           <a:prstGeom prst="rect">
@@ -21886,7 +21887,7 @@
         </p:nvSpPr>
         <p:spPr>
           <a:xfrm>
-            <a:off x="457200" y="2779776"/>
+            <a:off x="457200" y="2944368"/>
             <a:ext cx="1691640" cy="347472"/>
           </a:xfrm>
           <a:prstGeom prst="rect">
@@ -21920,7 +21921,7 @@
         </p:nvSpPr>
         <p:spPr>
           <a:xfrm>
-            <a:off x="457200" y="3246120"/>
+            <a:off x="457200" y="3401568"/>
             <a:ext cx="5029200" cy="292608"/>
           </a:xfrm>
           <a:prstGeom prst="rect">
@@ -21954,7 +21955,7 @@
         </p:nvSpPr>
         <p:spPr>
           <a:xfrm>
-            <a:off x="457200" y="3566160"/>
+            <a:off x="457200" y="3721608"/>
             <a:ext cx="5074920" cy="320040"/>
           </a:xfrm>
           <a:prstGeom prst="rect">
@@ -21997,7 +21998,7 @@
         </p:nvSpPr>
         <p:spPr>
           <a:xfrm>
-            <a:off x="548640" y="3584448"/>
+            <a:off x="548640" y="3739896"/>
             <a:ext cx="1371600" cy="246888"/>
           </a:xfrm>
           <a:prstGeom prst="rect">
@@ -22031,7 +22032,7 @@
         </p:nvSpPr>
         <p:spPr>
           <a:xfrm>
-            <a:off x="2011680" y="3584448"/>
+            <a:off x="2011680" y="3739896"/>
             <a:ext cx="1371600" cy="246888"/>
           </a:xfrm>
           <a:prstGeom prst="rect">
@@ -22065,7 +22066,7 @@
         </p:nvSpPr>
         <p:spPr>
           <a:xfrm>
-            <a:off x="3474720" y="3584448"/>
+            <a:off x="3474720" y="3739896"/>
             <a:ext cx="1371600" cy="246888"/>
           </a:xfrm>
           <a:prstGeom prst="rect">
@@ -22099,7 +22100,7 @@
         </p:nvSpPr>
         <p:spPr>
           <a:xfrm>
-            <a:off x="457200" y="3913632"/>
+            <a:off x="457200" y="4069080"/>
             <a:ext cx="5074920" cy="329184"/>
           </a:xfrm>
           <a:prstGeom prst="rect">
@@ -22142,7 +22143,7 @@
         </p:nvSpPr>
         <p:spPr>
           <a:xfrm>
-            <a:off x="566928" y="3931920"/>
+            <a:off x="566928" y="4087368"/>
             <a:ext cx="1371600" cy="237744"/>
           </a:xfrm>
           <a:prstGeom prst="rect">
@@ -22176,7 +22177,7 @@
         </p:nvSpPr>
         <p:spPr>
           <a:xfrm>
-            <a:off x="2029968" y="3931920"/>
+            <a:off x="2029968" y="4087368"/>
             <a:ext cx="1371600" cy="237744"/>
           </a:xfrm>
           <a:prstGeom prst="rect">
@@ -22210,7 +22211,7 @@
         </p:nvSpPr>
         <p:spPr>
           <a:xfrm>
-            <a:off x="3493008" y="3931920"/>
+            <a:off x="3493008" y="4087368"/>
             <a:ext cx="1920240" cy="237744"/>
           </a:xfrm>
           <a:prstGeom prst="rect">
@@ -22244,7 +22245,7 @@
         </p:nvSpPr>
         <p:spPr>
           <a:xfrm>
-            <a:off x="457200" y="4261104"/>
+            <a:off x="457200" y="4416552"/>
             <a:ext cx="5074920" cy="329184"/>
           </a:xfrm>
           <a:prstGeom prst="rect">
@@ -22287,7 +22288,7 @@
         </p:nvSpPr>
         <p:spPr>
           <a:xfrm>
-            <a:off x="566928" y="4279392"/>
+            <a:off x="566928" y="4434840"/>
             <a:ext cx="1371600" cy="237744"/>
           </a:xfrm>
           <a:prstGeom prst="rect">
@@ -22321,7 +22322,7 @@
         </p:nvSpPr>
         <p:spPr>
           <a:xfrm>
-            <a:off x="2029968" y="4279392"/>
+            <a:off x="2029968" y="4434840"/>
             <a:ext cx="1371600" cy="237744"/>
           </a:xfrm>
           <a:prstGeom prst="rect">
@@ -22355,7 +22356,7 @@
         </p:nvSpPr>
         <p:spPr>
           <a:xfrm>
-            <a:off x="3493008" y="4279392"/>
+            <a:off x="3493008" y="4434840"/>
             <a:ext cx="1920240" cy="237744"/>
           </a:xfrm>
           <a:prstGeom prst="rect">
@@ -22389,7 +22390,7 @@
         </p:nvSpPr>
         <p:spPr>
           <a:xfrm>
-            <a:off x="457200" y="4608576"/>
+            <a:off x="457200" y="4764024"/>
             <a:ext cx="5074920" cy="329184"/>
           </a:xfrm>
           <a:prstGeom prst="rect">
@@ -22432,7 +22433,7 @@
         </p:nvSpPr>
         <p:spPr>
           <a:xfrm>
-            <a:off x="566928" y="4626864"/>
+            <a:off x="566928" y="4782312"/>
             <a:ext cx="1371600" cy="237744"/>
           </a:xfrm>
           <a:prstGeom prst="rect">
@@ -22466,7 +22467,7 @@
         </p:nvSpPr>
         <p:spPr>
           <a:xfrm>
-            <a:off x="2029968" y="4626864"/>
+            <a:off x="2029968" y="4782312"/>
             <a:ext cx="1371600" cy="237744"/>
           </a:xfrm>
           <a:prstGeom prst="rect">
@@ -22500,7 +22501,7 @@
         </p:nvSpPr>
         <p:spPr>
           <a:xfrm>
-            <a:off x="3493008" y="4626864"/>
+            <a:off x="3493008" y="4782312"/>
             <a:ext cx="1920240" cy="237744"/>
           </a:xfrm>
           <a:prstGeom prst="rect">
@@ -22534,7 +22535,7 @@
         </p:nvSpPr>
         <p:spPr>
           <a:xfrm>
-            <a:off x="457200" y="5029200"/>
+            <a:off x="457200" y="5166360"/>
             <a:ext cx="5029200" cy="292608"/>
           </a:xfrm>
           <a:prstGeom prst="rect">
@@ -22568,8 +22569,8 @@
         </p:nvSpPr>
         <p:spPr>
           <a:xfrm>
-            <a:off x="6080760" y="2212848"/>
-            <a:ext cx="5806440" cy="4005072"/>
+            <a:off x="6080760" y="2377440"/>
+            <a:ext cx="5806440" cy="3794760"/>
           </a:xfrm>
           <a:prstGeom prst="rect">
             <a:avLst/>
@@ -22613,7 +22614,7 @@
         </p:nvSpPr>
         <p:spPr>
           <a:xfrm>
-            <a:off x="6080760" y="2212848"/>
+            <a:off x="6080760" y="2377440"/>
             <a:ext cx="5806440" cy="73152"/>
           </a:xfrm>
           <a:prstGeom prst="rect">
@@ -22656,7 +22657,7 @@
         </p:nvSpPr>
         <p:spPr>
           <a:xfrm>
-            <a:off x="6263640" y="2359152"/>
+            <a:off x="6263640" y="2523744"/>
             <a:ext cx="3657600" cy="347472"/>
           </a:xfrm>
           <a:prstGeom prst="rect">
@@ -22690,7 +22691,7 @@
         </p:nvSpPr>
         <p:spPr>
           <a:xfrm>
-            <a:off x="10424160" y="2313432"/>
+            <a:off x="10424160" y="2478024"/>
             <a:ext cx="1170432" cy="402336"/>
           </a:xfrm>
           <a:prstGeom prst="rect">
@@ -22733,7 +22734,7 @@
         </p:nvSpPr>
         <p:spPr>
           <a:xfrm>
-            <a:off x="10424160" y="2313432"/>
+            <a:off x="10424160" y="2478024"/>
             <a:ext cx="1170432" cy="402336"/>
           </a:xfrm>
           <a:prstGeom prst="rect">
@@ -22767,7 +22768,7 @@
         </p:nvSpPr>
         <p:spPr>
           <a:xfrm>
-            <a:off x="6263640" y="2779776"/>
+            <a:off x="6263640" y="2944368"/>
             <a:ext cx="1691640" cy="347472"/>
           </a:xfrm>
           <a:prstGeom prst="rect">
@@ -22810,7 +22811,7 @@
         </p:nvSpPr>
         <p:spPr>
           <a:xfrm>
-            <a:off x="6263640" y="2779776"/>
+            <a:off x="6263640" y="2944368"/>
             <a:ext cx="1691640" cy="347472"/>
           </a:xfrm>
           <a:prstGeom prst="rect">
@@ -22844,7 +22845,7 @@
         </p:nvSpPr>
         <p:spPr>
           <a:xfrm>
-            <a:off x="6263640" y="3246120"/>
+            <a:off x="6263640" y="3401568"/>
             <a:ext cx="5486400" cy="365760"/>
           </a:xfrm>
           <a:prstGeom prst="rect">
@@ -22887,7 +22888,7 @@
         </p:nvSpPr>
         <p:spPr>
           <a:xfrm>
-            <a:off x="6355080" y="3273552"/>
+            <a:off x="6355080" y="3429000"/>
             <a:ext cx="5303520" cy="292608"/>
           </a:xfrm>
           <a:prstGeom prst="rect">
@@ -22921,8 +22922,8 @@
         </p:nvSpPr>
         <p:spPr>
           <a:xfrm>
-            <a:off x="6263640" y="3657600"/>
-            <a:ext cx="5486400" cy="502920"/>
+            <a:off x="6263640" y="3822191"/>
+            <a:ext cx="5486400" cy="475488"/>
           </a:xfrm>
           <a:prstGeom prst="rect">
             <a:avLst/>
@@ -22964,8 +22965,8 @@
         </p:nvSpPr>
         <p:spPr>
           <a:xfrm>
-            <a:off x="6400800" y="3685032"/>
-            <a:ext cx="2011680" cy="292608"/>
+            <a:off x="6400800" y="3849624"/>
+            <a:ext cx="2011680" cy="274320"/>
           </a:xfrm>
           <a:prstGeom prst="rect">
             <a:avLst/>
@@ -22998,8 +22999,8 @@
         </p:nvSpPr>
         <p:spPr>
           <a:xfrm>
-            <a:off x="8503920" y="3685032"/>
-            <a:ext cx="3108960" cy="411480"/>
+            <a:off x="8503920" y="3849624"/>
+            <a:ext cx="3108960" cy="384048"/>
           </a:xfrm>
           <a:prstGeom prst="rect">
             <a:avLst/>
@@ -23032,8 +23033,8 @@
         </p:nvSpPr>
         <p:spPr>
           <a:xfrm>
-            <a:off x="6263640" y="4224528"/>
-            <a:ext cx="5486400" cy="502920"/>
+            <a:off x="6263640" y="4352544"/>
+            <a:ext cx="5486400" cy="475488"/>
           </a:xfrm>
           <a:prstGeom prst="rect">
             <a:avLst/>
@@ -23075,8 +23076,8 @@
         </p:nvSpPr>
         <p:spPr>
           <a:xfrm>
-            <a:off x="6400800" y="4251960"/>
-            <a:ext cx="2011680" cy="292608"/>
+            <a:off x="6400800" y="4379976"/>
+            <a:ext cx="2011680" cy="274320"/>
           </a:xfrm>
           <a:prstGeom prst="rect">
             <a:avLst/>
@@ -23109,8 +23110,8 @@
         </p:nvSpPr>
         <p:spPr>
           <a:xfrm>
-            <a:off x="8503920" y="4251960"/>
-            <a:ext cx="3108960" cy="411480"/>
+            <a:off x="8503920" y="4379976"/>
+            <a:ext cx="3108960" cy="384048"/>
           </a:xfrm>
           <a:prstGeom prst="rect">
             <a:avLst/>
@@ -23143,8 +23144,8 @@
         </p:nvSpPr>
         <p:spPr>
           <a:xfrm>
-            <a:off x="6263640" y="4791456"/>
-            <a:ext cx="5486400" cy="502920"/>
+            <a:off x="6263640" y="4882896"/>
+            <a:ext cx="5486400" cy="475488"/>
           </a:xfrm>
           <a:prstGeom prst="rect">
             <a:avLst/>
@@ -23186,8 +23187,8 @@
         </p:nvSpPr>
         <p:spPr>
           <a:xfrm>
-            <a:off x="6400800" y="4818888"/>
-            <a:ext cx="2011680" cy="292608"/>
+            <a:off x="6400800" y="4910328"/>
+            <a:ext cx="2011680" cy="274320"/>
           </a:xfrm>
           <a:prstGeom prst="rect">
             <a:avLst/>
@@ -23220,8 +23221,8 @@
         </p:nvSpPr>
         <p:spPr>
           <a:xfrm>
-            <a:off x="8503920" y="4818888"/>
-            <a:ext cx="3108960" cy="411480"/>
+            <a:off x="8503920" y="4910328"/>
+            <a:ext cx="3108960" cy="384048"/>
           </a:xfrm>
           <a:prstGeom prst="rect">
             <a:avLst/>
@@ -23254,8 +23255,8 @@
         </p:nvSpPr>
         <p:spPr>
           <a:xfrm>
-            <a:off x="6263640" y="5394960"/>
-            <a:ext cx="5486400" cy="685800"/>
+            <a:off x="6263640" y="5468112"/>
+            <a:ext cx="5486400" cy="594360"/>
           </a:xfrm>
           <a:prstGeom prst="rect">
             <a:avLst/>
@@ -23297,8 +23298,8 @@
         </p:nvSpPr>
         <p:spPr>
           <a:xfrm>
-            <a:off x="6400800" y="5458968"/>
-            <a:ext cx="5212080" cy="548640"/>
+            <a:off x="6400800" y="5513832"/>
+            <a:ext cx="5212080" cy="502920"/>
           </a:xfrm>
           <a:prstGeom prst="rect">
             <a:avLst/>
@@ -23490,7 +23491,7 @@
                   <a:srgbClr val="FFFFFF"/>
                 </a:solidFill>
               </a:rPr>
-              <a:t>Pattern 4 — Systematic Round-Number Billing</a:t>
+              <a:t>Pattern 4 - Systematic Round-Number Billing</a:t>
             </a:r>
           </a:p>
         </p:txBody>
@@ -23644,7 +23645,7 @@
                   <a:srgbClr val="FFFFFF"/>
                 </a:solidFill>
               </a:rPr>
-              <a:t>Alan Assurance · Fraud Detection Case · 2024</a:t>
+              <a:t>Alan Assurance · Fraud Detection Case</a:t>
             </a:r>
           </a:p>
         </p:txBody>
@@ -23798,7 +23799,7 @@
                   <a:srgbClr val="444444"/>
                 </a:solidFill>
               </a:rPr>
-              <a:t>Real optical purchases — glasses frames, lenses, fitting — never add up to a perfectly round number. Amounts like €349.91 or €127.50 reflect actual product pricing. When a provider bills €300.00, €600.00, €200.00 every single month with no variation in cents, it strongly suggests fabricated charges rather than genuine sales.</a:t>
+              <a:t>Real optical purchases - glasses frames, lenses, fitting - never add up to a perfectly round number. Amounts like €349.91 or €127.50 reflect actual product pricing. When a provider bills €300.00, €600.00, €200.00 every single month with no variation in cents, it strongly suggests fabricated charges rather than genuine sales.</a:t>
             </a:r>
           </a:p>
         </p:txBody>
@@ -23920,7 +23921,7 @@
                   <a:srgbClr val="1A2440"/>
                 </a:solidFill>
               </a:rPr>
-              <a:t>Runner Glasses — Contacts billing</a:t>
+              <a:t>Runner Glasses - Contacts billing</a:t>
             </a:r>
           </a:p>
         </p:txBody>
@@ -25134,7 +25135,7 @@
                   <a:srgbClr val="1A2440"/>
                 </a:solidFill>
               </a:rPr>
-              <a:t>Compare: Lunettes (glasses) — same provider</a:t>
+              <a:t>Compare: Lunettes (glasses) - same provider</a:t>
             </a:r>
           </a:p>
         </p:txBody>
@@ -25168,7 +25169,7 @@
                   <a:srgbClr val="444444"/>
                 </a:solidFill>
               </a:rPr>
-              <a:t>Glasses amounts look realistic — irregular cents, normal price variation</a:t>
+              <a:t>Glasses amounts look realistic - irregular cents, normal price variation</a:t>
             </a:r>
           </a:p>
         </p:txBody>
@@ -26115,7 +26116,7 @@
                   <a:srgbClr val="D62839"/>
                 </a:solidFill>
               </a:rPr>
-              <a:t>Same provider, same months — glasses have real prices, contacts are always round numbers. The contacts charges appear fabricated.</a:t>
+              <a:t>Same provider, same months - glasses have real prices, contacts are always round numbers. The contacts charges appear fabricated.</a:t>
             </a:r>
           </a:p>
         </p:txBody>
@@ -26407,7 +26408,7 @@
                   <a:srgbClr val="CCCCCC"/>
                 </a:solidFill>
               </a:rPr>
-              <a:t>Detection System Design</a:t>
+              <a:t>How would you identify if this trend could be related to fraud? What methods would you consider to investigate and potentially recover any misappropriated funds?</a:t>
             </a:r>
           </a:p>
         </p:txBody>
@@ -26441,8 +26442,8 @@
                   <a:srgbClr val="FFFFFF"/>
                 </a:solidFill>
               </a:rPr>
-              <a:t>How did we turn these
-patterns into a system?</a:t>
+              <a:t>Automated scoring +
+payment suspension</a:t>
             </a:r>
           </a:p>
         </p:txBody>
@@ -26476,7 +26477,7 @@
                   <a:srgbClr val="FFFFFF"/>
                 </a:solidFill>
               </a:rPr>
-              <a:t>4 automated detection rules · risk scoring pipeline · instant routing of every provider</a:t>
+              <a:t>4 detection rules applied to every provider · risk score routes each case · payments held where evidence is strong</a:t>
             </a:r>
           </a:p>
         </p:txBody>

--- a/fraud_ops_presentation_updated.pptx
+++ b/fraud_ops_presentation_updated.pptx
@@ -3294,7 +3294,7 @@
                   <a:srgbClr val="FFFFFF"/>
                 </a:solidFill>
               </a:rPr>
-              <a:t>Ops Runner - Technical Case</a:t>
+              <a:t>Ops Runner: Technical Case</a:t>
             </a:r>
           </a:p>
         </p:txBody>
@@ -3362,7 +3362,7 @@
                   <a:srgbClr val="CCCCCC"/>
                 </a:solidFill>
               </a:rPr>
-              <a:t>Alan reimburses optical care claims submitted by opticians. This case asks: can I detect which providers are billing fraudulently - and build a system to catch it automatically?</a:t>
+              <a:t>Alan reimburses optical care claims submitted by opticians. This case asks: can I detect which providers are billing fraudulently and build a system to catch it automatically?</a:t>
             </a:r>
           </a:p>
         </p:txBody>
@@ -3568,7 +3568,7 @@
                   <a:srgbClr val="FFFFFF"/>
                 </a:solidFill>
               </a:rPr>
-              <a:t>The Detection Engine - 4 Rules, Automatically Applied to Every Provider</a:t>
+              <a:t>The Detection Engine: 4 Rules, Automatically Applied to Every Provider</a:t>
             </a:r>
           </a:p>
         </p:txBody>
@@ -3722,7 +3722,7 @@
                   <a:srgbClr val="FFFFFF"/>
                 </a:solidFill>
               </a:rPr>
-              <a:t>Alan Assurance · Fraud Detection Case</a:t>
+              <a:t>Alan · Fraud Detection Case</a:t>
             </a:r>
           </a:p>
         </p:txBody>
@@ -5448,7 +5448,7 @@
                   <a:srgbClr val="FFFFFF"/>
                 </a:solidFill>
               </a:rPr>
-              <a:t>No flags - approved automatically</a:t>
+              <a:t>No flags. Approved automatically.</a:t>
             </a:r>
           </a:p>
         </p:txBody>
@@ -5593,7 +5593,7 @@
                   <a:srgbClr val="FFFFFF"/>
                 </a:solidFill>
               </a:rPr>
-              <a:t>At least one signal - human reviews it</a:t>
+              <a:t>At least one signal. Human reviews it.</a:t>
             </a:r>
           </a:p>
         </p:txBody>
@@ -5738,7 +5738,7 @@
                   <a:srgbClr val="FFFFFF"/>
                 </a:solidFill>
               </a:rPr>
-              <a:t>Strong evidence - payments suspended</a:t>
+              <a:t>Strong evidence. Payments suspended.</a:t>
             </a:r>
           </a:p>
         </p:txBody>
@@ -5910,7 +5910,7 @@
                   <a:srgbClr val="FFFFFF"/>
                 </a:solidFill>
               </a:rPr>
-              <a:t>Immediate Action Required - Payments Held</a:t>
+              <a:t>Immediate Action Required: Payments Held</a:t>
             </a:r>
           </a:p>
         </p:txBody>
@@ -5987,7 +5987,7 @@
                   <a:srgbClr val="444444"/>
                 </a:solidFill>
               </a:rPr>
-              <a:t>5 providers automatically held - strong evidence across multiple independent fraud signals</a:t>
+              <a:t>5 providers automatically held. Strong evidence across multiple independent fraud signals.</a:t>
             </a:r>
           </a:p>
         </p:txBody>
@@ -6064,7 +6064,7 @@
                   <a:srgbClr val="FFFFFF"/>
                 </a:solidFill>
               </a:rPr>
-              <a:t>Alan Assurance · Fraud Detection Case</a:t>
+              <a:t>Alan · Fraud Detection Case</a:t>
             </a:r>
           </a:p>
         </p:txBody>
@@ -7106,7 +7106,7 @@
                   <a:srgbClr val="1A2440"/>
                 </a:solidFill>
               </a:rPr>
-              <a:t>Priority audit - highest confidence fraud case</a:t>
+              <a:t>Priority audit. Highest confidence fraud case.</a:t>
             </a:r>
           </a:p>
         </p:txBody>
@@ -7371,7 +7371,7 @@
                   <a:srgbClr val="444444"/>
                 </a:solidFill>
               </a:rPr>
-              <a:t>94% co-billing rate - highest in dataset. 2 spike months.</a:t>
+              <a:t>94% co-billing rate, highest in dataset. 2 spike months.</a:t>
             </a:r>
           </a:p>
         </p:txBody>
@@ -8030,7 +8030,7 @@
                   <a:srgbClr val="FFFFFF"/>
                 </a:solidFill>
               </a:rPr>
-              <a:t>Alan Assurance · Fraud Detection Case</a:t>
+              <a:t>Alan · Fraud Detection Case</a:t>
             </a:r>
           </a:p>
         </p:txBody>
@@ -8107,7 +8107,7 @@
                   <a:srgbClr val="FFFFFF"/>
                 </a:solidFill>
               </a:rPr>
-              <a:t>Flagged for manual review  -  score below auto-hold threshold but patterns present</a:t>
+              <a:t>Flagged for manual review. Score below auto-hold threshold but patterns present.</a:t>
             </a:r>
           </a:p>
         </p:txBody>
@@ -8902,7 +8902,7 @@
                   <a:srgbClr val="444444"/>
                 </a:solidFill>
               </a:rPr>
-              <a:t>Low score but whole-euro billing pattern present. Monitor - flag for review if pattern continues next cycle.</a:t>
+              <a:t>Low score but whole-euro billing pattern present. Monitor and flag for review if pattern continues next cycle.</a:t>
             </a:r>
           </a:p>
         </p:txBody>
@@ -8979,7 +8979,7 @@
                   <a:srgbClr val="FFFFFF"/>
                 </a:solidFill>
               </a:rPr>
-              <a:t>Cleared - no suspicious patterns detected</a:t>
+              <a:t>Cleared: no suspicious patterns detected</a:t>
             </a:r>
           </a:p>
         </p:txBody>
@@ -9920,7 +9920,7 @@
                   <a:srgbClr val="CCCCCC"/>
                 </a:solidFill>
               </a:rPr>
-              <a:t>Beyond the analysis -</a:t>
+              <a:t>Beyond the analysis:</a:t>
             </a:r>
           </a:p>
         </p:txBody>
@@ -10605,7 +10605,7 @@
                   <a:srgbClr val="CCCCCC"/>
                 </a:solidFill>
               </a:rPr>
-              <a:t>Submit a decision on any provider - approve, escalate, or blacklist</a:t>
+              <a:t>Submit a decision on any provider: approve, escalate, or blacklist</a:t>
             </a:r>
           </a:p>
         </p:txBody>
@@ -11293,7 +11293,7 @@
                   <a:srgbClr val="444444"/>
                 </a:solidFill>
               </a:rPr>
-              <a:t>Current system catches clear patterns - here's how to make it more precise and harder to game</a:t>
+              <a:t>Current system catches clear patterns. Here is how to make it more precise and harder to game.</a:t>
             </a:r>
           </a:p>
         </p:txBody>
@@ -11370,7 +11370,7 @@
                   <a:srgbClr val="FFFFFF"/>
                 </a:solidFill>
               </a:rPr>
-              <a:t>Alan Assurance · Fraud Detection Case</a:t>
+              <a:t>Alan · Fraud Detection Case</a:t>
             </a:r>
           </a:p>
         </p:txBody>
@@ -11560,7 +11560,7 @@
                   <a:srgbClr val="444444"/>
                 </a:solidFill>
               </a:rPr>
-              <a:t>Currently co-billing is detected at the provider level - it's not possible to confirm it's the same patient being billed for both glasses and contacts. With member IDs per claim, I could detect the exact fraud scenario: one patient billed for both products in the same month.</a:t>
+              <a:t>Currently co-billing is detected at the provider level. It is not possible to confirm it's the same patient being billed for both glasses and contacts. With member IDs per claim, I could detect the exact fraud scenario: one patient billed for both products in the same month.</a:t>
             </a:r>
           </a:p>
         </p:txBody>
@@ -12361,7 +12361,7 @@
                   <a:srgbClr val="444444"/>
                 </a:solidFill>
               </a:rPr>
-              <a:t>The current 4-rule system uses fixed scores (+20, +25, +15, +15) that were chosen manually. A supervised ML model trained on confirmed fraud outcomes would learn which combinations of signals are most predictive - and weight them accordingly.</a:t>
+              <a:t>The current 4-rule system uses fixed scores (+20, +25, +15, +15) that were chosen manually. A supervised ML model trained on confirmed fraud outcomes would learn which combinations of signals are most predictive and weight them accordingly.</a:t>
             </a:r>
           </a:p>
         </p:txBody>
@@ -12533,7 +12533,7 @@
                   <a:srgbClr val="FFFFFF"/>
                 </a:solidFill>
               </a:rPr>
-              <a:t>The Dataset - What We're Working With</a:t>
+              <a:t>The Dataset: What We're Working With</a:t>
             </a:r>
           </a:p>
         </p:txBody>
@@ -12610,7 +12610,7 @@
                   <a:srgbClr val="FFFFFF"/>
                 </a:solidFill>
               </a:rPr>
-              <a:t>Alan Assurance · Fraud Detection Case</a:t>
+              <a:t>Alan · Fraud Detection Case</a:t>
             </a:r>
           </a:p>
         </p:txBody>
@@ -14373,7 +14373,7 @@
                   <a:srgbClr val="444444"/>
                 </a:solidFill>
               </a:rPr>
-              <a:t>Some opticians may be billing for services never provided - or inflating bills. I looked for systematic patterns that distinguish fraud from normal variation.</a:t>
+              <a:t>Some opticians may be billing for services never provided, or inflating bills. I looked for systematic patterns that distinguish fraud from normal variation.</a:t>
             </a:r>
           </a:p>
         </p:txBody>
@@ -14887,7 +14887,7 @@
                   <a:srgbClr val="FFFFFF"/>
                 </a:solidFill>
               </a:rPr>
-              <a:t>Yes - 4 fraud patterns
+              <a:t>Yes: 4 fraud patterns
 across 8 providers</a:t>
             </a:r>
           </a:p>
@@ -15094,7 +15094,7 @@
                   <a:srgbClr val="FFFFFF"/>
                 </a:solidFill>
               </a:rPr>
-              <a:t>Results - Which Providers Look Suspicious?</a:t>
+              <a:t>Results: Which Providers Look Suspicious?</a:t>
             </a:r>
           </a:p>
         </p:txBody>
@@ -15248,7 +15248,7 @@
                   <a:srgbClr val="FFFFFF"/>
                 </a:solidFill>
               </a:rPr>
-              <a:t>Alan Assurance · Fraud Detection Case</a:t>
+              <a:t>Alan · Fraud Detection Case</a:t>
             </a:r>
           </a:p>
         </p:txBody>
@@ -17824,7 +17824,7 @@
                   <a:srgbClr val="FFFFFF"/>
                 </a:solidFill>
               </a:rPr>
-              <a:t>Pattern 1 - Glasses and Contacts Always Billed Together</a:t>
+              <a:t>Pattern 1: Glasses and Contacts Always Billed Together</a:t>
             </a:r>
           </a:p>
         </p:txBody>
@@ -17978,7 +17978,7 @@
                   <a:srgbClr val="FFFFFF"/>
                 </a:solidFill>
               </a:rPr>
-              <a:t>Alan Assurance · Fraud Detection Case</a:t>
+              <a:t>Alan · Fraud Detection Case</a:t>
             </a:r>
           </a:p>
         </p:txBody>
@@ -18132,7 +18132,7 @@
                   <a:srgbClr val="444444"/>
                 </a:solidFill>
               </a:rPr>
-              <a:t>In reality, a single patient can't wear both glasses and contact lenses at the same time. An optician billing for both products every single month is likely adding fictitious contact-lens charges to genuine glasses sales - the patient pays less out-of-pocket while Alan absorbs the extra cost.</a:t>
+              <a:t>In reality, a single patient can't wear both glasses and contact lenses at the same time. An optician billing for both products every single month is likely adding fictitious contact-lens charges to genuine glasses sales. The patient pays less out-of-pocket while Alan absorbs the extra cost.</a:t>
             </a:r>
           </a:p>
         </p:txBody>
@@ -18931,7 +18931,7 @@
                   <a:srgbClr val="444444"/>
                 </a:solidFill>
               </a:rPr>
-              <a:t>Every single active month had both categories - 100% of the time</a:t>
+              <a:t>Every single active month had both categories (100% of the time)</a:t>
             </a:r>
           </a:p>
         </p:txBody>
@@ -19214,7 +19214,7 @@
                   <a:srgbClr val="FFFFFF"/>
                 </a:solidFill>
               </a:rPr>
-              <a:t>Pattern 2 - Sudden Unexplained Billing Spikes</a:t>
+              <a:t>Pattern 2: Sudden Unexplained Billing Spikes</a:t>
             </a:r>
           </a:p>
         </p:txBody>
@@ -19368,7 +19368,7 @@
                   <a:srgbClr val="FFFFFF"/>
                 </a:solidFill>
               </a:rPr>
-              <a:t>Alan Assurance · Fraud Detection Case</a:t>
+              <a:t>Alan · Fraud Detection Case</a:t>
             </a:r>
           </a:p>
         </p:txBody>
@@ -19522,7 +19522,7 @@
                   <a:srgbClr val="444444"/>
                 </a:solidFill>
               </a:rPr>
-              <a:t>A sudden spike well above a provider's own normal billing level can indicate a burst of fictitious or inflated claims - especially when it coincides with the co-billing pattern above.</a:t>
+              <a:t>A sudden spike well above a provider's own normal billing level can indicate a burst of fictitious or inflated claims, especially when it coincides with the co-billing pattern above.</a:t>
             </a:r>
           </a:p>
         </p:txBody>
@@ -20552,7 +20552,7 @@
                   <a:srgbClr val="444444"/>
                 </a:solidFill>
               </a:rPr>
-              <a:t>94% co-billing rate - highest in dataset</a:t>
+              <a:t>94% co-billing rate, highest in dataset</a:t>
             </a:r>
           </a:p>
         </p:txBody>
@@ -21084,7 +21084,7 @@
                   <a:srgbClr val="444444"/>
                 </a:solidFill>
               </a:rPr>
-              <a:t>96% co-billing rate - near-universal</a:t>
+              <a:t>96% co-billing rate, near-universal</a:t>
             </a:r>
           </a:p>
         </p:txBody>
@@ -21324,7 +21324,7 @@
                   <a:srgbClr val="FFFFFF"/>
                 </a:solidFill>
               </a:rPr>
-              <a:t>Pattern 3 - Identical Amounts Billed Repeatedly</a:t>
+              <a:t>Pattern 3: Identical Amounts Billed Repeatedly</a:t>
             </a:r>
           </a:p>
         </p:txBody>
@@ -21478,7 +21478,7 @@
                   <a:srgbClr val="FFFFFF"/>
                 </a:solidFill>
               </a:rPr>
-              <a:t>Alan Assurance · Fraud Detection Case</a:t>
+              <a:t>Alan · Fraud Detection Case</a:t>
             </a:r>
           </a:p>
         </p:txBody>
@@ -23491,7 +23491,7 @@
                   <a:srgbClr val="FFFFFF"/>
                 </a:solidFill>
               </a:rPr>
-              <a:t>Pattern 4 - Systematic Round-Number Billing</a:t>
+              <a:t>Pattern 4: Systematic Round Number Billing</a:t>
             </a:r>
           </a:p>
         </p:txBody>
@@ -23645,7 +23645,7 @@
                   <a:srgbClr val="FFFFFF"/>
                 </a:solidFill>
               </a:rPr>
-              <a:t>Alan Assurance · Fraud Detection Case</a:t>
+              <a:t>Alan · Fraud Detection Case</a:t>
             </a:r>
           </a:p>
         </p:txBody>
@@ -23799,7 +23799,7 @@
                   <a:srgbClr val="444444"/>
                 </a:solidFill>
               </a:rPr>
-              <a:t>Real optical purchases - glasses frames, lenses, fitting - never add up to a perfectly round number. Amounts like €349.91 or €127.50 reflect actual product pricing. When a provider bills €300.00, €600.00, €200.00 every single month with no variation in cents, it strongly suggests fabricated charges rather than genuine sales.</a:t>
+              <a:t>Real optical purchases (glasses frames, lenses, fitting) never add up to a perfectly round number. Amounts like €349.91 or €127.50 reflect actual product pricing. When a provider bills €300.00, €600.00, €200.00 every single month with no variation in cents, it strongly suggests fabricated charges rather than genuine sales.</a:t>
             </a:r>
           </a:p>
         </p:txBody>
@@ -23921,7 +23921,7 @@
                   <a:srgbClr val="1A2440"/>
                 </a:solidFill>
               </a:rPr>
-              <a:t>Runner Glasses - Contacts billing</a:t>
+              <a:t>Runner Glasses: Contacts billing</a:t>
             </a:r>
           </a:p>
         </p:txBody>
@@ -25135,7 +25135,7 @@
                   <a:srgbClr val="1A2440"/>
                 </a:solidFill>
               </a:rPr>
-              <a:t>Compare: Lunettes (glasses) - same provider</a:t>
+              <a:t>Compare: Lunettes (glasses), same provider</a:t>
             </a:r>
           </a:p>
         </p:txBody>
@@ -25169,7 +25169,7 @@
                   <a:srgbClr val="444444"/>
                 </a:solidFill>
               </a:rPr>
-              <a:t>Glasses amounts look realistic - irregular cents, normal price variation</a:t>
+              <a:t>Glasses amounts look realistic: irregular cents, normal price variation</a:t>
             </a:r>
           </a:p>
         </p:txBody>
@@ -26116,7 +26116,7 @@
                   <a:srgbClr val="D62839"/>
                 </a:solidFill>
               </a:rPr>
-              <a:t>Same provider, same months - glasses have real prices, contacts are always round numbers. The contacts charges appear fabricated.</a:t>
+              <a:t>Same provider, same months. Glasses have real prices, contacts are always round numbers. The contacts charges appear fabricated.</a:t>
             </a:r>
           </a:p>
         </p:txBody>
